--- a/disciplina-01-estado-governo-mercado/materiais/02_Unidade_2_Pendulo_e_Matriz_Liberal.pptx
+++ b/disciplina-01-estado-governo-mercado/materiais/02_Unidade_2_Pendulo_e_Matriz_Liberal.pptx
@@ -1585,8 +1585,8 @@
         </p:nvSpPr>
         <p:spPr>
           <a:xfrm>
-            <a:off x="1188720" y="1828800"/>
-            <a:ext cx="7223760" cy="1463040"/>
+            <a:off x="1188720" y="1810512"/>
+            <a:ext cx="7223760" cy="365760"/>
           </a:xfrm>
           <a:prstGeom prst="rect">
             <a:avLst/>
@@ -1605,37 +1605,17 @@
               <a:buNone/>
             </a:pPr>
             <a:r>
-              <a:rPr lang="en-US" sz="4600" b="1" dirty="0">
-                <a:solidFill>
-                  <a:srgbClr val="13294B"/>
-                </a:solidFill>
-                <a:latin typeface="Calibri" pitchFamily="34" charset="0"/>
-                <a:ea typeface="Calibri" pitchFamily="34" charset="-122"/>
-                <a:cs typeface="Calibri" pitchFamily="34" charset="-120"/>
-              </a:rPr>
-              <a:t>Especialização em</a:t>
-            </a:r>
-            <a:endParaRPr lang="en-US" sz="4600" dirty="0"/>
-          </a:p>
-          <a:p>
-            <a:pPr algn="l" indent="0" marL="0">
-              <a:lnSpc>
-                <a:spcPct val="100000"/>
-              </a:lnSpc>
-              <a:buNone/>
-            </a:pPr>
-            <a:r>
-              <a:rPr lang="en-US" sz="4600" b="1" dirty="0">
-                <a:solidFill>
-                  <a:srgbClr val="13294B"/>
-                </a:solidFill>
-                <a:latin typeface="Calibri" pitchFamily="34" charset="0"/>
-                <a:ea typeface="Calibri" pitchFamily="34" charset="-122"/>
-                <a:cs typeface="Calibri" pitchFamily="34" charset="-120"/>
-              </a:rPr>
-              <a:t>Gestão Pública</a:t>
-            </a:r>
-            <a:endParaRPr lang="en-US" sz="4600" dirty="0"/>
+              <a:rPr lang="en-US" sz="2000" b="1" dirty="0">
+                <a:solidFill>
+                  <a:srgbClr val="2A8C85"/>
+                </a:solidFill>
+                <a:latin typeface="Calibri" pitchFamily="34" charset="0"/>
+                <a:ea typeface="Calibri" pitchFamily="34" charset="-122"/>
+                <a:cs typeface="Calibri" pitchFamily="34" charset="-120"/>
+              </a:rPr>
+              <a:t>Especialização em Gestão Pública</a:t>
+            </a:r>
+            <a:endParaRPr lang="en-US" sz="2000" dirty="0"/>
           </a:p>
         </p:txBody>
       </p:sp>
@@ -1647,8 +1627,92 @@
         </p:nvSpPr>
         <p:spPr>
           <a:xfrm>
-            <a:off x="1243584" y="3456432"/>
-            <a:ext cx="3017520" cy="420624"/>
+            <a:off x="1188720" y="2157984"/>
+            <a:ext cx="7223760" cy="786384"/>
+          </a:xfrm>
+          <a:prstGeom prst="rect">
+            <a:avLst/>
+          </a:prstGeom>
+          <a:noFill/>
+          <a:ln/>
+        </p:spPr>
+        <p:txBody>
+          <a:bodyPr wrap="square" lIns="0" tIns="0" rIns="0" bIns="0" rtlCol="0" anchor="ctr"/>
+          <a:lstStyle/>
+          <a:p>
+            <a:pPr algn="l" indent="0" marL="0">
+              <a:lnSpc>
+                <a:spcPct val="100000"/>
+              </a:lnSpc>
+              <a:buNone/>
+            </a:pPr>
+            <a:r>
+              <a:rPr lang="en-US" sz="4800" b="1" dirty="0">
+                <a:solidFill>
+                  <a:srgbClr val="13294B"/>
+                </a:solidFill>
+                <a:latin typeface="Calibri" pitchFamily="34" charset="0"/>
+                <a:ea typeface="Calibri" pitchFamily="34" charset="-122"/>
+                <a:cs typeface="Calibri" pitchFamily="34" charset="-120"/>
+              </a:rPr>
+              <a:t>Estado, Governo e Mercado</a:t>
+            </a:r>
+            <a:endParaRPr lang="en-US" sz="4800" dirty="0"/>
+          </a:p>
+        </p:txBody>
+      </p:sp>
+      <p:sp>
+        <p:nvSpPr>
+          <p:cNvPr id="7" name="Text 2"/>
+          <p:cNvSpPr txBox="1"/>
+          <p:nvPr/>
+        </p:nvSpPr>
+        <p:spPr>
+          <a:xfrm>
+            <a:off x="1188720" y="2926080"/>
+            <a:ext cx="7223760" cy="384048"/>
+          </a:xfrm>
+          <a:prstGeom prst="rect">
+            <a:avLst/>
+          </a:prstGeom>
+          <a:noFill/>
+          <a:ln/>
+        </p:spPr>
+        <p:txBody>
+          <a:bodyPr wrap="square" lIns="0" tIns="0" rIns="0" bIns="0" rtlCol="0" anchor="ctr"/>
+          <a:lstStyle/>
+          <a:p>
+            <a:pPr algn="l" indent="0" marL="0">
+              <a:lnSpc>
+                <a:spcPct val="100000"/>
+              </a:lnSpc>
+              <a:buNone/>
+            </a:pPr>
+            <a:r>
+              <a:rPr lang="en-US" sz="1900" dirty="0">
+                <a:solidFill>
+                  <a:srgbClr val="1F2A37"/>
+                </a:solidFill>
+                <a:latin typeface="Calibri" pitchFamily="34" charset="0"/>
+                <a:ea typeface="Calibri" pitchFamily="34" charset="-122"/>
+                <a:cs typeface="Calibri" pitchFamily="34" charset="-120"/>
+              </a:rPr>
+              <a:t>Unidade 2 · A dinâmica pendular e a matriz liberal</a:t>
+            </a:r>
+            <a:endParaRPr lang="en-US" sz="1900" dirty="0"/>
+          </a:p>
+        </p:txBody>
+      </p:sp>
+      <p:sp>
+        <p:nvSpPr>
+          <p:cNvPr id="8" name="Text 3"/>
+          <p:cNvSpPr txBox="1"/>
+          <p:nvPr/>
+        </p:nvSpPr>
+        <p:spPr>
+          <a:xfrm>
+            <a:off x="1243584" y="3474720"/>
+            <a:ext cx="4572000" cy="420624"/>
           </a:xfrm>
           <a:prstGeom prst="roundRect">
             <a:avLst>
@@ -1679,7 +1743,7 @@
                 <a:ea typeface="Calibri" pitchFamily="34" charset="-122"/>
                 <a:cs typeface="Calibri" pitchFamily="34" charset="-120"/>
               </a:rPr>
-              <a:t>DEAD · UAB · Turma 2026/2</a:t>
+              <a:t>DEAD · UAB · Turma 2026/2 · Prof. Dr. Cleiton Franco</a:t>
             </a:r>
             <a:endParaRPr lang="en-US" sz="1500" dirty="0"/>
           </a:p>
@@ -1760,7 +1824,7 @@
                 <a:ea typeface="Calibri" pitchFamily="34" charset="-122"/>
                 <a:cs typeface="Calibri" pitchFamily="34" charset="-120"/>
               </a:rPr>
-              <a:t>Unidade 2</a:t>
+              <a:t>Estado, Governo e Mercado</a:t>
             </a:r>
             <a:endParaRPr lang="en-US" sz="3200" dirty="0"/>
           </a:p>
@@ -1774,8 +1838,8 @@
         </p:nvSpPr>
         <p:spPr>
           <a:xfrm>
-            <a:off x="1920240" y="969264"/>
-            <a:ext cx="5303520" cy="402336"/>
+            <a:off x="1371600" y="969264"/>
+            <a:ext cx="6400800" cy="402336"/>
           </a:xfrm>
           <a:prstGeom prst="roundRect">
             <a:avLst>
@@ -1806,7 +1870,7 @@
                 <a:ea typeface="Calibri" pitchFamily="34" charset="-122"/>
                 <a:cs typeface="Calibri" pitchFamily="34" charset="-120"/>
               </a:rPr>
-              <a:t>A dinâmica pendular e a matriz liberal</a:t>
+              <a:t>Unidade 2 · A dinâmica pendular e a matriz liberal</a:t>
             </a:r>
             <a:endParaRPr lang="en-US" sz="1500" dirty="0"/>
           </a:p>
@@ -2611,6 +2675,48 @@
           </a:p>
         </p:txBody>
       </p:sp>
+      <p:sp>
+        <p:nvSpPr>
+          <p:cNvPr id="6" name="Text 3"/>
+          <p:cNvSpPr txBox="1"/>
+          <p:nvPr/>
+        </p:nvSpPr>
+        <p:spPr>
+          <a:xfrm>
+            <a:off x="4206240" y="36576"/>
+            <a:ext cx="4800600" cy="219456"/>
+          </a:xfrm>
+          <a:prstGeom prst="rect">
+            <a:avLst/>
+          </a:prstGeom>
+          <a:noFill/>
+          <a:ln/>
+        </p:spPr>
+        <p:txBody>
+          <a:bodyPr wrap="square" lIns="0" tIns="0" rIns="0" bIns="0" rtlCol="0" anchor="ctr"/>
+          <a:lstStyle/>
+          <a:p>
+            <a:pPr algn="r" indent="0" marL="0">
+              <a:lnSpc>
+                <a:spcPct val="100000"/>
+              </a:lnSpc>
+              <a:buNone/>
+            </a:pPr>
+            <a:r>
+              <a:rPr lang="en-US" sz="950" dirty="0">
+                <a:solidFill>
+                  <a:srgbClr val="5B6770"/>
+                </a:solidFill>
+                <a:latin typeface="Calibri" pitchFamily="34" charset="0"/>
+                <a:ea typeface="Calibri" pitchFamily="34" charset="-122"/>
+                <a:cs typeface="Calibri" pitchFamily="34" charset="-120"/>
+              </a:rPr>
+              <a:t>Estado, Governo e Mercado · Unidade 2</a:t>
+            </a:r>
+            <a:endParaRPr lang="en-US" sz="950" dirty="0"/>
+          </a:p>
+        </p:txBody>
+      </p:sp>
     </p:spTree>
   </p:cSld>
   <p:clrMapOvr>
@@ -3268,6 +3374,48 @@
           </a:p>
         </p:txBody>
       </p:sp>
+      <p:sp>
+        <p:nvSpPr>
+          <p:cNvPr id="9" name="Text 7"/>
+          <p:cNvSpPr txBox="1"/>
+          <p:nvPr/>
+        </p:nvSpPr>
+        <p:spPr>
+          <a:xfrm>
+            <a:off x="4206240" y="36576"/>
+            <a:ext cx="4800600" cy="219456"/>
+          </a:xfrm>
+          <a:prstGeom prst="rect">
+            <a:avLst/>
+          </a:prstGeom>
+          <a:noFill/>
+          <a:ln/>
+        </p:spPr>
+        <p:txBody>
+          <a:bodyPr wrap="square" lIns="0" tIns="0" rIns="0" bIns="0" rtlCol="0" anchor="ctr"/>
+          <a:lstStyle/>
+          <a:p>
+            <a:pPr algn="r" indent="0" marL="0">
+              <a:lnSpc>
+                <a:spcPct val="100000"/>
+              </a:lnSpc>
+              <a:buNone/>
+            </a:pPr>
+            <a:r>
+              <a:rPr lang="en-US" sz="950" dirty="0">
+                <a:solidFill>
+                  <a:srgbClr val="5B6770"/>
+                </a:solidFill>
+                <a:latin typeface="Calibri" pitchFamily="34" charset="0"/>
+                <a:ea typeface="Calibri" pitchFamily="34" charset="-122"/>
+                <a:cs typeface="Calibri" pitchFamily="34" charset="-120"/>
+              </a:rPr>
+              <a:t>Estado, Governo e Mercado · Unidade 2</a:t>
+            </a:r>
+            <a:endParaRPr lang="en-US" sz="950" dirty="0"/>
+          </a:p>
+        </p:txBody>
+      </p:sp>
     </p:spTree>
   </p:cSld>
   <p:clrMapOvr>
@@ -3628,6 +3776,48 @@
           </a:p>
         </p:txBody>
       </p:sp>
+      <p:sp>
+        <p:nvSpPr>
+          <p:cNvPr id="6" name="Text 4"/>
+          <p:cNvSpPr txBox="1"/>
+          <p:nvPr/>
+        </p:nvSpPr>
+        <p:spPr>
+          <a:xfrm>
+            <a:off x="4206240" y="36576"/>
+            <a:ext cx="4800600" cy="219456"/>
+          </a:xfrm>
+          <a:prstGeom prst="rect">
+            <a:avLst/>
+          </a:prstGeom>
+          <a:noFill/>
+          <a:ln/>
+        </p:spPr>
+        <p:txBody>
+          <a:bodyPr wrap="square" lIns="0" tIns="0" rIns="0" bIns="0" rtlCol="0" anchor="ctr"/>
+          <a:lstStyle/>
+          <a:p>
+            <a:pPr algn="r" indent="0" marL="0">
+              <a:lnSpc>
+                <a:spcPct val="100000"/>
+              </a:lnSpc>
+              <a:buNone/>
+            </a:pPr>
+            <a:r>
+              <a:rPr lang="en-US" sz="950" dirty="0">
+                <a:solidFill>
+                  <a:srgbClr val="5B6770"/>
+                </a:solidFill>
+                <a:latin typeface="Calibri" pitchFamily="34" charset="0"/>
+                <a:ea typeface="Calibri" pitchFamily="34" charset="-122"/>
+                <a:cs typeface="Calibri" pitchFamily="34" charset="-120"/>
+              </a:rPr>
+              <a:t>Estado, Governo e Mercado · Unidade 2</a:t>
+            </a:r>
+            <a:endParaRPr lang="en-US" sz="950" dirty="0"/>
+          </a:p>
+        </p:txBody>
+      </p:sp>
     </p:spTree>
   </p:cSld>
   <p:clrMapOvr>
@@ -4261,6 +4451,48 @@
           </a:p>
         </p:txBody>
       </p:sp>
+      <p:sp>
+        <p:nvSpPr>
+          <p:cNvPr id="19" name="Text 13"/>
+          <p:cNvSpPr txBox="1"/>
+          <p:nvPr/>
+        </p:nvSpPr>
+        <p:spPr>
+          <a:xfrm>
+            <a:off x="4206240" y="36576"/>
+            <a:ext cx="4800600" cy="219456"/>
+          </a:xfrm>
+          <a:prstGeom prst="rect">
+            <a:avLst/>
+          </a:prstGeom>
+          <a:noFill/>
+          <a:ln/>
+        </p:spPr>
+        <p:txBody>
+          <a:bodyPr wrap="square" lIns="0" tIns="0" rIns="0" bIns="0" rtlCol="0" anchor="ctr"/>
+          <a:lstStyle/>
+          <a:p>
+            <a:pPr algn="r" indent="0" marL="0">
+              <a:lnSpc>
+                <a:spcPct val="100000"/>
+              </a:lnSpc>
+              <a:buNone/>
+            </a:pPr>
+            <a:r>
+              <a:rPr lang="en-US" sz="950" dirty="0">
+                <a:solidFill>
+                  <a:srgbClr val="5B6770"/>
+                </a:solidFill>
+                <a:latin typeface="Calibri" pitchFamily="34" charset="0"/>
+                <a:ea typeface="Calibri" pitchFamily="34" charset="-122"/>
+                <a:cs typeface="Calibri" pitchFamily="34" charset="-120"/>
+              </a:rPr>
+              <a:t>Estado, Governo e Mercado · Unidade 2</a:t>
+            </a:r>
+            <a:endParaRPr lang="en-US" sz="950" dirty="0"/>
+          </a:p>
+        </p:txBody>
+      </p:sp>
     </p:spTree>
   </p:cSld>
   <p:clrMapOvr>
@@ -4910,6 +5142,48 @@
               <a:t>Laissez-faire, laissez-passer: o Estado “guarda-noturno”.</a:t>
             </a:r>
             <a:endParaRPr lang="en-US" sz="1700" dirty="0"/>
+          </a:p>
+        </p:txBody>
+      </p:sp>
+      <p:sp>
+        <p:nvSpPr>
+          <p:cNvPr id="17" name="Text 12"/>
+          <p:cNvSpPr txBox="1"/>
+          <p:nvPr/>
+        </p:nvSpPr>
+        <p:spPr>
+          <a:xfrm>
+            <a:off x="4206240" y="36576"/>
+            <a:ext cx="4800600" cy="219456"/>
+          </a:xfrm>
+          <a:prstGeom prst="rect">
+            <a:avLst/>
+          </a:prstGeom>
+          <a:noFill/>
+          <a:ln/>
+        </p:spPr>
+        <p:txBody>
+          <a:bodyPr wrap="square" lIns="0" tIns="0" rIns="0" bIns="0" rtlCol="0" anchor="ctr"/>
+          <a:lstStyle/>
+          <a:p>
+            <a:pPr algn="r" indent="0" marL="0">
+              <a:lnSpc>
+                <a:spcPct val="100000"/>
+              </a:lnSpc>
+              <a:buNone/>
+            </a:pPr>
+            <a:r>
+              <a:rPr lang="en-US" sz="950" dirty="0">
+                <a:solidFill>
+                  <a:srgbClr val="5B6770"/>
+                </a:solidFill>
+                <a:latin typeface="Calibri" pitchFamily="34" charset="0"/>
+                <a:ea typeface="Calibri" pitchFamily="34" charset="-122"/>
+                <a:cs typeface="Calibri" pitchFamily="34" charset="-120"/>
+              </a:rPr>
+              <a:t>Estado, Governo e Mercado · Unidade 2</a:t>
+            </a:r>
+            <a:endParaRPr lang="en-US" sz="950" dirty="0"/>
           </a:p>
         </p:txBody>
       </p:sp>
@@ -5802,6 +6076,48 @@
           </a:p>
         </p:txBody>
       </p:sp>
+      <p:sp>
+        <p:nvSpPr>
+          <p:cNvPr id="6" name="Text 3"/>
+          <p:cNvSpPr txBox="1"/>
+          <p:nvPr/>
+        </p:nvSpPr>
+        <p:spPr>
+          <a:xfrm>
+            <a:off x="4206240" y="36576"/>
+            <a:ext cx="4800600" cy="219456"/>
+          </a:xfrm>
+          <a:prstGeom prst="rect">
+            <a:avLst/>
+          </a:prstGeom>
+          <a:noFill/>
+          <a:ln/>
+        </p:spPr>
+        <p:txBody>
+          <a:bodyPr wrap="square" lIns="0" tIns="0" rIns="0" bIns="0" rtlCol="0" anchor="ctr"/>
+          <a:lstStyle/>
+          <a:p>
+            <a:pPr algn="r" indent="0" marL="0">
+              <a:lnSpc>
+                <a:spcPct val="100000"/>
+              </a:lnSpc>
+              <a:buNone/>
+            </a:pPr>
+            <a:r>
+              <a:rPr lang="en-US" sz="950" dirty="0">
+                <a:solidFill>
+                  <a:srgbClr val="5B6770"/>
+                </a:solidFill>
+                <a:latin typeface="Calibri" pitchFamily="34" charset="0"/>
+                <a:ea typeface="Calibri" pitchFamily="34" charset="-122"/>
+                <a:cs typeface="Calibri" pitchFamily="34" charset="-120"/>
+              </a:rPr>
+              <a:t>Estado, Governo e Mercado · Unidade 2</a:t>
+            </a:r>
+            <a:endParaRPr lang="en-US" sz="950" dirty="0"/>
+          </a:p>
+        </p:txBody>
+      </p:sp>
     </p:spTree>
   </p:cSld>
   <p:clrMapOvr>

--- a/disciplina-01-estado-governo-mercado/materiais/02_Unidade_2_Pendulo_e_Matriz_Liberal.pptx
+++ b/disciplina-01-estado-governo-mercado/materiais/02_Unidade_2_Pendulo_e_Matriz_Liberal.pptx
@@ -8145,7 +8145,7 @@
                           <a:ea typeface="Calibri" pitchFamily="34" charset="-122"/>
                           <a:cs typeface="Calibri" pitchFamily="34" charset="-120"/>
                         </a:rPr>
-                        <a:t>21/10 (qua)</a:t>
+                        <a:t>até 25/10</a:t>
                       </a:r>
                       <a:endParaRPr lang="en-US" sz="1350" dirty="0">
                         <a:latin typeface="Calibri" charset="0"/>
@@ -8213,7 +8213,7 @@
                           <a:ea typeface="Calibri" pitchFamily="34" charset="-122"/>
                           <a:cs typeface="Calibri" pitchFamily="34" charset="-120"/>
                         </a:rPr>
-                        <a:t>2ª webaula, às 19h</a:t>
+                        <a:t>Exercícios de fixação 1 (não avaliativos)</a:t>
                       </a:r>
                       <a:endParaRPr lang="en-US" sz="1350" dirty="0">
                         <a:latin typeface="Calibri" charset="0"/>
@@ -8351,7 +8351,7 @@
                           <a:ea typeface="Calibri" pitchFamily="34" charset="-122"/>
                           <a:cs typeface="Calibri" pitchFamily="34" charset="-120"/>
                         </a:rPr>
-                        <a:t>Exercícios de fixação 1 (não avaliativos)</a:t>
+                        <a:t>Avaliação A1: questionário no SIGAA (Unidades 1 e 2), 23h55</a:t>
                       </a:r>
                       <a:endParaRPr lang="en-US" sz="1350" dirty="0">
                         <a:latin typeface="Calibri" charset="0"/>
@@ -8403,144 +8403,6 @@
                   </a:tcPr>
                 </a:tc>
               </a:tr>
-              <a:tr h="0">
-                <a:tc>
-                  <a:txBody>
-                    <a:bodyPr/>
-                    <a:lstStyle/>
-                    <a:p>
-                      <a:pPr indent="0" marL="0">
-                        <a:buNone/>
-                      </a:pPr>
-                      <a:r>
-                        <a:rPr lang="en-US" sz="1350" dirty="0">
-                          <a:solidFill>
-                            <a:srgbClr val="1F2A37"/>
-                          </a:solidFill>
-                          <a:latin typeface="Calibri" pitchFamily="34" charset="0"/>
-                          <a:ea typeface="Calibri" pitchFamily="34" charset="-122"/>
-                          <a:cs typeface="Calibri" pitchFamily="34" charset="-120"/>
-                        </a:rPr>
-                        <a:t>até 25/10</a:t>
-                      </a:r>
-                      <a:endParaRPr lang="en-US" sz="1350" dirty="0">
-                        <a:latin typeface="Calibri" charset="0"/>
-                        <a:ea typeface="Calibri" charset="0"/>
-                        <a:cs typeface="Calibri" charset="0"/>
-                      </a:endParaRPr>
-                    </a:p>
-                  </a:txBody>
-                  <a:tcPr marL="50800" marR="50800" marT="50800" marB="50800" anchor="ctr">
-                    <a:lnL w="9525" cap="flat" cmpd="sng" algn="ctr">
-                      <a:solidFill>
-                        <a:srgbClr val="DCD5C1"/>
-                      </a:solidFill>
-                      <a:prstDash val="solid"/>
-                      <a:round/>
-                      <a:headEnd type="none" w="med" len="med"/>
-                      <a:tailEnd type="none" w="med" len="med"/>
-                    </a:lnL>
-                    <a:lnR w="9525" cap="flat" cmpd="sng" algn="ctr">
-                      <a:solidFill>
-                        <a:srgbClr val="DCD5C1"/>
-                      </a:solidFill>
-                      <a:prstDash val="solid"/>
-                      <a:round/>
-                      <a:headEnd type="none" w="med" len="med"/>
-                      <a:tailEnd type="none" w="med" len="med"/>
-                    </a:lnR>
-                    <a:lnT w="9525" cap="flat" cmpd="sng" algn="ctr">
-                      <a:solidFill>
-                        <a:srgbClr val="DCD5C1"/>
-                      </a:solidFill>
-                      <a:prstDash val="solid"/>
-                      <a:round/>
-                      <a:headEnd type="none" w="med" len="med"/>
-                      <a:tailEnd type="none" w="med" len="med"/>
-                    </a:lnT>
-                    <a:lnB w="9525" cap="flat" cmpd="sng" algn="ctr">
-                      <a:solidFill>
-                        <a:srgbClr val="DCD5C1"/>
-                      </a:solidFill>
-                      <a:prstDash val="solid"/>
-                      <a:round/>
-                      <a:headEnd type="none" w="med" len="med"/>
-                      <a:tailEnd type="none" w="med" len="med"/>
-                    </a:lnB>
-                    <a:solidFill>
-                      <a:srgbClr val="F4F7F8"/>
-                    </a:solidFill>
-                  </a:tcPr>
-                </a:tc>
-                <a:tc>
-                  <a:txBody>
-                    <a:bodyPr/>
-                    <a:lstStyle/>
-                    <a:p>
-                      <a:pPr indent="0" marL="0">
-                        <a:buNone/>
-                      </a:pPr>
-                      <a:r>
-                        <a:rPr lang="en-US" sz="1350" dirty="0">
-                          <a:solidFill>
-                            <a:srgbClr val="1F2A37"/>
-                          </a:solidFill>
-                          <a:latin typeface="Calibri" pitchFamily="34" charset="0"/>
-                          <a:ea typeface="Calibri" pitchFamily="34" charset="-122"/>
-                          <a:cs typeface="Calibri" pitchFamily="34" charset="-120"/>
-                        </a:rPr>
-                        <a:t>Avaliação A1: questionário no SIGAA (Unidades 1 e 2), 23h55</a:t>
-                      </a:r>
-                      <a:endParaRPr lang="en-US" sz="1350" dirty="0">
-                        <a:latin typeface="Calibri" charset="0"/>
-                        <a:ea typeface="Calibri" charset="0"/>
-                        <a:cs typeface="Calibri" charset="0"/>
-                      </a:endParaRPr>
-                    </a:p>
-                  </a:txBody>
-                  <a:tcPr marL="50800" marR="50800" marT="50800" marB="50800" anchor="ctr">
-                    <a:lnL w="9525" cap="flat" cmpd="sng" algn="ctr">
-                      <a:solidFill>
-                        <a:srgbClr val="DCD5C1"/>
-                      </a:solidFill>
-                      <a:prstDash val="solid"/>
-                      <a:round/>
-                      <a:headEnd type="none" w="med" len="med"/>
-                      <a:tailEnd type="none" w="med" len="med"/>
-                    </a:lnL>
-                    <a:lnR w="9525" cap="flat" cmpd="sng" algn="ctr">
-                      <a:solidFill>
-                        <a:srgbClr val="DCD5C1"/>
-                      </a:solidFill>
-                      <a:prstDash val="solid"/>
-                      <a:round/>
-                      <a:headEnd type="none" w="med" len="med"/>
-                      <a:tailEnd type="none" w="med" len="med"/>
-                    </a:lnR>
-                    <a:lnT w="9525" cap="flat" cmpd="sng" algn="ctr">
-                      <a:solidFill>
-                        <a:srgbClr val="DCD5C1"/>
-                      </a:solidFill>
-                      <a:prstDash val="solid"/>
-                      <a:round/>
-                      <a:headEnd type="none" w="med" len="med"/>
-                      <a:tailEnd type="none" w="med" len="med"/>
-                    </a:lnT>
-                    <a:lnB w="9525" cap="flat" cmpd="sng" algn="ctr">
-                      <a:solidFill>
-                        <a:srgbClr val="DCD5C1"/>
-                      </a:solidFill>
-                      <a:prstDash val="solid"/>
-                      <a:round/>
-                      <a:headEnd type="none" w="med" len="med"/>
-                      <a:tailEnd type="none" w="med" len="med"/>
-                    </a:lnB>
-                    <a:solidFill>
-                      <a:srgbClr val="F4F7F8"/>
-                    </a:solidFill>
-                  </a:tcPr>
-                </a:tc>
-              </a:tr>
             </a:tbl>
           </a:graphicData>
         </a:graphic>
@@ -10196,7 +10058,7 @@
                 <a:ea typeface="Calibri" pitchFamily="34" charset="-122"/>
                 <a:cs typeface="Calibri" pitchFamily="34" charset="-120"/>
               </a:rPr>
-              <a:t>Página de conteúdos: Unidades 3 e 4 · Webaula: 21/10, 19h · A1 até 25/10</a:t>
+              <a:t>Página de conteúdos: Unidades 3 e 4 · A1 até 25/10</a:t>
             </a:r>
             <a:endParaRPr lang="en-US" sz="1500" dirty="0"/>
           </a:p>

--- a/disciplina-01-estado-governo-mercado/materiais/02_Unidade_2_Pendulo_e_Matriz_Liberal.pptx
+++ b/disciplina-01-estado-governo-mercado/materiais/02_Unidade_2_Pendulo_e_Matriz_Liberal.pptx
@@ -33,9 +33,10 @@
     <p:sldId id="281" r:id="rId27"/>
     <p:sldId id="282" r:id="rId28"/>
     <p:sldId id="283" r:id="rId29"/>
+    <p:sldId id="284" r:id="rId30"/>
   </p:sldIdLst>
   <p:notesMasterIdLst>
-    <p:notesMasterId r:id="rId30"/>
+    <p:notesMasterId r:id="rId31"/>
   </p:notesMasterIdLst>
   <p:sldSz cx="9144000" cy="5143500"/>
   <p:notesSz cx="5143500" cy="9144000"/>
@@ -132,6 +133,240 @@
     </a:lvl9pPr>
   </p:defaultTextStyle>
 </p:presentation>
+</file>
+
+<file path=ppt/charts/chart4.xml><?xml version="1.0" encoding="utf-8"?>
+<c:chartSpace xmlns:c="http://schemas.openxmlformats.org/drawingml/2006/chart" xmlns:a="http://schemas.openxmlformats.org/drawingml/2006/main" xmlns:r="http://schemas.openxmlformats.org/officeDocument/2006/relationships">
+  <c:date1904 val="0"/>
+  <c:roundedCorners val="1"/>
+  <c:chart>
+    <c:autoTitleDeleted val="1"/>
+    <c:plotArea>
+      <c:layout/>
+      <c:barChart>
+        <c:barDir val="bar"/>
+        <c:grouping val="clustered"/>
+        <c:varyColors val="0"/>
+        <c:ser>
+          <c:idx val="0"/>
+          <c:order val="0"/>
+          <c:tx>
+            <c:strRef>
+              <c:f>Sheet1!$B$1</c:f>
+              <c:strCache>
+                <c:ptCount val="1"/>
+                <c:pt idx="0">
+                  <c:v>Alfinetes</c:v>
+                </c:pt>
+              </c:strCache>
+            </c:strRef>
+          </c:tx>
+          <c:spPr>
+            <a:solidFill>
+              <a:srgbClr val="2A8C85"/>
+            </a:solidFill>
+            <a:effectLst/>
+          </c:spPr>
+          <c:invertIfNegative val="0"/>
+          <c:dLbls>
+            <c:numFmt formatCode="0" sourceLinked="0"/>
+            <c:txPr>
+              <a:bodyPr/>
+              <a:lstStyle/>
+              <a:p>
+                <a:pPr>
+                  <a:defRPr b="0" i="0" strike="noStrike" sz="1050" u="none">
+                    <a:solidFill>
+                      <a:srgbClr val="1F2A37"/>
+                    </a:solidFill>
+                    <a:latin typeface="Calibri"/>
+                  </a:defRPr>
+                </a:pPr>
+              </a:p>
+            </c:txPr>
+            <c:showLegendKey val="0"/>
+            <c:showVal val="1"/>
+            <c:showCatName val="0"/>
+            <c:showSerName val="0"/>
+            <c:showPercent val="0"/>
+            <c:showBubbleSize val="0"/>
+            <c:showLeaderLines val="0"/>
+          </c:dLbls>
+          <c:cat>
+            <c:multiLvlStrRef>
+              <c:f>Sheet1!$A$2:$A$3</c:f>
+              <c:multiLvlStrCache>
+                <c:ptCount val="2"/>
+                <c:lvl>
+                  <c:pt idx="0">
+                    <c:v>Com divisão do trabalho</c:v>
+                  </c:pt>
+                  <c:pt idx="1">
+                    <c:v>Trabalhando sozinho</c:v>
+                  </c:pt>
+                </c:lvl>
+              </c:multiLvlStrCache>
+            </c:multiLvlStrRef>
+          </c:cat>
+          <c:val>
+            <c:numRef>
+              <c:f>Sheet1!$B$2:$B$3</c:f>
+              <c:numCache>
+                <c:formatCode>General</c:formatCode>
+                <c:ptCount val="2"/>
+                <c:pt idx="0">
+                  <c:v>4800</c:v>
+                </c:pt>
+                <c:pt idx="1">
+                  <c:v>20</c:v>
+                </c:pt>
+              </c:numCache>
+            </c:numRef>
+          </c:val>
+        </c:ser>
+        <c:dLbls>
+          <c:numFmt formatCode="0" sourceLinked="0"/>
+          <c:txPr>
+            <a:bodyPr/>
+            <a:lstStyle/>
+            <a:p>
+              <a:pPr>
+                <a:defRPr b="0" i="0" strike="noStrike" sz="1050" u="none">
+                  <a:solidFill>
+                    <a:srgbClr val="1F2A37"/>
+                  </a:solidFill>
+                  <a:latin typeface="Calibri"/>
+                </a:defRPr>
+              </a:pPr>
+            </a:p>
+          </c:txPr>
+          <c:showLegendKey val="0"/>
+          <c:showVal val="1"/>
+          <c:showCatName val="0"/>
+          <c:showSerName val="0"/>
+          <c:showPercent val="0"/>
+          <c:showBubbleSize val="0"/>
+          <c:showLeaderLines val="0"/>
+        </c:dLbls>
+        <c:gapWidth val="60"/>
+        <c:overlap val="0"/>
+        <c:axId val="2094734554"/>
+        <c:axId val="2094734552"/>
+        <c:axId val="2094734556"/>
+      </c:barChart>
+      <c:catAx>
+        <c:axId val="2094734554"/>
+        <c:scaling>
+          <c:orientation val="maxMin"/>
+        </c:scaling>
+        <c:delete val="0"/>
+        <c:axPos val="l"/>
+        <c:numFmt formatCode="General" sourceLinked="1"/>
+        <c:majorTickMark val="out"/>
+        <c:minorTickMark val="none"/>
+        <c:tickLblPos val="nextTo"/>
+        <c:spPr>
+          <a:ln w="12700" cap="flat">
+            <a:solidFill>
+              <a:srgbClr val="888888"/>
+            </a:solidFill>
+            <a:prstDash val="solid"/>
+            <a:round/>
+          </a:ln>
+        </c:spPr>
+        <c:txPr>
+          <a:bodyPr/>
+          <a:lstStyle/>
+          <a:p>
+            <a:pPr>
+              <a:defRPr sz="1100" b="0" i="0" u="none" strike="noStrike">
+                <a:solidFill>
+                  <a:srgbClr val="1F2A37"/>
+                </a:solidFill>
+                <a:latin typeface="Calibri"/>
+              </a:defRPr>
+            </a:pPr>
+            <a:endParaRPr lang="en-US"/>
+          </a:p>
+        </c:txPr>
+        <c:crossAx val="2094734552"/>
+        <c:crosses val="autoZero"/>
+        <c:auto val="1"/>
+        <c:lblAlgn val="ctr"/>
+        <c:noMultiLvlLbl val="1"/>
+      </c:catAx>
+      <c:valAx>
+        <c:axId val="2094734552"/>
+        <c:scaling>
+          <c:orientation val="minMax"/>
+          <c:max val="6000"/>
+          <c:min val="0"/>
+        </c:scaling>
+        <c:delete val="0"/>
+        <c:axPos val="b"/>
+        <c:majorGridlines>
+          <c:spPr>
+            <a:ln w="6350" cap="flat">
+              <a:solidFill>
+                <a:srgbClr val="E3E3E3"/>
+              </a:solidFill>
+              <a:prstDash val="solid"/>
+              <a:round/>
+            </a:ln>
+          </c:spPr>
+        </c:majorGridlines>
+        <c:numFmt formatCode="0" sourceLinked="0"/>
+        <c:majorTickMark val="out"/>
+        <c:minorTickMark val="none"/>
+        <c:tickLblPos val="low"/>
+        <c:spPr>
+          <a:ln w="12700" cap="flat">
+            <a:noFill/>
+            <a:prstDash val="solid"/>
+            <a:round/>
+          </a:ln>
+        </c:spPr>
+        <c:txPr>
+          <a:bodyPr/>
+          <a:lstStyle/>
+          <a:p>
+            <a:pPr>
+              <a:defRPr sz="1000" b="0" i="0" u="none" strike="noStrike">
+                <a:solidFill>
+                  <a:srgbClr val="5B6770"/>
+                </a:solidFill>
+                <a:latin typeface="Calibri"/>
+              </a:defRPr>
+            </a:pPr>
+            <a:endParaRPr lang="en-US"/>
+          </a:p>
+        </c:txPr>
+        <c:crossAx val="2094734554"/>
+        <c:crosses val="autoZero"/>
+        <c:crossBetween val="between"/>
+      </c:valAx>
+      <c:spPr>
+        <a:noFill/>
+        <a:ln>
+          <a:noFill/>
+        </a:ln>
+        <a:effectLst/>
+      </c:spPr>
+    </c:plotArea>
+    <c:plotVisOnly val="1"/>
+    <c:dispBlanksAs val="span"/>
+  </c:chart>
+  <c:spPr>
+    <a:noFill/>
+    <a:ln>
+      <a:noFill/>
+    </a:ln>
+    <a:effectLst/>
+  </c:spPr>
+  <c:externalData r:id="rId1">
+    <c:autoUpdate val="0"/>
+  </c:externalData>
+</c:chartSpace>
 </file>
 
 <file path=ppt/notesMasters/notesMaster1.xml><?xml version="1.0" encoding="utf-8"?>
@@ -2313,6 +2548,94 @@
             <a:fld id="{F7021451-1387-4CA6-816F-3879F97B5CBC}" type="slidenum">
               <a:rPr lang="en-US"/>
               <a:t>28</a:t>
+            </a:fld>
+            <a:endParaRPr lang="en-US"/>
+          </a:p>
+        </p:txBody>
+      </p:sp>
+    </p:spTree>
+    <p:extLst>
+      <p:ext uri="{BB962C8B-B14F-4D97-AF65-F5344CB8AC3E}">
+        <p14:creationId xmlns:p14="http://schemas.microsoft.com/office/powerpoint/2010/main" val="1024086991"/>
+      </p:ext>
+    </p:extLst>
+  </p:cSld>
+  <p:clrMapOvr>
+    <a:masterClrMapping/>
+  </p:clrMapOvr>
+</p:notes>
+</file>
+
+<file path=ppt/notesSlides/notesSlide29.xml><?xml version="1.0" encoding="utf-8"?>
+<p:notes xmlns:a="http://schemas.openxmlformats.org/drawingml/2006/main" xmlns:r="http://schemas.openxmlformats.org/officeDocument/2006/relationships" xmlns:p="http://schemas.openxmlformats.org/presentationml/2006/main">
+  <p:cSld>
+    <p:spTree>
+      <p:nvGrpSpPr>
+        <p:cNvPr id="1" name=""/>
+        <p:cNvGrpSpPr/>
+        <p:nvPr/>
+      </p:nvGrpSpPr>
+      <p:grpSpPr>
+        <a:xfrm>
+          <a:off x="0" y="0"/>
+          <a:ext cx="0" cy="0"/>
+          <a:chOff x="0" y="0"/>
+          <a:chExt cx="0" cy="0"/>
+        </a:xfrm>
+      </p:grpSpPr>
+      <p:sp>
+        <p:nvSpPr>
+          <p:cNvPr id="2" name="Slide Image Placeholder 1"/>
+          <p:cNvSpPr>
+            <a:spLocks noGrp="1" noRot="1" noChangeAspect="1"/>
+          </p:cNvSpPr>
+          <p:nvPr>
+            <p:ph type="sldImg"/>
+          </p:nvPr>
+        </p:nvSpPr>
+        <p:spPr/>
+      </p:sp>
+      <p:sp>
+        <p:nvSpPr>
+          <p:cNvPr id="3" name="Notes Placeholder 2"/>
+          <p:cNvSpPr>
+            <a:spLocks noGrp="1"/>
+          </p:cNvSpPr>
+          <p:nvPr>
+            <p:ph type="body" idx="1"/>
+          </p:nvPr>
+        </p:nvSpPr>
+        <p:spPr/>
+        <p:txBody>
+          <a:bodyPr/>
+          <a:lstStyle/>
+          <a:p>
+            <a:r>
+              <a:rPr lang="en-US" dirty="0"/>
+              <a:t/>
+            </a:r>
+            <a:endParaRPr lang="en-US" dirty="0"/>
+          </a:p>
+        </p:txBody>
+      </p:sp>
+      <p:sp>
+        <p:nvSpPr>
+          <p:cNvPr id="4" name="Slide Number Placeholder 3"/>
+          <p:cNvSpPr>
+            <a:spLocks noGrp="1"/>
+          </p:cNvSpPr>
+          <p:nvPr>
+            <p:ph type="sldNum" sz="quarter" idx="10"/>
+          </p:nvPr>
+        </p:nvSpPr>
+        <p:spPr/>
+        <p:txBody>
+          <a:bodyPr/>
+          <a:lstStyle/>
+          <a:p>
+            <a:fld id="{F7021451-1387-4CA6-816F-3879F97B5CBC}" type="slidenum">
+              <a:rPr lang="en-US"/>
+              <a:t>29</a:t>
             </a:fld>
             <a:endParaRPr lang="en-US"/>
           </a:p>
@@ -3492,7 +3815,7 @@
         <p:spPr>
           <a:xfrm>
             <a:off x="1243584" y="3474720"/>
-            <a:ext cx="4572000" cy="420624"/>
+            <a:ext cx="4937760" cy="420624"/>
           </a:xfrm>
           <a:prstGeom prst="roundRect">
             <a:avLst>
@@ -5576,7 +5899,7 @@
                 <a:ea typeface="Calibri" pitchFamily="34" charset="-122"/>
                 <a:cs typeface="Calibri" pitchFamily="34" charset="-120"/>
               </a:rPr>
-              <a:t>O Estado mínimo segundo Smith</a:t>
+              <a:t>A fábrica de alfinetes</a:t>
             </a:r>
             <a:endParaRPr lang="en-US" sz="2800" dirty="0"/>
           </a:p>
@@ -5618,7 +5941,7 @@
                 <a:ea typeface="Calibri" pitchFamily="34" charset="-122"/>
                 <a:cs typeface="Calibri" pitchFamily="34" charset="-120"/>
               </a:rPr>
-              <a:t>Os três deveres do soberano</a:t>
+              <a:t>O exemplo de Smith sobre a divisão do trabalho</a:t>
             </a:r>
             <a:endParaRPr lang="en-US" sz="1400" dirty="0"/>
           </a:p>
@@ -5632,12 +5955,12 @@
         </p:nvSpPr>
         <p:spPr>
           <a:xfrm>
-            <a:off x="685800" y="1325880"/>
-            <a:ext cx="2456688" cy="1691640"/>
+            <a:off x="548640" y="1207008"/>
+            <a:ext cx="5349240" cy="2953512"/>
           </a:xfrm>
           <a:prstGeom prst="roundRect">
             <a:avLst>
-              <a:gd name="adj" fmla="val 3243"/>
+              <a:gd name="adj" fmla="val 1858"/>
             </a:avLst>
           </a:prstGeom>
           <a:solidFill>
@@ -5653,474 +5976,76 @@
       </p:sp>
       <p:sp>
         <p:nvSpPr>
-          <p:cNvPr id="5" name="Shape 3"/>
-          <p:cNvSpPr/>
-          <p:nvPr/>
-        </p:nvSpPr>
-        <p:spPr>
-          <a:xfrm>
-            <a:off x="822960" y="1481328"/>
-            <a:ext cx="457200" cy="457200"/>
+          <p:cNvPr id="5" name="Text 3"/>
+          <p:cNvSpPr txBox="1"/>
+          <p:nvPr/>
+        </p:nvSpPr>
+        <p:spPr>
+          <a:xfrm>
+            <a:off x="658368" y="1261872"/>
+            <a:ext cx="5120640" cy="310896"/>
+          </a:xfrm>
+          <a:prstGeom prst="rect">
+            <a:avLst/>
+          </a:prstGeom>
+          <a:noFill/>
+          <a:ln/>
+        </p:spPr>
+        <p:txBody>
+          <a:bodyPr wrap="square" lIns="0" tIns="0" rIns="0" bIns="0" rtlCol="0" anchor="ctr"/>
+          <a:lstStyle/>
+          <a:p>
+            <a:pPr algn="l" indent="0" marL="0">
+              <a:lnSpc>
+                <a:spcPct val="100000"/>
+              </a:lnSpc>
+              <a:buNone/>
+            </a:pPr>
+            <a:r>
+              <a:rPr lang="en-US" sz="1300" b="1" dirty="0">
+                <a:solidFill>
+                  <a:srgbClr val="13294B"/>
+                </a:solidFill>
+                <a:latin typeface="Calibri" pitchFamily="34" charset="0"/>
+                <a:ea typeface="Calibri" pitchFamily="34" charset="-122"/>
+                <a:cs typeface="Calibri" pitchFamily="34" charset="-120"/>
+              </a:rPr>
+              <a:t>Alfinetes produzidos por trabalhador em um dia</a:t>
+            </a:r>
+            <a:endParaRPr lang="en-US" sz="1300" dirty="0"/>
+          </a:p>
+        </p:txBody>
+      </p:sp>
+      <p:graphicFrame>
+        <p:nvGraphicFramePr>
+          <p:cNvPr id="6" name="Chart 0" descr=""/>
+          <p:cNvGraphicFramePr/>
+          <p:nvPr/>
+        </p:nvGraphicFramePr>
+        <p:xfrm>
+          <a:off x="658368" y="1591056"/>
+          <a:ext cx="5138928" cy="2496312"/>
+        </p:xfrm>
+        <a:graphic xmlns:a="http://schemas.openxmlformats.org/drawingml/2006/main">
+          <a:graphicData uri="http://schemas.openxmlformats.org/drawingml/2006/chart">
+            <c:chart xmlns:c="http://schemas.openxmlformats.org/drawingml/2006/chart" r:id="rId2"/>
+          </a:graphicData>
+        </a:graphic>
+      </p:graphicFrame>
+      <p:sp>
+        <p:nvSpPr>
+          <p:cNvPr id="7" name="Text 4"/>
+          <p:cNvSpPr txBox="1"/>
+          <p:nvPr/>
+        </p:nvSpPr>
+        <p:spPr>
+          <a:xfrm>
+            <a:off x="6035040" y="1207008"/>
+            <a:ext cx="2560320" cy="2953512"/>
           </a:xfrm>
           <a:prstGeom prst="roundRect">
             <a:avLst>
-              <a:gd name="adj" fmla="val 16000"/>
-            </a:avLst>
-          </a:prstGeom>
-          <a:solidFill>
-            <a:srgbClr val="13294B"/>
-          </a:solidFill>
-          <a:ln/>
-        </p:spPr>
-      </p:sp>
-      <p:pic>
-        <p:nvPicPr>
-          <p:cNvPr id="6" name="Image 0" descr="/tmp/claude-0/-home-user-zero-claude/d7e33190-c541-582c-a7cc-1156817732ce/scratchpad/deck/assets/icon_FaShieldAlt.png">    </p:cNvPr>
-          <p:cNvPicPr>
-            <a:picLocks noChangeAspect="1"/>
-          </p:cNvPicPr>
-          <p:nvPr/>
-        </p:nvPicPr>
-        <p:blipFill>
-          <a:blip r:embed="rId2"/>
-          <a:stretch>
-            <a:fillRect/>
-          </a:stretch>
-        </p:blipFill>
-        <p:spPr>
-          <a:xfrm>
-            <a:off x="923544" y="1581912"/>
-            <a:ext cx="256032" cy="256032"/>
-          </a:xfrm>
-          <a:prstGeom prst="rect">
-            <a:avLst/>
-          </a:prstGeom>
-        </p:spPr>
-      </p:pic>
-      <p:sp>
-        <p:nvSpPr>
-          <p:cNvPr id="7" name="Text 4"/>
-          <p:cNvSpPr txBox="1"/>
-          <p:nvPr/>
-        </p:nvSpPr>
-        <p:spPr>
-          <a:xfrm>
-            <a:off x="1371600" y="1399032"/>
-            <a:ext cx="1679448" cy="1545336"/>
-          </a:xfrm>
-          <a:prstGeom prst="rect">
-            <a:avLst/>
-          </a:prstGeom>
-          <a:noFill/>
-          <a:ln/>
-        </p:spPr>
-        <p:txBody>
-          <a:bodyPr wrap="square" lIns="38100" tIns="38100" rIns="38100" bIns="38100" rtlCol="0" anchor="t"/>
-          <a:lstStyle/>
-          <a:p>
-            <a:pPr algn="l" indent="0" marL="0">
-              <a:lnSpc>
-                <a:spcPct val="100000"/>
-              </a:lnSpc>
-              <a:spcAft>
-                <a:spcPts val="200"/>
-              </a:spcAft>
-              <a:buNone/>
-            </a:pPr>
-            <a:r>
-              <a:rPr lang="en-US" sz="1100" b="1" dirty="0">
-                <a:solidFill>
-                  <a:srgbClr val="2A8C85"/>
-                </a:solidFill>
-                <a:latin typeface="Calibri" pitchFamily="34" charset="0"/>
-                <a:ea typeface="Calibri" pitchFamily="34" charset="-122"/>
-                <a:cs typeface="Calibri" pitchFamily="34" charset="-120"/>
-              </a:rPr>
-              <a:t>DEVER 1</a:t>
-            </a:r>
-            <a:endParaRPr lang="en-US" sz="1100" dirty="0"/>
-          </a:p>
-          <a:p>
-            <a:pPr algn="l" indent="0" marL="0">
-              <a:lnSpc>
-                <a:spcPct val="100000"/>
-              </a:lnSpc>
-              <a:spcAft>
-                <a:spcPts val="300"/>
-              </a:spcAft>
-              <a:buNone/>
-            </a:pPr>
-            <a:r>
-              <a:rPr lang="en-US" sz="1600" b="1" dirty="0">
-                <a:solidFill>
-                  <a:srgbClr val="13294B"/>
-                </a:solidFill>
-                <a:latin typeface="Calibri" pitchFamily="34" charset="0"/>
-                <a:ea typeface="Calibri" pitchFamily="34" charset="-122"/>
-                <a:cs typeface="Calibri" pitchFamily="34" charset="-120"/>
-              </a:rPr>
-              <a:t>Defesa</a:t>
-            </a:r>
-            <a:endParaRPr lang="en-US" sz="1100" dirty="0"/>
-          </a:p>
-          <a:p>
-            <a:pPr algn="l" indent="0" marL="0">
-              <a:lnSpc>
-                <a:spcPct val="100000"/>
-              </a:lnSpc>
-              <a:buNone/>
-            </a:pPr>
-            <a:r>
-              <a:rPr lang="en-US" sz="1350" dirty="0">
-                <a:solidFill>
-                  <a:srgbClr val="1F2A37"/>
-                </a:solidFill>
-                <a:latin typeface="Calibri" pitchFamily="34" charset="0"/>
-                <a:ea typeface="Calibri" pitchFamily="34" charset="-122"/>
-                <a:cs typeface="Calibri" pitchFamily="34" charset="-120"/>
-              </a:rPr>
-              <a:t>Proteger a sociedade contra agressões externas.</a:t>
-            </a:r>
-            <a:endParaRPr lang="en-US" sz="1100" dirty="0"/>
-          </a:p>
-        </p:txBody>
-      </p:sp>
-      <p:sp>
-        <p:nvSpPr>
-          <p:cNvPr id="8" name="Shape 5"/>
-          <p:cNvSpPr/>
-          <p:nvPr/>
-        </p:nvSpPr>
-        <p:spPr>
-          <a:xfrm>
-            <a:off x="3343656" y="1325880"/>
-            <a:ext cx="2456688" cy="1691640"/>
-          </a:xfrm>
-          <a:prstGeom prst="roundRect">
-            <a:avLst>
-              <a:gd name="adj" fmla="val 3243"/>
-            </a:avLst>
-          </a:prstGeom>
-          <a:solidFill>
-            <a:srgbClr val="FFFFFF"/>
-          </a:solidFill>
-          <a:ln w="12700">
-            <a:solidFill>
-              <a:srgbClr val="DCD5C1"/>
-            </a:solidFill>
-            <a:prstDash val="solid"/>
-          </a:ln>
-        </p:spPr>
-      </p:sp>
-      <p:sp>
-        <p:nvSpPr>
-          <p:cNvPr id="9" name="Shape 6"/>
-          <p:cNvSpPr/>
-          <p:nvPr/>
-        </p:nvSpPr>
-        <p:spPr>
-          <a:xfrm>
-            <a:off x="3480816" y="1481328"/>
-            <a:ext cx="457200" cy="457200"/>
-          </a:xfrm>
-          <a:prstGeom prst="roundRect">
-            <a:avLst>
-              <a:gd name="adj" fmla="val 16000"/>
-            </a:avLst>
-          </a:prstGeom>
-          <a:solidFill>
-            <a:srgbClr val="13294B"/>
-          </a:solidFill>
-          <a:ln/>
-        </p:spPr>
-      </p:sp>
-      <p:pic>
-        <p:nvPicPr>
-          <p:cNvPr id="10" name="Image 1" descr="/tmp/claude-0/-home-user-zero-claude/d7e33190-c541-582c-a7cc-1156817732ce/scratchpad/deck/assets/icon_FaGavel.png">    </p:cNvPr>
-          <p:cNvPicPr>
-            <a:picLocks noChangeAspect="1"/>
-          </p:cNvPicPr>
-          <p:nvPr/>
-        </p:nvPicPr>
-        <p:blipFill>
-          <a:blip r:embed="rId3"/>
-          <a:stretch>
-            <a:fillRect/>
-          </a:stretch>
-        </p:blipFill>
-        <p:spPr>
-          <a:xfrm>
-            <a:off x="3581400" y="1581912"/>
-            <a:ext cx="256032" cy="256032"/>
-          </a:xfrm>
-          <a:prstGeom prst="rect">
-            <a:avLst/>
-          </a:prstGeom>
-        </p:spPr>
-      </p:pic>
-      <p:sp>
-        <p:nvSpPr>
-          <p:cNvPr id="11" name="Text 7"/>
-          <p:cNvSpPr txBox="1"/>
-          <p:nvPr/>
-        </p:nvSpPr>
-        <p:spPr>
-          <a:xfrm>
-            <a:off x="4029456" y="1399032"/>
-            <a:ext cx="1679448" cy="1545336"/>
-          </a:xfrm>
-          <a:prstGeom prst="rect">
-            <a:avLst/>
-          </a:prstGeom>
-          <a:noFill/>
-          <a:ln/>
-        </p:spPr>
-        <p:txBody>
-          <a:bodyPr wrap="square" lIns="38100" tIns="38100" rIns="38100" bIns="38100" rtlCol="0" anchor="t"/>
-          <a:lstStyle/>
-          <a:p>
-            <a:pPr algn="l" indent="0" marL="0">
-              <a:lnSpc>
-                <a:spcPct val="100000"/>
-              </a:lnSpc>
-              <a:spcAft>
-                <a:spcPts val="200"/>
-              </a:spcAft>
-              <a:buNone/>
-            </a:pPr>
-            <a:r>
-              <a:rPr lang="en-US" sz="1100" b="1" dirty="0">
-                <a:solidFill>
-                  <a:srgbClr val="2A8C85"/>
-                </a:solidFill>
-                <a:latin typeface="Calibri" pitchFamily="34" charset="0"/>
-                <a:ea typeface="Calibri" pitchFamily="34" charset="-122"/>
-                <a:cs typeface="Calibri" pitchFamily="34" charset="-120"/>
-              </a:rPr>
-              <a:t>DEVER 2</a:t>
-            </a:r>
-            <a:endParaRPr lang="en-US" sz="1100" dirty="0"/>
-          </a:p>
-          <a:p>
-            <a:pPr algn="l" indent="0" marL="0">
-              <a:lnSpc>
-                <a:spcPct val="100000"/>
-              </a:lnSpc>
-              <a:spcAft>
-                <a:spcPts val="300"/>
-              </a:spcAft>
-              <a:buNone/>
-            </a:pPr>
-            <a:r>
-              <a:rPr lang="en-US" sz="1600" b="1" dirty="0">
-                <a:solidFill>
-                  <a:srgbClr val="13294B"/>
-                </a:solidFill>
-                <a:latin typeface="Calibri" pitchFamily="34" charset="0"/>
-                <a:ea typeface="Calibri" pitchFamily="34" charset="-122"/>
-                <a:cs typeface="Calibri" pitchFamily="34" charset="-120"/>
-              </a:rPr>
-              <a:t>Justiça</a:t>
-            </a:r>
-            <a:endParaRPr lang="en-US" sz="1100" dirty="0"/>
-          </a:p>
-          <a:p>
-            <a:pPr algn="l" indent="0" marL="0">
-              <a:lnSpc>
-                <a:spcPct val="100000"/>
-              </a:lnSpc>
-              <a:buNone/>
-            </a:pPr>
-            <a:r>
-              <a:rPr lang="en-US" sz="1350" dirty="0">
-                <a:solidFill>
-                  <a:srgbClr val="1F2A37"/>
-                </a:solidFill>
-                <a:latin typeface="Calibri" pitchFamily="34" charset="0"/>
-                <a:ea typeface="Calibri" pitchFamily="34" charset="-122"/>
-                <a:cs typeface="Calibri" pitchFamily="34" charset="-120"/>
-              </a:rPr>
-              <a:t>Proteger cada cidadão contra a injustiça de outros.</a:t>
-            </a:r>
-            <a:endParaRPr lang="en-US" sz="1100" dirty="0"/>
-          </a:p>
-        </p:txBody>
-      </p:sp>
-      <p:sp>
-        <p:nvSpPr>
-          <p:cNvPr id="12" name="Shape 8"/>
-          <p:cNvSpPr/>
-          <p:nvPr/>
-        </p:nvSpPr>
-        <p:spPr>
-          <a:xfrm>
-            <a:off x="6001512" y="1325880"/>
-            <a:ext cx="2456688" cy="1691640"/>
-          </a:xfrm>
-          <a:prstGeom prst="roundRect">
-            <a:avLst>
-              <a:gd name="adj" fmla="val 3243"/>
-            </a:avLst>
-          </a:prstGeom>
-          <a:solidFill>
-            <a:srgbClr val="FFFFFF"/>
-          </a:solidFill>
-          <a:ln w="12700">
-            <a:solidFill>
-              <a:srgbClr val="DCD5C1"/>
-            </a:solidFill>
-            <a:prstDash val="solid"/>
-          </a:ln>
-        </p:spPr>
-      </p:sp>
-      <p:sp>
-        <p:nvSpPr>
-          <p:cNvPr id="13" name="Shape 9"/>
-          <p:cNvSpPr/>
-          <p:nvPr/>
-        </p:nvSpPr>
-        <p:spPr>
-          <a:xfrm>
-            <a:off x="6138672" y="1481328"/>
-            <a:ext cx="457200" cy="457200"/>
-          </a:xfrm>
-          <a:prstGeom prst="roundRect">
-            <a:avLst>
-              <a:gd name="adj" fmla="val 16000"/>
-            </a:avLst>
-          </a:prstGeom>
-          <a:solidFill>
-            <a:srgbClr val="13294B"/>
-          </a:solidFill>
-          <a:ln/>
-        </p:spPr>
-      </p:sp>
-      <p:pic>
-        <p:nvPicPr>
-          <p:cNvPr id="14" name="Image 2" descr="/tmp/claude-0/-home-user-zero-claude/d7e33190-c541-582c-a7cc-1156817732ce/scratchpad/deck/assets/icon_FaBuilding.png">    </p:cNvPr>
-          <p:cNvPicPr>
-            <a:picLocks noChangeAspect="1"/>
-          </p:cNvPicPr>
-          <p:nvPr/>
-        </p:nvPicPr>
-        <p:blipFill>
-          <a:blip r:embed="rId4"/>
-          <a:stretch>
-            <a:fillRect/>
-          </a:stretch>
-        </p:blipFill>
-        <p:spPr>
-          <a:xfrm>
-            <a:off x="6239256" y="1581912"/>
-            <a:ext cx="256032" cy="256032"/>
-          </a:xfrm>
-          <a:prstGeom prst="rect">
-            <a:avLst/>
-          </a:prstGeom>
-        </p:spPr>
-      </p:pic>
-      <p:sp>
-        <p:nvSpPr>
-          <p:cNvPr id="15" name="Text 10"/>
-          <p:cNvSpPr txBox="1"/>
-          <p:nvPr/>
-        </p:nvSpPr>
-        <p:spPr>
-          <a:xfrm>
-            <a:off x="6687312" y="1399032"/>
-            <a:ext cx="1679448" cy="1545336"/>
-          </a:xfrm>
-          <a:prstGeom prst="rect">
-            <a:avLst/>
-          </a:prstGeom>
-          <a:noFill/>
-          <a:ln/>
-        </p:spPr>
-        <p:txBody>
-          <a:bodyPr wrap="square" lIns="38100" tIns="38100" rIns="38100" bIns="38100" rtlCol="0" anchor="t"/>
-          <a:lstStyle/>
-          <a:p>
-            <a:pPr algn="l" indent="0" marL="0">
-              <a:lnSpc>
-                <a:spcPct val="100000"/>
-              </a:lnSpc>
-              <a:spcAft>
-                <a:spcPts val="200"/>
-              </a:spcAft>
-              <a:buNone/>
-            </a:pPr>
-            <a:r>
-              <a:rPr lang="en-US" sz="1100" b="1" dirty="0">
-                <a:solidFill>
-                  <a:srgbClr val="2A8C85"/>
-                </a:solidFill>
-                <a:latin typeface="Calibri" pitchFamily="34" charset="0"/>
-                <a:ea typeface="Calibri" pitchFamily="34" charset="-122"/>
-                <a:cs typeface="Calibri" pitchFamily="34" charset="-120"/>
-              </a:rPr>
-              <a:t>DEVER 3</a:t>
-            </a:r>
-            <a:endParaRPr lang="en-US" sz="1100" dirty="0"/>
-          </a:p>
-          <a:p>
-            <a:pPr algn="l" indent="0" marL="0">
-              <a:lnSpc>
-                <a:spcPct val="100000"/>
-              </a:lnSpc>
-              <a:spcAft>
-                <a:spcPts val="300"/>
-              </a:spcAft>
-              <a:buNone/>
-            </a:pPr>
-            <a:r>
-              <a:rPr lang="en-US" sz="1600" b="1" dirty="0">
-                <a:solidFill>
-                  <a:srgbClr val="13294B"/>
-                </a:solidFill>
-                <a:latin typeface="Calibri" pitchFamily="34" charset="0"/>
-                <a:ea typeface="Calibri" pitchFamily="34" charset="-122"/>
-                <a:cs typeface="Calibri" pitchFamily="34" charset="-120"/>
-              </a:rPr>
-              <a:t>Obras públicas</a:t>
-            </a:r>
-            <a:endParaRPr lang="en-US" sz="1100" dirty="0"/>
-          </a:p>
-          <a:p>
-            <a:pPr algn="l" indent="0" marL="0">
-              <a:lnSpc>
-                <a:spcPct val="100000"/>
-              </a:lnSpc>
-              <a:buNone/>
-            </a:pPr>
-            <a:r>
-              <a:rPr lang="en-US" sz="1350" dirty="0">
-                <a:solidFill>
-                  <a:srgbClr val="1F2A37"/>
-                </a:solidFill>
-                <a:latin typeface="Calibri" pitchFamily="34" charset="0"/>
-                <a:ea typeface="Calibri" pitchFamily="34" charset="-122"/>
-                <a:cs typeface="Calibri" pitchFamily="34" charset="-120"/>
-              </a:rPr>
-              <a:t>Manter obras e instituições que não dão lucro ao particular.</a:t>
-            </a:r>
-            <a:endParaRPr lang="en-US" sz="1100" dirty="0"/>
-          </a:p>
-        </p:txBody>
-      </p:sp>
-      <p:sp>
-        <p:nvSpPr>
-          <p:cNvPr id="16" name="Text 11"/>
-          <p:cNvSpPr txBox="1"/>
-          <p:nvPr/>
-        </p:nvSpPr>
-        <p:spPr>
-          <a:xfrm>
-            <a:off x="685800" y="3291840"/>
-            <a:ext cx="7772400" cy="685800"/>
-          </a:xfrm>
-          <a:prstGeom prst="roundRect">
-            <a:avLst>
-              <a:gd name="adj" fmla="val 10667"/>
+              <a:gd name="adj" fmla="val 2143"/>
             </a:avLst>
           </a:prstGeom>
           <a:solidFill>
@@ -6129,33 +6054,150 @@
           <a:ln/>
         </p:spPr>
         <p:txBody>
-          <a:bodyPr wrap="square" lIns="127000" tIns="127000" rIns="127000" bIns="127000" rtlCol="0" anchor="ctr"/>
-          <a:lstStyle/>
-          <a:p>
-            <a:pPr algn="ctr" indent="0" marL="0">
-              <a:lnSpc>
-                <a:spcPct val="100000"/>
-              </a:lnSpc>
-              <a:buNone/>
-            </a:pPr>
-            <a:r>
-              <a:rPr lang="en-US" sz="1700" b="1" dirty="0">
-                <a:solidFill>
-                  <a:srgbClr val="13294B"/>
-                </a:solidFill>
-                <a:latin typeface="Calibri" pitchFamily="34" charset="0"/>
-                <a:ea typeface="Calibri" pitchFamily="34" charset="-122"/>
-                <a:cs typeface="Calibri" pitchFamily="34" charset="-120"/>
-              </a:rPr>
-              <a:t>Laissez-faire, laissez-passer: o Estado “guarda-noturno”.</a:t>
-            </a:r>
-            <a:endParaRPr lang="en-US" sz="1700" dirty="0"/>
-          </a:p>
-        </p:txBody>
-      </p:sp>
-      <p:sp>
-        <p:nvSpPr>
-          <p:cNvPr id="17" name="Text 12"/>
+          <a:bodyPr wrap="square" lIns="114300" tIns="114300" rIns="114300" bIns="114300" rtlCol="0" anchor="t"/>
+          <a:lstStyle/>
+          <a:p>
+            <a:pPr algn="l" indent="0" marL="0">
+              <a:lnSpc>
+                <a:spcPct val="100000"/>
+              </a:lnSpc>
+              <a:spcAft>
+                <a:spcPts val="400"/>
+              </a:spcAft>
+              <a:buNone/>
+            </a:pPr>
+            <a:r>
+              <a:rPr lang="en-US" sz="1100" b="1" dirty="0">
+                <a:solidFill>
+                  <a:srgbClr val="2A8C85"/>
+                </a:solidFill>
+                <a:latin typeface="Calibri" pitchFamily="34" charset="0"/>
+                <a:ea typeface="Calibri" pitchFamily="34" charset="-122"/>
+                <a:cs typeface="Calibri" pitchFamily="34" charset="-120"/>
+              </a:rPr>
+              <a:t>COMO LER O GRÁFICO</a:t>
+            </a:r>
+            <a:endParaRPr lang="en-US" sz="1100" dirty="0"/>
+          </a:p>
+          <a:p>
+            <a:pPr algn="l" marL="177800" indent="-177800">
+              <a:lnSpc>
+                <a:spcPct val="100000"/>
+              </a:lnSpc>
+              <a:spcAft>
+                <a:spcPts val="500"/>
+              </a:spcAft>
+              <a:buSzPct val="100000"/>
+              <a:buChar char="•"/>
+            </a:pPr>
+            <a:r>
+              <a:rPr lang="en-US" sz="1250" dirty="0">
+                <a:solidFill>
+                  <a:srgbClr val="1F2A37"/>
+                </a:solidFill>
+                <a:latin typeface="Calibri" pitchFamily="34" charset="0"/>
+                <a:ea typeface="Calibri" pitchFamily="34" charset="-122"/>
+                <a:cs typeface="Calibri" pitchFamily="34" charset="-120"/>
+              </a:rPr>
+              <a:t>Dez operários, cada um numa etapa, faziam cerca de 48 mil alfinetes por dia.</a:t>
+            </a:r>
+            <a:endParaRPr lang="en-US" sz="1100" dirty="0"/>
+          </a:p>
+          <a:p>
+            <a:pPr algn="l" marL="177800" indent="-177800">
+              <a:lnSpc>
+                <a:spcPct val="100000"/>
+              </a:lnSpc>
+              <a:spcAft>
+                <a:spcPts val="500"/>
+              </a:spcAft>
+              <a:buSzPct val="100000"/>
+              <a:buChar char="•"/>
+            </a:pPr>
+            <a:r>
+              <a:rPr lang="en-US" sz="1250" dirty="0">
+                <a:solidFill>
+                  <a:srgbClr val="1F2A37"/>
+                </a:solidFill>
+                <a:latin typeface="Calibri" pitchFamily="34" charset="0"/>
+                <a:ea typeface="Calibri" pitchFamily="34" charset="-122"/>
+                <a:cs typeface="Calibri" pitchFamily="34" charset="-120"/>
+              </a:rPr>
+              <a:t>Sozinho, cada um faria, no máximo, 20.</a:t>
+            </a:r>
+            <a:endParaRPr lang="en-US" sz="1100" dirty="0"/>
+          </a:p>
+          <a:p>
+            <a:pPr algn="l" marL="177800" indent="-177800">
+              <a:lnSpc>
+                <a:spcPct val="100000"/>
+              </a:lnSpc>
+              <a:spcAft>
+                <a:spcPts val="500"/>
+              </a:spcAft>
+              <a:buSzPct val="100000"/>
+              <a:buChar char="•"/>
+            </a:pPr>
+            <a:r>
+              <a:rPr lang="en-US" sz="1250" dirty="0">
+                <a:solidFill>
+                  <a:srgbClr val="1F2A37"/>
+                </a:solidFill>
+                <a:latin typeface="Calibri" pitchFamily="34" charset="0"/>
+                <a:ea typeface="Calibri" pitchFamily="34" charset="-122"/>
+                <a:cs typeface="Calibri" pitchFamily="34" charset="-120"/>
+              </a:rPr>
+              <a:t>Para Smith, a riqueza nasce da produtividade do trabalho.</a:t>
+            </a:r>
+            <a:endParaRPr lang="en-US" sz="1100" dirty="0"/>
+          </a:p>
+        </p:txBody>
+      </p:sp>
+      <p:sp>
+        <p:nvSpPr>
+          <p:cNvPr id="8" name="Text 5"/>
+          <p:cNvSpPr txBox="1"/>
+          <p:nvPr/>
+        </p:nvSpPr>
+        <p:spPr>
+          <a:xfrm>
+            <a:off x="548640" y="4206240"/>
+            <a:ext cx="8046720" cy="274320"/>
+          </a:xfrm>
+          <a:prstGeom prst="rect">
+            <a:avLst/>
+          </a:prstGeom>
+          <a:noFill/>
+          <a:ln/>
+        </p:spPr>
+        <p:txBody>
+          <a:bodyPr wrap="square" lIns="0" tIns="0" rIns="0" bIns="0" rtlCol="0" anchor="ctr"/>
+          <a:lstStyle/>
+          <a:p>
+            <a:pPr algn="l" indent="0" marL="0">
+              <a:lnSpc>
+                <a:spcPct val="100000"/>
+              </a:lnSpc>
+              <a:buNone/>
+            </a:pPr>
+            <a:r>
+              <a:rPr lang="en-US" sz="1000" i="1" dirty="0">
+                <a:solidFill>
+                  <a:srgbClr val="5B6770"/>
+                </a:solidFill>
+                <a:latin typeface="Calibri" pitchFamily="34" charset="0"/>
+                <a:ea typeface="Calibri" pitchFamily="34" charset="-122"/>
+                <a:cs typeface="Calibri" pitchFamily="34" charset="-120"/>
+              </a:rPr>
+              <a:t>Fonte: SMITH, Adam. A Riqueza das Nações (1776), Livro I, cap. 1.</a:t>
+            </a:r>
+            <a:endParaRPr lang="en-US" sz="1000" dirty="0"/>
+          </a:p>
+        </p:txBody>
+      </p:sp>
+      <p:sp>
+        <p:nvSpPr>
+          <p:cNvPr id="9" name="Text 6"/>
           <p:cNvSpPr txBox="1"/>
           <p:nvPr/>
         </p:nvSpPr>
@@ -6270,7 +6312,7 @@
                 <a:ea typeface="Calibri" pitchFamily="34" charset="-122"/>
                 <a:cs typeface="Calibri" pitchFamily="34" charset="-120"/>
               </a:rPr>
-              <a:t>O terceiro dever de Smith hoje</a:t>
+              <a:t>O Estado mínimo segundo Smith</a:t>
             </a:r>
             <a:endParaRPr lang="en-US" sz="2800" dirty="0"/>
           </a:p>
@@ -6278,35 +6320,82 @@
       </p:sp>
       <p:sp>
         <p:nvSpPr>
-          <p:cNvPr id="3" name="Shape 1"/>
+          <p:cNvPr id="3" name="Text 1"/>
+          <p:cNvSpPr txBox="1"/>
+          <p:nvPr/>
+        </p:nvSpPr>
+        <p:spPr>
+          <a:xfrm>
+            <a:off x="1005840" y="804672"/>
+            <a:ext cx="7132320" cy="329184"/>
+          </a:xfrm>
+          <a:prstGeom prst="rect">
+            <a:avLst/>
+          </a:prstGeom>
+          <a:noFill/>
+          <a:ln/>
+        </p:spPr>
+        <p:txBody>
+          <a:bodyPr wrap="square" lIns="0" tIns="0" rIns="0" bIns="0" rtlCol="0" anchor="ctr"/>
+          <a:lstStyle/>
+          <a:p>
+            <a:pPr algn="ctr" indent="0" marL="0">
+              <a:lnSpc>
+                <a:spcPct val="100000"/>
+              </a:lnSpc>
+              <a:buNone/>
+            </a:pPr>
+            <a:r>
+              <a:rPr lang="en-US" sz="1400" dirty="0">
+                <a:solidFill>
+                  <a:srgbClr val="5B6770"/>
+                </a:solidFill>
+                <a:latin typeface="Calibri" pitchFamily="34" charset="0"/>
+                <a:ea typeface="Calibri" pitchFamily="34" charset="-122"/>
+                <a:cs typeface="Calibri" pitchFamily="34" charset="-120"/>
+              </a:rPr>
+              <a:t>Os três deveres do soberano</a:t>
+            </a:r>
+            <a:endParaRPr lang="en-US" sz="1400" dirty="0"/>
+          </a:p>
+        </p:txBody>
+      </p:sp>
+      <p:sp>
+        <p:nvSpPr>
+          <p:cNvPr id="4" name="Shape 2"/>
           <p:cNvSpPr/>
           <p:nvPr/>
         </p:nvSpPr>
         <p:spPr>
           <a:xfrm>
-            <a:off x="685800" y="1143000"/>
-            <a:ext cx="7772400" cy="1325880"/>
+            <a:off x="685800" y="1325880"/>
+            <a:ext cx="2456688" cy="1691640"/>
           </a:xfrm>
           <a:prstGeom prst="roundRect">
             <a:avLst>
-              <a:gd name="adj" fmla="val 5517"/>
+              <a:gd name="adj" fmla="val 3243"/>
             </a:avLst>
           </a:prstGeom>
           <a:solidFill>
-            <a:srgbClr val="FBF4DC"/>
+            <a:srgbClr val="FFFFFF"/>
           </a:solidFill>
-          <a:ln/>
-        </p:spPr>
-      </p:sp>
-      <p:sp>
-        <p:nvSpPr>
-          <p:cNvPr id="4" name="Shape 2"/>
+          <a:ln w="12700">
+            <a:solidFill>
+              <a:srgbClr val="DCD5C1"/>
+            </a:solidFill>
+            <a:prstDash val="solid"/>
+          </a:ln>
+        </p:spPr>
+      </p:sp>
+      <p:sp>
+        <p:nvSpPr>
+          <p:cNvPr id="5" name="Shape 3"/>
           <p:cNvSpPr/>
           <p:nvPr/>
         </p:nvSpPr>
         <p:spPr>
           <a:xfrm>
-            <a:off x="850392" y="1307592"/>
+            <a:off x="822960" y="1481328"/>
             <a:ext cx="457200" cy="457200"/>
           </a:xfrm>
           <a:prstGeom prst="roundRect">
@@ -6315,14 +6404,14 @@
             </a:avLst>
           </a:prstGeom>
           <a:solidFill>
-            <a:srgbClr val="E9C85C"/>
+            <a:srgbClr val="13294B"/>
           </a:solidFill>
           <a:ln/>
         </p:spPr>
       </p:sp>
       <p:pic>
         <p:nvPicPr>
-          <p:cNvPr id="5" name="Image 0" descr="/tmp/claude-0/-home-user-zero-claude/d7e33190-c541-582c-a7cc-1156817732ce/scratchpad/deck/assets/icon_FaLightbulb.png">    </p:cNvPr>
+          <p:cNvPr id="6" name="Image 0" descr="/tmp/claude-0/-home-user-zero-claude/d7e33190-c541-582c-a7cc-1156817732ce/scratchpad/deck/assets/icon_FaShieldAlt.png">    </p:cNvPr>
           <p:cNvPicPr>
             <a:picLocks noChangeAspect="1"/>
           </p:cNvPicPr>
@@ -6336,7 +6425,7 @@
         </p:blipFill>
         <p:spPr>
           <a:xfrm>
-            <a:off x="950976" y="1408176"/>
+            <a:off x="923544" y="1581912"/>
             <a:ext cx="256032" cy="256032"/>
           </a:xfrm>
           <a:prstGeom prst="rect">
@@ -6346,14 +6435,14 @@
       </p:pic>
       <p:sp>
         <p:nvSpPr>
-          <p:cNvPr id="6" name="Text 3"/>
-          <p:cNvSpPr txBox="1"/>
-          <p:nvPr/>
-        </p:nvSpPr>
-        <p:spPr>
-          <a:xfrm>
-            <a:off x="1417320" y="1252728"/>
-            <a:ext cx="6903720" cy="1106424"/>
+          <p:cNvPr id="7" name="Text 4"/>
+          <p:cNvSpPr txBox="1"/>
+          <p:nvPr/>
+        </p:nvSpPr>
+        <p:spPr>
+          <a:xfrm>
+            <a:off x="1371600" y="1399032"/>
+            <a:ext cx="1679448" cy="1545336"/>
           </a:xfrm>
           <a:prstGeom prst="rect">
             <a:avLst/>
@@ -6362,7 +6451,7 @@
           <a:ln/>
         </p:spPr>
         <p:txBody>
-          <a:bodyPr wrap="square" lIns="25400" tIns="25400" rIns="25400" bIns="25400" rtlCol="0" anchor="t"/>
+          <a:bodyPr wrap="square" lIns="38100" tIns="38100" rIns="38100" bIns="38100" rtlCol="0" anchor="t"/>
           <a:lstStyle/>
           <a:p>
             <a:pPr algn="l" indent="0" marL="0">
@@ -6377,13 +6466,13 @@
             <a:r>
               <a:rPr lang="en-US" sz="1100" b="1" dirty="0">
                 <a:solidFill>
-                  <a:srgbClr val="A8841A"/>
-                </a:solidFill>
-                <a:latin typeface="Calibri" pitchFamily="34" charset="0"/>
-                <a:ea typeface="Calibri" pitchFamily="34" charset="-122"/>
-                <a:cs typeface="Calibri" pitchFamily="34" charset="-120"/>
-              </a:rPr>
-              <a:t>EXEMPLO NA GESTÃO PÚBLICA</a:t>
+                  <a:srgbClr val="2A8C85"/>
+                </a:solidFill>
+                <a:latin typeface="Calibri" pitchFamily="34" charset="0"/>
+                <a:ea typeface="Calibri" pitchFamily="34" charset="-122"/>
+                <a:cs typeface="Calibri" pitchFamily="34" charset="-120"/>
+              </a:rPr>
+              <a:t>DEVER 1</a:t>
             </a:r>
             <a:endParaRPr lang="en-US" sz="1100" dirty="0"/>
           </a:p>
@@ -6398,7 +6487,7 @@
               <a:buNone/>
             </a:pPr>
             <a:r>
-              <a:rPr lang="en-US" sz="1500" b="1" dirty="0">
+              <a:rPr lang="en-US" sz="1600" b="1" dirty="0">
                 <a:solidFill>
                   <a:srgbClr val="13294B"/>
                 </a:solidFill>
@@ -6406,7 +6495,7 @@
                 <a:ea typeface="Calibri" pitchFamily="34" charset="-122"/>
                 <a:cs typeface="Calibri" pitchFamily="34" charset="-120"/>
               </a:rPr>
-              <a:t>Rodovias, saneamento, hospitais</a:t>
+              <a:t>Defesa</a:t>
             </a:r>
             <a:endParaRPr lang="en-US" sz="1100" dirty="0"/>
           </a:p>
@@ -6418,7 +6507,7 @@
               <a:buNone/>
             </a:pPr>
             <a:r>
-              <a:rPr lang="en-US" sz="1400" dirty="0">
+              <a:rPr lang="en-US" sz="1350" dirty="0">
                 <a:solidFill>
                   <a:srgbClr val="1F2A37"/>
                 </a:solidFill>
@@ -6426,7 +6515,7 @@
                 <a:ea typeface="Calibri" pitchFamily="34" charset="-122"/>
                 <a:cs typeface="Calibri" pitchFamily="34" charset="-120"/>
               </a:rPr>
-              <a:t>Obras de grande porte continuam dependendo do Estado, que pode executá-las diretamente ou contratá-las com a iniciativa privada.</a:t>
+              <a:t>Proteger a sociedade contra agressões externas.</a:t>
             </a:r>
             <a:endParaRPr lang="en-US" sz="1100" dirty="0"/>
           </a:p>
@@ -6434,18 +6523,18 @@
       </p:sp>
       <p:sp>
         <p:nvSpPr>
-          <p:cNvPr id="7" name="Text 4"/>
-          <p:cNvSpPr txBox="1"/>
-          <p:nvPr/>
-        </p:nvSpPr>
-        <p:spPr>
-          <a:xfrm>
-            <a:off x="685800" y="2651760"/>
-            <a:ext cx="2456688" cy="1508760"/>
+          <p:cNvPr id="8" name="Shape 5"/>
+          <p:cNvSpPr/>
+          <p:nvPr/>
+        </p:nvSpPr>
+        <p:spPr>
+          <a:xfrm>
+            <a:off x="3343656" y="1325880"/>
+            <a:ext cx="2456688" cy="1691640"/>
           </a:xfrm>
           <a:prstGeom prst="roundRect">
             <a:avLst>
-              <a:gd name="adj" fmla="val 3636"/>
+              <a:gd name="adj" fmla="val 3243"/>
             </a:avLst>
           </a:prstGeom>
           <a:solidFill>
@@ -6455,10 +6544,75 @@
             <a:solidFill>
               <a:srgbClr val="DCD5C1"/>
             </a:solidFill>
+            <a:prstDash val="solid"/>
           </a:ln>
         </p:spPr>
-        <p:txBody>
-          <a:bodyPr wrap="square" lIns="101600" tIns="101600" rIns="101600" bIns="101600" rtlCol="0" anchor="t"/>
+      </p:sp>
+      <p:sp>
+        <p:nvSpPr>
+          <p:cNvPr id="9" name="Shape 6"/>
+          <p:cNvSpPr/>
+          <p:nvPr/>
+        </p:nvSpPr>
+        <p:spPr>
+          <a:xfrm>
+            <a:off x="3480816" y="1481328"/>
+            <a:ext cx="457200" cy="457200"/>
+          </a:xfrm>
+          <a:prstGeom prst="roundRect">
+            <a:avLst>
+              <a:gd name="adj" fmla="val 16000"/>
+            </a:avLst>
+          </a:prstGeom>
+          <a:solidFill>
+            <a:srgbClr val="13294B"/>
+          </a:solidFill>
+          <a:ln/>
+        </p:spPr>
+      </p:sp>
+      <p:pic>
+        <p:nvPicPr>
+          <p:cNvPr id="10" name="Image 1" descr="/tmp/claude-0/-home-user-zero-claude/d7e33190-c541-582c-a7cc-1156817732ce/scratchpad/deck/assets/icon_FaGavel.png">    </p:cNvPr>
+          <p:cNvPicPr>
+            <a:picLocks noChangeAspect="1"/>
+          </p:cNvPicPr>
+          <p:nvPr/>
+        </p:nvPicPr>
+        <p:blipFill>
+          <a:blip r:embed="rId3"/>
+          <a:stretch>
+            <a:fillRect/>
+          </a:stretch>
+        </p:blipFill>
+        <p:spPr>
+          <a:xfrm>
+            <a:off x="3581400" y="1581912"/>
+            <a:ext cx="256032" cy="256032"/>
+          </a:xfrm>
+          <a:prstGeom prst="rect">
+            <a:avLst/>
+          </a:prstGeom>
+        </p:spPr>
+      </p:pic>
+      <p:sp>
+        <p:nvSpPr>
+          <p:cNvPr id="11" name="Text 7"/>
+          <p:cNvSpPr txBox="1"/>
+          <p:nvPr/>
+        </p:nvSpPr>
+        <p:spPr>
+          <a:xfrm>
+            <a:off x="4029456" y="1399032"/>
+            <a:ext cx="1679448" cy="1545336"/>
+          </a:xfrm>
+          <a:prstGeom prst="rect">
+            <a:avLst/>
+          </a:prstGeom>
+          <a:noFill/>
+          <a:ln/>
+        </p:spPr>
+        <p:txBody>
+          <a:bodyPr wrap="square" lIns="38100" tIns="38100" rIns="38100" bIns="38100" rtlCol="0" anchor="t"/>
           <a:lstStyle/>
           <a:p>
             <a:pPr algn="l" indent="0" marL="0">
@@ -6479,7 +6633,7 @@
                 <a:ea typeface="Calibri" pitchFamily="34" charset="-122"/>
                 <a:cs typeface="Calibri" pitchFamily="34" charset="-120"/>
               </a:rPr>
-              <a:t>OBRA PÚBLICA</a:t>
+              <a:t>DEVER 2</a:t>
             </a:r>
             <a:endParaRPr lang="en-US" sz="1100" dirty="0"/>
           </a:p>
@@ -6502,7 +6656,7 @@
                 <a:ea typeface="Calibri" pitchFamily="34" charset="-122"/>
                 <a:cs typeface="Calibri" pitchFamily="34" charset="-120"/>
               </a:rPr>
-              <a:t>Execução direta</a:t>
+              <a:t>Justiça</a:t>
             </a:r>
             <a:endParaRPr lang="en-US" sz="1100" dirty="0"/>
           </a:p>
@@ -6514,7 +6668,7 @@
               <a:buNone/>
             </a:pPr>
             <a:r>
-              <a:rPr lang="en-US" sz="1300" dirty="0">
+              <a:rPr lang="en-US" sz="1350" dirty="0">
                 <a:solidFill>
                   <a:srgbClr val="1F2A37"/>
                 </a:solidFill>
@@ -6522,7 +6676,7 @@
                 <a:ea typeface="Calibri" pitchFamily="34" charset="-122"/>
                 <a:cs typeface="Calibri" pitchFamily="34" charset="-120"/>
               </a:rPr>
-              <a:t>O governo licita e paga a obra com recursos do orçamento.</a:t>
+              <a:t>Proteger cada cidadão contra a injustiça de outros.</a:t>
             </a:r>
             <a:endParaRPr lang="en-US" sz="1100" dirty="0"/>
           </a:p>
@@ -6530,18 +6684,18 @@
       </p:sp>
       <p:sp>
         <p:nvSpPr>
-          <p:cNvPr id="8" name="Text 5"/>
-          <p:cNvSpPr txBox="1"/>
-          <p:nvPr/>
-        </p:nvSpPr>
-        <p:spPr>
-          <a:xfrm>
-            <a:off x="3343656" y="2651760"/>
-            <a:ext cx="2456688" cy="1508760"/>
+          <p:cNvPr id="12" name="Shape 8"/>
+          <p:cNvSpPr/>
+          <p:nvPr/>
+        </p:nvSpPr>
+        <p:spPr>
+          <a:xfrm>
+            <a:off x="6001512" y="1325880"/>
+            <a:ext cx="2456688" cy="1691640"/>
           </a:xfrm>
           <a:prstGeom prst="roundRect">
             <a:avLst>
-              <a:gd name="adj" fmla="val 3636"/>
+              <a:gd name="adj" fmla="val 3243"/>
             </a:avLst>
           </a:prstGeom>
           <a:solidFill>
@@ -6551,10 +6705,75 @@
             <a:solidFill>
               <a:srgbClr val="DCD5C1"/>
             </a:solidFill>
+            <a:prstDash val="solid"/>
           </a:ln>
         </p:spPr>
-        <p:txBody>
-          <a:bodyPr wrap="square" lIns="101600" tIns="101600" rIns="101600" bIns="101600" rtlCol="0" anchor="t"/>
+      </p:sp>
+      <p:sp>
+        <p:nvSpPr>
+          <p:cNvPr id="13" name="Shape 9"/>
+          <p:cNvSpPr/>
+          <p:nvPr/>
+        </p:nvSpPr>
+        <p:spPr>
+          <a:xfrm>
+            <a:off x="6138672" y="1481328"/>
+            <a:ext cx="457200" cy="457200"/>
+          </a:xfrm>
+          <a:prstGeom prst="roundRect">
+            <a:avLst>
+              <a:gd name="adj" fmla="val 16000"/>
+            </a:avLst>
+          </a:prstGeom>
+          <a:solidFill>
+            <a:srgbClr val="13294B"/>
+          </a:solidFill>
+          <a:ln/>
+        </p:spPr>
+      </p:sp>
+      <p:pic>
+        <p:nvPicPr>
+          <p:cNvPr id="14" name="Image 2" descr="/tmp/claude-0/-home-user-zero-claude/d7e33190-c541-582c-a7cc-1156817732ce/scratchpad/deck/assets/icon_FaBuilding.png">    </p:cNvPr>
+          <p:cNvPicPr>
+            <a:picLocks noChangeAspect="1"/>
+          </p:cNvPicPr>
+          <p:nvPr/>
+        </p:nvPicPr>
+        <p:blipFill>
+          <a:blip r:embed="rId4"/>
+          <a:stretch>
+            <a:fillRect/>
+          </a:stretch>
+        </p:blipFill>
+        <p:spPr>
+          <a:xfrm>
+            <a:off x="6239256" y="1581912"/>
+            <a:ext cx="256032" cy="256032"/>
+          </a:xfrm>
+          <a:prstGeom prst="rect">
+            <a:avLst/>
+          </a:prstGeom>
+        </p:spPr>
+      </p:pic>
+      <p:sp>
+        <p:nvSpPr>
+          <p:cNvPr id="15" name="Text 10"/>
+          <p:cNvSpPr txBox="1"/>
+          <p:nvPr/>
+        </p:nvSpPr>
+        <p:spPr>
+          <a:xfrm>
+            <a:off x="6687312" y="1399032"/>
+            <a:ext cx="1679448" cy="1545336"/>
+          </a:xfrm>
+          <a:prstGeom prst="rect">
+            <a:avLst/>
+          </a:prstGeom>
+          <a:noFill/>
+          <a:ln/>
+        </p:spPr>
+        <p:txBody>
+          <a:bodyPr wrap="square" lIns="38100" tIns="38100" rIns="38100" bIns="38100" rtlCol="0" anchor="t"/>
           <a:lstStyle/>
           <a:p>
             <a:pPr algn="l" indent="0" marL="0">
@@ -6575,7 +6794,7 @@
                 <a:ea typeface="Calibri" pitchFamily="34" charset="-122"/>
                 <a:cs typeface="Calibri" pitchFamily="34" charset="-120"/>
               </a:rPr>
-              <a:t>LEI 8.987/1995</a:t>
+              <a:t>DEVER 3</a:t>
             </a:r>
             <a:endParaRPr lang="en-US" sz="1100" dirty="0"/>
           </a:p>
@@ -6598,7 +6817,7 @@
                 <a:ea typeface="Calibri" pitchFamily="34" charset="-122"/>
                 <a:cs typeface="Calibri" pitchFamily="34" charset="-120"/>
               </a:rPr>
-              <a:t>Concessão</a:t>
+              <a:t>Obras públicas</a:t>
             </a:r>
             <a:endParaRPr lang="en-US" sz="1100" dirty="0"/>
           </a:p>
@@ -6610,7 +6829,7 @@
               <a:buNone/>
             </a:pPr>
             <a:r>
-              <a:rPr lang="en-US" sz="1300" dirty="0">
+              <a:rPr lang="en-US" sz="1350" dirty="0">
                 <a:solidFill>
                   <a:srgbClr val="1F2A37"/>
                 </a:solidFill>
@@ -6618,7 +6837,7 @@
                 <a:ea typeface="Calibri" pitchFamily="34" charset="-122"/>
                 <a:cs typeface="Calibri" pitchFamily="34" charset="-120"/>
               </a:rPr>
-              <a:t>A empresa constrói ou opera e é remunerada por tarifas (ex.: pedágio).</a:t>
+              <a:t>Manter obras e instituições que não dão lucro ao particular.</a:t>
             </a:r>
             <a:endParaRPr lang="en-US" sz="1100" dirty="0"/>
           </a:p>
@@ -6626,67 +6845,37 @@
       </p:sp>
       <p:sp>
         <p:nvSpPr>
-          <p:cNvPr id="9" name="Text 6"/>
-          <p:cNvSpPr txBox="1"/>
-          <p:nvPr/>
-        </p:nvSpPr>
-        <p:spPr>
-          <a:xfrm>
-            <a:off x="6001512" y="2651760"/>
-            <a:ext cx="2456688" cy="1508760"/>
+          <p:cNvPr id="16" name="Text 11"/>
+          <p:cNvSpPr txBox="1"/>
+          <p:nvPr/>
+        </p:nvSpPr>
+        <p:spPr>
+          <a:xfrm>
+            <a:off x="685800" y="3291840"/>
+            <a:ext cx="7772400" cy="685800"/>
           </a:xfrm>
           <a:prstGeom prst="roundRect">
             <a:avLst>
-              <a:gd name="adj" fmla="val 3636"/>
+              <a:gd name="adj" fmla="val 10667"/>
             </a:avLst>
           </a:prstGeom>
           <a:solidFill>
-            <a:srgbClr val="FFFFFF"/>
+            <a:srgbClr val="E6F2F0"/>
           </a:solidFill>
-          <a:ln w="12700">
-            <a:solidFill>
-              <a:srgbClr val="DCD5C1"/>
-            </a:solidFill>
-          </a:ln>
-        </p:spPr>
-        <p:txBody>
-          <a:bodyPr wrap="square" lIns="101600" tIns="101600" rIns="101600" bIns="101600" rtlCol="0" anchor="t"/>
-          <a:lstStyle/>
-          <a:p>
-            <a:pPr algn="l" indent="0" marL="0">
-              <a:lnSpc>
-                <a:spcPct val="100000"/>
-              </a:lnSpc>
-              <a:spcAft>
-                <a:spcPts val="200"/>
-              </a:spcAft>
-              <a:buNone/>
-            </a:pPr>
-            <a:r>
-              <a:rPr lang="en-US" sz="1100" b="1" dirty="0">
-                <a:solidFill>
-                  <a:srgbClr val="2A8C85"/>
-                </a:solidFill>
-                <a:latin typeface="Calibri" pitchFamily="34" charset="0"/>
-                <a:ea typeface="Calibri" pitchFamily="34" charset="-122"/>
-                <a:cs typeface="Calibri" pitchFamily="34" charset="-120"/>
-              </a:rPr>
-              <a:t>LEI 11.079/2004</a:t>
-            </a:r>
-            <a:endParaRPr lang="en-US" sz="1100" dirty="0"/>
-          </a:p>
-          <a:p>
-            <a:pPr algn="l" indent="0" marL="0">
-              <a:lnSpc>
-                <a:spcPct val="100000"/>
-              </a:lnSpc>
-              <a:spcAft>
-                <a:spcPts val="300"/>
-              </a:spcAft>
-              <a:buNone/>
-            </a:pPr>
-            <a:r>
-              <a:rPr lang="en-US" sz="1600" b="1" dirty="0">
+          <a:ln/>
+        </p:spPr>
+        <p:txBody>
+          <a:bodyPr wrap="square" lIns="127000" tIns="127000" rIns="127000" bIns="127000" rtlCol="0" anchor="ctr"/>
+          <a:lstStyle/>
+          <a:p>
+            <a:pPr algn="ctr" indent="0" marL="0">
+              <a:lnSpc>
+                <a:spcPct val="100000"/>
+              </a:lnSpc>
+              <a:buNone/>
+            </a:pPr>
+            <a:r>
+              <a:rPr lang="en-US" sz="1700" b="1" dirty="0">
                 <a:solidFill>
                   <a:srgbClr val="13294B"/>
                 </a:solidFill>
@@ -6694,35 +6883,15 @@
                 <a:ea typeface="Calibri" pitchFamily="34" charset="-122"/>
                 <a:cs typeface="Calibri" pitchFamily="34" charset="-120"/>
               </a:rPr>
-              <a:t>PPP</a:t>
-            </a:r>
-            <a:endParaRPr lang="en-US" sz="1100" dirty="0"/>
-          </a:p>
-          <a:p>
-            <a:pPr algn="l" indent="0" marL="0">
-              <a:lnSpc>
-                <a:spcPct val="100000"/>
-              </a:lnSpc>
-              <a:buNone/>
-            </a:pPr>
-            <a:r>
-              <a:rPr lang="en-US" sz="1300" dirty="0">
-                <a:solidFill>
-                  <a:srgbClr val="1F2A37"/>
-                </a:solidFill>
-                <a:latin typeface="Calibri" pitchFamily="34" charset="0"/>
-                <a:ea typeface="Calibri" pitchFamily="34" charset="-122"/>
-                <a:cs typeface="Calibri" pitchFamily="34" charset="-120"/>
-              </a:rPr>
-              <a:t>Parceria público-privada: tarifa e/ou pagamento do poder público.</a:t>
-            </a:r>
-            <a:endParaRPr lang="en-US" sz="1100" dirty="0"/>
-          </a:p>
-        </p:txBody>
-      </p:sp>
-      <p:sp>
-        <p:nvSpPr>
-          <p:cNvPr id="10" name="Text 7"/>
+              <a:t>Laissez-faire, laissez-passer: o Estado “guarda-noturno”.</a:t>
+            </a:r>
+            <a:endParaRPr lang="en-US" sz="1700" dirty="0"/>
+          </a:p>
+        </p:txBody>
+      </p:sp>
+      <p:sp>
+        <p:nvSpPr>
+          <p:cNvPr id="17" name="Text 12"/>
           <p:cNvSpPr txBox="1"/>
           <p:nvPr/>
         </p:nvSpPr>
@@ -6829,7 +6998,7 @@
               <a:buNone/>
             </a:pPr>
             <a:r>
-              <a:rPr lang="en-US" sz="2300" b="1" dirty="0">
+              <a:rPr lang="en-US" sz="2800" b="1" dirty="0">
                 <a:solidFill>
                   <a:srgbClr val="13294B"/>
                 </a:solidFill>
@@ -6837,26 +7006,182 @@
                 <a:ea typeface="Calibri" pitchFamily="34" charset="-122"/>
                 <a:cs typeface="Calibri" pitchFamily="34" charset="-120"/>
               </a:rPr>
-              <a:t>Ricardo e Say: a economia política clássica</a:t>
-            </a:r>
-            <a:endParaRPr lang="en-US" sz="2300" dirty="0"/>
-          </a:p>
-        </p:txBody>
-      </p:sp>
-      <p:sp>
-        <p:nvSpPr>
-          <p:cNvPr id="3" name="Text 1"/>
-          <p:cNvSpPr txBox="1"/>
-          <p:nvPr/>
-        </p:nvSpPr>
-        <p:spPr>
-          <a:xfrm>
-            <a:off x="685800" y="1188720"/>
-            <a:ext cx="3794760" cy="3017520"/>
+              <a:t>O terceiro dever de Smith hoje</a:t>
+            </a:r>
+            <a:endParaRPr lang="en-US" sz="2800" dirty="0"/>
+          </a:p>
+        </p:txBody>
+      </p:sp>
+      <p:sp>
+        <p:nvSpPr>
+          <p:cNvPr id="3" name="Shape 1"/>
+          <p:cNvSpPr/>
+          <p:nvPr/>
+        </p:nvSpPr>
+        <p:spPr>
+          <a:xfrm>
+            <a:off x="685800" y="1143000"/>
+            <a:ext cx="7772400" cy="1325880"/>
           </a:xfrm>
           <a:prstGeom prst="roundRect">
             <a:avLst>
-              <a:gd name="adj" fmla="val 1818"/>
+              <a:gd name="adj" fmla="val 5517"/>
+            </a:avLst>
+          </a:prstGeom>
+          <a:solidFill>
+            <a:srgbClr val="FBF4DC"/>
+          </a:solidFill>
+          <a:ln/>
+        </p:spPr>
+      </p:sp>
+      <p:sp>
+        <p:nvSpPr>
+          <p:cNvPr id="4" name="Shape 2"/>
+          <p:cNvSpPr/>
+          <p:nvPr/>
+        </p:nvSpPr>
+        <p:spPr>
+          <a:xfrm>
+            <a:off x="850392" y="1307592"/>
+            <a:ext cx="457200" cy="457200"/>
+          </a:xfrm>
+          <a:prstGeom prst="roundRect">
+            <a:avLst>
+              <a:gd name="adj" fmla="val 16000"/>
+            </a:avLst>
+          </a:prstGeom>
+          <a:solidFill>
+            <a:srgbClr val="E9C85C"/>
+          </a:solidFill>
+          <a:ln/>
+        </p:spPr>
+      </p:sp>
+      <p:pic>
+        <p:nvPicPr>
+          <p:cNvPr id="5" name="Image 0" descr="/tmp/claude-0/-home-user-zero-claude/d7e33190-c541-582c-a7cc-1156817732ce/scratchpad/deck/assets/icon_FaLightbulb.png">    </p:cNvPr>
+          <p:cNvPicPr>
+            <a:picLocks noChangeAspect="1"/>
+          </p:cNvPicPr>
+          <p:nvPr/>
+        </p:nvPicPr>
+        <p:blipFill>
+          <a:blip r:embed="rId2"/>
+          <a:stretch>
+            <a:fillRect/>
+          </a:stretch>
+        </p:blipFill>
+        <p:spPr>
+          <a:xfrm>
+            <a:off x="950976" y="1408176"/>
+            <a:ext cx="256032" cy="256032"/>
+          </a:xfrm>
+          <a:prstGeom prst="rect">
+            <a:avLst/>
+          </a:prstGeom>
+        </p:spPr>
+      </p:pic>
+      <p:sp>
+        <p:nvSpPr>
+          <p:cNvPr id="6" name="Text 3"/>
+          <p:cNvSpPr txBox="1"/>
+          <p:nvPr/>
+        </p:nvSpPr>
+        <p:spPr>
+          <a:xfrm>
+            <a:off x="1417320" y="1252728"/>
+            <a:ext cx="6903720" cy="1106424"/>
+          </a:xfrm>
+          <a:prstGeom prst="rect">
+            <a:avLst/>
+          </a:prstGeom>
+          <a:noFill/>
+          <a:ln/>
+        </p:spPr>
+        <p:txBody>
+          <a:bodyPr wrap="square" lIns="25400" tIns="25400" rIns="25400" bIns="25400" rtlCol="0" anchor="t"/>
+          <a:lstStyle/>
+          <a:p>
+            <a:pPr algn="l" indent="0" marL="0">
+              <a:lnSpc>
+                <a:spcPct val="100000"/>
+              </a:lnSpc>
+              <a:spcAft>
+                <a:spcPts val="200"/>
+              </a:spcAft>
+              <a:buNone/>
+            </a:pPr>
+            <a:r>
+              <a:rPr lang="en-US" sz="1100" b="1" dirty="0">
+                <a:solidFill>
+                  <a:srgbClr val="A8841A"/>
+                </a:solidFill>
+                <a:latin typeface="Calibri" pitchFamily="34" charset="0"/>
+                <a:ea typeface="Calibri" pitchFamily="34" charset="-122"/>
+                <a:cs typeface="Calibri" pitchFamily="34" charset="-120"/>
+              </a:rPr>
+              <a:t>EXEMPLO NA GESTÃO PÚBLICA</a:t>
+            </a:r>
+            <a:endParaRPr lang="en-US" sz="1100" dirty="0"/>
+          </a:p>
+          <a:p>
+            <a:pPr algn="l" indent="0" marL="0">
+              <a:lnSpc>
+                <a:spcPct val="100000"/>
+              </a:lnSpc>
+              <a:spcAft>
+                <a:spcPts val="300"/>
+              </a:spcAft>
+              <a:buNone/>
+            </a:pPr>
+            <a:r>
+              <a:rPr lang="en-US" sz="1500" b="1" dirty="0">
+                <a:solidFill>
+                  <a:srgbClr val="13294B"/>
+                </a:solidFill>
+                <a:latin typeface="Calibri" pitchFamily="34" charset="0"/>
+                <a:ea typeface="Calibri" pitchFamily="34" charset="-122"/>
+                <a:cs typeface="Calibri" pitchFamily="34" charset="-120"/>
+              </a:rPr>
+              <a:t>Rodovias, saneamento, hospitais</a:t>
+            </a:r>
+            <a:endParaRPr lang="en-US" sz="1100" dirty="0"/>
+          </a:p>
+          <a:p>
+            <a:pPr algn="l" indent="0" marL="0">
+              <a:lnSpc>
+                <a:spcPct val="100000"/>
+              </a:lnSpc>
+              <a:buNone/>
+            </a:pPr>
+            <a:r>
+              <a:rPr lang="en-US" sz="1400" dirty="0">
+                <a:solidFill>
+                  <a:srgbClr val="1F2A37"/>
+                </a:solidFill>
+                <a:latin typeface="Calibri" pitchFamily="34" charset="0"/>
+                <a:ea typeface="Calibri" pitchFamily="34" charset="-122"/>
+                <a:cs typeface="Calibri" pitchFamily="34" charset="-120"/>
+              </a:rPr>
+              <a:t>Obras de grande porte continuam dependendo do Estado, que pode executá-las diretamente ou contratá-las com a iniciativa privada.</a:t>
+            </a:r>
+            <a:endParaRPr lang="en-US" sz="1100" dirty="0"/>
+          </a:p>
+        </p:txBody>
+      </p:sp>
+      <p:sp>
+        <p:nvSpPr>
+          <p:cNvPr id="7" name="Text 4"/>
+          <p:cNvSpPr txBox="1"/>
+          <p:nvPr/>
+        </p:nvSpPr>
+        <p:spPr>
+          <a:xfrm>
+            <a:off x="685800" y="2651760"/>
+            <a:ext cx="2456688" cy="1508760"/>
+          </a:xfrm>
+          <a:prstGeom prst="roundRect">
+            <a:avLst>
+              <a:gd name="adj" fmla="val 3636"/>
             </a:avLst>
           </a:prstGeom>
           <a:solidFill>
@@ -6869,8 +7194,31 @@
           </a:ln>
         </p:spPr>
         <p:txBody>
-          <a:bodyPr wrap="square" lIns="127000" tIns="127000" rIns="127000" bIns="127000" rtlCol="0" anchor="t"/>
-          <a:lstStyle/>
+          <a:bodyPr wrap="square" lIns="101600" tIns="101600" rIns="101600" bIns="101600" rtlCol="0" anchor="t"/>
+          <a:lstStyle/>
+          <a:p>
+            <a:pPr algn="l" indent="0" marL="0">
+              <a:lnSpc>
+                <a:spcPct val="100000"/>
+              </a:lnSpc>
+              <a:spcAft>
+                <a:spcPts val="200"/>
+              </a:spcAft>
+              <a:buNone/>
+            </a:pPr>
+            <a:r>
+              <a:rPr lang="en-US" sz="1100" b="1" dirty="0">
+                <a:solidFill>
+                  <a:srgbClr val="2A8C85"/>
+                </a:solidFill>
+                <a:latin typeface="Calibri" pitchFamily="34" charset="0"/>
+                <a:ea typeface="Calibri" pitchFamily="34" charset="-122"/>
+                <a:cs typeface="Calibri" pitchFamily="34" charset="-120"/>
+              </a:rPr>
+              <a:t>OBRA PÚBLICA</a:t>
+            </a:r>
+            <a:endParaRPr lang="en-US" sz="1100" dirty="0"/>
+          </a:p>
           <a:p>
             <a:pPr algn="l" indent="0" marL="0">
               <a:lnSpc>
@@ -6882,53 +7230,27 @@
               <a:buNone/>
             </a:pPr>
             <a:r>
-              <a:rPr lang="en-US" sz="1200" b="1" dirty="0">
-                <a:solidFill>
-                  <a:srgbClr val="2A8C85"/>
-                </a:solidFill>
-                <a:latin typeface="Calibri" pitchFamily="34" charset="0"/>
-                <a:ea typeface="Calibri" pitchFamily="34" charset="-122"/>
-                <a:cs typeface="Calibri" pitchFamily="34" charset="-120"/>
-              </a:rPr>
-              <a:t>DAVID RICARDO (1817)</a:t>
-            </a:r>
-            <a:endParaRPr lang="en-US" sz="1200" dirty="0"/>
+              <a:rPr lang="en-US" sz="1600" b="1" dirty="0">
+                <a:solidFill>
+                  <a:srgbClr val="13294B"/>
+                </a:solidFill>
+                <a:latin typeface="Calibri" pitchFamily="34" charset="0"/>
+                <a:ea typeface="Calibri" pitchFamily="34" charset="-122"/>
+                <a:cs typeface="Calibri" pitchFamily="34" charset="-120"/>
+              </a:rPr>
+              <a:t>Execução direta</a:t>
+            </a:r>
+            <a:endParaRPr lang="en-US" sz="1100" dirty="0"/>
           </a:p>
           <a:p>
             <a:pPr algn="l" indent="0" marL="0">
               <a:lnSpc>
                 <a:spcPct val="100000"/>
               </a:lnSpc>
-              <a:spcAft>
-                <a:spcPts val="500"/>
-              </a:spcAft>
-              <a:buNone/>
-            </a:pPr>
-            <a:r>
-              <a:rPr lang="en-US" sz="1700" b="1" dirty="0">
-                <a:solidFill>
-                  <a:srgbClr val="13294B"/>
-                </a:solidFill>
-                <a:latin typeface="Calibri" pitchFamily="34" charset="0"/>
-                <a:ea typeface="Calibri" pitchFamily="34" charset="-122"/>
-                <a:cs typeface="Calibri" pitchFamily="34" charset="-120"/>
-              </a:rPr>
-              <a:t>Vantagens comparativas</a:t>
-            </a:r>
-            <a:endParaRPr lang="en-US" sz="1200" dirty="0"/>
-          </a:p>
-          <a:p>
-            <a:pPr algn="l" indent="0" marL="0">
-              <a:lnSpc>
-                <a:spcPct val="100000"/>
-              </a:lnSpc>
-              <a:spcAft>
-                <a:spcPts val="600"/>
-              </a:spcAft>
-              <a:buNone/>
-            </a:pPr>
-            <a:r>
-              <a:rPr lang="en-US" sz="1400" dirty="0">
+              <a:buNone/>
+            </a:pPr>
+            <a:r>
+              <a:rPr lang="en-US" sz="1300" dirty="0">
                 <a:solidFill>
                   <a:srgbClr val="1F2A37"/>
                 </a:solidFill>
@@ -6936,56 +7258,63 @@
                 <a:ea typeface="Calibri" pitchFamily="34" charset="-122"/>
                 <a:cs typeface="Calibri" pitchFamily="34" charset="-120"/>
               </a:rPr>
-              <a:t>Portugal produz vinho e a Inglaterra, tecidos, com menor custo relativo. Especializando-se e trocando, os dois países ganham.</a:t>
-            </a:r>
-            <a:endParaRPr lang="en-US" sz="1200" dirty="0"/>
-          </a:p>
-          <a:p>
-            <a:pPr algn="l" indent="0" marL="0">
-              <a:lnSpc>
-                <a:spcPct val="100000"/>
-              </a:lnSpc>
-              <a:buNone/>
-            </a:pPr>
-            <a:r>
-              <a:rPr lang="en-US" sz="1400" b="1" dirty="0">
-                <a:solidFill>
-                  <a:srgbClr val="13294B"/>
-                </a:solidFill>
-                <a:latin typeface="Calibri" pitchFamily="34" charset="0"/>
-                <a:ea typeface="Calibri" pitchFamily="34" charset="-122"/>
-                <a:cs typeface="Calibri" pitchFamily="34" charset="-120"/>
-              </a:rPr>
-              <a:t>→ defesa do livre comércio</a:t>
-            </a:r>
-            <a:endParaRPr lang="en-US" sz="1200" dirty="0"/>
-          </a:p>
-        </p:txBody>
-      </p:sp>
-      <p:sp>
-        <p:nvSpPr>
-          <p:cNvPr id="4" name="Text 2"/>
-          <p:cNvSpPr txBox="1"/>
-          <p:nvPr/>
-        </p:nvSpPr>
-        <p:spPr>
-          <a:xfrm>
-            <a:off x="4663440" y="1188720"/>
-            <a:ext cx="3794760" cy="3017520"/>
+              <a:t>O governo licita e paga a obra com recursos do orçamento.</a:t>
+            </a:r>
+            <a:endParaRPr lang="en-US" sz="1100" dirty="0"/>
+          </a:p>
+        </p:txBody>
+      </p:sp>
+      <p:sp>
+        <p:nvSpPr>
+          <p:cNvPr id="8" name="Text 5"/>
+          <p:cNvSpPr txBox="1"/>
+          <p:nvPr/>
+        </p:nvSpPr>
+        <p:spPr>
+          <a:xfrm>
+            <a:off x="3343656" y="2651760"/>
+            <a:ext cx="2456688" cy="1508760"/>
           </a:xfrm>
           <a:prstGeom prst="roundRect">
             <a:avLst>
-              <a:gd name="adj" fmla="val 1818"/>
+              <a:gd name="adj" fmla="val 3636"/>
             </a:avLst>
           </a:prstGeom>
           <a:solidFill>
-            <a:srgbClr val="E6F2F0"/>
+            <a:srgbClr val="FFFFFF"/>
           </a:solidFill>
-          <a:ln/>
-        </p:spPr>
-        <p:txBody>
-          <a:bodyPr wrap="square" lIns="127000" tIns="127000" rIns="127000" bIns="127000" rtlCol="0" anchor="t"/>
-          <a:lstStyle/>
+          <a:ln w="12700">
+            <a:solidFill>
+              <a:srgbClr val="DCD5C1"/>
+            </a:solidFill>
+          </a:ln>
+        </p:spPr>
+        <p:txBody>
+          <a:bodyPr wrap="square" lIns="101600" tIns="101600" rIns="101600" bIns="101600" rtlCol="0" anchor="t"/>
+          <a:lstStyle/>
+          <a:p>
+            <a:pPr algn="l" indent="0" marL="0">
+              <a:lnSpc>
+                <a:spcPct val="100000"/>
+              </a:lnSpc>
+              <a:spcAft>
+                <a:spcPts val="200"/>
+              </a:spcAft>
+              <a:buNone/>
+            </a:pPr>
+            <a:r>
+              <a:rPr lang="en-US" sz="1100" b="1" dirty="0">
+                <a:solidFill>
+                  <a:srgbClr val="2A8C85"/>
+                </a:solidFill>
+                <a:latin typeface="Calibri" pitchFamily="34" charset="0"/>
+                <a:ea typeface="Calibri" pitchFamily="34" charset="-122"/>
+                <a:cs typeface="Calibri" pitchFamily="34" charset="-120"/>
+              </a:rPr>
+              <a:t>LEI 8.987/1995</a:t>
+            </a:r>
+            <a:endParaRPr lang="en-US" sz="1100" dirty="0"/>
+          </a:p>
           <a:p>
             <a:pPr algn="l" indent="0" marL="0">
               <a:lnSpc>
@@ -6997,7 +7326,80 @@
               <a:buNone/>
             </a:pPr>
             <a:r>
-              <a:rPr lang="en-US" sz="1200" b="1" dirty="0">
+              <a:rPr lang="en-US" sz="1600" b="1" dirty="0">
+                <a:solidFill>
+                  <a:srgbClr val="13294B"/>
+                </a:solidFill>
+                <a:latin typeface="Calibri" pitchFamily="34" charset="0"/>
+                <a:ea typeface="Calibri" pitchFamily="34" charset="-122"/>
+                <a:cs typeface="Calibri" pitchFamily="34" charset="-120"/>
+              </a:rPr>
+              <a:t>Concessão</a:t>
+            </a:r>
+            <a:endParaRPr lang="en-US" sz="1100" dirty="0"/>
+          </a:p>
+          <a:p>
+            <a:pPr algn="l" indent="0" marL="0">
+              <a:lnSpc>
+                <a:spcPct val="100000"/>
+              </a:lnSpc>
+              <a:buNone/>
+            </a:pPr>
+            <a:r>
+              <a:rPr lang="en-US" sz="1300" dirty="0">
+                <a:solidFill>
+                  <a:srgbClr val="1F2A37"/>
+                </a:solidFill>
+                <a:latin typeface="Calibri" pitchFamily="34" charset="0"/>
+                <a:ea typeface="Calibri" pitchFamily="34" charset="-122"/>
+                <a:cs typeface="Calibri" pitchFamily="34" charset="-120"/>
+              </a:rPr>
+              <a:t>A empresa constrói ou opera e é remunerada por tarifas (ex.: pedágio).</a:t>
+            </a:r>
+            <a:endParaRPr lang="en-US" sz="1100" dirty="0"/>
+          </a:p>
+        </p:txBody>
+      </p:sp>
+      <p:sp>
+        <p:nvSpPr>
+          <p:cNvPr id="9" name="Text 6"/>
+          <p:cNvSpPr txBox="1"/>
+          <p:nvPr/>
+        </p:nvSpPr>
+        <p:spPr>
+          <a:xfrm>
+            <a:off x="6001512" y="2651760"/>
+            <a:ext cx="2456688" cy="1508760"/>
+          </a:xfrm>
+          <a:prstGeom prst="roundRect">
+            <a:avLst>
+              <a:gd name="adj" fmla="val 3636"/>
+            </a:avLst>
+          </a:prstGeom>
+          <a:solidFill>
+            <a:srgbClr val="FFFFFF"/>
+          </a:solidFill>
+          <a:ln w="12700">
+            <a:solidFill>
+              <a:srgbClr val="DCD5C1"/>
+            </a:solidFill>
+          </a:ln>
+        </p:spPr>
+        <p:txBody>
+          <a:bodyPr wrap="square" lIns="101600" tIns="101600" rIns="101600" bIns="101600" rtlCol="0" anchor="t"/>
+          <a:lstStyle/>
+          <a:p>
+            <a:pPr algn="l" indent="0" marL="0">
+              <a:lnSpc>
+                <a:spcPct val="100000"/>
+              </a:lnSpc>
+              <a:spcAft>
+                <a:spcPts val="200"/>
+              </a:spcAft>
+              <a:buNone/>
+            </a:pPr>
+            <a:r>
+              <a:rPr lang="en-US" sz="1100" b="1" dirty="0">
                 <a:solidFill>
                   <a:srgbClr val="2A8C85"/>
                 </a:solidFill>
@@ -7005,9 +7407,9 @@
                 <a:ea typeface="Calibri" pitchFamily="34" charset="-122"/>
                 <a:cs typeface="Calibri" pitchFamily="34" charset="-120"/>
               </a:rPr>
-              <a:t>JEAN-BAPTISTE SAY</a:t>
-            </a:r>
-            <a:endParaRPr lang="en-US" sz="1200" dirty="0"/>
+              <a:t>LEI 11.079/2004</a:t>
+            </a:r>
+            <a:endParaRPr lang="en-US" sz="1100" dirty="0"/>
           </a:p>
           <a:p>
             <a:pPr algn="l" indent="0" marL="0">
@@ -7015,12 +7417,12 @@
                 <a:spcPct val="100000"/>
               </a:lnSpc>
               <a:spcAft>
-                <a:spcPts val="500"/>
+                <a:spcPts val="300"/>
               </a:spcAft>
               <a:buNone/>
             </a:pPr>
             <a:r>
-              <a:rPr lang="en-US" sz="1700" b="1" dirty="0">
+              <a:rPr lang="en-US" sz="1600" b="1" dirty="0">
                 <a:solidFill>
                   <a:srgbClr val="13294B"/>
                 </a:solidFill>
@@ -7028,22 +7430,19 @@
                 <a:ea typeface="Calibri" pitchFamily="34" charset="-122"/>
                 <a:cs typeface="Calibri" pitchFamily="34" charset="-120"/>
               </a:rPr>
-              <a:t>Lei de Say</a:t>
-            </a:r>
-            <a:endParaRPr lang="en-US" sz="1200" dirty="0"/>
+              <a:t>PPP</a:t>
+            </a:r>
+            <a:endParaRPr lang="en-US" sz="1100" dirty="0"/>
           </a:p>
           <a:p>
             <a:pPr algn="l" indent="0" marL="0">
               <a:lnSpc>
                 <a:spcPct val="100000"/>
               </a:lnSpc>
-              <a:spcAft>
-                <a:spcPts val="600"/>
-              </a:spcAft>
-              <a:buNone/>
-            </a:pPr>
-            <a:r>
-              <a:rPr lang="en-US" sz="1400" dirty="0">
+              <a:buNone/>
+            </a:pPr>
+            <a:r>
+              <a:rPr lang="en-US" sz="1300" dirty="0">
                 <a:solidFill>
                   <a:srgbClr val="1F2A37"/>
                 </a:solidFill>
@@ -7051,35 +7450,15 @@
                 <a:ea typeface="Calibri" pitchFamily="34" charset="-122"/>
                 <a:cs typeface="Calibri" pitchFamily="34" charset="-120"/>
               </a:rPr>
-              <a:t>“A oferta cria sua própria procura”: toda produção gera renda suficiente para comprá-la.</a:t>
-            </a:r>
-            <a:endParaRPr lang="en-US" sz="1200" dirty="0"/>
-          </a:p>
-          <a:p>
-            <a:pPr algn="l" indent="0" marL="0">
-              <a:lnSpc>
-                <a:spcPct val="100000"/>
-              </a:lnSpc>
-              <a:buNone/>
-            </a:pPr>
-            <a:r>
-              <a:rPr lang="en-US" sz="1400" b="1" dirty="0">
-                <a:solidFill>
-                  <a:srgbClr val="13294B"/>
-                </a:solidFill>
-                <a:latin typeface="Calibri" pitchFamily="34" charset="0"/>
-                <a:ea typeface="Calibri" pitchFamily="34" charset="-122"/>
-                <a:cs typeface="Calibri" pitchFamily="34" charset="-120"/>
-              </a:rPr>
-              <a:t>→ não haveria crise geral de demanda (ideia criticada por Keynes em 1936)</a:t>
-            </a:r>
-            <a:endParaRPr lang="en-US" sz="1200" dirty="0"/>
-          </a:p>
-        </p:txBody>
-      </p:sp>
-      <p:sp>
-        <p:nvSpPr>
-          <p:cNvPr id="5" name="Text 3"/>
+              <a:t>Parceria público-privada: tarifa e/ou pagamento do poder público.</a:t>
+            </a:r>
+            <a:endParaRPr lang="en-US" sz="1100" dirty="0"/>
+          </a:p>
+        </p:txBody>
+      </p:sp>
+      <p:sp>
+        <p:nvSpPr>
+          <p:cNvPr id="10" name="Text 7"/>
           <p:cNvSpPr txBox="1"/>
           <p:nvPr/>
         </p:nvSpPr>
@@ -7194,7 +7573,7 @@
                 <a:ea typeface="Calibri" pitchFamily="34" charset="-122"/>
                 <a:cs typeface="Calibri" pitchFamily="34" charset="-120"/>
               </a:rPr>
-              <a:t>Os limites do Estado mínimo no século XIX</a:t>
+              <a:t>Ricardo e Say: a economia política clássica</a:t>
             </a:r>
             <a:endParaRPr lang="en-US" sz="2300" dirty="0"/>
           </a:p>
@@ -7202,18 +7581,18 @@
       </p:sp>
       <p:sp>
         <p:nvSpPr>
-          <p:cNvPr id="3" name="Shape 1"/>
-          <p:cNvSpPr/>
-          <p:nvPr/>
-        </p:nvSpPr>
-        <p:spPr>
-          <a:xfrm>
-            <a:off x="685800" y="1234440"/>
-            <a:ext cx="2456688" cy="1645920"/>
+          <p:cNvPr id="3" name="Text 1"/>
+          <p:cNvSpPr txBox="1"/>
+          <p:nvPr/>
+        </p:nvSpPr>
+        <p:spPr>
+          <a:xfrm>
+            <a:off x="685800" y="1188720"/>
+            <a:ext cx="3794760" cy="3017520"/>
           </a:xfrm>
           <a:prstGeom prst="roundRect">
             <a:avLst>
-              <a:gd name="adj" fmla="val 3333"/>
+              <a:gd name="adj" fmla="val 1818"/>
             </a:avLst>
           </a:prstGeom>
           <a:solidFill>
@@ -7223,75 +7602,10 @@
             <a:solidFill>
               <a:srgbClr val="DCD5C1"/>
             </a:solidFill>
-            <a:prstDash val="solid"/>
           </a:ln>
         </p:spPr>
-      </p:sp>
-      <p:sp>
-        <p:nvSpPr>
-          <p:cNvPr id="4" name="Shape 2"/>
-          <p:cNvSpPr/>
-          <p:nvPr/>
-        </p:nvSpPr>
-        <p:spPr>
-          <a:xfrm>
-            <a:off x="822960" y="1389888"/>
-            <a:ext cx="457200" cy="457200"/>
-          </a:xfrm>
-          <a:prstGeom prst="roundRect">
-            <a:avLst>
-              <a:gd name="adj" fmla="val 16000"/>
-            </a:avLst>
-          </a:prstGeom>
-          <a:solidFill>
-            <a:srgbClr val="13294B"/>
-          </a:solidFill>
-          <a:ln/>
-        </p:spPr>
-      </p:sp>
-      <p:pic>
-        <p:nvPicPr>
-          <p:cNvPr id="5" name="Image 0" descr="/tmp/claude-0/-home-user-zero-claude/d7e33190-c541-582c-a7cc-1156817732ce/scratchpad/deck/assets/icon_FaIndustry.png">    </p:cNvPr>
-          <p:cNvPicPr>
-            <a:picLocks noChangeAspect="1"/>
-          </p:cNvPicPr>
-          <p:nvPr/>
-        </p:nvPicPr>
-        <p:blipFill>
-          <a:blip r:embed="rId2"/>
-          <a:stretch>
-            <a:fillRect/>
-          </a:stretch>
-        </p:blipFill>
-        <p:spPr>
-          <a:xfrm>
-            <a:off x="923544" y="1490472"/>
-            <a:ext cx="256032" cy="256032"/>
-          </a:xfrm>
-          <a:prstGeom prst="rect">
-            <a:avLst/>
-          </a:prstGeom>
-        </p:spPr>
-      </p:pic>
-      <p:sp>
-        <p:nvSpPr>
-          <p:cNvPr id="6" name="Text 3"/>
-          <p:cNvSpPr txBox="1"/>
-          <p:nvPr/>
-        </p:nvSpPr>
-        <p:spPr>
-          <a:xfrm>
-            <a:off x="1371600" y="1307592"/>
-            <a:ext cx="1679448" cy="1499616"/>
-          </a:xfrm>
-          <a:prstGeom prst="rect">
-            <a:avLst/>
-          </a:prstGeom>
-          <a:noFill/>
-          <a:ln/>
-        </p:spPr>
-        <p:txBody>
-          <a:bodyPr wrap="square" lIns="38100" tIns="38100" rIns="38100" bIns="38100" rtlCol="0" anchor="t"/>
+        <p:txBody>
+          <a:bodyPr wrap="square" lIns="127000" tIns="127000" rIns="127000" bIns="127000" rtlCol="0" anchor="t"/>
           <a:lstStyle/>
           <a:p>
             <a:pPr algn="l" indent="0" marL="0">
@@ -7304,7 +7618,30 @@
               <a:buNone/>
             </a:pPr>
             <a:r>
-              <a:rPr lang="en-US" sz="1600" b="1" dirty="0">
+              <a:rPr lang="en-US" sz="1200" b="1" dirty="0">
+                <a:solidFill>
+                  <a:srgbClr val="2A8C85"/>
+                </a:solidFill>
+                <a:latin typeface="Calibri" pitchFamily="34" charset="0"/>
+                <a:ea typeface="Calibri" pitchFamily="34" charset="-122"/>
+                <a:cs typeface="Calibri" pitchFamily="34" charset="-120"/>
+              </a:rPr>
+              <a:t>DAVID RICARDO (1817)</a:t>
+            </a:r>
+            <a:endParaRPr lang="en-US" sz="1200" dirty="0"/>
+          </a:p>
+          <a:p>
+            <a:pPr algn="l" indent="0" marL="0">
+              <a:lnSpc>
+                <a:spcPct val="100000"/>
+              </a:lnSpc>
+              <a:spcAft>
+                <a:spcPts val="500"/>
+              </a:spcAft>
+              <a:buNone/>
+            </a:pPr>
+            <a:r>
+              <a:rPr lang="en-US" sz="1700" b="1" dirty="0">
                 <a:solidFill>
                   <a:srgbClr val="13294B"/>
                 </a:solidFill>
@@ -7312,19 +7649,22 @@
                 <a:ea typeface="Calibri" pitchFamily="34" charset="-122"/>
                 <a:cs typeface="Calibri" pitchFamily="34" charset="-120"/>
               </a:rPr>
-              <a:t>Jornadas longas</a:t>
-            </a:r>
-            <a:endParaRPr lang="en-US" sz="1600" dirty="0"/>
+              <a:t>Vantagens comparativas</a:t>
+            </a:r>
+            <a:endParaRPr lang="en-US" sz="1200" dirty="0"/>
           </a:p>
           <a:p>
             <a:pPr algn="l" indent="0" marL="0">
               <a:lnSpc>
                 <a:spcPct val="100000"/>
               </a:lnSpc>
-              <a:buNone/>
-            </a:pPr>
-            <a:r>
-              <a:rPr lang="en-US" sz="1350" dirty="0">
+              <a:spcAft>
+                <a:spcPts val="600"/>
+              </a:spcAft>
+              <a:buNone/>
+            </a:pPr>
+            <a:r>
+              <a:rPr lang="en-US" sz="1400" dirty="0">
                 <a:solidFill>
                   <a:srgbClr val="1F2A37"/>
                 </a:solidFill>
@@ -7332,104 +7672,55 @@
                 <a:ea typeface="Calibri" pitchFamily="34" charset="-122"/>
                 <a:cs typeface="Calibri" pitchFamily="34" charset="-120"/>
               </a:rPr>
-              <a:t>Trabalho de 14 a 16 horas, inclusive de crianças.</a:t>
-            </a:r>
-            <a:endParaRPr lang="en-US" sz="1600" dirty="0"/>
-          </a:p>
-        </p:txBody>
-      </p:sp>
-      <p:sp>
-        <p:nvSpPr>
-          <p:cNvPr id="7" name="Shape 4"/>
-          <p:cNvSpPr/>
-          <p:nvPr/>
-        </p:nvSpPr>
-        <p:spPr>
-          <a:xfrm>
-            <a:off x="3343656" y="1234440"/>
-            <a:ext cx="2456688" cy="1645920"/>
+              <a:t>Portugal produz vinho e a Inglaterra, tecidos, com menor custo relativo. Especializando-se e trocando, os dois países ganham.</a:t>
+            </a:r>
+            <a:endParaRPr lang="en-US" sz="1200" dirty="0"/>
+          </a:p>
+          <a:p>
+            <a:pPr algn="l" indent="0" marL="0">
+              <a:lnSpc>
+                <a:spcPct val="100000"/>
+              </a:lnSpc>
+              <a:buNone/>
+            </a:pPr>
+            <a:r>
+              <a:rPr lang="en-US" sz="1400" b="1" dirty="0">
+                <a:solidFill>
+                  <a:srgbClr val="13294B"/>
+                </a:solidFill>
+                <a:latin typeface="Calibri" pitchFamily="34" charset="0"/>
+                <a:ea typeface="Calibri" pitchFamily="34" charset="-122"/>
+                <a:cs typeface="Calibri" pitchFamily="34" charset="-120"/>
+              </a:rPr>
+              <a:t>→ defesa do livre comércio</a:t>
+            </a:r>
+            <a:endParaRPr lang="en-US" sz="1200" dirty="0"/>
+          </a:p>
+        </p:txBody>
+      </p:sp>
+      <p:sp>
+        <p:nvSpPr>
+          <p:cNvPr id="4" name="Text 2"/>
+          <p:cNvSpPr txBox="1"/>
+          <p:nvPr/>
+        </p:nvSpPr>
+        <p:spPr>
+          <a:xfrm>
+            <a:off x="4663440" y="1188720"/>
+            <a:ext cx="3794760" cy="3017520"/>
           </a:xfrm>
           <a:prstGeom prst="roundRect">
             <a:avLst>
-              <a:gd name="adj" fmla="val 3333"/>
+              <a:gd name="adj" fmla="val 1818"/>
             </a:avLst>
           </a:prstGeom>
           <a:solidFill>
-            <a:srgbClr val="FFFFFF"/>
+            <a:srgbClr val="E6F2F0"/>
           </a:solidFill>
-          <a:ln w="12700">
-            <a:solidFill>
-              <a:srgbClr val="DCD5C1"/>
-            </a:solidFill>
-            <a:prstDash val="solid"/>
-          </a:ln>
-        </p:spPr>
-      </p:sp>
-      <p:sp>
-        <p:nvSpPr>
-          <p:cNvPr id="8" name="Shape 5"/>
-          <p:cNvSpPr/>
-          <p:nvPr/>
-        </p:nvSpPr>
-        <p:spPr>
-          <a:xfrm>
-            <a:off x="3480816" y="1389888"/>
-            <a:ext cx="457200" cy="457200"/>
-          </a:xfrm>
-          <a:prstGeom prst="roundRect">
-            <a:avLst>
-              <a:gd name="adj" fmla="val 16000"/>
-            </a:avLst>
-          </a:prstGeom>
-          <a:solidFill>
-            <a:srgbClr val="13294B"/>
-          </a:solidFill>
-          <a:ln/>
-        </p:spPr>
-      </p:sp>
-      <p:pic>
-        <p:nvPicPr>
-          <p:cNvPr id="9" name="Image 1" descr="/tmp/claude-0/-home-user-zero-claude/d7e33190-c541-582c-a7cc-1156817732ce/scratchpad/deck/assets/icon_FaCity.png">    </p:cNvPr>
-          <p:cNvPicPr>
-            <a:picLocks noChangeAspect="1"/>
-          </p:cNvPicPr>
-          <p:nvPr/>
-        </p:nvPicPr>
-        <p:blipFill>
-          <a:blip r:embed="rId3"/>
-          <a:stretch>
-            <a:fillRect/>
-          </a:stretch>
-        </p:blipFill>
-        <p:spPr>
-          <a:xfrm>
-            <a:off x="3581400" y="1490472"/>
-            <a:ext cx="256032" cy="256032"/>
-          </a:xfrm>
-          <a:prstGeom prst="rect">
-            <a:avLst/>
-          </a:prstGeom>
-        </p:spPr>
-      </p:pic>
-      <p:sp>
-        <p:nvSpPr>
-          <p:cNvPr id="10" name="Text 6"/>
-          <p:cNvSpPr txBox="1"/>
-          <p:nvPr/>
-        </p:nvSpPr>
-        <p:spPr>
-          <a:xfrm>
-            <a:off x="4029456" y="1307592"/>
-            <a:ext cx="1679448" cy="1499616"/>
-          </a:xfrm>
-          <a:prstGeom prst="rect">
-            <a:avLst/>
-          </a:prstGeom>
-          <a:noFill/>
-          <a:ln/>
-        </p:spPr>
-        <p:txBody>
-          <a:bodyPr wrap="square" lIns="38100" tIns="38100" rIns="38100" bIns="38100" rtlCol="0" anchor="t"/>
+          <a:ln/>
+        </p:spPr>
+        <p:txBody>
+          <a:bodyPr wrap="square" lIns="127000" tIns="127000" rIns="127000" bIns="127000" rtlCol="0" anchor="t"/>
           <a:lstStyle/>
           <a:p>
             <a:pPr algn="l" indent="0" marL="0">
@@ -7442,7 +7733,30 @@
               <a:buNone/>
             </a:pPr>
             <a:r>
-              <a:rPr lang="en-US" sz="1600" b="1" dirty="0">
+              <a:rPr lang="en-US" sz="1200" b="1" dirty="0">
+                <a:solidFill>
+                  <a:srgbClr val="2A8C85"/>
+                </a:solidFill>
+                <a:latin typeface="Calibri" pitchFamily="34" charset="0"/>
+                <a:ea typeface="Calibri" pitchFamily="34" charset="-122"/>
+                <a:cs typeface="Calibri" pitchFamily="34" charset="-120"/>
+              </a:rPr>
+              <a:t>JEAN-BAPTISTE SAY</a:t>
+            </a:r>
+            <a:endParaRPr lang="en-US" sz="1200" dirty="0"/>
+          </a:p>
+          <a:p>
+            <a:pPr algn="l" indent="0" marL="0">
+              <a:lnSpc>
+                <a:spcPct val="100000"/>
+              </a:lnSpc>
+              <a:spcAft>
+                <a:spcPts val="500"/>
+              </a:spcAft>
+              <a:buNone/>
+            </a:pPr>
+            <a:r>
+              <a:rPr lang="en-US" sz="1700" b="1" dirty="0">
                 <a:solidFill>
                   <a:srgbClr val="13294B"/>
                 </a:solidFill>
@@ -7450,19 +7764,22 @@
                 <a:ea typeface="Calibri" pitchFamily="34" charset="-122"/>
                 <a:cs typeface="Calibri" pitchFamily="34" charset="-120"/>
               </a:rPr>
-              <a:t>Pobreza urbana</a:t>
-            </a:r>
-            <a:endParaRPr lang="en-US" sz="1600" dirty="0"/>
+              <a:t>Lei de Say</a:t>
+            </a:r>
+            <a:endParaRPr lang="en-US" sz="1200" dirty="0"/>
           </a:p>
           <a:p>
             <a:pPr algn="l" indent="0" marL="0">
               <a:lnSpc>
                 <a:spcPct val="100000"/>
               </a:lnSpc>
-              <a:buNone/>
-            </a:pPr>
-            <a:r>
-              <a:rPr lang="en-US" sz="1350" dirty="0">
+              <a:spcAft>
+                <a:spcPts val="600"/>
+              </a:spcAft>
+              <a:buNone/>
+            </a:pPr>
+            <a:r>
+              <a:rPr lang="en-US" sz="1400" dirty="0">
                 <a:solidFill>
                   <a:srgbClr val="1F2A37"/>
                 </a:solidFill>
@@ -7470,117 +7787,19 @@
                 <a:ea typeface="Calibri" pitchFamily="34" charset="-122"/>
                 <a:cs typeface="Calibri" pitchFamily="34" charset="-120"/>
               </a:rPr>
-              <a:t>Cidades industriais sem saneamento nem moradia digna.</a:t>
-            </a:r>
-            <a:endParaRPr lang="en-US" sz="1600" dirty="0"/>
-          </a:p>
-        </p:txBody>
-      </p:sp>
-      <p:sp>
-        <p:nvSpPr>
-          <p:cNvPr id="11" name="Shape 7"/>
-          <p:cNvSpPr/>
-          <p:nvPr/>
-        </p:nvSpPr>
-        <p:spPr>
-          <a:xfrm>
-            <a:off x="6001512" y="1234440"/>
-            <a:ext cx="2456688" cy="1645920"/>
-          </a:xfrm>
-          <a:prstGeom prst="roundRect">
-            <a:avLst>
-              <a:gd name="adj" fmla="val 3333"/>
-            </a:avLst>
-          </a:prstGeom>
-          <a:solidFill>
-            <a:srgbClr val="FFFFFF"/>
-          </a:solidFill>
-          <a:ln w="12700">
-            <a:solidFill>
-              <a:srgbClr val="DCD5C1"/>
-            </a:solidFill>
-            <a:prstDash val="solid"/>
-          </a:ln>
-        </p:spPr>
-      </p:sp>
-      <p:sp>
-        <p:nvSpPr>
-          <p:cNvPr id="12" name="Shape 8"/>
-          <p:cNvSpPr/>
-          <p:nvPr/>
-        </p:nvSpPr>
-        <p:spPr>
-          <a:xfrm>
-            <a:off x="6138672" y="1389888"/>
-            <a:ext cx="457200" cy="457200"/>
-          </a:xfrm>
-          <a:prstGeom prst="roundRect">
-            <a:avLst>
-              <a:gd name="adj" fmla="val 16000"/>
-            </a:avLst>
-          </a:prstGeom>
-          <a:solidFill>
-            <a:srgbClr val="13294B"/>
-          </a:solidFill>
-          <a:ln/>
-        </p:spPr>
-      </p:sp>
-      <p:pic>
-        <p:nvPicPr>
-          <p:cNvPr id="13" name="Image 2" descr="/tmp/claude-0/-home-user-zero-claude/d7e33190-c541-582c-a7cc-1156817732ce/scratchpad/deck/assets/icon_FaChartLine.png">    </p:cNvPr>
-          <p:cNvPicPr>
-            <a:picLocks noChangeAspect="1"/>
-          </p:cNvPicPr>
-          <p:nvPr/>
-        </p:nvPicPr>
-        <p:blipFill>
-          <a:blip r:embed="rId4"/>
-          <a:stretch>
-            <a:fillRect/>
-          </a:stretch>
-        </p:blipFill>
-        <p:spPr>
-          <a:xfrm>
-            <a:off x="6239256" y="1490472"/>
-            <a:ext cx="256032" cy="256032"/>
-          </a:xfrm>
-          <a:prstGeom prst="rect">
-            <a:avLst/>
-          </a:prstGeom>
-        </p:spPr>
-      </p:pic>
-      <p:sp>
-        <p:nvSpPr>
-          <p:cNvPr id="14" name="Text 9"/>
-          <p:cNvSpPr txBox="1"/>
-          <p:nvPr/>
-        </p:nvSpPr>
-        <p:spPr>
-          <a:xfrm>
-            <a:off x="6687312" y="1307592"/>
-            <a:ext cx="1679448" cy="1499616"/>
-          </a:xfrm>
-          <a:prstGeom prst="rect">
-            <a:avLst/>
-          </a:prstGeom>
-          <a:noFill/>
-          <a:ln/>
-        </p:spPr>
-        <p:txBody>
-          <a:bodyPr wrap="square" lIns="38100" tIns="38100" rIns="38100" bIns="38100" rtlCol="0" anchor="t"/>
-          <a:lstStyle/>
+              <a:t>“A oferta cria sua própria procura”: toda produção gera renda suficiente para comprá-la.</a:t>
+            </a:r>
+            <a:endParaRPr lang="en-US" sz="1200" dirty="0"/>
+          </a:p>
           <a:p>
             <a:pPr algn="l" indent="0" marL="0">
               <a:lnSpc>
                 <a:spcPct val="100000"/>
               </a:lnSpc>
-              <a:spcAft>
-                <a:spcPts val="300"/>
-              </a:spcAft>
-              <a:buNone/>
-            </a:pPr>
-            <a:r>
-              <a:rPr lang="en-US" sz="1600" b="1" dirty="0">
+              <a:buNone/>
+            </a:pPr>
+            <a:r>
+              <a:rPr lang="en-US" sz="1400" b="1" dirty="0">
                 <a:solidFill>
                   <a:srgbClr val="13294B"/>
                 </a:solidFill>
@@ -7588,81 +7807,15 @@
                 <a:ea typeface="Calibri" pitchFamily="34" charset="-122"/>
                 <a:cs typeface="Calibri" pitchFamily="34" charset="-120"/>
               </a:rPr>
-              <a:t>Crises periódicas</a:t>
-            </a:r>
-            <a:endParaRPr lang="en-US" sz="1600" dirty="0"/>
-          </a:p>
-          <a:p>
-            <a:pPr algn="l" indent="0" marL="0">
-              <a:lnSpc>
-                <a:spcPct val="100000"/>
-              </a:lnSpc>
-              <a:buNone/>
-            </a:pPr>
-            <a:r>
-              <a:rPr lang="en-US" sz="1350" dirty="0">
-                <a:solidFill>
-                  <a:srgbClr val="1F2A37"/>
-                </a:solidFill>
-                <a:latin typeface="Calibri" pitchFamily="34" charset="0"/>
-                <a:ea typeface="Calibri" pitchFamily="34" charset="-122"/>
-                <a:cs typeface="Calibri" pitchFamily="34" charset="-120"/>
-              </a:rPr>
-              <a:t>Ciclos de superprodução e desemprego.</a:t>
-            </a:r>
-            <a:endParaRPr lang="en-US" sz="1600" dirty="0"/>
-          </a:p>
-        </p:txBody>
-      </p:sp>
-      <p:sp>
-        <p:nvSpPr>
-          <p:cNvPr id="15" name="Text 10"/>
-          <p:cNvSpPr txBox="1"/>
-          <p:nvPr/>
-        </p:nvSpPr>
-        <p:spPr>
-          <a:xfrm>
-            <a:off x="685800" y="3108960"/>
-            <a:ext cx="7772400" cy="822960"/>
-          </a:xfrm>
-          <a:prstGeom prst="roundRect">
-            <a:avLst>
-              <a:gd name="adj" fmla="val 8889"/>
-            </a:avLst>
-          </a:prstGeom>
-          <a:solidFill>
-            <a:srgbClr val="E6F2F0"/>
-          </a:solidFill>
-          <a:ln/>
-        </p:spPr>
-        <p:txBody>
-          <a:bodyPr wrap="square" lIns="127000" tIns="127000" rIns="127000" bIns="127000" rtlCol="0" anchor="ctr"/>
-          <a:lstStyle/>
-          <a:p>
-            <a:pPr algn="ctr" indent="0" marL="0">
-              <a:lnSpc>
-                <a:spcPct val="100000"/>
-              </a:lnSpc>
-              <a:buNone/>
-            </a:pPr>
-            <a:r>
-              <a:rPr lang="en-US" sz="1500" dirty="0">
-                <a:solidFill>
-                  <a:srgbClr val="13294B"/>
-                </a:solidFill>
-                <a:latin typeface="Calibri" pitchFamily="34" charset="0"/>
-                <a:ea typeface="Calibri" pitchFamily="34" charset="-122"/>
-                <a:cs typeface="Calibri" pitchFamily="34" charset="-120"/>
-              </a:rPr>
-              <a:t>Essas condições alimentam a crítica marxista e as reformas sociais do final do século XIX: tema da Unidade 3.</a:t>
-            </a:r>
-            <a:endParaRPr lang="en-US" sz="1500" dirty="0"/>
-          </a:p>
-        </p:txBody>
-      </p:sp>
-      <p:sp>
-        <p:nvSpPr>
-          <p:cNvPr id="16" name="Text 11"/>
+              <a:t>→ não haveria crise geral de demanda (ideia criticada por Keynes em 1936)</a:t>
+            </a:r>
+            <a:endParaRPr lang="en-US" sz="1200" dirty="0"/>
+          </a:p>
+        </p:txBody>
+      </p:sp>
+      <p:sp>
+        <p:nvSpPr>
+          <p:cNvPr id="5" name="Text 3"/>
           <p:cNvSpPr txBox="1"/>
           <p:nvPr/>
         </p:nvSpPr>
@@ -7769,6 +7922,589 @@
               <a:buNone/>
             </a:pPr>
             <a:r>
+              <a:rPr lang="en-US" sz="2300" b="1" dirty="0">
+                <a:solidFill>
+                  <a:srgbClr val="13294B"/>
+                </a:solidFill>
+                <a:latin typeface="Calibri" pitchFamily="34" charset="0"/>
+                <a:ea typeface="Calibri" pitchFamily="34" charset="-122"/>
+                <a:cs typeface="Calibri" pitchFamily="34" charset="-120"/>
+              </a:rPr>
+              <a:t>Os limites do Estado mínimo no século XIX</a:t>
+            </a:r>
+            <a:endParaRPr lang="en-US" sz="2300" dirty="0"/>
+          </a:p>
+        </p:txBody>
+      </p:sp>
+      <p:sp>
+        <p:nvSpPr>
+          <p:cNvPr id="3" name="Shape 1"/>
+          <p:cNvSpPr/>
+          <p:nvPr/>
+        </p:nvSpPr>
+        <p:spPr>
+          <a:xfrm>
+            <a:off x="685800" y="1234440"/>
+            <a:ext cx="2456688" cy="1645920"/>
+          </a:xfrm>
+          <a:prstGeom prst="roundRect">
+            <a:avLst>
+              <a:gd name="adj" fmla="val 3333"/>
+            </a:avLst>
+          </a:prstGeom>
+          <a:solidFill>
+            <a:srgbClr val="FFFFFF"/>
+          </a:solidFill>
+          <a:ln w="12700">
+            <a:solidFill>
+              <a:srgbClr val="DCD5C1"/>
+            </a:solidFill>
+            <a:prstDash val="solid"/>
+          </a:ln>
+        </p:spPr>
+      </p:sp>
+      <p:sp>
+        <p:nvSpPr>
+          <p:cNvPr id="4" name="Shape 2"/>
+          <p:cNvSpPr/>
+          <p:nvPr/>
+        </p:nvSpPr>
+        <p:spPr>
+          <a:xfrm>
+            <a:off x="822960" y="1389888"/>
+            <a:ext cx="457200" cy="457200"/>
+          </a:xfrm>
+          <a:prstGeom prst="roundRect">
+            <a:avLst>
+              <a:gd name="adj" fmla="val 16000"/>
+            </a:avLst>
+          </a:prstGeom>
+          <a:solidFill>
+            <a:srgbClr val="13294B"/>
+          </a:solidFill>
+          <a:ln/>
+        </p:spPr>
+      </p:sp>
+      <p:pic>
+        <p:nvPicPr>
+          <p:cNvPr id="5" name="Image 0" descr="/tmp/claude-0/-home-user-zero-claude/d7e33190-c541-582c-a7cc-1156817732ce/scratchpad/deck/assets/icon_FaIndustry.png">    </p:cNvPr>
+          <p:cNvPicPr>
+            <a:picLocks noChangeAspect="1"/>
+          </p:cNvPicPr>
+          <p:nvPr/>
+        </p:nvPicPr>
+        <p:blipFill>
+          <a:blip r:embed="rId2"/>
+          <a:stretch>
+            <a:fillRect/>
+          </a:stretch>
+        </p:blipFill>
+        <p:spPr>
+          <a:xfrm>
+            <a:off x="923544" y="1490472"/>
+            <a:ext cx="256032" cy="256032"/>
+          </a:xfrm>
+          <a:prstGeom prst="rect">
+            <a:avLst/>
+          </a:prstGeom>
+        </p:spPr>
+      </p:pic>
+      <p:sp>
+        <p:nvSpPr>
+          <p:cNvPr id="6" name="Text 3"/>
+          <p:cNvSpPr txBox="1"/>
+          <p:nvPr/>
+        </p:nvSpPr>
+        <p:spPr>
+          <a:xfrm>
+            <a:off x="1371600" y="1307592"/>
+            <a:ext cx="1679448" cy="1499616"/>
+          </a:xfrm>
+          <a:prstGeom prst="rect">
+            <a:avLst/>
+          </a:prstGeom>
+          <a:noFill/>
+          <a:ln/>
+        </p:spPr>
+        <p:txBody>
+          <a:bodyPr wrap="square" lIns="38100" tIns="38100" rIns="38100" bIns="38100" rtlCol="0" anchor="t"/>
+          <a:lstStyle/>
+          <a:p>
+            <a:pPr algn="l" indent="0" marL="0">
+              <a:lnSpc>
+                <a:spcPct val="100000"/>
+              </a:lnSpc>
+              <a:spcAft>
+                <a:spcPts val="300"/>
+              </a:spcAft>
+              <a:buNone/>
+            </a:pPr>
+            <a:r>
+              <a:rPr lang="en-US" sz="1600" b="1" dirty="0">
+                <a:solidFill>
+                  <a:srgbClr val="13294B"/>
+                </a:solidFill>
+                <a:latin typeface="Calibri" pitchFamily="34" charset="0"/>
+                <a:ea typeface="Calibri" pitchFamily="34" charset="-122"/>
+                <a:cs typeface="Calibri" pitchFamily="34" charset="-120"/>
+              </a:rPr>
+              <a:t>Jornadas longas</a:t>
+            </a:r>
+            <a:endParaRPr lang="en-US" sz="1600" dirty="0"/>
+          </a:p>
+          <a:p>
+            <a:pPr algn="l" indent="0" marL="0">
+              <a:lnSpc>
+                <a:spcPct val="100000"/>
+              </a:lnSpc>
+              <a:buNone/>
+            </a:pPr>
+            <a:r>
+              <a:rPr lang="en-US" sz="1350" dirty="0">
+                <a:solidFill>
+                  <a:srgbClr val="1F2A37"/>
+                </a:solidFill>
+                <a:latin typeface="Calibri" pitchFamily="34" charset="0"/>
+                <a:ea typeface="Calibri" pitchFamily="34" charset="-122"/>
+                <a:cs typeface="Calibri" pitchFamily="34" charset="-120"/>
+              </a:rPr>
+              <a:t>Trabalho de 14 a 16 horas, inclusive de crianças.</a:t>
+            </a:r>
+            <a:endParaRPr lang="en-US" sz="1600" dirty="0"/>
+          </a:p>
+        </p:txBody>
+      </p:sp>
+      <p:sp>
+        <p:nvSpPr>
+          <p:cNvPr id="7" name="Shape 4"/>
+          <p:cNvSpPr/>
+          <p:nvPr/>
+        </p:nvSpPr>
+        <p:spPr>
+          <a:xfrm>
+            <a:off x="3343656" y="1234440"/>
+            <a:ext cx="2456688" cy="1645920"/>
+          </a:xfrm>
+          <a:prstGeom prst="roundRect">
+            <a:avLst>
+              <a:gd name="adj" fmla="val 3333"/>
+            </a:avLst>
+          </a:prstGeom>
+          <a:solidFill>
+            <a:srgbClr val="FFFFFF"/>
+          </a:solidFill>
+          <a:ln w="12700">
+            <a:solidFill>
+              <a:srgbClr val="DCD5C1"/>
+            </a:solidFill>
+            <a:prstDash val="solid"/>
+          </a:ln>
+        </p:spPr>
+      </p:sp>
+      <p:sp>
+        <p:nvSpPr>
+          <p:cNvPr id="8" name="Shape 5"/>
+          <p:cNvSpPr/>
+          <p:nvPr/>
+        </p:nvSpPr>
+        <p:spPr>
+          <a:xfrm>
+            <a:off x="3480816" y="1389888"/>
+            <a:ext cx="457200" cy="457200"/>
+          </a:xfrm>
+          <a:prstGeom prst="roundRect">
+            <a:avLst>
+              <a:gd name="adj" fmla="val 16000"/>
+            </a:avLst>
+          </a:prstGeom>
+          <a:solidFill>
+            <a:srgbClr val="13294B"/>
+          </a:solidFill>
+          <a:ln/>
+        </p:spPr>
+      </p:sp>
+      <p:pic>
+        <p:nvPicPr>
+          <p:cNvPr id="9" name="Image 1" descr="/tmp/claude-0/-home-user-zero-claude/d7e33190-c541-582c-a7cc-1156817732ce/scratchpad/deck/assets/icon_FaCity.png">    </p:cNvPr>
+          <p:cNvPicPr>
+            <a:picLocks noChangeAspect="1"/>
+          </p:cNvPicPr>
+          <p:nvPr/>
+        </p:nvPicPr>
+        <p:blipFill>
+          <a:blip r:embed="rId3"/>
+          <a:stretch>
+            <a:fillRect/>
+          </a:stretch>
+        </p:blipFill>
+        <p:spPr>
+          <a:xfrm>
+            <a:off x="3581400" y="1490472"/>
+            <a:ext cx="256032" cy="256032"/>
+          </a:xfrm>
+          <a:prstGeom prst="rect">
+            <a:avLst/>
+          </a:prstGeom>
+        </p:spPr>
+      </p:pic>
+      <p:sp>
+        <p:nvSpPr>
+          <p:cNvPr id="10" name="Text 6"/>
+          <p:cNvSpPr txBox="1"/>
+          <p:nvPr/>
+        </p:nvSpPr>
+        <p:spPr>
+          <a:xfrm>
+            <a:off x="4029456" y="1307592"/>
+            <a:ext cx="1679448" cy="1499616"/>
+          </a:xfrm>
+          <a:prstGeom prst="rect">
+            <a:avLst/>
+          </a:prstGeom>
+          <a:noFill/>
+          <a:ln/>
+        </p:spPr>
+        <p:txBody>
+          <a:bodyPr wrap="square" lIns="38100" tIns="38100" rIns="38100" bIns="38100" rtlCol="0" anchor="t"/>
+          <a:lstStyle/>
+          <a:p>
+            <a:pPr algn="l" indent="0" marL="0">
+              <a:lnSpc>
+                <a:spcPct val="100000"/>
+              </a:lnSpc>
+              <a:spcAft>
+                <a:spcPts val="300"/>
+              </a:spcAft>
+              <a:buNone/>
+            </a:pPr>
+            <a:r>
+              <a:rPr lang="en-US" sz="1600" b="1" dirty="0">
+                <a:solidFill>
+                  <a:srgbClr val="13294B"/>
+                </a:solidFill>
+                <a:latin typeface="Calibri" pitchFamily="34" charset="0"/>
+                <a:ea typeface="Calibri" pitchFamily="34" charset="-122"/>
+                <a:cs typeface="Calibri" pitchFamily="34" charset="-120"/>
+              </a:rPr>
+              <a:t>Pobreza urbana</a:t>
+            </a:r>
+            <a:endParaRPr lang="en-US" sz="1600" dirty="0"/>
+          </a:p>
+          <a:p>
+            <a:pPr algn="l" indent="0" marL="0">
+              <a:lnSpc>
+                <a:spcPct val="100000"/>
+              </a:lnSpc>
+              <a:buNone/>
+            </a:pPr>
+            <a:r>
+              <a:rPr lang="en-US" sz="1350" dirty="0">
+                <a:solidFill>
+                  <a:srgbClr val="1F2A37"/>
+                </a:solidFill>
+                <a:latin typeface="Calibri" pitchFamily="34" charset="0"/>
+                <a:ea typeface="Calibri" pitchFamily="34" charset="-122"/>
+                <a:cs typeface="Calibri" pitchFamily="34" charset="-120"/>
+              </a:rPr>
+              <a:t>Cidades industriais sem saneamento nem moradia digna.</a:t>
+            </a:r>
+            <a:endParaRPr lang="en-US" sz="1600" dirty="0"/>
+          </a:p>
+        </p:txBody>
+      </p:sp>
+      <p:sp>
+        <p:nvSpPr>
+          <p:cNvPr id="11" name="Shape 7"/>
+          <p:cNvSpPr/>
+          <p:nvPr/>
+        </p:nvSpPr>
+        <p:spPr>
+          <a:xfrm>
+            <a:off x="6001512" y="1234440"/>
+            <a:ext cx="2456688" cy="1645920"/>
+          </a:xfrm>
+          <a:prstGeom prst="roundRect">
+            <a:avLst>
+              <a:gd name="adj" fmla="val 3333"/>
+            </a:avLst>
+          </a:prstGeom>
+          <a:solidFill>
+            <a:srgbClr val="FFFFFF"/>
+          </a:solidFill>
+          <a:ln w="12700">
+            <a:solidFill>
+              <a:srgbClr val="DCD5C1"/>
+            </a:solidFill>
+            <a:prstDash val="solid"/>
+          </a:ln>
+        </p:spPr>
+      </p:sp>
+      <p:sp>
+        <p:nvSpPr>
+          <p:cNvPr id="12" name="Shape 8"/>
+          <p:cNvSpPr/>
+          <p:nvPr/>
+        </p:nvSpPr>
+        <p:spPr>
+          <a:xfrm>
+            <a:off x="6138672" y="1389888"/>
+            <a:ext cx="457200" cy="457200"/>
+          </a:xfrm>
+          <a:prstGeom prst="roundRect">
+            <a:avLst>
+              <a:gd name="adj" fmla="val 16000"/>
+            </a:avLst>
+          </a:prstGeom>
+          <a:solidFill>
+            <a:srgbClr val="13294B"/>
+          </a:solidFill>
+          <a:ln/>
+        </p:spPr>
+      </p:sp>
+      <p:pic>
+        <p:nvPicPr>
+          <p:cNvPr id="13" name="Image 2" descr="/tmp/claude-0/-home-user-zero-claude/d7e33190-c541-582c-a7cc-1156817732ce/scratchpad/deck/assets/icon_FaChartLine.png">    </p:cNvPr>
+          <p:cNvPicPr>
+            <a:picLocks noChangeAspect="1"/>
+          </p:cNvPicPr>
+          <p:nvPr/>
+        </p:nvPicPr>
+        <p:blipFill>
+          <a:blip r:embed="rId4"/>
+          <a:stretch>
+            <a:fillRect/>
+          </a:stretch>
+        </p:blipFill>
+        <p:spPr>
+          <a:xfrm>
+            <a:off x="6239256" y="1490472"/>
+            <a:ext cx="256032" cy="256032"/>
+          </a:xfrm>
+          <a:prstGeom prst="rect">
+            <a:avLst/>
+          </a:prstGeom>
+        </p:spPr>
+      </p:pic>
+      <p:sp>
+        <p:nvSpPr>
+          <p:cNvPr id="14" name="Text 9"/>
+          <p:cNvSpPr txBox="1"/>
+          <p:nvPr/>
+        </p:nvSpPr>
+        <p:spPr>
+          <a:xfrm>
+            <a:off x="6687312" y="1307592"/>
+            <a:ext cx="1679448" cy="1499616"/>
+          </a:xfrm>
+          <a:prstGeom prst="rect">
+            <a:avLst/>
+          </a:prstGeom>
+          <a:noFill/>
+          <a:ln/>
+        </p:spPr>
+        <p:txBody>
+          <a:bodyPr wrap="square" lIns="38100" tIns="38100" rIns="38100" bIns="38100" rtlCol="0" anchor="t"/>
+          <a:lstStyle/>
+          <a:p>
+            <a:pPr algn="l" indent="0" marL="0">
+              <a:lnSpc>
+                <a:spcPct val="100000"/>
+              </a:lnSpc>
+              <a:spcAft>
+                <a:spcPts val="300"/>
+              </a:spcAft>
+              <a:buNone/>
+            </a:pPr>
+            <a:r>
+              <a:rPr lang="en-US" sz="1600" b="1" dirty="0">
+                <a:solidFill>
+                  <a:srgbClr val="13294B"/>
+                </a:solidFill>
+                <a:latin typeface="Calibri" pitchFamily="34" charset="0"/>
+                <a:ea typeface="Calibri" pitchFamily="34" charset="-122"/>
+                <a:cs typeface="Calibri" pitchFamily="34" charset="-120"/>
+              </a:rPr>
+              <a:t>Crises periódicas</a:t>
+            </a:r>
+            <a:endParaRPr lang="en-US" sz="1600" dirty="0"/>
+          </a:p>
+          <a:p>
+            <a:pPr algn="l" indent="0" marL="0">
+              <a:lnSpc>
+                <a:spcPct val="100000"/>
+              </a:lnSpc>
+              <a:buNone/>
+            </a:pPr>
+            <a:r>
+              <a:rPr lang="en-US" sz="1350" dirty="0">
+                <a:solidFill>
+                  <a:srgbClr val="1F2A37"/>
+                </a:solidFill>
+                <a:latin typeface="Calibri" pitchFamily="34" charset="0"/>
+                <a:ea typeface="Calibri" pitchFamily="34" charset="-122"/>
+                <a:cs typeface="Calibri" pitchFamily="34" charset="-120"/>
+              </a:rPr>
+              <a:t>Ciclos de superprodução e desemprego.</a:t>
+            </a:r>
+            <a:endParaRPr lang="en-US" sz="1600" dirty="0"/>
+          </a:p>
+        </p:txBody>
+      </p:sp>
+      <p:sp>
+        <p:nvSpPr>
+          <p:cNvPr id="15" name="Text 10"/>
+          <p:cNvSpPr txBox="1"/>
+          <p:nvPr/>
+        </p:nvSpPr>
+        <p:spPr>
+          <a:xfrm>
+            <a:off x="685800" y="3108960"/>
+            <a:ext cx="7772400" cy="822960"/>
+          </a:xfrm>
+          <a:prstGeom prst="roundRect">
+            <a:avLst>
+              <a:gd name="adj" fmla="val 8889"/>
+            </a:avLst>
+          </a:prstGeom>
+          <a:solidFill>
+            <a:srgbClr val="E6F2F0"/>
+          </a:solidFill>
+          <a:ln/>
+        </p:spPr>
+        <p:txBody>
+          <a:bodyPr wrap="square" lIns="127000" tIns="127000" rIns="127000" bIns="127000" rtlCol="0" anchor="ctr"/>
+          <a:lstStyle/>
+          <a:p>
+            <a:pPr algn="ctr" indent="0" marL="0">
+              <a:lnSpc>
+                <a:spcPct val="100000"/>
+              </a:lnSpc>
+              <a:buNone/>
+            </a:pPr>
+            <a:r>
+              <a:rPr lang="en-US" sz="1500" dirty="0">
+                <a:solidFill>
+                  <a:srgbClr val="13294B"/>
+                </a:solidFill>
+                <a:latin typeface="Calibri" pitchFamily="34" charset="0"/>
+                <a:ea typeface="Calibri" pitchFamily="34" charset="-122"/>
+                <a:cs typeface="Calibri" pitchFamily="34" charset="-120"/>
+              </a:rPr>
+              <a:t>Essas condições alimentam a crítica marxista e as reformas sociais do final do século XIX: tema da Unidade 3.</a:t>
+            </a:r>
+            <a:endParaRPr lang="en-US" sz="1500" dirty="0"/>
+          </a:p>
+        </p:txBody>
+      </p:sp>
+      <p:sp>
+        <p:nvSpPr>
+          <p:cNvPr id="16" name="Text 11"/>
+          <p:cNvSpPr txBox="1"/>
+          <p:nvPr/>
+        </p:nvSpPr>
+        <p:spPr>
+          <a:xfrm>
+            <a:off x="4206240" y="36576"/>
+            <a:ext cx="4800600" cy="219456"/>
+          </a:xfrm>
+          <a:prstGeom prst="rect">
+            <a:avLst/>
+          </a:prstGeom>
+          <a:noFill/>
+          <a:ln/>
+        </p:spPr>
+        <p:txBody>
+          <a:bodyPr wrap="square" lIns="0" tIns="0" rIns="0" bIns="0" rtlCol="0" anchor="ctr"/>
+          <a:lstStyle/>
+          <a:p>
+            <a:pPr algn="r" indent="0" marL="0">
+              <a:lnSpc>
+                <a:spcPct val="100000"/>
+              </a:lnSpc>
+              <a:buNone/>
+            </a:pPr>
+            <a:r>
+              <a:rPr lang="en-US" sz="950" dirty="0">
+                <a:solidFill>
+                  <a:srgbClr val="5B6770"/>
+                </a:solidFill>
+                <a:latin typeface="Calibri" pitchFamily="34" charset="0"/>
+                <a:ea typeface="Calibri" pitchFamily="34" charset="-122"/>
+                <a:cs typeface="Calibri" pitchFamily="34" charset="-120"/>
+              </a:rPr>
+              <a:t>Estado, Governo e Mercado · Unidade 2</a:t>
+            </a:r>
+            <a:endParaRPr lang="en-US" sz="950" dirty="0"/>
+          </a:p>
+        </p:txBody>
+      </p:sp>
+    </p:spTree>
+  </p:cSld>
+  <p:clrMapOvr>
+    <a:masterClrMapping/>
+  </p:clrMapOvr>
+</p:sld>
+</file>
+
+<file path=ppt/slides/slide18.xml><?xml version="1.0" encoding="utf-8"?>
+<p:sld xmlns:a="http://schemas.openxmlformats.org/drawingml/2006/main" xmlns:r="http://schemas.openxmlformats.org/officeDocument/2006/relationships" xmlns:p="http://schemas.openxmlformats.org/presentationml/2006/main">
+  <p:cSld name="Slide 18">
+    <p:bg>
+      <p:bgPr>
+        <a:blipFill dpi="0" rotWithShape="1">
+          <a:blip r:embed="rId1">
+            <a:lum/>
+          </a:blip>
+          <a:srcRect/>
+          <a:stretch>
+            <a:fillRect/>
+          </a:stretch>
+        </a:blipFill>
+        <a:effectLst/>
+      </p:bgPr>
+    </p:bg>
+    <p:spTree>
+      <p:nvGrpSpPr>
+        <p:cNvPr id="1" name=""/>
+        <p:cNvGrpSpPr/>
+        <p:nvPr/>
+      </p:nvGrpSpPr>
+      <p:grpSpPr>
+        <a:xfrm>
+          <a:off x="0" y="0"/>
+          <a:ext cx="0" cy="0"/>
+          <a:chOff x="0" y="0"/>
+          <a:chExt cx="0" cy="0"/>
+        </a:xfrm>
+      </p:grpSpPr>
+      <p:sp>
+        <p:nvSpPr>
+          <p:cNvPr id="2" name="Text 0"/>
+          <p:cNvSpPr txBox="1"/>
+          <p:nvPr/>
+        </p:nvSpPr>
+        <p:spPr>
+          <a:xfrm>
+            <a:off x="731520" y="256032"/>
+            <a:ext cx="7680960" cy="566928"/>
+          </a:xfrm>
+          <a:prstGeom prst="rect">
+            <a:avLst/>
+          </a:prstGeom>
+          <a:noFill/>
+          <a:ln/>
+        </p:spPr>
+        <p:txBody>
+          <a:bodyPr wrap="square" lIns="0" tIns="0" rIns="0" bIns="0" rtlCol="0" anchor="ctr"/>
+          <a:lstStyle/>
+          <a:p>
+            <a:pPr algn="ctr" indent="0" marL="0">
+              <a:lnSpc>
+                <a:spcPct val="100000"/>
+              </a:lnSpc>
+              <a:buNone/>
+            </a:pPr>
+            <a:r>
               <a:rPr lang="en-US" sz="2800" b="1" dirty="0">
                 <a:solidFill>
                   <a:srgbClr val="13294B"/>
@@ -7827,7 +8563,7 @@
       </p:sp>
       <p:graphicFrame>
         <p:nvGraphicFramePr>
-          <p:cNvPr id="18" name="Table 0"/>
+          <p:cNvPr id="19" name="Table 0"/>
           <p:cNvGraphicFramePr>
             <a:graphicFrameLocks noGrp="1"/>
           </p:cNvGraphicFramePr>
@@ -8503,217 +9239,6 @@
 </p:sld>
 </file>
 
-<file path=ppt/slides/slide18.xml><?xml version="1.0" encoding="utf-8"?>
-<p:sld xmlns:a="http://schemas.openxmlformats.org/drawingml/2006/main" xmlns:r="http://schemas.openxmlformats.org/officeDocument/2006/relationships" xmlns:p="http://schemas.openxmlformats.org/presentationml/2006/main">
-  <p:cSld name="Slide 18">
-    <p:bg>
-      <p:bgPr>
-        <a:blipFill dpi="0" rotWithShape="1">
-          <a:blip r:embed="rId1">
-            <a:lum/>
-          </a:blip>
-          <a:srcRect/>
-          <a:stretch>
-            <a:fillRect/>
-          </a:stretch>
-        </a:blipFill>
-        <a:effectLst/>
-      </p:bgPr>
-    </p:bg>
-    <p:spTree>
-      <p:nvGrpSpPr>
-        <p:cNvPr id="1" name=""/>
-        <p:cNvGrpSpPr/>
-        <p:nvPr/>
-      </p:nvGrpSpPr>
-      <p:grpSpPr>
-        <a:xfrm>
-          <a:off x="0" y="0"/>
-          <a:ext cx="0" cy="0"/>
-          <a:chOff x="0" y="0"/>
-          <a:chExt cx="0" cy="0"/>
-        </a:xfrm>
-      </p:grpSpPr>
-      <p:sp>
-        <p:nvSpPr>
-          <p:cNvPr id="2" name="Shape 0"/>
-          <p:cNvSpPr/>
-          <p:nvPr/>
-        </p:nvSpPr>
-        <p:spPr>
-          <a:xfrm>
-            <a:off x="4069080" y="1097280"/>
-            <a:ext cx="1005840" cy="1005840"/>
-          </a:xfrm>
-          <a:prstGeom prst="roundRect">
-            <a:avLst>
-              <a:gd name="adj" fmla="val 18182"/>
-            </a:avLst>
-          </a:prstGeom>
-          <a:solidFill>
-            <a:srgbClr val="2A8C85"/>
-          </a:solidFill>
-          <a:ln/>
-        </p:spPr>
-      </p:sp>
-      <p:pic>
-        <p:nvPicPr>
-          <p:cNvPr id="3" name="Image 0" descr="/tmp/claude-0/-home-user-zero-claude/d7e33190-c541-582c-a7cc-1156817732ce/scratchpad/deck/assets/icon_FaQuestion.png">    </p:cNvPr>
-          <p:cNvPicPr>
-            <a:picLocks noChangeAspect="1"/>
-          </p:cNvPicPr>
-          <p:nvPr/>
-        </p:nvPicPr>
-        <p:blipFill>
-          <a:blip r:embed="rId2"/>
-          <a:stretch>
-            <a:fillRect/>
-          </a:stretch>
-        </p:blipFill>
-        <p:spPr>
-          <a:xfrm>
-            <a:off x="4297680" y="1325880"/>
-            <a:ext cx="548640" cy="548640"/>
-          </a:xfrm>
-          <a:prstGeom prst="rect">
-            <a:avLst/>
-          </a:prstGeom>
-        </p:spPr>
-      </p:pic>
-      <p:sp>
-        <p:nvSpPr>
-          <p:cNvPr id="4" name="Text 1"/>
-          <p:cNvSpPr txBox="1"/>
-          <p:nvPr/>
-        </p:nvSpPr>
-        <p:spPr>
-          <a:xfrm>
-            <a:off x="731520" y="2240280"/>
-            <a:ext cx="7680960" cy="731520"/>
-          </a:xfrm>
-          <a:prstGeom prst="rect">
-            <a:avLst/>
-          </a:prstGeom>
-          <a:noFill/>
-          <a:ln/>
-        </p:spPr>
-        <p:txBody>
-          <a:bodyPr wrap="square" lIns="0" tIns="0" rIns="0" bIns="0" rtlCol="0" anchor="ctr"/>
-          <a:lstStyle/>
-          <a:p>
-            <a:pPr algn="ctr" indent="0" marL="0">
-              <a:lnSpc>
-                <a:spcPct val="100000"/>
-              </a:lnSpc>
-              <a:buNone/>
-            </a:pPr>
-            <a:r>
-              <a:rPr lang="en-US" sz="3600" b="1" dirty="0">
-                <a:solidFill>
-                  <a:srgbClr val="13294B"/>
-                </a:solidFill>
-                <a:latin typeface="Calibri" pitchFamily="34" charset="0"/>
-                <a:ea typeface="Calibri" pitchFamily="34" charset="-122"/>
-                <a:cs typeface="Calibri" pitchFamily="34" charset="-120"/>
-              </a:rPr>
-              <a:t>Quiz da Unidade 2</a:t>
-            </a:r>
-            <a:endParaRPr lang="en-US" sz="3600" dirty="0"/>
-          </a:p>
-        </p:txBody>
-      </p:sp>
-      <p:sp>
-        <p:nvSpPr>
-          <p:cNvPr id="5" name="Text 2"/>
-          <p:cNvSpPr txBox="1"/>
-          <p:nvPr/>
-        </p:nvSpPr>
-        <p:spPr>
-          <a:xfrm>
-            <a:off x="1188720" y="2926080"/>
-            <a:ext cx="6766560" cy="822960"/>
-          </a:xfrm>
-          <a:prstGeom prst="rect">
-            <a:avLst/>
-          </a:prstGeom>
-          <a:noFill/>
-          <a:ln/>
-        </p:spPr>
-        <p:txBody>
-          <a:bodyPr wrap="square" lIns="0" tIns="0" rIns="0" bIns="0" rtlCol="0" anchor="t"/>
-          <a:lstStyle/>
-          <a:p>
-            <a:pPr algn="ctr" indent="0" marL="0">
-              <a:lnSpc>
-                <a:spcPct val="100000"/>
-              </a:lnSpc>
-              <a:buNone/>
-            </a:pPr>
-            <a:r>
-              <a:rPr lang="en-US" sz="1600" dirty="0">
-                <a:solidFill>
-                  <a:srgbClr val="5B6770"/>
-                </a:solidFill>
-                <a:latin typeface="Calibri" pitchFamily="34" charset="0"/>
-                <a:ea typeface="Calibri" pitchFamily="34" charset="-122"/>
-                <a:cs typeface="Calibri" pitchFamily="34" charset="-120"/>
-              </a:rPr>
-              <a:t>5 perguntas para revisar a unidade. Pause o vídeo, escolha sua resposta e confira no slide seguinte.</a:t>
-            </a:r>
-            <a:endParaRPr lang="en-US" sz="1600" dirty="0"/>
-          </a:p>
-        </p:txBody>
-      </p:sp>
-      <p:sp>
-        <p:nvSpPr>
-          <p:cNvPr id="6" name="Text 3"/>
-          <p:cNvSpPr txBox="1"/>
-          <p:nvPr/>
-        </p:nvSpPr>
-        <p:spPr>
-          <a:xfrm>
-            <a:off x="4206240" y="36576"/>
-            <a:ext cx="4800600" cy="219456"/>
-          </a:xfrm>
-          <a:prstGeom prst="rect">
-            <a:avLst/>
-          </a:prstGeom>
-          <a:noFill/>
-          <a:ln/>
-        </p:spPr>
-        <p:txBody>
-          <a:bodyPr wrap="square" lIns="0" tIns="0" rIns="0" bIns="0" rtlCol="0" anchor="ctr"/>
-          <a:lstStyle/>
-          <a:p>
-            <a:pPr algn="r" indent="0" marL="0">
-              <a:lnSpc>
-                <a:spcPct val="100000"/>
-              </a:lnSpc>
-              <a:buNone/>
-            </a:pPr>
-            <a:r>
-              <a:rPr lang="en-US" sz="950" dirty="0">
-                <a:solidFill>
-                  <a:srgbClr val="5B6770"/>
-                </a:solidFill>
-                <a:latin typeface="Calibri" pitchFamily="34" charset="0"/>
-                <a:ea typeface="Calibri" pitchFamily="34" charset="-122"/>
-                <a:cs typeface="Calibri" pitchFamily="34" charset="-120"/>
-              </a:rPr>
-              <a:t>Estado, Governo e Mercado · Unidade 2</a:t>
-            </a:r>
-            <a:endParaRPr lang="en-US" sz="950" dirty="0"/>
-          </a:p>
-        </p:txBody>
-      </p:sp>
-    </p:spTree>
-  </p:cSld>
-  <p:clrMapOvr>
-    <a:masterClrMapping/>
-  </p:clrMapOvr>
-</p:sld>
-</file>
-
 <file path=ppt/slides/slide19.xml><?xml version="1.0" encoding="utf-8"?>
 <p:sld xmlns:a="http://schemas.openxmlformats.org/drawingml/2006/main" xmlns:r="http://schemas.openxmlformats.org/officeDocument/2006/relationships" xmlns:p="http://schemas.openxmlformats.org/presentationml/2006/main">
   <p:cSld name="Slide 19">
@@ -8747,56 +9272,60 @@
       </p:grpSpPr>
       <p:sp>
         <p:nvSpPr>
-          <p:cNvPr id="2" name="Text 0"/>
-          <p:cNvSpPr txBox="1"/>
-          <p:nvPr/>
-        </p:nvSpPr>
-        <p:spPr>
-          <a:xfrm>
-            <a:off x="731520" y="274320"/>
-            <a:ext cx="7680960" cy="365760"/>
+          <p:cNvPr id="2" name="Shape 0"/>
+          <p:cNvSpPr/>
+          <p:nvPr/>
+        </p:nvSpPr>
+        <p:spPr>
+          <a:xfrm>
+            <a:off x="4069080" y="1097280"/>
+            <a:ext cx="1005840" cy="1005840"/>
+          </a:xfrm>
+          <a:prstGeom prst="roundRect">
+            <a:avLst>
+              <a:gd name="adj" fmla="val 18182"/>
+            </a:avLst>
+          </a:prstGeom>
+          <a:solidFill>
+            <a:srgbClr val="2A8C85"/>
+          </a:solidFill>
+          <a:ln/>
+        </p:spPr>
+      </p:sp>
+      <p:pic>
+        <p:nvPicPr>
+          <p:cNvPr id="3" name="Image 0" descr="/tmp/claude-0/-home-user-zero-claude/d7e33190-c541-582c-a7cc-1156817732ce/scratchpad/deck/assets/icon_FaQuestion.png">    </p:cNvPr>
+          <p:cNvPicPr>
+            <a:picLocks noChangeAspect="1"/>
+          </p:cNvPicPr>
+          <p:nvPr/>
+        </p:nvPicPr>
+        <p:blipFill>
+          <a:blip r:embed="rId2"/>
+          <a:stretch>
+            <a:fillRect/>
+          </a:stretch>
+        </p:blipFill>
+        <p:spPr>
+          <a:xfrm>
+            <a:off x="4297680" y="1325880"/>
+            <a:ext cx="548640" cy="548640"/>
           </a:xfrm>
           <a:prstGeom prst="rect">
             <a:avLst/>
           </a:prstGeom>
-          <a:noFill/>
-          <a:ln/>
-        </p:spPr>
-        <p:txBody>
-          <a:bodyPr wrap="square" lIns="0" tIns="0" rIns="0" bIns="0" rtlCol="0" anchor="ctr"/>
-          <a:lstStyle/>
-          <a:p>
-            <a:pPr algn="ctr" indent="0" marL="0">
-              <a:lnSpc>
-                <a:spcPct val="100000"/>
-              </a:lnSpc>
-              <a:buNone/>
-            </a:pPr>
-            <a:r>
-              <a:rPr lang="en-US" sz="1250" b="1" dirty="0">
-                <a:solidFill>
-                  <a:srgbClr val="2A8C85"/>
-                </a:solidFill>
-                <a:latin typeface="Calibri" pitchFamily="34" charset="0"/>
-                <a:ea typeface="Calibri" pitchFamily="34" charset="-122"/>
-                <a:cs typeface="Calibri" pitchFamily="34" charset="-120"/>
-              </a:rPr>
-              <a:t>QUIZ DA UNIDADE 2 · PERGUNTA 1 DE 5</a:t>
-            </a:r>
-            <a:endParaRPr lang="en-US" sz="1250" dirty="0"/>
-          </a:p>
-        </p:txBody>
-      </p:sp>
-      <p:sp>
-        <p:nvSpPr>
-          <p:cNvPr id="3" name="Text 1"/>
-          <p:cNvSpPr txBox="1"/>
-          <p:nvPr/>
-        </p:nvSpPr>
-        <p:spPr>
-          <a:xfrm>
-            <a:off x="731520" y="658368"/>
-            <a:ext cx="7680960" cy="960120"/>
+        </p:spPr>
+      </p:pic>
+      <p:sp>
+        <p:nvSpPr>
+          <p:cNvPr id="4" name="Text 1"/>
+          <p:cNvSpPr txBox="1"/>
+          <p:nvPr/>
+        </p:nvSpPr>
+        <p:spPr>
+          <a:xfrm>
+            <a:off x="731520" y="2240280"/>
+            <a:ext cx="7680960" cy="731520"/>
           </a:xfrm>
           <a:prstGeom prst="rect">
             <a:avLst/>
@@ -8815,7 +9344,7 @@
               <a:buNone/>
             </a:pPr>
             <a:r>
-              <a:rPr lang="en-US" sz="1900" b="1" dirty="0">
+              <a:rPr lang="en-US" sz="3600" b="1" dirty="0">
                 <a:solidFill>
                   <a:srgbClr val="13294B"/>
                 </a:solidFill>
@@ -8823,95 +9352,22 @@
                 <a:ea typeface="Calibri" pitchFamily="34" charset="-122"/>
                 <a:cs typeface="Calibri" pitchFamily="34" charset="-120"/>
               </a:rPr>
-              <a:t>Para Hobbes, como é a vida no estado de natureza, antes do Estado?</a:t>
-            </a:r>
-            <a:endParaRPr lang="en-US" sz="1900" dirty="0"/>
-          </a:p>
-        </p:txBody>
-      </p:sp>
-      <p:sp>
-        <p:nvSpPr>
-          <p:cNvPr id="4" name="Shape 2"/>
-          <p:cNvSpPr/>
-          <p:nvPr/>
-        </p:nvSpPr>
-        <p:spPr>
-          <a:xfrm>
-            <a:off x="685800" y="1737360"/>
-            <a:ext cx="3794760" cy="914400"/>
-          </a:xfrm>
-          <a:prstGeom prst="roundRect">
-            <a:avLst>
-              <a:gd name="adj" fmla="val 8000"/>
-            </a:avLst>
-          </a:prstGeom>
-          <a:solidFill>
-            <a:srgbClr val="FFFFFF"/>
-          </a:solidFill>
-          <a:ln w="12700">
-            <a:solidFill>
-              <a:srgbClr val="DCD5C1"/>
-            </a:solidFill>
-            <a:prstDash val="solid"/>
-          </a:ln>
-        </p:spPr>
-      </p:sp>
-      <p:sp>
-        <p:nvSpPr>
-          <p:cNvPr id="5" name="Text 3"/>
-          <p:cNvSpPr txBox="1"/>
-          <p:nvPr/>
-        </p:nvSpPr>
-        <p:spPr>
-          <a:xfrm>
-            <a:off x="813816" y="1984248"/>
-            <a:ext cx="420624" cy="420624"/>
-          </a:xfrm>
-          <a:prstGeom prst="roundRect">
-            <a:avLst>
-              <a:gd name="adj" fmla="val 50000"/>
-            </a:avLst>
-          </a:prstGeom>
-          <a:solidFill>
-            <a:srgbClr val="13294B"/>
-          </a:solidFill>
-          <a:ln/>
-        </p:spPr>
-        <p:txBody>
-          <a:bodyPr wrap="square" lIns="0" tIns="0" rIns="0" bIns="0" rtlCol="0" anchor="ctr"/>
-          <a:lstStyle/>
-          <a:p>
-            <a:pPr algn="ctr" indent="0" marL="0">
-              <a:lnSpc>
-                <a:spcPct val="100000"/>
-              </a:lnSpc>
-              <a:buNone/>
-            </a:pPr>
-            <a:r>
-              <a:rPr lang="en-US" sz="1600" b="1" dirty="0">
-                <a:solidFill>
-                  <a:srgbClr val="FFFFFF"/>
-                </a:solidFill>
-                <a:latin typeface="Calibri" pitchFamily="34" charset="0"/>
-                <a:ea typeface="Calibri" pitchFamily="34" charset="-122"/>
-                <a:cs typeface="Calibri" pitchFamily="34" charset="-120"/>
-              </a:rPr>
-              <a:t>a</a:t>
-            </a:r>
-            <a:endParaRPr lang="en-US" sz="1600" dirty="0"/>
-          </a:p>
-        </p:txBody>
-      </p:sp>
-      <p:sp>
-        <p:nvSpPr>
-          <p:cNvPr id="6" name="Text 4"/>
-          <p:cNvSpPr txBox="1"/>
-          <p:nvPr/>
-        </p:nvSpPr>
-        <p:spPr>
-          <a:xfrm>
-            <a:off x="1344168" y="1773936"/>
-            <a:ext cx="3044952" cy="841248"/>
+              <a:t>Quiz da Unidade 2</a:t>
+            </a:r>
+            <a:endParaRPr lang="en-US" sz="3600" dirty="0"/>
+          </a:p>
+        </p:txBody>
+      </p:sp>
+      <p:sp>
+        <p:nvSpPr>
+          <p:cNvPr id="5" name="Text 2"/>
+          <p:cNvSpPr txBox="1"/>
+          <p:nvPr/>
+        </p:nvSpPr>
+        <p:spPr>
+          <a:xfrm>
+            <a:off x="1188720" y="2926080"/>
+            <a:ext cx="6766560" cy="822960"/>
           </a:xfrm>
           <a:prstGeom prst="rect">
             <a:avLst/>
@@ -8920,80 +9376,7 @@
           <a:ln/>
         </p:spPr>
         <p:txBody>
-          <a:bodyPr wrap="square" lIns="25400" tIns="25400" rIns="25400" bIns="25400" rtlCol="0" anchor="ctr"/>
-          <a:lstStyle/>
-          <a:p>
-            <a:pPr algn="l" indent="0" marL="0">
-              <a:lnSpc>
-                <a:spcPct val="100000"/>
-              </a:lnSpc>
-              <a:buNone/>
-            </a:pPr>
-            <a:r>
-              <a:rPr lang="en-US" sz="1400" dirty="0">
-                <a:solidFill>
-                  <a:srgbClr val="1F2A37"/>
-                </a:solidFill>
-                <a:latin typeface="Calibri" pitchFamily="34" charset="0"/>
-                <a:ea typeface="Calibri" pitchFamily="34" charset="-122"/>
-                <a:cs typeface="Calibri" pitchFamily="34" charset="-120"/>
-              </a:rPr>
-              <a:t>Harmoniosa e cooperativa</a:t>
-            </a:r>
-            <a:endParaRPr lang="en-US" sz="1400" dirty="0"/>
-          </a:p>
-        </p:txBody>
-      </p:sp>
-      <p:sp>
-        <p:nvSpPr>
-          <p:cNvPr id="7" name="Shape 5"/>
-          <p:cNvSpPr/>
-          <p:nvPr/>
-        </p:nvSpPr>
-        <p:spPr>
-          <a:xfrm>
-            <a:off x="4663440" y="1737360"/>
-            <a:ext cx="3794760" cy="914400"/>
-          </a:xfrm>
-          <a:prstGeom prst="roundRect">
-            <a:avLst>
-              <a:gd name="adj" fmla="val 8000"/>
-            </a:avLst>
-          </a:prstGeom>
-          <a:solidFill>
-            <a:srgbClr val="FFFFFF"/>
-          </a:solidFill>
-          <a:ln w="12700">
-            <a:solidFill>
-              <a:srgbClr val="DCD5C1"/>
-            </a:solidFill>
-            <a:prstDash val="solid"/>
-          </a:ln>
-        </p:spPr>
-      </p:sp>
-      <p:sp>
-        <p:nvSpPr>
-          <p:cNvPr id="8" name="Text 6"/>
-          <p:cNvSpPr txBox="1"/>
-          <p:nvPr/>
-        </p:nvSpPr>
-        <p:spPr>
-          <a:xfrm>
-            <a:off x="4791456" y="1984248"/>
-            <a:ext cx="420624" cy="420624"/>
-          </a:xfrm>
-          <a:prstGeom prst="roundRect">
-            <a:avLst>
-              <a:gd name="adj" fmla="val 50000"/>
-            </a:avLst>
-          </a:prstGeom>
-          <a:solidFill>
-            <a:srgbClr val="13294B"/>
-          </a:solidFill>
-          <a:ln/>
-        </p:spPr>
-        <p:txBody>
-          <a:bodyPr wrap="square" lIns="0" tIns="0" rIns="0" bIns="0" rtlCol="0" anchor="ctr"/>
+          <a:bodyPr wrap="square" lIns="0" tIns="0" rIns="0" bIns="0" rtlCol="0" anchor="t"/>
           <a:lstStyle/>
           <a:p>
             <a:pPr algn="ctr" indent="0" marL="0">
@@ -9003,15 +9386,15 @@
               <a:buNone/>
             </a:pPr>
             <a:r>
-              <a:rPr lang="en-US" sz="1600" b="1" dirty="0">
-                <a:solidFill>
-                  <a:srgbClr val="FFFFFF"/>
-                </a:solidFill>
-                <a:latin typeface="Calibri" pitchFamily="34" charset="0"/>
-                <a:ea typeface="Calibri" pitchFamily="34" charset="-122"/>
-                <a:cs typeface="Calibri" pitchFamily="34" charset="-120"/>
-              </a:rPr>
-              <a:t>b</a:t>
+              <a:rPr lang="en-US" sz="1600" dirty="0">
+                <a:solidFill>
+                  <a:srgbClr val="5B6770"/>
+                </a:solidFill>
+                <a:latin typeface="Calibri" pitchFamily="34" charset="0"/>
+                <a:ea typeface="Calibri" pitchFamily="34" charset="-122"/>
+                <a:cs typeface="Calibri" pitchFamily="34" charset="-120"/>
+              </a:rPr>
+              <a:t>5 perguntas para revisar a unidade. Pause o vídeo, escolha sua resposta e confira no slide seguinte.</a:t>
             </a:r>
             <a:endParaRPr lang="en-US" sz="1600" dirty="0"/>
           </a:p>
@@ -9019,279 +9402,7 @@
       </p:sp>
       <p:sp>
         <p:nvSpPr>
-          <p:cNvPr id="9" name="Text 7"/>
-          <p:cNvSpPr txBox="1"/>
-          <p:nvPr/>
-        </p:nvSpPr>
-        <p:spPr>
-          <a:xfrm>
-            <a:off x="5321808" y="1773936"/>
-            <a:ext cx="3044952" cy="841248"/>
-          </a:xfrm>
-          <a:prstGeom prst="rect">
-            <a:avLst/>
-          </a:prstGeom>
-          <a:noFill/>
-          <a:ln/>
-        </p:spPr>
-        <p:txBody>
-          <a:bodyPr wrap="square" lIns="25400" tIns="25400" rIns="25400" bIns="25400" rtlCol="0" anchor="ctr"/>
-          <a:lstStyle/>
-          <a:p>
-            <a:pPr algn="l" indent="0" marL="0">
-              <a:lnSpc>
-                <a:spcPct val="100000"/>
-              </a:lnSpc>
-              <a:buNone/>
-            </a:pPr>
-            <a:r>
-              <a:rPr lang="en-US" sz="1400" dirty="0">
-                <a:solidFill>
-                  <a:srgbClr val="1F2A37"/>
-                </a:solidFill>
-                <a:latin typeface="Calibri" pitchFamily="34" charset="0"/>
-                <a:ea typeface="Calibri" pitchFamily="34" charset="-122"/>
-                <a:cs typeface="Calibri" pitchFamily="34" charset="-120"/>
-              </a:rPr>
-              <a:t>Uma guerra de todos contra todos</a:t>
-            </a:r>
-            <a:endParaRPr lang="en-US" sz="1400" dirty="0"/>
-          </a:p>
-        </p:txBody>
-      </p:sp>
-      <p:sp>
-        <p:nvSpPr>
-          <p:cNvPr id="10" name="Shape 8"/>
-          <p:cNvSpPr/>
-          <p:nvPr/>
-        </p:nvSpPr>
-        <p:spPr>
-          <a:xfrm>
-            <a:off x="685800" y="2798064"/>
-            <a:ext cx="3794760" cy="914400"/>
-          </a:xfrm>
-          <a:prstGeom prst="roundRect">
-            <a:avLst>
-              <a:gd name="adj" fmla="val 8000"/>
-            </a:avLst>
-          </a:prstGeom>
-          <a:solidFill>
-            <a:srgbClr val="FFFFFF"/>
-          </a:solidFill>
-          <a:ln w="12700">
-            <a:solidFill>
-              <a:srgbClr val="DCD5C1"/>
-            </a:solidFill>
-            <a:prstDash val="solid"/>
-          </a:ln>
-        </p:spPr>
-      </p:sp>
-      <p:sp>
-        <p:nvSpPr>
-          <p:cNvPr id="11" name="Text 9"/>
-          <p:cNvSpPr txBox="1"/>
-          <p:nvPr/>
-        </p:nvSpPr>
-        <p:spPr>
-          <a:xfrm>
-            <a:off x="813816" y="3044952"/>
-            <a:ext cx="420624" cy="420624"/>
-          </a:xfrm>
-          <a:prstGeom prst="roundRect">
-            <a:avLst>
-              <a:gd name="adj" fmla="val 50000"/>
-            </a:avLst>
-          </a:prstGeom>
-          <a:solidFill>
-            <a:srgbClr val="13294B"/>
-          </a:solidFill>
-          <a:ln/>
-        </p:spPr>
-        <p:txBody>
-          <a:bodyPr wrap="square" lIns="0" tIns="0" rIns="0" bIns="0" rtlCol="0" anchor="ctr"/>
-          <a:lstStyle/>
-          <a:p>
-            <a:pPr algn="ctr" indent="0" marL="0">
-              <a:lnSpc>
-                <a:spcPct val="100000"/>
-              </a:lnSpc>
-              <a:buNone/>
-            </a:pPr>
-            <a:r>
-              <a:rPr lang="en-US" sz="1600" b="1" dirty="0">
-                <a:solidFill>
-                  <a:srgbClr val="FFFFFF"/>
-                </a:solidFill>
-                <a:latin typeface="Calibri" pitchFamily="34" charset="0"/>
-                <a:ea typeface="Calibri" pitchFamily="34" charset="-122"/>
-                <a:cs typeface="Calibri" pitchFamily="34" charset="-120"/>
-              </a:rPr>
-              <a:t>c</a:t>
-            </a:r>
-            <a:endParaRPr lang="en-US" sz="1600" dirty="0"/>
-          </a:p>
-        </p:txBody>
-      </p:sp>
-      <p:sp>
-        <p:nvSpPr>
-          <p:cNvPr id="12" name="Text 10"/>
-          <p:cNvSpPr txBox="1"/>
-          <p:nvPr/>
-        </p:nvSpPr>
-        <p:spPr>
-          <a:xfrm>
-            <a:off x="1344168" y="2834640"/>
-            <a:ext cx="3044952" cy="841248"/>
-          </a:xfrm>
-          <a:prstGeom prst="rect">
-            <a:avLst/>
-          </a:prstGeom>
-          <a:noFill/>
-          <a:ln/>
-        </p:spPr>
-        <p:txBody>
-          <a:bodyPr wrap="square" lIns="25400" tIns="25400" rIns="25400" bIns="25400" rtlCol="0" anchor="ctr"/>
-          <a:lstStyle/>
-          <a:p>
-            <a:pPr algn="l" indent="0" marL="0">
-              <a:lnSpc>
-                <a:spcPct val="100000"/>
-              </a:lnSpc>
-              <a:buNone/>
-            </a:pPr>
-            <a:r>
-              <a:rPr lang="en-US" sz="1400" dirty="0">
-                <a:solidFill>
-                  <a:srgbClr val="1F2A37"/>
-                </a:solidFill>
-                <a:latin typeface="Calibri" pitchFamily="34" charset="0"/>
-                <a:ea typeface="Calibri" pitchFamily="34" charset="-122"/>
-                <a:cs typeface="Calibri" pitchFamily="34" charset="-120"/>
-              </a:rPr>
-              <a:t>Organizada pelo mercado</a:t>
-            </a:r>
-            <a:endParaRPr lang="en-US" sz="1400" dirty="0"/>
-          </a:p>
-        </p:txBody>
-      </p:sp>
-      <p:sp>
-        <p:nvSpPr>
-          <p:cNvPr id="13" name="Shape 11"/>
-          <p:cNvSpPr/>
-          <p:nvPr/>
-        </p:nvSpPr>
-        <p:spPr>
-          <a:xfrm>
-            <a:off x="4663440" y="2798064"/>
-            <a:ext cx="3794760" cy="914400"/>
-          </a:xfrm>
-          <a:prstGeom prst="roundRect">
-            <a:avLst>
-              <a:gd name="adj" fmla="val 8000"/>
-            </a:avLst>
-          </a:prstGeom>
-          <a:solidFill>
-            <a:srgbClr val="FFFFFF"/>
-          </a:solidFill>
-          <a:ln w="12700">
-            <a:solidFill>
-              <a:srgbClr val="DCD5C1"/>
-            </a:solidFill>
-            <a:prstDash val="solid"/>
-          </a:ln>
-        </p:spPr>
-      </p:sp>
-      <p:sp>
-        <p:nvSpPr>
-          <p:cNvPr id="14" name="Text 12"/>
-          <p:cNvSpPr txBox="1"/>
-          <p:nvPr/>
-        </p:nvSpPr>
-        <p:spPr>
-          <a:xfrm>
-            <a:off x="4791456" y="3044952"/>
-            <a:ext cx="420624" cy="420624"/>
-          </a:xfrm>
-          <a:prstGeom prst="roundRect">
-            <a:avLst>
-              <a:gd name="adj" fmla="val 50000"/>
-            </a:avLst>
-          </a:prstGeom>
-          <a:solidFill>
-            <a:srgbClr val="13294B"/>
-          </a:solidFill>
-          <a:ln/>
-        </p:spPr>
-        <p:txBody>
-          <a:bodyPr wrap="square" lIns="0" tIns="0" rIns="0" bIns="0" rtlCol="0" anchor="ctr"/>
-          <a:lstStyle/>
-          <a:p>
-            <a:pPr algn="ctr" indent="0" marL="0">
-              <a:lnSpc>
-                <a:spcPct val="100000"/>
-              </a:lnSpc>
-              <a:buNone/>
-            </a:pPr>
-            <a:r>
-              <a:rPr lang="en-US" sz="1600" b="1" dirty="0">
-                <a:solidFill>
-                  <a:srgbClr val="FFFFFF"/>
-                </a:solidFill>
-                <a:latin typeface="Calibri" pitchFamily="34" charset="0"/>
-                <a:ea typeface="Calibri" pitchFamily="34" charset="-122"/>
-                <a:cs typeface="Calibri" pitchFamily="34" charset="-120"/>
-              </a:rPr>
-              <a:t>d</a:t>
-            </a:r>
-            <a:endParaRPr lang="en-US" sz="1600" dirty="0"/>
-          </a:p>
-        </p:txBody>
-      </p:sp>
-      <p:sp>
-        <p:nvSpPr>
-          <p:cNvPr id="15" name="Text 13"/>
-          <p:cNvSpPr txBox="1"/>
-          <p:nvPr/>
-        </p:nvSpPr>
-        <p:spPr>
-          <a:xfrm>
-            <a:off x="5321808" y="2834640"/>
-            <a:ext cx="3044952" cy="841248"/>
-          </a:xfrm>
-          <a:prstGeom prst="rect">
-            <a:avLst/>
-          </a:prstGeom>
-          <a:noFill/>
-          <a:ln/>
-        </p:spPr>
-        <p:txBody>
-          <a:bodyPr wrap="square" lIns="25400" tIns="25400" rIns="25400" bIns="25400" rtlCol="0" anchor="ctr"/>
-          <a:lstStyle/>
-          <a:p>
-            <a:pPr algn="l" indent="0" marL="0">
-              <a:lnSpc>
-                <a:spcPct val="100000"/>
-              </a:lnSpc>
-              <a:buNone/>
-            </a:pPr>
-            <a:r>
-              <a:rPr lang="en-US" sz="1400" dirty="0">
-                <a:solidFill>
-                  <a:srgbClr val="1F2A37"/>
-                </a:solidFill>
-                <a:latin typeface="Calibri" pitchFamily="34" charset="0"/>
-                <a:ea typeface="Calibri" pitchFamily="34" charset="-122"/>
-                <a:cs typeface="Calibri" pitchFamily="34" charset="-120"/>
-              </a:rPr>
-              <a:t>Governada pela vontade geral</a:t>
-            </a:r>
-            <a:endParaRPr lang="en-US" sz="1400" dirty="0"/>
-          </a:p>
-        </p:txBody>
-      </p:sp>
-      <p:sp>
-        <p:nvSpPr>
-          <p:cNvPr id="16" name="Text 14"/>
+          <p:cNvPr id="6" name="Text 3"/>
           <p:cNvSpPr txBox="1"/>
           <p:nvPr/>
         </p:nvSpPr>
@@ -10139,7 +10250,7 @@
                 <a:ea typeface="Calibri" pitchFamily="34" charset="-122"/>
                 <a:cs typeface="Calibri" pitchFamily="34" charset="-120"/>
               </a:rPr>
-              <a:t>QUIZ DA UNIDADE 2 · PERGUNTA 1 DE 5 · RESPOSTA</a:t>
+              <a:t>QUIZ DA UNIDADE 2 · PERGUNTA 1 DE 5</a:t>
             </a:r>
             <a:endParaRPr lang="en-US" sz="1250" dirty="0"/>
           </a:p>
@@ -10196,11 +10307,11 @@
         <p:spPr>
           <a:xfrm>
             <a:off x="685800" y="1737360"/>
-            <a:ext cx="3794760" cy="749808"/>
+            <a:ext cx="3794760" cy="914400"/>
           </a:xfrm>
           <a:prstGeom prst="roundRect">
             <a:avLst>
-              <a:gd name="adj" fmla="val 9756"/>
+              <a:gd name="adj" fmla="val 8000"/>
             </a:avLst>
           </a:prstGeom>
           <a:solidFill>
@@ -10222,7 +10333,7 @@
         </p:nvSpPr>
         <p:spPr>
           <a:xfrm>
-            <a:off x="813816" y="1901952"/>
+            <a:off x="813816" y="1984248"/>
             <a:ext cx="420624" cy="420624"/>
           </a:xfrm>
           <a:prstGeom prst="roundRect">
@@ -10231,7 +10342,7 @@
             </a:avLst>
           </a:prstGeom>
           <a:solidFill>
-            <a:srgbClr val="9AA3AB"/>
+            <a:srgbClr val="13294B"/>
           </a:solidFill>
           <a:ln/>
         </p:spPr>
@@ -10269,7 +10380,7 @@
         <p:spPr>
           <a:xfrm>
             <a:off x="1344168" y="1773936"/>
-            <a:ext cx="3044952" cy="676656"/>
+            <a:ext cx="3044952" cy="841248"/>
           </a:xfrm>
           <a:prstGeom prst="rect">
             <a:avLst/>
@@ -10290,7 +10401,7 @@
             <a:r>
               <a:rPr lang="en-US" sz="1400" dirty="0">
                 <a:solidFill>
-                  <a:srgbClr val="5B6770"/>
+                  <a:srgbClr val="1F2A37"/>
                 </a:solidFill>
                 <a:latin typeface="Calibri" pitchFamily="34" charset="0"/>
                 <a:ea typeface="Calibri" pitchFamily="34" charset="-122"/>
@@ -10311,126 +10422,11 @@
         <p:spPr>
           <a:xfrm>
             <a:off x="4663440" y="1737360"/>
-            <a:ext cx="3794760" cy="749808"/>
+            <a:ext cx="3794760" cy="914400"/>
           </a:xfrm>
           <a:prstGeom prst="roundRect">
             <a:avLst>
-              <a:gd name="adj" fmla="val 9756"/>
-            </a:avLst>
-          </a:prstGeom>
-          <a:solidFill>
-            <a:srgbClr val="E3F2E8"/>
-          </a:solidFill>
-          <a:ln w="25400">
-            <a:solidFill>
-              <a:srgbClr val="2E7D4F"/>
-            </a:solidFill>
-            <a:prstDash val="solid"/>
-          </a:ln>
-        </p:spPr>
-      </p:sp>
-      <p:sp>
-        <p:nvSpPr>
-          <p:cNvPr id="8" name="Text 6"/>
-          <p:cNvSpPr txBox="1"/>
-          <p:nvPr/>
-        </p:nvSpPr>
-        <p:spPr>
-          <a:xfrm>
-            <a:off x="4791456" y="1901952"/>
-            <a:ext cx="420624" cy="420624"/>
-          </a:xfrm>
-          <a:prstGeom prst="roundRect">
-            <a:avLst>
-              <a:gd name="adj" fmla="val 50000"/>
-            </a:avLst>
-          </a:prstGeom>
-          <a:solidFill>
-            <a:srgbClr val="2E7D4F"/>
-          </a:solidFill>
-          <a:ln/>
-        </p:spPr>
-        <p:txBody>
-          <a:bodyPr wrap="square" lIns="0" tIns="0" rIns="0" bIns="0" rtlCol="0" anchor="ctr"/>
-          <a:lstStyle/>
-          <a:p>
-            <a:pPr algn="ctr" indent="0" marL="0">
-              <a:lnSpc>
-                <a:spcPct val="100000"/>
-              </a:lnSpc>
-              <a:buNone/>
-            </a:pPr>
-            <a:r>
-              <a:rPr lang="en-US" sz="1600" b="1" dirty="0">
-                <a:solidFill>
-                  <a:srgbClr val="FFFFFF"/>
-                </a:solidFill>
-                <a:latin typeface="Calibri" pitchFamily="34" charset="0"/>
-                <a:ea typeface="Calibri" pitchFamily="34" charset="-122"/>
-                <a:cs typeface="Calibri" pitchFamily="34" charset="-120"/>
-              </a:rPr>
-              <a:t>b</a:t>
-            </a:r>
-            <a:endParaRPr lang="en-US" sz="1600" dirty="0"/>
-          </a:p>
-        </p:txBody>
-      </p:sp>
-      <p:sp>
-        <p:nvSpPr>
-          <p:cNvPr id="9" name="Text 7"/>
-          <p:cNvSpPr txBox="1"/>
-          <p:nvPr/>
-        </p:nvSpPr>
-        <p:spPr>
-          <a:xfrm>
-            <a:off x="5321808" y="1773936"/>
-            <a:ext cx="3044952" cy="676656"/>
-          </a:xfrm>
-          <a:prstGeom prst="rect">
-            <a:avLst/>
-          </a:prstGeom>
-          <a:noFill/>
-          <a:ln/>
-        </p:spPr>
-        <p:txBody>
-          <a:bodyPr wrap="square" lIns="25400" tIns="25400" rIns="25400" bIns="25400" rtlCol="0" anchor="ctr"/>
-          <a:lstStyle/>
-          <a:p>
-            <a:pPr algn="l" indent="0" marL="0">
-              <a:lnSpc>
-                <a:spcPct val="100000"/>
-              </a:lnSpc>
-              <a:buNone/>
-            </a:pPr>
-            <a:r>
-              <a:rPr lang="en-US" sz="1400" b="1" dirty="0">
-                <a:solidFill>
-                  <a:srgbClr val="1F2A37"/>
-                </a:solidFill>
-                <a:latin typeface="Calibri" pitchFamily="34" charset="0"/>
-                <a:ea typeface="Calibri" pitchFamily="34" charset="-122"/>
-                <a:cs typeface="Calibri" pitchFamily="34" charset="-120"/>
-              </a:rPr>
-              <a:t>Uma guerra de todos contra todos</a:t>
-            </a:r>
-            <a:endParaRPr lang="en-US" sz="1400" dirty="0"/>
-          </a:p>
-        </p:txBody>
-      </p:sp>
-      <p:sp>
-        <p:nvSpPr>
-          <p:cNvPr id="10" name="Shape 8"/>
-          <p:cNvSpPr/>
-          <p:nvPr/>
-        </p:nvSpPr>
-        <p:spPr>
-          <a:xfrm>
-            <a:off x="685800" y="2633472"/>
-            <a:ext cx="3794760" cy="749808"/>
-          </a:xfrm>
-          <a:prstGeom prst="roundRect">
-            <a:avLst>
-              <a:gd name="adj" fmla="val 9756"/>
+              <a:gd name="adj" fmla="val 8000"/>
             </a:avLst>
           </a:prstGeom>
           <a:solidFill>
@@ -10446,13 +10442,13 @@
       </p:sp>
       <p:sp>
         <p:nvSpPr>
-          <p:cNvPr id="11" name="Text 9"/>
-          <p:cNvSpPr txBox="1"/>
-          <p:nvPr/>
-        </p:nvSpPr>
-        <p:spPr>
-          <a:xfrm>
-            <a:off x="813816" y="2798064"/>
+          <p:cNvPr id="8" name="Text 6"/>
+          <p:cNvSpPr txBox="1"/>
+          <p:nvPr/>
+        </p:nvSpPr>
+        <p:spPr>
+          <a:xfrm>
+            <a:off x="4791456" y="1984248"/>
             <a:ext cx="420624" cy="420624"/>
           </a:xfrm>
           <a:prstGeom prst="roundRect">
@@ -10461,7 +10457,7 @@
             </a:avLst>
           </a:prstGeom>
           <a:solidFill>
-            <a:srgbClr val="9AA3AB"/>
+            <a:srgbClr val="13294B"/>
           </a:solidFill>
           <a:ln/>
         </p:spPr>
@@ -10484,7 +10480,7 @@
                 <a:ea typeface="Calibri" pitchFamily="34" charset="-122"/>
                 <a:cs typeface="Calibri" pitchFamily="34" charset="-120"/>
               </a:rPr>
-              <a:t>c</a:t>
+              <a:t>b</a:t>
             </a:r>
             <a:endParaRPr lang="en-US" sz="1600" dirty="0"/>
           </a:p>
@@ -10492,14 +10488,14 @@
       </p:sp>
       <p:sp>
         <p:nvSpPr>
-          <p:cNvPr id="12" name="Text 10"/>
-          <p:cNvSpPr txBox="1"/>
-          <p:nvPr/>
-        </p:nvSpPr>
-        <p:spPr>
-          <a:xfrm>
-            <a:off x="1344168" y="2670048"/>
-            <a:ext cx="3044952" cy="676656"/>
+          <p:cNvPr id="9" name="Text 7"/>
+          <p:cNvSpPr txBox="1"/>
+          <p:nvPr/>
+        </p:nvSpPr>
+        <p:spPr>
+          <a:xfrm>
+            <a:off x="5321808" y="1773936"/>
+            <a:ext cx="3044952" cy="841248"/>
           </a:xfrm>
           <a:prstGeom prst="rect">
             <a:avLst/>
@@ -10520,13 +10516,13 @@
             <a:r>
               <a:rPr lang="en-US" sz="1400" dirty="0">
                 <a:solidFill>
-                  <a:srgbClr val="5B6770"/>
-                </a:solidFill>
-                <a:latin typeface="Calibri" pitchFamily="34" charset="0"/>
-                <a:ea typeface="Calibri" pitchFamily="34" charset="-122"/>
-                <a:cs typeface="Calibri" pitchFamily="34" charset="-120"/>
-              </a:rPr>
-              <a:t>Organizada pelo mercado</a:t>
+                  <a:srgbClr val="1F2A37"/>
+                </a:solidFill>
+                <a:latin typeface="Calibri" pitchFamily="34" charset="0"/>
+                <a:ea typeface="Calibri" pitchFamily="34" charset="-122"/>
+                <a:cs typeface="Calibri" pitchFamily="34" charset="-120"/>
+              </a:rPr>
+              <a:t>Uma guerra de todos contra todos</a:t>
             </a:r>
             <a:endParaRPr lang="en-US" sz="1400" dirty="0"/>
           </a:p>
@@ -10534,18 +10530,18 @@
       </p:sp>
       <p:sp>
         <p:nvSpPr>
-          <p:cNvPr id="13" name="Shape 11"/>
+          <p:cNvPr id="10" name="Shape 8"/>
           <p:cNvSpPr/>
           <p:nvPr/>
         </p:nvSpPr>
         <p:spPr>
           <a:xfrm>
-            <a:off x="4663440" y="2633472"/>
-            <a:ext cx="3794760" cy="749808"/>
+            <a:off x="685800" y="2798064"/>
+            <a:ext cx="3794760" cy="914400"/>
           </a:xfrm>
           <a:prstGeom prst="roundRect">
             <a:avLst>
-              <a:gd name="adj" fmla="val 9756"/>
+              <a:gd name="adj" fmla="val 8000"/>
             </a:avLst>
           </a:prstGeom>
           <a:solidFill>
@@ -10561,13 +10557,13 @@
       </p:sp>
       <p:sp>
         <p:nvSpPr>
-          <p:cNvPr id="14" name="Text 12"/>
-          <p:cNvSpPr txBox="1"/>
-          <p:nvPr/>
-        </p:nvSpPr>
-        <p:spPr>
-          <a:xfrm>
-            <a:off x="4791456" y="2798064"/>
+          <p:cNvPr id="11" name="Text 9"/>
+          <p:cNvSpPr txBox="1"/>
+          <p:nvPr/>
+        </p:nvSpPr>
+        <p:spPr>
+          <a:xfrm>
+            <a:off x="813816" y="3044952"/>
             <a:ext cx="420624" cy="420624"/>
           </a:xfrm>
           <a:prstGeom prst="roundRect">
@@ -10576,7 +10572,7 @@
             </a:avLst>
           </a:prstGeom>
           <a:solidFill>
-            <a:srgbClr val="9AA3AB"/>
+            <a:srgbClr val="13294B"/>
           </a:solidFill>
           <a:ln/>
         </p:spPr>
@@ -10599,7 +10595,7 @@
                 <a:ea typeface="Calibri" pitchFamily="34" charset="-122"/>
                 <a:cs typeface="Calibri" pitchFamily="34" charset="-120"/>
               </a:rPr>
-              <a:t>d</a:t>
+              <a:t>c</a:t>
             </a:r>
             <a:endParaRPr lang="en-US" sz="1600" dirty="0"/>
           </a:p>
@@ -10607,14 +10603,14 @@
       </p:sp>
       <p:sp>
         <p:nvSpPr>
-          <p:cNvPr id="15" name="Text 13"/>
-          <p:cNvSpPr txBox="1"/>
-          <p:nvPr/>
-        </p:nvSpPr>
-        <p:spPr>
-          <a:xfrm>
-            <a:off x="5321808" y="2670048"/>
-            <a:ext cx="3044952" cy="676656"/>
+          <p:cNvPr id="12" name="Text 10"/>
+          <p:cNvSpPr txBox="1"/>
+          <p:nvPr/>
+        </p:nvSpPr>
+        <p:spPr>
+          <a:xfrm>
+            <a:off x="1344168" y="2834640"/>
+            <a:ext cx="3044952" cy="841248"/>
           </a:xfrm>
           <a:prstGeom prst="rect">
             <a:avLst/>
@@ -10635,13 +10631,13 @@
             <a:r>
               <a:rPr lang="en-US" sz="1400" dirty="0">
                 <a:solidFill>
-                  <a:srgbClr val="5B6770"/>
-                </a:solidFill>
-                <a:latin typeface="Calibri" pitchFamily="34" charset="0"/>
-                <a:ea typeface="Calibri" pitchFamily="34" charset="-122"/>
-                <a:cs typeface="Calibri" pitchFamily="34" charset="-120"/>
-              </a:rPr>
-              <a:t>Governada pela vontade geral</a:t>
+                  <a:srgbClr val="1F2A37"/>
+                </a:solidFill>
+                <a:latin typeface="Calibri" pitchFamily="34" charset="0"/>
+                <a:ea typeface="Calibri" pitchFamily="34" charset="-122"/>
+                <a:cs typeface="Calibri" pitchFamily="34" charset="-120"/>
+              </a:rPr>
+              <a:t>Organizada pelo mercado</a:t>
             </a:r>
             <a:endParaRPr lang="en-US" sz="1400" dirty="0"/>
           </a:p>
@@ -10649,27 +10645,96 @@
       </p:sp>
       <p:sp>
         <p:nvSpPr>
-          <p:cNvPr id="16" name="Text 14"/>
-          <p:cNvSpPr txBox="1"/>
-          <p:nvPr/>
-        </p:nvSpPr>
-        <p:spPr>
-          <a:xfrm>
-            <a:off x="685800" y="3566160"/>
-            <a:ext cx="7772400" cy="841248"/>
+          <p:cNvPr id="13" name="Shape 11"/>
+          <p:cNvSpPr/>
+          <p:nvPr/>
+        </p:nvSpPr>
+        <p:spPr>
+          <a:xfrm>
+            <a:off x="4663440" y="2798064"/>
+            <a:ext cx="3794760" cy="914400"/>
           </a:xfrm>
           <a:prstGeom prst="roundRect">
             <a:avLst>
-              <a:gd name="adj" fmla="val 8696"/>
+              <a:gd name="adj" fmla="val 8000"/>
             </a:avLst>
           </a:prstGeom>
           <a:solidFill>
-            <a:srgbClr val="E6F2F0"/>
+            <a:srgbClr val="FFFFFF"/>
           </a:solidFill>
-          <a:ln/>
-        </p:spPr>
-        <p:txBody>
-          <a:bodyPr wrap="square" lIns="114300" tIns="114300" rIns="114300" bIns="114300" rtlCol="0" anchor="ctr"/>
+          <a:ln w="12700">
+            <a:solidFill>
+              <a:srgbClr val="DCD5C1"/>
+            </a:solidFill>
+            <a:prstDash val="solid"/>
+          </a:ln>
+        </p:spPr>
+      </p:sp>
+      <p:sp>
+        <p:nvSpPr>
+          <p:cNvPr id="14" name="Text 12"/>
+          <p:cNvSpPr txBox="1"/>
+          <p:nvPr/>
+        </p:nvSpPr>
+        <p:spPr>
+          <a:xfrm>
+            <a:off x="4791456" y="3044952"/>
+            <a:ext cx="420624" cy="420624"/>
+          </a:xfrm>
+          <a:prstGeom prst="roundRect">
+            <a:avLst>
+              <a:gd name="adj" fmla="val 50000"/>
+            </a:avLst>
+          </a:prstGeom>
+          <a:solidFill>
+            <a:srgbClr val="13294B"/>
+          </a:solidFill>
+          <a:ln/>
+        </p:spPr>
+        <p:txBody>
+          <a:bodyPr wrap="square" lIns="0" tIns="0" rIns="0" bIns="0" rtlCol="0" anchor="ctr"/>
+          <a:lstStyle/>
+          <a:p>
+            <a:pPr algn="ctr" indent="0" marL="0">
+              <a:lnSpc>
+                <a:spcPct val="100000"/>
+              </a:lnSpc>
+              <a:buNone/>
+            </a:pPr>
+            <a:r>
+              <a:rPr lang="en-US" sz="1600" b="1" dirty="0">
+                <a:solidFill>
+                  <a:srgbClr val="FFFFFF"/>
+                </a:solidFill>
+                <a:latin typeface="Calibri" pitchFamily="34" charset="0"/>
+                <a:ea typeface="Calibri" pitchFamily="34" charset="-122"/>
+                <a:cs typeface="Calibri" pitchFamily="34" charset="-120"/>
+              </a:rPr>
+              <a:t>d</a:t>
+            </a:r>
+            <a:endParaRPr lang="en-US" sz="1600" dirty="0"/>
+          </a:p>
+        </p:txBody>
+      </p:sp>
+      <p:sp>
+        <p:nvSpPr>
+          <p:cNvPr id="15" name="Text 13"/>
+          <p:cNvSpPr txBox="1"/>
+          <p:nvPr/>
+        </p:nvSpPr>
+        <p:spPr>
+          <a:xfrm>
+            <a:off x="5321808" y="2834640"/>
+            <a:ext cx="3044952" cy="841248"/>
+          </a:xfrm>
+          <a:prstGeom prst="rect">
+            <a:avLst/>
+          </a:prstGeom>
+          <a:noFill/>
+          <a:ln/>
+        </p:spPr>
+        <p:txBody>
+          <a:bodyPr wrap="square" lIns="25400" tIns="25400" rIns="25400" bIns="25400" rtlCol="0" anchor="ctr"/>
           <a:lstStyle/>
           <a:p>
             <a:pPr algn="l" indent="0" marL="0">
@@ -10679,24 +10744,7 @@
               <a:buNone/>
             </a:pPr>
             <a:r>
-              <a:rPr lang="en-US" sz="1350" b="1" dirty="0">
-                <a:solidFill>
-                  <a:srgbClr val="2E7D4F"/>
-                </a:solidFill>
-                <a:latin typeface="Calibri" pitchFamily="34" charset="0"/>
-                <a:ea typeface="Calibri" pitchFamily="34" charset="-122"/>
-                <a:cs typeface="Calibri" pitchFamily="34" charset="-120"/>
-              </a:rPr>
-              <a:t>Resposta: b) </a:t>
-            </a:r>
-            <a:pPr algn="l" indent="0" marL="0">
-              <a:lnSpc>
-                <a:spcPct val="100000"/>
-              </a:lnSpc>
-              <a:buNone/>
-            </a:pPr>
-            <a:r>
-              <a:rPr lang="en-US" sz="1350" dirty="0">
+              <a:rPr lang="en-US" sz="1400" dirty="0">
                 <a:solidFill>
                   <a:srgbClr val="1F2A37"/>
                 </a:solidFill>
@@ -10704,15 +10752,15 @@
                 <a:ea typeface="Calibri" pitchFamily="34" charset="-122"/>
                 <a:cs typeface="Calibri" pitchFamily="34" charset="-120"/>
               </a:rPr>
-              <a:t>Sem um poder comum, cada um ameaça o outro. Para obter segurança, os indivíduos transferem o poder a um soberano (o Leviatã).</a:t>
-            </a:r>
-            <a:endParaRPr lang="en-US" sz="1350" dirty="0"/>
-          </a:p>
-        </p:txBody>
-      </p:sp>
-      <p:sp>
-        <p:nvSpPr>
-          <p:cNvPr id="17" name="Text 15"/>
+              <a:t>Governada pela vontade geral</a:t>
+            </a:r>
+            <a:endParaRPr lang="en-US" sz="1400" dirty="0"/>
+          </a:p>
+        </p:txBody>
+      </p:sp>
+      <p:sp>
+        <p:nvSpPr>
+          <p:cNvPr id="16" name="Text 14"/>
           <p:cNvSpPr txBox="1"/>
           <p:nvPr/>
         </p:nvSpPr>
@@ -10827,7 +10875,7 @@
                 <a:ea typeface="Calibri" pitchFamily="34" charset="-122"/>
                 <a:cs typeface="Calibri" pitchFamily="34" charset="-120"/>
               </a:rPr>
-              <a:t>QUIZ DA UNIDADE 2 · PERGUNTA 2 DE 5</a:t>
+              <a:t>QUIZ DA UNIDADE 2 · PERGUNTA 1 DE 5 · RESPOSTA</a:t>
             </a:r>
             <a:endParaRPr lang="en-US" sz="1250" dirty="0"/>
           </a:p>
@@ -10869,7 +10917,7 @@
                 <a:ea typeface="Calibri" pitchFamily="34" charset="-122"/>
                 <a:cs typeface="Calibri" pitchFamily="34" charset="-120"/>
               </a:rPr>
-              <a:t>Os direitos naturais à vida, à liberdade e à propriedade são a base do pensamento de:</a:t>
+              <a:t>Para Hobbes, como é a vida no estado de natureza, antes do Estado?</a:t>
             </a:r>
             <a:endParaRPr lang="en-US" sz="1900" dirty="0"/>
           </a:p>
@@ -10884,11 +10932,11 @@
         <p:spPr>
           <a:xfrm>
             <a:off x="685800" y="1737360"/>
-            <a:ext cx="3794760" cy="914400"/>
+            <a:ext cx="3794760" cy="749808"/>
           </a:xfrm>
           <a:prstGeom prst="roundRect">
             <a:avLst>
-              <a:gd name="adj" fmla="val 8000"/>
+              <a:gd name="adj" fmla="val 9756"/>
             </a:avLst>
           </a:prstGeom>
           <a:solidFill>
@@ -10910,7 +10958,7 @@
         </p:nvSpPr>
         <p:spPr>
           <a:xfrm>
-            <a:off x="813816" y="1984248"/>
+            <a:off x="813816" y="1901952"/>
             <a:ext cx="420624" cy="420624"/>
           </a:xfrm>
           <a:prstGeom prst="roundRect">
@@ -10919,7 +10967,7 @@
             </a:avLst>
           </a:prstGeom>
           <a:solidFill>
-            <a:srgbClr val="13294B"/>
+            <a:srgbClr val="9AA3AB"/>
           </a:solidFill>
           <a:ln/>
         </p:spPr>
@@ -10957,7 +11005,7 @@
         <p:spPr>
           <a:xfrm>
             <a:off x="1344168" y="1773936"/>
-            <a:ext cx="3044952" cy="841248"/>
+            <a:ext cx="3044952" cy="676656"/>
           </a:xfrm>
           <a:prstGeom prst="rect">
             <a:avLst/>
@@ -10978,13 +11026,13 @@
             <a:r>
               <a:rPr lang="en-US" sz="1400" dirty="0">
                 <a:solidFill>
-                  <a:srgbClr val="1F2A37"/>
-                </a:solidFill>
-                <a:latin typeface="Calibri" pitchFamily="34" charset="0"/>
-                <a:ea typeface="Calibri" pitchFamily="34" charset="-122"/>
-                <a:cs typeface="Calibri" pitchFamily="34" charset="-120"/>
-              </a:rPr>
-              <a:t>John Locke</a:t>
+                  <a:srgbClr val="5B6770"/>
+                </a:solidFill>
+                <a:latin typeface="Calibri" pitchFamily="34" charset="0"/>
+                <a:ea typeface="Calibri" pitchFamily="34" charset="-122"/>
+                <a:cs typeface="Calibri" pitchFamily="34" charset="-120"/>
+              </a:rPr>
+              <a:t>Harmoniosa e cooperativa</a:t>
             </a:r>
             <a:endParaRPr lang="en-US" sz="1400" dirty="0"/>
           </a:p>
@@ -10999,11 +11047,126 @@
         <p:spPr>
           <a:xfrm>
             <a:off x="4663440" y="1737360"/>
-            <a:ext cx="3794760" cy="914400"/>
+            <a:ext cx="3794760" cy="749808"/>
           </a:xfrm>
           <a:prstGeom prst="roundRect">
             <a:avLst>
-              <a:gd name="adj" fmla="val 8000"/>
+              <a:gd name="adj" fmla="val 9756"/>
+            </a:avLst>
+          </a:prstGeom>
+          <a:solidFill>
+            <a:srgbClr val="E3F2E8"/>
+          </a:solidFill>
+          <a:ln w="25400">
+            <a:solidFill>
+              <a:srgbClr val="2E7D4F"/>
+            </a:solidFill>
+            <a:prstDash val="solid"/>
+          </a:ln>
+        </p:spPr>
+      </p:sp>
+      <p:sp>
+        <p:nvSpPr>
+          <p:cNvPr id="8" name="Text 6"/>
+          <p:cNvSpPr txBox="1"/>
+          <p:nvPr/>
+        </p:nvSpPr>
+        <p:spPr>
+          <a:xfrm>
+            <a:off x="4791456" y="1901952"/>
+            <a:ext cx="420624" cy="420624"/>
+          </a:xfrm>
+          <a:prstGeom prst="roundRect">
+            <a:avLst>
+              <a:gd name="adj" fmla="val 50000"/>
+            </a:avLst>
+          </a:prstGeom>
+          <a:solidFill>
+            <a:srgbClr val="2E7D4F"/>
+          </a:solidFill>
+          <a:ln/>
+        </p:spPr>
+        <p:txBody>
+          <a:bodyPr wrap="square" lIns="0" tIns="0" rIns="0" bIns="0" rtlCol="0" anchor="ctr"/>
+          <a:lstStyle/>
+          <a:p>
+            <a:pPr algn="ctr" indent="0" marL="0">
+              <a:lnSpc>
+                <a:spcPct val="100000"/>
+              </a:lnSpc>
+              <a:buNone/>
+            </a:pPr>
+            <a:r>
+              <a:rPr lang="en-US" sz="1600" b="1" dirty="0">
+                <a:solidFill>
+                  <a:srgbClr val="FFFFFF"/>
+                </a:solidFill>
+                <a:latin typeface="Calibri" pitchFamily="34" charset="0"/>
+                <a:ea typeface="Calibri" pitchFamily="34" charset="-122"/>
+                <a:cs typeface="Calibri" pitchFamily="34" charset="-120"/>
+              </a:rPr>
+              <a:t>b</a:t>
+            </a:r>
+            <a:endParaRPr lang="en-US" sz="1600" dirty="0"/>
+          </a:p>
+        </p:txBody>
+      </p:sp>
+      <p:sp>
+        <p:nvSpPr>
+          <p:cNvPr id="9" name="Text 7"/>
+          <p:cNvSpPr txBox="1"/>
+          <p:nvPr/>
+        </p:nvSpPr>
+        <p:spPr>
+          <a:xfrm>
+            <a:off x="5321808" y="1773936"/>
+            <a:ext cx="3044952" cy="676656"/>
+          </a:xfrm>
+          <a:prstGeom prst="rect">
+            <a:avLst/>
+          </a:prstGeom>
+          <a:noFill/>
+          <a:ln/>
+        </p:spPr>
+        <p:txBody>
+          <a:bodyPr wrap="square" lIns="25400" tIns="25400" rIns="25400" bIns="25400" rtlCol="0" anchor="ctr"/>
+          <a:lstStyle/>
+          <a:p>
+            <a:pPr algn="l" indent="0" marL="0">
+              <a:lnSpc>
+                <a:spcPct val="100000"/>
+              </a:lnSpc>
+              <a:buNone/>
+            </a:pPr>
+            <a:r>
+              <a:rPr lang="en-US" sz="1400" b="1" dirty="0">
+                <a:solidFill>
+                  <a:srgbClr val="1F2A37"/>
+                </a:solidFill>
+                <a:latin typeface="Calibri" pitchFamily="34" charset="0"/>
+                <a:ea typeface="Calibri" pitchFamily="34" charset="-122"/>
+                <a:cs typeface="Calibri" pitchFamily="34" charset="-120"/>
+              </a:rPr>
+              <a:t>Uma guerra de todos contra todos</a:t>
+            </a:r>
+            <a:endParaRPr lang="en-US" sz="1400" dirty="0"/>
+          </a:p>
+        </p:txBody>
+      </p:sp>
+      <p:sp>
+        <p:nvSpPr>
+          <p:cNvPr id="10" name="Shape 8"/>
+          <p:cNvSpPr/>
+          <p:nvPr/>
+        </p:nvSpPr>
+        <p:spPr>
+          <a:xfrm>
+            <a:off x="685800" y="2633472"/>
+            <a:ext cx="3794760" cy="749808"/>
+          </a:xfrm>
+          <a:prstGeom prst="roundRect">
+            <a:avLst>
+              <a:gd name="adj" fmla="val 9756"/>
             </a:avLst>
           </a:prstGeom>
           <a:solidFill>
@@ -11019,13 +11182,13 @@
       </p:sp>
       <p:sp>
         <p:nvSpPr>
-          <p:cNvPr id="8" name="Text 6"/>
-          <p:cNvSpPr txBox="1"/>
-          <p:nvPr/>
-        </p:nvSpPr>
-        <p:spPr>
-          <a:xfrm>
-            <a:off x="4791456" y="1984248"/>
+          <p:cNvPr id="11" name="Text 9"/>
+          <p:cNvSpPr txBox="1"/>
+          <p:nvPr/>
+        </p:nvSpPr>
+        <p:spPr>
+          <a:xfrm>
+            <a:off x="813816" y="2798064"/>
             <a:ext cx="420624" cy="420624"/>
           </a:xfrm>
           <a:prstGeom prst="roundRect">
@@ -11034,7 +11197,7 @@
             </a:avLst>
           </a:prstGeom>
           <a:solidFill>
-            <a:srgbClr val="13294B"/>
+            <a:srgbClr val="9AA3AB"/>
           </a:solidFill>
           <a:ln/>
         </p:spPr>
@@ -11057,7 +11220,7 @@
                 <a:ea typeface="Calibri" pitchFamily="34" charset="-122"/>
                 <a:cs typeface="Calibri" pitchFamily="34" charset="-120"/>
               </a:rPr>
-              <a:t>b</a:t>
+              <a:t>c</a:t>
             </a:r>
             <a:endParaRPr lang="en-US" sz="1600" dirty="0"/>
           </a:p>
@@ -11065,14 +11228,14 @@
       </p:sp>
       <p:sp>
         <p:nvSpPr>
-          <p:cNvPr id="9" name="Text 7"/>
-          <p:cNvSpPr txBox="1"/>
-          <p:nvPr/>
-        </p:nvSpPr>
-        <p:spPr>
-          <a:xfrm>
-            <a:off x="5321808" y="1773936"/>
-            <a:ext cx="3044952" cy="841248"/>
+          <p:cNvPr id="12" name="Text 10"/>
+          <p:cNvSpPr txBox="1"/>
+          <p:nvPr/>
+        </p:nvSpPr>
+        <p:spPr>
+          <a:xfrm>
+            <a:off x="1344168" y="2670048"/>
+            <a:ext cx="3044952" cy="676656"/>
           </a:xfrm>
           <a:prstGeom prst="rect">
             <a:avLst/>
@@ -11093,13 +11256,13 @@
             <a:r>
               <a:rPr lang="en-US" sz="1400" dirty="0">
                 <a:solidFill>
-                  <a:srgbClr val="1F2A37"/>
-                </a:solidFill>
-                <a:latin typeface="Calibri" pitchFamily="34" charset="0"/>
-                <a:ea typeface="Calibri" pitchFamily="34" charset="-122"/>
-                <a:cs typeface="Calibri" pitchFamily="34" charset="-120"/>
-              </a:rPr>
-              <a:t>Thomas Hobbes</a:t>
+                  <a:srgbClr val="5B6770"/>
+                </a:solidFill>
+                <a:latin typeface="Calibri" pitchFamily="34" charset="0"/>
+                <a:ea typeface="Calibri" pitchFamily="34" charset="-122"/>
+                <a:cs typeface="Calibri" pitchFamily="34" charset="-120"/>
+              </a:rPr>
+              <a:t>Organizada pelo mercado</a:t>
             </a:r>
             <a:endParaRPr lang="en-US" sz="1400" dirty="0"/>
           </a:p>
@@ -11107,18 +11270,18 @@
       </p:sp>
       <p:sp>
         <p:nvSpPr>
-          <p:cNvPr id="10" name="Shape 8"/>
+          <p:cNvPr id="13" name="Shape 11"/>
           <p:cNvSpPr/>
           <p:nvPr/>
         </p:nvSpPr>
         <p:spPr>
           <a:xfrm>
-            <a:off x="685800" y="2798064"/>
-            <a:ext cx="3794760" cy="914400"/>
+            <a:off x="4663440" y="2633472"/>
+            <a:ext cx="3794760" cy="749808"/>
           </a:xfrm>
           <a:prstGeom prst="roundRect">
             <a:avLst>
-              <a:gd name="adj" fmla="val 8000"/>
+              <a:gd name="adj" fmla="val 9756"/>
             </a:avLst>
           </a:prstGeom>
           <a:solidFill>
@@ -11134,13 +11297,13 @@
       </p:sp>
       <p:sp>
         <p:nvSpPr>
-          <p:cNvPr id="11" name="Text 9"/>
-          <p:cNvSpPr txBox="1"/>
-          <p:nvPr/>
-        </p:nvSpPr>
-        <p:spPr>
-          <a:xfrm>
-            <a:off x="813816" y="3044952"/>
+          <p:cNvPr id="14" name="Text 12"/>
+          <p:cNvSpPr txBox="1"/>
+          <p:nvPr/>
+        </p:nvSpPr>
+        <p:spPr>
+          <a:xfrm>
+            <a:off x="4791456" y="2798064"/>
             <a:ext cx="420624" cy="420624"/>
           </a:xfrm>
           <a:prstGeom prst="roundRect">
@@ -11149,7 +11312,7 @@
             </a:avLst>
           </a:prstGeom>
           <a:solidFill>
-            <a:srgbClr val="13294B"/>
+            <a:srgbClr val="9AA3AB"/>
           </a:solidFill>
           <a:ln/>
         </p:spPr>
@@ -11172,7 +11335,7 @@
                 <a:ea typeface="Calibri" pitchFamily="34" charset="-122"/>
                 <a:cs typeface="Calibri" pitchFamily="34" charset="-120"/>
               </a:rPr>
-              <a:t>c</a:t>
+              <a:t>d</a:t>
             </a:r>
             <a:endParaRPr lang="en-US" sz="1600" dirty="0"/>
           </a:p>
@@ -11180,14 +11343,14 @@
       </p:sp>
       <p:sp>
         <p:nvSpPr>
-          <p:cNvPr id="12" name="Text 10"/>
-          <p:cNvSpPr txBox="1"/>
-          <p:nvPr/>
-        </p:nvSpPr>
-        <p:spPr>
-          <a:xfrm>
-            <a:off x="1344168" y="2834640"/>
-            <a:ext cx="3044952" cy="841248"/>
+          <p:cNvPr id="15" name="Text 13"/>
+          <p:cNvSpPr txBox="1"/>
+          <p:nvPr/>
+        </p:nvSpPr>
+        <p:spPr>
+          <a:xfrm>
+            <a:off x="5321808" y="2670048"/>
+            <a:ext cx="3044952" cy="676656"/>
           </a:xfrm>
           <a:prstGeom prst="rect">
             <a:avLst/>
@@ -11208,13 +11371,13 @@
             <a:r>
               <a:rPr lang="en-US" sz="1400" dirty="0">
                 <a:solidFill>
-                  <a:srgbClr val="1F2A37"/>
-                </a:solidFill>
-                <a:latin typeface="Calibri" pitchFamily="34" charset="0"/>
-                <a:ea typeface="Calibri" pitchFamily="34" charset="-122"/>
-                <a:cs typeface="Calibri" pitchFamily="34" charset="-120"/>
-              </a:rPr>
-              <a:t>Karl Marx</a:t>
+                  <a:srgbClr val="5B6770"/>
+                </a:solidFill>
+                <a:latin typeface="Calibri" pitchFamily="34" charset="0"/>
+                <a:ea typeface="Calibri" pitchFamily="34" charset="-122"/>
+                <a:cs typeface="Calibri" pitchFamily="34" charset="-120"/>
+              </a:rPr>
+              <a:t>Governada pela vontade geral</a:t>
             </a:r>
             <a:endParaRPr lang="en-US" sz="1400" dirty="0"/>
           </a:p>
@@ -11222,96 +11385,27 @@
       </p:sp>
       <p:sp>
         <p:nvSpPr>
-          <p:cNvPr id="13" name="Shape 11"/>
-          <p:cNvSpPr/>
-          <p:nvPr/>
-        </p:nvSpPr>
-        <p:spPr>
-          <a:xfrm>
-            <a:off x="4663440" y="2798064"/>
-            <a:ext cx="3794760" cy="914400"/>
+          <p:cNvPr id="16" name="Text 14"/>
+          <p:cNvSpPr txBox="1"/>
+          <p:nvPr/>
+        </p:nvSpPr>
+        <p:spPr>
+          <a:xfrm>
+            <a:off x="685800" y="3566160"/>
+            <a:ext cx="7772400" cy="841248"/>
           </a:xfrm>
           <a:prstGeom prst="roundRect">
             <a:avLst>
-              <a:gd name="adj" fmla="val 8000"/>
+              <a:gd name="adj" fmla="val 8696"/>
             </a:avLst>
           </a:prstGeom>
           <a:solidFill>
-            <a:srgbClr val="FFFFFF"/>
+            <a:srgbClr val="E6F2F0"/>
           </a:solidFill>
-          <a:ln w="12700">
-            <a:solidFill>
-              <a:srgbClr val="DCD5C1"/>
-            </a:solidFill>
-            <a:prstDash val="solid"/>
-          </a:ln>
-        </p:spPr>
-      </p:sp>
-      <p:sp>
-        <p:nvSpPr>
-          <p:cNvPr id="14" name="Text 12"/>
-          <p:cNvSpPr txBox="1"/>
-          <p:nvPr/>
-        </p:nvSpPr>
-        <p:spPr>
-          <a:xfrm>
-            <a:off x="4791456" y="3044952"/>
-            <a:ext cx="420624" cy="420624"/>
-          </a:xfrm>
-          <a:prstGeom prst="roundRect">
-            <a:avLst>
-              <a:gd name="adj" fmla="val 50000"/>
-            </a:avLst>
-          </a:prstGeom>
-          <a:solidFill>
-            <a:srgbClr val="13294B"/>
-          </a:solidFill>
-          <a:ln/>
-        </p:spPr>
-        <p:txBody>
-          <a:bodyPr wrap="square" lIns="0" tIns="0" rIns="0" bIns="0" rtlCol="0" anchor="ctr"/>
-          <a:lstStyle/>
-          <a:p>
-            <a:pPr algn="ctr" indent="0" marL="0">
-              <a:lnSpc>
-                <a:spcPct val="100000"/>
-              </a:lnSpc>
-              <a:buNone/>
-            </a:pPr>
-            <a:r>
-              <a:rPr lang="en-US" sz="1600" b="1" dirty="0">
-                <a:solidFill>
-                  <a:srgbClr val="FFFFFF"/>
-                </a:solidFill>
-                <a:latin typeface="Calibri" pitchFamily="34" charset="0"/>
-                <a:ea typeface="Calibri" pitchFamily="34" charset="-122"/>
-                <a:cs typeface="Calibri" pitchFamily="34" charset="-120"/>
-              </a:rPr>
-              <a:t>d</a:t>
-            </a:r>
-            <a:endParaRPr lang="en-US" sz="1600" dirty="0"/>
-          </a:p>
-        </p:txBody>
-      </p:sp>
-      <p:sp>
-        <p:nvSpPr>
-          <p:cNvPr id="15" name="Text 13"/>
-          <p:cNvSpPr txBox="1"/>
-          <p:nvPr/>
-        </p:nvSpPr>
-        <p:spPr>
-          <a:xfrm>
-            <a:off x="5321808" y="2834640"/>
-            <a:ext cx="3044952" cy="841248"/>
-          </a:xfrm>
-          <a:prstGeom prst="rect">
-            <a:avLst/>
-          </a:prstGeom>
-          <a:noFill/>
-          <a:ln/>
-        </p:spPr>
-        <p:txBody>
-          <a:bodyPr wrap="square" lIns="25400" tIns="25400" rIns="25400" bIns="25400" rtlCol="0" anchor="ctr"/>
+          <a:ln/>
+        </p:spPr>
+        <p:txBody>
+          <a:bodyPr wrap="square" lIns="114300" tIns="114300" rIns="114300" bIns="114300" rtlCol="0" anchor="ctr"/>
           <a:lstStyle/>
           <a:p>
             <a:pPr algn="l" indent="0" marL="0">
@@ -11321,7 +11415,24 @@
               <a:buNone/>
             </a:pPr>
             <a:r>
-              <a:rPr lang="en-US" sz="1400" dirty="0">
+              <a:rPr lang="en-US" sz="1350" b="1" dirty="0">
+                <a:solidFill>
+                  <a:srgbClr val="2E7D4F"/>
+                </a:solidFill>
+                <a:latin typeface="Calibri" pitchFamily="34" charset="0"/>
+                <a:ea typeface="Calibri" pitchFamily="34" charset="-122"/>
+                <a:cs typeface="Calibri" pitchFamily="34" charset="-120"/>
+              </a:rPr>
+              <a:t>Resposta: b) </a:t>
+            </a:r>
+            <a:pPr algn="l" indent="0" marL="0">
+              <a:lnSpc>
+                <a:spcPct val="100000"/>
+              </a:lnSpc>
+              <a:buNone/>
+            </a:pPr>
+            <a:r>
+              <a:rPr lang="en-US" sz="1350" dirty="0">
                 <a:solidFill>
                   <a:srgbClr val="1F2A37"/>
                 </a:solidFill>
@@ -11329,15 +11440,15 @@
                 <a:ea typeface="Calibri" pitchFamily="34" charset="-122"/>
                 <a:cs typeface="Calibri" pitchFamily="34" charset="-120"/>
               </a:rPr>
-              <a:t>John Maynard Keynes</a:t>
-            </a:r>
-            <a:endParaRPr lang="en-US" sz="1400" dirty="0"/>
-          </a:p>
-        </p:txBody>
-      </p:sp>
-      <p:sp>
-        <p:nvSpPr>
-          <p:cNvPr id="16" name="Text 14"/>
+              <a:t>Sem um poder comum, cada um ameaça o outro. Para obter segurança, os indivíduos transferem o poder a um soberano (o Leviatã).</a:t>
+            </a:r>
+            <a:endParaRPr lang="en-US" sz="1350" dirty="0"/>
+          </a:p>
+        </p:txBody>
+      </p:sp>
+      <p:sp>
+        <p:nvSpPr>
+          <p:cNvPr id="17" name="Text 15"/>
           <p:cNvSpPr txBox="1"/>
           <p:nvPr/>
         </p:nvSpPr>
@@ -11452,7 +11563,7 @@
                 <a:ea typeface="Calibri" pitchFamily="34" charset="-122"/>
                 <a:cs typeface="Calibri" pitchFamily="34" charset="-120"/>
               </a:rPr>
-              <a:t>QUIZ DA UNIDADE 2 · PERGUNTA 2 DE 5 · RESPOSTA</a:t>
+              <a:t>QUIZ DA UNIDADE 2 · PERGUNTA 2 DE 5</a:t>
             </a:r>
             <a:endParaRPr lang="en-US" sz="1250" dirty="0"/>
           </a:p>
@@ -11509,126 +11620,11 @@
         <p:spPr>
           <a:xfrm>
             <a:off x="685800" y="1737360"/>
-            <a:ext cx="3794760" cy="749808"/>
+            <a:ext cx="3794760" cy="914400"/>
           </a:xfrm>
           <a:prstGeom prst="roundRect">
             <a:avLst>
-              <a:gd name="adj" fmla="val 9756"/>
-            </a:avLst>
-          </a:prstGeom>
-          <a:solidFill>
-            <a:srgbClr val="E3F2E8"/>
-          </a:solidFill>
-          <a:ln w="25400">
-            <a:solidFill>
-              <a:srgbClr val="2E7D4F"/>
-            </a:solidFill>
-            <a:prstDash val="solid"/>
-          </a:ln>
-        </p:spPr>
-      </p:sp>
-      <p:sp>
-        <p:nvSpPr>
-          <p:cNvPr id="5" name="Text 3"/>
-          <p:cNvSpPr txBox="1"/>
-          <p:nvPr/>
-        </p:nvSpPr>
-        <p:spPr>
-          <a:xfrm>
-            <a:off x="813816" y="1901952"/>
-            <a:ext cx="420624" cy="420624"/>
-          </a:xfrm>
-          <a:prstGeom prst="roundRect">
-            <a:avLst>
-              <a:gd name="adj" fmla="val 50000"/>
-            </a:avLst>
-          </a:prstGeom>
-          <a:solidFill>
-            <a:srgbClr val="2E7D4F"/>
-          </a:solidFill>
-          <a:ln/>
-        </p:spPr>
-        <p:txBody>
-          <a:bodyPr wrap="square" lIns="0" tIns="0" rIns="0" bIns="0" rtlCol="0" anchor="ctr"/>
-          <a:lstStyle/>
-          <a:p>
-            <a:pPr algn="ctr" indent="0" marL="0">
-              <a:lnSpc>
-                <a:spcPct val="100000"/>
-              </a:lnSpc>
-              <a:buNone/>
-            </a:pPr>
-            <a:r>
-              <a:rPr lang="en-US" sz="1600" b="1" dirty="0">
-                <a:solidFill>
-                  <a:srgbClr val="FFFFFF"/>
-                </a:solidFill>
-                <a:latin typeface="Calibri" pitchFamily="34" charset="0"/>
-                <a:ea typeface="Calibri" pitchFamily="34" charset="-122"/>
-                <a:cs typeface="Calibri" pitchFamily="34" charset="-120"/>
-              </a:rPr>
-              <a:t>a</a:t>
-            </a:r>
-            <a:endParaRPr lang="en-US" sz="1600" dirty="0"/>
-          </a:p>
-        </p:txBody>
-      </p:sp>
-      <p:sp>
-        <p:nvSpPr>
-          <p:cNvPr id="6" name="Text 4"/>
-          <p:cNvSpPr txBox="1"/>
-          <p:nvPr/>
-        </p:nvSpPr>
-        <p:spPr>
-          <a:xfrm>
-            <a:off x="1344168" y="1773936"/>
-            <a:ext cx="3044952" cy="676656"/>
-          </a:xfrm>
-          <a:prstGeom prst="rect">
-            <a:avLst/>
-          </a:prstGeom>
-          <a:noFill/>
-          <a:ln/>
-        </p:spPr>
-        <p:txBody>
-          <a:bodyPr wrap="square" lIns="25400" tIns="25400" rIns="25400" bIns="25400" rtlCol="0" anchor="ctr"/>
-          <a:lstStyle/>
-          <a:p>
-            <a:pPr algn="l" indent="0" marL="0">
-              <a:lnSpc>
-                <a:spcPct val="100000"/>
-              </a:lnSpc>
-              <a:buNone/>
-            </a:pPr>
-            <a:r>
-              <a:rPr lang="en-US" sz="1400" b="1" dirty="0">
-                <a:solidFill>
-                  <a:srgbClr val="1F2A37"/>
-                </a:solidFill>
-                <a:latin typeface="Calibri" pitchFamily="34" charset="0"/>
-                <a:ea typeface="Calibri" pitchFamily="34" charset="-122"/>
-                <a:cs typeface="Calibri" pitchFamily="34" charset="-120"/>
-              </a:rPr>
-              <a:t>John Locke</a:t>
-            </a:r>
-            <a:endParaRPr lang="en-US" sz="1400" dirty="0"/>
-          </a:p>
-        </p:txBody>
-      </p:sp>
-      <p:sp>
-        <p:nvSpPr>
-          <p:cNvPr id="7" name="Shape 5"/>
-          <p:cNvSpPr/>
-          <p:nvPr/>
-        </p:nvSpPr>
-        <p:spPr>
-          <a:xfrm>
-            <a:off x="4663440" y="1737360"/>
-            <a:ext cx="3794760" cy="749808"/>
-          </a:xfrm>
-          <a:prstGeom prst="roundRect">
-            <a:avLst>
-              <a:gd name="adj" fmla="val 9756"/>
+              <a:gd name="adj" fmla="val 8000"/>
             </a:avLst>
           </a:prstGeom>
           <a:solidFill>
@@ -11644,13 +11640,13 @@
       </p:sp>
       <p:sp>
         <p:nvSpPr>
-          <p:cNvPr id="8" name="Text 6"/>
-          <p:cNvSpPr txBox="1"/>
-          <p:nvPr/>
-        </p:nvSpPr>
-        <p:spPr>
-          <a:xfrm>
-            <a:off x="4791456" y="1901952"/>
+          <p:cNvPr id="5" name="Text 3"/>
+          <p:cNvSpPr txBox="1"/>
+          <p:nvPr/>
+        </p:nvSpPr>
+        <p:spPr>
+          <a:xfrm>
+            <a:off x="813816" y="1984248"/>
             <a:ext cx="420624" cy="420624"/>
           </a:xfrm>
           <a:prstGeom prst="roundRect">
@@ -11659,7 +11655,7 @@
             </a:avLst>
           </a:prstGeom>
           <a:solidFill>
-            <a:srgbClr val="9AA3AB"/>
+            <a:srgbClr val="13294B"/>
           </a:solidFill>
           <a:ln/>
         </p:spPr>
@@ -11682,7 +11678,7 @@
                 <a:ea typeface="Calibri" pitchFamily="34" charset="-122"/>
                 <a:cs typeface="Calibri" pitchFamily="34" charset="-120"/>
               </a:rPr>
-              <a:t>b</a:t>
+              <a:t>a</a:t>
             </a:r>
             <a:endParaRPr lang="en-US" sz="1600" dirty="0"/>
           </a:p>
@@ -11690,14 +11686,14 @@
       </p:sp>
       <p:sp>
         <p:nvSpPr>
-          <p:cNvPr id="9" name="Text 7"/>
-          <p:cNvSpPr txBox="1"/>
-          <p:nvPr/>
-        </p:nvSpPr>
-        <p:spPr>
-          <a:xfrm>
-            <a:off x="5321808" y="1773936"/>
-            <a:ext cx="3044952" cy="676656"/>
+          <p:cNvPr id="6" name="Text 4"/>
+          <p:cNvSpPr txBox="1"/>
+          <p:nvPr/>
+        </p:nvSpPr>
+        <p:spPr>
+          <a:xfrm>
+            <a:off x="1344168" y="1773936"/>
+            <a:ext cx="3044952" cy="841248"/>
           </a:xfrm>
           <a:prstGeom prst="rect">
             <a:avLst/>
@@ -11718,13 +11714,13 @@
             <a:r>
               <a:rPr lang="en-US" sz="1400" dirty="0">
                 <a:solidFill>
-                  <a:srgbClr val="5B6770"/>
-                </a:solidFill>
-                <a:latin typeface="Calibri" pitchFamily="34" charset="0"/>
-                <a:ea typeface="Calibri" pitchFamily="34" charset="-122"/>
-                <a:cs typeface="Calibri" pitchFamily="34" charset="-120"/>
-              </a:rPr>
-              <a:t>Thomas Hobbes</a:t>
+                  <a:srgbClr val="1F2A37"/>
+                </a:solidFill>
+                <a:latin typeface="Calibri" pitchFamily="34" charset="0"/>
+                <a:ea typeface="Calibri" pitchFamily="34" charset="-122"/>
+                <a:cs typeface="Calibri" pitchFamily="34" charset="-120"/>
+              </a:rPr>
+              <a:t>John Locke</a:t>
             </a:r>
             <a:endParaRPr lang="en-US" sz="1400" dirty="0"/>
           </a:p>
@@ -11732,18 +11728,18 @@
       </p:sp>
       <p:sp>
         <p:nvSpPr>
-          <p:cNvPr id="10" name="Shape 8"/>
+          <p:cNvPr id="7" name="Shape 5"/>
           <p:cNvSpPr/>
           <p:nvPr/>
         </p:nvSpPr>
         <p:spPr>
           <a:xfrm>
-            <a:off x="685800" y="2633472"/>
-            <a:ext cx="3794760" cy="749808"/>
+            <a:off x="4663440" y="1737360"/>
+            <a:ext cx="3794760" cy="914400"/>
           </a:xfrm>
           <a:prstGeom prst="roundRect">
             <a:avLst>
-              <a:gd name="adj" fmla="val 9756"/>
+              <a:gd name="adj" fmla="val 8000"/>
             </a:avLst>
           </a:prstGeom>
           <a:solidFill>
@@ -11759,13 +11755,13 @@
       </p:sp>
       <p:sp>
         <p:nvSpPr>
-          <p:cNvPr id="11" name="Text 9"/>
-          <p:cNvSpPr txBox="1"/>
-          <p:nvPr/>
-        </p:nvSpPr>
-        <p:spPr>
-          <a:xfrm>
-            <a:off x="813816" y="2798064"/>
+          <p:cNvPr id="8" name="Text 6"/>
+          <p:cNvSpPr txBox="1"/>
+          <p:nvPr/>
+        </p:nvSpPr>
+        <p:spPr>
+          <a:xfrm>
+            <a:off x="4791456" y="1984248"/>
             <a:ext cx="420624" cy="420624"/>
           </a:xfrm>
           <a:prstGeom prst="roundRect">
@@ -11774,7 +11770,7 @@
             </a:avLst>
           </a:prstGeom>
           <a:solidFill>
-            <a:srgbClr val="9AA3AB"/>
+            <a:srgbClr val="13294B"/>
           </a:solidFill>
           <a:ln/>
         </p:spPr>
@@ -11797,7 +11793,7 @@
                 <a:ea typeface="Calibri" pitchFamily="34" charset="-122"/>
                 <a:cs typeface="Calibri" pitchFamily="34" charset="-120"/>
               </a:rPr>
-              <a:t>c</a:t>
+              <a:t>b</a:t>
             </a:r>
             <a:endParaRPr lang="en-US" sz="1600" dirty="0"/>
           </a:p>
@@ -11805,14 +11801,14 @@
       </p:sp>
       <p:sp>
         <p:nvSpPr>
-          <p:cNvPr id="12" name="Text 10"/>
-          <p:cNvSpPr txBox="1"/>
-          <p:nvPr/>
-        </p:nvSpPr>
-        <p:spPr>
-          <a:xfrm>
-            <a:off x="1344168" y="2670048"/>
-            <a:ext cx="3044952" cy="676656"/>
+          <p:cNvPr id="9" name="Text 7"/>
+          <p:cNvSpPr txBox="1"/>
+          <p:nvPr/>
+        </p:nvSpPr>
+        <p:spPr>
+          <a:xfrm>
+            <a:off x="5321808" y="1773936"/>
+            <a:ext cx="3044952" cy="841248"/>
           </a:xfrm>
           <a:prstGeom prst="rect">
             <a:avLst/>
@@ -11833,13 +11829,13 @@
             <a:r>
               <a:rPr lang="en-US" sz="1400" dirty="0">
                 <a:solidFill>
-                  <a:srgbClr val="5B6770"/>
-                </a:solidFill>
-                <a:latin typeface="Calibri" pitchFamily="34" charset="0"/>
-                <a:ea typeface="Calibri" pitchFamily="34" charset="-122"/>
-                <a:cs typeface="Calibri" pitchFamily="34" charset="-120"/>
-              </a:rPr>
-              <a:t>Karl Marx</a:t>
+                  <a:srgbClr val="1F2A37"/>
+                </a:solidFill>
+                <a:latin typeface="Calibri" pitchFamily="34" charset="0"/>
+                <a:ea typeface="Calibri" pitchFamily="34" charset="-122"/>
+                <a:cs typeface="Calibri" pitchFamily="34" charset="-120"/>
+              </a:rPr>
+              <a:t>Thomas Hobbes</a:t>
             </a:r>
             <a:endParaRPr lang="en-US" sz="1400" dirty="0"/>
           </a:p>
@@ -11847,18 +11843,18 @@
       </p:sp>
       <p:sp>
         <p:nvSpPr>
-          <p:cNvPr id="13" name="Shape 11"/>
+          <p:cNvPr id="10" name="Shape 8"/>
           <p:cNvSpPr/>
           <p:nvPr/>
         </p:nvSpPr>
         <p:spPr>
           <a:xfrm>
-            <a:off x="4663440" y="2633472"/>
-            <a:ext cx="3794760" cy="749808"/>
+            <a:off x="685800" y="2798064"/>
+            <a:ext cx="3794760" cy="914400"/>
           </a:xfrm>
           <a:prstGeom prst="roundRect">
             <a:avLst>
-              <a:gd name="adj" fmla="val 9756"/>
+              <a:gd name="adj" fmla="val 8000"/>
             </a:avLst>
           </a:prstGeom>
           <a:solidFill>
@@ -11874,13 +11870,13 @@
       </p:sp>
       <p:sp>
         <p:nvSpPr>
-          <p:cNvPr id="14" name="Text 12"/>
-          <p:cNvSpPr txBox="1"/>
-          <p:nvPr/>
-        </p:nvSpPr>
-        <p:spPr>
-          <a:xfrm>
-            <a:off x="4791456" y="2798064"/>
+          <p:cNvPr id="11" name="Text 9"/>
+          <p:cNvSpPr txBox="1"/>
+          <p:nvPr/>
+        </p:nvSpPr>
+        <p:spPr>
+          <a:xfrm>
+            <a:off x="813816" y="3044952"/>
             <a:ext cx="420624" cy="420624"/>
           </a:xfrm>
           <a:prstGeom prst="roundRect">
@@ -11889,7 +11885,7 @@
             </a:avLst>
           </a:prstGeom>
           <a:solidFill>
-            <a:srgbClr val="9AA3AB"/>
+            <a:srgbClr val="13294B"/>
           </a:solidFill>
           <a:ln/>
         </p:spPr>
@@ -11912,7 +11908,7 @@
                 <a:ea typeface="Calibri" pitchFamily="34" charset="-122"/>
                 <a:cs typeface="Calibri" pitchFamily="34" charset="-120"/>
               </a:rPr>
-              <a:t>d</a:t>
+              <a:t>c</a:t>
             </a:r>
             <a:endParaRPr lang="en-US" sz="1600" dirty="0"/>
           </a:p>
@@ -11920,14 +11916,14 @@
       </p:sp>
       <p:sp>
         <p:nvSpPr>
-          <p:cNvPr id="15" name="Text 13"/>
-          <p:cNvSpPr txBox="1"/>
-          <p:nvPr/>
-        </p:nvSpPr>
-        <p:spPr>
-          <a:xfrm>
-            <a:off x="5321808" y="2670048"/>
-            <a:ext cx="3044952" cy="676656"/>
+          <p:cNvPr id="12" name="Text 10"/>
+          <p:cNvSpPr txBox="1"/>
+          <p:nvPr/>
+        </p:nvSpPr>
+        <p:spPr>
+          <a:xfrm>
+            <a:off x="1344168" y="2834640"/>
+            <a:ext cx="3044952" cy="841248"/>
           </a:xfrm>
           <a:prstGeom prst="rect">
             <a:avLst/>
@@ -11948,13 +11944,13 @@
             <a:r>
               <a:rPr lang="en-US" sz="1400" dirty="0">
                 <a:solidFill>
-                  <a:srgbClr val="5B6770"/>
-                </a:solidFill>
-                <a:latin typeface="Calibri" pitchFamily="34" charset="0"/>
-                <a:ea typeface="Calibri" pitchFamily="34" charset="-122"/>
-                <a:cs typeface="Calibri" pitchFamily="34" charset="-120"/>
-              </a:rPr>
-              <a:t>John Maynard Keynes</a:t>
+                  <a:srgbClr val="1F2A37"/>
+                </a:solidFill>
+                <a:latin typeface="Calibri" pitchFamily="34" charset="0"/>
+                <a:ea typeface="Calibri" pitchFamily="34" charset="-122"/>
+                <a:cs typeface="Calibri" pitchFamily="34" charset="-120"/>
+              </a:rPr>
+              <a:t>Karl Marx</a:t>
             </a:r>
             <a:endParaRPr lang="en-US" sz="1400" dirty="0"/>
           </a:p>
@@ -11962,27 +11958,96 @@
       </p:sp>
       <p:sp>
         <p:nvSpPr>
-          <p:cNvPr id="16" name="Text 14"/>
-          <p:cNvSpPr txBox="1"/>
-          <p:nvPr/>
-        </p:nvSpPr>
-        <p:spPr>
-          <a:xfrm>
-            <a:off x="685800" y="3566160"/>
-            <a:ext cx="7772400" cy="841248"/>
+          <p:cNvPr id="13" name="Shape 11"/>
+          <p:cNvSpPr/>
+          <p:nvPr/>
+        </p:nvSpPr>
+        <p:spPr>
+          <a:xfrm>
+            <a:off x="4663440" y="2798064"/>
+            <a:ext cx="3794760" cy="914400"/>
           </a:xfrm>
           <a:prstGeom prst="roundRect">
             <a:avLst>
-              <a:gd name="adj" fmla="val 8696"/>
+              <a:gd name="adj" fmla="val 8000"/>
             </a:avLst>
           </a:prstGeom>
           <a:solidFill>
-            <a:srgbClr val="E6F2F0"/>
+            <a:srgbClr val="FFFFFF"/>
           </a:solidFill>
-          <a:ln/>
-        </p:spPr>
-        <p:txBody>
-          <a:bodyPr wrap="square" lIns="114300" tIns="114300" rIns="114300" bIns="114300" rtlCol="0" anchor="ctr"/>
+          <a:ln w="12700">
+            <a:solidFill>
+              <a:srgbClr val="DCD5C1"/>
+            </a:solidFill>
+            <a:prstDash val="solid"/>
+          </a:ln>
+        </p:spPr>
+      </p:sp>
+      <p:sp>
+        <p:nvSpPr>
+          <p:cNvPr id="14" name="Text 12"/>
+          <p:cNvSpPr txBox="1"/>
+          <p:nvPr/>
+        </p:nvSpPr>
+        <p:spPr>
+          <a:xfrm>
+            <a:off x="4791456" y="3044952"/>
+            <a:ext cx="420624" cy="420624"/>
+          </a:xfrm>
+          <a:prstGeom prst="roundRect">
+            <a:avLst>
+              <a:gd name="adj" fmla="val 50000"/>
+            </a:avLst>
+          </a:prstGeom>
+          <a:solidFill>
+            <a:srgbClr val="13294B"/>
+          </a:solidFill>
+          <a:ln/>
+        </p:spPr>
+        <p:txBody>
+          <a:bodyPr wrap="square" lIns="0" tIns="0" rIns="0" bIns="0" rtlCol="0" anchor="ctr"/>
+          <a:lstStyle/>
+          <a:p>
+            <a:pPr algn="ctr" indent="0" marL="0">
+              <a:lnSpc>
+                <a:spcPct val="100000"/>
+              </a:lnSpc>
+              <a:buNone/>
+            </a:pPr>
+            <a:r>
+              <a:rPr lang="en-US" sz="1600" b="1" dirty="0">
+                <a:solidFill>
+                  <a:srgbClr val="FFFFFF"/>
+                </a:solidFill>
+                <a:latin typeface="Calibri" pitchFamily="34" charset="0"/>
+                <a:ea typeface="Calibri" pitchFamily="34" charset="-122"/>
+                <a:cs typeface="Calibri" pitchFamily="34" charset="-120"/>
+              </a:rPr>
+              <a:t>d</a:t>
+            </a:r>
+            <a:endParaRPr lang="en-US" sz="1600" dirty="0"/>
+          </a:p>
+        </p:txBody>
+      </p:sp>
+      <p:sp>
+        <p:nvSpPr>
+          <p:cNvPr id="15" name="Text 13"/>
+          <p:cNvSpPr txBox="1"/>
+          <p:nvPr/>
+        </p:nvSpPr>
+        <p:spPr>
+          <a:xfrm>
+            <a:off x="5321808" y="2834640"/>
+            <a:ext cx="3044952" cy="841248"/>
+          </a:xfrm>
+          <a:prstGeom prst="rect">
+            <a:avLst/>
+          </a:prstGeom>
+          <a:noFill/>
+          <a:ln/>
+        </p:spPr>
+        <p:txBody>
+          <a:bodyPr wrap="square" lIns="25400" tIns="25400" rIns="25400" bIns="25400" rtlCol="0" anchor="ctr"/>
           <a:lstStyle/>
           <a:p>
             <a:pPr algn="l" indent="0" marL="0">
@@ -11992,24 +12057,7 @@
               <a:buNone/>
             </a:pPr>
             <a:r>
-              <a:rPr lang="en-US" sz="1350" b="1" dirty="0">
-                <a:solidFill>
-                  <a:srgbClr val="2E7D4F"/>
-                </a:solidFill>
-                <a:latin typeface="Calibri" pitchFamily="34" charset="0"/>
-                <a:ea typeface="Calibri" pitchFamily="34" charset="-122"/>
-                <a:cs typeface="Calibri" pitchFamily="34" charset="-120"/>
-              </a:rPr>
-              <a:t>Resposta: a) </a:t>
-            </a:r>
-            <a:pPr algn="l" indent="0" marL="0">
-              <a:lnSpc>
-                <a:spcPct val="100000"/>
-              </a:lnSpc>
-              <a:buNone/>
-            </a:pPr>
-            <a:r>
-              <a:rPr lang="en-US" sz="1350" dirty="0">
+              <a:rPr lang="en-US" sz="1400" dirty="0">
                 <a:solidFill>
                   <a:srgbClr val="1F2A37"/>
                 </a:solidFill>
@@ -12017,15 +12065,15 @@
                 <a:ea typeface="Calibri" pitchFamily="34" charset="-122"/>
                 <a:cs typeface="Calibri" pitchFamily="34" charset="-120"/>
               </a:rPr>
-              <a:t>Locke funda o liberalismo político: o governo existe para proteger esses direitos e tem poder limitado.</a:t>
-            </a:r>
-            <a:endParaRPr lang="en-US" sz="1350" dirty="0"/>
-          </a:p>
-        </p:txBody>
-      </p:sp>
-      <p:sp>
-        <p:nvSpPr>
-          <p:cNvPr id="17" name="Text 15"/>
+              <a:t>John Maynard Keynes</a:t>
+            </a:r>
+            <a:endParaRPr lang="en-US" sz="1400" dirty="0"/>
+          </a:p>
+        </p:txBody>
+      </p:sp>
+      <p:sp>
+        <p:nvSpPr>
+          <p:cNvPr id="16" name="Text 14"/>
           <p:cNvSpPr txBox="1"/>
           <p:nvPr/>
         </p:nvSpPr>
@@ -12140,7 +12188,7 @@
                 <a:ea typeface="Calibri" pitchFamily="34" charset="-122"/>
                 <a:cs typeface="Calibri" pitchFamily="34" charset="-120"/>
               </a:rPr>
-              <a:t>QUIZ DA UNIDADE 2 · PERGUNTA 3 DE 5</a:t>
+              <a:t>QUIZ DA UNIDADE 2 · PERGUNTA 2 DE 5 · RESPOSTA</a:t>
             </a:r>
             <a:endParaRPr lang="en-US" sz="1250" dirty="0"/>
           </a:p>
@@ -12182,7 +12230,7 @@
                 <a:ea typeface="Calibri" pitchFamily="34" charset="-122"/>
                 <a:cs typeface="Calibri" pitchFamily="34" charset="-120"/>
               </a:rPr>
-              <a:t>A ideia de que “o poder deve frear o poder”, base da separação dos poderes, é de:</a:t>
+              <a:t>Os direitos naturais à vida, à liberdade e à propriedade são a base do pensamento de:</a:t>
             </a:r>
             <a:endParaRPr lang="en-US" sz="1900" dirty="0"/>
           </a:p>
@@ -12197,11 +12245,126 @@
         <p:spPr>
           <a:xfrm>
             <a:off x="685800" y="1737360"/>
-            <a:ext cx="3794760" cy="914400"/>
+            <a:ext cx="3794760" cy="749808"/>
           </a:xfrm>
           <a:prstGeom prst="roundRect">
             <a:avLst>
-              <a:gd name="adj" fmla="val 8000"/>
+              <a:gd name="adj" fmla="val 9756"/>
+            </a:avLst>
+          </a:prstGeom>
+          <a:solidFill>
+            <a:srgbClr val="E3F2E8"/>
+          </a:solidFill>
+          <a:ln w="25400">
+            <a:solidFill>
+              <a:srgbClr val="2E7D4F"/>
+            </a:solidFill>
+            <a:prstDash val="solid"/>
+          </a:ln>
+        </p:spPr>
+      </p:sp>
+      <p:sp>
+        <p:nvSpPr>
+          <p:cNvPr id="5" name="Text 3"/>
+          <p:cNvSpPr txBox="1"/>
+          <p:nvPr/>
+        </p:nvSpPr>
+        <p:spPr>
+          <a:xfrm>
+            <a:off x="813816" y="1901952"/>
+            <a:ext cx="420624" cy="420624"/>
+          </a:xfrm>
+          <a:prstGeom prst="roundRect">
+            <a:avLst>
+              <a:gd name="adj" fmla="val 50000"/>
+            </a:avLst>
+          </a:prstGeom>
+          <a:solidFill>
+            <a:srgbClr val="2E7D4F"/>
+          </a:solidFill>
+          <a:ln/>
+        </p:spPr>
+        <p:txBody>
+          <a:bodyPr wrap="square" lIns="0" tIns="0" rIns="0" bIns="0" rtlCol="0" anchor="ctr"/>
+          <a:lstStyle/>
+          <a:p>
+            <a:pPr algn="ctr" indent="0" marL="0">
+              <a:lnSpc>
+                <a:spcPct val="100000"/>
+              </a:lnSpc>
+              <a:buNone/>
+            </a:pPr>
+            <a:r>
+              <a:rPr lang="en-US" sz="1600" b="1" dirty="0">
+                <a:solidFill>
+                  <a:srgbClr val="FFFFFF"/>
+                </a:solidFill>
+                <a:latin typeface="Calibri" pitchFamily="34" charset="0"/>
+                <a:ea typeface="Calibri" pitchFamily="34" charset="-122"/>
+                <a:cs typeface="Calibri" pitchFamily="34" charset="-120"/>
+              </a:rPr>
+              <a:t>a</a:t>
+            </a:r>
+            <a:endParaRPr lang="en-US" sz="1600" dirty="0"/>
+          </a:p>
+        </p:txBody>
+      </p:sp>
+      <p:sp>
+        <p:nvSpPr>
+          <p:cNvPr id="6" name="Text 4"/>
+          <p:cNvSpPr txBox="1"/>
+          <p:nvPr/>
+        </p:nvSpPr>
+        <p:spPr>
+          <a:xfrm>
+            <a:off x="1344168" y="1773936"/>
+            <a:ext cx="3044952" cy="676656"/>
+          </a:xfrm>
+          <a:prstGeom prst="rect">
+            <a:avLst/>
+          </a:prstGeom>
+          <a:noFill/>
+          <a:ln/>
+        </p:spPr>
+        <p:txBody>
+          <a:bodyPr wrap="square" lIns="25400" tIns="25400" rIns="25400" bIns="25400" rtlCol="0" anchor="ctr"/>
+          <a:lstStyle/>
+          <a:p>
+            <a:pPr algn="l" indent="0" marL="0">
+              <a:lnSpc>
+                <a:spcPct val="100000"/>
+              </a:lnSpc>
+              <a:buNone/>
+            </a:pPr>
+            <a:r>
+              <a:rPr lang="en-US" sz="1400" b="1" dirty="0">
+                <a:solidFill>
+                  <a:srgbClr val="1F2A37"/>
+                </a:solidFill>
+                <a:latin typeface="Calibri" pitchFamily="34" charset="0"/>
+                <a:ea typeface="Calibri" pitchFamily="34" charset="-122"/>
+                <a:cs typeface="Calibri" pitchFamily="34" charset="-120"/>
+              </a:rPr>
+              <a:t>John Locke</a:t>
+            </a:r>
+            <a:endParaRPr lang="en-US" sz="1400" dirty="0"/>
+          </a:p>
+        </p:txBody>
+      </p:sp>
+      <p:sp>
+        <p:nvSpPr>
+          <p:cNvPr id="7" name="Shape 5"/>
+          <p:cNvSpPr/>
+          <p:nvPr/>
+        </p:nvSpPr>
+        <p:spPr>
+          <a:xfrm>
+            <a:off x="4663440" y="1737360"/>
+            <a:ext cx="3794760" cy="749808"/>
+          </a:xfrm>
+          <a:prstGeom prst="roundRect">
+            <a:avLst>
+              <a:gd name="adj" fmla="val 9756"/>
             </a:avLst>
           </a:prstGeom>
           <a:solidFill>
@@ -12217,13 +12380,13 @@
       </p:sp>
       <p:sp>
         <p:nvSpPr>
-          <p:cNvPr id="5" name="Text 3"/>
-          <p:cNvSpPr txBox="1"/>
-          <p:nvPr/>
-        </p:nvSpPr>
-        <p:spPr>
-          <a:xfrm>
-            <a:off x="813816" y="1984248"/>
+          <p:cNvPr id="8" name="Text 6"/>
+          <p:cNvSpPr txBox="1"/>
+          <p:nvPr/>
+        </p:nvSpPr>
+        <p:spPr>
+          <a:xfrm>
+            <a:off x="4791456" y="1901952"/>
             <a:ext cx="420624" cy="420624"/>
           </a:xfrm>
           <a:prstGeom prst="roundRect">
@@ -12232,7 +12395,7 @@
             </a:avLst>
           </a:prstGeom>
           <a:solidFill>
-            <a:srgbClr val="13294B"/>
+            <a:srgbClr val="9AA3AB"/>
           </a:solidFill>
           <a:ln/>
         </p:spPr>
@@ -12255,7 +12418,7 @@
                 <a:ea typeface="Calibri" pitchFamily="34" charset="-122"/>
                 <a:cs typeface="Calibri" pitchFamily="34" charset="-120"/>
               </a:rPr>
-              <a:t>a</a:t>
+              <a:t>b</a:t>
             </a:r>
             <a:endParaRPr lang="en-US" sz="1600" dirty="0"/>
           </a:p>
@@ -12263,14 +12426,14 @@
       </p:sp>
       <p:sp>
         <p:nvSpPr>
-          <p:cNvPr id="6" name="Text 4"/>
-          <p:cNvSpPr txBox="1"/>
-          <p:nvPr/>
-        </p:nvSpPr>
-        <p:spPr>
-          <a:xfrm>
-            <a:off x="1344168" y="1773936"/>
-            <a:ext cx="3044952" cy="841248"/>
+          <p:cNvPr id="9" name="Text 7"/>
+          <p:cNvSpPr txBox="1"/>
+          <p:nvPr/>
+        </p:nvSpPr>
+        <p:spPr>
+          <a:xfrm>
+            <a:off x="5321808" y="1773936"/>
+            <a:ext cx="3044952" cy="676656"/>
           </a:xfrm>
           <a:prstGeom prst="rect">
             <a:avLst/>
@@ -12291,13 +12454,13 @@
             <a:r>
               <a:rPr lang="en-US" sz="1400" dirty="0">
                 <a:solidFill>
-                  <a:srgbClr val="1F2A37"/>
-                </a:solidFill>
-                <a:latin typeface="Calibri" pitchFamily="34" charset="0"/>
-                <a:ea typeface="Calibri" pitchFamily="34" charset="-122"/>
-                <a:cs typeface="Calibri" pitchFamily="34" charset="-120"/>
-              </a:rPr>
-              <a:t>Rousseau</a:t>
+                  <a:srgbClr val="5B6770"/>
+                </a:solidFill>
+                <a:latin typeface="Calibri" pitchFamily="34" charset="0"/>
+                <a:ea typeface="Calibri" pitchFamily="34" charset="-122"/>
+                <a:cs typeface="Calibri" pitchFamily="34" charset="-120"/>
+              </a:rPr>
+              <a:t>Thomas Hobbes</a:t>
             </a:r>
             <a:endParaRPr lang="en-US" sz="1400" dirty="0"/>
           </a:p>
@@ -12305,18 +12468,18 @@
       </p:sp>
       <p:sp>
         <p:nvSpPr>
-          <p:cNvPr id="7" name="Shape 5"/>
+          <p:cNvPr id="10" name="Shape 8"/>
           <p:cNvSpPr/>
           <p:nvPr/>
         </p:nvSpPr>
         <p:spPr>
           <a:xfrm>
-            <a:off x="4663440" y="1737360"/>
-            <a:ext cx="3794760" cy="914400"/>
+            <a:off x="685800" y="2633472"/>
+            <a:ext cx="3794760" cy="749808"/>
           </a:xfrm>
           <a:prstGeom prst="roundRect">
             <a:avLst>
-              <a:gd name="adj" fmla="val 8000"/>
+              <a:gd name="adj" fmla="val 9756"/>
             </a:avLst>
           </a:prstGeom>
           <a:solidFill>
@@ -12332,13 +12495,13 @@
       </p:sp>
       <p:sp>
         <p:nvSpPr>
-          <p:cNvPr id="8" name="Text 6"/>
-          <p:cNvSpPr txBox="1"/>
-          <p:nvPr/>
-        </p:nvSpPr>
-        <p:spPr>
-          <a:xfrm>
-            <a:off x="4791456" y="1984248"/>
+          <p:cNvPr id="11" name="Text 9"/>
+          <p:cNvSpPr txBox="1"/>
+          <p:nvPr/>
+        </p:nvSpPr>
+        <p:spPr>
+          <a:xfrm>
+            <a:off x="813816" y="2798064"/>
             <a:ext cx="420624" cy="420624"/>
           </a:xfrm>
           <a:prstGeom prst="roundRect">
@@ -12347,7 +12510,7 @@
             </a:avLst>
           </a:prstGeom>
           <a:solidFill>
-            <a:srgbClr val="13294B"/>
+            <a:srgbClr val="9AA3AB"/>
           </a:solidFill>
           <a:ln/>
         </p:spPr>
@@ -12370,7 +12533,7 @@
                 <a:ea typeface="Calibri" pitchFamily="34" charset="-122"/>
                 <a:cs typeface="Calibri" pitchFamily="34" charset="-120"/>
               </a:rPr>
-              <a:t>b</a:t>
+              <a:t>c</a:t>
             </a:r>
             <a:endParaRPr lang="en-US" sz="1600" dirty="0"/>
           </a:p>
@@ -12378,14 +12541,14 @@
       </p:sp>
       <p:sp>
         <p:nvSpPr>
-          <p:cNvPr id="9" name="Text 7"/>
-          <p:cNvSpPr txBox="1"/>
-          <p:nvPr/>
-        </p:nvSpPr>
-        <p:spPr>
-          <a:xfrm>
-            <a:off x="5321808" y="1773936"/>
-            <a:ext cx="3044952" cy="841248"/>
+          <p:cNvPr id="12" name="Text 10"/>
+          <p:cNvSpPr txBox="1"/>
+          <p:nvPr/>
+        </p:nvSpPr>
+        <p:spPr>
+          <a:xfrm>
+            <a:off x="1344168" y="2670048"/>
+            <a:ext cx="3044952" cy="676656"/>
           </a:xfrm>
           <a:prstGeom prst="rect">
             <a:avLst/>
@@ -12406,13 +12569,13 @@
             <a:r>
               <a:rPr lang="en-US" sz="1400" dirty="0">
                 <a:solidFill>
-                  <a:srgbClr val="1F2A37"/>
-                </a:solidFill>
-                <a:latin typeface="Calibri" pitchFamily="34" charset="0"/>
-                <a:ea typeface="Calibri" pitchFamily="34" charset="-122"/>
-                <a:cs typeface="Calibri" pitchFamily="34" charset="-120"/>
-              </a:rPr>
-              <a:t>Adam Smith</a:t>
+                  <a:srgbClr val="5B6770"/>
+                </a:solidFill>
+                <a:latin typeface="Calibri" pitchFamily="34" charset="0"/>
+                <a:ea typeface="Calibri" pitchFamily="34" charset="-122"/>
+                <a:cs typeface="Calibri" pitchFamily="34" charset="-120"/>
+              </a:rPr>
+              <a:t>Karl Marx</a:t>
             </a:r>
             <a:endParaRPr lang="en-US" sz="1400" dirty="0"/>
           </a:p>
@@ -12420,18 +12583,18 @@
       </p:sp>
       <p:sp>
         <p:nvSpPr>
-          <p:cNvPr id="10" name="Shape 8"/>
+          <p:cNvPr id="13" name="Shape 11"/>
           <p:cNvSpPr/>
           <p:nvPr/>
         </p:nvSpPr>
         <p:spPr>
           <a:xfrm>
-            <a:off x="685800" y="2798064"/>
-            <a:ext cx="3794760" cy="914400"/>
+            <a:off x="4663440" y="2633472"/>
+            <a:ext cx="3794760" cy="749808"/>
           </a:xfrm>
           <a:prstGeom prst="roundRect">
             <a:avLst>
-              <a:gd name="adj" fmla="val 8000"/>
+              <a:gd name="adj" fmla="val 9756"/>
             </a:avLst>
           </a:prstGeom>
           <a:solidFill>
@@ -12447,13 +12610,13 @@
       </p:sp>
       <p:sp>
         <p:nvSpPr>
-          <p:cNvPr id="11" name="Text 9"/>
-          <p:cNvSpPr txBox="1"/>
-          <p:nvPr/>
-        </p:nvSpPr>
-        <p:spPr>
-          <a:xfrm>
-            <a:off x="813816" y="3044952"/>
+          <p:cNvPr id="14" name="Text 12"/>
+          <p:cNvSpPr txBox="1"/>
+          <p:nvPr/>
+        </p:nvSpPr>
+        <p:spPr>
+          <a:xfrm>
+            <a:off x="4791456" y="2798064"/>
             <a:ext cx="420624" cy="420624"/>
           </a:xfrm>
           <a:prstGeom prst="roundRect">
@@ -12462,7 +12625,7 @@
             </a:avLst>
           </a:prstGeom>
           <a:solidFill>
-            <a:srgbClr val="13294B"/>
+            <a:srgbClr val="9AA3AB"/>
           </a:solidFill>
           <a:ln/>
         </p:spPr>
@@ -12485,7 +12648,7 @@
                 <a:ea typeface="Calibri" pitchFamily="34" charset="-122"/>
                 <a:cs typeface="Calibri" pitchFamily="34" charset="-120"/>
               </a:rPr>
-              <a:t>c</a:t>
+              <a:t>d</a:t>
             </a:r>
             <a:endParaRPr lang="en-US" sz="1600" dirty="0"/>
           </a:p>
@@ -12493,14 +12656,14 @@
       </p:sp>
       <p:sp>
         <p:nvSpPr>
-          <p:cNvPr id="12" name="Text 10"/>
-          <p:cNvSpPr txBox="1"/>
-          <p:nvPr/>
-        </p:nvSpPr>
-        <p:spPr>
-          <a:xfrm>
-            <a:off x="1344168" y="2834640"/>
-            <a:ext cx="3044952" cy="841248"/>
+          <p:cNvPr id="15" name="Text 13"/>
+          <p:cNvSpPr txBox="1"/>
+          <p:nvPr/>
+        </p:nvSpPr>
+        <p:spPr>
+          <a:xfrm>
+            <a:off x="5321808" y="2670048"/>
+            <a:ext cx="3044952" cy="676656"/>
           </a:xfrm>
           <a:prstGeom prst="rect">
             <a:avLst/>
@@ -12521,13 +12684,13 @@
             <a:r>
               <a:rPr lang="en-US" sz="1400" dirty="0">
                 <a:solidFill>
-                  <a:srgbClr val="1F2A37"/>
-                </a:solidFill>
-                <a:latin typeface="Calibri" pitchFamily="34" charset="0"/>
-                <a:ea typeface="Calibri" pitchFamily="34" charset="-122"/>
-                <a:cs typeface="Calibri" pitchFamily="34" charset="-120"/>
-              </a:rPr>
-              <a:t>Montesquieu</a:t>
+                  <a:srgbClr val="5B6770"/>
+                </a:solidFill>
+                <a:latin typeface="Calibri" pitchFamily="34" charset="0"/>
+                <a:ea typeface="Calibri" pitchFamily="34" charset="-122"/>
+                <a:cs typeface="Calibri" pitchFamily="34" charset="-120"/>
+              </a:rPr>
+              <a:t>John Maynard Keynes</a:t>
             </a:r>
             <a:endParaRPr lang="en-US" sz="1400" dirty="0"/>
           </a:p>
@@ -12535,96 +12698,27 @@
       </p:sp>
       <p:sp>
         <p:nvSpPr>
-          <p:cNvPr id="13" name="Shape 11"/>
-          <p:cNvSpPr/>
-          <p:nvPr/>
-        </p:nvSpPr>
-        <p:spPr>
-          <a:xfrm>
-            <a:off x="4663440" y="2798064"/>
-            <a:ext cx="3794760" cy="914400"/>
+          <p:cNvPr id="16" name="Text 14"/>
+          <p:cNvSpPr txBox="1"/>
+          <p:nvPr/>
+        </p:nvSpPr>
+        <p:spPr>
+          <a:xfrm>
+            <a:off x="685800" y="3566160"/>
+            <a:ext cx="7772400" cy="841248"/>
           </a:xfrm>
           <a:prstGeom prst="roundRect">
             <a:avLst>
-              <a:gd name="adj" fmla="val 8000"/>
+              <a:gd name="adj" fmla="val 8696"/>
             </a:avLst>
           </a:prstGeom>
           <a:solidFill>
-            <a:srgbClr val="FFFFFF"/>
+            <a:srgbClr val="E6F2F0"/>
           </a:solidFill>
-          <a:ln w="12700">
-            <a:solidFill>
-              <a:srgbClr val="DCD5C1"/>
-            </a:solidFill>
-            <a:prstDash val="solid"/>
-          </a:ln>
-        </p:spPr>
-      </p:sp>
-      <p:sp>
-        <p:nvSpPr>
-          <p:cNvPr id="14" name="Text 12"/>
-          <p:cNvSpPr txBox="1"/>
-          <p:nvPr/>
-        </p:nvSpPr>
-        <p:spPr>
-          <a:xfrm>
-            <a:off x="4791456" y="3044952"/>
-            <a:ext cx="420624" cy="420624"/>
-          </a:xfrm>
-          <a:prstGeom prst="roundRect">
-            <a:avLst>
-              <a:gd name="adj" fmla="val 50000"/>
-            </a:avLst>
-          </a:prstGeom>
-          <a:solidFill>
-            <a:srgbClr val="13294B"/>
-          </a:solidFill>
-          <a:ln/>
-        </p:spPr>
-        <p:txBody>
-          <a:bodyPr wrap="square" lIns="0" tIns="0" rIns="0" bIns="0" rtlCol="0" anchor="ctr"/>
-          <a:lstStyle/>
-          <a:p>
-            <a:pPr algn="ctr" indent="0" marL="0">
-              <a:lnSpc>
-                <a:spcPct val="100000"/>
-              </a:lnSpc>
-              <a:buNone/>
-            </a:pPr>
-            <a:r>
-              <a:rPr lang="en-US" sz="1600" b="1" dirty="0">
-                <a:solidFill>
-                  <a:srgbClr val="FFFFFF"/>
-                </a:solidFill>
-                <a:latin typeface="Calibri" pitchFamily="34" charset="0"/>
-                <a:ea typeface="Calibri" pitchFamily="34" charset="-122"/>
-                <a:cs typeface="Calibri" pitchFamily="34" charset="-120"/>
-              </a:rPr>
-              <a:t>d</a:t>
-            </a:r>
-            <a:endParaRPr lang="en-US" sz="1600" dirty="0"/>
-          </a:p>
-        </p:txBody>
-      </p:sp>
-      <p:sp>
-        <p:nvSpPr>
-          <p:cNvPr id="15" name="Text 13"/>
-          <p:cNvSpPr txBox="1"/>
-          <p:nvPr/>
-        </p:nvSpPr>
-        <p:spPr>
-          <a:xfrm>
-            <a:off x="5321808" y="2834640"/>
-            <a:ext cx="3044952" cy="841248"/>
-          </a:xfrm>
-          <a:prstGeom prst="rect">
-            <a:avLst/>
-          </a:prstGeom>
-          <a:noFill/>
-          <a:ln/>
-        </p:spPr>
-        <p:txBody>
-          <a:bodyPr wrap="square" lIns="25400" tIns="25400" rIns="25400" bIns="25400" rtlCol="0" anchor="ctr"/>
+          <a:ln/>
+        </p:spPr>
+        <p:txBody>
+          <a:bodyPr wrap="square" lIns="114300" tIns="114300" rIns="114300" bIns="114300" rtlCol="0" anchor="ctr"/>
           <a:lstStyle/>
           <a:p>
             <a:pPr algn="l" indent="0" marL="0">
@@ -12634,7 +12728,24 @@
               <a:buNone/>
             </a:pPr>
             <a:r>
-              <a:rPr lang="en-US" sz="1400" dirty="0">
+              <a:rPr lang="en-US" sz="1350" b="1" dirty="0">
+                <a:solidFill>
+                  <a:srgbClr val="2E7D4F"/>
+                </a:solidFill>
+                <a:latin typeface="Calibri" pitchFamily="34" charset="0"/>
+                <a:ea typeface="Calibri" pitchFamily="34" charset="-122"/>
+                <a:cs typeface="Calibri" pitchFamily="34" charset="-120"/>
+              </a:rPr>
+              <a:t>Resposta: a) </a:t>
+            </a:r>
+            <a:pPr algn="l" indent="0" marL="0">
+              <a:lnSpc>
+                <a:spcPct val="100000"/>
+              </a:lnSpc>
+              <a:buNone/>
+            </a:pPr>
+            <a:r>
+              <a:rPr lang="en-US" sz="1350" dirty="0">
                 <a:solidFill>
                   <a:srgbClr val="1F2A37"/>
                 </a:solidFill>
@@ -12642,15 +12753,15 @@
                 <a:ea typeface="Calibri" pitchFamily="34" charset="-122"/>
                 <a:cs typeface="Calibri" pitchFamily="34" charset="-120"/>
               </a:rPr>
-              <a:t>Jean-Baptiste Say</a:t>
-            </a:r>
-            <a:endParaRPr lang="en-US" sz="1400" dirty="0"/>
-          </a:p>
-        </p:txBody>
-      </p:sp>
-      <p:sp>
-        <p:nvSpPr>
-          <p:cNvPr id="16" name="Text 14"/>
+              <a:t>Locke funda o liberalismo político: o governo existe para proteger esses direitos e tem poder limitado.</a:t>
+            </a:r>
+            <a:endParaRPr lang="en-US" sz="1350" dirty="0"/>
+          </a:p>
+        </p:txBody>
+      </p:sp>
+      <p:sp>
+        <p:nvSpPr>
+          <p:cNvPr id="17" name="Text 15"/>
           <p:cNvSpPr txBox="1"/>
           <p:nvPr/>
         </p:nvSpPr>
@@ -12765,7 +12876,7 @@
                 <a:ea typeface="Calibri" pitchFamily="34" charset="-122"/>
                 <a:cs typeface="Calibri" pitchFamily="34" charset="-120"/>
               </a:rPr>
-              <a:t>QUIZ DA UNIDADE 2 · PERGUNTA 3 DE 5 · RESPOSTA</a:t>
+              <a:t>QUIZ DA UNIDADE 2 · PERGUNTA 3 DE 5</a:t>
             </a:r>
             <a:endParaRPr lang="en-US" sz="1250" dirty="0"/>
           </a:p>
@@ -12822,11 +12933,11 @@
         <p:spPr>
           <a:xfrm>
             <a:off x="685800" y="1737360"/>
-            <a:ext cx="3794760" cy="749808"/>
+            <a:ext cx="3794760" cy="914400"/>
           </a:xfrm>
           <a:prstGeom prst="roundRect">
             <a:avLst>
-              <a:gd name="adj" fmla="val 9756"/>
+              <a:gd name="adj" fmla="val 8000"/>
             </a:avLst>
           </a:prstGeom>
           <a:solidFill>
@@ -12848,7 +12959,7 @@
         </p:nvSpPr>
         <p:spPr>
           <a:xfrm>
-            <a:off x="813816" y="1901952"/>
+            <a:off x="813816" y="1984248"/>
             <a:ext cx="420624" cy="420624"/>
           </a:xfrm>
           <a:prstGeom prst="roundRect">
@@ -12857,7 +12968,7 @@
             </a:avLst>
           </a:prstGeom>
           <a:solidFill>
-            <a:srgbClr val="9AA3AB"/>
+            <a:srgbClr val="13294B"/>
           </a:solidFill>
           <a:ln/>
         </p:spPr>
@@ -12895,7 +13006,7 @@
         <p:spPr>
           <a:xfrm>
             <a:off x="1344168" y="1773936"/>
-            <a:ext cx="3044952" cy="676656"/>
+            <a:ext cx="3044952" cy="841248"/>
           </a:xfrm>
           <a:prstGeom prst="rect">
             <a:avLst/>
@@ -12916,7 +13027,7 @@
             <a:r>
               <a:rPr lang="en-US" sz="1400" dirty="0">
                 <a:solidFill>
-                  <a:srgbClr val="5B6770"/>
+                  <a:srgbClr val="1F2A37"/>
                 </a:solidFill>
                 <a:latin typeface="Calibri" pitchFamily="34" charset="0"/>
                 <a:ea typeface="Calibri" pitchFamily="34" charset="-122"/>
@@ -12937,11 +13048,11 @@
         <p:spPr>
           <a:xfrm>
             <a:off x="4663440" y="1737360"/>
-            <a:ext cx="3794760" cy="749808"/>
+            <a:ext cx="3794760" cy="914400"/>
           </a:xfrm>
           <a:prstGeom prst="roundRect">
             <a:avLst>
-              <a:gd name="adj" fmla="val 9756"/>
+              <a:gd name="adj" fmla="val 8000"/>
             </a:avLst>
           </a:prstGeom>
           <a:solidFill>
@@ -12963,7 +13074,7 @@
         </p:nvSpPr>
         <p:spPr>
           <a:xfrm>
-            <a:off x="4791456" y="1901952"/>
+            <a:off x="4791456" y="1984248"/>
             <a:ext cx="420624" cy="420624"/>
           </a:xfrm>
           <a:prstGeom prst="roundRect">
@@ -12972,7 +13083,7 @@
             </a:avLst>
           </a:prstGeom>
           <a:solidFill>
-            <a:srgbClr val="9AA3AB"/>
+            <a:srgbClr val="13294B"/>
           </a:solidFill>
           <a:ln/>
         </p:spPr>
@@ -13010,7 +13121,7 @@
         <p:spPr>
           <a:xfrm>
             <a:off x="5321808" y="1773936"/>
-            <a:ext cx="3044952" cy="676656"/>
+            <a:ext cx="3044952" cy="841248"/>
           </a:xfrm>
           <a:prstGeom prst="rect">
             <a:avLst/>
@@ -13031,7 +13142,7 @@
             <a:r>
               <a:rPr lang="en-US" sz="1400" dirty="0">
                 <a:solidFill>
-                  <a:srgbClr val="5B6770"/>
+                  <a:srgbClr val="1F2A37"/>
                 </a:solidFill>
                 <a:latin typeface="Calibri" pitchFamily="34" charset="0"/>
                 <a:ea typeface="Calibri" pitchFamily="34" charset="-122"/>
@@ -13051,127 +13162,12 @@
         </p:nvSpPr>
         <p:spPr>
           <a:xfrm>
-            <a:off x="685800" y="2633472"/>
-            <a:ext cx="3794760" cy="749808"/>
+            <a:off x="685800" y="2798064"/>
+            <a:ext cx="3794760" cy="914400"/>
           </a:xfrm>
           <a:prstGeom prst="roundRect">
             <a:avLst>
-              <a:gd name="adj" fmla="val 9756"/>
-            </a:avLst>
-          </a:prstGeom>
-          <a:solidFill>
-            <a:srgbClr val="E3F2E8"/>
-          </a:solidFill>
-          <a:ln w="25400">
-            <a:solidFill>
-              <a:srgbClr val="2E7D4F"/>
-            </a:solidFill>
-            <a:prstDash val="solid"/>
-          </a:ln>
-        </p:spPr>
-      </p:sp>
-      <p:sp>
-        <p:nvSpPr>
-          <p:cNvPr id="11" name="Text 9"/>
-          <p:cNvSpPr txBox="1"/>
-          <p:nvPr/>
-        </p:nvSpPr>
-        <p:spPr>
-          <a:xfrm>
-            <a:off x="813816" y="2798064"/>
-            <a:ext cx="420624" cy="420624"/>
-          </a:xfrm>
-          <a:prstGeom prst="roundRect">
-            <a:avLst>
-              <a:gd name="adj" fmla="val 50000"/>
-            </a:avLst>
-          </a:prstGeom>
-          <a:solidFill>
-            <a:srgbClr val="2E7D4F"/>
-          </a:solidFill>
-          <a:ln/>
-        </p:spPr>
-        <p:txBody>
-          <a:bodyPr wrap="square" lIns="0" tIns="0" rIns="0" bIns="0" rtlCol="0" anchor="ctr"/>
-          <a:lstStyle/>
-          <a:p>
-            <a:pPr algn="ctr" indent="0" marL="0">
-              <a:lnSpc>
-                <a:spcPct val="100000"/>
-              </a:lnSpc>
-              <a:buNone/>
-            </a:pPr>
-            <a:r>
-              <a:rPr lang="en-US" sz="1600" b="1" dirty="0">
-                <a:solidFill>
-                  <a:srgbClr val="FFFFFF"/>
-                </a:solidFill>
-                <a:latin typeface="Calibri" pitchFamily="34" charset="0"/>
-                <a:ea typeface="Calibri" pitchFamily="34" charset="-122"/>
-                <a:cs typeface="Calibri" pitchFamily="34" charset="-120"/>
-              </a:rPr>
-              <a:t>c</a:t>
-            </a:r>
-            <a:endParaRPr lang="en-US" sz="1600" dirty="0"/>
-          </a:p>
-        </p:txBody>
-      </p:sp>
-      <p:sp>
-        <p:nvSpPr>
-          <p:cNvPr id="12" name="Text 10"/>
-          <p:cNvSpPr txBox="1"/>
-          <p:nvPr/>
-        </p:nvSpPr>
-        <p:spPr>
-          <a:xfrm>
-            <a:off x="1344168" y="2670048"/>
-            <a:ext cx="3044952" cy="676656"/>
-          </a:xfrm>
-          <a:prstGeom prst="rect">
-            <a:avLst/>
-          </a:prstGeom>
-          <a:noFill/>
-          <a:ln/>
-        </p:spPr>
-        <p:txBody>
-          <a:bodyPr wrap="square" lIns="25400" tIns="25400" rIns="25400" bIns="25400" rtlCol="0" anchor="ctr"/>
-          <a:lstStyle/>
-          <a:p>
-            <a:pPr algn="l" indent="0" marL="0">
-              <a:lnSpc>
-                <a:spcPct val="100000"/>
-              </a:lnSpc>
-              <a:buNone/>
-            </a:pPr>
-            <a:r>
-              <a:rPr lang="en-US" sz="1400" b="1" dirty="0">
-                <a:solidFill>
-                  <a:srgbClr val="1F2A37"/>
-                </a:solidFill>
-                <a:latin typeface="Calibri" pitchFamily="34" charset="0"/>
-                <a:ea typeface="Calibri" pitchFamily="34" charset="-122"/>
-                <a:cs typeface="Calibri" pitchFamily="34" charset="-120"/>
-              </a:rPr>
-              <a:t>Montesquieu</a:t>
-            </a:r>
-            <a:endParaRPr lang="en-US" sz="1400" dirty="0"/>
-          </a:p>
-        </p:txBody>
-      </p:sp>
-      <p:sp>
-        <p:nvSpPr>
-          <p:cNvPr id="13" name="Shape 11"/>
-          <p:cNvSpPr/>
-          <p:nvPr/>
-        </p:nvSpPr>
-        <p:spPr>
-          <a:xfrm>
-            <a:off x="4663440" y="2633472"/>
-            <a:ext cx="3794760" cy="749808"/>
-          </a:xfrm>
-          <a:prstGeom prst="roundRect">
-            <a:avLst>
-              <a:gd name="adj" fmla="val 9756"/>
+              <a:gd name="adj" fmla="val 8000"/>
             </a:avLst>
           </a:prstGeom>
           <a:solidFill>
@@ -13187,13 +13183,13 @@
       </p:sp>
       <p:sp>
         <p:nvSpPr>
-          <p:cNvPr id="14" name="Text 12"/>
-          <p:cNvSpPr txBox="1"/>
-          <p:nvPr/>
-        </p:nvSpPr>
-        <p:spPr>
-          <a:xfrm>
-            <a:off x="4791456" y="2798064"/>
+          <p:cNvPr id="11" name="Text 9"/>
+          <p:cNvSpPr txBox="1"/>
+          <p:nvPr/>
+        </p:nvSpPr>
+        <p:spPr>
+          <a:xfrm>
+            <a:off x="813816" y="3044952"/>
             <a:ext cx="420624" cy="420624"/>
           </a:xfrm>
           <a:prstGeom prst="roundRect">
@@ -13202,7 +13198,7 @@
             </a:avLst>
           </a:prstGeom>
           <a:solidFill>
-            <a:srgbClr val="9AA3AB"/>
+            <a:srgbClr val="13294B"/>
           </a:solidFill>
           <a:ln/>
         </p:spPr>
@@ -13225,7 +13221,7 @@
                 <a:ea typeface="Calibri" pitchFamily="34" charset="-122"/>
                 <a:cs typeface="Calibri" pitchFamily="34" charset="-120"/>
               </a:rPr>
-              <a:t>d</a:t>
+              <a:t>c</a:t>
             </a:r>
             <a:endParaRPr lang="en-US" sz="1600" dirty="0"/>
           </a:p>
@@ -13233,14 +13229,14 @@
       </p:sp>
       <p:sp>
         <p:nvSpPr>
-          <p:cNvPr id="15" name="Text 13"/>
-          <p:cNvSpPr txBox="1"/>
-          <p:nvPr/>
-        </p:nvSpPr>
-        <p:spPr>
-          <a:xfrm>
-            <a:off x="5321808" y="2670048"/>
-            <a:ext cx="3044952" cy="676656"/>
+          <p:cNvPr id="12" name="Text 10"/>
+          <p:cNvSpPr txBox="1"/>
+          <p:nvPr/>
+        </p:nvSpPr>
+        <p:spPr>
+          <a:xfrm>
+            <a:off x="1344168" y="2834640"/>
+            <a:ext cx="3044952" cy="841248"/>
           </a:xfrm>
           <a:prstGeom prst="rect">
             <a:avLst/>
@@ -13261,13 +13257,13 @@
             <a:r>
               <a:rPr lang="en-US" sz="1400" dirty="0">
                 <a:solidFill>
-                  <a:srgbClr val="5B6770"/>
-                </a:solidFill>
-                <a:latin typeface="Calibri" pitchFamily="34" charset="0"/>
-                <a:ea typeface="Calibri" pitchFamily="34" charset="-122"/>
-                <a:cs typeface="Calibri" pitchFamily="34" charset="-120"/>
-              </a:rPr>
-              <a:t>Jean-Baptiste Say</a:t>
+                  <a:srgbClr val="1F2A37"/>
+                </a:solidFill>
+                <a:latin typeface="Calibri" pitchFamily="34" charset="0"/>
+                <a:ea typeface="Calibri" pitchFamily="34" charset="-122"/>
+                <a:cs typeface="Calibri" pitchFamily="34" charset="-120"/>
+              </a:rPr>
+              <a:t>Montesquieu</a:t>
             </a:r>
             <a:endParaRPr lang="en-US" sz="1400" dirty="0"/>
           </a:p>
@@ -13275,27 +13271,96 @@
       </p:sp>
       <p:sp>
         <p:nvSpPr>
-          <p:cNvPr id="16" name="Text 14"/>
-          <p:cNvSpPr txBox="1"/>
-          <p:nvPr/>
-        </p:nvSpPr>
-        <p:spPr>
-          <a:xfrm>
-            <a:off x="685800" y="3566160"/>
-            <a:ext cx="7772400" cy="841248"/>
+          <p:cNvPr id="13" name="Shape 11"/>
+          <p:cNvSpPr/>
+          <p:nvPr/>
+        </p:nvSpPr>
+        <p:spPr>
+          <a:xfrm>
+            <a:off x="4663440" y="2798064"/>
+            <a:ext cx="3794760" cy="914400"/>
           </a:xfrm>
           <a:prstGeom prst="roundRect">
             <a:avLst>
-              <a:gd name="adj" fmla="val 8696"/>
+              <a:gd name="adj" fmla="val 8000"/>
             </a:avLst>
           </a:prstGeom>
           <a:solidFill>
-            <a:srgbClr val="E6F2F0"/>
+            <a:srgbClr val="FFFFFF"/>
           </a:solidFill>
-          <a:ln/>
-        </p:spPr>
-        <p:txBody>
-          <a:bodyPr wrap="square" lIns="114300" tIns="114300" rIns="114300" bIns="114300" rtlCol="0" anchor="ctr"/>
+          <a:ln w="12700">
+            <a:solidFill>
+              <a:srgbClr val="DCD5C1"/>
+            </a:solidFill>
+            <a:prstDash val="solid"/>
+          </a:ln>
+        </p:spPr>
+      </p:sp>
+      <p:sp>
+        <p:nvSpPr>
+          <p:cNvPr id="14" name="Text 12"/>
+          <p:cNvSpPr txBox="1"/>
+          <p:nvPr/>
+        </p:nvSpPr>
+        <p:spPr>
+          <a:xfrm>
+            <a:off x="4791456" y="3044952"/>
+            <a:ext cx="420624" cy="420624"/>
+          </a:xfrm>
+          <a:prstGeom prst="roundRect">
+            <a:avLst>
+              <a:gd name="adj" fmla="val 50000"/>
+            </a:avLst>
+          </a:prstGeom>
+          <a:solidFill>
+            <a:srgbClr val="13294B"/>
+          </a:solidFill>
+          <a:ln/>
+        </p:spPr>
+        <p:txBody>
+          <a:bodyPr wrap="square" lIns="0" tIns="0" rIns="0" bIns="0" rtlCol="0" anchor="ctr"/>
+          <a:lstStyle/>
+          <a:p>
+            <a:pPr algn="ctr" indent="0" marL="0">
+              <a:lnSpc>
+                <a:spcPct val="100000"/>
+              </a:lnSpc>
+              <a:buNone/>
+            </a:pPr>
+            <a:r>
+              <a:rPr lang="en-US" sz="1600" b="1" dirty="0">
+                <a:solidFill>
+                  <a:srgbClr val="FFFFFF"/>
+                </a:solidFill>
+                <a:latin typeface="Calibri" pitchFamily="34" charset="0"/>
+                <a:ea typeface="Calibri" pitchFamily="34" charset="-122"/>
+                <a:cs typeface="Calibri" pitchFamily="34" charset="-120"/>
+              </a:rPr>
+              <a:t>d</a:t>
+            </a:r>
+            <a:endParaRPr lang="en-US" sz="1600" dirty="0"/>
+          </a:p>
+        </p:txBody>
+      </p:sp>
+      <p:sp>
+        <p:nvSpPr>
+          <p:cNvPr id="15" name="Text 13"/>
+          <p:cNvSpPr txBox="1"/>
+          <p:nvPr/>
+        </p:nvSpPr>
+        <p:spPr>
+          <a:xfrm>
+            <a:off x="5321808" y="2834640"/>
+            <a:ext cx="3044952" cy="841248"/>
+          </a:xfrm>
+          <a:prstGeom prst="rect">
+            <a:avLst/>
+          </a:prstGeom>
+          <a:noFill/>
+          <a:ln/>
+        </p:spPr>
+        <p:txBody>
+          <a:bodyPr wrap="square" lIns="25400" tIns="25400" rIns="25400" bIns="25400" rtlCol="0" anchor="ctr"/>
           <a:lstStyle/>
           <a:p>
             <a:pPr algn="l" indent="0" marL="0">
@@ -13305,24 +13370,7 @@
               <a:buNone/>
             </a:pPr>
             <a:r>
-              <a:rPr lang="en-US" sz="1350" b="1" dirty="0">
-                <a:solidFill>
-                  <a:srgbClr val="2E7D4F"/>
-                </a:solidFill>
-                <a:latin typeface="Calibri" pitchFamily="34" charset="0"/>
-                <a:ea typeface="Calibri" pitchFamily="34" charset="-122"/>
-                <a:cs typeface="Calibri" pitchFamily="34" charset="-120"/>
-              </a:rPr>
-              <a:t>Resposta: c) </a:t>
-            </a:r>
-            <a:pPr algn="l" indent="0" marL="0">
-              <a:lnSpc>
-                <a:spcPct val="100000"/>
-              </a:lnSpc>
-              <a:buNone/>
-            </a:pPr>
-            <a:r>
-              <a:rPr lang="en-US" sz="1350" dirty="0">
+              <a:rPr lang="en-US" sz="1400" dirty="0">
                 <a:solidFill>
                   <a:srgbClr val="1F2A37"/>
                 </a:solidFill>
@@ -13330,15 +13378,15 @@
                 <a:ea typeface="Calibri" pitchFamily="34" charset="-122"/>
                 <a:cs typeface="Calibri" pitchFamily="34" charset="-120"/>
               </a:rPr>
-              <a:t>Montesquieu, em O Espírito das Leis (1748). A Constituição de 1988 adota a separação no art. 2º.</a:t>
-            </a:r>
-            <a:endParaRPr lang="en-US" sz="1350" dirty="0"/>
-          </a:p>
-        </p:txBody>
-      </p:sp>
-      <p:sp>
-        <p:nvSpPr>
-          <p:cNvPr id="17" name="Text 15"/>
+              <a:t>Jean-Baptiste Say</a:t>
+            </a:r>
+            <a:endParaRPr lang="en-US" sz="1400" dirty="0"/>
+          </a:p>
+        </p:txBody>
+      </p:sp>
+      <p:sp>
+        <p:nvSpPr>
+          <p:cNvPr id="16" name="Text 14"/>
           <p:cNvSpPr txBox="1"/>
           <p:nvPr/>
         </p:nvSpPr>
@@ -13453,7 +13501,7 @@
                 <a:ea typeface="Calibri" pitchFamily="34" charset="-122"/>
                 <a:cs typeface="Calibri" pitchFamily="34" charset="-120"/>
               </a:rPr>
-              <a:t>QUIZ DA UNIDADE 2 · PERGUNTA 4 DE 5</a:t>
+              <a:t>QUIZ DA UNIDADE 2 · PERGUNTA 3 DE 5 · RESPOSTA</a:t>
             </a:r>
             <a:endParaRPr lang="en-US" sz="1250" dirty="0"/>
           </a:p>
@@ -13495,7 +13543,7 @@
                 <a:ea typeface="Calibri" pitchFamily="34" charset="-122"/>
                 <a:cs typeface="Calibri" pitchFamily="34" charset="-120"/>
               </a:rPr>
-              <a:t>Pela teoria das vantagens comparativas de Ricardo, os países ganham ao:</a:t>
+              <a:t>A ideia de que “o poder deve frear o poder”, base da separação dos poderes, é de:</a:t>
             </a:r>
             <a:endParaRPr lang="en-US" sz="1900" dirty="0"/>
           </a:p>
@@ -13510,11 +13558,11 @@
         <p:spPr>
           <a:xfrm>
             <a:off x="685800" y="1737360"/>
-            <a:ext cx="3794760" cy="914400"/>
+            <a:ext cx="3794760" cy="749808"/>
           </a:xfrm>
           <a:prstGeom prst="roundRect">
             <a:avLst>
-              <a:gd name="adj" fmla="val 8000"/>
+              <a:gd name="adj" fmla="val 9756"/>
             </a:avLst>
           </a:prstGeom>
           <a:solidFill>
@@ -13536,7 +13584,7 @@
         </p:nvSpPr>
         <p:spPr>
           <a:xfrm>
-            <a:off x="813816" y="1984248"/>
+            <a:off x="813816" y="1901952"/>
             <a:ext cx="420624" cy="420624"/>
           </a:xfrm>
           <a:prstGeom prst="roundRect">
@@ -13545,7 +13593,7 @@
             </a:avLst>
           </a:prstGeom>
           <a:solidFill>
-            <a:srgbClr val="13294B"/>
+            <a:srgbClr val="9AA3AB"/>
           </a:solidFill>
           <a:ln/>
         </p:spPr>
@@ -13583,7 +13631,7 @@
         <p:spPr>
           <a:xfrm>
             <a:off x="1344168" y="1773936"/>
-            <a:ext cx="3044952" cy="841248"/>
+            <a:ext cx="3044952" cy="676656"/>
           </a:xfrm>
           <a:prstGeom prst="rect">
             <a:avLst/>
@@ -13604,13 +13652,13 @@
             <a:r>
               <a:rPr lang="en-US" sz="1400" dirty="0">
                 <a:solidFill>
-                  <a:srgbClr val="1F2A37"/>
-                </a:solidFill>
-                <a:latin typeface="Calibri" pitchFamily="34" charset="0"/>
-                <a:ea typeface="Calibri" pitchFamily="34" charset="-122"/>
-                <a:cs typeface="Calibri" pitchFamily="34" charset="-120"/>
-              </a:rPr>
-              <a:t>Produzir tudo internamente</a:t>
+                  <a:srgbClr val="5B6770"/>
+                </a:solidFill>
+                <a:latin typeface="Calibri" pitchFamily="34" charset="0"/>
+                <a:ea typeface="Calibri" pitchFamily="34" charset="-122"/>
+                <a:cs typeface="Calibri" pitchFamily="34" charset="-120"/>
+              </a:rPr>
+              <a:t>Rousseau</a:t>
             </a:r>
             <a:endParaRPr lang="en-US" sz="1400" dirty="0"/>
           </a:p>
@@ -13625,11 +13673,11 @@
         <p:spPr>
           <a:xfrm>
             <a:off x="4663440" y="1737360"/>
-            <a:ext cx="3794760" cy="914400"/>
+            <a:ext cx="3794760" cy="749808"/>
           </a:xfrm>
           <a:prstGeom prst="roundRect">
             <a:avLst>
-              <a:gd name="adj" fmla="val 8000"/>
+              <a:gd name="adj" fmla="val 9756"/>
             </a:avLst>
           </a:prstGeom>
           <a:solidFill>
@@ -13651,7 +13699,7 @@
         </p:nvSpPr>
         <p:spPr>
           <a:xfrm>
-            <a:off x="4791456" y="1984248"/>
+            <a:off x="4791456" y="1901952"/>
             <a:ext cx="420624" cy="420624"/>
           </a:xfrm>
           <a:prstGeom prst="roundRect">
@@ -13660,7 +13708,7 @@
             </a:avLst>
           </a:prstGeom>
           <a:solidFill>
-            <a:srgbClr val="13294B"/>
+            <a:srgbClr val="9AA3AB"/>
           </a:solidFill>
           <a:ln/>
         </p:spPr>
@@ -13698,7 +13746,7 @@
         <p:spPr>
           <a:xfrm>
             <a:off x="5321808" y="1773936"/>
-            <a:ext cx="3044952" cy="841248"/>
+            <a:ext cx="3044952" cy="676656"/>
           </a:xfrm>
           <a:prstGeom prst="rect">
             <a:avLst/>
@@ -13719,13 +13767,13 @@
             <a:r>
               <a:rPr lang="en-US" sz="1400" dirty="0">
                 <a:solidFill>
-                  <a:srgbClr val="1F2A37"/>
-                </a:solidFill>
-                <a:latin typeface="Calibri" pitchFamily="34" charset="0"/>
-                <a:ea typeface="Calibri" pitchFamily="34" charset="-122"/>
-                <a:cs typeface="Calibri" pitchFamily="34" charset="-120"/>
-              </a:rPr>
-              <a:t>Especializar-se no que produzem com menor custo relativo e trocar</a:t>
+                  <a:srgbClr val="5B6770"/>
+                </a:solidFill>
+                <a:latin typeface="Calibri" pitchFamily="34" charset="0"/>
+                <a:ea typeface="Calibri" pitchFamily="34" charset="-122"/>
+                <a:cs typeface="Calibri" pitchFamily="34" charset="-120"/>
+              </a:rPr>
+              <a:t>Adam Smith</a:t>
             </a:r>
             <a:endParaRPr lang="en-US" sz="1400" dirty="0"/>
           </a:p>
@@ -13739,12 +13787,127 @@
         </p:nvSpPr>
         <p:spPr>
           <a:xfrm>
-            <a:off x="685800" y="2798064"/>
-            <a:ext cx="3794760" cy="914400"/>
+            <a:off x="685800" y="2633472"/>
+            <a:ext cx="3794760" cy="749808"/>
           </a:xfrm>
           <a:prstGeom prst="roundRect">
             <a:avLst>
-              <a:gd name="adj" fmla="val 8000"/>
+              <a:gd name="adj" fmla="val 9756"/>
+            </a:avLst>
+          </a:prstGeom>
+          <a:solidFill>
+            <a:srgbClr val="E3F2E8"/>
+          </a:solidFill>
+          <a:ln w="25400">
+            <a:solidFill>
+              <a:srgbClr val="2E7D4F"/>
+            </a:solidFill>
+            <a:prstDash val="solid"/>
+          </a:ln>
+        </p:spPr>
+      </p:sp>
+      <p:sp>
+        <p:nvSpPr>
+          <p:cNvPr id="11" name="Text 9"/>
+          <p:cNvSpPr txBox="1"/>
+          <p:nvPr/>
+        </p:nvSpPr>
+        <p:spPr>
+          <a:xfrm>
+            <a:off x="813816" y="2798064"/>
+            <a:ext cx="420624" cy="420624"/>
+          </a:xfrm>
+          <a:prstGeom prst="roundRect">
+            <a:avLst>
+              <a:gd name="adj" fmla="val 50000"/>
+            </a:avLst>
+          </a:prstGeom>
+          <a:solidFill>
+            <a:srgbClr val="2E7D4F"/>
+          </a:solidFill>
+          <a:ln/>
+        </p:spPr>
+        <p:txBody>
+          <a:bodyPr wrap="square" lIns="0" tIns="0" rIns="0" bIns="0" rtlCol="0" anchor="ctr"/>
+          <a:lstStyle/>
+          <a:p>
+            <a:pPr algn="ctr" indent="0" marL="0">
+              <a:lnSpc>
+                <a:spcPct val="100000"/>
+              </a:lnSpc>
+              <a:buNone/>
+            </a:pPr>
+            <a:r>
+              <a:rPr lang="en-US" sz="1600" b="1" dirty="0">
+                <a:solidFill>
+                  <a:srgbClr val="FFFFFF"/>
+                </a:solidFill>
+                <a:latin typeface="Calibri" pitchFamily="34" charset="0"/>
+                <a:ea typeface="Calibri" pitchFamily="34" charset="-122"/>
+                <a:cs typeface="Calibri" pitchFamily="34" charset="-120"/>
+              </a:rPr>
+              <a:t>c</a:t>
+            </a:r>
+            <a:endParaRPr lang="en-US" sz="1600" dirty="0"/>
+          </a:p>
+        </p:txBody>
+      </p:sp>
+      <p:sp>
+        <p:nvSpPr>
+          <p:cNvPr id="12" name="Text 10"/>
+          <p:cNvSpPr txBox="1"/>
+          <p:nvPr/>
+        </p:nvSpPr>
+        <p:spPr>
+          <a:xfrm>
+            <a:off x="1344168" y="2670048"/>
+            <a:ext cx="3044952" cy="676656"/>
+          </a:xfrm>
+          <a:prstGeom prst="rect">
+            <a:avLst/>
+          </a:prstGeom>
+          <a:noFill/>
+          <a:ln/>
+        </p:spPr>
+        <p:txBody>
+          <a:bodyPr wrap="square" lIns="25400" tIns="25400" rIns="25400" bIns="25400" rtlCol="0" anchor="ctr"/>
+          <a:lstStyle/>
+          <a:p>
+            <a:pPr algn="l" indent="0" marL="0">
+              <a:lnSpc>
+                <a:spcPct val="100000"/>
+              </a:lnSpc>
+              <a:buNone/>
+            </a:pPr>
+            <a:r>
+              <a:rPr lang="en-US" sz="1400" b="1" dirty="0">
+                <a:solidFill>
+                  <a:srgbClr val="1F2A37"/>
+                </a:solidFill>
+                <a:latin typeface="Calibri" pitchFamily="34" charset="0"/>
+                <a:ea typeface="Calibri" pitchFamily="34" charset="-122"/>
+                <a:cs typeface="Calibri" pitchFamily="34" charset="-120"/>
+              </a:rPr>
+              <a:t>Montesquieu</a:t>
+            </a:r>
+            <a:endParaRPr lang="en-US" sz="1400" dirty="0"/>
+          </a:p>
+        </p:txBody>
+      </p:sp>
+      <p:sp>
+        <p:nvSpPr>
+          <p:cNvPr id="13" name="Shape 11"/>
+          <p:cNvSpPr/>
+          <p:nvPr/>
+        </p:nvSpPr>
+        <p:spPr>
+          <a:xfrm>
+            <a:off x="4663440" y="2633472"/>
+            <a:ext cx="3794760" cy="749808"/>
+          </a:xfrm>
+          <a:prstGeom prst="roundRect">
+            <a:avLst>
+              <a:gd name="adj" fmla="val 9756"/>
             </a:avLst>
           </a:prstGeom>
           <a:solidFill>
@@ -13760,13 +13923,13 @@
       </p:sp>
       <p:sp>
         <p:nvSpPr>
-          <p:cNvPr id="11" name="Text 9"/>
-          <p:cNvSpPr txBox="1"/>
-          <p:nvPr/>
-        </p:nvSpPr>
-        <p:spPr>
-          <a:xfrm>
-            <a:off x="813816" y="3044952"/>
+          <p:cNvPr id="14" name="Text 12"/>
+          <p:cNvSpPr txBox="1"/>
+          <p:nvPr/>
+        </p:nvSpPr>
+        <p:spPr>
+          <a:xfrm>
+            <a:off x="4791456" y="2798064"/>
             <a:ext cx="420624" cy="420624"/>
           </a:xfrm>
           <a:prstGeom prst="roundRect">
@@ -13775,7 +13938,7 @@
             </a:avLst>
           </a:prstGeom>
           <a:solidFill>
-            <a:srgbClr val="13294B"/>
+            <a:srgbClr val="9AA3AB"/>
           </a:solidFill>
           <a:ln/>
         </p:spPr>
@@ -13798,7 +13961,7 @@
                 <a:ea typeface="Calibri" pitchFamily="34" charset="-122"/>
                 <a:cs typeface="Calibri" pitchFamily="34" charset="-120"/>
               </a:rPr>
-              <a:t>c</a:t>
+              <a:t>d</a:t>
             </a:r>
             <a:endParaRPr lang="en-US" sz="1600" dirty="0"/>
           </a:p>
@@ -13806,14 +13969,14 @@
       </p:sp>
       <p:sp>
         <p:nvSpPr>
-          <p:cNvPr id="12" name="Text 10"/>
-          <p:cNvSpPr txBox="1"/>
-          <p:nvPr/>
-        </p:nvSpPr>
-        <p:spPr>
-          <a:xfrm>
-            <a:off x="1344168" y="2834640"/>
-            <a:ext cx="3044952" cy="841248"/>
+          <p:cNvPr id="15" name="Text 13"/>
+          <p:cNvSpPr txBox="1"/>
+          <p:nvPr/>
+        </p:nvSpPr>
+        <p:spPr>
+          <a:xfrm>
+            <a:off x="5321808" y="2670048"/>
+            <a:ext cx="3044952" cy="676656"/>
           </a:xfrm>
           <a:prstGeom prst="rect">
             <a:avLst/>
@@ -13834,13 +13997,13 @@
             <a:r>
               <a:rPr lang="en-US" sz="1400" dirty="0">
                 <a:solidFill>
-                  <a:srgbClr val="1F2A37"/>
-                </a:solidFill>
-                <a:latin typeface="Calibri" pitchFamily="34" charset="0"/>
-                <a:ea typeface="Calibri" pitchFamily="34" charset="-122"/>
-                <a:cs typeface="Calibri" pitchFamily="34" charset="-120"/>
-              </a:rPr>
-              <a:t>Proibir importações</a:t>
+                  <a:srgbClr val="5B6770"/>
+                </a:solidFill>
+                <a:latin typeface="Calibri" pitchFamily="34" charset="0"/>
+                <a:ea typeface="Calibri" pitchFamily="34" charset="-122"/>
+                <a:cs typeface="Calibri" pitchFamily="34" charset="-120"/>
+              </a:rPr>
+              <a:t>Jean-Baptiste Say</a:t>
             </a:r>
             <a:endParaRPr lang="en-US" sz="1400" dirty="0"/>
           </a:p>
@@ -13848,96 +14011,27 @@
       </p:sp>
       <p:sp>
         <p:nvSpPr>
-          <p:cNvPr id="13" name="Shape 11"/>
-          <p:cNvSpPr/>
-          <p:nvPr/>
-        </p:nvSpPr>
-        <p:spPr>
-          <a:xfrm>
-            <a:off x="4663440" y="2798064"/>
-            <a:ext cx="3794760" cy="914400"/>
+          <p:cNvPr id="16" name="Text 14"/>
+          <p:cNvSpPr txBox="1"/>
+          <p:nvPr/>
+        </p:nvSpPr>
+        <p:spPr>
+          <a:xfrm>
+            <a:off x="685800" y="3566160"/>
+            <a:ext cx="7772400" cy="841248"/>
           </a:xfrm>
           <a:prstGeom prst="roundRect">
             <a:avLst>
-              <a:gd name="adj" fmla="val 8000"/>
+              <a:gd name="adj" fmla="val 8696"/>
             </a:avLst>
           </a:prstGeom>
           <a:solidFill>
-            <a:srgbClr val="FFFFFF"/>
+            <a:srgbClr val="E6F2F0"/>
           </a:solidFill>
-          <a:ln w="12700">
-            <a:solidFill>
-              <a:srgbClr val="DCD5C1"/>
-            </a:solidFill>
-            <a:prstDash val="solid"/>
-          </a:ln>
-        </p:spPr>
-      </p:sp>
-      <p:sp>
-        <p:nvSpPr>
-          <p:cNvPr id="14" name="Text 12"/>
-          <p:cNvSpPr txBox="1"/>
-          <p:nvPr/>
-        </p:nvSpPr>
-        <p:spPr>
-          <a:xfrm>
-            <a:off x="4791456" y="3044952"/>
-            <a:ext cx="420624" cy="420624"/>
-          </a:xfrm>
-          <a:prstGeom prst="roundRect">
-            <a:avLst>
-              <a:gd name="adj" fmla="val 50000"/>
-            </a:avLst>
-          </a:prstGeom>
-          <a:solidFill>
-            <a:srgbClr val="13294B"/>
-          </a:solidFill>
-          <a:ln/>
-        </p:spPr>
-        <p:txBody>
-          <a:bodyPr wrap="square" lIns="0" tIns="0" rIns="0" bIns="0" rtlCol="0" anchor="ctr"/>
-          <a:lstStyle/>
-          <a:p>
-            <a:pPr algn="ctr" indent="0" marL="0">
-              <a:lnSpc>
-                <a:spcPct val="100000"/>
-              </a:lnSpc>
-              <a:buNone/>
-            </a:pPr>
-            <a:r>
-              <a:rPr lang="en-US" sz="1600" b="1" dirty="0">
-                <a:solidFill>
-                  <a:srgbClr val="FFFFFF"/>
-                </a:solidFill>
-                <a:latin typeface="Calibri" pitchFamily="34" charset="0"/>
-                <a:ea typeface="Calibri" pitchFamily="34" charset="-122"/>
-                <a:cs typeface="Calibri" pitchFamily="34" charset="-120"/>
-              </a:rPr>
-              <a:t>d</a:t>
-            </a:r>
-            <a:endParaRPr lang="en-US" sz="1600" dirty="0"/>
-          </a:p>
-        </p:txBody>
-      </p:sp>
-      <p:sp>
-        <p:nvSpPr>
-          <p:cNvPr id="15" name="Text 13"/>
-          <p:cNvSpPr txBox="1"/>
-          <p:nvPr/>
-        </p:nvSpPr>
-        <p:spPr>
-          <a:xfrm>
-            <a:off x="5321808" y="2834640"/>
-            <a:ext cx="3044952" cy="841248"/>
-          </a:xfrm>
-          <a:prstGeom prst="rect">
-            <a:avLst/>
-          </a:prstGeom>
-          <a:noFill/>
-          <a:ln/>
-        </p:spPr>
-        <p:txBody>
-          <a:bodyPr wrap="square" lIns="25400" tIns="25400" rIns="25400" bIns="25400" rtlCol="0" anchor="ctr"/>
+          <a:ln/>
+        </p:spPr>
+        <p:txBody>
+          <a:bodyPr wrap="square" lIns="114300" tIns="114300" rIns="114300" bIns="114300" rtlCol="0" anchor="ctr"/>
           <a:lstStyle/>
           <a:p>
             <a:pPr algn="l" indent="0" marL="0">
@@ -13947,7 +14041,24 @@
               <a:buNone/>
             </a:pPr>
             <a:r>
-              <a:rPr lang="en-US" sz="1400" dirty="0">
+              <a:rPr lang="en-US" sz="1350" b="1" dirty="0">
+                <a:solidFill>
+                  <a:srgbClr val="2E7D4F"/>
+                </a:solidFill>
+                <a:latin typeface="Calibri" pitchFamily="34" charset="0"/>
+                <a:ea typeface="Calibri" pitchFamily="34" charset="-122"/>
+                <a:cs typeface="Calibri" pitchFamily="34" charset="-120"/>
+              </a:rPr>
+              <a:t>Resposta: c) </a:t>
+            </a:r>
+            <a:pPr algn="l" indent="0" marL="0">
+              <a:lnSpc>
+                <a:spcPct val="100000"/>
+              </a:lnSpc>
+              <a:buNone/>
+            </a:pPr>
+            <a:r>
+              <a:rPr lang="en-US" sz="1350" dirty="0">
                 <a:solidFill>
                   <a:srgbClr val="1F2A37"/>
                 </a:solidFill>
@@ -13955,15 +14066,15 @@
                 <a:ea typeface="Calibri" pitchFamily="34" charset="-122"/>
                 <a:cs typeface="Calibri" pitchFamily="34" charset="-120"/>
               </a:rPr>
-              <a:t>Acumular ouro e prata</a:t>
-            </a:r>
-            <a:endParaRPr lang="en-US" sz="1400" dirty="0"/>
-          </a:p>
-        </p:txBody>
-      </p:sp>
-      <p:sp>
-        <p:nvSpPr>
-          <p:cNvPr id="16" name="Text 14"/>
+              <a:t>Montesquieu, em O Espírito das Leis (1748). A Constituição de 1988 adota a separação no art. 2º.</a:t>
+            </a:r>
+            <a:endParaRPr lang="en-US" sz="1350" dirty="0"/>
+          </a:p>
+        </p:txBody>
+      </p:sp>
+      <p:sp>
+        <p:nvSpPr>
+          <p:cNvPr id="17" name="Text 15"/>
           <p:cNvSpPr txBox="1"/>
           <p:nvPr/>
         </p:nvSpPr>
@@ -14078,7 +14189,7 @@
                 <a:ea typeface="Calibri" pitchFamily="34" charset="-122"/>
                 <a:cs typeface="Calibri" pitchFamily="34" charset="-120"/>
               </a:rPr>
-              <a:t>QUIZ DA UNIDADE 2 · PERGUNTA 4 DE 5 · RESPOSTA</a:t>
+              <a:t>QUIZ DA UNIDADE 2 · PERGUNTA 4 DE 5</a:t>
             </a:r>
             <a:endParaRPr lang="en-US" sz="1250" dirty="0"/>
           </a:p>
@@ -14135,11 +14246,11 @@
         <p:spPr>
           <a:xfrm>
             <a:off x="685800" y="1737360"/>
-            <a:ext cx="3794760" cy="749808"/>
+            <a:ext cx="3794760" cy="914400"/>
           </a:xfrm>
           <a:prstGeom prst="roundRect">
             <a:avLst>
-              <a:gd name="adj" fmla="val 9756"/>
+              <a:gd name="adj" fmla="val 8000"/>
             </a:avLst>
           </a:prstGeom>
           <a:solidFill>
@@ -14161,7 +14272,7 @@
         </p:nvSpPr>
         <p:spPr>
           <a:xfrm>
-            <a:off x="813816" y="1901952"/>
+            <a:off x="813816" y="1984248"/>
             <a:ext cx="420624" cy="420624"/>
           </a:xfrm>
           <a:prstGeom prst="roundRect">
@@ -14170,7 +14281,7 @@
             </a:avLst>
           </a:prstGeom>
           <a:solidFill>
-            <a:srgbClr val="9AA3AB"/>
+            <a:srgbClr val="13294B"/>
           </a:solidFill>
           <a:ln/>
         </p:spPr>
@@ -14208,7 +14319,7 @@
         <p:spPr>
           <a:xfrm>
             <a:off x="1344168" y="1773936"/>
-            <a:ext cx="3044952" cy="676656"/>
+            <a:ext cx="3044952" cy="841248"/>
           </a:xfrm>
           <a:prstGeom prst="rect">
             <a:avLst/>
@@ -14229,7 +14340,7 @@
             <a:r>
               <a:rPr lang="en-US" sz="1400" dirty="0">
                 <a:solidFill>
-                  <a:srgbClr val="5B6770"/>
+                  <a:srgbClr val="1F2A37"/>
                 </a:solidFill>
                 <a:latin typeface="Calibri" pitchFamily="34" charset="0"/>
                 <a:ea typeface="Calibri" pitchFamily="34" charset="-122"/>
@@ -14250,126 +14361,11 @@
         <p:spPr>
           <a:xfrm>
             <a:off x="4663440" y="1737360"/>
-            <a:ext cx="3794760" cy="749808"/>
+            <a:ext cx="3794760" cy="914400"/>
           </a:xfrm>
           <a:prstGeom prst="roundRect">
             <a:avLst>
-              <a:gd name="adj" fmla="val 9756"/>
-            </a:avLst>
-          </a:prstGeom>
-          <a:solidFill>
-            <a:srgbClr val="E3F2E8"/>
-          </a:solidFill>
-          <a:ln w="25400">
-            <a:solidFill>
-              <a:srgbClr val="2E7D4F"/>
-            </a:solidFill>
-            <a:prstDash val="solid"/>
-          </a:ln>
-        </p:spPr>
-      </p:sp>
-      <p:sp>
-        <p:nvSpPr>
-          <p:cNvPr id="8" name="Text 6"/>
-          <p:cNvSpPr txBox="1"/>
-          <p:nvPr/>
-        </p:nvSpPr>
-        <p:spPr>
-          <a:xfrm>
-            <a:off x="4791456" y="1901952"/>
-            <a:ext cx="420624" cy="420624"/>
-          </a:xfrm>
-          <a:prstGeom prst="roundRect">
-            <a:avLst>
-              <a:gd name="adj" fmla="val 50000"/>
-            </a:avLst>
-          </a:prstGeom>
-          <a:solidFill>
-            <a:srgbClr val="2E7D4F"/>
-          </a:solidFill>
-          <a:ln/>
-        </p:spPr>
-        <p:txBody>
-          <a:bodyPr wrap="square" lIns="0" tIns="0" rIns="0" bIns="0" rtlCol="0" anchor="ctr"/>
-          <a:lstStyle/>
-          <a:p>
-            <a:pPr algn="ctr" indent="0" marL="0">
-              <a:lnSpc>
-                <a:spcPct val="100000"/>
-              </a:lnSpc>
-              <a:buNone/>
-            </a:pPr>
-            <a:r>
-              <a:rPr lang="en-US" sz="1600" b="1" dirty="0">
-                <a:solidFill>
-                  <a:srgbClr val="FFFFFF"/>
-                </a:solidFill>
-                <a:latin typeface="Calibri" pitchFamily="34" charset="0"/>
-                <a:ea typeface="Calibri" pitchFamily="34" charset="-122"/>
-                <a:cs typeface="Calibri" pitchFamily="34" charset="-120"/>
-              </a:rPr>
-              <a:t>b</a:t>
-            </a:r>
-            <a:endParaRPr lang="en-US" sz="1600" dirty="0"/>
-          </a:p>
-        </p:txBody>
-      </p:sp>
-      <p:sp>
-        <p:nvSpPr>
-          <p:cNvPr id="9" name="Text 7"/>
-          <p:cNvSpPr txBox="1"/>
-          <p:nvPr/>
-        </p:nvSpPr>
-        <p:spPr>
-          <a:xfrm>
-            <a:off x="5321808" y="1773936"/>
-            <a:ext cx="3044952" cy="676656"/>
-          </a:xfrm>
-          <a:prstGeom prst="rect">
-            <a:avLst/>
-          </a:prstGeom>
-          <a:noFill/>
-          <a:ln/>
-        </p:spPr>
-        <p:txBody>
-          <a:bodyPr wrap="square" lIns="25400" tIns="25400" rIns="25400" bIns="25400" rtlCol="0" anchor="ctr"/>
-          <a:lstStyle/>
-          <a:p>
-            <a:pPr algn="l" indent="0" marL="0">
-              <a:lnSpc>
-                <a:spcPct val="100000"/>
-              </a:lnSpc>
-              <a:buNone/>
-            </a:pPr>
-            <a:r>
-              <a:rPr lang="en-US" sz="1400" b="1" dirty="0">
-                <a:solidFill>
-                  <a:srgbClr val="1F2A37"/>
-                </a:solidFill>
-                <a:latin typeface="Calibri" pitchFamily="34" charset="0"/>
-                <a:ea typeface="Calibri" pitchFamily="34" charset="-122"/>
-                <a:cs typeface="Calibri" pitchFamily="34" charset="-120"/>
-              </a:rPr>
-              <a:t>Especializar-se no que produzem com menor custo relativo e trocar</a:t>
-            </a:r>
-            <a:endParaRPr lang="en-US" sz="1400" dirty="0"/>
-          </a:p>
-        </p:txBody>
-      </p:sp>
-      <p:sp>
-        <p:nvSpPr>
-          <p:cNvPr id="10" name="Shape 8"/>
-          <p:cNvSpPr/>
-          <p:nvPr/>
-        </p:nvSpPr>
-        <p:spPr>
-          <a:xfrm>
-            <a:off x="685800" y="2633472"/>
-            <a:ext cx="3794760" cy="749808"/>
-          </a:xfrm>
-          <a:prstGeom prst="roundRect">
-            <a:avLst>
-              <a:gd name="adj" fmla="val 9756"/>
+              <a:gd name="adj" fmla="val 8000"/>
             </a:avLst>
           </a:prstGeom>
           <a:solidFill>
@@ -14385,13 +14381,13 @@
       </p:sp>
       <p:sp>
         <p:nvSpPr>
-          <p:cNvPr id="11" name="Text 9"/>
-          <p:cNvSpPr txBox="1"/>
-          <p:nvPr/>
-        </p:nvSpPr>
-        <p:spPr>
-          <a:xfrm>
-            <a:off x="813816" y="2798064"/>
+          <p:cNvPr id="8" name="Text 6"/>
+          <p:cNvSpPr txBox="1"/>
+          <p:nvPr/>
+        </p:nvSpPr>
+        <p:spPr>
+          <a:xfrm>
+            <a:off x="4791456" y="1984248"/>
             <a:ext cx="420624" cy="420624"/>
           </a:xfrm>
           <a:prstGeom prst="roundRect">
@@ -14400,7 +14396,7 @@
             </a:avLst>
           </a:prstGeom>
           <a:solidFill>
-            <a:srgbClr val="9AA3AB"/>
+            <a:srgbClr val="13294B"/>
           </a:solidFill>
           <a:ln/>
         </p:spPr>
@@ -14423,7 +14419,7 @@
                 <a:ea typeface="Calibri" pitchFamily="34" charset="-122"/>
                 <a:cs typeface="Calibri" pitchFamily="34" charset="-120"/>
               </a:rPr>
-              <a:t>c</a:t>
+              <a:t>b</a:t>
             </a:r>
             <a:endParaRPr lang="en-US" sz="1600" dirty="0"/>
           </a:p>
@@ -14431,14 +14427,14 @@
       </p:sp>
       <p:sp>
         <p:nvSpPr>
-          <p:cNvPr id="12" name="Text 10"/>
-          <p:cNvSpPr txBox="1"/>
-          <p:nvPr/>
-        </p:nvSpPr>
-        <p:spPr>
-          <a:xfrm>
-            <a:off x="1344168" y="2670048"/>
-            <a:ext cx="3044952" cy="676656"/>
+          <p:cNvPr id="9" name="Text 7"/>
+          <p:cNvSpPr txBox="1"/>
+          <p:nvPr/>
+        </p:nvSpPr>
+        <p:spPr>
+          <a:xfrm>
+            <a:off x="5321808" y="1773936"/>
+            <a:ext cx="3044952" cy="841248"/>
           </a:xfrm>
           <a:prstGeom prst="rect">
             <a:avLst/>
@@ -14459,13 +14455,13 @@
             <a:r>
               <a:rPr lang="en-US" sz="1400" dirty="0">
                 <a:solidFill>
-                  <a:srgbClr val="5B6770"/>
-                </a:solidFill>
-                <a:latin typeface="Calibri" pitchFamily="34" charset="0"/>
-                <a:ea typeface="Calibri" pitchFamily="34" charset="-122"/>
-                <a:cs typeface="Calibri" pitchFamily="34" charset="-120"/>
-              </a:rPr>
-              <a:t>Proibir importações</a:t>
+                  <a:srgbClr val="1F2A37"/>
+                </a:solidFill>
+                <a:latin typeface="Calibri" pitchFamily="34" charset="0"/>
+                <a:ea typeface="Calibri" pitchFamily="34" charset="-122"/>
+                <a:cs typeface="Calibri" pitchFamily="34" charset="-120"/>
+              </a:rPr>
+              <a:t>Especializar-se no que produzem com menor custo relativo e trocar</a:t>
             </a:r>
             <a:endParaRPr lang="en-US" sz="1400" dirty="0"/>
           </a:p>
@@ -14473,18 +14469,18 @@
       </p:sp>
       <p:sp>
         <p:nvSpPr>
-          <p:cNvPr id="13" name="Shape 11"/>
+          <p:cNvPr id="10" name="Shape 8"/>
           <p:cNvSpPr/>
           <p:nvPr/>
         </p:nvSpPr>
         <p:spPr>
           <a:xfrm>
-            <a:off x="4663440" y="2633472"/>
-            <a:ext cx="3794760" cy="749808"/>
+            <a:off x="685800" y="2798064"/>
+            <a:ext cx="3794760" cy="914400"/>
           </a:xfrm>
           <a:prstGeom prst="roundRect">
             <a:avLst>
-              <a:gd name="adj" fmla="val 9756"/>
+              <a:gd name="adj" fmla="val 8000"/>
             </a:avLst>
           </a:prstGeom>
           <a:solidFill>
@@ -14500,13 +14496,13 @@
       </p:sp>
       <p:sp>
         <p:nvSpPr>
-          <p:cNvPr id="14" name="Text 12"/>
-          <p:cNvSpPr txBox="1"/>
-          <p:nvPr/>
-        </p:nvSpPr>
-        <p:spPr>
-          <a:xfrm>
-            <a:off x="4791456" y="2798064"/>
+          <p:cNvPr id="11" name="Text 9"/>
+          <p:cNvSpPr txBox="1"/>
+          <p:nvPr/>
+        </p:nvSpPr>
+        <p:spPr>
+          <a:xfrm>
+            <a:off x="813816" y="3044952"/>
             <a:ext cx="420624" cy="420624"/>
           </a:xfrm>
           <a:prstGeom prst="roundRect">
@@ -14515,7 +14511,7 @@
             </a:avLst>
           </a:prstGeom>
           <a:solidFill>
-            <a:srgbClr val="9AA3AB"/>
+            <a:srgbClr val="13294B"/>
           </a:solidFill>
           <a:ln/>
         </p:spPr>
@@ -14538,7 +14534,7 @@
                 <a:ea typeface="Calibri" pitchFamily="34" charset="-122"/>
                 <a:cs typeface="Calibri" pitchFamily="34" charset="-120"/>
               </a:rPr>
-              <a:t>d</a:t>
+              <a:t>c</a:t>
             </a:r>
             <a:endParaRPr lang="en-US" sz="1600" dirty="0"/>
           </a:p>
@@ -14546,14 +14542,14 @@
       </p:sp>
       <p:sp>
         <p:nvSpPr>
-          <p:cNvPr id="15" name="Text 13"/>
-          <p:cNvSpPr txBox="1"/>
-          <p:nvPr/>
-        </p:nvSpPr>
-        <p:spPr>
-          <a:xfrm>
-            <a:off x="5321808" y="2670048"/>
-            <a:ext cx="3044952" cy="676656"/>
+          <p:cNvPr id="12" name="Text 10"/>
+          <p:cNvSpPr txBox="1"/>
+          <p:nvPr/>
+        </p:nvSpPr>
+        <p:spPr>
+          <a:xfrm>
+            <a:off x="1344168" y="2834640"/>
+            <a:ext cx="3044952" cy="841248"/>
           </a:xfrm>
           <a:prstGeom prst="rect">
             <a:avLst/>
@@ -14574,13 +14570,13 @@
             <a:r>
               <a:rPr lang="en-US" sz="1400" dirty="0">
                 <a:solidFill>
-                  <a:srgbClr val="5B6770"/>
-                </a:solidFill>
-                <a:latin typeface="Calibri" pitchFamily="34" charset="0"/>
-                <a:ea typeface="Calibri" pitchFamily="34" charset="-122"/>
-                <a:cs typeface="Calibri" pitchFamily="34" charset="-120"/>
-              </a:rPr>
-              <a:t>Acumular ouro e prata</a:t>
+                  <a:srgbClr val="1F2A37"/>
+                </a:solidFill>
+                <a:latin typeface="Calibri" pitchFamily="34" charset="0"/>
+                <a:ea typeface="Calibri" pitchFamily="34" charset="-122"/>
+                <a:cs typeface="Calibri" pitchFamily="34" charset="-120"/>
+              </a:rPr>
+              <a:t>Proibir importações</a:t>
             </a:r>
             <a:endParaRPr lang="en-US" sz="1400" dirty="0"/>
           </a:p>
@@ -14588,27 +14584,96 @@
       </p:sp>
       <p:sp>
         <p:nvSpPr>
-          <p:cNvPr id="16" name="Text 14"/>
-          <p:cNvSpPr txBox="1"/>
-          <p:nvPr/>
-        </p:nvSpPr>
-        <p:spPr>
-          <a:xfrm>
-            <a:off x="685800" y="3566160"/>
-            <a:ext cx="7772400" cy="841248"/>
+          <p:cNvPr id="13" name="Shape 11"/>
+          <p:cNvSpPr/>
+          <p:nvPr/>
+        </p:nvSpPr>
+        <p:spPr>
+          <a:xfrm>
+            <a:off x="4663440" y="2798064"/>
+            <a:ext cx="3794760" cy="914400"/>
           </a:xfrm>
           <a:prstGeom prst="roundRect">
             <a:avLst>
-              <a:gd name="adj" fmla="val 8696"/>
+              <a:gd name="adj" fmla="val 8000"/>
             </a:avLst>
           </a:prstGeom>
           <a:solidFill>
-            <a:srgbClr val="E6F2F0"/>
+            <a:srgbClr val="FFFFFF"/>
           </a:solidFill>
-          <a:ln/>
-        </p:spPr>
-        <p:txBody>
-          <a:bodyPr wrap="square" lIns="114300" tIns="114300" rIns="114300" bIns="114300" rtlCol="0" anchor="ctr"/>
+          <a:ln w="12700">
+            <a:solidFill>
+              <a:srgbClr val="DCD5C1"/>
+            </a:solidFill>
+            <a:prstDash val="solid"/>
+          </a:ln>
+        </p:spPr>
+      </p:sp>
+      <p:sp>
+        <p:nvSpPr>
+          <p:cNvPr id="14" name="Text 12"/>
+          <p:cNvSpPr txBox="1"/>
+          <p:nvPr/>
+        </p:nvSpPr>
+        <p:spPr>
+          <a:xfrm>
+            <a:off x="4791456" y="3044952"/>
+            <a:ext cx="420624" cy="420624"/>
+          </a:xfrm>
+          <a:prstGeom prst="roundRect">
+            <a:avLst>
+              <a:gd name="adj" fmla="val 50000"/>
+            </a:avLst>
+          </a:prstGeom>
+          <a:solidFill>
+            <a:srgbClr val="13294B"/>
+          </a:solidFill>
+          <a:ln/>
+        </p:spPr>
+        <p:txBody>
+          <a:bodyPr wrap="square" lIns="0" tIns="0" rIns="0" bIns="0" rtlCol="0" anchor="ctr"/>
+          <a:lstStyle/>
+          <a:p>
+            <a:pPr algn="ctr" indent="0" marL="0">
+              <a:lnSpc>
+                <a:spcPct val="100000"/>
+              </a:lnSpc>
+              <a:buNone/>
+            </a:pPr>
+            <a:r>
+              <a:rPr lang="en-US" sz="1600" b="1" dirty="0">
+                <a:solidFill>
+                  <a:srgbClr val="FFFFFF"/>
+                </a:solidFill>
+                <a:latin typeface="Calibri" pitchFamily="34" charset="0"/>
+                <a:ea typeface="Calibri" pitchFamily="34" charset="-122"/>
+                <a:cs typeface="Calibri" pitchFamily="34" charset="-120"/>
+              </a:rPr>
+              <a:t>d</a:t>
+            </a:r>
+            <a:endParaRPr lang="en-US" sz="1600" dirty="0"/>
+          </a:p>
+        </p:txBody>
+      </p:sp>
+      <p:sp>
+        <p:nvSpPr>
+          <p:cNvPr id="15" name="Text 13"/>
+          <p:cNvSpPr txBox="1"/>
+          <p:nvPr/>
+        </p:nvSpPr>
+        <p:spPr>
+          <a:xfrm>
+            <a:off x="5321808" y="2834640"/>
+            <a:ext cx="3044952" cy="841248"/>
+          </a:xfrm>
+          <a:prstGeom prst="rect">
+            <a:avLst/>
+          </a:prstGeom>
+          <a:noFill/>
+          <a:ln/>
+        </p:spPr>
+        <p:txBody>
+          <a:bodyPr wrap="square" lIns="25400" tIns="25400" rIns="25400" bIns="25400" rtlCol="0" anchor="ctr"/>
           <a:lstStyle/>
           <a:p>
             <a:pPr algn="l" indent="0" marL="0">
@@ -14618,24 +14683,7 @@
               <a:buNone/>
             </a:pPr>
             <a:r>
-              <a:rPr lang="en-US" sz="1350" b="1" dirty="0">
-                <a:solidFill>
-                  <a:srgbClr val="2E7D4F"/>
-                </a:solidFill>
-                <a:latin typeface="Calibri" pitchFamily="34" charset="0"/>
-                <a:ea typeface="Calibri" pitchFamily="34" charset="-122"/>
-                <a:cs typeface="Calibri" pitchFamily="34" charset="-120"/>
-              </a:rPr>
-              <a:t>Resposta: b) </a:t>
-            </a:r>
-            <a:pPr algn="l" indent="0" marL="0">
-              <a:lnSpc>
-                <a:spcPct val="100000"/>
-              </a:lnSpc>
-              <a:buNone/>
-            </a:pPr>
-            <a:r>
-              <a:rPr lang="en-US" sz="1350" dirty="0">
+              <a:rPr lang="en-US" sz="1400" dirty="0">
                 <a:solidFill>
                   <a:srgbClr val="1F2A37"/>
                 </a:solidFill>
@@ -14643,15 +14691,15 @@
                 <a:ea typeface="Calibri" pitchFamily="34" charset="-122"/>
                 <a:cs typeface="Calibri" pitchFamily="34" charset="-120"/>
               </a:rPr>
-              <a:t>A especialização e o livre comércio aumentam a produção total e beneficiam os países que trocam.</a:t>
-            </a:r>
-            <a:endParaRPr lang="en-US" sz="1350" dirty="0"/>
-          </a:p>
-        </p:txBody>
-      </p:sp>
-      <p:sp>
-        <p:nvSpPr>
-          <p:cNvPr id="17" name="Text 15"/>
+              <a:t>Acumular ouro e prata</a:t>
+            </a:r>
+            <a:endParaRPr lang="en-US" sz="1400" dirty="0"/>
+          </a:p>
+        </p:txBody>
+      </p:sp>
+      <p:sp>
+        <p:nvSpPr>
+          <p:cNvPr id="16" name="Text 14"/>
           <p:cNvSpPr txBox="1"/>
           <p:nvPr/>
         </p:nvSpPr>
@@ -14766,7 +14814,7 @@
                 <a:ea typeface="Calibri" pitchFamily="34" charset="-122"/>
                 <a:cs typeface="Calibri" pitchFamily="34" charset="-120"/>
               </a:rPr>
-              <a:t>QUIZ DA UNIDADE 2 · PERGUNTA 5 DE 5</a:t>
+              <a:t>QUIZ DA UNIDADE 2 · PERGUNTA 4 DE 5 · RESPOSTA</a:t>
             </a:r>
             <a:endParaRPr lang="en-US" sz="1250" dirty="0"/>
           </a:p>
@@ -14808,7 +14856,7 @@
                 <a:ea typeface="Calibri" pitchFamily="34" charset="-122"/>
                 <a:cs typeface="Calibri" pitchFamily="34" charset="-120"/>
               </a:rPr>
-              <a:t>Por que o pêndulo entre Estado e mercado se move?</a:t>
+              <a:t>Pela teoria das vantagens comparativas de Ricardo, os países ganham ao:</a:t>
             </a:r>
             <a:endParaRPr lang="en-US" sz="1900" dirty="0"/>
           </a:p>
@@ -14823,11 +14871,11 @@
         <p:spPr>
           <a:xfrm>
             <a:off x="685800" y="1737360"/>
-            <a:ext cx="3794760" cy="914400"/>
+            <a:ext cx="3794760" cy="749808"/>
           </a:xfrm>
           <a:prstGeom prst="roundRect">
             <a:avLst>
-              <a:gd name="adj" fmla="val 8000"/>
+              <a:gd name="adj" fmla="val 9756"/>
             </a:avLst>
           </a:prstGeom>
           <a:solidFill>
@@ -14849,7 +14897,7 @@
         </p:nvSpPr>
         <p:spPr>
           <a:xfrm>
-            <a:off x="813816" y="1984248"/>
+            <a:off x="813816" y="1901952"/>
             <a:ext cx="420624" cy="420624"/>
           </a:xfrm>
           <a:prstGeom prst="roundRect">
@@ -14858,7 +14906,7 @@
             </a:avLst>
           </a:prstGeom>
           <a:solidFill>
-            <a:srgbClr val="13294B"/>
+            <a:srgbClr val="9AA3AB"/>
           </a:solidFill>
           <a:ln/>
         </p:spPr>
@@ -14896,7 +14944,7 @@
         <p:spPr>
           <a:xfrm>
             <a:off x="1344168" y="1773936"/>
-            <a:ext cx="3044952" cy="841248"/>
+            <a:ext cx="3044952" cy="676656"/>
           </a:xfrm>
           <a:prstGeom prst="rect">
             <a:avLst/>
@@ -14917,13 +14965,13 @@
             <a:r>
               <a:rPr lang="en-US" sz="1400" dirty="0">
                 <a:solidFill>
-                  <a:srgbClr val="1F2A37"/>
-                </a:solidFill>
-                <a:latin typeface="Calibri" pitchFamily="34" charset="0"/>
-                <a:ea typeface="Calibri" pitchFamily="34" charset="-122"/>
-                <a:cs typeface="Calibri" pitchFamily="34" charset="-120"/>
-              </a:rPr>
-              <a:t>Cada extremo gera problemas que levam a correções no sentido oposto</a:t>
+                  <a:srgbClr val="5B6770"/>
+                </a:solidFill>
+                <a:latin typeface="Calibri" pitchFamily="34" charset="0"/>
+                <a:ea typeface="Calibri" pitchFamily="34" charset="-122"/>
+                <a:cs typeface="Calibri" pitchFamily="34" charset="-120"/>
+              </a:rPr>
+              <a:t>Produzir tudo internamente</a:t>
             </a:r>
             <a:endParaRPr lang="en-US" sz="1400" dirty="0"/>
           </a:p>
@@ -14938,11 +14986,126 @@
         <p:spPr>
           <a:xfrm>
             <a:off x="4663440" y="1737360"/>
-            <a:ext cx="3794760" cy="914400"/>
+            <a:ext cx="3794760" cy="749808"/>
           </a:xfrm>
           <a:prstGeom prst="roundRect">
             <a:avLst>
-              <a:gd name="adj" fmla="val 8000"/>
+              <a:gd name="adj" fmla="val 9756"/>
+            </a:avLst>
+          </a:prstGeom>
+          <a:solidFill>
+            <a:srgbClr val="E3F2E8"/>
+          </a:solidFill>
+          <a:ln w="25400">
+            <a:solidFill>
+              <a:srgbClr val="2E7D4F"/>
+            </a:solidFill>
+            <a:prstDash val="solid"/>
+          </a:ln>
+        </p:spPr>
+      </p:sp>
+      <p:sp>
+        <p:nvSpPr>
+          <p:cNvPr id="8" name="Text 6"/>
+          <p:cNvSpPr txBox="1"/>
+          <p:nvPr/>
+        </p:nvSpPr>
+        <p:spPr>
+          <a:xfrm>
+            <a:off x="4791456" y="1901952"/>
+            <a:ext cx="420624" cy="420624"/>
+          </a:xfrm>
+          <a:prstGeom prst="roundRect">
+            <a:avLst>
+              <a:gd name="adj" fmla="val 50000"/>
+            </a:avLst>
+          </a:prstGeom>
+          <a:solidFill>
+            <a:srgbClr val="2E7D4F"/>
+          </a:solidFill>
+          <a:ln/>
+        </p:spPr>
+        <p:txBody>
+          <a:bodyPr wrap="square" lIns="0" tIns="0" rIns="0" bIns="0" rtlCol="0" anchor="ctr"/>
+          <a:lstStyle/>
+          <a:p>
+            <a:pPr algn="ctr" indent="0" marL="0">
+              <a:lnSpc>
+                <a:spcPct val="100000"/>
+              </a:lnSpc>
+              <a:buNone/>
+            </a:pPr>
+            <a:r>
+              <a:rPr lang="en-US" sz="1600" b="1" dirty="0">
+                <a:solidFill>
+                  <a:srgbClr val="FFFFFF"/>
+                </a:solidFill>
+                <a:latin typeface="Calibri" pitchFamily="34" charset="0"/>
+                <a:ea typeface="Calibri" pitchFamily="34" charset="-122"/>
+                <a:cs typeface="Calibri" pitchFamily="34" charset="-120"/>
+              </a:rPr>
+              <a:t>b</a:t>
+            </a:r>
+            <a:endParaRPr lang="en-US" sz="1600" dirty="0"/>
+          </a:p>
+        </p:txBody>
+      </p:sp>
+      <p:sp>
+        <p:nvSpPr>
+          <p:cNvPr id="9" name="Text 7"/>
+          <p:cNvSpPr txBox="1"/>
+          <p:nvPr/>
+        </p:nvSpPr>
+        <p:spPr>
+          <a:xfrm>
+            <a:off x="5321808" y="1773936"/>
+            <a:ext cx="3044952" cy="676656"/>
+          </a:xfrm>
+          <a:prstGeom prst="rect">
+            <a:avLst/>
+          </a:prstGeom>
+          <a:noFill/>
+          <a:ln/>
+        </p:spPr>
+        <p:txBody>
+          <a:bodyPr wrap="square" lIns="25400" tIns="25400" rIns="25400" bIns="25400" rtlCol="0" anchor="ctr"/>
+          <a:lstStyle/>
+          <a:p>
+            <a:pPr algn="l" indent="0" marL="0">
+              <a:lnSpc>
+                <a:spcPct val="100000"/>
+              </a:lnSpc>
+              <a:buNone/>
+            </a:pPr>
+            <a:r>
+              <a:rPr lang="en-US" sz="1400" b="1" dirty="0">
+                <a:solidFill>
+                  <a:srgbClr val="1F2A37"/>
+                </a:solidFill>
+                <a:latin typeface="Calibri" pitchFamily="34" charset="0"/>
+                <a:ea typeface="Calibri" pitchFamily="34" charset="-122"/>
+                <a:cs typeface="Calibri" pitchFamily="34" charset="-120"/>
+              </a:rPr>
+              <a:t>Especializar-se no que produzem com menor custo relativo e trocar</a:t>
+            </a:r>
+            <a:endParaRPr lang="en-US" sz="1400" dirty="0"/>
+          </a:p>
+        </p:txBody>
+      </p:sp>
+      <p:sp>
+        <p:nvSpPr>
+          <p:cNvPr id="10" name="Shape 8"/>
+          <p:cNvSpPr/>
+          <p:nvPr/>
+        </p:nvSpPr>
+        <p:spPr>
+          <a:xfrm>
+            <a:off x="685800" y="2633472"/>
+            <a:ext cx="3794760" cy="749808"/>
+          </a:xfrm>
+          <a:prstGeom prst="roundRect">
+            <a:avLst>
+              <a:gd name="adj" fmla="val 9756"/>
             </a:avLst>
           </a:prstGeom>
           <a:solidFill>
@@ -14958,13 +15121,13 @@
       </p:sp>
       <p:sp>
         <p:nvSpPr>
-          <p:cNvPr id="8" name="Text 6"/>
-          <p:cNvSpPr txBox="1"/>
-          <p:nvPr/>
-        </p:nvSpPr>
-        <p:spPr>
-          <a:xfrm>
-            <a:off x="4791456" y="1984248"/>
+          <p:cNvPr id="11" name="Text 9"/>
+          <p:cNvSpPr txBox="1"/>
+          <p:nvPr/>
+        </p:nvSpPr>
+        <p:spPr>
+          <a:xfrm>
+            <a:off x="813816" y="2798064"/>
             <a:ext cx="420624" cy="420624"/>
           </a:xfrm>
           <a:prstGeom prst="roundRect">
@@ -14973,7 +15136,7 @@
             </a:avLst>
           </a:prstGeom>
           <a:solidFill>
-            <a:srgbClr val="13294B"/>
+            <a:srgbClr val="9AA3AB"/>
           </a:solidFill>
           <a:ln/>
         </p:spPr>
@@ -14996,7 +15159,7 @@
                 <a:ea typeface="Calibri" pitchFamily="34" charset="-122"/>
                 <a:cs typeface="Calibri" pitchFamily="34" charset="-120"/>
               </a:rPr>
-              <a:t>b</a:t>
+              <a:t>c</a:t>
             </a:r>
             <a:endParaRPr lang="en-US" sz="1600" dirty="0"/>
           </a:p>
@@ -15004,14 +15167,14 @@
       </p:sp>
       <p:sp>
         <p:nvSpPr>
-          <p:cNvPr id="9" name="Text 7"/>
-          <p:cNvSpPr txBox="1"/>
-          <p:nvPr/>
-        </p:nvSpPr>
-        <p:spPr>
-          <a:xfrm>
-            <a:off x="5321808" y="1773936"/>
-            <a:ext cx="3044952" cy="841248"/>
+          <p:cNvPr id="12" name="Text 10"/>
+          <p:cNvSpPr txBox="1"/>
+          <p:nvPr/>
+        </p:nvSpPr>
+        <p:spPr>
+          <a:xfrm>
+            <a:off x="1344168" y="2670048"/>
+            <a:ext cx="3044952" cy="676656"/>
           </a:xfrm>
           <a:prstGeom prst="rect">
             <a:avLst/>
@@ -15032,13 +15195,13 @@
             <a:r>
               <a:rPr lang="en-US" sz="1400" dirty="0">
                 <a:solidFill>
-                  <a:srgbClr val="1F2A37"/>
-                </a:solidFill>
-                <a:latin typeface="Calibri" pitchFamily="34" charset="0"/>
-                <a:ea typeface="Calibri" pitchFamily="34" charset="-122"/>
-                <a:cs typeface="Calibri" pitchFamily="34" charset="-120"/>
-              </a:rPr>
-              <a:t>O Estado sempre cresce</a:t>
+                  <a:srgbClr val="5B6770"/>
+                </a:solidFill>
+                <a:latin typeface="Calibri" pitchFamily="34" charset="0"/>
+                <a:ea typeface="Calibri" pitchFamily="34" charset="-122"/>
+                <a:cs typeface="Calibri" pitchFamily="34" charset="-120"/>
+              </a:rPr>
+              <a:t>Proibir importações</a:t>
             </a:r>
             <a:endParaRPr lang="en-US" sz="1400" dirty="0"/>
           </a:p>
@@ -15046,18 +15209,18 @@
       </p:sp>
       <p:sp>
         <p:nvSpPr>
-          <p:cNvPr id="10" name="Shape 8"/>
+          <p:cNvPr id="13" name="Shape 11"/>
           <p:cNvSpPr/>
           <p:nvPr/>
         </p:nvSpPr>
         <p:spPr>
           <a:xfrm>
-            <a:off x="685800" y="2798064"/>
-            <a:ext cx="3794760" cy="914400"/>
+            <a:off x="4663440" y="2633472"/>
+            <a:ext cx="3794760" cy="749808"/>
           </a:xfrm>
           <a:prstGeom prst="roundRect">
             <a:avLst>
-              <a:gd name="adj" fmla="val 8000"/>
+              <a:gd name="adj" fmla="val 9756"/>
             </a:avLst>
           </a:prstGeom>
           <a:solidFill>
@@ -15073,13 +15236,13 @@
       </p:sp>
       <p:sp>
         <p:nvSpPr>
-          <p:cNvPr id="11" name="Text 9"/>
-          <p:cNvSpPr txBox="1"/>
-          <p:nvPr/>
-        </p:nvSpPr>
-        <p:spPr>
-          <a:xfrm>
-            <a:off x="813816" y="3044952"/>
+          <p:cNvPr id="14" name="Text 12"/>
+          <p:cNvSpPr txBox="1"/>
+          <p:nvPr/>
+        </p:nvSpPr>
+        <p:spPr>
+          <a:xfrm>
+            <a:off x="4791456" y="2798064"/>
             <a:ext cx="420624" cy="420624"/>
           </a:xfrm>
           <a:prstGeom prst="roundRect">
@@ -15088,7 +15251,7 @@
             </a:avLst>
           </a:prstGeom>
           <a:solidFill>
-            <a:srgbClr val="13294B"/>
+            <a:srgbClr val="9AA3AB"/>
           </a:solidFill>
           <a:ln/>
         </p:spPr>
@@ -15111,7 +15274,7 @@
                 <a:ea typeface="Calibri" pitchFamily="34" charset="-122"/>
                 <a:cs typeface="Calibri" pitchFamily="34" charset="-120"/>
               </a:rPr>
-              <a:t>c</a:t>
+              <a:t>d</a:t>
             </a:r>
             <a:endParaRPr lang="en-US" sz="1600" dirty="0"/>
           </a:p>
@@ -15119,14 +15282,14 @@
       </p:sp>
       <p:sp>
         <p:nvSpPr>
-          <p:cNvPr id="12" name="Text 10"/>
-          <p:cNvSpPr txBox="1"/>
-          <p:nvPr/>
-        </p:nvSpPr>
-        <p:spPr>
-          <a:xfrm>
-            <a:off x="1344168" y="2834640"/>
-            <a:ext cx="3044952" cy="841248"/>
+          <p:cNvPr id="15" name="Text 13"/>
+          <p:cNvSpPr txBox="1"/>
+          <p:nvPr/>
+        </p:nvSpPr>
+        <p:spPr>
+          <a:xfrm>
+            <a:off x="5321808" y="2670048"/>
+            <a:ext cx="3044952" cy="676656"/>
           </a:xfrm>
           <a:prstGeom prst="rect">
             <a:avLst/>
@@ -15147,13 +15310,13 @@
             <a:r>
               <a:rPr lang="en-US" sz="1400" dirty="0">
                 <a:solidFill>
-                  <a:srgbClr val="1F2A37"/>
-                </a:solidFill>
-                <a:latin typeface="Calibri" pitchFamily="34" charset="0"/>
-                <a:ea typeface="Calibri" pitchFamily="34" charset="-122"/>
-                <a:cs typeface="Calibri" pitchFamily="34" charset="-120"/>
-              </a:rPr>
-              <a:t>O mercado sempre vence no longo prazo</a:t>
+                  <a:srgbClr val="5B6770"/>
+                </a:solidFill>
+                <a:latin typeface="Calibri" pitchFamily="34" charset="0"/>
+                <a:ea typeface="Calibri" pitchFamily="34" charset="-122"/>
+                <a:cs typeface="Calibri" pitchFamily="34" charset="-120"/>
+              </a:rPr>
+              <a:t>Acumular ouro e prata</a:t>
             </a:r>
             <a:endParaRPr lang="en-US" sz="1400" dirty="0"/>
           </a:p>
@@ -15161,96 +15324,27 @@
       </p:sp>
       <p:sp>
         <p:nvSpPr>
-          <p:cNvPr id="13" name="Shape 11"/>
-          <p:cNvSpPr/>
-          <p:nvPr/>
-        </p:nvSpPr>
-        <p:spPr>
-          <a:xfrm>
-            <a:off x="4663440" y="2798064"/>
-            <a:ext cx="3794760" cy="914400"/>
+          <p:cNvPr id="16" name="Text 14"/>
+          <p:cNvSpPr txBox="1"/>
+          <p:nvPr/>
+        </p:nvSpPr>
+        <p:spPr>
+          <a:xfrm>
+            <a:off x="685800" y="3566160"/>
+            <a:ext cx="7772400" cy="841248"/>
           </a:xfrm>
           <a:prstGeom prst="roundRect">
             <a:avLst>
-              <a:gd name="adj" fmla="val 8000"/>
+              <a:gd name="adj" fmla="val 8696"/>
             </a:avLst>
           </a:prstGeom>
           <a:solidFill>
-            <a:srgbClr val="FFFFFF"/>
+            <a:srgbClr val="E6F2F0"/>
           </a:solidFill>
-          <a:ln w="12700">
-            <a:solidFill>
-              <a:srgbClr val="DCD5C1"/>
-            </a:solidFill>
-            <a:prstDash val="solid"/>
-          </a:ln>
-        </p:spPr>
-      </p:sp>
-      <p:sp>
-        <p:nvSpPr>
-          <p:cNvPr id="14" name="Text 12"/>
-          <p:cNvSpPr txBox="1"/>
-          <p:nvPr/>
-        </p:nvSpPr>
-        <p:spPr>
-          <a:xfrm>
-            <a:off x="4791456" y="3044952"/>
-            <a:ext cx="420624" cy="420624"/>
-          </a:xfrm>
-          <a:prstGeom prst="roundRect">
-            <a:avLst>
-              <a:gd name="adj" fmla="val 50000"/>
-            </a:avLst>
-          </a:prstGeom>
-          <a:solidFill>
-            <a:srgbClr val="13294B"/>
-          </a:solidFill>
-          <a:ln/>
-        </p:spPr>
-        <p:txBody>
-          <a:bodyPr wrap="square" lIns="0" tIns="0" rIns="0" bIns="0" rtlCol="0" anchor="ctr"/>
-          <a:lstStyle/>
-          <a:p>
-            <a:pPr algn="ctr" indent="0" marL="0">
-              <a:lnSpc>
-                <a:spcPct val="100000"/>
-              </a:lnSpc>
-              <a:buNone/>
-            </a:pPr>
-            <a:r>
-              <a:rPr lang="en-US" sz="1600" b="1" dirty="0">
-                <a:solidFill>
-                  <a:srgbClr val="FFFFFF"/>
-                </a:solidFill>
-                <a:latin typeface="Calibri" pitchFamily="34" charset="0"/>
-                <a:ea typeface="Calibri" pitchFamily="34" charset="-122"/>
-                <a:cs typeface="Calibri" pitchFamily="34" charset="-120"/>
-              </a:rPr>
-              <a:t>d</a:t>
-            </a:r>
-            <a:endParaRPr lang="en-US" sz="1600" dirty="0"/>
-          </a:p>
-        </p:txBody>
-      </p:sp>
-      <p:sp>
-        <p:nvSpPr>
-          <p:cNvPr id="15" name="Text 13"/>
-          <p:cNvSpPr txBox="1"/>
-          <p:nvPr/>
-        </p:nvSpPr>
-        <p:spPr>
-          <a:xfrm>
-            <a:off x="5321808" y="2834640"/>
-            <a:ext cx="3044952" cy="841248"/>
-          </a:xfrm>
-          <a:prstGeom prst="rect">
-            <a:avLst/>
-          </a:prstGeom>
-          <a:noFill/>
-          <a:ln/>
-        </p:spPr>
-        <p:txBody>
-          <a:bodyPr wrap="square" lIns="25400" tIns="25400" rIns="25400" bIns="25400" rtlCol="0" anchor="ctr"/>
+          <a:ln/>
+        </p:spPr>
+        <p:txBody>
+          <a:bodyPr wrap="square" lIns="114300" tIns="114300" rIns="114300" bIns="114300" rtlCol="0" anchor="ctr"/>
           <a:lstStyle/>
           <a:p>
             <a:pPr algn="l" indent="0" marL="0">
@@ -15260,7 +15354,24 @@
               <a:buNone/>
             </a:pPr>
             <a:r>
-              <a:rPr lang="en-US" sz="1400" dirty="0">
+              <a:rPr lang="en-US" sz="1350" b="1" dirty="0">
+                <a:solidFill>
+                  <a:srgbClr val="2E7D4F"/>
+                </a:solidFill>
+                <a:latin typeface="Calibri" pitchFamily="34" charset="0"/>
+                <a:ea typeface="Calibri" pitchFamily="34" charset="-122"/>
+                <a:cs typeface="Calibri" pitchFamily="34" charset="-120"/>
+              </a:rPr>
+              <a:t>Resposta: b) </a:t>
+            </a:r>
+            <a:pPr algn="l" indent="0" marL="0">
+              <a:lnSpc>
+                <a:spcPct val="100000"/>
+              </a:lnSpc>
+              <a:buNone/>
+            </a:pPr>
+            <a:r>
+              <a:rPr lang="en-US" sz="1350" dirty="0">
                 <a:solidFill>
                   <a:srgbClr val="1F2A37"/>
                 </a:solidFill>
@@ -15268,15 +15379,15 @@
                 <a:ea typeface="Calibri" pitchFamily="34" charset="-122"/>
                 <a:cs typeface="Calibri" pitchFamily="34" charset="-120"/>
               </a:rPr>
-              <a:t>Depende apenas do resultado das eleições</a:t>
-            </a:r>
-            <a:endParaRPr lang="en-US" sz="1400" dirty="0"/>
-          </a:p>
-        </p:txBody>
-      </p:sp>
-      <p:sp>
-        <p:nvSpPr>
-          <p:cNvPr id="16" name="Text 14"/>
+              <a:t>A especialização e o livre comércio aumentam a produção total e beneficiam os países que trocam.</a:t>
+            </a:r>
+            <a:endParaRPr lang="en-US" sz="1350" dirty="0"/>
+          </a:p>
+        </p:txBody>
+      </p:sp>
+      <p:sp>
+        <p:nvSpPr>
+          <p:cNvPr id="17" name="Text 15"/>
           <p:cNvSpPr txBox="1"/>
           <p:nvPr/>
         </p:nvSpPr>
@@ -15327,6 +15438,631 @@
 <file path=ppt/slides/slide28.xml><?xml version="1.0" encoding="utf-8"?>
 <p:sld xmlns:a="http://schemas.openxmlformats.org/drawingml/2006/main" xmlns:r="http://schemas.openxmlformats.org/officeDocument/2006/relationships" xmlns:p="http://schemas.openxmlformats.org/presentationml/2006/main">
   <p:cSld name="Slide 28">
+    <p:bg>
+      <p:bgPr>
+        <a:blipFill dpi="0" rotWithShape="1">
+          <a:blip r:embed="rId1">
+            <a:lum/>
+          </a:blip>
+          <a:srcRect/>
+          <a:stretch>
+            <a:fillRect/>
+          </a:stretch>
+        </a:blipFill>
+        <a:effectLst/>
+      </p:bgPr>
+    </p:bg>
+    <p:spTree>
+      <p:nvGrpSpPr>
+        <p:cNvPr id="1" name=""/>
+        <p:cNvGrpSpPr/>
+        <p:nvPr/>
+      </p:nvGrpSpPr>
+      <p:grpSpPr>
+        <a:xfrm>
+          <a:off x="0" y="0"/>
+          <a:ext cx="0" cy="0"/>
+          <a:chOff x="0" y="0"/>
+          <a:chExt cx="0" cy="0"/>
+        </a:xfrm>
+      </p:grpSpPr>
+      <p:sp>
+        <p:nvSpPr>
+          <p:cNvPr id="2" name="Text 0"/>
+          <p:cNvSpPr txBox="1"/>
+          <p:nvPr/>
+        </p:nvSpPr>
+        <p:spPr>
+          <a:xfrm>
+            <a:off x="731520" y="274320"/>
+            <a:ext cx="7680960" cy="365760"/>
+          </a:xfrm>
+          <a:prstGeom prst="rect">
+            <a:avLst/>
+          </a:prstGeom>
+          <a:noFill/>
+          <a:ln/>
+        </p:spPr>
+        <p:txBody>
+          <a:bodyPr wrap="square" lIns="0" tIns="0" rIns="0" bIns="0" rtlCol="0" anchor="ctr"/>
+          <a:lstStyle/>
+          <a:p>
+            <a:pPr algn="ctr" indent="0" marL="0">
+              <a:lnSpc>
+                <a:spcPct val="100000"/>
+              </a:lnSpc>
+              <a:buNone/>
+            </a:pPr>
+            <a:r>
+              <a:rPr lang="en-US" sz="1250" b="1" dirty="0">
+                <a:solidFill>
+                  <a:srgbClr val="2A8C85"/>
+                </a:solidFill>
+                <a:latin typeface="Calibri" pitchFamily="34" charset="0"/>
+                <a:ea typeface="Calibri" pitchFamily="34" charset="-122"/>
+                <a:cs typeface="Calibri" pitchFamily="34" charset="-120"/>
+              </a:rPr>
+              <a:t>QUIZ DA UNIDADE 2 · PERGUNTA 5 DE 5</a:t>
+            </a:r>
+            <a:endParaRPr lang="en-US" sz="1250" dirty="0"/>
+          </a:p>
+        </p:txBody>
+      </p:sp>
+      <p:sp>
+        <p:nvSpPr>
+          <p:cNvPr id="3" name="Text 1"/>
+          <p:cNvSpPr txBox="1"/>
+          <p:nvPr/>
+        </p:nvSpPr>
+        <p:spPr>
+          <a:xfrm>
+            <a:off x="731520" y="658368"/>
+            <a:ext cx="7680960" cy="960120"/>
+          </a:xfrm>
+          <a:prstGeom prst="rect">
+            <a:avLst/>
+          </a:prstGeom>
+          <a:noFill/>
+          <a:ln/>
+        </p:spPr>
+        <p:txBody>
+          <a:bodyPr wrap="square" lIns="0" tIns="0" rIns="0" bIns="0" rtlCol="0" anchor="ctr"/>
+          <a:lstStyle/>
+          <a:p>
+            <a:pPr algn="ctr" indent="0" marL="0">
+              <a:lnSpc>
+                <a:spcPct val="100000"/>
+              </a:lnSpc>
+              <a:buNone/>
+            </a:pPr>
+            <a:r>
+              <a:rPr lang="en-US" sz="1900" b="1" dirty="0">
+                <a:solidFill>
+                  <a:srgbClr val="13294B"/>
+                </a:solidFill>
+                <a:latin typeface="Calibri" pitchFamily="34" charset="0"/>
+                <a:ea typeface="Calibri" pitchFamily="34" charset="-122"/>
+                <a:cs typeface="Calibri" pitchFamily="34" charset="-120"/>
+              </a:rPr>
+              <a:t>Por que o pêndulo entre Estado e mercado se move?</a:t>
+            </a:r>
+            <a:endParaRPr lang="en-US" sz="1900" dirty="0"/>
+          </a:p>
+        </p:txBody>
+      </p:sp>
+      <p:sp>
+        <p:nvSpPr>
+          <p:cNvPr id="4" name="Shape 2"/>
+          <p:cNvSpPr/>
+          <p:nvPr/>
+        </p:nvSpPr>
+        <p:spPr>
+          <a:xfrm>
+            <a:off x="685800" y="1737360"/>
+            <a:ext cx="3794760" cy="914400"/>
+          </a:xfrm>
+          <a:prstGeom prst="roundRect">
+            <a:avLst>
+              <a:gd name="adj" fmla="val 8000"/>
+            </a:avLst>
+          </a:prstGeom>
+          <a:solidFill>
+            <a:srgbClr val="FFFFFF"/>
+          </a:solidFill>
+          <a:ln w="12700">
+            <a:solidFill>
+              <a:srgbClr val="DCD5C1"/>
+            </a:solidFill>
+            <a:prstDash val="solid"/>
+          </a:ln>
+        </p:spPr>
+      </p:sp>
+      <p:sp>
+        <p:nvSpPr>
+          <p:cNvPr id="5" name="Text 3"/>
+          <p:cNvSpPr txBox="1"/>
+          <p:nvPr/>
+        </p:nvSpPr>
+        <p:spPr>
+          <a:xfrm>
+            <a:off x="813816" y="1984248"/>
+            <a:ext cx="420624" cy="420624"/>
+          </a:xfrm>
+          <a:prstGeom prst="roundRect">
+            <a:avLst>
+              <a:gd name="adj" fmla="val 50000"/>
+            </a:avLst>
+          </a:prstGeom>
+          <a:solidFill>
+            <a:srgbClr val="13294B"/>
+          </a:solidFill>
+          <a:ln/>
+        </p:spPr>
+        <p:txBody>
+          <a:bodyPr wrap="square" lIns="0" tIns="0" rIns="0" bIns="0" rtlCol="0" anchor="ctr"/>
+          <a:lstStyle/>
+          <a:p>
+            <a:pPr algn="ctr" indent="0" marL="0">
+              <a:lnSpc>
+                <a:spcPct val="100000"/>
+              </a:lnSpc>
+              <a:buNone/>
+            </a:pPr>
+            <a:r>
+              <a:rPr lang="en-US" sz="1600" b="1" dirty="0">
+                <a:solidFill>
+                  <a:srgbClr val="FFFFFF"/>
+                </a:solidFill>
+                <a:latin typeface="Calibri" pitchFamily="34" charset="0"/>
+                <a:ea typeface="Calibri" pitchFamily="34" charset="-122"/>
+                <a:cs typeface="Calibri" pitchFamily="34" charset="-120"/>
+              </a:rPr>
+              <a:t>a</a:t>
+            </a:r>
+            <a:endParaRPr lang="en-US" sz="1600" dirty="0"/>
+          </a:p>
+        </p:txBody>
+      </p:sp>
+      <p:sp>
+        <p:nvSpPr>
+          <p:cNvPr id="6" name="Text 4"/>
+          <p:cNvSpPr txBox="1"/>
+          <p:nvPr/>
+        </p:nvSpPr>
+        <p:spPr>
+          <a:xfrm>
+            <a:off x="1344168" y="1773936"/>
+            <a:ext cx="3044952" cy="841248"/>
+          </a:xfrm>
+          <a:prstGeom prst="rect">
+            <a:avLst/>
+          </a:prstGeom>
+          <a:noFill/>
+          <a:ln/>
+        </p:spPr>
+        <p:txBody>
+          <a:bodyPr wrap="square" lIns="25400" tIns="25400" rIns="25400" bIns="25400" rtlCol="0" anchor="ctr"/>
+          <a:lstStyle/>
+          <a:p>
+            <a:pPr algn="l" indent="0" marL="0">
+              <a:lnSpc>
+                <a:spcPct val="100000"/>
+              </a:lnSpc>
+              <a:buNone/>
+            </a:pPr>
+            <a:r>
+              <a:rPr lang="en-US" sz="1400" dirty="0">
+                <a:solidFill>
+                  <a:srgbClr val="1F2A37"/>
+                </a:solidFill>
+                <a:latin typeface="Calibri" pitchFamily="34" charset="0"/>
+                <a:ea typeface="Calibri" pitchFamily="34" charset="-122"/>
+                <a:cs typeface="Calibri" pitchFamily="34" charset="-120"/>
+              </a:rPr>
+              <a:t>Cada extremo gera problemas que levam a correções no sentido oposto</a:t>
+            </a:r>
+            <a:endParaRPr lang="en-US" sz="1400" dirty="0"/>
+          </a:p>
+        </p:txBody>
+      </p:sp>
+      <p:sp>
+        <p:nvSpPr>
+          <p:cNvPr id="7" name="Shape 5"/>
+          <p:cNvSpPr/>
+          <p:nvPr/>
+        </p:nvSpPr>
+        <p:spPr>
+          <a:xfrm>
+            <a:off x="4663440" y="1737360"/>
+            <a:ext cx="3794760" cy="914400"/>
+          </a:xfrm>
+          <a:prstGeom prst="roundRect">
+            <a:avLst>
+              <a:gd name="adj" fmla="val 8000"/>
+            </a:avLst>
+          </a:prstGeom>
+          <a:solidFill>
+            <a:srgbClr val="FFFFFF"/>
+          </a:solidFill>
+          <a:ln w="12700">
+            <a:solidFill>
+              <a:srgbClr val="DCD5C1"/>
+            </a:solidFill>
+            <a:prstDash val="solid"/>
+          </a:ln>
+        </p:spPr>
+      </p:sp>
+      <p:sp>
+        <p:nvSpPr>
+          <p:cNvPr id="8" name="Text 6"/>
+          <p:cNvSpPr txBox="1"/>
+          <p:nvPr/>
+        </p:nvSpPr>
+        <p:spPr>
+          <a:xfrm>
+            <a:off x="4791456" y="1984248"/>
+            <a:ext cx="420624" cy="420624"/>
+          </a:xfrm>
+          <a:prstGeom prst="roundRect">
+            <a:avLst>
+              <a:gd name="adj" fmla="val 50000"/>
+            </a:avLst>
+          </a:prstGeom>
+          <a:solidFill>
+            <a:srgbClr val="13294B"/>
+          </a:solidFill>
+          <a:ln/>
+        </p:spPr>
+        <p:txBody>
+          <a:bodyPr wrap="square" lIns="0" tIns="0" rIns="0" bIns="0" rtlCol="0" anchor="ctr"/>
+          <a:lstStyle/>
+          <a:p>
+            <a:pPr algn="ctr" indent="0" marL="0">
+              <a:lnSpc>
+                <a:spcPct val="100000"/>
+              </a:lnSpc>
+              <a:buNone/>
+            </a:pPr>
+            <a:r>
+              <a:rPr lang="en-US" sz="1600" b="1" dirty="0">
+                <a:solidFill>
+                  <a:srgbClr val="FFFFFF"/>
+                </a:solidFill>
+                <a:latin typeface="Calibri" pitchFamily="34" charset="0"/>
+                <a:ea typeface="Calibri" pitchFamily="34" charset="-122"/>
+                <a:cs typeface="Calibri" pitchFamily="34" charset="-120"/>
+              </a:rPr>
+              <a:t>b</a:t>
+            </a:r>
+            <a:endParaRPr lang="en-US" sz="1600" dirty="0"/>
+          </a:p>
+        </p:txBody>
+      </p:sp>
+      <p:sp>
+        <p:nvSpPr>
+          <p:cNvPr id="9" name="Text 7"/>
+          <p:cNvSpPr txBox="1"/>
+          <p:nvPr/>
+        </p:nvSpPr>
+        <p:spPr>
+          <a:xfrm>
+            <a:off x="5321808" y="1773936"/>
+            <a:ext cx="3044952" cy="841248"/>
+          </a:xfrm>
+          <a:prstGeom prst="rect">
+            <a:avLst/>
+          </a:prstGeom>
+          <a:noFill/>
+          <a:ln/>
+        </p:spPr>
+        <p:txBody>
+          <a:bodyPr wrap="square" lIns="25400" tIns="25400" rIns="25400" bIns="25400" rtlCol="0" anchor="ctr"/>
+          <a:lstStyle/>
+          <a:p>
+            <a:pPr algn="l" indent="0" marL="0">
+              <a:lnSpc>
+                <a:spcPct val="100000"/>
+              </a:lnSpc>
+              <a:buNone/>
+            </a:pPr>
+            <a:r>
+              <a:rPr lang="en-US" sz="1400" dirty="0">
+                <a:solidFill>
+                  <a:srgbClr val="1F2A37"/>
+                </a:solidFill>
+                <a:latin typeface="Calibri" pitchFamily="34" charset="0"/>
+                <a:ea typeface="Calibri" pitchFamily="34" charset="-122"/>
+                <a:cs typeface="Calibri" pitchFamily="34" charset="-120"/>
+              </a:rPr>
+              <a:t>O Estado sempre cresce</a:t>
+            </a:r>
+            <a:endParaRPr lang="en-US" sz="1400" dirty="0"/>
+          </a:p>
+        </p:txBody>
+      </p:sp>
+      <p:sp>
+        <p:nvSpPr>
+          <p:cNvPr id="10" name="Shape 8"/>
+          <p:cNvSpPr/>
+          <p:nvPr/>
+        </p:nvSpPr>
+        <p:spPr>
+          <a:xfrm>
+            <a:off x="685800" y="2798064"/>
+            <a:ext cx="3794760" cy="914400"/>
+          </a:xfrm>
+          <a:prstGeom prst="roundRect">
+            <a:avLst>
+              <a:gd name="adj" fmla="val 8000"/>
+            </a:avLst>
+          </a:prstGeom>
+          <a:solidFill>
+            <a:srgbClr val="FFFFFF"/>
+          </a:solidFill>
+          <a:ln w="12700">
+            <a:solidFill>
+              <a:srgbClr val="DCD5C1"/>
+            </a:solidFill>
+            <a:prstDash val="solid"/>
+          </a:ln>
+        </p:spPr>
+      </p:sp>
+      <p:sp>
+        <p:nvSpPr>
+          <p:cNvPr id="11" name="Text 9"/>
+          <p:cNvSpPr txBox="1"/>
+          <p:nvPr/>
+        </p:nvSpPr>
+        <p:spPr>
+          <a:xfrm>
+            <a:off x="813816" y="3044952"/>
+            <a:ext cx="420624" cy="420624"/>
+          </a:xfrm>
+          <a:prstGeom prst="roundRect">
+            <a:avLst>
+              <a:gd name="adj" fmla="val 50000"/>
+            </a:avLst>
+          </a:prstGeom>
+          <a:solidFill>
+            <a:srgbClr val="13294B"/>
+          </a:solidFill>
+          <a:ln/>
+        </p:spPr>
+        <p:txBody>
+          <a:bodyPr wrap="square" lIns="0" tIns="0" rIns="0" bIns="0" rtlCol="0" anchor="ctr"/>
+          <a:lstStyle/>
+          <a:p>
+            <a:pPr algn="ctr" indent="0" marL="0">
+              <a:lnSpc>
+                <a:spcPct val="100000"/>
+              </a:lnSpc>
+              <a:buNone/>
+            </a:pPr>
+            <a:r>
+              <a:rPr lang="en-US" sz="1600" b="1" dirty="0">
+                <a:solidFill>
+                  <a:srgbClr val="FFFFFF"/>
+                </a:solidFill>
+                <a:latin typeface="Calibri" pitchFamily="34" charset="0"/>
+                <a:ea typeface="Calibri" pitchFamily="34" charset="-122"/>
+                <a:cs typeface="Calibri" pitchFamily="34" charset="-120"/>
+              </a:rPr>
+              <a:t>c</a:t>
+            </a:r>
+            <a:endParaRPr lang="en-US" sz="1600" dirty="0"/>
+          </a:p>
+        </p:txBody>
+      </p:sp>
+      <p:sp>
+        <p:nvSpPr>
+          <p:cNvPr id="12" name="Text 10"/>
+          <p:cNvSpPr txBox="1"/>
+          <p:nvPr/>
+        </p:nvSpPr>
+        <p:spPr>
+          <a:xfrm>
+            <a:off x="1344168" y="2834640"/>
+            <a:ext cx="3044952" cy="841248"/>
+          </a:xfrm>
+          <a:prstGeom prst="rect">
+            <a:avLst/>
+          </a:prstGeom>
+          <a:noFill/>
+          <a:ln/>
+        </p:spPr>
+        <p:txBody>
+          <a:bodyPr wrap="square" lIns="25400" tIns="25400" rIns="25400" bIns="25400" rtlCol="0" anchor="ctr"/>
+          <a:lstStyle/>
+          <a:p>
+            <a:pPr algn="l" indent="0" marL="0">
+              <a:lnSpc>
+                <a:spcPct val="100000"/>
+              </a:lnSpc>
+              <a:buNone/>
+            </a:pPr>
+            <a:r>
+              <a:rPr lang="en-US" sz="1400" dirty="0">
+                <a:solidFill>
+                  <a:srgbClr val="1F2A37"/>
+                </a:solidFill>
+                <a:latin typeface="Calibri" pitchFamily="34" charset="0"/>
+                <a:ea typeface="Calibri" pitchFamily="34" charset="-122"/>
+                <a:cs typeface="Calibri" pitchFamily="34" charset="-120"/>
+              </a:rPr>
+              <a:t>O mercado sempre vence no longo prazo</a:t>
+            </a:r>
+            <a:endParaRPr lang="en-US" sz="1400" dirty="0"/>
+          </a:p>
+        </p:txBody>
+      </p:sp>
+      <p:sp>
+        <p:nvSpPr>
+          <p:cNvPr id="13" name="Shape 11"/>
+          <p:cNvSpPr/>
+          <p:nvPr/>
+        </p:nvSpPr>
+        <p:spPr>
+          <a:xfrm>
+            <a:off x="4663440" y="2798064"/>
+            <a:ext cx="3794760" cy="914400"/>
+          </a:xfrm>
+          <a:prstGeom prst="roundRect">
+            <a:avLst>
+              <a:gd name="adj" fmla="val 8000"/>
+            </a:avLst>
+          </a:prstGeom>
+          <a:solidFill>
+            <a:srgbClr val="FFFFFF"/>
+          </a:solidFill>
+          <a:ln w="12700">
+            <a:solidFill>
+              <a:srgbClr val="DCD5C1"/>
+            </a:solidFill>
+            <a:prstDash val="solid"/>
+          </a:ln>
+        </p:spPr>
+      </p:sp>
+      <p:sp>
+        <p:nvSpPr>
+          <p:cNvPr id="14" name="Text 12"/>
+          <p:cNvSpPr txBox="1"/>
+          <p:nvPr/>
+        </p:nvSpPr>
+        <p:spPr>
+          <a:xfrm>
+            <a:off x="4791456" y="3044952"/>
+            <a:ext cx="420624" cy="420624"/>
+          </a:xfrm>
+          <a:prstGeom prst="roundRect">
+            <a:avLst>
+              <a:gd name="adj" fmla="val 50000"/>
+            </a:avLst>
+          </a:prstGeom>
+          <a:solidFill>
+            <a:srgbClr val="13294B"/>
+          </a:solidFill>
+          <a:ln/>
+        </p:spPr>
+        <p:txBody>
+          <a:bodyPr wrap="square" lIns="0" tIns="0" rIns="0" bIns="0" rtlCol="0" anchor="ctr"/>
+          <a:lstStyle/>
+          <a:p>
+            <a:pPr algn="ctr" indent="0" marL="0">
+              <a:lnSpc>
+                <a:spcPct val="100000"/>
+              </a:lnSpc>
+              <a:buNone/>
+            </a:pPr>
+            <a:r>
+              <a:rPr lang="en-US" sz="1600" b="1" dirty="0">
+                <a:solidFill>
+                  <a:srgbClr val="FFFFFF"/>
+                </a:solidFill>
+                <a:latin typeface="Calibri" pitchFamily="34" charset="0"/>
+                <a:ea typeface="Calibri" pitchFamily="34" charset="-122"/>
+                <a:cs typeface="Calibri" pitchFamily="34" charset="-120"/>
+              </a:rPr>
+              <a:t>d</a:t>
+            </a:r>
+            <a:endParaRPr lang="en-US" sz="1600" dirty="0"/>
+          </a:p>
+        </p:txBody>
+      </p:sp>
+      <p:sp>
+        <p:nvSpPr>
+          <p:cNvPr id="15" name="Text 13"/>
+          <p:cNvSpPr txBox="1"/>
+          <p:nvPr/>
+        </p:nvSpPr>
+        <p:spPr>
+          <a:xfrm>
+            <a:off x="5321808" y="2834640"/>
+            <a:ext cx="3044952" cy="841248"/>
+          </a:xfrm>
+          <a:prstGeom prst="rect">
+            <a:avLst/>
+          </a:prstGeom>
+          <a:noFill/>
+          <a:ln/>
+        </p:spPr>
+        <p:txBody>
+          <a:bodyPr wrap="square" lIns="25400" tIns="25400" rIns="25400" bIns="25400" rtlCol="0" anchor="ctr"/>
+          <a:lstStyle/>
+          <a:p>
+            <a:pPr algn="l" indent="0" marL="0">
+              <a:lnSpc>
+                <a:spcPct val="100000"/>
+              </a:lnSpc>
+              <a:buNone/>
+            </a:pPr>
+            <a:r>
+              <a:rPr lang="en-US" sz="1400" dirty="0">
+                <a:solidFill>
+                  <a:srgbClr val="1F2A37"/>
+                </a:solidFill>
+                <a:latin typeface="Calibri" pitchFamily="34" charset="0"/>
+                <a:ea typeface="Calibri" pitchFamily="34" charset="-122"/>
+                <a:cs typeface="Calibri" pitchFamily="34" charset="-120"/>
+              </a:rPr>
+              <a:t>Depende apenas do resultado das eleições</a:t>
+            </a:r>
+            <a:endParaRPr lang="en-US" sz="1400" dirty="0"/>
+          </a:p>
+        </p:txBody>
+      </p:sp>
+      <p:sp>
+        <p:nvSpPr>
+          <p:cNvPr id="16" name="Text 14"/>
+          <p:cNvSpPr txBox="1"/>
+          <p:nvPr/>
+        </p:nvSpPr>
+        <p:spPr>
+          <a:xfrm>
+            <a:off x="4206240" y="36576"/>
+            <a:ext cx="4800600" cy="219456"/>
+          </a:xfrm>
+          <a:prstGeom prst="rect">
+            <a:avLst/>
+          </a:prstGeom>
+          <a:noFill/>
+          <a:ln/>
+        </p:spPr>
+        <p:txBody>
+          <a:bodyPr wrap="square" lIns="0" tIns="0" rIns="0" bIns="0" rtlCol="0" anchor="ctr"/>
+          <a:lstStyle/>
+          <a:p>
+            <a:pPr algn="r" indent="0" marL="0">
+              <a:lnSpc>
+                <a:spcPct val="100000"/>
+              </a:lnSpc>
+              <a:buNone/>
+            </a:pPr>
+            <a:r>
+              <a:rPr lang="en-US" sz="950" dirty="0">
+                <a:solidFill>
+                  <a:srgbClr val="5B6770"/>
+                </a:solidFill>
+                <a:latin typeface="Calibri" pitchFamily="34" charset="0"/>
+                <a:ea typeface="Calibri" pitchFamily="34" charset="-122"/>
+                <a:cs typeface="Calibri" pitchFamily="34" charset="-120"/>
+              </a:rPr>
+              <a:t>Estado, Governo e Mercado · Unidade 2</a:t>
+            </a:r>
+            <a:endParaRPr lang="en-US" sz="950" dirty="0"/>
+          </a:p>
+        </p:txBody>
+      </p:sp>
+    </p:spTree>
+  </p:cSld>
+  <p:clrMapOvr>
+    <a:masterClrMapping/>
+  </p:clrMapOvr>
+</p:sld>
+</file>
+
+<file path=ppt/slides/slide29.xml><?xml version="1.0" encoding="utf-8"?>
+<p:sld xmlns:a="http://schemas.openxmlformats.org/drawingml/2006/main" xmlns:r="http://schemas.openxmlformats.org/officeDocument/2006/relationships" xmlns:p="http://schemas.openxmlformats.org/presentationml/2006/main">
+  <p:cSld name="Slide 29">
     <p:bg>
       <p:bgPr>
         <a:blipFill dpi="0" rotWithShape="1">

--- a/disciplina-01-estado-governo-mercado/materiais/02_Unidade_2_Pendulo_e_Matriz_Liberal.pptx
+++ b/disciplina-01-estado-governo-mercado/materiais/02_Unidade_2_Pendulo_e_Matriz_Liberal.pptx
@@ -764,7 +764,7 @@
           <a:p>
             <a:r>
               <a:rPr lang="en-US" dirty="0"/>
-              <a:t/>
+              <a:t>Olá, turma! Esta é a Unidade 2 de Estado, Governo e Mercado: a dinâmica pendular e a matriz liberal. Na unidade anterior, vimos por que o Estado atua na economia. Agora, vamos ver como essa atuação muda ao longo da história e conhecer os pensadores que fundaram o liberalismo.</a:t>
             </a:r>
             <a:endParaRPr lang="en-US" dirty="0"/>
           </a:p>
@@ -852,7 +852,7 @@
           <a:p>
             <a:r>
               <a:rPr lang="en-US" dirty="0"/>
-              <a:t/>
+              <a:t>Os contratualistas perguntam: por que os indivíduos criam o Estado? Thomas Hobbes, no Leviatã, de 1651, diz que no estado de natureza há uma guerra de todos contra todos; para ter segurança, os indivíduos entregam o poder a um soberano forte. John Locke, nos Dois Tratados sobre o Governo, de 1689, afirma que as pessoas têm direitos naturais, vida, liberdade e propriedade, e que o governo existe para protegê-los, com poder limitado. E Rousseau, no Contrato Social, de 1762, defende que a soberania pertence ao povo e se expressa na vontade geral. Destaque para Locke: ele é o fundador do liberalismo político, com a ideia de governo limitado e do direito de resistir à tirania.</a:t>
             </a:r>
             <a:endParaRPr lang="en-US" dirty="0"/>
           </a:p>
@@ -940,7 +940,7 @@
           <a:p>
             <a:r>
               <a:rPr lang="en-US" dirty="0"/>
-              <a:t/>
+              <a:t>Montesquieu, em O Espírito das Leis, de 1748, dá o passo seguinte: para que não se abuse do poder, é preciso que o poder freie o poder. Daí a separação em três: o Executivo governa e administra, o Legislativo faz as leis e fiscaliza, e o Judiciário julga conforme as leis. Essa ideia está viva na nossa Constituição. O artigo 2º diz: “São Poderes da União, independentes e harmônicos entre si, o Legislativo, o Executivo e o Judiciário.” No município, a Câmara fiscaliza o prefeito exatamente nessa lógica.</a:t>
             </a:r>
             <a:endParaRPr lang="en-US" dirty="0"/>
           </a:p>
@@ -1028,7 +1028,7 @@
           <a:p>
             <a:r>
               <a:rPr lang="en-US" dirty="0"/>
-              <a:t/>
+              <a:t>Chegamos a Adam Smith e A Riqueza das Nações, de 1776, obra fundadora da economia política. Para Smith, a riqueza vem do trabalho e da sua produtividade, e não do acúmulo de ouro, como pensavam os mercantilistas. A divisão do trabalho multiplica essa produtividade. A famosa mão invisível diz que o interesse próprio, coordenado pelos preços e pela concorrência, acaba promovendo o bem comum. E o exemplo clássico: não é da benevolência do açougueiro que esperamos o nosso jantar, mas do interesse dele no próprio ganho.</a:t>
             </a:r>
             <a:endParaRPr lang="en-US" dirty="0"/>
           </a:p>
@@ -1116,7 +1116,7 @@
           <a:p>
             <a:r>
               <a:rPr lang="en-US" dirty="0"/>
-              <a:t/>
+              <a:t>Este é o exemplo mais famoso de Smith: a fábrica de alfinetes. [Apontar para as barras.] Smith descreve uma pequena fábrica em que dez operários, cada um responsável por uma etapa, produziam cerca de 48 mil alfinetes por dia: 4.800 por trabalhador. Trabalhando sozinho, fazendo todas as etapas, cada um faria no máximo 20, talvez nem um. A diferença é enorme, e é daí que Smith conclui que a riqueza das nações nasce da produtividade do trabalho.</a:t>
             </a:r>
             <a:endParaRPr lang="en-US" dirty="0"/>
           </a:p>
@@ -1204,7 +1204,7 @@
           <a:p>
             <a:r>
               <a:rPr lang="en-US" dirty="0"/>
-              <a:t/>
+              <a:t>Qual é o papel do Estado para Smith? Ele o resume em três deveres do soberano. Primeiro, a defesa: proteger a sociedade contra agressões externas. Segundo, a justiça: proteger cada cidadão contra a injustiça de outros. Terceiro, as obras públicas: manter obras e instituições úteis à sociedade, mas que não dão lucro ao particular. Fora disso, vale o laissez-faire, laissez-passer. É o chamado Estado “guarda-noturno”.</a:t>
             </a:r>
             <a:endParaRPr lang="en-US" dirty="0"/>
           </a:p>
@@ -1292,7 +1292,7 @@
           <a:p>
             <a:r>
               <a:rPr lang="en-US" dirty="0"/>
-              <a:t/>
+              <a:t>O terceiro dever de Smith continua atual. Rodovias, saneamento e hospitais dependem do Estado, que pode agir de três formas. Pela execução direta: o governo licita e paga a obra com recursos do orçamento. Pela concessão, regulada pela Lei 8.987, de 1995: a empresa constrói ou opera o serviço e é remunerada por tarifas, como o pedágio. E pela parceria público-privada, a PPP, da Lei 11.079, de 2004, em que a remuneração combina tarifa e pagamento do poder público. Escolher entre elas é uma decisão típica do gestor público.</a:t>
             </a:r>
             <a:endParaRPr lang="en-US" dirty="0"/>
           </a:p>
@@ -1380,7 +1380,7 @@
           <a:p>
             <a:r>
               <a:rPr lang="en-US" dirty="0"/>
-              <a:t/>
+              <a:t>Dois outros clássicos completam a matriz liberal. David Ricardo, em 1817, formula a teoria das vantagens comparativas: se Portugal produz vinho e a Inglaterra produz tecidos com menor custo relativo, especializar-se e trocar faz os dois países ganharem. Daí a defesa do livre comércio. Jean-Baptiste Say formula a lei de Say: a oferta cria a sua própria procura, porque toda produção gera a renda necessária para comprá-la. Se isso fosse verdade, não haveria crise geral por falta de demanda. Guarde essa ideia: ela será criticada por Keynes em 1936, como veremos na Unidade 4.</a:t>
             </a:r>
             <a:endParaRPr lang="en-US" dirty="0"/>
           </a:p>
@@ -1468,7 +1468,7 @@
           <a:p>
             <a:r>
               <a:rPr lang="en-US" dirty="0"/>
-              <a:t/>
+              <a:t>Mas o Estado mínimo do século XIX teve limites claros. Jornadas de 14 a 16 horas, inclusive de crianças. Pobreza urbana, em cidades industriais sem saneamento nem moradia digna. E crises periódicas de superprodução e desemprego. Essas condições alimentam a crítica marxista e as reformas sociais do final do século XIX, tema da Unidade 3. É o pêndulo começando a se mover de novo.</a:t>
             </a:r>
             <a:endParaRPr lang="en-US" dirty="0"/>
           </a:p>
@@ -1556,7 +1556,7 @@
           <a:p>
             <a:r>
               <a:rPr lang="en-US" dirty="0"/>
-              <a:t/>
+              <a:t>Atividades da Unidade 2. A partir de 19 de outubro, assista a esta videoaula e faça a leitura. Até 25 de outubro, faça os Exercícios de fixação 1, que não valem nota, mas são um ótimo treino, e a Avaliação A1: um questionário no SIGAA sobre as Unidades 1 e 2, até as 23h55. Não deixe para o último minuto. Na próxima unidade, a matriz marxista e as mudanças do final do século XIX.</a:t>
             </a:r>
             <a:endParaRPr lang="en-US" dirty="0"/>
           </a:p>
@@ -1644,7 +1644,7 @@
           <a:p>
             <a:r>
               <a:rPr lang="en-US" dirty="0"/>
-              <a:t/>
+              <a:t>Hora do quiz da Unidade 2: cinco perguntas. Pause o vídeo a cada pergunta, responda e confira no slide seguinte. É um bom aquecimento para a A1.</a:t>
             </a:r>
             <a:endParaRPr lang="en-US" dirty="0"/>
           </a:p>
@@ -1732,7 +1732,7 @@
           <a:p>
             <a:r>
               <a:rPr lang="en-US" dirty="0"/>
-              <a:t/>
+              <a:t>Esta unidade vai de 19 a 25 de outubro. A leitura é o livro de Coelho, nas partes sobre a dinâmica pendular e a matriz liberal, junto com as Unidades 3 e 4 da página de conteúdos. Atenção ao prazo mais importante da semana: a Avaliação A1, no SIGAA, vai até 25 de outubro, às 23h55, e cobre as Unidades 1 e 2.</a:t>
             </a:r>
             <a:endParaRPr lang="en-US" dirty="0"/>
           </a:p>
@@ -1820,7 +1820,7 @@
           <a:p>
             <a:r>
               <a:rPr lang="en-US" dirty="0"/>
-              <a:t/>
+              <a:t>Pergunta 1. Para Hobbes, como é a vida no estado de natureza, antes do Estado? Letra a: Harmoniosa e cooperativa. Letra b: Uma guerra de todos contra todos. Letra c: Organizada pelo mercado. Letra d: Governada pela vontade geral. Pause o vídeo e escolha a sua resposta.</a:t>
             </a:r>
             <a:endParaRPr lang="en-US" dirty="0"/>
           </a:p>
@@ -1908,7 +1908,7 @@
           <a:p>
             <a:r>
               <a:rPr lang="en-US" dirty="0"/>
-              <a:t/>
+              <a:t>A resposta correta é a letra b: Uma guerra de todos contra todos. Sem um poder comum, cada um ameaça o outro. Para obter segurança, os indivíduos transferem o poder a um soberano (o Leviatã).</a:t>
             </a:r>
             <a:endParaRPr lang="en-US" dirty="0"/>
           </a:p>
@@ -1996,7 +1996,7 @@
           <a:p>
             <a:r>
               <a:rPr lang="en-US" dirty="0"/>
-              <a:t/>
+              <a:t>Pergunta 2. Os direitos naturais à vida, à liberdade e à propriedade são a base do pensamento de: Letra a: John Locke. Letra b: Thomas Hobbes. Letra c: Karl Marx. Letra d: John Maynard Keynes. Pause o vídeo e escolha a sua resposta.</a:t>
             </a:r>
             <a:endParaRPr lang="en-US" dirty="0"/>
           </a:p>
@@ -2084,7 +2084,7 @@
           <a:p>
             <a:r>
               <a:rPr lang="en-US" dirty="0"/>
-              <a:t/>
+              <a:t>A resposta correta é a letra a: John Locke. Locke funda o liberalismo político: o governo existe para proteger esses direitos e tem poder limitado.</a:t>
             </a:r>
             <a:endParaRPr lang="en-US" dirty="0"/>
           </a:p>
@@ -2172,7 +2172,7 @@
           <a:p>
             <a:r>
               <a:rPr lang="en-US" dirty="0"/>
-              <a:t/>
+              <a:t>Pergunta 3. A ideia de que “o poder deve frear o poder”, base da separação dos poderes, é de: Letra a: Rousseau. Letra b: Adam Smith. Letra c: Montesquieu. Letra d: Jean-Baptiste Say. Pause o vídeo e escolha a sua resposta.</a:t>
             </a:r>
             <a:endParaRPr lang="en-US" dirty="0"/>
           </a:p>
@@ -2260,7 +2260,7 @@
           <a:p>
             <a:r>
               <a:rPr lang="en-US" dirty="0"/>
-              <a:t/>
+              <a:t>A resposta correta é a letra c: Montesquieu. Montesquieu, em O Espírito das Leis (1748). A Constituição de 1988 adota a separação no art. 2º.</a:t>
             </a:r>
             <a:endParaRPr lang="en-US" dirty="0"/>
           </a:p>
@@ -2348,7 +2348,7 @@
           <a:p>
             <a:r>
               <a:rPr lang="en-US" dirty="0"/>
-              <a:t/>
+              <a:t>Pergunta 4. Pela teoria das vantagens comparativas de Ricardo, os países ganham ao: Letra a: Produzir tudo internamente. Letra b: Especializar-se no que produzem com menor custo relativo e trocar. Letra c: Proibir importações. Letra d: Acumular ouro e prata. Pause o vídeo e escolha a sua resposta.</a:t>
             </a:r>
             <a:endParaRPr lang="en-US" dirty="0"/>
           </a:p>
@@ -2436,7 +2436,7 @@
           <a:p>
             <a:r>
               <a:rPr lang="en-US" dirty="0"/>
-              <a:t/>
+              <a:t>A resposta correta é a letra b: Especializar-se no que produzem com menor custo relativo e trocar. A especialização e o livre comércio aumentam a produção total e beneficiam os países que trocam.</a:t>
             </a:r>
             <a:endParaRPr lang="en-US" dirty="0"/>
           </a:p>
@@ -2524,7 +2524,7 @@
           <a:p>
             <a:r>
               <a:rPr lang="en-US" dirty="0"/>
-              <a:t/>
+              <a:t>Pergunta 5. Por que o pêndulo entre Estado e mercado se move? Letra a: Cada extremo gera problemas que levam a correções no sentido oposto. Letra b: O Estado sempre cresce. Letra c: O mercado sempre vence no longo prazo. Letra d: Depende apenas do resultado das eleições. Pause o vídeo e escolha a sua resposta.</a:t>
             </a:r>
             <a:endParaRPr lang="en-US" dirty="0"/>
           </a:p>
@@ -2612,7 +2612,7 @@
           <a:p>
             <a:r>
               <a:rPr lang="en-US" dirty="0"/>
-              <a:t/>
+              <a:t>A resposta correta é a letra a: Cada extremo gera problemas que levam a correções no sentido oposto. Falhas de mercado (crises, desigualdade) pedem mais Estado; falhas de governo (crise fiscal, ineficiência) pedem mais mercado. Encerramos a Unidade 2. Boa prova na A1 e até a próxima videoaula!</a:t>
             </a:r>
             <a:endParaRPr lang="en-US" dirty="0"/>
           </a:p>
@@ -2700,7 +2700,7 @@
           <a:p>
             <a:r>
               <a:rPr lang="en-US" dirty="0"/>
-              <a:t/>
+              <a:t>Parte 1: a dinâmica pendular. A ideia é simples e muito útil para entender a história: ora a sociedade pede mais mercado, ora pede mais Estado.</a:t>
             </a:r>
             <a:endParaRPr lang="en-US" dirty="0"/>
           </a:p>
@@ -2788,7 +2788,7 @@
           <a:p>
             <a:r>
               <a:rPr lang="en-US" dirty="0"/>
-              <a:t/>
+              <a:t>Coelho usa a imagem de um pêndulo. De um lado, mais mercado; do outro, mais Estado. Quando o pêndulo vai longe demais para um lado, os problemas desse extremo impulsionam o movimento de volta. Por isso, o debate atual não é “Estado ou mercado”, como se fosse preciso escolher um só. A pergunta madura é: que Estado e que mercado queremos?</a:t>
             </a:r>
             <a:endParaRPr lang="en-US" dirty="0"/>
           </a:p>
@@ -2876,7 +2876,7 @@
           <a:p>
             <a:r>
               <a:rPr lang="en-US" dirty="0"/>
-              <a:t/>
+              <a:t>Por que o pêndulo se move? Quando o mercado avança demais, surgem crises e desemprego, como em 1929, aumento da desigualdade e da pobreza, e abusos de monopólios; então a sociedade pede mais Estado. Quando o Estado avança demais, aparecem crise fiscal e inflação, como nos anos 1970 e 1980, ineficiência e burocracia, e a captura do Estado por interesses particulares; então a sociedade pede mais mercado. Em resumo: falhas de mercado e falhas de governo alimentam, alternadamente, o movimento do pêndulo.</a:t>
             </a:r>
             <a:endParaRPr lang="en-US" dirty="0"/>
           </a:p>
@@ -2964,7 +2964,7 @@
           <a:p>
             <a:r>
               <a:rPr lang="en-US" dirty="0"/>
-              <a:t/>
+              <a:t>Veja a linha do tempo. Nos séculos XVIII e XIX, o liberalismo e o Estado mínimo substituem o mercantilismo. Em 1929, a Grande Depressão desacredita o laissez-faire. De 1945 a 1973, os chamados anos dourados, é o auge do Estado de bem-estar. Entre 1973 e 1979, os choques do petróleo trazem estagflação e crise fiscal. De 1979 a 2000, a onda neoliberal traz privatizações e desregulamentação. E nas crises de 2008 e da pandemia de 2020, o Estado volta ao centro, com resgates e programas emergenciais. Cada virada responde aos problemas da fase anterior.</a:t>
             </a:r>
             <a:endParaRPr lang="en-US" dirty="0"/>
           </a:p>
@@ -3052,7 +3052,7 @@
           <a:p>
             <a:r>
               <a:rPr lang="en-US" dirty="0"/>
-              <a:t/>
+              <a:t>O Brasil também viveu esse pêndulo. De 1930 a 1980, predominou o Estado desenvolvimentista: Vargas, Juscelino e o regime militar criaram estatais e bancos públicos. De 1990 a 2002, o movimento foi em direção ao mercado, com privatizações, abertura comercial, agências reguladoras e a Lei de Responsabilidade Fiscal. De 2003 em diante, houve uma combinação: programas sociais ampliados, bancos públicos atuando nas crises e, ao mesmo tempo, concessões e parcerias público-privadas. Esse percurso será aprofundado na disciplina Desenvolvimento e Mudanças no Estado Brasileiro.</a:t>
             </a:r>
             <a:endParaRPr lang="en-US" dirty="0"/>
           </a:p>
@@ -3140,7 +3140,7 @@
           <a:p>
             <a:r>
               <a:rPr lang="en-US" dirty="0"/>
-              <a:t/>
+              <a:t>Parte 2: a formação da matriz liberal. Vamos do contrato social à mão invisível, conhecendo os autores que moldaram a ideia de um Estado limitado.</a:t>
             </a:r>
             <a:endParaRPr lang="en-US" dirty="0"/>
           </a:p>
@@ -3228,7 +3228,7 @@
           <a:p>
             <a:r>
               <a:rPr lang="en-US" dirty="0"/>
-              <a:t/>
+              <a:t>O liberalismo nasce contra duas coisas. Contra o mercantilismo, em que o Estado controlava o comércio, concedia monopólios e buscava acumular metais preciosos. E contra o absolutismo, em que o poder do monarca não tinha limites legais. A resposta liberal defende a liberdade individual, a propriedade, um governo limitado pela lei e a livre iniciativa econômica. Três revoluções põem essas ideias em prática: a Inglesa, de 1688, a Americana, de 1776, e a Francesa, de 1789.</a:t>
             </a:r>
             <a:endParaRPr lang="en-US" dirty="0"/>
           </a:p>

--- a/disciplina-01-estado-governo-mercado/materiais/02_Unidade_2_Pendulo_e_Matriz_Liberal.pptx
+++ b/disciplina-01-estado-governo-mercado/materiais/02_Unidade_2_Pendulo_e_Matriz_Liberal.pptx
@@ -35,9 +35,10 @@
     <p:sldId id="283" r:id="rId29"/>
     <p:sldId id="284" r:id="rId30"/>
     <p:sldId id="285" r:id="rId31"/>
+    <p:sldId id="286" r:id="rId32"/>
   </p:sldIdLst>
   <p:notesMasterIdLst>
-    <p:notesMasterId r:id="rId32"/>
+    <p:notesMasterId r:id="rId33"/>
   </p:notesMasterIdLst>
   <p:sldSz cx="9144000" cy="5143500"/>
   <p:notesSz cx="5143500" cy="9144000"/>
@@ -2789,7 +2790,7 @@
           <a:p>
             <a:r>
               <a:rPr lang="en-US" dirty="0"/>
-              <a:t>A resposta correta é a letra a: Cada extremo gera problemas que levam a correções no sentido oposto. Falhas de mercado (crises, desigualdade) pedem mais Estado; falhas de governo (crise fiscal, ineficiência) pedem mais mercado. Encerramos a Unidade 2. Boa prova na A1 e até a próxima videoaula!</a:t>
+              <a:t>A resposta correta é a letra a: Cada extremo gera problemas que levam a correções no sentido oposto. Falhas de mercado (crises, desigualdade) pedem mais Estado; falhas de governo (crise fiscal, ineficiência) pedem mais mercado.</a:t>
             </a:r>
             <a:endParaRPr lang="en-US" dirty="0"/>
           </a:p>
@@ -2813,6 +2814,94 @@
             <a:fld id="{F7021451-1387-4CA6-816F-3879F97B5CBC}" type="slidenum">
               <a:rPr lang="en-US"/>
               <a:t>30</a:t>
+            </a:fld>
+            <a:endParaRPr lang="en-US"/>
+          </a:p>
+        </p:txBody>
+      </p:sp>
+    </p:spTree>
+    <p:extLst>
+      <p:ext uri="{BB962C8B-B14F-4D97-AF65-F5344CB8AC3E}">
+        <p14:creationId xmlns:p14="http://schemas.microsoft.com/office/powerpoint/2010/main" val="1024086991"/>
+      </p:ext>
+    </p:extLst>
+  </p:cSld>
+  <p:clrMapOvr>
+    <a:masterClrMapping/>
+  </p:clrMapOvr>
+</p:notes>
+</file>
+
+<file path=ppt/notesSlides/notesSlide31.xml><?xml version="1.0" encoding="utf-8"?>
+<p:notes xmlns:a="http://schemas.openxmlformats.org/drawingml/2006/main" xmlns:r="http://schemas.openxmlformats.org/officeDocument/2006/relationships" xmlns:p="http://schemas.openxmlformats.org/presentationml/2006/main">
+  <p:cSld>
+    <p:spTree>
+      <p:nvGrpSpPr>
+        <p:cNvPr id="1" name=""/>
+        <p:cNvGrpSpPr/>
+        <p:nvPr/>
+      </p:nvGrpSpPr>
+      <p:grpSpPr>
+        <a:xfrm>
+          <a:off x="0" y="0"/>
+          <a:ext cx="0" cy="0"/>
+          <a:chOff x="0" y="0"/>
+          <a:chExt cx="0" cy="0"/>
+        </a:xfrm>
+      </p:grpSpPr>
+      <p:sp>
+        <p:nvSpPr>
+          <p:cNvPr id="2" name="Slide Image Placeholder 1"/>
+          <p:cNvSpPr>
+            <a:spLocks noGrp="1" noRot="1" noChangeAspect="1"/>
+          </p:cNvSpPr>
+          <p:nvPr>
+            <p:ph type="sldImg"/>
+          </p:nvPr>
+        </p:nvSpPr>
+        <p:spPr/>
+      </p:sp>
+      <p:sp>
+        <p:nvSpPr>
+          <p:cNvPr id="3" name="Notes Placeholder 2"/>
+          <p:cNvSpPr>
+            <a:spLocks noGrp="1"/>
+          </p:cNvSpPr>
+          <p:nvPr>
+            <p:ph type="body" idx="1"/>
+          </p:nvPr>
+        </p:nvSpPr>
+        <p:spPr/>
+        <p:txBody>
+          <a:bodyPr/>
+          <a:lstStyle/>
+          <a:p>
+            <a:r>
+              <a:rPr lang="en-US" dirty="0"/>
+              <a:t>Para fechar a Unidade 2, vamos recapitular. [Apontar para o quadro da esquerda.] No tópico 3, vimos a dinâmica pendular: ora a sociedade pede mais mercado, ora mais Estado, porque cada extremo gera problemas que impulsionam o movimento de volta. Percorremos os marcos, do liberalismo do século XIX à crise de 1929, aos anos dourados, à estagflação, ao neoliberalismo e às crises de 2008 e 2020, e vimos como o pêndulo se moveu no Brasil. [Apontar para o quadro da direita.] No tópico 4, estudamos a matriz liberal, uma reação ao absolutismo e ao mercantilismo. Locke defendeu os direitos naturais e o governo limitado; Montesquieu, a separação dos poderes; Smith, a divisão do trabalho, a mão invisível e um Estado mínimo com três deveres; Ricardo, o livre comércio; e Say, a ideia de que a oferta cria a sua própria procura. Vimos também os limites desse Estado mínimo no século XIX. Na próxima unidade, a matriz marxista. Boa prova na A1 e até a próxima videoaula!</a:t>
+            </a:r>
+            <a:endParaRPr lang="en-US" dirty="0"/>
+          </a:p>
+        </p:txBody>
+      </p:sp>
+      <p:sp>
+        <p:nvSpPr>
+          <p:cNvPr id="4" name="Slide Number Placeholder 3"/>
+          <p:cNvSpPr>
+            <a:spLocks noGrp="1"/>
+          </p:cNvSpPr>
+          <p:nvPr>
+            <p:ph type="sldNum" sz="quarter" idx="10"/>
+          </p:nvPr>
+        </p:nvSpPr>
+        <p:spPr/>
+        <p:txBody>
+          <a:bodyPr/>
+          <a:lstStyle/>
+          <a:p>
+            <a:fld id="{F7021451-1387-4CA6-816F-3879F97B5CBC}" type="slidenum">
+              <a:rPr lang="en-US"/>
+              <a:t>31</a:t>
             </a:fld>
             <a:endParaRPr lang="en-US"/>
           </a:p>
@@ -17917,6 +18006,581 @@
 </p:sld>
 </file>
 
+<file path=ppt/slides/slide31.xml><?xml version="1.0" encoding="utf-8"?>
+<p:sld xmlns:a="http://schemas.openxmlformats.org/drawingml/2006/main" xmlns:r="http://schemas.openxmlformats.org/officeDocument/2006/relationships" xmlns:p="http://schemas.openxmlformats.org/presentationml/2006/main">
+  <p:cSld name="Slide 31">
+    <p:bg>
+      <p:bgPr>
+        <a:blipFill dpi="0" rotWithShape="1">
+          <a:blip r:embed="rId1">
+            <a:lum/>
+          </a:blip>
+          <a:srcRect/>
+          <a:stretch>
+            <a:fillRect/>
+          </a:stretch>
+        </a:blipFill>
+        <a:effectLst/>
+      </p:bgPr>
+    </p:bg>
+    <p:spTree>
+      <p:nvGrpSpPr>
+        <p:cNvPr id="1" name=""/>
+        <p:cNvGrpSpPr/>
+        <p:nvPr/>
+      </p:nvGrpSpPr>
+      <p:grpSpPr>
+        <a:xfrm>
+          <a:off x="0" y="0"/>
+          <a:ext cx="0" cy="0"/>
+          <a:chOff x="0" y="0"/>
+          <a:chExt cx="0" cy="0"/>
+        </a:xfrm>
+      </p:grpSpPr>
+      <p:sp>
+        <p:nvSpPr>
+          <p:cNvPr id="2" name="Text 0"/>
+          <p:cNvSpPr txBox="1"/>
+          <p:nvPr/>
+        </p:nvSpPr>
+        <p:spPr>
+          <a:xfrm>
+            <a:off x="731520" y="256032"/>
+            <a:ext cx="7680960" cy="566928"/>
+          </a:xfrm>
+          <a:prstGeom prst="rect">
+            <a:avLst/>
+          </a:prstGeom>
+          <a:noFill/>
+          <a:ln/>
+        </p:spPr>
+        <p:txBody>
+          <a:bodyPr wrap="square" lIns="0" tIns="0" rIns="0" bIns="0" rtlCol="0" anchor="ctr"/>
+          <a:lstStyle/>
+          <a:p>
+            <a:pPr algn="ctr" indent="0" marL="0">
+              <a:lnSpc>
+                <a:spcPct val="100000"/>
+              </a:lnSpc>
+              <a:buNone/>
+            </a:pPr>
+            <a:r>
+              <a:rPr lang="en-US" sz="2800" b="1" dirty="0">
+                <a:solidFill>
+                  <a:srgbClr val="13294B"/>
+                </a:solidFill>
+                <a:latin typeface="Calibri" pitchFamily="34" charset="0"/>
+                <a:ea typeface="Calibri" pitchFamily="34" charset="-122"/>
+                <a:cs typeface="Calibri" pitchFamily="34" charset="-120"/>
+              </a:rPr>
+              <a:t>Resumo da Unidade 2</a:t>
+            </a:r>
+            <a:endParaRPr lang="en-US" sz="2800" dirty="0"/>
+          </a:p>
+        </p:txBody>
+      </p:sp>
+      <p:sp>
+        <p:nvSpPr>
+          <p:cNvPr id="3" name="Text 1"/>
+          <p:cNvSpPr txBox="1"/>
+          <p:nvPr/>
+        </p:nvSpPr>
+        <p:spPr>
+          <a:xfrm>
+            <a:off x="1005840" y="804672"/>
+            <a:ext cx="7132320" cy="329184"/>
+          </a:xfrm>
+          <a:prstGeom prst="rect">
+            <a:avLst/>
+          </a:prstGeom>
+          <a:noFill/>
+          <a:ln/>
+        </p:spPr>
+        <p:txBody>
+          <a:bodyPr wrap="square" lIns="0" tIns="0" rIns="0" bIns="0" rtlCol="0" anchor="ctr"/>
+          <a:lstStyle/>
+          <a:p>
+            <a:pPr algn="ctr" indent="0" marL="0">
+              <a:lnSpc>
+                <a:spcPct val="100000"/>
+              </a:lnSpc>
+              <a:buNone/>
+            </a:pPr>
+            <a:r>
+              <a:rPr lang="en-US" sz="1400" dirty="0">
+                <a:solidFill>
+                  <a:srgbClr val="5B6770"/>
+                </a:solidFill>
+                <a:latin typeface="Calibri" pitchFamily="34" charset="0"/>
+                <a:ea typeface="Calibri" pitchFamily="34" charset="-122"/>
+                <a:cs typeface="Calibri" pitchFamily="34" charset="-120"/>
+              </a:rPr>
+              <a:t>O que discutimos nesta unidade</a:t>
+            </a:r>
+            <a:endParaRPr lang="en-US" sz="1400" dirty="0"/>
+          </a:p>
+        </p:txBody>
+      </p:sp>
+      <p:sp>
+        <p:nvSpPr>
+          <p:cNvPr id="4" name="Text 2"/>
+          <p:cNvSpPr txBox="1"/>
+          <p:nvPr/>
+        </p:nvSpPr>
+        <p:spPr>
+          <a:xfrm>
+            <a:off x="685800" y="1170432"/>
+            <a:ext cx="3794760" cy="2743200"/>
+          </a:xfrm>
+          <a:prstGeom prst="roundRect">
+            <a:avLst>
+              <a:gd name="adj" fmla="val 2000"/>
+            </a:avLst>
+          </a:prstGeom>
+          <a:solidFill>
+            <a:srgbClr val="FFFFFF"/>
+          </a:solidFill>
+          <a:ln w="12700">
+            <a:solidFill>
+              <a:srgbClr val="DCD5C1"/>
+            </a:solidFill>
+          </a:ln>
+        </p:spPr>
+        <p:txBody>
+          <a:bodyPr wrap="square" lIns="114300" tIns="114300" rIns="114300" bIns="114300" rtlCol="0" anchor="t"/>
+          <a:lstStyle/>
+          <a:p>
+            <a:pPr algn="l" indent="0" marL="0">
+              <a:lnSpc>
+                <a:spcPct val="100000"/>
+              </a:lnSpc>
+              <a:spcAft>
+                <a:spcPts val="200"/>
+              </a:spcAft>
+              <a:buNone/>
+            </a:pPr>
+            <a:r>
+              <a:rPr lang="en-US" sz="1100" b="1" dirty="0">
+                <a:solidFill>
+                  <a:srgbClr val="2A8C85"/>
+                </a:solidFill>
+                <a:latin typeface="Calibri" pitchFamily="34" charset="0"/>
+                <a:ea typeface="Calibri" pitchFamily="34" charset="-122"/>
+                <a:cs typeface="Calibri" pitchFamily="34" charset="-120"/>
+              </a:rPr>
+              <a:t>PARTE 1 · TÓPICO 3</a:t>
+            </a:r>
+            <a:endParaRPr lang="en-US" sz="1100" dirty="0"/>
+          </a:p>
+          <a:p>
+            <a:pPr algn="l" indent="0" marL="0">
+              <a:lnSpc>
+                <a:spcPct val="100000"/>
+              </a:lnSpc>
+              <a:spcAft>
+                <a:spcPts val="400"/>
+              </a:spcAft>
+              <a:buNone/>
+            </a:pPr>
+            <a:r>
+              <a:rPr lang="en-US" sz="1450" b="1" dirty="0">
+                <a:solidFill>
+                  <a:srgbClr val="13294B"/>
+                </a:solidFill>
+                <a:latin typeface="Calibri" pitchFamily="34" charset="0"/>
+                <a:ea typeface="Calibri" pitchFamily="34" charset="-122"/>
+                <a:cs typeface="Calibri" pitchFamily="34" charset="-120"/>
+              </a:rPr>
+              <a:t>A dinâmica pendular</a:t>
+            </a:r>
+            <a:endParaRPr lang="en-US" sz="1100" dirty="0"/>
+          </a:p>
+          <a:p>
+            <a:pPr algn="l" marL="177800" indent="-177800">
+              <a:lnSpc>
+                <a:spcPct val="100000"/>
+              </a:lnSpc>
+              <a:spcAft>
+                <a:spcPts val="300"/>
+              </a:spcAft>
+              <a:buSzPct val="100000"/>
+              <a:buChar char="•"/>
+            </a:pPr>
+            <a:r>
+              <a:rPr lang="en-US" sz="1200" dirty="0">
+                <a:solidFill>
+                  <a:srgbClr val="1F2A37"/>
+                </a:solidFill>
+                <a:latin typeface="Calibri" pitchFamily="34" charset="0"/>
+                <a:ea typeface="Calibri" pitchFamily="34" charset="-122"/>
+                <a:cs typeface="Calibri" pitchFamily="34" charset="-120"/>
+              </a:rPr>
+              <a:t>Ora mais mercado, ora mais Estado: cada extremo gera problemas que impulsionam a volta.</a:t>
+            </a:r>
+            <a:endParaRPr lang="en-US" sz="1100" dirty="0"/>
+          </a:p>
+          <a:p>
+            <a:pPr algn="l" marL="177800" indent="-177800">
+              <a:lnSpc>
+                <a:spcPct val="100000"/>
+              </a:lnSpc>
+              <a:spcAft>
+                <a:spcPts val="300"/>
+              </a:spcAft>
+              <a:buSzPct val="100000"/>
+              <a:buChar char="•"/>
+            </a:pPr>
+            <a:r>
+              <a:rPr lang="en-US" sz="1200" dirty="0">
+                <a:solidFill>
+                  <a:srgbClr val="1F2A37"/>
+                </a:solidFill>
+                <a:latin typeface="Calibri" pitchFamily="34" charset="0"/>
+                <a:ea typeface="Calibri" pitchFamily="34" charset="-122"/>
+                <a:cs typeface="Calibri" pitchFamily="34" charset="-120"/>
+              </a:rPr>
+              <a:t>Marcos: liberalismo, 1929, anos dourados, estagflação, neoliberalismo, 2008 e 2020.</a:t>
+            </a:r>
+            <a:endParaRPr lang="en-US" sz="1100" dirty="0"/>
+          </a:p>
+          <a:p>
+            <a:pPr algn="l" marL="177800" indent="-177800">
+              <a:lnSpc>
+                <a:spcPct val="100000"/>
+              </a:lnSpc>
+              <a:spcAft>
+                <a:spcPts val="300"/>
+              </a:spcAft>
+              <a:buSzPct val="100000"/>
+              <a:buChar char="•"/>
+            </a:pPr>
+            <a:r>
+              <a:rPr lang="en-US" sz="1200" dirty="0">
+                <a:solidFill>
+                  <a:srgbClr val="1F2A37"/>
+                </a:solidFill>
+                <a:latin typeface="Calibri" pitchFamily="34" charset="0"/>
+                <a:ea typeface="Calibri" pitchFamily="34" charset="-122"/>
+                <a:cs typeface="Calibri" pitchFamily="34" charset="-120"/>
+              </a:rPr>
+              <a:t>No Brasil: desenvolvimentismo, reformas dos anos 1990 e combinação a partir de 2003.</a:t>
+            </a:r>
+            <a:endParaRPr lang="en-US" sz="1100" dirty="0"/>
+          </a:p>
+          <a:p>
+            <a:pPr algn="l" marL="177800" indent="-177800">
+              <a:lnSpc>
+                <a:spcPct val="100000"/>
+              </a:lnSpc>
+              <a:spcAft>
+                <a:spcPts val="300"/>
+              </a:spcAft>
+              <a:buSzPct val="100000"/>
+              <a:buChar char="•"/>
+            </a:pPr>
+            <a:r>
+              <a:rPr lang="en-US" sz="1200" dirty="0">
+                <a:solidFill>
+                  <a:srgbClr val="1F2A37"/>
+                </a:solidFill>
+                <a:latin typeface="Calibri" pitchFamily="34" charset="0"/>
+                <a:ea typeface="Calibri" pitchFamily="34" charset="-122"/>
+                <a:cs typeface="Calibri" pitchFamily="34" charset="-120"/>
+              </a:rPr>
+              <a:t>A pergunta atual: que Estado e que mercado?</a:t>
+            </a:r>
+            <a:endParaRPr lang="en-US" sz="1100" dirty="0"/>
+          </a:p>
+        </p:txBody>
+      </p:sp>
+      <p:sp>
+        <p:nvSpPr>
+          <p:cNvPr id="5" name="Text 3"/>
+          <p:cNvSpPr txBox="1"/>
+          <p:nvPr/>
+        </p:nvSpPr>
+        <p:spPr>
+          <a:xfrm>
+            <a:off x="4663440" y="1170432"/>
+            <a:ext cx="3794760" cy="2743200"/>
+          </a:xfrm>
+          <a:prstGeom prst="roundRect">
+            <a:avLst>
+              <a:gd name="adj" fmla="val 2000"/>
+            </a:avLst>
+          </a:prstGeom>
+          <a:solidFill>
+            <a:srgbClr val="E6F2F0"/>
+          </a:solidFill>
+          <a:ln/>
+        </p:spPr>
+        <p:txBody>
+          <a:bodyPr wrap="square" lIns="114300" tIns="114300" rIns="114300" bIns="114300" rtlCol="0" anchor="t"/>
+          <a:lstStyle/>
+          <a:p>
+            <a:pPr algn="l" indent="0" marL="0">
+              <a:lnSpc>
+                <a:spcPct val="100000"/>
+              </a:lnSpc>
+              <a:spcAft>
+                <a:spcPts val="200"/>
+              </a:spcAft>
+              <a:buNone/>
+            </a:pPr>
+            <a:r>
+              <a:rPr lang="en-US" sz="1100" b="1" dirty="0">
+                <a:solidFill>
+                  <a:srgbClr val="2A8C85"/>
+                </a:solidFill>
+                <a:latin typeface="Calibri" pitchFamily="34" charset="0"/>
+                <a:ea typeface="Calibri" pitchFamily="34" charset="-122"/>
+                <a:cs typeface="Calibri" pitchFamily="34" charset="-120"/>
+              </a:rPr>
+              <a:t>PARTE 2 · TÓPICO 4</a:t>
+            </a:r>
+            <a:endParaRPr lang="en-US" sz="1100" dirty="0"/>
+          </a:p>
+          <a:p>
+            <a:pPr algn="l" indent="0" marL="0">
+              <a:lnSpc>
+                <a:spcPct val="100000"/>
+              </a:lnSpc>
+              <a:spcAft>
+                <a:spcPts val="400"/>
+              </a:spcAft>
+              <a:buNone/>
+            </a:pPr>
+            <a:r>
+              <a:rPr lang="en-US" sz="1450" b="1" dirty="0">
+                <a:solidFill>
+                  <a:srgbClr val="13294B"/>
+                </a:solidFill>
+                <a:latin typeface="Calibri" pitchFamily="34" charset="0"/>
+                <a:ea typeface="Calibri" pitchFamily="34" charset="-122"/>
+                <a:cs typeface="Calibri" pitchFamily="34" charset="-120"/>
+              </a:rPr>
+              <a:t>A matriz liberal</a:t>
+            </a:r>
+            <a:endParaRPr lang="en-US" sz="1100" dirty="0"/>
+          </a:p>
+          <a:p>
+            <a:pPr algn="l" marL="177800" indent="-177800">
+              <a:lnSpc>
+                <a:spcPct val="100000"/>
+              </a:lnSpc>
+              <a:spcAft>
+                <a:spcPts val="300"/>
+              </a:spcAft>
+              <a:buSzPct val="100000"/>
+              <a:buChar char="•"/>
+            </a:pPr>
+            <a:r>
+              <a:rPr lang="en-US" sz="1200" dirty="0">
+                <a:solidFill>
+                  <a:srgbClr val="1F2A37"/>
+                </a:solidFill>
+                <a:latin typeface="Calibri" pitchFamily="34" charset="0"/>
+                <a:ea typeface="Calibri" pitchFamily="34" charset="-122"/>
+                <a:cs typeface="Calibri" pitchFamily="34" charset="-120"/>
+              </a:rPr>
+              <a:t>Reação ao absolutismo e ao mercantilismo.</a:t>
+            </a:r>
+            <a:endParaRPr lang="en-US" sz="1100" dirty="0"/>
+          </a:p>
+          <a:p>
+            <a:pPr algn="l" marL="177800" indent="-177800">
+              <a:lnSpc>
+                <a:spcPct val="100000"/>
+              </a:lnSpc>
+              <a:spcAft>
+                <a:spcPts val="300"/>
+              </a:spcAft>
+              <a:buSzPct val="100000"/>
+              <a:buChar char="•"/>
+            </a:pPr>
+            <a:r>
+              <a:rPr lang="en-US" sz="1200" dirty="0">
+                <a:solidFill>
+                  <a:srgbClr val="1F2A37"/>
+                </a:solidFill>
+                <a:latin typeface="Calibri" pitchFamily="34" charset="0"/>
+                <a:ea typeface="Calibri" pitchFamily="34" charset="-122"/>
+                <a:cs typeface="Calibri" pitchFamily="34" charset="-120"/>
+              </a:rPr>
+              <a:t>Locke: direitos naturais e governo limitado; Montesquieu: separação dos poderes.</a:t>
+            </a:r>
+            <a:endParaRPr lang="en-US" sz="1100" dirty="0"/>
+          </a:p>
+          <a:p>
+            <a:pPr algn="l" marL="177800" indent="-177800">
+              <a:lnSpc>
+                <a:spcPct val="100000"/>
+              </a:lnSpc>
+              <a:spcAft>
+                <a:spcPts val="300"/>
+              </a:spcAft>
+              <a:buSzPct val="100000"/>
+              <a:buChar char="•"/>
+            </a:pPr>
+            <a:r>
+              <a:rPr lang="en-US" sz="1200" dirty="0">
+                <a:solidFill>
+                  <a:srgbClr val="1F2A37"/>
+                </a:solidFill>
+                <a:latin typeface="Calibri" pitchFamily="34" charset="0"/>
+                <a:ea typeface="Calibri" pitchFamily="34" charset="-122"/>
+                <a:cs typeface="Calibri" pitchFamily="34" charset="-120"/>
+              </a:rPr>
+              <a:t>Smith: trabalho, divisão do trabalho, mão invisível e os três deveres do Estado mínimo.</a:t>
+            </a:r>
+            <a:endParaRPr lang="en-US" sz="1100" dirty="0"/>
+          </a:p>
+          <a:p>
+            <a:pPr algn="l" marL="177800" indent="-177800">
+              <a:lnSpc>
+                <a:spcPct val="100000"/>
+              </a:lnSpc>
+              <a:spcAft>
+                <a:spcPts val="300"/>
+              </a:spcAft>
+              <a:buSzPct val="100000"/>
+              <a:buChar char="•"/>
+            </a:pPr>
+            <a:r>
+              <a:rPr lang="en-US" sz="1200" dirty="0">
+                <a:solidFill>
+                  <a:srgbClr val="1F2A37"/>
+                </a:solidFill>
+                <a:latin typeface="Calibri" pitchFamily="34" charset="0"/>
+                <a:ea typeface="Calibri" pitchFamily="34" charset="-122"/>
+                <a:cs typeface="Calibri" pitchFamily="34" charset="-120"/>
+              </a:rPr>
+              <a:t>Ricardo (livre comércio) e Say (a oferta cria a procura).</a:t>
+            </a:r>
+            <a:endParaRPr lang="en-US" sz="1100" dirty="0"/>
+          </a:p>
+          <a:p>
+            <a:pPr algn="l" marL="177800" indent="-177800">
+              <a:lnSpc>
+                <a:spcPct val="100000"/>
+              </a:lnSpc>
+              <a:spcAft>
+                <a:spcPts val="300"/>
+              </a:spcAft>
+              <a:buSzPct val="100000"/>
+              <a:buChar char="•"/>
+            </a:pPr>
+            <a:r>
+              <a:rPr lang="en-US" sz="1200" dirty="0">
+                <a:solidFill>
+                  <a:srgbClr val="1F2A37"/>
+                </a:solidFill>
+                <a:latin typeface="Calibri" pitchFamily="34" charset="0"/>
+                <a:ea typeface="Calibri" pitchFamily="34" charset="-122"/>
+                <a:cs typeface="Calibri" pitchFamily="34" charset="-120"/>
+              </a:rPr>
+              <a:t>Limites do Estado mínimo no século XIX.</a:t>
+            </a:r>
+            <a:endParaRPr lang="en-US" sz="1100" dirty="0"/>
+          </a:p>
+        </p:txBody>
+      </p:sp>
+      <p:sp>
+        <p:nvSpPr>
+          <p:cNvPr id="6" name="Text 4"/>
+          <p:cNvSpPr txBox="1"/>
+          <p:nvPr/>
+        </p:nvSpPr>
+        <p:spPr>
+          <a:xfrm>
+            <a:off x="685800" y="3995928"/>
+            <a:ext cx="7772400" cy="484632"/>
+          </a:xfrm>
+          <a:prstGeom prst="roundRect">
+            <a:avLst>
+              <a:gd name="adj" fmla="val 15094"/>
+            </a:avLst>
+          </a:prstGeom>
+          <a:solidFill>
+            <a:srgbClr val="E6F2F0"/>
+          </a:solidFill>
+          <a:ln/>
+        </p:spPr>
+        <p:txBody>
+          <a:bodyPr wrap="square" lIns="127000" tIns="127000" rIns="127000" bIns="127000" rtlCol="0" anchor="ctr"/>
+          <a:lstStyle/>
+          <a:p>
+            <a:pPr algn="ctr" indent="0" marL="0">
+              <a:lnSpc>
+                <a:spcPct val="100000"/>
+              </a:lnSpc>
+              <a:buNone/>
+            </a:pPr>
+            <a:r>
+              <a:rPr lang="en-US" sz="1300" b="1" dirty="0">
+                <a:solidFill>
+                  <a:srgbClr val="13294B"/>
+                </a:solidFill>
+                <a:latin typeface="Calibri" pitchFamily="34" charset="0"/>
+                <a:ea typeface="Calibri" pitchFamily="34" charset="-122"/>
+                <a:cs typeface="Calibri" pitchFamily="34" charset="-120"/>
+              </a:rPr>
+              <a:t>Próxima unidade: a matriz marxista e as mudanças do final do século XIX.</a:t>
+            </a:r>
+            <a:endParaRPr lang="en-US" sz="1300" dirty="0"/>
+          </a:p>
+        </p:txBody>
+      </p:sp>
+      <p:sp>
+        <p:nvSpPr>
+          <p:cNvPr id="7" name="Text 5"/>
+          <p:cNvSpPr txBox="1"/>
+          <p:nvPr/>
+        </p:nvSpPr>
+        <p:spPr>
+          <a:xfrm>
+            <a:off x="4206240" y="36576"/>
+            <a:ext cx="4800600" cy="219456"/>
+          </a:xfrm>
+          <a:prstGeom prst="rect">
+            <a:avLst/>
+          </a:prstGeom>
+          <a:noFill/>
+          <a:ln/>
+        </p:spPr>
+        <p:txBody>
+          <a:bodyPr wrap="square" lIns="0" tIns="0" rIns="0" bIns="0" rtlCol="0" anchor="ctr"/>
+          <a:lstStyle/>
+          <a:p>
+            <a:pPr algn="r" indent="0" marL="0">
+              <a:lnSpc>
+                <a:spcPct val="100000"/>
+              </a:lnSpc>
+              <a:buNone/>
+            </a:pPr>
+            <a:r>
+              <a:rPr lang="en-US" sz="950" dirty="0">
+                <a:solidFill>
+                  <a:srgbClr val="5B6770"/>
+                </a:solidFill>
+                <a:latin typeface="Calibri" pitchFamily="34" charset="0"/>
+                <a:ea typeface="Calibri" pitchFamily="34" charset="-122"/>
+                <a:cs typeface="Calibri" pitchFamily="34" charset="-120"/>
+              </a:rPr>
+              <a:t>Estado, Governo e Mercado · Unidade 2</a:t>
+            </a:r>
+            <a:endParaRPr lang="en-US" sz="950" dirty="0"/>
+          </a:p>
+        </p:txBody>
+      </p:sp>
+    </p:spTree>
+  </p:cSld>
+  <p:clrMapOvr>
+    <a:masterClrMapping/>
+  </p:clrMapOvr>
+</p:sld>
+</file>
+
 <file path=ppt/slides/slide4.xml><?xml version="1.0" encoding="utf-8"?>
 <p:sld xmlns:a="http://schemas.openxmlformats.org/drawingml/2006/main" xmlns:r="http://schemas.openxmlformats.org/officeDocument/2006/relationships" xmlns:p="http://schemas.openxmlformats.org/presentationml/2006/main">
   <p:cSld name="Slide 4">

--- a/disciplina-01-estado-governo-mercado/materiais/02_Unidade_2_Pendulo_e_Matriz_Liberal.pptx
+++ b/disciplina-01-estado-governo-mercado/materiais/02_Unidade_2_Pendulo_e_Matriz_Liberal.pptx
@@ -137,7 +137,7 @@
 </p:presentation>
 </file>
 
-<file path=ppt/charts/chart4.xml><?xml version="1.0" encoding="utf-8"?>
+<file path=ppt/charts/chart6.xml><?xml version="1.0" encoding="utf-8"?>
 <c:chartSpace xmlns:c="http://schemas.openxmlformats.org/drawingml/2006/chart" xmlns:a="http://schemas.openxmlformats.org/drawingml/2006/main" xmlns:r="http://schemas.openxmlformats.org/officeDocument/2006/relationships">
   <c:date1904 val="0"/>
   <c:roundedCorners val="1"/>

--- a/disciplina-01-estado-governo-mercado/materiais/02_Unidade_2_Pendulo_e_Matriz_Liberal.pptx
+++ b/disciplina-01-estado-governo-mercado/materiais/02_Unidade_2_Pendulo_e_Matriz_Liberal.pptx
@@ -1646,7 +1646,7 @@
           <a:p>
             <a:r>
               <a:rPr lang="en-US" dirty="0"/>
-              <a:t>Atividades da Unidade 2. A partir de 19 de outubro, assista a esta videoaula e faça a leitura. Até 25 de outubro, faça os Exercícios de fixação 1, que não valem nota, mas são um ótimo treino, e a Avaliação A1: um questionário no SIGAA sobre as Unidades 1 e 2, até as 23h55. Não deixe para o último minuto. Na próxima unidade, a matriz marxista e as mudanças do final do século XIX.</a:t>
+              <a:t>Atividades da Unidade 2. A partir de 19 de outubro, assista a esta videoaula e faça a leitura. Até 25 de outubro, faça os Exercícios de fixação 1, que não valem nota, mas são um ótimo treino, e a Avaliação A1: um questionário no SIGAA sobre as Unidades 1 e 2, até as 23h55. Não deixe para o último minuto. E anote: na segunda-feira, 26 de outubro, das 19h às 20h30, teremos o nosso único encontro síncrono, pelo Google Meet, com presença obrigatória. Na próxima unidade, a matriz marxista e as mudanças do final do século XIX.</a:t>
             </a:r>
             <a:endParaRPr lang="en-US" dirty="0"/>
           </a:p>
@@ -2878,7 +2878,7 @@
           <a:p>
             <a:r>
               <a:rPr lang="en-US" dirty="0"/>
-              <a:t>Para fechar a Unidade 2, vamos recapitular. [Apontar para o quadro da esquerda.] No tópico 3, vimos a dinâmica pendular: ora a sociedade pede mais mercado, ora mais Estado, porque cada extremo gera problemas que impulsionam o movimento de volta. Percorremos os marcos, do liberalismo do século XIX à crise de 1929, aos anos dourados, à estagflação, ao neoliberalismo e às crises de 2008 e 2020, e vimos como o pêndulo se moveu no Brasil. [Apontar para o quadro da direita.] No tópico 4, estudamos a matriz liberal, uma reação ao absolutismo e ao mercantilismo. Locke defendeu os direitos naturais e o governo limitado; Montesquieu, a separação dos poderes; Smith, a divisão do trabalho, a mão invisível e um Estado mínimo com três deveres; Ricardo, o livre comércio; e Say, a ideia de que a oferta cria a sua própria procura. Vimos também os limites desse Estado mínimo no século XIX. Na próxima unidade, a matriz marxista. Boa prova na A1 e até a próxima videoaula!</a:t>
+              <a:t>Para fechar a Unidade 2, vamos recapitular. [Apontar para o quadro da esquerda.] No tópico 3, vimos a dinâmica pendular: ora a sociedade pede mais mercado, ora mais Estado, porque cada extremo gera problemas que impulsionam o movimento de volta. Percorremos os marcos, do liberalismo do século XIX à crise de 1929, aos anos dourados, à estagflação, ao neoliberalismo e às crises de 2008 e 2020, e vimos como o pêndulo se moveu no Brasil. [Apontar para o quadro da direita.] No tópico 4, estudamos a matriz liberal, uma reação ao absolutismo e ao mercantilismo. Locke defendeu os direitos naturais e o governo limitado; Montesquieu, a separação dos poderes; Smith, a divisão do trabalho, a mão invisível e um Estado mínimo com três deveres; Ricardo, o livre comércio; e Say, a ideia de que a oferta cria a sua própria procura. Vimos também os limites desse Estado mínimo no século XIX. Na próxima unidade, a matriz marxista. Boa prova na A1, e nos vemos no encontro síncrono de segunda-feira, 26 de outubro, às 19h!</a:t>
             </a:r>
             <a:endParaRPr lang="en-US" dirty="0"/>
           </a:p>
@@ -10190,6 +10190,144 @@
                   </a:tcPr>
                 </a:tc>
               </a:tr>
+              <a:tr h="0">
+                <a:tc>
+                  <a:txBody>
+                    <a:bodyPr/>
+                    <a:lstStyle/>
+                    <a:p>
+                      <a:pPr indent="0" marL="0">
+                        <a:buNone/>
+                      </a:pPr>
+                      <a:r>
+                        <a:rPr lang="en-US" sz="1350" dirty="0">
+                          <a:solidFill>
+                            <a:srgbClr val="1F2A37"/>
+                          </a:solidFill>
+                          <a:latin typeface="Calibri" pitchFamily="34" charset="0"/>
+                          <a:ea typeface="Calibri" pitchFamily="34" charset="-122"/>
+                          <a:cs typeface="Calibri" pitchFamily="34" charset="-120"/>
+                        </a:rPr>
+                        <a:t>26/10 (seg)</a:t>
+                      </a:r>
+                      <a:endParaRPr lang="en-US" sz="1350" dirty="0">
+                        <a:latin typeface="Calibri" charset="0"/>
+                        <a:ea typeface="Calibri" charset="0"/>
+                        <a:cs typeface="Calibri" charset="0"/>
+                      </a:endParaRPr>
+                    </a:p>
+                  </a:txBody>
+                  <a:tcPr marL="50800" marR="50800" marT="50800" marB="50800" anchor="ctr">
+                    <a:lnL w="9525" cap="flat" cmpd="sng" algn="ctr">
+                      <a:solidFill>
+                        <a:srgbClr val="DCD5C1"/>
+                      </a:solidFill>
+                      <a:prstDash val="solid"/>
+                      <a:round/>
+                      <a:headEnd type="none" w="med" len="med"/>
+                      <a:tailEnd type="none" w="med" len="med"/>
+                    </a:lnL>
+                    <a:lnR w="9525" cap="flat" cmpd="sng" algn="ctr">
+                      <a:solidFill>
+                        <a:srgbClr val="DCD5C1"/>
+                      </a:solidFill>
+                      <a:prstDash val="solid"/>
+                      <a:round/>
+                      <a:headEnd type="none" w="med" len="med"/>
+                      <a:tailEnd type="none" w="med" len="med"/>
+                    </a:lnR>
+                    <a:lnT w="9525" cap="flat" cmpd="sng" algn="ctr">
+                      <a:solidFill>
+                        <a:srgbClr val="DCD5C1"/>
+                      </a:solidFill>
+                      <a:prstDash val="solid"/>
+                      <a:round/>
+                      <a:headEnd type="none" w="med" len="med"/>
+                      <a:tailEnd type="none" w="med" len="med"/>
+                    </a:lnT>
+                    <a:lnB w="9525" cap="flat" cmpd="sng" algn="ctr">
+                      <a:solidFill>
+                        <a:srgbClr val="DCD5C1"/>
+                      </a:solidFill>
+                      <a:prstDash val="solid"/>
+                      <a:round/>
+                      <a:headEnd type="none" w="med" len="med"/>
+                      <a:tailEnd type="none" w="med" len="med"/>
+                    </a:lnB>
+                    <a:solidFill>
+                      <a:srgbClr val="F4F7F8"/>
+                    </a:solidFill>
+                  </a:tcPr>
+                </a:tc>
+                <a:tc>
+                  <a:txBody>
+                    <a:bodyPr/>
+                    <a:lstStyle/>
+                    <a:p>
+                      <a:pPr indent="0" marL="0">
+                        <a:buNone/>
+                      </a:pPr>
+                      <a:r>
+                        <a:rPr lang="en-US" sz="1350" dirty="0">
+                          <a:solidFill>
+                            <a:srgbClr val="1F2A37"/>
+                          </a:solidFill>
+                          <a:latin typeface="Calibri" pitchFamily="34" charset="0"/>
+                          <a:ea typeface="Calibri" pitchFamily="34" charset="-122"/>
+                          <a:cs typeface="Calibri" pitchFamily="34" charset="-120"/>
+                        </a:rPr>
+                        <a:t>Encontro síncrono único (Google Meet), 19h–20h30: presença obrigatória</a:t>
+                      </a:r>
+                      <a:endParaRPr lang="en-US" sz="1350" dirty="0">
+                        <a:latin typeface="Calibri" charset="0"/>
+                        <a:ea typeface="Calibri" charset="0"/>
+                        <a:cs typeface="Calibri" charset="0"/>
+                      </a:endParaRPr>
+                    </a:p>
+                  </a:txBody>
+                  <a:tcPr marL="50800" marR="50800" marT="50800" marB="50800" anchor="ctr">
+                    <a:lnL w="9525" cap="flat" cmpd="sng" algn="ctr">
+                      <a:solidFill>
+                        <a:srgbClr val="DCD5C1"/>
+                      </a:solidFill>
+                      <a:prstDash val="solid"/>
+                      <a:round/>
+                      <a:headEnd type="none" w="med" len="med"/>
+                      <a:tailEnd type="none" w="med" len="med"/>
+                    </a:lnL>
+                    <a:lnR w="9525" cap="flat" cmpd="sng" algn="ctr">
+                      <a:solidFill>
+                        <a:srgbClr val="DCD5C1"/>
+                      </a:solidFill>
+                      <a:prstDash val="solid"/>
+                      <a:round/>
+                      <a:headEnd type="none" w="med" len="med"/>
+                      <a:tailEnd type="none" w="med" len="med"/>
+                    </a:lnR>
+                    <a:lnT w="9525" cap="flat" cmpd="sng" algn="ctr">
+                      <a:solidFill>
+                        <a:srgbClr val="DCD5C1"/>
+                      </a:solidFill>
+                      <a:prstDash val="solid"/>
+                      <a:round/>
+                      <a:headEnd type="none" w="med" len="med"/>
+                      <a:tailEnd type="none" w="med" len="med"/>
+                    </a:lnT>
+                    <a:lnB w="9525" cap="flat" cmpd="sng" algn="ctr">
+                      <a:solidFill>
+                        <a:srgbClr val="DCD5C1"/>
+                      </a:solidFill>
+                      <a:prstDash val="solid"/>
+                      <a:round/>
+                      <a:headEnd type="none" w="med" len="med"/>
+                      <a:tailEnd type="none" w="med" len="med"/>
+                    </a:lnB>
+                    <a:solidFill>
+                      <a:srgbClr val="F4F7F8"/>
+                    </a:solidFill>
+                  </a:tcPr>
+                </a:tc>
+              </a:tr>
             </a:tbl>
           </a:graphicData>
         </a:graphic>

--- a/disciplina-01-estado-governo-mercado/materiais/02_Unidade_2_Pendulo_e_Matriz_Liberal.pptx
+++ b/disciplina-01-estado-governo-mercado/materiais/02_Unidade_2_Pendulo_e_Matriz_Liberal.pptx
@@ -25,20 +25,9 @@
     <p:sldId id="273" r:id="rId19"/>
     <p:sldId id="274" r:id="rId20"/>
     <p:sldId id="275" r:id="rId21"/>
-    <p:sldId id="276" r:id="rId22"/>
-    <p:sldId id="277" r:id="rId23"/>
-    <p:sldId id="278" r:id="rId24"/>
-    <p:sldId id="279" r:id="rId25"/>
-    <p:sldId id="280" r:id="rId26"/>
-    <p:sldId id="281" r:id="rId27"/>
-    <p:sldId id="282" r:id="rId28"/>
-    <p:sldId id="283" r:id="rId29"/>
-    <p:sldId id="284" r:id="rId30"/>
-    <p:sldId id="285" r:id="rId31"/>
-    <p:sldId id="286" r:id="rId32"/>
   </p:sldIdLst>
   <p:notesMasterIdLst>
-    <p:notesMasterId r:id="rId33"/>
+    <p:notesMasterId r:id="rId22"/>
   </p:notesMasterIdLst>
   <p:sldSz cx="9144000" cy="5143500"/>
   <p:notesSz cx="5143500" cy="9144000"/>
@@ -1646,7 +1635,7 @@
           <a:p>
             <a:r>
               <a:rPr lang="en-US" dirty="0"/>
-              <a:t>Atividades da Unidade 2. A partir de 19 de outubro, assista a esta videoaula e faça a leitura. Até 25 de outubro, faça os Exercícios de fixação 1, que não valem nota, mas são um ótimo treino, e a Avaliação A1: um questionário no SIGAA sobre as Unidades 1 e 2, até as 23h55. Não deixe para o último minuto. E anote: na segunda-feira, 26 de outubro, das 19h às 20h30, teremos o nosso único encontro síncrono, pelo Google Meet, com presença obrigatória. Na próxima unidade, a matriz marxista e as mudanças do final do século XIX.</a:t>
+              <a:t>Atividades da Unidade 2. A partir de 19 de outubro, assista a esta videoaula e faça a leitura. Até 25 de outubro, faça os Exercícios de fixação 1, que não valem nota, mas são um ótimo treino, e a Avaliação A1: um questionário no SIGAA sobre as Unidades 1 e 2, até as 23h55. Não deixe para o último minuto. E anote: na segunda-feira, 26 de outubro, das 19h às 20h30, teremos o nosso único encontro síncrono, pelo Google Meet, com presença obrigatória. Na próxima unidade, a matriz marxista e as mudanças do final do século XIX. E, para revisar, faça o quiz da Unidade 2 na página de conteúdos da disciplina: cinco perguntas com resposta comentada, sem nota.</a:t>
             </a:r>
             <a:endParaRPr lang="en-US" dirty="0"/>
           </a:p>
@@ -1822,7 +1811,7 @@
           <a:p>
             <a:r>
               <a:rPr lang="en-US" dirty="0"/>
-              <a:t>Hora do quiz da Unidade 2: cinco perguntas. Pause o vídeo a cada pergunta, responda e confira no slide seguinte. É um bom aquecimento para a A1.</a:t>
+              <a:t>Para fechar a Unidade 2, vamos recapitular. [Apontar para o quadro da esquerda.] No tópico 3, vimos a dinâmica pendular: ora a sociedade pede mais mercado, ora mais Estado, porque cada extremo gera problemas que impulsionam o movimento de volta. Percorremos os marcos, do liberalismo do século XIX à crise de 1929, aos anos dourados, à estagflação, ao neoliberalismo e às crises de 2008 e 2020, e vimos como o pêndulo se moveu no Brasil. [Apontar para o quadro da direita.] No tópico 4, estudamos a matriz liberal, uma reação ao absolutismo e ao mercantilismo. Locke defendeu os direitos naturais e o governo limitado; Montesquieu, a separação dos poderes; Smith, a divisão do trabalho, a mão invisível e um Estado mínimo com três deveres; Ricardo, o livre comércio; e Say, a ideia de que a oferta cria a sua própria procura. Vimos também os limites desse Estado mínimo no século XIX. Na próxima unidade, a matriz marxista. Boa prova na A1, e nos vemos no encontro síncrono de segunda-feira, 26 de outubro, às 19h!</a:t>
             </a:r>
             <a:endParaRPr lang="en-US" dirty="0"/>
           </a:p>
@@ -1846,798 +1835,6 @@
             <a:fld id="{F7021451-1387-4CA6-816F-3879F97B5CBC}" type="slidenum">
               <a:rPr lang="en-US"/>
               <a:t>20</a:t>
-            </a:fld>
-            <a:endParaRPr lang="en-US"/>
-          </a:p>
-        </p:txBody>
-      </p:sp>
-    </p:spTree>
-    <p:extLst>
-      <p:ext uri="{BB962C8B-B14F-4D97-AF65-F5344CB8AC3E}">
-        <p14:creationId xmlns:p14="http://schemas.microsoft.com/office/powerpoint/2010/main" val="1024086991"/>
-      </p:ext>
-    </p:extLst>
-  </p:cSld>
-  <p:clrMapOvr>
-    <a:masterClrMapping/>
-  </p:clrMapOvr>
-</p:notes>
-</file>
-
-<file path=ppt/notesSlides/notesSlide21.xml><?xml version="1.0" encoding="utf-8"?>
-<p:notes xmlns:a="http://schemas.openxmlformats.org/drawingml/2006/main" xmlns:r="http://schemas.openxmlformats.org/officeDocument/2006/relationships" xmlns:p="http://schemas.openxmlformats.org/presentationml/2006/main">
-  <p:cSld>
-    <p:spTree>
-      <p:nvGrpSpPr>
-        <p:cNvPr id="1" name=""/>
-        <p:cNvGrpSpPr/>
-        <p:nvPr/>
-      </p:nvGrpSpPr>
-      <p:grpSpPr>
-        <a:xfrm>
-          <a:off x="0" y="0"/>
-          <a:ext cx="0" cy="0"/>
-          <a:chOff x="0" y="0"/>
-          <a:chExt cx="0" cy="0"/>
-        </a:xfrm>
-      </p:grpSpPr>
-      <p:sp>
-        <p:nvSpPr>
-          <p:cNvPr id="2" name="Slide Image Placeholder 1"/>
-          <p:cNvSpPr>
-            <a:spLocks noGrp="1" noRot="1" noChangeAspect="1"/>
-          </p:cNvSpPr>
-          <p:nvPr>
-            <p:ph type="sldImg"/>
-          </p:nvPr>
-        </p:nvSpPr>
-        <p:spPr/>
-      </p:sp>
-      <p:sp>
-        <p:nvSpPr>
-          <p:cNvPr id="3" name="Notes Placeholder 2"/>
-          <p:cNvSpPr>
-            <a:spLocks noGrp="1"/>
-          </p:cNvSpPr>
-          <p:nvPr>
-            <p:ph type="body" idx="1"/>
-          </p:nvPr>
-        </p:nvSpPr>
-        <p:spPr/>
-        <p:txBody>
-          <a:bodyPr/>
-          <a:lstStyle/>
-          <a:p>
-            <a:r>
-              <a:rPr lang="en-US" dirty="0"/>
-              <a:t>Pergunta 1. Para Hobbes, como é a vida no estado de natureza, antes do Estado? Letra a: Harmoniosa e cooperativa. Letra b: Uma guerra de todos contra todos. Letra c: Organizada pelo mercado. Letra d: Governada pela vontade geral. Pause o vídeo e escolha a sua resposta.</a:t>
-            </a:r>
-            <a:endParaRPr lang="en-US" dirty="0"/>
-          </a:p>
-        </p:txBody>
-      </p:sp>
-      <p:sp>
-        <p:nvSpPr>
-          <p:cNvPr id="4" name="Slide Number Placeholder 3"/>
-          <p:cNvSpPr>
-            <a:spLocks noGrp="1"/>
-          </p:cNvSpPr>
-          <p:nvPr>
-            <p:ph type="sldNum" sz="quarter" idx="10"/>
-          </p:nvPr>
-        </p:nvSpPr>
-        <p:spPr/>
-        <p:txBody>
-          <a:bodyPr/>
-          <a:lstStyle/>
-          <a:p>
-            <a:fld id="{F7021451-1387-4CA6-816F-3879F97B5CBC}" type="slidenum">
-              <a:rPr lang="en-US"/>
-              <a:t>21</a:t>
-            </a:fld>
-            <a:endParaRPr lang="en-US"/>
-          </a:p>
-        </p:txBody>
-      </p:sp>
-    </p:spTree>
-    <p:extLst>
-      <p:ext uri="{BB962C8B-B14F-4D97-AF65-F5344CB8AC3E}">
-        <p14:creationId xmlns:p14="http://schemas.microsoft.com/office/powerpoint/2010/main" val="1024086991"/>
-      </p:ext>
-    </p:extLst>
-  </p:cSld>
-  <p:clrMapOvr>
-    <a:masterClrMapping/>
-  </p:clrMapOvr>
-</p:notes>
-</file>
-
-<file path=ppt/notesSlides/notesSlide22.xml><?xml version="1.0" encoding="utf-8"?>
-<p:notes xmlns:a="http://schemas.openxmlformats.org/drawingml/2006/main" xmlns:r="http://schemas.openxmlformats.org/officeDocument/2006/relationships" xmlns:p="http://schemas.openxmlformats.org/presentationml/2006/main">
-  <p:cSld>
-    <p:spTree>
-      <p:nvGrpSpPr>
-        <p:cNvPr id="1" name=""/>
-        <p:cNvGrpSpPr/>
-        <p:nvPr/>
-      </p:nvGrpSpPr>
-      <p:grpSpPr>
-        <a:xfrm>
-          <a:off x="0" y="0"/>
-          <a:ext cx="0" cy="0"/>
-          <a:chOff x="0" y="0"/>
-          <a:chExt cx="0" cy="0"/>
-        </a:xfrm>
-      </p:grpSpPr>
-      <p:sp>
-        <p:nvSpPr>
-          <p:cNvPr id="2" name="Slide Image Placeholder 1"/>
-          <p:cNvSpPr>
-            <a:spLocks noGrp="1" noRot="1" noChangeAspect="1"/>
-          </p:cNvSpPr>
-          <p:nvPr>
-            <p:ph type="sldImg"/>
-          </p:nvPr>
-        </p:nvSpPr>
-        <p:spPr/>
-      </p:sp>
-      <p:sp>
-        <p:nvSpPr>
-          <p:cNvPr id="3" name="Notes Placeholder 2"/>
-          <p:cNvSpPr>
-            <a:spLocks noGrp="1"/>
-          </p:cNvSpPr>
-          <p:nvPr>
-            <p:ph type="body" idx="1"/>
-          </p:nvPr>
-        </p:nvSpPr>
-        <p:spPr/>
-        <p:txBody>
-          <a:bodyPr/>
-          <a:lstStyle/>
-          <a:p>
-            <a:r>
-              <a:rPr lang="en-US" dirty="0"/>
-              <a:t>A resposta correta é a letra b: Uma guerra de todos contra todos. Sem um poder comum, cada um ameaça o outro. Para obter segurança, os indivíduos transferem o poder a um soberano (o Leviatã).</a:t>
-            </a:r>
-            <a:endParaRPr lang="en-US" dirty="0"/>
-          </a:p>
-        </p:txBody>
-      </p:sp>
-      <p:sp>
-        <p:nvSpPr>
-          <p:cNvPr id="4" name="Slide Number Placeholder 3"/>
-          <p:cNvSpPr>
-            <a:spLocks noGrp="1"/>
-          </p:cNvSpPr>
-          <p:nvPr>
-            <p:ph type="sldNum" sz="quarter" idx="10"/>
-          </p:nvPr>
-        </p:nvSpPr>
-        <p:spPr/>
-        <p:txBody>
-          <a:bodyPr/>
-          <a:lstStyle/>
-          <a:p>
-            <a:fld id="{F7021451-1387-4CA6-816F-3879F97B5CBC}" type="slidenum">
-              <a:rPr lang="en-US"/>
-              <a:t>22</a:t>
-            </a:fld>
-            <a:endParaRPr lang="en-US"/>
-          </a:p>
-        </p:txBody>
-      </p:sp>
-    </p:spTree>
-    <p:extLst>
-      <p:ext uri="{BB962C8B-B14F-4D97-AF65-F5344CB8AC3E}">
-        <p14:creationId xmlns:p14="http://schemas.microsoft.com/office/powerpoint/2010/main" val="1024086991"/>
-      </p:ext>
-    </p:extLst>
-  </p:cSld>
-  <p:clrMapOvr>
-    <a:masterClrMapping/>
-  </p:clrMapOvr>
-</p:notes>
-</file>
-
-<file path=ppt/notesSlides/notesSlide23.xml><?xml version="1.0" encoding="utf-8"?>
-<p:notes xmlns:a="http://schemas.openxmlformats.org/drawingml/2006/main" xmlns:r="http://schemas.openxmlformats.org/officeDocument/2006/relationships" xmlns:p="http://schemas.openxmlformats.org/presentationml/2006/main">
-  <p:cSld>
-    <p:spTree>
-      <p:nvGrpSpPr>
-        <p:cNvPr id="1" name=""/>
-        <p:cNvGrpSpPr/>
-        <p:nvPr/>
-      </p:nvGrpSpPr>
-      <p:grpSpPr>
-        <a:xfrm>
-          <a:off x="0" y="0"/>
-          <a:ext cx="0" cy="0"/>
-          <a:chOff x="0" y="0"/>
-          <a:chExt cx="0" cy="0"/>
-        </a:xfrm>
-      </p:grpSpPr>
-      <p:sp>
-        <p:nvSpPr>
-          <p:cNvPr id="2" name="Slide Image Placeholder 1"/>
-          <p:cNvSpPr>
-            <a:spLocks noGrp="1" noRot="1" noChangeAspect="1"/>
-          </p:cNvSpPr>
-          <p:nvPr>
-            <p:ph type="sldImg"/>
-          </p:nvPr>
-        </p:nvSpPr>
-        <p:spPr/>
-      </p:sp>
-      <p:sp>
-        <p:nvSpPr>
-          <p:cNvPr id="3" name="Notes Placeholder 2"/>
-          <p:cNvSpPr>
-            <a:spLocks noGrp="1"/>
-          </p:cNvSpPr>
-          <p:nvPr>
-            <p:ph type="body" idx="1"/>
-          </p:nvPr>
-        </p:nvSpPr>
-        <p:spPr/>
-        <p:txBody>
-          <a:bodyPr/>
-          <a:lstStyle/>
-          <a:p>
-            <a:r>
-              <a:rPr lang="en-US" dirty="0"/>
-              <a:t>Pergunta 2. Os direitos naturais à vida, à liberdade e à propriedade são a base do pensamento de: Letra a: John Locke. Letra b: Thomas Hobbes. Letra c: Karl Marx. Letra d: John Maynard Keynes. Pause o vídeo e escolha a sua resposta.</a:t>
-            </a:r>
-            <a:endParaRPr lang="en-US" dirty="0"/>
-          </a:p>
-        </p:txBody>
-      </p:sp>
-      <p:sp>
-        <p:nvSpPr>
-          <p:cNvPr id="4" name="Slide Number Placeholder 3"/>
-          <p:cNvSpPr>
-            <a:spLocks noGrp="1"/>
-          </p:cNvSpPr>
-          <p:nvPr>
-            <p:ph type="sldNum" sz="quarter" idx="10"/>
-          </p:nvPr>
-        </p:nvSpPr>
-        <p:spPr/>
-        <p:txBody>
-          <a:bodyPr/>
-          <a:lstStyle/>
-          <a:p>
-            <a:fld id="{F7021451-1387-4CA6-816F-3879F97B5CBC}" type="slidenum">
-              <a:rPr lang="en-US"/>
-              <a:t>23</a:t>
-            </a:fld>
-            <a:endParaRPr lang="en-US"/>
-          </a:p>
-        </p:txBody>
-      </p:sp>
-    </p:spTree>
-    <p:extLst>
-      <p:ext uri="{BB962C8B-B14F-4D97-AF65-F5344CB8AC3E}">
-        <p14:creationId xmlns:p14="http://schemas.microsoft.com/office/powerpoint/2010/main" val="1024086991"/>
-      </p:ext>
-    </p:extLst>
-  </p:cSld>
-  <p:clrMapOvr>
-    <a:masterClrMapping/>
-  </p:clrMapOvr>
-</p:notes>
-</file>
-
-<file path=ppt/notesSlides/notesSlide24.xml><?xml version="1.0" encoding="utf-8"?>
-<p:notes xmlns:a="http://schemas.openxmlformats.org/drawingml/2006/main" xmlns:r="http://schemas.openxmlformats.org/officeDocument/2006/relationships" xmlns:p="http://schemas.openxmlformats.org/presentationml/2006/main">
-  <p:cSld>
-    <p:spTree>
-      <p:nvGrpSpPr>
-        <p:cNvPr id="1" name=""/>
-        <p:cNvGrpSpPr/>
-        <p:nvPr/>
-      </p:nvGrpSpPr>
-      <p:grpSpPr>
-        <a:xfrm>
-          <a:off x="0" y="0"/>
-          <a:ext cx="0" cy="0"/>
-          <a:chOff x="0" y="0"/>
-          <a:chExt cx="0" cy="0"/>
-        </a:xfrm>
-      </p:grpSpPr>
-      <p:sp>
-        <p:nvSpPr>
-          <p:cNvPr id="2" name="Slide Image Placeholder 1"/>
-          <p:cNvSpPr>
-            <a:spLocks noGrp="1" noRot="1" noChangeAspect="1"/>
-          </p:cNvSpPr>
-          <p:nvPr>
-            <p:ph type="sldImg"/>
-          </p:nvPr>
-        </p:nvSpPr>
-        <p:spPr/>
-      </p:sp>
-      <p:sp>
-        <p:nvSpPr>
-          <p:cNvPr id="3" name="Notes Placeholder 2"/>
-          <p:cNvSpPr>
-            <a:spLocks noGrp="1"/>
-          </p:cNvSpPr>
-          <p:nvPr>
-            <p:ph type="body" idx="1"/>
-          </p:nvPr>
-        </p:nvSpPr>
-        <p:spPr/>
-        <p:txBody>
-          <a:bodyPr/>
-          <a:lstStyle/>
-          <a:p>
-            <a:r>
-              <a:rPr lang="en-US" dirty="0"/>
-              <a:t>A resposta correta é a letra a: John Locke. Locke funda o liberalismo político: o governo existe para proteger esses direitos e tem poder limitado.</a:t>
-            </a:r>
-            <a:endParaRPr lang="en-US" dirty="0"/>
-          </a:p>
-        </p:txBody>
-      </p:sp>
-      <p:sp>
-        <p:nvSpPr>
-          <p:cNvPr id="4" name="Slide Number Placeholder 3"/>
-          <p:cNvSpPr>
-            <a:spLocks noGrp="1"/>
-          </p:cNvSpPr>
-          <p:nvPr>
-            <p:ph type="sldNum" sz="quarter" idx="10"/>
-          </p:nvPr>
-        </p:nvSpPr>
-        <p:spPr/>
-        <p:txBody>
-          <a:bodyPr/>
-          <a:lstStyle/>
-          <a:p>
-            <a:fld id="{F7021451-1387-4CA6-816F-3879F97B5CBC}" type="slidenum">
-              <a:rPr lang="en-US"/>
-              <a:t>24</a:t>
-            </a:fld>
-            <a:endParaRPr lang="en-US"/>
-          </a:p>
-        </p:txBody>
-      </p:sp>
-    </p:spTree>
-    <p:extLst>
-      <p:ext uri="{BB962C8B-B14F-4D97-AF65-F5344CB8AC3E}">
-        <p14:creationId xmlns:p14="http://schemas.microsoft.com/office/powerpoint/2010/main" val="1024086991"/>
-      </p:ext>
-    </p:extLst>
-  </p:cSld>
-  <p:clrMapOvr>
-    <a:masterClrMapping/>
-  </p:clrMapOvr>
-</p:notes>
-</file>
-
-<file path=ppt/notesSlides/notesSlide25.xml><?xml version="1.0" encoding="utf-8"?>
-<p:notes xmlns:a="http://schemas.openxmlformats.org/drawingml/2006/main" xmlns:r="http://schemas.openxmlformats.org/officeDocument/2006/relationships" xmlns:p="http://schemas.openxmlformats.org/presentationml/2006/main">
-  <p:cSld>
-    <p:spTree>
-      <p:nvGrpSpPr>
-        <p:cNvPr id="1" name=""/>
-        <p:cNvGrpSpPr/>
-        <p:nvPr/>
-      </p:nvGrpSpPr>
-      <p:grpSpPr>
-        <a:xfrm>
-          <a:off x="0" y="0"/>
-          <a:ext cx="0" cy="0"/>
-          <a:chOff x="0" y="0"/>
-          <a:chExt cx="0" cy="0"/>
-        </a:xfrm>
-      </p:grpSpPr>
-      <p:sp>
-        <p:nvSpPr>
-          <p:cNvPr id="2" name="Slide Image Placeholder 1"/>
-          <p:cNvSpPr>
-            <a:spLocks noGrp="1" noRot="1" noChangeAspect="1"/>
-          </p:cNvSpPr>
-          <p:nvPr>
-            <p:ph type="sldImg"/>
-          </p:nvPr>
-        </p:nvSpPr>
-        <p:spPr/>
-      </p:sp>
-      <p:sp>
-        <p:nvSpPr>
-          <p:cNvPr id="3" name="Notes Placeholder 2"/>
-          <p:cNvSpPr>
-            <a:spLocks noGrp="1"/>
-          </p:cNvSpPr>
-          <p:nvPr>
-            <p:ph type="body" idx="1"/>
-          </p:nvPr>
-        </p:nvSpPr>
-        <p:spPr/>
-        <p:txBody>
-          <a:bodyPr/>
-          <a:lstStyle/>
-          <a:p>
-            <a:r>
-              <a:rPr lang="en-US" dirty="0"/>
-              <a:t>Pergunta 3. A ideia de que “o poder deve frear o poder”, base da separação dos poderes, é de: Letra a: Rousseau. Letra b: Adam Smith. Letra c: Montesquieu. Letra d: Jean-Baptiste Say. Pause o vídeo e escolha a sua resposta.</a:t>
-            </a:r>
-            <a:endParaRPr lang="en-US" dirty="0"/>
-          </a:p>
-        </p:txBody>
-      </p:sp>
-      <p:sp>
-        <p:nvSpPr>
-          <p:cNvPr id="4" name="Slide Number Placeholder 3"/>
-          <p:cNvSpPr>
-            <a:spLocks noGrp="1"/>
-          </p:cNvSpPr>
-          <p:nvPr>
-            <p:ph type="sldNum" sz="quarter" idx="10"/>
-          </p:nvPr>
-        </p:nvSpPr>
-        <p:spPr/>
-        <p:txBody>
-          <a:bodyPr/>
-          <a:lstStyle/>
-          <a:p>
-            <a:fld id="{F7021451-1387-4CA6-816F-3879F97B5CBC}" type="slidenum">
-              <a:rPr lang="en-US"/>
-              <a:t>25</a:t>
-            </a:fld>
-            <a:endParaRPr lang="en-US"/>
-          </a:p>
-        </p:txBody>
-      </p:sp>
-    </p:spTree>
-    <p:extLst>
-      <p:ext uri="{BB962C8B-B14F-4D97-AF65-F5344CB8AC3E}">
-        <p14:creationId xmlns:p14="http://schemas.microsoft.com/office/powerpoint/2010/main" val="1024086991"/>
-      </p:ext>
-    </p:extLst>
-  </p:cSld>
-  <p:clrMapOvr>
-    <a:masterClrMapping/>
-  </p:clrMapOvr>
-</p:notes>
-</file>
-
-<file path=ppt/notesSlides/notesSlide26.xml><?xml version="1.0" encoding="utf-8"?>
-<p:notes xmlns:a="http://schemas.openxmlformats.org/drawingml/2006/main" xmlns:r="http://schemas.openxmlformats.org/officeDocument/2006/relationships" xmlns:p="http://schemas.openxmlformats.org/presentationml/2006/main">
-  <p:cSld>
-    <p:spTree>
-      <p:nvGrpSpPr>
-        <p:cNvPr id="1" name=""/>
-        <p:cNvGrpSpPr/>
-        <p:nvPr/>
-      </p:nvGrpSpPr>
-      <p:grpSpPr>
-        <a:xfrm>
-          <a:off x="0" y="0"/>
-          <a:ext cx="0" cy="0"/>
-          <a:chOff x="0" y="0"/>
-          <a:chExt cx="0" cy="0"/>
-        </a:xfrm>
-      </p:grpSpPr>
-      <p:sp>
-        <p:nvSpPr>
-          <p:cNvPr id="2" name="Slide Image Placeholder 1"/>
-          <p:cNvSpPr>
-            <a:spLocks noGrp="1" noRot="1" noChangeAspect="1"/>
-          </p:cNvSpPr>
-          <p:nvPr>
-            <p:ph type="sldImg"/>
-          </p:nvPr>
-        </p:nvSpPr>
-        <p:spPr/>
-      </p:sp>
-      <p:sp>
-        <p:nvSpPr>
-          <p:cNvPr id="3" name="Notes Placeholder 2"/>
-          <p:cNvSpPr>
-            <a:spLocks noGrp="1"/>
-          </p:cNvSpPr>
-          <p:nvPr>
-            <p:ph type="body" idx="1"/>
-          </p:nvPr>
-        </p:nvSpPr>
-        <p:spPr/>
-        <p:txBody>
-          <a:bodyPr/>
-          <a:lstStyle/>
-          <a:p>
-            <a:r>
-              <a:rPr lang="en-US" dirty="0"/>
-              <a:t>A resposta correta é a letra c: Montesquieu. Montesquieu, em O Espírito das Leis (1748). A Constituição de 1988 adota a separação no art. 2º.</a:t>
-            </a:r>
-            <a:endParaRPr lang="en-US" dirty="0"/>
-          </a:p>
-        </p:txBody>
-      </p:sp>
-      <p:sp>
-        <p:nvSpPr>
-          <p:cNvPr id="4" name="Slide Number Placeholder 3"/>
-          <p:cNvSpPr>
-            <a:spLocks noGrp="1"/>
-          </p:cNvSpPr>
-          <p:nvPr>
-            <p:ph type="sldNum" sz="quarter" idx="10"/>
-          </p:nvPr>
-        </p:nvSpPr>
-        <p:spPr/>
-        <p:txBody>
-          <a:bodyPr/>
-          <a:lstStyle/>
-          <a:p>
-            <a:fld id="{F7021451-1387-4CA6-816F-3879F97B5CBC}" type="slidenum">
-              <a:rPr lang="en-US"/>
-              <a:t>26</a:t>
-            </a:fld>
-            <a:endParaRPr lang="en-US"/>
-          </a:p>
-        </p:txBody>
-      </p:sp>
-    </p:spTree>
-    <p:extLst>
-      <p:ext uri="{BB962C8B-B14F-4D97-AF65-F5344CB8AC3E}">
-        <p14:creationId xmlns:p14="http://schemas.microsoft.com/office/powerpoint/2010/main" val="1024086991"/>
-      </p:ext>
-    </p:extLst>
-  </p:cSld>
-  <p:clrMapOvr>
-    <a:masterClrMapping/>
-  </p:clrMapOvr>
-</p:notes>
-</file>
-
-<file path=ppt/notesSlides/notesSlide27.xml><?xml version="1.0" encoding="utf-8"?>
-<p:notes xmlns:a="http://schemas.openxmlformats.org/drawingml/2006/main" xmlns:r="http://schemas.openxmlformats.org/officeDocument/2006/relationships" xmlns:p="http://schemas.openxmlformats.org/presentationml/2006/main">
-  <p:cSld>
-    <p:spTree>
-      <p:nvGrpSpPr>
-        <p:cNvPr id="1" name=""/>
-        <p:cNvGrpSpPr/>
-        <p:nvPr/>
-      </p:nvGrpSpPr>
-      <p:grpSpPr>
-        <a:xfrm>
-          <a:off x="0" y="0"/>
-          <a:ext cx="0" cy="0"/>
-          <a:chOff x="0" y="0"/>
-          <a:chExt cx="0" cy="0"/>
-        </a:xfrm>
-      </p:grpSpPr>
-      <p:sp>
-        <p:nvSpPr>
-          <p:cNvPr id="2" name="Slide Image Placeholder 1"/>
-          <p:cNvSpPr>
-            <a:spLocks noGrp="1" noRot="1" noChangeAspect="1"/>
-          </p:cNvSpPr>
-          <p:nvPr>
-            <p:ph type="sldImg"/>
-          </p:nvPr>
-        </p:nvSpPr>
-        <p:spPr/>
-      </p:sp>
-      <p:sp>
-        <p:nvSpPr>
-          <p:cNvPr id="3" name="Notes Placeholder 2"/>
-          <p:cNvSpPr>
-            <a:spLocks noGrp="1"/>
-          </p:cNvSpPr>
-          <p:nvPr>
-            <p:ph type="body" idx="1"/>
-          </p:nvPr>
-        </p:nvSpPr>
-        <p:spPr/>
-        <p:txBody>
-          <a:bodyPr/>
-          <a:lstStyle/>
-          <a:p>
-            <a:r>
-              <a:rPr lang="en-US" dirty="0"/>
-              <a:t>Pergunta 4. Pela teoria das vantagens comparativas de Ricardo, os países ganham ao: Letra a: Produzir tudo internamente. Letra b: Especializar-se no que produzem com menor custo relativo e trocar. Letra c: Proibir importações. Letra d: Acumular ouro e prata. Pause o vídeo e escolha a sua resposta.</a:t>
-            </a:r>
-            <a:endParaRPr lang="en-US" dirty="0"/>
-          </a:p>
-        </p:txBody>
-      </p:sp>
-      <p:sp>
-        <p:nvSpPr>
-          <p:cNvPr id="4" name="Slide Number Placeholder 3"/>
-          <p:cNvSpPr>
-            <a:spLocks noGrp="1"/>
-          </p:cNvSpPr>
-          <p:nvPr>
-            <p:ph type="sldNum" sz="quarter" idx="10"/>
-          </p:nvPr>
-        </p:nvSpPr>
-        <p:spPr/>
-        <p:txBody>
-          <a:bodyPr/>
-          <a:lstStyle/>
-          <a:p>
-            <a:fld id="{F7021451-1387-4CA6-816F-3879F97B5CBC}" type="slidenum">
-              <a:rPr lang="en-US"/>
-              <a:t>27</a:t>
-            </a:fld>
-            <a:endParaRPr lang="en-US"/>
-          </a:p>
-        </p:txBody>
-      </p:sp>
-    </p:spTree>
-    <p:extLst>
-      <p:ext uri="{BB962C8B-B14F-4D97-AF65-F5344CB8AC3E}">
-        <p14:creationId xmlns:p14="http://schemas.microsoft.com/office/powerpoint/2010/main" val="1024086991"/>
-      </p:ext>
-    </p:extLst>
-  </p:cSld>
-  <p:clrMapOvr>
-    <a:masterClrMapping/>
-  </p:clrMapOvr>
-</p:notes>
-</file>
-
-<file path=ppt/notesSlides/notesSlide28.xml><?xml version="1.0" encoding="utf-8"?>
-<p:notes xmlns:a="http://schemas.openxmlformats.org/drawingml/2006/main" xmlns:r="http://schemas.openxmlformats.org/officeDocument/2006/relationships" xmlns:p="http://schemas.openxmlformats.org/presentationml/2006/main">
-  <p:cSld>
-    <p:spTree>
-      <p:nvGrpSpPr>
-        <p:cNvPr id="1" name=""/>
-        <p:cNvGrpSpPr/>
-        <p:nvPr/>
-      </p:nvGrpSpPr>
-      <p:grpSpPr>
-        <a:xfrm>
-          <a:off x="0" y="0"/>
-          <a:ext cx="0" cy="0"/>
-          <a:chOff x="0" y="0"/>
-          <a:chExt cx="0" cy="0"/>
-        </a:xfrm>
-      </p:grpSpPr>
-      <p:sp>
-        <p:nvSpPr>
-          <p:cNvPr id="2" name="Slide Image Placeholder 1"/>
-          <p:cNvSpPr>
-            <a:spLocks noGrp="1" noRot="1" noChangeAspect="1"/>
-          </p:cNvSpPr>
-          <p:nvPr>
-            <p:ph type="sldImg"/>
-          </p:nvPr>
-        </p:nvSpPr>
-        <p:spPr/>
-      </p:sp>
-      <p:sp>
-        <p:nvSpPr>
-          <p:cNvPr id="3" name="Notes Placeholder 2"/>
-          <p:cNvSpPr>
-            <a:spLocks noGrp="1"/>
-          </p:cNvSpPr>
-          <p:nvPr>
-            <p:ph type="body" idx="1"/>
-          </p:nvPr>
-        </p:nvSpPr>
-        <p:spPr/>
-        <p:txBody>
-          <a:bodyPr/>
-          <a:lstStyle/>
-          <a:p>
-            <a:r>
-              <a:rPr lang="en-US" dirty="0"/>
-              <a:t>A resposta correta é a letra b: Especializar-se no que produzem com menor custo relativo e trocar. A especialização e o livre comércio aumentam a produção total e beneficiam os países que trocam.</a:t>
-            </a:r>
-            <a:endParaRPr lang="en-US" dirty="0"/>
-          </a:p>
-        </p:txBody>
-      </p:sp>
-      <p:sp>
-        <p:nvSpPr>
-          <p:cNvPr id="4" name="Slide Number Placeholder 3"/>
-          <p:cNvSpPr>
-            <a:spLocks noGrp="1"/>
-          </p:cNvSpPr>
-          <p:nvPr>
-            <p:ph type="sldNum" sz="quarter" idx="10"/>
-          </p:nvPr>
-        </p:nvSpPr>
-        <p:spPr/>
-        <p:txBody>
-          <a:bodyPr/>
-          <a:lstStyle/>
-          <a:p>
-            <a:fld id="{F7021451-1387-4CA6-816F-3879F97B5CBC}" type="slidenum">
-              <a:rPr lang="en-US"/>
-              <a:t>28</a:t>
-            </a:fld>
-            <a:endParaRPr lang="en-US"/>
-          </a:p>
-        </p:txBody>
-      </p:sp>
-    </p:spTree>
-    <p:extLst>
-      <p:ext uri="{BB962C8B-B14F-4D97-AF65-F5344CB8AC3E}">
-        <p14:creationId xmlns:p14="http://schemas.microsoft.com/office/powerpoint/2010/main" val="1024086991"/>
-      </p:ext>
-    </p:extLst>
-  </p:cSld>
-  <p:clrMapOvr>
-    <a:masterClrMapping/>
-  </p:clrMapOvr>
-</p:notes>
-</file>
-
-<file path=ppt/notesSlides/notesSlide29.xml><?xml version="1.0" encoding="utf-8"?>
-<p:notes xmlns:a="http://schemas.openxmlformats.org/drawingml/2006/main" xmlns:r="http://schemas.openxmlformats.org/officeDocument/2006/relationships" xmlns:p="http://schemas.openxmlformats.org/presentationml/2006/main">
-  <p:cSld>
-    <p:spTree>
-      <p:nvGrpSpPr>
-        <p:cNvPr id="1" name=""/>
-        <p:cNvGrpSpPr/>
-        <p:nvPr/>
-      </p:nvGrpSpPr>
-      <p:grpSpPr>
-        <a:xfrm>
-          <a:off x="0" y="0"/>
-          <a:ext cx="0" cy="0"/>
-          <a:chOff x="0" y="0"/>
-          <a:chExt cx="0" cy="0"/>
-        </a:xfrm>
-      </p:grpSpPr>
-      <p:sp>
-        <p:nvSpPr>
-          <p:cNvPr id="2" name="Slide Image Placeholder 1"/>
-          <p:cNvSpPr>
-            <a:spLocks noGrp="1" noRot="1" noChangeAspect="1"/>
-          </p:cNvSpPr>
-          <p:nvPr>
-            <p:ph type="sldImg"/>
-          </p:nvPr>
-        </p:nvSpPr>
-        <p:spPr/>
-      </p:sp>
-      <p:sp>
-        <p:nvSpPr>
-          <p:cNvPr id="3" name="Notes Placeholder 2"/>
-          <p:cNvSpPr>
-            <a:spLocks noGrp="1"/>
-          </p:cNvSpPr>
-          <p:nvPr>
-            <p:ph type="body" idx="1"/>
-          </p:nvPr>
-        </p:nvSpPr>
-        <p:spPr/>
-        <p:txBody>
-          <a:bodyPr/>
-          <a:lstStyle/>
-          <a:p>
-            <a:r>
-              <a:rPr lang="en-US" dirty="0"/>
-              <a:t>Pergunta 5. Por que o pêndulo entre Estado e mercado se move? Letra a: Cada extremo gera problemas que levam a correções no sentido oposto. Letra b: O Estado sempre cresce. Letra c: O mercado sempre vence no longo prazo. Letra d: Depende apenas do resultado das eleições. Pause o vídeo e escolha a sua resposta.</a:t>
-            </a:r>
-            <a:endParaRPr lang="en-US" dirty="0"/>
-          </a:p>
-        </p:txBody>
-      </p:sp>
-      <p:sp>
-        <p:nvSpPr>
-          <p:cNvPr id="4" name="Slide Number Placeholder 3"/>
-          <p:cNvSpPr>
-            <a:spLocks noGrp="1"/>
-          </p:cNvSpPr>
-          <p:nvPr>
-            <p:ph type="sldNum" sz="quarter" idx="10"/>
-          </p:nvPr>
-        </p:nvSpPr>
-        <p:spPr/>
-        <p:txBody>
-          <a:bodyPr/>
-          <a:lstStyle/>
-          <a:p>
-            <a:fld id="{F7021451-1387-4CA6-816F-3879F97B5CBC}" type="slidenum">
-              <a:rPr lang="en-US"/>
-              <a:t>29</a:t>
             </a:fld>
             <a:endParaRPr lang="en-US"/>
           </a:p>
@@ -2726,182 +1923,6 @@
             <a:fld id="{F7021451-1387-4CA6-816F-3879F97B5CBC}" type="slidenum">
               <a:rPr lang="en-US"/>
               <a:t>3</a:t>
-            </a:fld>
-            <a:endParaRPr lang="en-US"/>
-          </a:p>
-        </p:txBody>
-      </p:sp>
-    </p:spTree>
-    <p:extLst>
-      <p:ext uri="{BB962C8B-B14F-4D97-AF65-F5344CB8AC3E}">
-        <p14:creationId xmlns:p14="http://schemas.microsoft.com/office/powerpoint/2010/main" val="1024086991"/>
-      </p:ext>
-    </p:extLst>
-  </p:cSld>
-  <p:clrMapOvr>
-    <a:masterClrMapping/>
-  </p:clrMapOvr>
-</p:notes>
-</file>
-
-<file path=ppt/notesSlides/notesSlide30.xml><?xml version="1.0" encoding="utf-8"?>
-<p:notes xmlns:a="http://schemas.openxmlformats.org/drawingml/2006/main" xmlns:r="http://schemas.openxmlformats.org/officeDocument/2006/relationships" xmlns:p="http://schemas.openxmlformats.org/presentationml/2006/main">
-  <p:cSld>
-    <p:spTree>
-      <p:nvGrpSpPr>
-        <p:cNvPr id="1" name=""/>
-        <p:cNvGrpSpPr/>
-        <p:nvPr/>
-      </p:nvGrpSpPr>
-      <p:grpSpPr>
-        <a:xfrm>
-          <a:off x="0" y="0"/>
-          <a:ext cx="0" cy="0"/>
-          <a:chOff x="0" y="0"/>
-          <a:chExt cx="0" cy="0"/>
-        </a:xfrm>
-      </p:grpSpPr>
-      <p:sp>
-        <p:nvSpPr>
-          <p:cNvPr id="2" name="Slide Image Placeholder 1"/>
-          <p:cNvSpPr>
-            <a:spLocks noGrp="1" noRot="1" noChangeAspect="1"/>
-          </p:cNvSpPr>
-          <p:nvPr>
-            <p:ph type="sldImg"/>
-          </p:nvPr>
-        </p:nvSpPr>
-        <p:spPr/>
-      </p:sp>
-      <p:sp>
-        <p:nvSpPr>
-          <p:cNvPr id="3" name="Notes Placeholder 2"/>
-          <p:cNvSpPr>
-            <a:spLocks noGrp="1"/>
-          </p:cNvSpPr>
-          <p:nvPr>
-            <p:ph type="body" idx="1"/>
-          </p:nvPr>
-        </p:nvSpPr>
-        <p:spPr/>
-        <p:txBody>
-          <a:bodyPr/>
-          <a:lstStyle/>
-          <a:p>
-            <a:r>
-              <a:rPr lang="en-US" dirty="0"/>
-              <a:t>A resposta correta é a letra a: Cada extremo gera problemas que levam a correções no sentido oposto. Falhas de mercado (crises, desigualdade) pedem mais Estado; falhas de governo (crise fiscal, ineficiência) pedem mais mercado.</a:t>
-            </a:r>
-            <a:endParaRPr lang="en-US" dirty="0"/>
-          </a:p>
-        </p:txBody>
-      </p:sp>
-      <p:sp>
-        <p:nvSpPr>
-          <p:cNvPr id="4" name="Slide Number Placeholder 3"/>
-          <p:cNvSpPr>
-            <a:spLocks noGrp="1"/>
-          </p:cNvSpPr>
-          <p:nvPr>
-            <p:ph type="sldNum" sz="quarter" idx="10"/>
-          </p:nvPr>
-        </p:nvSpPr>
-        <p:spPr/>
-        <p:txBody>
-          <a:bodyPr/>
-          <a:lstStyle/>
-          <a:p>
-            <a:fld id="{F7021451-1387-4CA6-816F-3879F97B5CBC}" type="slidenum">
-              <a:rPr lang="en-US"/>
-              <a:t>30</a:t>
-            </a:fld>
-            <a:endParaRPr lang="en-US"/>
-          </a:p>
-        </p:txBody>
-      </p:sp>
-    </p:spTree>
-    <p:extLst>
-      <p:ext uri="{BB962C8B-B14F-4D97-AF65-F5344CB8AC3E}">
-        <p14:creationId xmlns:p14="http://schemas.microsoft.com/office/powerpoint/2010/main" val="1024086991"/>
-      </p:ext>
-    </p:extLst>
-  </p:cSld>
-  <p:clrMapOvr>
-    <a:masterClrMapping/>
-  </p:clrMapOvr>
-</p:notes>
-</file>
-
-<file path=ppt/notesSlides/notesSlide31.xml><?xml version="1.0" encoding="utf-8"?>
-<p:notes xmlns:a="http://schemas.openxmlformats.org/drawingml/2006/main" xmlns:r="http://schemas.openxmlformats.org/officeDocument/2006/relationships" xmlns:p="http://schemas.openxmlformats.org/presentationml/2006/main">
-  <p:cSld>
-    <p:spTree>
-      <p:nvGrpSpPr>
-        <p:cNvPr id="1" name=""/>
-        <p:cNvGrpSpPr/>
-        <p:nvPr/>
-      </p:nvGrpSpPr>
-      <p:grpSpPr>
-        <a:xfrm>
-          <a:off x="0" y="0"/>
-          <a:ext cx="0" cy="0"/>
-          <a:chOff x="0" y="0"/>
-          <a:chExt cx="0" cy="0"/>
-        </a:xfrm>
-      </p:grpSpPr>
-      <p:sp>
-        <p:nvSpPr>
-          <p:cNvPr id="2" name="Slide Image Placeholder 1"/>
-          <p:cNvSpPr>
-            <a:spLocks noGrp="1" noRot="1" noChangeAspect="1"/>
-          </p:cNvSpPr>
-          <p:nvPr>
-            <p:ph type="sldImg"/>
-          </p:nvPr>
-        </p:nvSpPr>
-        <p:spPr/>
-      </p:sp>
-      <p:sp>
-        <p:nvSpPr>
-          <p:cNvPr id="3" name="Notes Placeholder 2"/>
-          <p:cNvSpPr>
-            <a:spLocks noGrp="1"/>
-          </p:cNvSpPr>
-          <p:nvPr>
-            <p:ph type="body" idx="1"/>
-          </p:nvPr>
-        </p:nvSpPr>
-        <p:spPr/>
-        <p:txBody>
-          <a:bodyPr/>
-          <a:lstStyle/>
-          <a:p>
-            <a:r>
-              <a:rPr lang="en-US" dirty="0"/>
-              <a:t>Para fechar a Unidade 2, vamos recapitular. [Apontar para o quadro da esquerda.] No tópico 3, vimos a dinâmica pendular: ora a sociedade pede mais mercado, ora mais Estado, porque cada extremo gera problemas que impulsionam o movimento de volta. Percorremos os marcos, do liberalismo do século XIX à crise de 1929, aos anos dourados, à estagflação, ao neoliberalismo e às crises de 2008 e 2020, e vimos como o pêndulo se moveu no Brasil. [Apontar para o quadro da direita.] No tópico 4, estudamos a matriz liberal, uma reação ao absolutismo e ao mercantilismo. Locke defendeu os direitos naturais e o governo limitado; Montesquieu, a separação dos poderes; Smith, a divisão do trabalho, a mão invisível e um Estado mínimo com três deveres; Ricardo, o livre comércio; e Say, a ideia de que a oferta cria a sua própria procura. Vimos também os limites desse Estado mínimo no século XIX. Na próxima unidade, a matriz marxista. Boa prova na A1, e nos vemos no encontro síncrono de segunda-feira, 26 de outubro, às 19h!</a:t>
-            </a:r>
-            <a:endParaRPr lang="en-US" dirty="0"/>
-          </a:p>
-        </p:txBody>
-      </p:sp>
-      <p:sp>
-        <p:nvSpPr>
-          <p:cNvPr id="4" name="Slide Number Placeholder 3"/>
-          <p:cNvSpPr>
-            <a:spLocks noGrp="1"/>
-          </p:cNvSpPr>
-          <p:nvPr>
-            <p:ph type="sldNum" sz="quarter" idx="10"/>
-          </p:nvPr>
-        </p:nvSpPr>
-        <p:spPr/>
-        <p:txBody>
-          <a:bodyPr/>
-          <a:lstStyle/>
-          <a:p>
-            <a:fld id="{F7021451-1387-4CA6-816F-3879F97B5CBC}" type="slidenum">
-              <a:rPr lang="en-US"/>
-              <a:t>31</a:t>
             </a:fld>
             <a:endParaRPr lang="en-US"/>
           </a:p>
@@ -10328,6 +9349,144 @@
                   </a:tcPr>
                 </a:tc>
               </a:tr>
+              <a:tr h="0">
+                <a:tc>
+                  <a:txBody>
+                    <a:bodyPr/>
+                    <a:lstStyle/>
+                    <a:p>
+                      <a:pPr indent="0" marL="0">
+                        <a:buNone/>
+                      </a:pPr>
+                      <a:r>
+                        <a:rPr lang="en-US" sz="1350" dirty="0">
+                          <a:solidFill>
+                            <a:srgbClr val="1F2A37"/>
+                          </a:solidFill>
+                          <a:latin typeface="Calibri" pitchFamily="34" charset="0"/>
+                          <a:ea typeface="Calibri" pitchFamily="34" charset="-122"/>
+                          <a:cs typeface="Calibri" pitchFamily="34" charset="-120"/>
+                        </a:rPr>
+                        <a:t>Na página</a:t>
+                      </a:r>
+                      <a:endParaRPr lang="en-US" sz="1350" dirty="0">
+                        <a:latin typeface="Calibri" charset="0"/>
+                        <a:ea typeface="Calibri" charset="0"/>
+                        <a:cs typeface="Calibri" charset="0"/>
+                      </a:endParaRPr>
+                    </a:p>
+                  </a:txBody>
+                  <a:tcPr marL="50800" marR="50800" marT="50800" marB="50800" anchor="ctr">
+                    <a:lnL w="9525" cap="flat" cmpd="sng" algn="ctr">
+                      <a:solidFill>
+                        <a:srgbClr val="DCD5C1"/>
+                      </a:solidFill>
+                      <a:prstDash val="solid"/>
+                      <a:round/>
+                      <a:headEnd type="none" w="med" len="med"/>
+                      <a:tailEnd type="none" w="med" len="med"/>
+                    </a:lnL>
+                    <a:lnR w="9525" cap="flat" cmpd="sng" algn="ctr">
+                      <a:solidFill>
+                        <a:srgbClr val="DCD5C1"/>
+                      </a:solidFill>
+                      <a:prstDash val="solid"/>
+                      <a:round/>
+                      <a:headEnd type="none" w="med" len="med"/>
+                      <a:tailEnd type="none" w="med" len="med"/>
+                    </a:lnR>
+                    <a:lnT w="9525" cap="flat" cmpd="sng" algn="ctr">
+                      <a:solidFill>
+                        <a:srgbClr val="DCD5C1"/>
+                      </a:solidFill>
+                      <a:prstDash val="solid"/>
+                      <a:round/>
+                      <a:headEnd type="none" w="med" len="med"/>
+                      <a:tailEnd type="none" w="med" len="med"/>
+                    </a:lnT>
+                    <a:lnB w="9525" cap="flat" cmpd="sng" algn="ctr">
+                      <a:solidFill>
+                        <a:srgbClr val="DCD5C1"/>
+                      </a:solidFill>
+                      <a:prstDash val="solid"/>
+                      <a:round/>
+                      <a:headEnd type="none" w="med" len="med"/>
+                      <a:tailEnd type="none" w="med" len="med"/>
+                    </a:lnB>
+                    <a:solidFill>
+                      <a:srgbClr val="FFFFFF"/>
+                    </a:solidFill>
+                  </a:tcPr>
+                </a:tc>
+                <a:tc>
+                  <a:txBody>
+                    <a:bodyPr/>
+                    <a:lstStyle/>
+                    <a:p>
+                      <a:pPr indent="0" marL="0">
+                        <a:buNone/>
+                      </a:pPr>
+                      <a:r>
+                        <a:rPr lang="en-US" sz="1350" dirty="0">
+                          <a:solidFill>
+                            <a:srgbClr val="1F2A37"/>
+                          </a:solidFill>
+                          <a:latin typeface="Calibri" pitchFamily="34" charset="0"/>
+                          <a:ea typeface="Calibri" pitchFamily="34" charset="-122"/>
+                          <a:cs typeface="Calibri" pitchFamily="34" charset="-120"/>
+                        </a:rPr>
+                        <a:t>Quiz de revisão da Unidade 2: 5 perguntas com resposta comentada (sem nota)</a:t>
+                      </a:r>
+                      <a:endParaRPr lang="en-US" sz="1350" dirty="0">
+                        <a:latin typeface="Calibri" charset="0"/>
+                        <a:ea typeface="Calibri" charset="0"/>
+                        <a:cs typeface="Calibri" charset="0"/>
+                      </a:endParaRPr>
+                    </a:p>
+                  </a:txBody>
+                  <a:tcPr marL="50800" marR="50800" marT="50800" marB="50800" anchor="ctr">
+                    <a:lnL w="9525" cap="flat" cmpd="sng" algn="ctr">
+                      <a:solidFill>
+                        <a:srgbClr val="DCD5C1"/>
+                      </a:solidFill>
+                      <a:prstDash val="solid"/>
+                      <a:round/>
+                      <a:headEnd type="none" w="med" len="med"/>
+                      <a:tailEnd type="none" w="med" len="med"/>
+                    </a:lnL>
+                    <a:lnR w="9525" cap="flat" cmpd="sng" algn="ctr">
+                      <a:solidFill>
+                        <a:srgbClr val="DCD5C1"/>
+                      </a:solidFill>
+                      <a:prstDash val="solid"/>
+                      <a:round/>
+                      <a:headEnd type="none" w="med" len="med"/>
+                      <a:tailEnd type="none" w="med" len="med"/>
+                    </a:lnR>
+                    <a:lnT w="9525" cap="flat" cmpd="sng" algn="ctr">
+                      <a:solidFill>
+                        <a:srgbClr val="DCD5C1"/>
+                      </a:solidFill>
+                      <a:prstDash val="solid"/>
+                      <a:round/>
+                      <a:headEnd type="none" w="med" len="med"/>
+                      <a:tailEnd type="none" w="med" len="med"/>
+                    </a:lnT>
+                    <a:lnB w="9525" cap="flat" cmpd="sng" algn="ctr">
+                      <a:solidFill>
+                        <a:srgbClr val="DCD5C1"/>
+                      </a:solidFill>
+                      <a:prstDash val="solid"/>
+                      <a:round/>
+                      <a:headEnd type="none" w="med" len="med"/>
+                      <a:tailEnd type="none" w="med" len="med"/>
+                    </a:lnB>
+                    <a:solidFill>
+                      <a:srgbClr val="FFFFFF"/>
+                    </a:solidFill>
+                  </a:tcPr>
+                </a:tc>
+              </a:tr>
             </a:tbl>
           </a:graphicData>
         </a:graphic>
@@ -11194,313 +10353,102 @@
       </p:grpSpPr>
       <p:sp>
         <p:nvSpPr>
-          <p:cNvPr id="2" name="Shape 0"/>
-          <p:cNvSpPr/>
-          <p:nvPr/>
-        </p:nvSpPr>
-        <p:spPr>
-          <a:xfrm>
-            <a:off x="4069080" y="1097280"/>
-            <a:ext cx="1005840" cy="1005840"/>
+          <p:cNvPr id="2" name="Text 0"/>
+          <p:cNvSpPr txBox="1"/>
+          <p:nvPr/>
+        </p:nvSpPr>
+        <p:spPr>
+          <a:xfrm>
+            <a:off x="731520" y="256032"/>
+            <a:ext cx="7680960" cy="566928"/>
+          </a:xfrm>
+          <a:prstGeom prst="rect">
+            <a:avLst/>
+          </a:prstGeom>
+          <a:noFill/>
+          <a:ln/>
+        </p:spPr>
+        <p:txBody>
+          <a:bodyPr wrap="square" lIns="0" tIns="0" rIns="0" bIns="0" rtlCol="0" anchor="ctr"/>
+          <a:lstStyle/>
+          <a:p>
+            <a:pPr algn="ctr" indent="0" marL="0">
+              <a:lnSpc>
+                <a:spcPct val="100000"/>
+              </a:lnSpc>
+              <a:buNone/>
+            </a:pPr>
+            <a:r>
+              <a:rPr lang="en-US" sz="2800" b="1" dirty="0">
+                <a:solidFill>
+                  <a:srgbClr val="13294B"/>
+                </a:solidFill>
+                <a:latin typeface="Calibri" pitchFamily="34" charset="0"/>
+                <a:ea typeface="Calibri" pitchFamily="34" charset="-122"/>
+                <a:cs typeface="Calibri" pitchFamily="34" charset="-120"/>
+              </a:rPr>
+              <a:t>Resumo da Unidade 2</a:t>
+            </a:r>
+            <a:endParaRPr lang="en-US" sz="2800" dirty="0"/>
+          </a:p>
+        </p:txBody>
+      </p:sp>
+      <p:sp>
+        <p:nvSpPr>
+          <p:cNvPr id="3" name="Text 1"/>
+          <p:cNvSpPr txBox="1"/>
+          <p:nvPr/>
+        </p:nvSpPr>
+        <p:spPr>
+          <a:xfrm>
+            <a:off x="1005840" y="804672"/>
+            <a:ext cx="7132320" cy="329184"/>
+          </a:xfrm>
+          <a:prstGeom prst="rect">
+            <a:avLst/>
+          </a:prstGeom>
+          <a:noFill/>
+          <a:ln/>
+        </p:spPr>
+        <p:txBody>
+          <a:bodyPr wrap="square" lIns="0" tIns="0" rIns="0" bIns="0" rtlCol="0" anchor="ctr"/>
+          <a:lstStyle/>
+          <a:p>
+            <a:pPr algn="ctr" indent="0" marL="0">
+              <a:lnSpc>
+                <a:spcPct val="100000"/>
+              </a:lnSpc>
+              <a:buNone/>
+            </a:pPr>
+            <a:r>
+              <a:rPr lang="en-US" sz="1400" dirty="0">
+                <a:solidFill>
+                  <a:srgbClr val="5B6770"/>
+                </a:solidFill>
+                <a:latin typeface="Calibri" pitchFamily="34" charset="0"/>
+                <a:ea typeface="Calibri" pitchFamily="34" charset="-122"/>
+                <a:cs typeface="Calibri" pitchFamily="34" charset="-120"/>
+              </a:rPr>
+              <a:t>O que discutimos nesta unidade</a:t>
+            </a:r>
+            <a:endParaRPr lang="en-US" sz="1400" dirty="0"/>
+          </a:p>
+        </p:txBody>
+      </p:sp>
+      <p:sp>
+        <p:nvSpPr>
+          <p:cNvPr id="4" name="Text 2"/>
+          <p:cNvSpPr txBox="1"/>
+          <p:nvPr/>
+        </p:nvSpPr>
+        <p:spPr>
+          <a:xfrm>
+            <a:off x="685800" y="1170432"/>
+            <a:ext cx="3794760" cy="2743200"/>
           </a:xfrm>
           <a:prstGeom prst="roundRect">
             <a:avLst>
-              <a:gd name="adj" fmla="val 18182"/>
-            </a:avLst>
-          </a:prstGeom>
-          <a:solidFill>
-            <a:srgbClr val="2A8C85"/>
-          </a:solidFill>
-          <a:ln/>
-        </p:spPr>
-      </p:sp>
-      <p:pic>
-        <p:nvPicPr>
-          <p:cNvPr id="3" name="Image 0" descr="/tmp/claude-0/-home-user-zero-claude/d7e33190-c541-582c-a7cc-1156817732ce/scratchpad/deck/assets/icon_FaQuestion.png">    </p:cNvPr>
-          <p:cNvPicPr>
-            <a:picLocks noChangeAspect="1"/>
-          </p:cNvPicPr>
-          <p:nvPr/>
-        </p:nvPicPr>
-        <p:blipFill>
-          <a:blip r:embed="rId2"/>
-          <a:stretch>
-            <a:fillRect/>
-          </a:stretch>
-        </p:blipFill>
-        <p:spPr>
-          <a:xfrm>
-            <a:off x="4297680" y="1325880"/>
-            <a:ext cx="548640" cy="548640"/>
-          </a:xfrm>
-          <a:prstGeom prst="rect">
-            <a:avLst/>
-          </a:prstGeom>
-        </p:spPr>
-      </p:pic>
-      <p:sp>
-        <p:nvSpPr>
-          <p:cNvPr id="4" name="Text 1"/>
-          <p:cNvSpPr txBox="1"/>
-          <p:nvPr/>
-        </p:nvSpPr>
-        <p:spPr>
-          <a:xfrm>
-            <a:off x="731520" y="2240280"/>
-            <a:ext cx="7680960" cy="731520"/>
-          </a:xfrm>
-          <a:prstGeom prst="rect">
-            <a:avLst/>
-          </a:prstGeom>
-          <a:noFill/>
-          <a:ln/>
-        </p:spPr>
-        <p:txBody>
-          <a:bodyPr wrap="square" lIns="0" tIns="0" rIns="0" bIns="0" rtlCol="0" anchor="ctr"/>
-          <a:lstStyle/>
-          <a:p>
-            <a:pPr algn="ctr" indent="0" marL="0">
-              <a:lnSpc>
-                <a:spcPct val="100000"/>
-              </a:lnSpc>
-              <a:buNone/>
-            </a:pPr>
-            <a:r>
-              <a:rPr lang="en-US" sz="3600" b="1" dirty="0">
-                <a:solidFill>
-                  <a:srgbClr val="13294B"/>
-                </a:solidFill>
-                <a:latin typeface="Calibri" pitchFamily="34" charset="0"/>
-                <a:ea typeface="Calibri" pitchFamily="34" charset="-122"/>
-                <a:cs typeface="Calibri" pitchFamily="34" charset="-120"/>
-              </a:rPr>
-              <a:t>Quiz da Unidade 2</a:t>
-            </a:r>
-            <a:endParaRPr lang="en-US" sz="3600" dirty="0"/>
-          </a:p>
-        </p:txBody>
-      </p:sp>
-      <p:sp>
-        <p:nvSpPr>
-          <p:cNvPr id="5" name="Text 2"/>
-          <p:cNvSpPr txBox="1"/>
-          <p:nvPr/>
-        </p:nvSpPr>
-        <p:spPr>
-          <a:xfrm>
-            <a:off x="1188720" y="2926080"/>
-            <a:ext cx="6766560" cy="822960"/>
-          </a:xfrm>
-          <a:prstGeom prst="rect">
-            <a:avLst/>
-          </a:prstGeom>
-          <a:noFill/>
-          <a:ln/>
-        </p:spPr>
-        <p:txBody>
-          <a:bodyPr wrap="square" lIns="0" tIns="0" rIns="0" bIns="0" rtlCol="0" anchor="t"/>
-          <a:lstStyle/>
-          <a:p>
-            <a:pPr algn="ctr" indent="0" marL="0">
-              <a:lnSpc>
-                <a:spcPct val="100000"/>
-              </a:lnSpc>
-              <a:buNone/>
-            </a:pPr>
-            <a:r>
-              <a:rPr lang="en-US" sz="1600" dirty="0">
-                <a:solidFill>
-                  <a:srgbClr val="5B6770"/>
-                </a:solidFill>
-                <a:latin typeface="Calibri" pitchFamily="34" charset="0"/>
-                <a:ea typeface="Calibri" pitchFamily="34" charset="-122"/>
-                <a:cs typeface="Calibri" pitchFamily="34" charset="-120"/>
-              </a:rPr>
-              <a:t>5 perguntas para revisar a unidade. Pause o vídeo, escolha sua resposta e confira no slide seguinte.</a:t>
-            </a:r>
-            <a:endParaRPr lang="en-US" sz="1600" dirty="0"/>
-          </a:p>
-        </p:txBody>
-      </p:sp>
-      <p:sp>
-        <p:nvSpPr>
-          <p:cNvPr id="6" name="Text 3"/>
-          <p:cNvSpPr txBox="1"/>
-          <p:nvPr/>
-        </p:nvSpPr>
-        <p:spPr>
-          <a:xfrm>
-            <a:off x="4206240" y="36576"/>
-            <a:ext cx="4800600" cy="219456"/>
-          </a:xfrm>
-          <a:prstGeom prst="rect">
-            <a:avLst/>
-          </a:prstGeom>
-          <a:noFill/>
-          <a:ln/>
-        </p:spPr>
-        <p:txBody>
-          <a:bodyPr wrap="square" lIns="0" tIns="0" rIns="0" bIns="0" rtlCol="0" anchor="ctr"/>
-          <a:lstStyle/>
-          <a:p>
-            <a:pPr algn="r" indent="0" marL="0">
-              <a:lnSpc>
-                <a:spcPct val="100000"/>
-              </a:lnSpc>
-              <a:buNone/>
-            </a:pPr>
-            <a:r>
-              <a:rPr lang="en-US" sz="950" dirty="0">
-                <a:solidFill>
-                  <a:srgbClr val="5B6770"/>
-                </a:solidFill>
-                <a:latin typeface="Calibri" pitchFamily="34" charset="0"/>
-                <a:ea typeface="Calibri" pitchFamily="34" charset="-122"/>
-                <a:cs typeface="Calibri" pitchFamily="34" charset="-120"/>
-              </a:rPr>
-              <a:t>Estado, Governo e Mercado · Unidade 2</a:t>
-            </a:r>
-            <a:endParaRPr lang="en-US" sz="950" dirty="0"/>
-          </a:p>
-        </p:txBody>
-      </p:sp>
-    </p:spTree>
-  </p:cSld>
-  <p:clrMapOvr>
-    <a:masterClrMapping/>
-  </p:clrMapOvr>
-</p:sld>
-</file>
-
-<file path=ppt/slides/slide21.xml><?xml version="1.0" encoding="utf-8"?>
-<p:sld xmlns:a="http://schemas.openxmlformats.org/drawingml/2006/main" xmlns:r="http://schemas.openxmlformats.org/officeDocument/2006/relationships" xmlns:p="http://schemas.openxmlformats.org/presentationml/2006/main">
-  <p:cSld name="Slide 21">
-    <p:bg>
-      <p:bgPr>
-        <a:blipFill dpi="0" rotWithShape="1">
-          <a:blip r:embed="rId1">
-            <a:lum/>
-          </a:blip>
-          <a:srcRect/>
-          <a:stretch>
-            <a:fillRect/>
-          </a:stretch>
-        </a:blipFill>
-        <a:effectLst/>
-      </p:bgPr>
-    </p:bg>
-    <p:spTree>
-      <p:nvGrpSpPr>
-        <p:cNvPr id="1" name=""/>
-        <p:cNvGrpSpPr/>
-        <p:nvPr/>
-      </p:nvGrpSpPr>
-      <p:grpSpPr>
-        <a:xfrm>
-          <a:off x="0" y="0"/>
-          <a:ext cx="0" cy="0"/>
-          <a:chOff x="0" y="0"/>
-          <a:chExt cx="0" cy="0"/>
-        </a:xfrm>
-      </p:grpSpPr>
-      <p:sp>
-        <p:nvSpPr>
-          <p:cNvPr id="2" name="Text 0"/>
-          <p:cNvSpPr txBox="1"/>
-          <p:nvPr/>
-        </p:nvSpPr>
-        <p:spPr>
-          <a:xfrm>
-            <a:off x="731520" y="274320"/>
-            <a:ext cx="7680960" cy="365760"/>
-          </a:xfrm>
-          <a:prstGeom prst="rect">
-            <a:avLst/>
-          </a:prstGeom>
-          <a:noFill/>
-          <a:ln/>
-        </p:spPr>
-        <p:txBody>
-          <a:bodyPr wrap="square" lIns="0" tIns="0" rIns="0" bIns="0" rtlCol="0" anchor="ctr"/>
-          <a:lstStyle/>
-          <a:p>
-            <a:pPr algn="ctr" indent="0" marL="0">
-              <a:lnSpc>
-                <a:spcPct val="100000"/>
-              </a:lnSpc>
-              <a:buNone/>
-            </a:pPr>
-            <a:r>
-              <a:rPr lang="en-US" sz="1250" b="1" dirty="0">
-                <a:solidFill>
-                  <a:srgbClr val="2A8C85"/>
-                </a:solidFill>
-                <a:latin typeface="Calibri" pitchFamily="34" charset="0"/>
-                <a:ea typeface="Calibri" pitchFamily="34" charset="-122"/>
-                <a:cs typeface="Calibri" pitchFamily="34" charset="-120"/>
-              </a:rPr>
-              <a:t>QUIZ DA UNIDADE 2 · PERGUNTA 1 DE 5</a:t>
-            </a:r>
-            <a:endParaRPr lang="en-US" sz="1250" dirty="0"/>
-          </a:p>
-        </p:txBody>
-      </p:sp>
-      <p:sp>
-        <p:nvSpPr>
-          <p:cNvPr id="3" name="Text 1"/>
-          <p:cNvSpPr txBox="1"/>
-          <p:nvPr/>
-        </p:nvSpPr>
-        <p:spPr>
-          <a:xfrm>
-            <a:off x="731520" y="658368"/>
-            <a:ext cx="7680960" cy="960120"/>
-          </a:xfrm>
-          <a:prstGeom prst="rect">
-            <a:avLst/>
-          </a:prstGeom>
-          <a:noFill/>
-          <a:ln/>
-        </p:spPr>
-        <p:txBody>
-          <a:bodyPr wrap="square" lIns="0" tIns="0" rIns="0" bIns="0" rtlCol="0" anchor="ctr"/>
-          <a:lstStyle/>
-          <a:p>
-            <a:pPr algn="ctr" indent="0" marL="0">
-              <a:lnSpc>
-                <a:spcPct val="100000"/>
-              </a:lnSpc>
-              <a:buNone/>
-            </a:pPr>
-            <a:r>
-              <a:rPr lang="en-US" sz="1900" b="1" dirty="0">
-                <a:solidFill>
-                  <a:srgbClr val="13294B"/>
-                </a:solidFill>
-                <a:latin typeface="Calibri" pitchFamily="34" charset="0"/>
-                <a:ea typeface="Calibri" pitchFamily="34" charset="-122"/>
-                <a:cs typeface="Calibri" pitchFamily="34" charset="-120"/>
-              </a:rPr>
-              <a:t>Para Hobbes, como é a vida no estado de natureza, antes do Estado?</a:t>
-            </a:r>
-            <a:endParaRPr lang="en-US" sz="1900" dirty="0"/>
-          </a:p>
-        </p:txBody>
-      </p:sp>
-      <p:sp>
-        <p:nvSpPr>
-          <p:cNvPr id="4" name="Shape 2"/>
-          <p:cNvSpPr/>
-          <p:nvPr/>
-        </p:nvSpPr>
-        <p:spPr>
-          <a:xfrm>
-            <a:off x="685800" y="1737360"/>
-            <a:ext cx="3794760" cy="914400"/>
-          </a:xfrm>
-          <a:prstGeom prst="roundRect">
-            <a:avLst>
-              <a:gd name="adj" fmla="val 8000"/>
+              <a:gd name="adj" fmla="val 2000"/>
             </a:avLst>
           </a:prstGeom>
           <a:solidFill>
@@ -11510,9 +10458,154 @@
             <a:solidFill>
               <a:srgbClr val="DCD5C1"/>
             </a:solidFill>
-            <a:prstDash val="solid"/>
           </a:ln>
         </p:spPr>
+        <p:txBody>
+          <a:bodyPr wrap="square" lIns="114300" tIns="114300" rIns="114300" bIns="114300" rtlCol="0" anchor="t"/>
+          <a:lstStyle/>
+          <a:p>
+            <a:pPr algn="l" indent="0" marL="0">
+              <a:lnSpc>
+                <a:spcPct val="100000"/>
+              </a:lnSpc>
+              <a:spcAft>
+                <a:spcPts val="200"/>
+              </a:spcAft>
+              <a:buNone/>
+            </a:pPr>
+            <a:r>
+              <a:rPr lang="en-US" sz="1100" b="1" dirty="0">
+                <a:solidFill>
+                  <a:srgbClr val="2A8C85"/>
+                </a:solidFill>
+                <a:latin typeface="Calibri" pitchFamily="34" charset="0"/>
+                <a:ea typeface="Calibri" pitchFamily="34" charset="-122"/>
+                <a:cs typeface="Calibri" pitchFamily="34" charset="-120"/>
+              </a:rPr>
+              <a:t>PARTE 1 · TÓPICO 3</a:t>
+            </a:r>
+            <a:endParaRPr lang="en-US" sz="1100" dirty="0"/>
+          </a:p>
+          <a:p>
+            <a:pPr algn="l" indent="0" marL="0">
+              <a:lnSpc>
+                <a:spcPct val="100000"/>
+              </a:lnSpc>
+              <a:spcAft>
+                <a:spcPts val="400"/>
+              </a:spcAft>
+              <a:buNone/>
+            </a:pPr>
+            <a:r>
+              <a:rPr lang="en-US" sz="1450" b="1" dirty="0">
+                <a:solidFill>
+                  <a:srgbClr val="13294B"/>
+                </a:solidFill>
+                <a:latin typeface="Calibri" pitchFamily="34" charset="0"/>
+                <a:ea typeface="Calibri" pitchFamily="34" charset="-122"/>
+                <a:cs typeface="Calibri" pitchFamily="34" charset="-120"/>
+              </a:rPr>
+              <a:t>A dinâmica pendular</a:t>
+            </a:r>
+            <a:endParaRPr lang="en-US" sz="1100" dirty="0"/>
+          </a:p>
+          <a:p>
+            <a:pPr algn="l" marL="177800" indent="-177800">
+              <a:lnSpc>
+                <a:spcPct val="100000"/>
+              </a:lnSpc>
+              <a:spcAft>
+                <a:spcPts val="300"/>
+              </a:spcAft>
+              <a:buSzPct val="100000"/>
+              <a:buChar char="•"/>
+            </a:pPr>
+            <a:r>
+              <a:rPr lang="en-US" sz="1200" dirty="0">
+                <a:solidFill>
+                  <a:srgbClr val="1F2A37"/>
+                </a:solidFill>
+                <a:latin typeface="Calibri" pitchFamily="34" charset="0"/>
+                <a:ea typeface="Calibri" pitchFamily="34" charset="-122"/>
+                <a:cs typeface="Calibri" pitchFamily="34" charset="-120"/>
+              </a:rPr>
+              <a:t>Ora mais mercado, ora mais Estado: cada extremo gera problemas que impulsionam a volta.</a:t>
+            </a:r>
+            <a:endParaRPr lang="en-US" sz="1100" dirty="0"/>
+          </a:p>
+          <a:p>
+            <a:pPr algn="l" marL="177800" indent="-177800">
+              <a:lnSpc>
+                <a:spcPct val="100000"/>
+              </a:lnSpc>
+              <a:spcAft>
+                <a:spcPts val="300"/>
+              </a:spcAft>
+              <a:buSzPct val="100000"/>
+              <a:buChar char="•"/>
+            </a:pPr>
+            <a:r>
+              <a:rPr lang="en-US" sz="1200" dirty="0">
+                <a:solidFill>
+                  <a:srgbClr val="1F2A37"/>
+                </a:solidFill>
+                <a:latin typeface="Calibri" pitchFamily="34" charset="0"/>
+                <a:ea typeface="Calibri" pitchFamily="34" charset="-122"/>
+                <a:cs typeface="Calibri" pitchFamily="34" charset="-120"/>
+              </a:rPr>
+              <a:t>Marcos: liberalismo, 1929, anos dourados, estagflação, neoliberalismo, 2008 e 2020.</a:t>
+            </a:r>
+            <a:endParaRPr lang="en-US" sz="1100" dirty="0"/>
+          </a:p>
+          <a:p>
+            <a:pPr algn="l" marL="177800" indent="-177800">
+              <a:lnSpc>
+                <a:spcPct val="100000"/>
+              </a:lnSpc>
+              <a:spcAft>
+                <a:spcPts val="300"/>
+              </a:spcAft>
+              <a:buSzPct val="100000"/>
+              <a:buChar char="•"/>
+            </a:pPr>
+            <a:r>
+              <a:rPr lang="en-US" sz="1200" dirty="0">
+                <a:solidFill>
+                  <a:srgbClr val="1F2A37"/>
+                </a:solidFill>
+                <a:latin typeface="Calibri" pitchFamily="34" charset="0"/>
+                <a:ea typeface="Calibri" pitchFamily="34" charset="-122"/>
+                <a:cs typeface="Calibri" pitchFamily="34" charset="-120"/>
+              </a:rPr>
+              <a:t>No Brasil: desenvolvimentismo, reformas dos anos 1990 e combinação a partir de 2003.</a:t>
+            </a:r>
+            <a:endParaRPr lang="en-US" sz="1100" dirty="0"/>
+          </a:p>
+          <a:p>
+            <a:pPr algn="l" marL="177800" indent="-177800">
+              <a:lnSpc>
+                <a:spcPct val="100000"/>
+              </a:lnSpc>
+              <a:spcAft>
+                <a:spcPts val="300"/>
+              </a:spcAft>
+              <a:buSzPct val="100000"/>
+              <a:buChar char="•"/>
+            </a:pPr>
+            <a:r>
+              <a:rPr lang="en-US" sz="1200" dirty="0">
+                <a:solidFill>
+                  <a:srgbClr val="1F2A37"/>
+                </a:solidFill>
+                <a:latin typeface="Calibri" pitchFamily="34" charset="0"/>
+                <a:ea typeface="Calibri" pitchFamily="34" charset="-122"/>
+                <a:cs typeface="Calibri" pitchFamily="34" charset="-120"/>
+              </a:rPr>
+              <a:t>A pergunta atual: que Estado e que mercado?</a:t>
+            </a:r>
+            <a:endParaRPr lang="en-US" sz="1100" dirty="0"/>
+          </a:p>
+        </p:txBody>
       </p:sp>
       <p:sp>
         <p:nvSpPr>
@@ -11522,1070 +10615,12 @@
         </p:nvSpPr>
         <p:spPr>
           <a:xfrm>
-            <a:off x="813816" y="1984248"/>
-            <a:ext cx="420624" cy="420624"/>
+            <a:off x="4663440" y="1170432"/>
+            <a:ext cx="3794760" cy="2743200"/>
           </a:xfrm>
           <a:prstGeom prst="roundRect">
             <a:avLst>
-              <a:gd name="adj" fmla="val 50000"/>
-            </a:avLst>
-          </a:prstGeom>
-          <a:solidFill>
-            <a:srgbClr val="13294B"/>
-          </a:solidFill>
-          <a:ln/>
-        </p:spPr>
-        <p:txBody>
-          <a:bodyPr wrap="square" lIns="0" tIns="0" rIns="0" bIns="0" rtlCol="0" anchor="ctr"/>
-          <a:lstStyle/>
-          <a:p>
-            <a:pPr algn="ctr" indent="0" marL="0">
-              <a:lnSpc>
-                <a:spcPct val="100000"/>
-              </a:lnSpc>
-              <a:buNone/>
-            </a:pPr>
-            <a:r>
-              <a:rPr lang="en-US" sz="1600" b="1" dirty="0">
-                <a:solidFill>
-                  <a:srgbClr val="FFFFFF"/>
-                </a:solidFill>
-                <a:latin typeface="Calibri" pitchFamily="34" charset="0"/>
-                <a:ea typeface="Calibri" pitchFamily="34" charset="-122"/>
-                <a:cs typeface="Calibri" pitchFamily="34" charset="-120"/>
-              </a:rPr>
-              <a:t>a</a:t>
-            </a:r>
-            <a:endParaRPr lang="en-US" sz="1600" dirty="0"/>
-          </a:p>
-        </p:txBody>
-      </p:sp>
-      <p:sp>
-        <p:nvSpPr>
-          <p:cNvPr id="6" name="Text 4"/>
-          <p:cNvSpPr txBox="1"/>
-          <p:nvPr/>
-        </p:nvSpPr>
-        <p:spPr>
-          <a:xfrm>
-            <a:off x="1344168" y="1773936"/>
-            <a:ext cx="3044952" cy="841248"/>
-          </a:xfrm>
-          <a:prstGeom prst="rect">
-            <a:avLst/>
-          </a:prstGeom>
-          <a:noFill/>
-          <a:ln/>
-        </p:spPr>
-        <p:txBody>
-          <a:bodyPr wrap="square" lIns="25400" tIns="25400" rIns="25400" bIns="25400" rtlCol="0" anchor="ctr"/>
-          <a:lstStyle/>
-          <a:p>
-            <a:pPr algn="l" indent="0" marL="0">
-              <a:lnSpc>
-                <a:spcPct val="100000"/>
-              </a:lnSpc>
-              <a:buNone/>
-            </a:pPr>
-            <a:r>
-              <a:rPr lang="en-US" sz="1400" dirty="0">
-                <a:solidFill>
-                  <a:srgbClr val="1F2A37"/>
-                </a:solidFill>
-                <a:latin typeface="Calibri" pitchFamily="34" charset="0"/>
-                <a:ea typeface="Calibri" pitchFamily="34" charset="-122"/>
-                <a:cs typeface="Calibri" pitchFamily="34" charset="-120"/>
-              </a:rPr>
-              <a:t>Harmoniosa e cooperativa</a:t>
-            </a:r>
-            <a:endParaRPr lang="en-US" sz="1400" dirty="0"/>
-          </a:p>
-        </p:txBody>
-      </p:sp>
-      <p:sp>
-        <p:nvSpPr>
-          <p:cNvPr id="7" name="Shape 5"/>
-          <p:cNvSpPr/>
-          <p:nvPr/>
-        </p:nvSpPr>
-        <p:spPr>
-          <a:xfrm>
-            <a:off x="4663440" y="1737360"/>
-            <a:ext cx="3794760" cy="914400"/>
-          </a:xfrm>
-          <a:prstGeom prst="roundRect">
-            <a:avLst>
-              <a:gd name="adj" fmla="val 8000"/>
-            </a:avLst>
-          </a:prstGeom>
-          <a:solidFill>
-            <a:srgbClr val="FFFFFF"/>
-          </a:solidFill>
-          <a:ln w="12700">
-            <a:solidFill>
-              <a:srgbClr val="DCD5C1"/>
-            </a:solidFill>
-            <a:prstDash val="solid"/>
-          </a:ln>
-        </p:spPr>
-      </p:sp>
-      <p:sp>
-        <p:nvSpPr>
-          <p:cNvPr id="8" name="Text 6"/>
-          <p:cNvSpPr txBox="1"/>
-          <p:nvPr/>
-        </p:nvSpPr>
-        <p:spPr>
-          <a:xfrm>
-            <a:off x="4791456" y="1984248"/>
-            <a:ext cx="420624" cy="420624"/>
-          </a:xfrm>
-          <a:prstGeom prst="roundRect">
-            <a:avLst>
-              <a:gd name="adj" fmla="val 50000"/>
-            </a:avLst>
-          </a:prstGeom>
-          <a:solidFill>
-            <a:srgbClr val="13294B"/>
-          </a:solidFill>
-          <a:ln/>
-        </p:spPr>
-        <p:txBody>
-          <a:bodyPr wrap="square" lIns="0" tIns="0" rIns="0" bIns="0" rtlCol="0" anchor="ctr"/>
-          <a:lstStyle/>
-          <a:p>
-            <a:pPr algn="ctr" indent="0" marL="0">
-              <a:lnSpc>
-                <a:spcPct val="100000"/>
-              </a:lnSpc>
-              <a:buNone/>
-            </a:pPr>
-            <a:r>
-              <a:rPr lang="en-US" sz="1600" b="1" dirty="0">
-                <a:solidFill>
-                  <a:srgbClr val="FFFFFF"/>
-                </a:solidFill>
-                <a:latin typeface="Calibri" pitchFamily="34" charset="0"/>
-                <a:ea typeface="Calibri" pitchFamily="34" charset="-122"/>
-                <a:cs typeface="Calibri" pitchFamily="34" charset="-120"/>
-              </a:rPr>
-              <a:t>b</a:t>
-            </a:r>
-            <a:endParaRPr lang="en-US" sz="1600" dirty="0"/>
-          </a:p>
-        </p:txBody>
-      </p:sp>
-      <p:sp>
-        <p:nvSpPr>
-          <p:cNvPr id="9" name="Text 7"/>
-          <p:cNvSpPr txBox="1"/>
-          <p:nvPr/>
-        </p:nvSpPr>
-        <p:spPr>
-          <a:xfrm>
-            <a:off x="5321808" y="1773936"/>
-            <a:ext cx="3044952" cy="841248"/>
-          </a:xfrm>
-          <a:prstGeom prst="rect">
-            <a:avLst/>
-          </a:prstGeom>
-          <a:noFill/>
-          <a:ln/>
-        </p:spPr>
-        <p:txBody>
-          <a:bodyPr wrap="square" lIns="25400" tIns="25400" rIns="25400" bIns="25400" rtlCol="0" anchor="ctr"/>
-          <a:lstStyle/>
-          <a:p>
-            <a:pPr algn="l" indent="0" marL="0">
-              <a:lnSpc>
-                <a:spcPct val="100000"/>
-              </a:lnSpc>
-              <a:buNone/>
-            </a:pPr>
-            <a:r>
-              <a:rPr lang="en-US" sz="1400" dirty="0">
-                <a:solidFill>
-                  <a:srgbClr val="1F2A37"/>
-                </a:solidFill>
-                <a:latin typeface="Calibri" pitchFamily="34" charset="0"/>
-                <a:ea typeface="Calibri" pitchFamily="34" charset="-122"/>
-                <a:cs typeface="Calibri" pitchFamily="34" charset="-120"/>
-              </a:rPr>
-              <a:t>Uma guerra de todos contra todos</a:t>
-            </a:r>
-            <a:endParaRPr lang="en-US" sz="1400" dirty="0"/>
-          </a:p>
-        </p:txBody>
-      </p:sp>
-      <p:sp>
-        <p:nvSpPr>
-          <p:cNvPr id="10" name="Shape 8"/>
-          <p:cNvSpPr/>
-          <p:nvPr/>
-        </p:nvSpPr>
-        <p:spPr>
-          <a:xfrm>
-            <a:off x="685800" y="2798064"/>
-            <a:ext cx="3794760" cy="914400"/>
-          </a:xfrm>
-          <a:prstGeom prst="roundRect">
-            <a:avLst>
-              <a:gd name="adj" fmla="val 8000"/>
-            </a:avLst>
-          </a:prstGeom>
-          <a:solidFill>
-            <a:srgbClr val="FFFFFF"/>
-          </a:solidFill>
-          <a:ln w="12700">
-            <a:solidFill>
-              <a:srgbClr val="DCD5C1"/>
-            </a:solidFill>
-            <a:prstDash val="solid"/>
-          </a:ln>
-        </p:spPr>
-      </p:sp>
-      <p:sp>
-        <p:nvSpPr>
-          <p:cNvPr id="11" name="Text 9"/>
-          <p:cNvSpPr txBox="1"/>
-          <p:nvPr/>
-        </p:nvSpPr>
-        <p:spPr>
-          <a:xfrm>
-            <a:off x="813816" y="3044952"/>
-            <a:ext cx="420624" cy="420624"/>
-          </a:xfrm>
-          <a:prstGeom prst="roundRect">
-            <a:avLst>
-              <a:gd name="adj" fmla="val 50000"/>
-            </a:avLst>
-          </a:prstGeom>
-          <a:solidFill>
-            <a:srgbClr val="13294B"/>
-          </a:solidFill>
-          <a:ln/>
-        </p:spPr>
-        <p:txBody>
-          <a:bodyPr wrap="square" lIns="0" tIns="0" rIns="0" bIns="0" rtlCol="0" anchor="ctr"/>
-          <a:lstStyle/>
-          <a:p>
-            <a:pPr algn="ctr" indent="0" marL="0">
-              <a:lnSpc>
-                <a:spcPct val="100000"/>
-              </a:lnSpc>
-              <a:buNone/>
-            </a:pPr>
-            <a:r>
-              <a:rPr lang="en-US" sz="1600" b="1" dirty="0">
-                <a:solidFill>
-                  <a:srgbClr val="FFFFFF"/>
-                </a:solidFill>
-                <a:latin typeface="Calibri" pitchFamily="34" charset="0"/>
-                <a:ea typeface="Calibri" pitchFamily="34" charset="-122"/>
-                <a:cs typeface="Calibri" pitchFamily="34" charset="-120"/>
-              </a:rPr>
-              <a:t>c</a:t>
-            </a:r>
-            <a:endParaRPr lang="en-US" sz="1600" dirty="0"/>
-          </a:p>
-        </p:txBody>
-      </p:sp>
-      <p:sp>
-        <p:nvSpPr>
-          <p:cNvPr id="12" name="Text 10"/>
-          <p:cNvSpPr txBox="1"/>
-          <p:nvPr/>
-        </p:nvSpPr>
-        <p:spPr>
-          <a:xfrm>
-            <a:off x="1344168" y="2834640"/>
-            <a:ext cx="3044952" cy="841248"/>
-          </a:xfrm>
-          <a:prstGeom prst="rect">
-            <a:avLst/>
-          </a:prstGeom>
-          <a:noFill/>
-          <a:ln/>
-        </p:spPr>
-        <p:txBody>
-          <a:bodyPr wrap="square" lIns="25400" tIns="25400" rIns="25400" bIns="25400" rtlCol="0" anchor="ctr"/>
-          <a:lstStyle/>
-          <a:p>
-            <a:pPr algn="l" indent="0" marL="0">
-              <a:lnSpc>
-                <a:spcPct val="100000"/>
-              </a:lnSpc>
-              <a:buNone/>
-            </a:pPr>
-            <a:r>
-              <a:rPr lang="en-US" sz="1400" dirty="0">
-                <a:solidFill>
-                  <a:srgbClr val="1F2A37"/>
-                </a:solidFill>
-                <a:latin typeface="Calibri" pitchFamily="34" charset="0"/>
-                <a:ea typeface="Calibri" pitchFamily="34" charset="-122"/>
-                <a:cs typeface="Calibri" pitchFamily="34" charset="-120"/>
-              </a:rPr>
-              <a:t>Organizada pelo mercado</a:t>
-            </a:r>
-            <a:endParaRPr lang="en-US" sz="1400" dirty="0"/>
-          </a:p>
-        </p:txBody>
-      </p:sp>
-      <p:sp>
-        <p:nvSpPr>
-          <p:cNvPr id="13" name="Shape 11"/>
-          <p:cNvSpPr/>
-          <p:nvPr/>
-        </p:nvSpPr>
-        <p:spPr>
-          <a:xfrm>
-            <a:off x="4663440" y="2798064"/>
-            <a:ext cx="3794760" cy="914400"/>
-          </a:xfrm>
-          <a:prstGeom prst="roundRect">
-            <a:avLst>
-              <a:gd name="adj" fmla="val 8000"/>
-            </a:avLst>
-          </a:prstGeom>
-          <a:solidFill>
-            <a:srgbClr val="FFFFFF"/>
-          </a:solidFill>
-          <a:ln w="12700">
-            <a:solidFill>
-              <a:srgbClr val="DCD5C1"/>
-            </a:solidFill>
-            <a:prstDash val="solid"/>
-          </a:ln>
-        </p:spPr>
-      </p:sp>
-      <p:sp>
-        <p:nvSpPr>
-          <p:cNvPr id="14" name="Text 12"/>
-          <p:cNvSpPr txBox="1"/>
-          <p:nvPr/>
-        </p:nvSpPr>
-        <p:spPr>
-          <a:xfrm>
-            <a:off x="4791456" y="3044952"/>
-            <a:ext cx="420624" cy="420624"/>
-          </a:xfrm>
-          <a:prstGeom prst="roundRect">
-            <a:avLst>
-              <a:gd name="adj" fmla="val 50000"/>
-            </a:avLst>
-          </a:prstGeom>
-          <a:solidFill>
-            <a:srgbClr val="13294B"/>
-          </a:solidFill>
-          <a:ln/>
-        </p:spPr>
-        <p:txBody>
-          <a:bodyPr wrap="square" lIns="0" tIns="0" rIns="0" bIns="0" rtlCol="0" anchor="ctr"/>
-          <a:lstStyle/>
-          <a:p>
-            <a:pPr algn="ctr" indent="0" marL="0">
-              <a:lnSpc>
-                <a:spcPct val="100000"/>
-              </a:lnSpc>
-              <a:buNone/>
-            </a:pPr>
-            <a:r>
-              <a:rPr lang="en-US" sz="1600" b="1" dirty="0">
-                <a:solidFill>
-                  <a:srgbClr val="FFFFFF"/>
-                </a:solidFill>
-                <a:latin typeface="Calibri" pitchFamily="34" charset="0"/>
-                <a:ea typeface="Calibri" pitchFamily="34" charset="-122"/>
-                <a:cs typeface="Calibri" pitchFamily="34" charset="-120"/>
-              </a:rPr>
-              <a:t>d</a:t>
-            </a:r>
-            <a:endParaRPr lang="en-US" sz="1600" dirty="0"/>
-          </a:p>
-        </p:txBody>
-      </p:sp>
-      <p:sp>
-        <p:nvSpPr>
-          <p:cNvPr id="15" name="Text 13"/>
-          <p:cNvSpPr txBox="1"/>
-          <p:nvPr/>
-        </p:nvSpPr>
-        <p:spPr>
-          <a:xfrm>
-            <a:off x="5321808" y="2834640"/>
-            <a:ext cx="3044952" cy="841248"/>
-          </a:xfrm>
-          <a:prstGeom prst="rect">
-            <a:avLst/>
-          </a:prstGeom>
-          <a:noFill/>
-          <a:ln/>
-        </p:spPr>
-        <p:txBody>
-          <a:bodyPr wrap="square" lIns="25400" tIns="25400" rIns="25400" bIns="25400" rtlCol="0" anchor="ctr"/>
-          <a:lstStyle/>
-          <a:p>
-            <a:pPr algn="l" indent="0" marL="0">
-              <a:lnSpc>
-                <a:spcPct val="100000"/>
-              </a:lnSpc>
-              <a:buNone/>
-            </a:pPr>
-            <a:r>
-              <a:rPr lang="en-US" sz="1400" dirty="0">
-                <a:solidFill>
-                  <a:srgbClr val="1F2A37"/>
-                </a:solidFill>
-                <a:latin typeface="Calibri" pitchFamily="34" charset="0"/>
-                <a:ea typeface="Calibri" pitchFamily="34" charset="-122"/>
-                <a:cs typeface="Calibri" pitchFamily="34" charset="-120"/>
-              </a:rPr>
-              <a:t>Governada pela vontade geral</a:t>
-            </a:r>
-            <a:endParaRPr lang="en-US" sz="1400" dirty="0"/>
-          </a:p>
-        </p:txBody>
-      </p:sp>
-      <p:sp>
-        <p:nvSpPr>
-          <p:cNvPr id="16" name="Text 14"/>
-          <p:cNvSpPr txBox="1"/>
-          <p:nvPr/>
-        </p:nvSpPr>
-        <p:spPr>
-          <a:xfrm>
-            <a:off x="4206240" y="36576"/>
-            <a:ext cx="4800600" cy="219456"/>
-          </a:xfrm>
-          <a:prstGeom prst="rect">
-            <a:avLst/>
-          </a:prstGeom>
-          <a:noFill/>
-          <a:ln/>
-        </p:spPr>
-        <p:txBody>
-          <a:bodyPr wrap="square" lIns="0" tIns="0" rIns="0" bIns="0" rtlCol="0" anchor="ctr"/>
-          <a:lstStyle/>
-          <a:p>
-            <a:pPr algn="r" indent="0" marL="0">
-              <a:lnSpc>
-                <a:spcPct val="100000"/>
-              </a:lnSpc>
-              <a:buNone/>
-            </a:pPr>
-            <a:r>
-              <a:rPr lang="en-US" sz="950" dirty="0">
-                <a:solidFill>
-                  <a:srgbClr val="5B6770"/>
-                </a:solidFill>
-                <a:latin typeface="Calibri" pitchFamily="34" charset="0"/>
-                <a:ea typeface="Calibri" pitchFamily="34" charset="-122"/>
-                <a:cs typeface="Calibri" pitchFamily="34" charset="-120"/>
-              </a:rPr>
-              <a:t>Estado, Governo e Mercado · Unidade 2</a:t>
-            </a:r>
-            <a:endParaRPr lang="en-US" sz="950" dirty="0"/>
-          </a:p>
-        </p:txBody>
-      </p:sp>
-    </p:spTree>
-  </p:cSld>
-  <p:clrMapOvr>
-    <a:masterClrMapping/>
-  </p:clrMapOvr>
-</p:sld>
-</file>
-
-<file path=ppt/slides/slide22.xml><?xml version="1.0" encoding="utf-8"?>
-<p:sld xmlns:a="http://schemas.openxmlformats.org/drawingml/2006/main" xmlns:r="http://schemas.openxmlformats.org/officeDocument/2006/relationships" xmlns:p="http://schemas.openxmlformats.org/presentationml/2006/main">
-  <p:cSld name="Slide 22">
-    <p:bg>
-      <p:bgPr>
-        <a:blipFill dpi="0" rotWithShape="1">
-          <a:blip r:embed="rId1">
-            <a:lum/>
-          </a:blip>
-          <a:srcRect/>
-          <a:stretch>
-            <a:fillRect/>
-          </a:stretch>
-        </a:blipFill>
-        <a:effectLst/>
-      </p:bgPr>
-    </p:bg>
-    <p:spTree>
-      <p:nvGrpSpPr>
-        <p:cNvPr id="1" name=""/>
-        <p:cNvGrpSpPr/>
-        <p:nvPr/>
-      </p:nvGrpSpPr>
-      <p:grpSpPr>
-        <a:xfrm>
-          <a:off x="0" y="0"/>
-          <a:ext cx="0" cy="0"/>
-          <a:chOff x="0" y="0"/>
-          <a:chExt cx="0" cy="0"/>
-        </a:xfrm>
-      </p:grpSpPr>
-      <p:sp>
-        <p:nvSpPr>
-          <p:cNvPr id="2" name="Text 0"/>
-          <p:cNvSpPr txBox="1"/>
-          <p:nvPr/>
-        </p:nvSpPr>
-        <p:spPr>
-          <a:xfrm>
-            <a:off x="731520" y="274320"/>
-            <a:ext cx="7680960" cy="365760"/>
-          </a:xfrm>
-          <a:prstGeom prst="rect">
-            <a:avLst/>
-          </a:prstGeom>
-          <a:noFill/>
-          <a:ln/>
-        </p:spPr>
-        <p:txBody>
-          <a:bodyPr wrap="square" lIns="0" tIns="0" rIns="0" bIns="0" rtlCol="0" anchor="ctr"/>
-          <a:lstStyle/>
-          <a:p>
-            <a:pPr algn="ctr" indent="0" marL="0">
-              <a:lnSpc>
-                <a:spcPct val="100000"/>
-              </a:lnSpc>
-              <a:buNone/>
-            </a:pPr>
-            <a:r>
-              <a:rPr lang="en-US" sz="1250" b="1" dirty="0">
-                <a:solidFill>
-                  <a:srgbClr val="2A8C85"/>
-                </a:solidFill>
-                <a:latin typeface="Calibri" pitchFamily="34" charset="0"/>
-                <a:ea typeface="Calibri" pitchFamily="34" charset="-122"/>
-                <a:cs typeface="Calibri" pitchFamily="34" charset="-120"/>
-              </a:rPr>
-              <a:t>QUIZ DA UNIDADE 2 · PERGUNTA 1 DE 5 · RESPOSTA</a:t>
-            </a:r>
-            <a:endParaRPr lang="en-US" sz="1250" dirty="0"/>
-          </a:p>
-        </p:txBody>
-      </p:sp>
-      <p:sp>
-        <p:nvSpPr>
-          <p:cNvPr id="3" name="Text 1"/>
-          <p:cNvSpPr txBox="1"/>
-          <p:nvPr/>
-        </p:nvSpPr>
-        <p:spPr>
-          <a:xfrm>
-            <a:off x="731520" y="658368"/>
-            <a:ext cx="7680960" cy="960120"/>
-          </a:xfrm>
-          <a:prstGeom prst="rect">
-            <a:avLst/>
-          </a:prstGeom>
-          <a:noFill/>
-          <a:ln/>
-        </p:spPr>
-        <p:txBody>
-          <a:bodyPr wrap="square" lIns="0" tIns="0" rIns="0" bIns="0" rtlCol="0" anchor="ctr"/>
-          <a:lstStyle/>
-          <a:p>
-            <a:pPr algn="ctr" indent="0" marL="0">
-              <a:lnSpc>
-                <a:spcPct val="100000"/>
-              </a:lnSpc>
-              <a:buNone/>
-            </a:pPr>
-            <a:r>
-              <a:rPr lang="en-US" sz="1900" b="1" dirty="0">
-                <a:solidFill>
-                  <a:srgbClr val="13294B"/>
-                </a:solidFill>
-                <a:latin typeface="Calibri" pitchFamily="34" charset="0"/>
-                <a:ea typeface="Calibri" pitchFamily="34" charset="-122"/>
-                <a:cs typeface="Calibri" pitchFamily="34" charset="-120"/>
-              </a:rPr>
-              <a:t>Para Hobbes, como é a vida no estado de natureza, antes do Estado?</a:t>
-            </a:r>
-            <a:endParaRPr lang="en-US" sz="1900" dirty="0"/>
-          </a:p>
-        </p:txBody>
-      </p:sp>
-      <p:sp>
-        <p:nvSpPr>
-          <p:cNvPr id="4" name="Shape 2"/>
-          <p:cNvSpPr/>
-          <p:nvPr/>
-        </p:nvSpPr>
-        <p:spPr>
-          <a:xfrm>
-            <a:off x="685800" y="1737360"/>
-            <a:ext cx="3794760" cy="749808"/>
-          </a:xfrm>
-          <a:prstGeom prst="roundRect">
-            <a:avLst>
-              <a:gd name="adj" fmla="val 9756"/>
-            </a:avLst>
-          </a:prstGeom>
-          <a:solidFill>
-            <a:srgbClr val="FFFFFF"/>
-          </a:solidFill>
-          <a:ln w="12700">
-            <a:solidFill>
-              <a:srgbClr val="DCD5C1"/>
-            </a:solidFill>
-            <a:prstDash val="solid"/>
-          </a:ln>
-        </p:spPr>
-      </p:sp>
-      <p:sp>
-        <p:nvSpPr>
-          <p:cNvPr id="5" name="Text 3"/>
-          <p:cNvSpPr txBox="1"/>
-          <p:nvPr/>
-        </p:nvSpPr>
-        <p:spPr>
-          <a:xfrm>
-            <a:off x="813816" y="1901952"/>
-            <a:ext cx="420624" cy="420624"/>
-          </a:xfrm>
-          <a:prstGeom prst="roundRect">
-            <a:avLst>
-              <a:gd name="adj" fmla="val 50000"/>
-            </a:avLst>
-          </a:prstGeom>
-          <a:solidFill>
-            <a:srgbClr val="9AA3AB"/>
-          </a:solidFill>
-          <a:ln/>
-        </p:spPr>
-        <p:txBody>
-          <a:bodyPr wrap="square" lIns="0" tIns="0" rIns="0" bIns="0" rtlCol="0" anchor="ctr"/>
-          <a:lstStyle/>
-          <a:p>
-            <a:pPr algn="ctr" indent="0" marL="0">
-              <a:lnSpc>
-                <a:spcPct val="100000"/>
-              </a:lnSpc>
-              <a:buNone/>
-            </a:pPr>
-            <a:r>
-              <a:rPr lang="en-US" sz="1600" b="1" dirty="0">
-                <a:solidFill>
-                  <a:srgbClr val="FFFFFF"/>
-                </a:solidFill>
-                <a:latin typeface="Calibri" pitchFamily="34" charset="0"/>
-                <a:ea typeface="Calibri" pitchFamily="34" charset="-122"/>
-                <a:cs typeface="Calibri" pitchFamily="34" charset="-120"/>
-              </a:rPr>
-              <a:t>a</a:t>
-            </a:r>
-            <a:endParaRPr lang="en-US" sz="1600" dirty="0"/>
-          </a:p>
-        </p:txBody>
-      </p:sp>
-      <p:sp>
-        <p:nvSpPr>
-          <p:cNvPr id="6" name="Text 4"/>
-          <p:cNvSpPr txBox="1"/>
-          <p:nvPr/>
-        </p:nvSpPr>
-        <p:spPr>
-          <a:xfrm>
-            <a:off x="1344168" y="1773936"/>
-            <a:ext cx="3044952" cy="676656"/>
-          </a:xfrm>
-          <a:prstGeom prst="rect">
-            <a:avLst/>
-          </a:prstGeom>
-          <a:noFill/>
-          <a:ln/>
-        </p:spPr>
-        <p:txBody>
-          <a:bodyPr wrap="square" lIns="25400" tIns="25400" rIns="25400" bIns="25400" rtlCol="0" anchor="ctr"/>
-          <a:lstStyle/>
-          <a:p>
-            <a:pPr algn="l" indent="0" marL="0">
-              <a:lnSpc>
-                <a:spcPct val="100000"/>
-              </a:lnSpc>
-              <a:buNone/>
-            </a:pPr>
-            <a:r>
-              <a:rPr lang="en-US" sz="1400" dirty="0">
-                <a:solidFill>
-                  <a:srgbClr val="5B6770"/>
-                </a:solidFill>
-                <a:latin typeface="Calibri" pitchFamily="34" charset="0"/>
-                <a:ea typeface="Calibri" pitchFamily="34" charset="-122"/>
-                <a:cs typeface="Calibri" pitchFamily="34" charset="-120"/>
-              </a:rPr>
-              <a:t>Harmoniosa e cooperativa</a:t>
-            </a:r>
-            <a:endParaRPr lang="en-US" sz="1400" dirty="0"/>
-          </a:p>
-        </p:txBody>
-      </p:sp>
-      <p:sp>
-        <p:nvSpPr>
-          <p:cNvPr id="7" name="Shape 5"/>
-          <p:cNvSpPr/>
-          <p:nvPr/>
-        </p:nvSpPr>
-        <p:spPr>
-          <a:xfrm>
-            <a:off x="4663440" y="1737360"/>
-            <a:ext cx="3794760" cy="749808"/>
-          </a:xfrm>
-          <a:prstGeom prst="roundRect">
-            <a:avLst>
-              <a:gd name="adj" fmla="val 9756"/>
-            </a:avLst>
-          </a:prstGeom>
-          <a:solidFill>
-            <a:srgbClr val="E3F2E8"/>
-          </a:solidFill>
-          <a:ln w="25400">
-            <a:solidFill>
-              <a:srgbClr val="2E7D4F"/>
-            </a:solidFill>
-            <a:prstDash val="solid"/>
-          </a:ln>
-        </p:spPr>
-      </p:sp>
-      <p:sp>
-        <p:nvSpPr>
-          <p:cNvPr id="8" name="Text 6"/>
-          <p:cNvSpPr txBox="1"/>
-          <p:nvPr/>
-        </p:nvSpPr>
-        <p:spPr>
-          <a:xfrm>
-            <a:off x="4791456" y="1901952"/>
-            <a:ext cx="420624" cy="420624"/>
-          </a:xfrm>
-          <a:prstGeom prst="roundRect">
-            <a:avLst>
-              <a:gd name="adj" fmla="val 50000"/>
-            </a:avLst>
-          </a:prstGeom>
-          <a:solidFill>
-            <a:srgbClr val="2E7D4F"/>
-          </a:solidFill>
-          <a:ln/>
-        </p:spPr>
-        <p:txBody>
-          <a:bodyPr wrap="square" lIns="0" tIns="0" rIns="0" bIns="0" rtlCol="0" anchor="ctr"/>
-          <a:lstStyle/>
-          <a:p>
-            <a:pPr algn="ctr" indent="0" marL="0">
-              <a:lnSpc>
-                <a:spcPct val="100000"/>
-              </a:lnSpc>
-              <a:buNone/>
-            </a:pPr>
-            <a:r>
-              <a:rPr lang="en-US" sz="1600" b="1" dirty="0">
-                <a:solidFill>
-                  <a:srgbClr val="FFFFFF"/>
-                </a:solidFill>
-                <a:latin typeface="Calibri" pitchFamily="34" charset="0"/>
-                <a:ea typeface="Calibri" pitchFamily="34" charset="-122"/>
-                <a:cs typeface="Calibri" pitchFamily="34" charset="-120"/>
-              </a:rPr>
-              <a:t>b</a:t>
-            </a:r>
-            <a:endParaRPr lang="en-US" sz="1600" dirty="0"/>
-          </a:p>
-        </p:txBody>
-      </p:sp>
-      <p:sp>
-        <p:nvSpPr>
-          <p:cNvPr id="9" name="Text 7"/>
-          <p:cNvSpPr txBox="1"/>
-          <p:nvPr/>
-        </p:nvSpPr>
-        <p:spPr>
-          <a:xfrm>
-            <a:off x="5321808" y="1773936"/>
-            <a:ext cx="3044952" cy="676656"/>
-          </a:xfrm>
-          <a:prstGeom prst="rect">
-            <a:avLst/>
-          </a:prstGeom>
-          <a:noFill/>
-          <a:ln/>
-        </p:spPr>
-        <p:txBody>
-          <a:bodyPr wrap="square" lIns="25400" tIns="25400" rIns="25400" bIns="25400" rtlCol="0" anchor="ctr"/>
-          <a:lstStyle/>
-          <a:p>
-            <a:pPr algn="l" indent="0" marL="0">
-              <a:lnSpc>
-                <a:spcPct val="100000"/>
-              </a:lnSpc>
-              <a:buNone/>
-            </a:pPr>
-            <a:r>
-              <a:rPr lang="en-US" sz="1400" b="1" dirty="0">
-                <a:solidFill>
-                  <a:srgbClr val="1F2A37"/>
-                </a:solidFill>
-                <a:latin typeface="Calibri" pitchFamily="34" charset="0"/>
-                <a:ea typeface="Calibri" pitchFamily="34" charset="-122"/>
-                <a:cs typeface="Calibri" pitchFamily="34" charset="-120"/>
-              </a:rPr>
-              <a:t>Uma guerra de todos contra todos</a:t>
-            </a:r>
-            <a:endParaRPr lang="en-US" sz="1400" dirty="0"/>
-          </a:p>
-        </p:txBody>
-      </p:sp>
-      <p:sp>
-        <p:nvSpPr>
-          <p:cNvPr id="10" name="Shape 8"/>
-          <p:cNvSpPr/>
-          <p:nvPr/>
-        </p:nvSpPr>
-        <p:spPr>
-          <a:xfrm>
-            <a:off x="685800" y="2633472"/>
-            <a:ext cx="3794760" cy="749808"/>
-          </a:xfrm>
-          <a:prstGeom prst="roundRect">
-            <a:avLst>
-              <a:gd name="adj" fmla="val 9756"/>
-            </a:avLst>
-          </a:prstGeom>
-          <a:solidFill>
-            <a:srgbClr val="FFFFFF"/>
-          </a:solidFill>
-          <a:ln w="12700">
-            <a:solidFill>
-              <a:srgbClr val="DCD5C1"/>
-            </a:solidFill>
-            <a:prstDash val="solid"/>
-          </a:ln>
-        </p:spPr>
-      </p:sp>
-      <p:sp>
-        <p:nvSpPr>
-          <p:cNvPr id="11" name="Text 9"/>
-          <p:cNvSpPr txBox="1"/>
-          <p:nvPr/>
-        </p:nvSpPr>
-        <p:spPr>
-          <a:xfrm>
-            <a:off x="813816" y="2798064"/>
-            <a:ext cx="420624" cy="420624"/>
-          </a:xfrm>
-          <a:prstGeom prst="roundRect">
-            <a:avLst>
-              <a:gd name="adj" fmla="val 50000"/>
-            </a:avLst>
-          </a:prstGeom>
-          <a:solidFill>
-            <a:srgbClr val="9AA3AB"/>
-          </a:solidFill>
-          <a:ln/>
-        </p:spPr>
-        <p:txBody>
-          <a:bodyPr wrap="square" lIns="0" tIns="0" rIns="0" bIns="0" rtlCol="0" anchor="ctr"/>
-          <a:lstStyle/>
-          <a:p>
-            <a:pPr algn="ctr" indent="0" marL="0">
-              <a:lnSpc>
-                <a:spcPct val="100000"/>
-              </a:lnSpc>
-              <a:buNone/>
-            </a:pPr>
-            <a:r>
-              <a:rPr lang="en-US" sz="1600" b="1" dirty="0">
-                <a:solidFill>
-                  <a:srgbClr val="FFFFFF"/>
-                </a:solidFill>
-                <a:latin typeface="Calibri" pitchFamily="34" charset="0"/>
-                <a:ea typeface="Calibri" pitchFamily="34" charset="-122"/>
-                <a:cs typeface="Calibri" pitchFamily="34" charset="-120"/>
-              </a:rPr>
-              <a:t>c</a:t>
-            </a:r>
-            <a:endParaRPr lang="en-US" sz="1600" dirty="0"/>
-          </a:p>
-        </p:txBody>
-      </p:sp>
-      <p:sp>
-        <p:nvSpPr>
-          <p:cNvPr id="12" name="Text 10"/>
-          <p:cNvSpPr txBox="1"/>
-          <p:nvPr/>
-        </p:nvSpPr>
-        <p:spPr>
-          <a:xfrm>
-            <a:off x="1344168" y="2670048"/>
-            <a:ext cx="3044952" cy="676656"/>
-          </a:xfrm>
-          <a:prstGeom prst="rect">
-            <a:avLst/>
-          </a:prstGeom>
-          <a:noFill/>
-          <a:ln/>
-        </p:spPr>
-        <p:txBody>
-          <a:bodyPr wrap="square" lIns="25400" tIns="25400" rIns="25400" bIns="25400" rtlCol="0" anchor="ctr"/>
-          <a:lstStyle/>
-          <a:p>
-            <a:pPr algn="l" indent="0" marL="0">
-              <a:lnSpc>
-                <a:spcPct val="100000"/>
-              </a:lnSpc>
-              <a:buNone/>
-            </a:pPr>
-            <a:r>
-              <a:rPr lang="en-US" sz="1400" dirty="0">
-                <a:solidFill>
-                  <a:srgbClr val="5B6770"/>
-                </a:solidFill>
-                <a:latin typeface="Calibri" pitchFamily="34" charset="0"/>
-                <a:ea typeface="Calibri" pitchFamily="34" charset="-122"/>
-                <a:cs typeface="Calibri" pitchFamily="34" charset="-120"/>
-              </a:rPr>
-              <a:t>Organizada pelo mercado</a:t>
-            </a:r>
-            <a:endParaRPr lang="en-US" sz="1400" dirty="0"/>
-          </a:p>
-        </p:txBody>
-      </p:sp>
-      <p:sp>
-        <p:nvSpPr>
-          <p:cNvPr id="13" name="Shape 11"/>
-          <p:cNvSpPr/>
-          <p:nvPr/>
-        </p:nvSpPr>
-        <p:spPr>
-          <a:xfrm>
-            <a:off x="4663440" y="2633472"/>
-            <a:ext cx="3794760" cy="749808"/>
-          </a:xfrm>
-          <a:prstGeom prst="roundRect">
-            <a:avLst>
-              <a:gd name="adj" fmla="val 9756"/>
-            </a:avLst>
-          </a:prstGeom>
-          <a:solidFill>
-            <a:srgbClr val="FFFFFF"/>
-          </a:solidFill>
-          <a:ln w="12700">
-            <a:solidFill>
-              <a:srgbClr val="DCD5C1"/>
-            </a:solidFill>
-            <a:prstDash val="solid"/>
-          </a:ln>
-        </p:spPr>
-      </p:sp>
-      <p:sp>
-        <p:nvSpPr>
-          <p:cNvPr id="14" name="Text 12"/>
-          <p:cNvSpPr txBox="1"/>
-          <p:nvPr/>
-        </p:nvSpPr>
-        <p:spPr>
-          <a:xfrm>
-            <a:off x="4791456" y="2798064"/>
-            <a:ext cx="420624" cy="420624"/>
-          </a:xfrm>
-          <a:prstGeom prst="roundRect">
-            <a:avLst>
-              <a:gd name="adj" fmla="val 50000"/>
-            </a:avLst>
-          </a:prstGeom>
-          <a:solidFill>
-            <a:srgbClr val="9AA3AB"/>
-          </a:solidFill>
-          <a:ln/>
-        </p:spPr>
-        <p:txBody>
-          <a:bodyPr wrap="square" lIns="0" tIns="0" rIns="0" bIns="0" rtlCol="0" anchor="ctr"/>
-          <a:lstStyle/>
-          <a:p>
-            <a:pPr algn="ctr" indent="0" marL="0">
-              <a:lnSpc>
-                <a:spcPct val="100000"/>
-              </a:lnSpc>
-              <a:buNone/>
-            </a:pPr>
-            <a:r>
-              <a:rPr lang="en-US" sz="1600" b="1" dirty="0">
-                <a:solidFill>
-                  <a:srgbClr val="FFFFFF"/>
-                </a:solidFill>
-                <a:latin typeface="Calibri" pitchFamily="34" charset="0"/>
-                <a:ea typeface="Calibri" pitchFamily="34" charset="-122"/>
-                <a:cs typeface="Calibri" pitchFamily="34" charset="-120"/>
-              </a:rPr>
-              <a:t>d</a:t>
-            </a:r>
-            <a:endParaRPr lang="en-US" sz="1600" dirty="0"/>
-          </a:p>
-        </p:txBody>
-      </p:sp>
-      <p:sp>
-        <p:nvSpPr>
-          <p:cNvPr id="15" name="Text 13"/>
-          <p:cNvSpPr txBox="1"/>
-          <p:nvPr/>
-        </p:nvSpPr>
-        <p:spPr>
-          <a:xfrm>
-            <a:off x="5321808" y="2670048"/>
-            <a:ext cx="3044952" cy="676656"/>
-          </a:xfrm>
-          <a:prstGeom prst="rect">
-            <a:avLst/>
-          </a:prstGeom>
-          <a:noFill/>
-          <a:ln/>
-        </p:spPr>
-        <p:txBody>
-          <a:bodyPr wrap="square" lIns="25400" tIns="25400" rIns="25400" bIns="25400" rtlCol="0" anchor="ctr"/>
-          <a:lstStyle/>
-          <a:p>
-            <a:pPr algn="l" indent="0" marL="0">
-              <a:lnSpc>
-                <a:spcPct val="100000"/>
-              </a:lnSpc>
-              <a:buNone/>
-            </a:pPr>
-            <a:r>
-              <a:rPr lang="en-US" sz="1400" dirty="0">
-                <a:solidFill>
-                  <a:srgbClr val="5B6770"/>
-                </a:solidFill>
-                <a:latin typeface="Calibri" pitchFamily="34" charset="0"/>
-                <a:ea typeface="Calibri" pitchFamily="34" charset="-122"/>
-                <a:cs typeface="Calibri" pitchFamily="34" charset="-120"/>
-              </a:rPr>
-              <a:t>Governada pela vontade geral</a:t>
-            </a:r>
-            <a:endParaRPr lang="en-US" sz="1400" dirty="0"/>
-          </a:p>
-        </p:txBody>
-      </p:sp>
-      <p:sp>
-        <p:nvSpPr>
-          <p:cNvPr id="16" name="Text 14"/>
-          <p:cNvSpPr txBox="1"/>
-          <p:nvPr/>
-        </p:nvSpPr>
-        <p:spPr>
-          <a:xfrm>
-            <a:off x="685800" y="3566160"/>
-            <a:ext cx="7772400" cy="841248"/>
-          </a:xfrm>
-          <a:prstGeom prst="roundRect">
-            <a:avLst>
-              <a:gd name="adj" fmla="val 8696"/>
+              <a:gd name="adj" fmla="val 2000"/>
             </a:avLst>
           </a:prstGeom>
           <a:solidFill>
@@ -12594,34 +10629,67 @@
           <a:ln/>
         </p:spPr>
         <p:txBody>
-          <a:bodyPr wrap="square" lIns="114300" tIns="114300" rIns="114300" bIns="114300" rtlCol="0" anchor="ctr"/>
+          <a:bodyPr wrap="square" lIns="114300" tIns="114300" rIns="114300" bIns="114300" rtlCol="0" anchor="t"/>
           <a:lstStyle/>
           <a:p>
             <a:pPr algn="l" indent="0" marL="0">
               <a:lnSpc>
                 <a:spcPct val="100000"/>
               </a:lnSpc>
-              <a:buNone/>
-            </a:pPr>
-            <a:r>
-              <a:rPr lang="en-US" sz="1350" b="1" dirty="0">
-                <a:solidFill>
-                  <a:srgbClr val="2E7D4F"/>
-                </a:solidFill>
-                <a:latin typeface="Calibri" pitchFamily="34" charset="0"/>
-                <a:ea typeface="Calibri" pitchFamily="34" charset="-122"/>
-                <a:cs typeface="Calibri" pitchFamily="34" charset="-120"/>
-              </a:rPr>
-              <a:t>Resposta: b) </a:t>
-            </a:r>
+              <a:spcAft>
+                <a:spcPts val="200"/>
+              </a:spcAft>
+              <a:buNone/>
+            </a:pPr>
+            <a:r>
+              <a:rPr lang="en-US" sz="1100" b="1" dirty="0">
+                <a:solidFill>
+                  <a:srgbClr val="2A8C85"/>
+                </a:solidFill>
+                <a:latin typeface="Calibri" pitchFamily="34" charset="0"/>
+                <a:ea typeface="Calibri" pitchFamily="34" charset="-122"/>
+                <a:cs typeface="Calibri" pitchFamily="34" charset="-120"/>
+              </a:rPr>
+              <a:t>PARTE 2 · TÓPICO 4</a:t>
+            </a:r>
+            <a:endParaRPr lang="en-US" sz="1100" dirty="0"/>
+          </a:p>
+          <a:p>
             <a:pPr algn="l" indent="0" marL="0">
               <a:lnSpc>
                 <a:spcPct val="100000"/>
               </a:lnSpc>
-              <a:buNone/>
-            </a:pPr>
-            <a:r>
-              <a:rPr lang="en-US" sz="1350" dirty="0">
+              <a:spcAft>
+                <a:spcPts val="400"/>
+              </a:spcAft>
+              <a:buNone/>
+            </a:pPr>
+            <a:r>
+              <a:rPr lang="en-US" sz="1450" b="1" dirty="0">
+                <a:solidFill>
+                  <a:srgbClr val="13294B"/>
+                </a:solidFill>
+                <a:latin typeface="Calibri" pitchFamily="34" charset="0"/>
+                <a:ea typeface="Calibri" pitchFamily="34" charset="-122"/>
+                <a:cs typeface="Calibri" pitchFamily="34" charset="-120"/>
+              </a:rPr>
+              <a:t>A matriz liberal</a:t>
+            </a:r>
+            <a:endParaRPr lang="en-US" sz="1100" dirty="0"/>
+          </a:p>
+          <a:p>
+            <a:pPr algn="l" marL="177800" indent="-177800">
+              <a:lnSpc>
+                <a:spcPct val="100000"/>
+              </a:lnSpc>
+              <a:spcAft>
+                <a:spcPts val="300"/>
+              </a:spcAft>
+              <a:buSzPct val="100000"/>
+              <a:buChar char="•"/>
+            </a:pPr>
+            <a:r>
+              <a:rPr lang="en-US" sz="1200" dirty="0">
                 <a:solidFill>
                   <a:srgbClr val="1F2A37"/>
                 </a:solidFill>
@@ -12629,1276 +10697,122 @@
                 <a:ea typeface="Calibri" pitchFamily="34" charset="-122"/>
                 <a:cs typeface="Calibri" pitchFamily="34" charset="-120"/>
               </a:rPr>
-              <a:t>Sem um poder comum, cada um ameaça o outro. Para obter segurança, os indivíduos transferem o poder a um soberano (o Leviatã).</a:t>
-            </a:r>
-            <a:endParaRPr lang="en-US" sz="1350" dirty="0"/>
-          </a:p>
-        </p:txBody>
-      </p:sp>
-      <p:sp>
-        <p:nvSpPr>
-          <p:cNvPr id="17" name="Text 15"/>
+              <a:t>Reação ao absolutismo e ao mercantilismo.</a:t>
+            </a:r>
+            <a:endParaRPr lang="en-US" sz="1100" dirty="0"/>
+          </a:p>
+          <a:p>
+            <a:pPr algn="l" marL="177800" indent="-177800">
+              <a:lnSpc>
+                <a:spcPct val="100000"/>
+              </a:lnSpc>
+              <a:spcAft>
+                <a:spcPts val="300"/>
+              </a:spcAft>
+              <a:buSzPct val="100000"/>
+              <a:buChar char="•"/>
+            </a:pPr>
+            <a:r>
+              <a:rPr lang="en-US" sz="1200" dirty="0">
+                <a:solidFill>
+                  <a:srgbClr val="1F2A37"/>
+                </a:solidFill>
+                <a:latin typeface="Calibri" pitchFamily="34" charset="0"/>
+                <a:ea typeface="Calibri" pitchFamily="34" charset="-122"/>
+                <a:cs typeface="Calibri" pitchFamily="34" charset="-120"/>
+              </a:rPr>
+              <a:t>Locke: direitos naturais e governo limitado; Montesquieu: separação dos poderes.</a:t>
+            </a:r>
+            <a:endParaRPr lang="en-US" sz="1100" dirty="0"/>
+          </a:p>
+          <a:p>
+            <a:pPr algn="l" marL="177800" indent="-177800">
+              <a:lnSpc>
+                <a:spcPct val="100000"/>
+              </a:lnSpc>
+              <a:spcAft>
+                <a:spcPts val="300"/>
+              </a:spcAft>
+              <a:buSzPct val="100000"/>
+              <a:buChar char="•"/>
+            </a:pPr>
+            <a:r>
+              <a:rPr lang="en-US" sz="1200" dirty="0">
+                <a:solidFill>
+                  <a:srgbClr val="1F2A37"/>
+                </a:solidFill>
+                <a:latin typeface="Calibri" pitchFamily="34" charset="0"/>
+                <a:ea typeface="Calibri" pitchFamily="34" charset="-122"/>
+                <a:cs typeface="Calibri" pitchFamily="34" charset="-120"/>
+              </a:rPr>
+              <a:t>Smith: trabalho, divisão do trabalho, mão invisível e os três deveres do Estado mínimo.</a:t>
+            </a:r>
+            <a:endParaRPr lang="en-US" sz="1100" dirty="0"/>
+          </a:p>
+          <a:p>
+            <a:pPr algn="l" marL="177800" indent="-177800">
+              <a:lnSpc>
+                <a:spcPct val="100000"/>
+              </a:lnSpc>
+              <a:spcAft>
+                <a:spcPts val="300"/>
+              </a:spcAft>
+              <a:buSzPct val="100000"/>
+              <a:buChar char="•"/>
+            </a:pPr>
+            <a:r>
+              <a:rPr lang="en-US" sz="1200" dirty="0">
+                <a:solidFill>
+                  <a:srgbClr val="1F2A37"/>
+                </a:solidFill>
+                <a:latin typeface="Calibri" pitchFamily="34" charset="0"/>
+                <a:ea typeface="Calibri" pitchFamily="34" charset="-122"/>
+                <a:cs typeface="Calibri" pitchFamily="34" charset="-120"/>
+              </a:rPr>
+              <a:t>Ricardo (livre comércio) e Say (a oferta cria a procura).</a:t>
+            </a:r>
+            <a:endParaRPr lang="en-US" sz="1100" dirty="0"/>
+          </a:p>
+          <a:p>
+            <a:pPr algn="l" marL="177800" indent="-177800">
+              <a:lnSpc>
+                <a:spcPct val="100000"/>
+              </a:lnSpc>
+              <a:spcAft>
+                <a:spcPts val="300"/>
+              </a:spcAft>
+              <a:buSzPct val="100000"/>
+              <a:buChar char="•"/>
+            </a:pPr>
+            <a:r>
+              <a:rPr lang="en-US" sz="1200" dirty="0">
+                <a:solidFill>
+                  <a:srgbClr val="1F2A37"/>
+                </a:solidFill>
+                <a:latin typeface="Calibri" pitchFamily="34" charset="0"/>
+                <a:ea typeface="Calibri" pitchFamily="34" charset="-122"/>
+                <a:cs typeface="Calibri" pitchFamily="34" charset="-120"/>
+              </a:rPr>
+              <a:t>Limites do Estado mínimo no século XIX.</a:t>
+            </a:r>
+            <a:endParaRPr lang="en-US" sz="1100" dirty="0"/>
+          </a:p>
+        </p:txBody>
+      </p:sp>
+      <p:sp>
+        <p:nvSpPr>
+          <p:cNvPr id="6" name="Text 4"/>
           <p:cNvSpPr txBox="1"/>
           <p:nvPr/>
         </p:nvSpPr>
         <p:spPr>
           <a:xfrm>
-            <a:off x="4206240" y="36576"/>
-            <a:ext cx="4800600" cy="219456"/>
-          </a:xfrm>
-          <a:prstGeom prst="rect">
-            <a:avLst/>
-          </a:prstGeom>
-          <a:noFill/>
-          <a:ln/>
-        </p:spPr>
-        <p:txBody>
-          <a:bodyPr wrap="square" lIns="0" tIns="0" rIns="0" bIns="0" rtlCol="0" anchor="ctr"/>
-          <a:lstStyle/>
-          <a:p>
-            <a:pPr algn="r" indent="0" marL="0">
-              <a:lnSpc>
-                <a:spcPct val="100000"/>
-              </a:lnSpc>
-              <a:buNone/>
-            </a:pPr>
-            <a:r>
-              <a:rPr lang="en-US" sz="950" dirty="0">
-                <a:solidFill>
-                  <a:srgbClr val="5B6770"/>
-                </a:solidFill>
-                <a:latin typeface="Calibri" pitchFamily="34" charset="0"/>
-                <a:ea typeface="Calibri" pitchFamily="34" charset="-122"/>
-                <a:cs typeface="Calibri" pitchFamily="34" charset="-120"/>
-              </a:rPr>
-              <a:t>Estado, Governo e Mercado · Unidade 2</a:t>
-            </a:r>
-            <a:endParaRPr lang="en-US" sz="950" dirty="0"/>
-          </a:p>
-        </p:txBody>
-      </p:sp>
-    </p:spTree>
-  </p:cSld>
-  <p:clrMapOvr>
-    <a:masterClrMapping/>
-  </p:clrMapOvr>
-</p:sld>
-</file>
-
-<file path=ppt/slides/slide23.xml><?xml version="1.0" encoding="utf-8"?>
-<p:sld xmlns:a="http://schemas.openxmlformats.org/drawingml/2006/main" xmlns:r="http://schemas.openxmlformats.org/officeDocument/2006/relationships" xmlns:p="http://schemas.openxmlformats.org/presentationml/2006/main">
-  <p:cSld name="Slide 23">
-    <p:bg>
-      <p:bgPr>
-        <a:blipFill dpi="0" rotWithShape="1">
-          <a:blip r:embed="rId1">
-            <a:lum/>
-          </a:blip>
-          <a:srcRect/>
-          <a:stretch>
-            <a:fillRect/>
-          </a:stretch>
-        </a:blipFill>
-        <a:effectLst/>
-      </p:bgPr>
-    </p:bg>
-    <p:spTree>
-      <p:nvGrpSpPr>
-        <p:cNvPr id="1" name=""/>
-        <p:cNvGrpSpPr/>
-        <p:nvPr/>
-      </p:nvGrpSpPr>
-      <p:grpSpPr>
-        <a:xfrm>
-          <a:off x="0" y="0"/>
-          <a:ext cx="0" cy="0"/>
-          <a:chOff x="0" y="0"/>
-          <a:chExt cx="0" cy="0"/>
-        </a:xfrm>
-      </p:grpSpPr>
-      <p:sp>
-        <p:nvSpPr>
-          <p:cNvPr id="2" name="Text 0"/>
-          <p:cNvSpPr txBox="1"/>
-          <p:nvPr/>
-        </p:nvSpPr>
-        <p:spPr>
-          <a:xfrm>
-            <a:off x="731520" y="274320"/>
-            <a:ext cx="7680960" cy="365760"/>
-          </a:xfrm>
-          <a:prstGeom prst="rect">
-            <a:avLst/>
-          </a:prstGeom>
-          <a:noFill/>
-          <a:ln/>
-        </p:spPr>
-        <p:txBody>
-          <a:bodyPr wrap="square" lIns="0" tIns="0" rIns="0" bIns="0" rtlCol="0" anchor="ctr"/>
-          <a:lstStyle/>
-          <a:p>
-            <a:pPr algn="ctr" indent="0" marL="0">
-              <a:lnSpc>
-                <a:spcPct val="100000"/>
-              </a:lnSpc>
-              <a:buNone/>
-            </a:pPr>
-            <a:r>
-              <a:rPr lang="en-US" sz="1250" b="1" dirty="0">
-                <a:solidFill>
-                  <a:srgbClr val="2A8C85"/>
-                </a:solidFill>
-                <a:latin typeface="Calibri" pitchFamily="34" charset="0"/>
-                <a:ea typeface="Calibri" pitchFamily="34" charset="-122"/>
-                <a:cs typeface="Calibri" pitchFamily="34" charset="-120"/>
-              </a:rPr>
-              <a:t>QUIZ DA UNIDADE 2 · PERGUNTA 2 DE 5</a:t>
-            </a:r>
-            <a:endParaRPr lang="en-US" sz="1250" dirty="0"/>
-          </a:p>
-        </p:txBody>
-      </p:sp>
-      <p:sp>
-        <p:nvSpPr>
-          <p:cNvPr id="3" name="Text 1"/>
-          <p:cNvSpPr txBox="1"/>
-          <p:nvPr/>
-        </p:nvSpPr>
-        <p:spPr>
-          <a:xfrm>
-            <a:off x="731520" y="658368"/>
-            <a:ext cx="7680960" cy="960120"/>
-          </a:xfrm>
-          <a:prstGeom prst="rect">
-            <a:avLst/>
-          </a:prstGeom>
-          <a:noFill/>
-          <a:ln/>
-        </p:spPr>
-        <p:txBody>
-          <a:bodyPr wrap="square" lIns="0" tIns="0" rIns="0" bIns="0" rtlCol="0" anchor="ctr"/>
-          <a:lstStyle/>
-          <a:p>
-            <a:pPr algn="ctr" indent="0" marL="0">
-              <a:lnSpc>
-                <a:spcPct val="100000"/>
-              </a:lnSpc>
-              <a:buNone/>
-            </a:pPr>
-            <a:r>
-              <a:rPr lang="en-US" sz="1900" b="1" dirty="0">
-                <a:solidFill>
-                  <a:srgbClr val="13294B"/>
-                </a:solidFill>
-                <a:latin typeface="Calibri" pitchFamily="34" charset="0"/>
-                <a:ea typeface="Calibri" pitchFamily="34" charset="-122"/>
-                <a:cs typeface="Calibri" pitchFamily="34" charset="-120"/>
-              </a:rPr>
-              <a:t>Os direitos naturais à vida, à liberdade e à propriedade são a base do pensamento de:</a:t>
-            </a:r>
-            <a:endParaRPr lang="en-US" sz="1900" dirty="0"/>
-          </a:p>
-        </p:txBody>
-      </p:sp>
-      <p:sp>
-        <p:nvSpPr>
-          <p:cNvPr id="4" name="Shape 2"/>
-          <p:cNvSpPr/>
-          <p:nvPr/>
-        </p:nvSpPr>
-        <p:spPr>
-          <a:xfrm>
-            <a:off x="685800" y="1737360"/>
-            <a:ext cx="3794760" cy="914400"/>
+            <a:off x="685800" y="3995928"/>
+            <a:ext cx="7772400" cy="484632"/>
           </a:xfrm>
           <a:prstGeom prst="roundRect">
             <a:avLst>
-              <a:gd name="adj" fmla="val 8000"/>
-            </a:avLst>
-          </a:prstGeom>
-          <a:solidFill>
-            <a:srgbClr val="FFFFFF"/>
-          </a:solidFill>
-          <a:ln w="12700">
-            <a:solidFill>
-              <a:srgbClr val="DCD5C1"/>
-            </a:solidFill>
-            <a:prstDash val="solid"/>
-          </a:ln>
-        </p:spPr>
-      </p:sp>
-      <p:sp>
-        <p:nvSpPr>
-          <p:cNvPr id="5" name="Text 3"/>
-          <p:cNvSpPr txBox="1"/>
-          <p:nvPr/>
-        </p:nvSpPr>
-        <p:spPr>
-          <a:xfrm>
-            <a:off x="813816" y="1984248"/>
-            <a:ext cx="420624" cy="420624"/>
-          </a:xfrm>
-          <a:prstGeom prst="roundRect">
-            <a:avLst>
-              <a:gd name="adj" fmla="val 50000"/>
-            </a:avLst>
-          </a:prstGeom>
-          <a:solidFill>
-            <a:srgbClr val="13294B"/>
-          </a:solidFill>
-          <a:ln/>
-        </p:spPr>
-        <p:txBody>
-          <a:bodyPr wrap="square" lIns="0" tIns="0" rIns="0" bIns="0" rtlCol="0" anchor="ctr"/>
-          <a:lstStyle/>
-          <a:p>
-            <a:pPr algn="ctr" indent="0" marL="0">
-              <a:lnSpc>
-                <a:spcPct val="100000"/>
-              </a:lnSpc>
-              <a:buNone/>
-            </a:pPr>
-            <a:r>
-              <a:rPr lang="en-US" sz="1600" b="1" dirty="0">
-                <a:solidFill>
-                  <a:srgbClr val="FFFFFF"/>
-                </a:solidFill>
-                <a:latin typeface="Calibri" pitchFamily="34" charset="0"/>
-                <a:ea typeface="Calibri" pitchFamily="34" charset="-122"/>
-                <a:cs typeface="Calibri" pitchFamily="34" charset="-120"/>
-              </a:rPr>
-              <a:t>a</a:t>
-            </a:r>
-            <a:endParaRPr lang="en-US" sz="1600" dirty="0"/>
-          </a:p>
-        </p:txBody>
-      </p:sp>
-      <p:sp>
-        <p:nvSpPr>
-          <p:cNvPr id="6" name="Text 4"/>
-          <p:cNvSpPr txBox="1"/>
-          <p:nvPr/>
-        </p:nvSpPr>
-        <p:spPr>
-          <a:xfrm>
-            <a:off x="1344168" y="1773936"/>
-            <a:ext cx="3044952" cy="841248"/>
-          </a:xfrm>
-          <a:prstGeom prst="rect">
-            <a:avLst/>
-          </a:prstGeom>
-          <a:noFill/>
-          <a:ln/>
-        </p:spPr>
-        <p:txBody>
-          <a:bodyPr wrap="square" lIns="25400" tIns="25400" rIns="25400" bIns="25400" rtlCol="0" anchor="ctr"/>
-          <a:lstStyle/>
-          <a:p>
-            <a:pPr algn="l" indent="0" marL="0">
-              <a:lnSpc>
-                <a:spcPct val="100000"/>
-              </a:lnSpc>
-              <a:buNone/>
-            </a:pPr>
-            <a:r>
-              <a:rPr lang="en-US" sz="1400" dirty="0">
-                <a:solidFill>
-                  <a:srgbClr val="1F2A37"/>
-                </a:solidFill>
-                <a:latin typeface="Calibri" pitchFamily="34" charset="0"/>
-                <a:ea typeface="Calibri" pitchFamily="34" charset="-122"/>
-                <a:cs typeface="Calibri" pitchFamily="34" charset="-120"/>
-              </a:rPr>
-              <a:t>John Locke</a:t>
-            </a:r>
-            <a:endParaRPr lang="en-US" sz="1400" dirty="0"/>
-          </a:p>
-        </p:txBody>
-      </p:sp>
-      <p:sp>
-        <p:nvSpPr>
-          <p:cNvPr id="7" name="Shape 5"/>
-          <p:cNvSpPr/>
-          <p:nvPr/>
-        </p:nvSpPr>
-        <p:spPr>
-          <a:xfrm>
-            <a:off x="4663440" y="1737360"/>
-            <a:ext cx="3794760" cy="914400"/>
-          </a:xfrm>
-          <a:prstGeom prst="roundRect">
-            <a:avLst>
-              <a:gd name="adj" fmla="val 8000"/>
-            </a:avLst>
-          </a:prstGeom>
-          <a:solidFill>
-            <a:srgbClr val="FFFFFF"/>
-          </a:solidFill>
-          <a:ln w="12700">
-            <a:solidFill>
-              <a:srgbClr val="DCD5C1"/>
-            </a:solidFill>
-            <a:prstDash val="solid"/>
-          </a:ln>
-        </p:spPr>
-      </p:sp>
-      <p:sp>
-        <p:nvSpPr>
-          <p:cNvPr id="8" name="Text 6"/>
-          <p:cNvSpPr txBox="1"/>
-          <p:nvPr/>
-        </p:nvSpPr>
-        <p:spPr>
-          <a:xfrm>
-            <a:off x="4791456" y="1984248"/>
-            <a:ext cx="420624" cy="420624"/>
-          </a:xfrm>
-          <a:prstGeom prst="roundRect">
-            <a:avLst>
-              <a:gd name="adj" fmla="val 50000"/>
-            </a:avLst>
-          </a:prstGeom>
-          <a:solidFill>
-            <a:srgbClr val="13294B"/>
-          </a:solidFill>
-          <a:ln/>
-        </p:spPr>
-        <p:txBody>
-          <a:bodyPr wrap="square" lIns="0" tIns="0" rIns="0" bIns="0" rtlCol="0" anchor="ctr"/>
-          <a:lstStyle/>
-          <a:p>
-            <a:pPr algn="ctr" indent="0" marL="0">
-              <a:lnSpc>
-                <a:spcPct val="100000"/>
-              </a:lnSpc>
-              <a:buNone/>
-            </a:pPr>
-            <a:r>
-              <a:rPr lang="en-US" sz="1600" b="1" dirty="0">
-                <a:solidFill>
-                  <a:srgbClr val="FFFFFF"/>
-                </a:solidFill>
-                <a:latin typeface="Calibri" pitchFamily="34" charset="0"/>
-                <a:ea typeface="Calibri" pitchFamily="34" charset="-122"/>
-                <a:cs typeface="Calibri" pitchFamily="34" charset="-120"/>
-              </a:rPr>
-              <a:t>b</a:t>
-            </a:r>
-            <a:endParaRPr lang="en-US" sz="1600" dirty="0"/>
-          </a:p>
-        </p:txBody>
-      </p:sp>
-      <p:sp>
-        <p:nvSpPr>
-          <p:cNvPr id="9" name="Text 7"/>
-          <p:cNvSpPr txBox="1"/>
-          <p:nvPr/>
-        </p:nvSpPr>
-        <p:spPr>
-          <a:xfrm>
-            <a:off x="5321808" y="1773936"/>
-            <a:ext cx="3044952" cy="841248"/>
-          </a:xfrm>
-          <a:prstGeom prst="rect">
-            <a:avLst/>
-          </a:prstGeom>
-          <a:noFill/>
-          <a:ln/>
-        </p:spPr>
-        <p:txBody>
-          <a:bodyPr wrap="square" lIns="25400" tIns="25400" rIns="25400" bIns="25400" rtlCol="0" anchor="ctr"/>
-          <a:lstStyle/>
-          <a:p>
-            <a:pPr algn="l" indent="0" marL="0">
-              <a:lnSpc>
-                <a:spcPct val="100000"/>
-              </a:lnSpc>
-              <a:buNone/>
-            </a:pPr>
-            <a:r>
-              <a:rPr lang="en-US" sz="1400" dirty="0">
-                <a:solidFill>
-                  <a:srgbClr val="1F2A37"/>
-                </a:solidFill>
-                <a:latin typeface="Calibri" pitchFamily="34" charset="0"/>
-                <a:ea typeface="Calibri" pitchFamily="34" charset="-122"/>
-                <a:cs typeface="Calibri" pitchFamily="34" charset="-120"/>
-              </a:rPr>
-              <a:t>Thomas Hobbes</a:t>
-            </a:r>
-            <a:endParaRPr lang="en-US" sz="1400" dirty="0"/>
-          </a:p>
-        </p:txBody>
-      </p:sp>
-      <p:sp>
-        <p:nvSpPr>
-          <p:cNvPr id="10" name="Shape 8"/>
-          <p:cNvSpPr/>
-          <p:nvPr/>
-        </p:nvSpPr>
-        <p:spPr>
-          <a:xfrm>
-            <a:off x="685800" y="2798064"/>
-            <a:ext cx="3794760" cy="914400"/>
-          </a:xfrm>
-          <a:prstGeom prst="roundRect">
-            <a:avLst>
-              <a:gd name="adj" fmla="val 8000"/>
-            </a:avLst>
-          </a:prstGeom>
-          <a:solidFill>
-            <a:srgbClr val="FFFFFF"/>
-          </a:solidFill>
-          <a:ln w="12700">
-            <a:solidFill>
-              <a:srgbClr val="DCD5C1"/>
-            </a:solidFill>
-            <a:prstDash val="solid"/>
-          </a:ln>
-        </p:spPr>
-      </p:sp>
-      <p:sp>
-        <p:nvSpPr>
-          <p:cNvPr id="11" name="Text 9"/>
-          <p:cNvSpPr txBox="1"/>
-          <p:nvPr/>
-        </p:nvSpPr>
-        <p:spPr>
-          <a:xfrm>
-            <a:off x="813816" y="3044952"/>
-            <a:ext cx="420624" cy="420624"/>
-          </a:xfrm>
-          <a:prstGeom prst="roundRect">
-            <a:avLst>
-              <a:gd name="adj" fmla="val 50000"/>
-            </a:avLst>
-          </a:prstGeom>
-          <a:solidFill>
-            <a:srgbClr val="13294B"/>
-          </a:solidFill>
-          <a:ln/>
-        </p:spPr>
-        <p:txBody>
-          <a:bodyPr wrap="square" lIns="0" tIns="0" rIns="0" bIns="0" rtlCol="0" anchor="ctr"/>
-          <a:lstStyle/>
-          <a:p>
-            <a:pPr algn="ctr" indent="0" marL="0">
-              <a:lnSpc>
-                <a:spcPct val="100000"/>
-              </a:lnSpc>
-              <a:buNone/>
-            </a:pPr>
-            <a:r>
-              <a:rPr lang="en-US" sz="1600" b="1" dirty="0">
-                <a:solidFill>
-                  <a:srgbClr val="FFFFFF"/>
-                </a:solidFill>
-                <a:latin typeface="Calibri" pitchFamily="34" charset="0"/>
-                <a:ea typeface="Calibri" pitchFamily="34" charset="-122"/>
-                <a:cs typeface="Calibri" pitchFamily="34" charset="-120"/>
-              </a:rPr>
-              <a:t>c</a:t>
-            </a:r>
-            <a:endParaRPr lang="en-US" sz="1600" dirty="0"/>
-          </a:p>
-        </p:txBody>
-      </p:sp>
-      <p:sp>
-        <p:nvSpPr>
-          <p:cNvPr id="12" name="Text 10"/>
-          <p:cNvSpPr txBox="1"/>
-          <p:nvPr/>
-        </p:nvSpPr>
-        <p:spPr>
-          <a:xfrm>
-            <a:off x="1344168" y="2834640"/>
-            <a:ext cx="3044952" cy="841248"/>
-          </a:xfrm>
-          <a:prstGeom prst="rect">
-            <a:avLst/>
-          </a:prstGeom>
-          <a:noFill/>
-          <a:ln/>
-        </p:spPr>
-        <p:txBody>
-          <a:bodyPr wrap="square" lIns="25400" tIns="25400" rIns="25400" bIns="25400" rtlCol="0" anchor="ctr"/>
-          <a:lstStyle/>
-          <a:p>
-            <a:pPr algn="l" indent="0" marL="0">
-              <a:lnSpc>
-                <a:spcPct val="100000"/>
-              </a:lnSpc>
-              <a:buNone/>
-            </a:pPr>
-            <a:r>
-              <a:rPr lang="en-US" sz="1400" dirty="0">
-                <a:solidFill>
-                  <a:srgbClr val="1F2A37"/>
-                </a:solidFill>
-                <a:latin typeface="Calibri" pitchFamily="34" charset="0"/>
-                <a:ea typeface="Calibri" pitchFamily="34" charset="-122"/>
-                <a:cs typeface="Calibri" pitchFamily="34" charset="-120"/>
-              </a:rPr>
-              <a:t>Karl Marx</a:t>
-            </a:r>
-            <a:endParaRPr lang="en-US" sz="1400" dirty="0"/>
-          </a:p>
-        </p:txBody>
-      </p:sp>
-      <p:sp>
-        <p:nvSpPr>
-          <p:cNvPr id="13" name="Shape 11"/>
-          <p:cNvSpPr/>
-          <p:nvPr/>
-        </p:nvSpPr>
-        <p:spPr>
-          <a:xfrm>
-            <a:off x="4663440" y="2798064"/>
-            <a:ext cx="3794760" cy="914400"/>
-          </a:xfrm>
-          <a:prstGeom prst="roundRect">
-            <a:avLst>
-              <a:gd name="adj" fmla="val 8000"/>
-            </a:avLst>
-          </a:prstGeom>
-          <a:solidFill>
-            <a:srgbClr val="FFFFFF"/>
-          </a:solidFill>
-          <a:ln w="12700">
-            <a:solidFill>
-              <a:srgbClr val="DCD5C1"/>
-            </a:solidFill>
-            <a:prstDash val="solid"/>
-          </a:ln>
-        </p:spPr>
-      </p:sp>
-      <p:sp>
-        <p:nvSpPr>
-          <p:cNvPr id="14" name="Text 12"/>
-          <p:cNvSpPr txBox="1"/>
-          <p:nvPr/>
-        </p:nvSpPr>
-        <p:spPr>
-          <a:xfrm>
-            <a:off x="4791456" y="3044952"/>
-            <a:ext cx="420624" cy="420624"/>
-          </a:xfrm>
-          <a:prstGeom prst="roundRect">
-            <a:avLst>
-              <a:gd name="adj" fmla="val 50000"/>
-            </a:avLst>
-          </a:prstGeom>
-          <a:solidFill>
-            <a:srgbClr val="13294B"/>
-          </a:solidFill>
-          <a:ln/>
-        </p:spPr>
-        <p:txBody>
-          <a:bodyPr wrap="square" lIns="0" tIns="0" rIns="0" bIns="0" rtlCol="0" anchor="ctr"/>
-          <a:lstStyle/>
-          <a:p>
-            <a:pPr algn="ctr" indent="0" marL="0">
-              <a:lnSpc>
-                <a:spcPct val="100000"/>
-              </a:lnSpc>
-              <a:buNone/>
-            </a:pPr>
-            <a:r>
-              <a:rPr lang="en-US" sz="1600" b="1" dirty="0">
-                <a:solidFill>
-                  <a:srgbClr val="FFFFFF"/>
-                </a:solidFill>
-                <a:latin typeface="Calibri" pitchFamily="34" charset="0"/>
-                <a:ea typeface="Calibri" pitchFamily="34" charset="-122"/>
-                <a:cs typeface="Calibri" pitchFamily="34" charset="-120"/>
-              </a:rPr>
-              <a:t>d</a:t>
-            </a:r>
-            <a:endParaRPr lang="en-US" sz="1600" dirty="0"/>
-          </a:p>
-        </p:txBody>
-      </p:sp>
-      <p:sp>
-        <p:nvSpPr>
-          <p:cNvPr id="15" name="Text 13"/>
-          <p:cNvSpPr txBox="1"/>
-          <p:nvPr/>
-        </p:nvSpPr>
-        <p:spPr>
-          <a:xfrm>
-            <a:off x="5321808" y="2834640"/>
-            <a:ext cx="3044952" cy="841248"/>
-          </a:xfrm>
-          <a:prstGeom prst="rect">
-            <a:avLst/>
-          </a:prstGeom>
-          <a:noFill/>
-          <a:ln/>
-        </p:spPr>
-        <p:txBody>
-          <a:bodyPr wrap="square" lIns="25400" tIns="25400" rIns="25400" bIns="25400" rtlCol="0" anchor="ctr"/>
-          <a:lstStyle/>
-          <a:p>
-            <a:pPr algn="l" indent="0" marL="0">
-              <a:lnSpc>
-                <a:spcPct val="100000"/>
-              </a:lnSpc>
-              <a:buNone/>
-            </a:pPr>
-            <a:r>
-              <a:rPr lang="en-US" sz="1400" dirty="0">
-                <a:solidFill>
-                  <a:srgbClr val="1F2A37"/>
-                </a:solidFill>
-                <a:latin typeface="Calibri" pitchFamily="34" charset="0"/>
-                <a:ea typeface="Calibri" pitchFamily="34" charset="-122"/>
-                <a:cs typeface="Calibri" pitchFamily="34" charset="-120"/>
-              </a:rPr>
-              <a:t>John Maynard Keynes</a:t>
-            </a:r>
-            <a:endParaRPr lang="en-US" sz="1400" dirty="0"/>
-          </a:p>
-        </p:txBody>
-      </p:sp>
-      <p:sp>
-        <p:nvSpPr>
-          <p:cNvPr id="16" name="Text 14"/>
-          <p:cNvSpPr txBox="1"/>
-          <p:nvPr/>
-        </p:nvSpPr>
-        <p:spPr>
-          <a:xfrm>
-            <a:off x="4206240" y="36576"/>
-            <a:ext cx="4800600" cy="219456"/>
-          </a:xfrm>
-          <a:prstGeom prst="rect">
-            <a:avLst/>
-          </a:prstGeom>
-          <a:noFill/>
-          <a:ln/>
-        </p:spPr>
-        <p:txBody>
-          <a:bodyPr wrap="square" lIns="0" tIns="0" rIns="0" bIns="0" rtlCol="0" anchor="ctr"/>
-          <a:lstStyle/>
-          <a:p>
-            <a:pPr algn="r" indent="0" marL="0">
-              <a:lnSpc>
-                <a:spcPct val="100000"/>
-              </a:lnSpc>
-              <a:buNone/>
-            </a:pPr>
-            <a:r>
-              <a:rPr lang="en-US" sz="950" dirty="0">
-                <a:solidFill>
-                  <a:srgbClr val="5B6770"/>
-                </a:solidFill>
-                <a:latin typeface="Calibri" pitchFamily="34" charset="0"/>
-                <a:ea typeface="Calibri" pitchFamily="34" charset="-122"/>
-                <a:cs typeface="Calibri" pitchFamily="34" charset="-120"/>
-              </a:rPr>
-              <a:t>Estado, Governo e Mercado · Unidade 2</a:t>
-            </a:r>
-            <a:endParaRPr lang="en-US" sz="950" dirty="0"/>
-          </a:p>
-        </p:txBody>
-      </p:sp>
-    </p:spTree>
-  </p:cSld>
-  <p:clrMapOvr>
-    <a:masterClrMapping/>
-  </p:clrMapOvr>
-</p:sld>
-</file>
-
-<file path=ppt/slides/slide24.xml><?xml version="1.0" encoding="utf-8"?>
-<p:sld xmlns:a="http://schemas.openxmlformats.org/drawingml/2006/main" xmlns:r="http://schemas.openxmlformats.org/officeDocument/2006/relationships" xmlns:p="http://schemas.openxmlformats.org/presentationml/2006/main">
-  <p:cSld name="Slide 24">
-    <p:bg>
-      <p:bgPr>
-        <a:blipFill dpi="0" rotWithShape="1">
-          <a:blip r:embed="rId1">
-            <a:lum/>
-          </a:blip>
-          <a:srcRect/>
-          <a:stretch>
-            <a:fillRect/>
-          </a:stretch>
-        </a:blipFill>
-        <a:effectLst/>
-      </p:bgPr>
-    </p:bg>
-    <p:spTree>
-      <p:nvGrpSpPr>
-        <p:cNvPr id="1" name=""/>
-        <p:cNvGrpSpPr/>
-        <p:nvPr/>
-      </p:nvGrpSpPr>
-      <p:grpSpPr>
-        <a:xfrm>
-          <a:off x="0" y="0"/>
-          <a:ext cx="0" cy="0"/>
-          <a:chOff x="0" y="0"/>
-          <a:chExt cx="0" cy="0"/>
-        </a:xfrm>
-      </p:grpSpPr>
-      <p:sp>
-        <p:nvSpPr>
-          <p:cNvPr id="2" name="Text 0"/>
-          <p:cNvSpPr txBox="1"/>
-          <p:nvPr/>
-        </p:nvSpPr>
-        <p:spPr>
-          <a:xfrm>
-            <a:off x="731520" y="274320"/>
-            <a:ext cx="7680960" cy="365760"/>
-          </a:xfrm>
-          <a:prstGeom prst="rect">
-            <a:avLst/>
-          </a:prstGeom>
-          <a:noFill/>
-          <a:ln/>
-        </p:spPr>
-        <p:txBody>
-          <a:bodyPr wrap="square" lIns="0" tIns="0" rIns="0" bIns="0" rtlCol="0" anchor="ctr"/>
-          <a:lstStyle/>
-          <a:p>
-            <a:pPr algn="ctr" indent="0" marL="0">
-              <a:lnSpc>
-                <a:spcPct val="100000"/>
-              </a:lnSpc>
-              <a:buNone/>
-            </a:pPr>
-            <a:r>
-              <a:rPr lang="en-US" sz="1250" b="1" dirty="0">
-                <a:solidFill>
-                  <a:srgbClr val="2A8C85"/>
-                </a:solidFill>
-                <a:latin typeface="Calibri" pitchFamily="34" charset="0"/>
-                <a:ea typeface="Calibri" pitchFamily="34" charset="-122"/>
-                <a:cs typeface="Calibri" pitchFamily="34" charset="-120"/>
-              </a:rPr>
-              <a:t>QUIZ DA UNIDADE 2 · PERGUNTA 2 DE 5 · RESPOSTA</a:t>
-            </a:r>
-            <a:endParaRPr lang="en-US" sz="1250" dirty="0"/>
-          </a:p>
-        </p:txBody>
-      </p:sp>
-      <p:sp>
-        <p:nvSpPr>
-          <p:cNvPr id="3" name="Text 1"/>
-          <p:cNvSpPr txBox="1"/>
-          <p:nvPr/>
-        </p:nvSpPr>
-        <p:spPr>
-          <a:xfrm>
-            <a:off x="731520" y="658368"/>
-            <a:ext cx="7680960" cy="960120"/>
-          </a:xfrm>
-          <a:prstGeom prst="rect">
-            <a:avLst/>
-          </a:prstGeom>
-          <a:noFill/>
-          <a:ln/>
-        </p:spPr>
-        <p:txBody>
-          <a:bodyPr wrap="square" lIns="0" tIns="0" rIns="0" bIns="0" rtlCol="0" anchor="ctr"/>
-          <a:lstStyle/>
-          <a:p>
-            <a:pPr algn="ctr" indent="0" marL="0">
-              <a:lnSpc>
-                <a:spcPct val="100000"/>
-              </a:lnSpc>
-              <a:buNone/>
-            </a:pPr>
-            <a:r>
-              <a:rPr lang="en-US" sz="1900" b="1" dirty="0">
-                <a:solidFill>
-                  <a:srgbClr val="13294B"/>
-                </a:solidFill>
-                <a:latin typeface="Calibri" pitchFamily="34" charset="0"/>
-                <a:ea typeface="Calibri" pitchFamily="34" charset="-122"/>
-                <a:cs typeface="Calibri" pitchFamily="34" charset="-120"/>
-              </a:rPr>
-              <a:t>Os direitos naturais à vida, à liberdade e à propriedade são a base do pensamento de:</a:t>
-            </a:r>
-            <a:endParaRPr lang="en-US" sz="1900" dirty="0"/>
-          </a:p>
-        </p:txBody>
-      </p:sp>
-      <p:sp>
-        <p:nvSpPr>
-          <p:cNvPr id="4" name="Shape 2"/>
-          <p:cNvSpPr/>
-          <p:nvPr/>
-        </p:nvSpPr>
-        <p:spPr>
-          <a:xfrm>
-            <a:off x="685800" y="1737360"/>
-            <a:ext cx="3794760" cy="749808"/>
-          </a:xfrm>
-          <a:prstGeom prst="roundRect">
-            <a:avLst>
-              <a:gd name="adj" fmla="val 9756"/>
-            </a:avLst>
-          </a:prstGeom>
-          <a:solidFill>
-            <a:srgbClr val="E3F2E8"/>
-          </a:solidFill>
-          <a:ln w="25400">
-            <a:solidFill>
-              <a:srgbClr val="2E7D4F"/>
-            </a:solidFill>
-            <a:prstDash val="solid"/>
-          </a:ln>
-        </p:spPr>
-      </p:sp>
-      <p:sp>
-        <p:nvSpPr>
-          <p:cNvPr id="5" name="Text 3"/>
-          <p:cNvSpPr txBox="1"/>
-          <p:nvPr/>
-        </p:nvSpPr>
-        <p:spPr>
-          <a:xfrm>
-            <a:off x="813816" y="1901952"/>
-            <a:ext cx="420624" cy="420624"/>
-          </a:xfrm>
-          <a:prstGeom prst="roundRect">
-            <a:avLst>
-              <a:gd name="adj" fmla="val 50000"/>
-            </a:avLst>
-          </a:prstGeom>
-          <a:solidFill>
-            <a:srgbClr val="2E7D4F"/>
-          </a:solidFill>
-          <a:ln/>
-        </p:spPr>
-        <p:txBody>
-          <a:bodyPr wrap="square" lIns="0" tIns="0" rIns="0" bIns="0" rtlCol="0" anchor="ctr"/>
-          <a:lstStyle/>
-          <a:p>
-            <a:pPr algn="ctr" indent="0" marL="0">
-              <a:lnSpc>
-                <a:spcPct val="100000"/>
-              </a:lnSpc>
-              <a:buNone/>
-            </a:pPr>
-            <a:r>
-              <a:rPr lang="en-US" sz="1600" b="1" dirty="0">
-                <a:solidFill>
-                  <a:srgbClr val="FFFFFF"/>
-                </a:solidFill>
-                <a:latin typeface="Calibri" pitchFamily="34" charset="0"/>
-                <a:ea typeface="Calibri" pitchFamily="34" charset="-122"/>
-                <a:cs typeface="Calibri" pitchFamily="34" charset="-120"/>
-              </a:rPr>
-              <a:t>a</a:t>
-            </a:r>
-            <a:endParaRPr lang="en-US" sz="1600" dirty="0"/>
-          </a:p>
-        </p:txBody>
-      </p:sp>
-      <p:sp>
-        <p:nvSpPr>
-          <p:cNvPr id="6" name="Text 4"/>
-          <p:cNvSpPr txBox="1"/>
-          <p:nvPr/>
-        </p:nvSpPr>
-        <p:spPr>
-          <a:xfrm>
-            <a:off x="1344168" y="1773936"/>
-            <a:ext cx="3044952" cy="676656"/>
-          </a:xfrm>
-          <a:prstGeom prst="rect">
-            <a:avLst/>
-          </a:prstGeom>
-          <a:noFill/>
-          <a:ln/>
-        </p:spPr>
-        <p:txBody>
-          <a:bodyPr wrap="square" lIns="25400" tIns="25400" rIns="25400" bIns="25400" rtlCol="0" anchor="ctr"/>
-          <a:lstStyle/>
-          <a:p>
-            <a:pPr algn="l" indent="0" marL="0">
-              <a:lnSpc>
-                <a:spcPct val="100000"/>
-              </a:lnSpc>
-              <a:buNone/>
-            </a:pPr>
-            <a:r>
-              <a:rPr lang="en-US" sz="1400" b="1" dirty="0">
-                <a:solidFill>
-                  <a:srgbClr val="1F2A37"/>
-                </a:solidFill>
-                <a:latin typeface="Calibri" pitchFamily="34" charset="0"/>
-                <a:ea typeface="Calibri" pitchFamily="34" charset="-122"/>
-                <a:cs typeface="Calibri" pitchFamily="34" charset="-120"/>
-              </a:rPr>
-              <a:t>John Locke</a:t>
-            </a:r>
-            <a:endParaRPr lang="en-US" sz="1400" dirty="0"/>
-          </a:p>
-        </p:txBody>
-      </p:sp>
-      <p:sp>
-        <p:nvSpPr>
-          <p:cNvPr id="7" name="Shape 5"/>
-          <p:cNvSpPr/>
-          <p:nvPr/>
-        </p:nvSpPr>
-        <p:spPr>
-          <a:xfrm>
-            <a:off x="4663440" y="1737360"/>
-            <a:ext cx="3794760" cy="749808"/>
-          </a:xfrm>
-          <a:prstGeom prst="roundRect">
-            <a:avLst>
-              <a:gd name="adj" fmla="val 9756"/>
-            </a:avLst>
-          </a:prstGeom>
-          <a:solidFill>
-            <a:srgbClr val="FFFFFF"/>
-          </a:solidFill>
-          <a:ln w="12700">
-            <a:solidFill>
-              <a:srgbClr val="DCD5C1"/>
-            </a:solidFill>
-            <a:prstDash val="solid"/>
-          </a:ln>
-        </p:spPr>
-      </p:sp>
-      <p:sp>
-        <p:nvSpPr>
-          <p:cNvPr id="8" name="Text 6"/>
-          <p:cNvSpPr txBox="1"/>
-          <p:nvPr/>
-        </p:nvSpPr>
-        <p:spPr>
-          <a:xfrm>
-            <a:off x="4791456" y="1901952"/>
-            <a:ext cx="420624" cy="420624"/>
-          </a:xfrm>
-          <a:prstGeom prst="roundRect">
-            <a:avLst>
-              <a:gd name="adj" fmla="val 50000"/>
-            </a:avLst>
-          </a:prstGeom>
-          <a:solidFill>
-            <a:srgbClr val="9AA3AB"/>
-          </a:solidFill>
-          <a:ln/>
-        </p:spPr>
-        <p:txBody>
-          <a:bodyPr wrap="square" lIns="0" tIns="0" rIns="0" bIns="0" rtlCol="0" anchor="ctr"/>
-          <a:lstStyle/>
-          <a:p>
-            <a:pPr algn="ctr" indent="0" marL="0">
-              <a:lnSpc>
-                <a:spcPct val="100000"/>
-              </a:lnSpc>
-              <a:buNone/>
-            </a:pPr>
-            <a:r>
-              <a:rPr lang="en-US" sz="1600" b="1" dirty="0">
-                <a:solidFill>
-                  <a:srgbClr val="FFFFFF"/>
-                </a:solidFill>
-                <a:latin typeface="Calibri" pitchFamily="34" charset="0"/>
-                <a:ea typeface="Calibri" pitchFamily="34" charset="-122"/>
-                <a:cs typeface="Calibri" pitchFamily="34" charset="-120"/>
-              </a:rPr>
-              <a:t>b</a:t>
-            </a:r>
-            <a:endParaRPr lang="en-US" sz="1600" dirty="0"/>
-          </a:p>
-        </p:txBody>
-      </p:sp>
-      <p:sp>
-        <p:nvSpPr>
-          <p:cNvPr id="9" name="Text 7"/>
-          <p:cNvSpPr txBox="1"/>
-          <p:nvPr/>
-        </p:nvSpPr>
-        <p:spPr>
-          <a:xfrm>
-            <a:off x="5321808" y="1773936"/>
-            <a:ext cx="3044952" cy="676656"/>
-          </a:xfrm>
-          <a:prstGeom prst="rect">
-            <a:avLst/>
-          </a:prstGeom>
-          <a:noFill/>
-          <a:ln/>
-        </p:spPr>
-        <p:txBody>
-          <a:bodyPr wrap="square" lIns="25400" tIns="25400" rIns="25400" bIns="25400" rtlCol="0" anchor="ctr"/>
-          <a:lstStyle/>
-          <a:p>
-            <a:pPr algn="l" indent="0" marL="0">
-              <a:lnSpc>
-                <a:spcPct val="100000"/>
-              </a:lnSpc>
-              <a:buNone/>
-            </a:pPr>
-            <a:r>
-              <a:rPr lang="en-US" sz="1400" dirty="0">
-                <a:solidFill>
-                  <a:srgbClr val="5B6770"/>
-                </a:solidFill>
-                <a:latin typeface="Calibri" pitchFamily="34" charset="0"/>
-                <a:ea typeface="Calibri" pitchFamily="34" charset="-122"/>
-                <a:cs typeface="Calibri" pitchFamily="34" charset="-120"/>
-              </a:rPr>
-              <a:t>Thomas Hobbes</a:t>
-            </a:r>
-            <a:endParaRPr lang="en-US" sz="1400" dirty="0"/>
-          </a:p>
-        </p:txBody>
-      </p:sp>
-      <p:sp>
-        <p:nvSpPr>
-          <p:cNvPr id="10" name="Shape 8"/>
-          <p:cNvSpPr/>
-          <p:nvPr/>
-        </p:nvSpPr>
-        <p:spPr>
-          <a:xfrm>
-            <a:off x="685800" y="2633472"/>
-            <a:ext cx="3794760" cy="749808"/>
-          </a:xfrm>
-          <a:prstGeom prst="roundRect">
-            <a:avLst>
-              <a:gd name="adj" fmla="val 9756"/>
-            </a:avLst>
-          </a:prstGeom>
-          <a:solidFill>
-            <a:srgbClr val="FFFFFF"/>
-          </a:solidFill>
-          <a:ln w="12700">
-            <a:solidFill>
-              <a:srgbClr val="DCD5C1"/>
-            </a:solidFill>
-            <a:prstDash val="solid"/>
-          </a:ln>
-        </p:spPr>
-      </p:sp>
-      <p:sp>
-        <p:nvSpPr>
-          <p:cNvPr id="11" name="Text 9"/>
-          <p:cNvSpPr txBox="1"/>
-          <p:nvPr/>
-        </p:nvSpPr>
-        <p:spPr>
-          <a:xfrm>
-            <a:off x="813816" y="2798064"/>
-            <a:ext cx="420624" cy="420624"/>
-          </a:xfrm>
-          <a:prstGeom prst="roundRect">
-            <a:avLst>
-              <a:gd name="adj" fmla="val 50000"/>
-            </a:avLst>
-          </a:prstGeom>
-          <a:solidFill>
-            <a:srgbClr val="9AA3AB"/>
-          </a:solidFill>
-          <a:ln/>
-        </p:spPr>
-        <p:txBody>
-          <a:bodyPr wrap="square" lIns="0" tIns="0" rIns="0" bIns="0" rtlCol="0" anchor="ctr"/>
-          <a:lstStyle/>
-          <a:p>
-            <a:pPr algn="ctr" indent="0" marL="0">
-              <a:lnSpc>
-                <a:spcPct val="100000"/>
-              </a:lnSpc>
-              <a:buNone/>
-            </a:pPr>
-            <a:r>
-              <a:rPr lang="en-US" sz="1600" b="1" dirty="0">
-                <a:solidFill>
-                  <a:srgbClr val="FFFFFF"/>
-                </a:solidFill>
-                <a:latin typeface="Calibri" pitchFamily="34" charset="0"/>
-                <a:ea typeface="Calibri" pitchFamily="34" charset="-122"/>
-                <a:cs typeface="Calibri" pitchFamily="34" charset="-120"/>
-              </a:rPr>
-              <a:t>c</a:t>
-            </a:r>
-            <a:endParaRPr lang="en-US" sz="1600" dirty="0"/>
-          </a:p>
-        </p:txBody>
-      </p:sp>
-      <p:sp>
-        <p:nvSpPr>
-          <p:cNvPr id="12" name="Text 10"/>
-          <p:cNvSpPr txBox="1"/>
-          <p:nvPr/>
-        </p:nvSpPr>
-        <p:spPr>
-          <a:xfrm>
-            <a:off x="1344168" y="2670048"/>
-            <a:ext cx="3044952" cy="676656"/>
-          </a:xfrm>
-          <a:prstGeom prst="rect">
-            <a:avLst/>
-          </a:prstGeom>
-          <a:noFill/>
-          <a:ln/>
-        </p:spPr>
-        <p:txBody>
-          <a:bodyPr wrap="square" lIns="25400" tIns="25400" rIns="25400" bIns="25400" rtlCol="0" anchor="ctr"/>
-          <a:lstStyle/>
-          <a:p>
-            <a:pPr algn="l" indent="0" marL="0">
-              <a:lnSpc>
-                <a:spcPct val="100000"/>
-              </a:lnSpc>
-              <a:buNone/>
-            </a:pPr>
-            <a:r>
-              <a:rPr lang="en-US" sz="1400" dirty="0">
-                <a:solidFill>
-                  <a:srgbClr val="5B6770"/>
-                </a:solidFill>
-                <a:latin typeface="Calibri" pitchFamily="34" charset="0"/>
-                <a:ea typeface="Calibri" pitchFamily="34" charset="-122"/>
-                <a:cs typeface="Calibri" pitchFamily="34" charset="-120"/>
-              </a:rPr>
-              <a:t>Karl Marx</a:t>
-            </a:r>
-            <a:endParaRPr lang="en-US" sz="1400" dirty="0"/>
-          </a:p>
-        </p:txBody>
-      </p:sp>
-      <p:sp>
-        <p:nvSpPr>
-          <p:cNvPr id="13" name="Shape 11"/>
-          <p:cNvSpPr/>
-          <p:nvPr/>
-        </p:nvSpPr>
-        <p:spPr>
-          <a:xfrm>
-            <a:off x="4663440" y="2633472"/>
-            <a:ext cx="3794760" cy="749808"/>
-          </a:xfrm>
-          <a:prstGeom prst="roundRect">
-            <a:avLst>
-              <a:gd name="adj" fmla="val 9756"/>
-            </a:avLst>
-          </a:prstGeom>
-          <a:solidFill>
-            <a:srgbClr val="FFFFFF"/>
-          </a:solidFill>
-          <a:ln w="12700">
-            <a:solidFill>
-              <a:srgbClr val="DCD5C1"/>
-            </a:solidFill>
-            <a:prstDash val="solid"/>
-          </a:ln>
-        </p:spPr>
-      </p:sp>
-      <p:sp>
-        <p:nvSpPr>
-          <p:cNvPr id="14" name="Text 12"/>
-          <p:cNvSpPr txBox="1"/>
-          <p:nvPr/>
-        </p:nvSpPr>
-        <p:spPr>
-          <a:xfrm>
-            <a:off x="4791456" y="2798064"/>
-            <a:ext cx="420624" cy="420624"/>
-          </a:xfrm>
-          <a:prstGeom prst="roundRect">
-            <a:avLst>
-              <a:gd name="adj" fmla="val 50000"/>
-            </a:avLst>
-          </a:prstGeom>
-          <a:solidFill>
-            <a:srgbClr val="9AA3AB"/>
-          </a:solidFill>
-          <a:ln/>
-        </p:spPr>
-        <p:txBody>
-          <a:bodyPr wrap="square" lIns="0" tIns="0" rIns="0" bIns="0" rtlCol="0" anchor="ctr"/>
-          <a:lstStyle/>
-          <a:p>
-            <a:pPr algn="ctr" indent="0" marL="0">
-              <a:lnSpc>
-                <a:spcPct val="100000"/>
-              </a:lnSpc>
-              <a:buNone/>
-            </a:pPr>
-            <a:r>
-              <a:rPr lang="en-US" sz="1600" b="1" dirty="0">
-                <a:solidFill>
-                  <a:srgbClr val="FFFFFF"/>
-                </a:solidFill>
-                <a:latin typeface="Calibri" pitchFamily="34" charset="0"/>
-                <a:ea typeface="Calibri" pitchFamily="34" charset="-122"/>
-                <a:cs typeface="Calibri" pitchFamily="34" charset="-120"/>
-              </a:rPr>
-              <a:t>d</a:t>
-            </a:r>
-            <a:endParaRPr lang="en-US" sz="1600" dirty="0"/>
-          </a:p>
-        </p:txBody>
-      </p:sp>
-      <p:sp>
-        <p:nvSpPr>
-          <p:cNvPr id="15" name="Text 13"/>
-          <p:cNvSpPr txBox="1"/>
-          <p:nvPr/>
-        </p:nvSpPr>
-        <p:spPr>
-          <a:xfrm>
-            <a:off x="5321808" y="2670048"/>
-            <a:ext cx="3044952" cy="676656"/>
-          </a:xfrm>
-          <a:prstGeom prst="rect">
-            <a:avLst/>
-          </a:prstGeom>
-          <a:noFill/>
-          <a:ln/>
-        </p:spPr>
-        <p:txBody>
-          <a:bodyPr wrap="square" lIns="25400" tIns="25400" rIns="25400" bIns="25400" rtlCol="0" anchor="ctr"/>
-          <a:lstStyle/>
-          <a:p>
-            <a:pPr algn="l" indent="0" marL="0">
-              <a:lnSpc>
-                <a:spcPct val="100000"/>
-              </a:lnSpc>
-              <a:buNone/>
-            </a:pPr>
-            <a:r>
-              <a:rPr lang="en-US" sz="1400" dirty="0">
-                <a:solidFill>
-                  <a:srgbClr val="5B6770"/>
-                </a:solidFill>
-                <a:latin typeface="Calibri" pitchFamily="34" charset="0"/>
-                <a:ea typeface="Calibri" pitchFamily="34" charset="-122"/>
-                <a:cs typeface="Calibri" pitchFamily="34" charset="-120"/>
-              </a:rPr>
-              <a:t>John Maynard Keynes</a:t>
-            </a:r>
-            <a:endParaRPr lang="en-US" sz="1400" dirty="0"/>
-          </a:p>
-        </p:txBody>
-      </p:sp>
-      <p:sp>
-        <p:nvSpPr>
-          <p:cNvPr id="16" name="Text 14"/>
-          <p:cNvSpPr txBox="1"/>
-          <p:nvPr/>
-        </p:nvSpPr>
-        <p:spPr>
-          <a:xfrm>
-            <a:off x="685800" y="3566160"/>
-            <a:ext cx="7772400" cy="841248"/>
-          </a:xfrm>
-          <a:prstGeom prst="roundRect">
-            <a:avLst>
-              <a:gd name="adj" fmla="val 8696"/>
+              <a:gd name="adj" fmla="val 15094"/>
             </a:avLst>
           </a:prstGeom>
           <a:solidFill>
@@ -13907,147 +10821,7 @@
           <a:ln/>
         </p:spPr>
         <p:txBody>
-          <a:bodyPr wrap="square" lIns="114300" tIns="114300" rIns="114300" bIns="114300" rtlCol="0" anchor="ctr"/>
-          <a:lstStyle/>
-          <a:p>
-            <a:pPr algn="l" indent="0" marL="0">
-              <a:lnSpc>
-                <a:spcPct val="100000"/>
-              </a:lnSpc>
-              <a:buNone/>
-            </a:pPr>
-            <a:r>
-              <a:rPr lang="en-US" sz="1350" b="1" dirty="0">
-                <a:solidFill>
-                  <a:srgbClr val="2E7D4F"/>
-                </a:solidFill>
-                <a:latin typeface="Calibri" pitchFamily="34" charset="0"/>
-                <a:ea typeface="Calibri" pitchFamily="34" charset="-122"/>
-                <a:cs typeface="Calibri" pitchFamily="34" charset="-120"/>
-              </a:rPr>
-              <a:t>Resposta: a) </a:t>
-            </a:r>
-            <a:pPr algn="l" indent="0" marL="0">
-              <a:lnSpc>
-                <a:spcPct val="100000"/>
-              </a:lnSpc>
-              <a:buNone/>
-            </a:pPr>
-            <a:r>
-              <a:rPr lang="en-US" sz="1350" dirty="0">
-                <a:solidFill>
-                  <a:srgbClr val="1F2A37"/>
-                </a:solidFill>
-                <a:latin typeface="Calibri" pitchFamily="34" charset="0"/>
-                <a:ea typeface="Calibri" pitchFamily="34" charset="-122"/>
-                <a:cs typeface="Calibri" pitchFamily="34" charset="-120"/>
-              </a:rPr>
-              <a:t>Locke funda o liberalismo político: o governo existe para proteger esses direitos e tem poder limitado.</a:t>
-            </a:r>
-            <a:endParaRPr lang="en-US" sz="1350" dirty="0"/>
-          </a:p>
-        </p:txBody>
-      </p:sp>
-      <p:sp>
-        <p:nvSpPr>
-          <p:cNvPr id="17" name="Text 15"/>
-          <p:cNvSpPr txBox="1"/>
-          <p:nvPr/>
-        </p:nvSpPr>
-        <p:spPr>
-          <a:xfrm>
-            <a:off x="4206240" y="36576"/>
-            <a:ext cx="4800600" cy="219456"/>
-          </a:xfrm>
-          <a:prstGeom prst="rect">
-            <a:avLst/>
-          </a:prstGeom>
-          <a:noFill/>
-          <a:ln/>
-        </p:spPr>
-        <p:txBody>
-          <a:bodyPr wrap="square" lIns="0" tIns="0" rIns="0" bIns="0" rtlCol="0" anchor="ctr"/>
-          <a:lstStyle/>
-          <a:p>
-            <a:pPr algn="r" indent="0" marL="0">
-              <a:lnSpc>
-                <a:spcPct val="100000"/>
-              </a:lnSpc>
-              <a:buNone/>
-            </a:pPr>
-            <a:r>
-              <a:rPr lang="en-US" sz="950" dirty="0">
-                <a:solidFill>
-                  <a:srgbClr val="5B6770"/>
-                </a:solidFill>
-                <a:latin typeface="Calibri" pitchFamily="34" charset="0"/>
-                <a:ea typeface="Calibri" pitchFamily="34" charset="-122"/>
-                <a:cs typeface="Calibri" pitchFamily="34" charset="-120"/>
-              </a:rPr>
-              <a:t>Estado, Governo e Mercado · Unidade 2</a:t>
-            </a:r>
-            <a:endParaRPr lang="en-US" sz="950" dirty="0"/>
-          </a:p>
-        </p:txBody>
-      </p:sp>
-    </p:spTree>
-  </p:cSld>
-  <p:clrMapOvr>
-    <a:masterClrMapping/>
-  </p:clrMapOvr>
-</p:sld>
-</file>
-
-<file path=ppt/slides/slide25.xml><?xml version="1.0" encoding="utf-8"?>
-<p:sld xmlns:a="http://schemas.openxmlformats.org/drawingml/2006/main" xmlns:r="http://schemas.openxmlformats.org/officeDocument/2006/relationships" xmlns:p="http://schemas.openxmlformats.org/presentationml/2006/main">
-  <p:cSld name="Slide 25">
-    <p:bg>
-      <p:bgPr>
-        <a:blipFill dpi="0" rotWithShape="1">
-          <a:blip r:embed="rId1">
-            <a:lum/>
-          </a:blip>
-          <a:srcRect/>
-          <a:stretch>
-            <a:fillRect/>
-          </a:stretch>
-        </a:blipFill>
-        <a:effectLst/>
-      </p:bgPr>
-    </p:bg>
-    <p:spTree>
-      <p:nvGrpSpPr>
-        <p:cNvPr id="1" name=""/>
-        <p:cNvGrpSpPr/>
-        <p:nvPr/>
-      </p:nvGrpSpPr>
-      <p:grpSpPr>
-        <a:xfrm>
-          <a:off x="0" y="0"/>
-          <a:ext cx="0" cy="0"/>
-          <a:chOff x="0" y="0"/>
-          <a:chExt cx="0" cy="0"/>
-        </a:xfrm>
-      </p:grpSpPr>
-      <p:sp>
-        <p:nvSpPr>
-          <p:cNvPr id="2" name="Text 0"/>
-          <p:cNvSpPr txBox="1"/>
-          <p:nvPr/>
-        </p:nvSpPr>
-        <p:spPr>
-          <a:xfrm>
-            <a:off x="731520" y="274320"/>
-            <a:ext cx="7680960" cy="365760"/>
-          </a:xfrm>
-          <a:prstGeom prst="rect">
-            <a:avLst/>
-          </a:prstGeom>
-          <a:noFill/>
-          <a:ln/>
-        </p:spPr>
-        <p:txBody>
-          <a:bodyPr wrap="square" lIns="0" tIns="0" rIns="0" bIns="0" rtlCol="0" anchor="ctr"/>
+          <a:bodyPr wrap="square" lIns="127000" tIns="127000" rIns="127000" bIns="127000" rtlCol="0" anchor="ctr"/>
           <a:lstStyle/>
           <a:p>
             <a:pPr algn="ctr" indent="0" marL="0">
@@ -14057,49 +10831,7 @@
               <a:buNone/>
             </a:pPr>
             <a:r>
-              <a:rPr lang="en-US" sz="1250" b="1" dirty="0">
-                <a:solidFill>
-                  <a:srgbClr val="2A8C85"/>
-                </a:solidFill>
-                <a:latin typeface="Calibri" pitchFamily="34" charset="0"/>
-                <a:ea typeface="Calibri" pitchFamily="34" charset="-122"/>
-                <a:cs typeface="Calibri" pitchFamily="34" charset="-120"/>
-              </a:rPr>
-              <a:t>QUIZ DA UNIDADE 2 · PERGUNTA 3 DE 5</a:t>
-            </a:r>
-            <a:endParaRPr lang="en-US" sz="1250" dirty="0"/>
-          </a:p>
-        </p:txBody>
-      </p:sp>
-      <p:sp>
-        <p:nvSpPr>
-          <p:cNvPr id="3" name="Text 1"/>
-          <p:cNvSpPr txBox="1"/>
-          <p:nvPr/>
-        </p:nvSpPr>
-        <p:spPr>
-          <a:xfrm>
-            <a:off x="731520" y="658368"/>
-            <a:ext cx="7680960" cy="960120"/>
-          </a:xfrm>
-          <a:prstGeom prst="rect">
-            <a:avLst/>
-          </a:prstGeom>
-          <a:noFill/>
-          <a:ln/>
-        </p:spPr>
-        <p:txBody>
-          <a:bodyPr wrap="square" lIns="0" tIns="0" rIns="0" bIns="0" rtlCol="0" anchor="ctr"/>
-          <a:lstStyle/>
-          <a:p>
-            <a:pPr algn="ctr" indent="0" marL="0">
-              <a:lnSpc>
-                <a:spcPct val="100000"/>
-              </a:lnSpc>
-              <a:buNone/>
-            </a:pPr>
-            <a:r>
-              <a:rPr lang="en-US" sz="1900" b="1" dirty="0">
+              <a:rPr lang="en-US" sz="1300" b="1" dirty="0">
                 <a:solidFill>
                   <a:srgbClr val="13294B"/>
                 </a:solidFill>
@@ -14107,3101 +10839,15 @@
                 <a:ea typeface="Calibri" pitchFamily="34" charset="-122"/>
                 <a:cs typeface="Calibri" pitchFamily="34" charset="-120"/>
               </a:rPr>
-              <a:t>A ideia de que “o poder deve frear o poder”, base da separação dos poderes, é de:</a:t>
-            </a:r>
-            <a:endParaRPr lang="en-US" sz="1900" dirty="0"/>
-          </a:p>
-        </p:txBody>
-      </p:sp>
-      <p:sp>
-        <p:nvSpPr>
-          <p:cNvPr id="4" name="Shape 2"/>
-          <p:cNvSpPr/>
-          <p:nvPr/>
-        </p:nvSpPr>
-        <p:spPr>
-          <a:xfrm>
-            <a:off x="685800" y="1737360"/>
-            <a:ext cx="3794760" cy="914400"/>
-          </a:xfrm>
-          <a:prstGeom prst="roundRect">
-            <a:avLst>
-              <a:gd name="adj" fmla="val 8000"/>
-            </a:avLst>
-          </a:prstGeom>
-          <a:solidFill>
-            <a:srgbClr val="FFFFFF"/>
-          </a:solidFill>
-          <a:ln w="12700">
-            <a:solidFill>
-              <a:srgbClr val="DCD5C1"/>
-            </a:solidFill>
-            <a:prstDash val="solid"/>
-          </a:ln>
-        </p:spPr>
-      </p:sp>
-      <p:sp>
-        <p:nvSpPr>
-          <p:cNvPr id="5" name="Text 3"/>
-          <p:cNvSpPr txBox="1"/>
-          <p:nvPr/>
-        </p:nvSpPr>
-        <p:spPr>
-          <a:xfrm>
-            <a:off x="813816" y="1984248"/>
-            <a:ext cx="420624" cy="420624"/>
-          </a:xfrm>
-          <a:prstGeom prst="roundRect">
-            <a:avLst>
-              <a:gd name="adj" fmla="val 50000"/>
-            </a:avLst>
-          </a:prstGeom>
-          <a:solidFill>
-            <a:srgbClr val="13294B"/>
-          </a:solidFill>
-          <a:ln/>
-        </p:spPr>
-        <p:txBody>
-          <a:bodyPr wrap="square" lIns="0" tIns="0" rIns="0" bIns="0" rtlCol="0" anchor="ctr"/>
-          <a:lstStyle/>
-          <a:p>
-            <a:pPr algn="ctr" indent="0" marL="0">
-              <a:lnSpc>
-                <a:spcPct val="100000"/>
-              </a:lnSpc>
-              <a:buNone/>
-            </a:pPr>
-            <a:r>
-              <a:rPr lang="en-US" sz="1600" b="1" dirty="0">
-                <a:solidFill>
-                  <a:srgbClr val="FFFFFF"/>
-                </a:solidFill>
-                <a:latin typeface="Calibri" pitchFamily="34" charset="0"/>
-                <a:ea typeface="Calibri" pitchFamily="34" charset="-122"/>
-                <a:cs typeface="Calibri" pitchFamily="34" charset="-120"/>
-              </a:rPr>
-              <a:t>a</a:t>
-            </a:r>
-            <a:endParaRPr lang="en-US" sz="1600" dirty="0"/>
-          </a:p>
-        </p:txBody>
-      </p:sp>
-      <p:sp>
-        <p:nvSpPr>
-          <p:cNvPr id="6" name="Text 4"/>
-          <p:cNvSpPr txBox="1"/>
-          <p:nvPr/>
-        </p:nvSpPr>
-        <p:spPr>
-          <a:xfrm>
-            <a:off x="1344168" y="1773936"/>
-            <a:ext cx="3044952" cy="841248"/>
-          </a:xfrm>
-          <a:prstGeom prst="rect">
-            <a:avLst/>
-          </a:prstGeom>
-          <a:noFill/>
-          <a:ln/>
-        </p:spPr>
-        <p:txBody>
-          <a:bodyPr wrap="square" lIns="25400" tIns="25400" rIns="25400" bIns="25400" rtlCol="0" anchor="ctr"/>
-          <a:lstStyle/>
-          <a:p>
-            <a:pPr algn="l" indent="0" marL="0">
-              <a:lnSpc>
-                <a:spcPct val="100000"/>
-              </a:lnSpc>
-              <a:buNone/>
-            </a:pPr>
-            <a:r>
-              <a:rPr lang="en-US" sz="1400" dirty="0">
-                <a:solidFill>
-                  <a:srgbClr val="1F2A37"/>
-                </a:solidFill>
-                <a:latin typeface="Calibri" pitchFamily="34" charset="0"/>
-                <a:ea typeface="Calibri" pitchFamily="34" charset="-122"/>
-                <a:cs typeface="Calibri" pitchFamily="34" charset="-120"/>
-              </a:rPr>
-              <a:t>Rousseau</a:t>
-            </a:r>
-            <a:endParaRPr lang="en-US" sz="1400" dirty="0"/>
-          </a:p>
-        </p:txBody>
-      </p:sp>
-      <p:sp>
-        <p:nvSpPr>
-          <p:cNvPr id="7" name="Shape 5"/>
-          <p:cNvSpPr/>
-          <p:nvPr/>
-        </p:nvSpPr>
-        <p:spPr>
-          <a:xfrm>
-            <a:off x="4663440" y="1737360"/>
-            <a:ext cx="3794760" cy="914400"/>
-          </a:xfrm>
-          <a:prstGeom prst="roundRect">
-            <a:avLst>
-              <a:gd name="adj" fmla="val 8000"/>
-            </a:avLst>
-          </a:prstGeom>
-          <a:solidFill>
-            <a:srgbClr val="FFFFFF"/>
-          </a:solidFill>
-          <a:ln w="12700">
-            <a:solidFill>
-              <a:srgbClr val="DCD5C1"/>
-            </a:solidFill>
-            <a:prstDash val="solid"/>
-          </a:ln>
-        </p:spPr>
-      </p:sp>
-      <p:sp>
-        <p:nvSpPr>
-          <p:cNvPr id="8" name="Text 6"/>
-          <p:cNvSpPr txBox="1"/>
-          <p:nvPr/>
-        </p:nvSpPr>
-        <p:spPr>
-          <a:xfrm>
-            <a:off x="4791456" y="1984248"/>
-            <a:ext cx="420624" cy="420624"/>
-          </a:xfrm>
-          <a:prstGeom prst="roundRect">
-            <a:avLst>
-              <a:gd name="adj" fmla="val 50000"/>
-            </a:avLst>
-          </a:prstGeom>
-          <a:solidFill>
-            <a:srgbClr val="13294B"/>
-          </a:solidFill>
-          <a:ln/>
-        </p:spPr>
-        <p:txBody>
-          <a:bodyPr wrap="square" lIns="0" tIns="0" rIns="0" bIns="0" rtlCol="0" anchor="ctr"/>
-          <a:lstStyle/>
-          <a:p>
-            <a:pPr algn="ctr" indent="0" marL="0">
-              <a:lnSpc>
-                <a:spcPct val="100000"/>
-              </a:lnSpc>
-              <a:buNone/>
-            </a:pPr>
-            <a:r>
-              <a:rPr lang="en-US" sz="1600" b="1" dirty="0">
-                <a:solidFill>
-                  <a:srgbClr val="FFFFFF"/>
-                </a:solidFill>
-                <a:latin typeface="Calibri" pitchFamily="34" charset="0"/>
-                <a:ea typeface="Calibri" pitchFamily="34" charset="-122"/>
-                <a:cs typeface="Calibri" pitchFamily="34" charset="-120"/>
-              </a:rPr>
-              <a:t>b</a:t>
-            </a:r>
-            <a:endParaRPr lang="en-US" sz="1600" dirty="0"/>
-          </a:p>
-        </p:txBody>
-      </p:sp>
-      <p:sp>
-        <p:nvSpPr>
-          <p:cNvPr id="9" name="Text 7"/>
-          <p:cNvSpPr txBox="1"/>
-          <p:nvPr/>
-        </p:nvSpPr>
-        <p:spPr>
-          <a:xfrm>
-            <a:off x="5321808" y="1773936"/>
-            <a:ext cx="3044952" cy="841248"/>
-          </a:xfrm>
-          <a:prstGeom prst="rect">
-            <a:avLst/>
-          </a:prstGeom>
-          <a:noFill/>
-          <a:ln/>
-        </p:spPr>
-        <p:txBody>
-          <a:bodyPr wrap="square" lIns="25400" tIns="25400" rIns="25400" bIns="25400" rtlCol="0" anchor="ctr"/>
-          <a:lstStyle/>
-          <a:p>
-            <a:pPr algn="l" indent="0" marL="0">
-              <a:lnSpc>
-                <a:spcPct val="100000"/>
-              </a:lnSpc>
-              <a:buNone/>
-            </a:pPr>
-            <a:r>
-              <a:rPr lang="en-US" sz="1400" dirty="0">
-                <a:solidFill>
-                  <a:srgbClr val="1F2A37"/>
-                </a:solidFill>
-                <a:latin typeface="Calibri" pitchFamily="34" charset="0"/>
-                <a:ea typeface="Calibri" pitchFamily="34" charset="-122"/>
-                <a:cs typeface="Calibri" pitchFamily="34" charset="-120"/>
-              </a:rPr>
-              <a:t>Adam Smith</a:t>
-            </a:r>
-            <a:endParaRPr lang="en-US" sz="1400" dirty="0"/>
-          </a:p>
-        </p:txBody>
-      </p:sp>
-      <p:sp>
-        <p:nvSpPr>
-          <p:cNvPr id="10" name="Shape 8"/>
-          <p:cNvSpPr/>
-          <p:nvPr/>
-        </p:nvSpPr>
-        <p:spPr>
-          <a:xfrm>
-            <a:off x="685800" y="2798064"/>
-            <a:ext cx="3794760" cy="914400"/>
-          </a:xfrm>
-          <a:prstGeom prst="roundRect">
-            <a:avLst>
-              <a:gd name="adj" fmla="val 8000"/>
-            </a:avLst>
-          </a:prstGeom>
-          <a:solidFill>
-            <a:srgbClr val="FFFFFF"/>
-          </a:solidFill>
-          <a:ln w="12700">
-            <a:solidFill>
-              <a:srgbClr val="DCD5C1"/>
-            </a:solidFill>
-            <a:prstDash val="solid"/>
-          </a:ln>
-        </p:spPr>
-      </p:sp>
-      <p:sp>
-        <p:nvSpPr>
-          <p:cNvPr id="11" name="Text 9"/>
-          <p:cNvSpPr txBox="1"/>
-          <p:nvPr/>
-        </p:nvSpPr>
-        <p:spPr>
-          <a:xfrm>
-            <a:off x="813816" y="3044952"/>
-            <a:ext cx="420624" cy="420624"/>
-          </a:xfrm>
-          <a:prstGeom prst="roundRect">
-            <a:avLst>
-              <a:gd name="adj" fmla="val 50000"/>
-            </a:avLst>
-          </a:prstGeom>
-          <a:solidFill>
-            <a:srgbClr val="13294B"/>
-          </a:solidFill>
-          <a:ln/>
-        </p:spPr>
-        <p:txBody>
-          <a:bodyPr wrap="square" lIns="0" tIns="0" rIns="0" bIns="0" rtlCol="0" anchor="ctr"/>
-          <a:lstStyle/>
-          <a:p>
-            <a:pPr algn="ctr" indent="0" marL="0">
-              <a:lnSpc>
-                <a:spcPct val="100000"/>
-              </a:lnSpc>
-              <a:buNone/>
-            </a:pPr>
-            <a:r>
-              <a:rPr lang="en-US" sz="1600" b="1" dirty="0">
-                <a:solidFill>
-                  <a:srgbClr val="FFFFFF"/>
-                </a:solidFill>
-                <a:latin typeface="Calibri" pitchFamily="34" charset="0"/>
-                <a:ea typeface="Calibri" pitchFamily="34" charset="-122"/>
-                <a:cs typeface="Calibri" pitchFamily="34" charset="-120"/>
-              </a:rPr>
-              <a:t>c</a:t>
-            </a:r>
-            <a:endParaRPr lang="en-US" sz="1600" dirty="0"/>
-          </a:p>
-        </p:txBody>
-      </p:sp>
-      <p:sp>
-        <p:nvSpPr>
-          <p:cNvPr id="12" name="Text 10"/>
-          <p:cNvSpPr txBox="1"/>
-          <p:nvPr/>
-        </p:nvSpPr>
-        <p:spPr>
-          <a:xfrm>
-            <a:off x="1344168" y="2834640"/>
-            <a:ext cx="3044952" cy="841248"/>
-          </a:xfrm>
-          <a:prstGeom prst="rect">
-            <a:avLst/>
-          </a:prstGeom>
-          <a:noFill/>
-          <a:ln/>
-        </p:spPr>
-        <p:txBody>
-          <a:bodyPr wrap="square" lIns="25400" tIns="25400" rIns="25400" bIns="25400" rtlCol="0" anchor="ctr"/>
-          <a:lstStyle/>
-          <a:p>
-            <a:pPr algn="l" indent="0" marL="0">
-              <a:lnSpc>
-                <a:spcPct val="100000"/>
-              </a:lnSpc>
-              <a:buNone/>
-            </a:pPr>
-            <a:r>
-              <a:rPr lang="en-US" sz="1400" dirty="0">
-                <a:solidFill>
-                  <a:srgbClr val="1F2A37"/>
-                </a:solidFill>
-                <a:latin typeface="Calibri" pitchFamily="34" charset="0"/>
-                <a:ea typeface="Calibri" pitchFamily="34" charset="-122"/>
-                <a:cs typeface="Calibri" pitchFamily="34" charset="-120"/>
-              </a:rPr>
-              <a:t>Montesquieu</a:t>
-            </a:r>
-            <a:endParaRPr lang="en-US" sz="1400" dirty="0"/>
-          </a:p>
-        </p:txBody>
-      </p:sp>
-      <p:sp>
-        <p:nvSpPr>
-          <p:cNvPr id="13" name="Shape 11"/>
-          <p:cNvSpPr/>
-          <p:nvPr/>
-        </p:nvSpPr>
-        <p:spPr>
-          <a:xfrm>
-            <a:off x="4663440" y="2798064"/>
-            <a:ext cx="3794760" cy="914400"/>
-          </a:xfrm>
-          <a:prstGeom prst="roundRect">
-            <a:avLst>
-              <a:gd name="adj" fmla="val 8000"/>
-            </a:avLst>
-          </a:prstGeom>
-          <a:solidFill>
-            <a:srgbClr val="FFFFFF"/>
-          </a:solidFill>
-          <a:ln w="12700">
-            <a:solidFill>
-              <a:srgbClr val="DCD5C1"/>
-            </a:solidFill>
-            <a:prstDash val="solid"/>
-          </a:ln>
-        </p:spPr>
-      </p:sp>
-      <p:sp>
-        <p:nvSpPr>
-          <p:cNvPr id="14" name="Text 12"/>
-          <p:cNvSpPr txBox="1"/>
-          <p:nvPr/>
-        </p:nvSpPr>
-        <p:spPr>
-          <a:xfrm>
-            <a:off x="4791456" y="3044952"/>
-            <a:ext cx="420624" cy="420624"/>
-          </a:xfrm>
-          <a:prstGeom prst="roundRect">
-            <a:avLst>
-              <a:gd name="adj" fmla="val 50000"/>
-            </a:avLst>
-          </a:prstGeom>
-          <a:solidFill>
-            <a:srgbClr val="13294B"/>
-          </a:solidFill>
-          <a:ln/>
-        </p:spPr>
-        <p:txBody>
-          <a:bodyPr wrap="square" lIns="0" tIns="0" rIns="0" bIns="0" rtlCol="0" anchor="ctr"/>
-          <a:lstStyle/>
-          <a:p>
-            <a:pPr algn="ctr" indent="0" marL="0">
-              <a:lnSpc>
-                <a:spcPct val="100000"/>
-              </a:lnSpc>
-              <a:buNone/>
-            </a:pPr>
-            <a:r>
-              <a:rPr lang="en-US" sz="1600" b="1" dirty="0">
-                <a:solidFill>
-                  <a:srgbClr val="FFFFFF"/>
-                </a:solidFill>
-                <a:latin typeface="Calibri" pitchFamily="34" charset="0"/>
-                <a:ea typeface="Calibri" pitchFamily="34" charset="-122"/>
-                <a:cs typeface="Calibri" pitchFamily="34" charset="-120"/>
-              </a:rPr>
-              <a:t>d</a:t>
-            </a:r>
-            <a:endParaRPr lang="en-US" sz="1600" dirty="0"/>
-          </a:p>
-        </p:txBody>
-      </p:sp>
-      <p:sp>
-        <p:nvSpPr>
-          <p:cNvPr id="15" name="Text 13"/>
-          <p:cNvSpPr txBox="1"/>
-          <p:nvPr/>
-        </p:nvSpPr>
-        <p:spPr>
-          <a:xfrm>
-            <a:off x="5321808" y="2834640"/>
-            <a:ext cx="3044952" cy="841248"/>
-          </a:xfrm>
-          <a:prstGeom prst="rect">
-            <a:avLst/>
-          </a:prstGeom>
-          <a:noFill/>
-          <a:ln/>
-        </p:spPr>
-        <p:txBody>
-          <a:bodyPr wrap="square" lIns="25400" tIns="25400" rIns="25400" bIns="25400" rtlCol="0" anchor="ctr"/>
-          <a:lstStyle/>
-          <a:p>
-            <a:pPr algn="l" indent="0" marL="0">
-              <a:lnSpc>
-                <a:spcPct val="100000"/>
-              </a:lnSpc>
-              <a:buNone/>
-            </a:pPr>
-            <a:r>
-              <a:rPr lang="en-US" sz="1400" dirty="0">
-                <a:solidFill>
-                  <a:srgbClr val="1F2A37"/>
-                </a:solidFill>
-                <a:latin typeface="Calibri" pitchFamily="34" charset="0"/>
-                <a:ea typeface="Calibri" pitchFamily="34" charset="-122"/>
-                <a:cs typeface="Calibri" pitchFamily="34" charset="-120"/>
-              </a:rPr>
-              <a:t>Jean-Baptiste Say</a:t>
-            </a:r>
-            <a:endParaRPr lang="en-US" sz="1400" dirty="0"/>
-          </a:p>
-        </p:txBody>
-      </p:sp>
-      <p:sp>
-        <p:nvSpPr>
-          <p:cNvPr id="16" name="Text 14"/>
-          <p:cNvSpPr txBox="1"/>
-          <p:nvPr/>
-        </p:nvSpPr>
-        <p:spPr>
-          <a:xfrm>
-            <a:off x="4206240" y="36576"/>
-            <a:ext cx="4800600" cy="219456"/>
-          </a:xfrm>
-          <a:prstGeom prst="rect">
-            <a:avLst/>
-          </a:prstGeom>
-          <a:noFill/>
-          <a:ln/>
-        </p:spPr>
-        <p:txBody>
-          <a:bodyPr wrap="square" lIns="0" tIns="0" rIns="0" bIns="0" rtlCol="0" anchor="ctr"/>
-          <a:lstStyle/>
-          <a:p>
-            <a:pPr algn="r" indent="0" marL="0">
-              <a:lnSpc>
-                <a:spcPct val="100000"/>
-              </a:lnSpc>
-              <a:buNone/>
-            </a:pPr>
-            <a:r>
-              <a:rPr lang="en-US" sz="950" dirty="0">
-                <a:solidFill>
-                  <a:srgbClr val="5B6770"/>
-                </a:solidFill>
-                <a:latin typeface="Calibri" pitchFamily="34" charset="0"/>
-                <a:ea typeface="Calibri" pitchFamily="34" charset="-122"/>
-                <a:cs typeface="Calibri" pitchFamily="34" charset="-120"/>
-              </a:rPr>
-              <a:t>Estado, Governo e Mercado · Unidade 2</a:t>
-            </a:r>
-            <a:endParaRPr lang="en-US" sz="950" dirty="0"/>
-          </a:p>
-        </p:txBody>
-      </p:sp>
-    </p:spTree>
-  </p:cSld>
-  <p:clrMapOvr>
-    <a:masterClrMapping/>
-  </p:clrMapOvr>
-</p:sld>
-</file>
-
-<file path=ppt/slides/slide26.xml><?xml version="1.0" encoding="utf-8"?>
-<p:sld xmlns:a="http://schemas.openxmlformats.org/drawingml/2006/main" xmlns:r="http://schemas.openxmlformats.org/officeDocument/2006/relationships" xmlns:p="http://schemas.openxmlformats.org/presentationml/2006/main">
-  <p:cSld name="Slide 26">
-    <p:bg>
-      <p:bgPr>
-        <a:blipFill dpi="0" rotWithShape="1">
-          <a:blip r:embed="rId1">
-            <a:lum/>
-          </a:blip>
-          <a:srcRect/>
-          <a:stretch>
-            <a:fillRect/>
-          </a:stretch>
-        </a:blipFill>
-        <a:effectLst/>
-      </p:bgPr>
-    </p:bg>
-    <p:spTree>
-      <p:nvGrpSpPr>
-        <p:cNvPr id="1" name=""/>
-        <p:cNvGrpSpPr/>
-        <p:nvPr/>
-      </p:nvGrpSpPr>
-      <p:grpSpPr>
-        <a:xfrm>
-          <a:off x="0" y="0"/>
-          <a:ext cx="0" cy="0"/>
-          <a:chOff x="0" y="0"/>
-          <a:chExt cx="0" cy="0"/>
-        </a:xfrm>
-      </p:grpSpPr>
-      <p:sp>
-        <p:nvSpPr>
-          <p:cNvPr id="2" name="Text 0"/>
-          <p:cNvSpPr txBox="1"/>
-          <p:nvPr/>
-        </p:nvSpPr>
-        <p:spPr>
-          <a:xfrm>
-            <a:off x="731520" y="274320"/>
-            <a:ext cx="7680960" cy="365760"/>
-          </a:xfrm>
-          <a:prstGeom prst="rect">
-            <a:avLst/>
-          </a:prstGeom>
-          <a:noFill/>
-          <a:ln/>
-        </p:spPr>
-        <p:txBody>
-          <a:bodyPr wrap="square" lIns="0" tIns="0" rIns="0" bIns="0" rtlCol="0" anchor="ctr"/>
-          <a:lstStyle/>
-          <a:p>
-            <a:pPr algn="ctr" indent="0" marL="0">
-              <a:lnSpc>
-                <a:spcPct val="100000"/>
-              </a:lnSpc>
-              <a:buNone/>
-            </a:pPr>
-            <a:r>
-              <a:rPr lang="en-US" sz="1250" b="1" dirty="0">
-                <a:solidFill>
-                  <a:srgbClr val="2A8C85"/>
-                </a:solidFill>
-                <a:latin typeface="Calibri" pitchFamily="34" charset="0"/>
-                <a:ea typeface="Calibri" pitchFamily="34" charset="-122"/>
-                <a:cs typeface="Calibri" pitchFamily="34" charset="-120"/>
-              </a:rPr>
-              <a:t>QUIZ DA UNIDADE 2 · PERGUNTA 3 DE 5 · RESPOSTA</a:t>
-            </a:r>
-            <a:endParaRPr lang="en-US" sz="1250" dirty="0"/>
-          </a:p>
-        </p:txBody>
-      </p:sp>
-      <p:sp>
-        <p:nvSpPr>
-          <p:cNvPr id="3" name="Text 1"/>
-          <p:cNvSpPr txBox="1"/>
-          <p:nvPr/>
-        </p:nvSpPr>
-        <p:spPr>
-          <a:xfrm>
-            <a:off x="731520" y="658368"/>
-            <a:ext cx="7680960" cy="960120"/>
-          </a:xfrm>
-          <a:prstGeom prst="rect">
-            <a:avLst/>
-          </a:prstGeom>
-          <a:noFill/>
-          <a:ln/>
-        </p:spPr>
-        <p:txBody>
-          <a:bodyPr wrap="square" lIns="0" tIns="0" rIns="0" bIns="0" rtlCol="0" anchor="ctr"/>
-          <a:lstStyle/>
-          <a:p>
-            <a:pPr algn="ctr" indent="0" marL="0">
-              <a:lnSpc>
-                <a:spcPct val="100000"/>
-              </a:lnSpc>
-              <a:buNone/>
-            </a:pPr>
-            <a:r>
-              <a:rPr lang="en-US" sz="1900" b="1" dirty="0">
-                <a:solidFill>
-                  <a:srgbClr val="13294B"/>
-                </a:solidFill>
-                <a:latin typeface="Calibri" pitchFamily="34" charset="0"/>
-                <a:ea typeface="Calibri" pitchFamily="34" charset="-122"/>
-                <a:cs typeface="Calibri" pitchFamily="34" charset="-120"/>
-              </a:rPr>
-              <a:t>A ideia de que “o poder deve frear o poder”, base da separação dos poderes, é de:</a:t>
-            </a:r>
-            <a:endParaRPr lang="en-US" sz="1900" dirty="0"/>
-          </a:p>
-        </p:txBody>
-      </p:sp>
-      <p:sp>
-        <p:nvSpPr>
-          <p:cNvPr id="4" name="Shape 2"/>
-          <p:cNvSpPr/>
-          <p:nvPr/>
-        </p:nvSpPr>
-        <p:spPr>
-          <a:xfrm>
-            <a:off x="685800" y="1737360"/>
-            <a:ext cx="3794760" cy="749808"/>
-          </a:xfrm>
-          <a:prstGeom prst="roundRect">
-            <a:avLst>
-              <a:gd name="adj" fmla="val 9756"/>
-            </a:avLst>
-          </a:prstGeom>
-          <a:solidFill>
-            <a:srgbClr val="FFFFFF"/>
-          </a:solidFill>
-          <a:ln w="12700">
-            <a:solidFill>
-              <a:srgbClr val="DCD5C1"/>
-            </a:solidFill>
-            <a:prstDash val="solid"/>
-          </a:ln>
-        </p:spPr>
-      </p:sp>
-      <p:sp>
-        <p:nvSpPr>
-          <p:cNvPr id="5" name="Text 3"/>
-          <p:cNvSpPr txBox="1"/>
-          <p:nvPr/>
-        </p:nvSpPr>
-        <p:spPr>
-          <a:xfrm>
-            <a:off x="813816" y="1901952"/>
-            <a:ext cx="420624" cy="420624"/>
-          </a:xfrm>
-          <a:prstGeom prst="roundRect">
-            <a:avLst>
-              <a:gd name="adj" fmla="val 50000"/>
-            </a:avLst>
-          </a:prstGeom>
-          <a:solidFill>
-            <a:srgbClr val="9AA3AB"/>
-          </a:solidFill>
-          <a:ln/>
-        </p:spPr>
-        <p:txBody>
-          <a:bodyPr wrap="square" lIns="0" tIns="0" rIns="0" bIns="0" rtlCol="0" anchor="ctr"/>
-          <a:lstStyle/>
-          <a:p>
-            <a:pPr algn="ctr" indent="0" marL="0">
-              <a:lnSpc>
-                <a:spcPct val="100000"/>
-              </a:lnSpc>
-              <a:buNone/>
-            </a:pPr>
-            <a:r>
-              <a:rPr lang="en-US" sz="1600" b="1" dirty="0">
-                <a:solidFill>
-                  <a:srgbClr val="FFFFFF"/>
-                </a:solidFill>
-                <a:latin typeface="Calibri" pitchFamily="34" charset="0"/>
-                <a:ea typeface="Calibri" pitchFamily="34" charset="-122"/>
-                <a:cs typeface="Calibri" pitchFamily="34" charset="-120"/>
-              </a:rPr>
-              <a:t>a</a:t>
-            </a:r>
-            <a:endParaRPr lang="en-US" sz="1600" dirty="0"/>
-          </a:p>
-        </p:txBody>
-      </p:sp>
-      <p:sp>
-        <p:nvSpPr>
-          <p:cNvPr id="6" name="Text 4"/>
-          <p:cNvSpPr txBox="1"/>
-          <p:nvPr/>
-        </p:nvSpPr>
-        <p:spPr>
-          <a:xfrm>
-            <a:off x="1344168" y="1773936"/>
-            <a:ext cx="3044952" cy="676656"/>
-          </a:xfrm>
-          <a:prstGeom prst="rect">
-            <a:avLst/>
-          </a:prstGeom>
-          <a:noFill/>
-          <a:ln/>
-        </p:spPr>
-        <p:txBody>
-          <a:bodyPr wrap="square" lIns="25400" tIns="25400" rIns="25400" bIns="25400" rtlCol="0" anchor="ctr"/>
-          <a:lstStyle/>
-          <a:p>
-            <a:pPr algn="l" indent="0" marL="0">
-              <a:lnSpc>
-                <a:spcPct val="100000"/>
-              </a:lnSpc>
-              <a:buNone/>
-            </a:pPr>
-            <a:r>
-              <a:rPr lang="en-US" sz="1400" dirty="0">
-                <a:solidFill>
-                  <a:srgbClr val="5B6770"/>
-                </a:solidFill>
-                <a:latin typeface="Calibri" pitchFamily="34" charset="0"/>
-                <a:ea typeface="Calibri" pitchFamily="34" charset="-122"/>
-                <a:cs typeface="Calibri" pitchFamily="34" charset="-120"/>
-              </a:rPr>
-              <a:t>Rousseau</a:t>
-            </a:r>
-            <a:endParaRPr lang="en-US" sz="1400" dirty="0"/>
-          </a:p>
-        </p:txBody>
-      </p:sp>
-      <p:sp>
-        <p:nvSpPr>
-          <p:cNvPr id="7" name="Shape 5"/>
-          <p:cNvSpPr/>
-          <p:nvPr/>
-        </p:nvSpPr>
-        <p:spPr>
-          <a:xfrm>
-            <a:off x="4663440" y="1737360"/>
-            <a:ext cx="3794760" cy="749808"/>
-          </a:xfrm>
-          <a:prstGeom prst="roundRect">
-            <a:avLst>
-              <a:gd name="adj" fmla="val 9756"/>
-            </a:avLst>
-          </a:prstGeom>
-          <a:solidFill>
-            <a:srgbClr val="FFFFFF"/>
-          </a:solidFill>
-          <a:ln w="12700">
-            <a:solidFill>
-              <a:srgbClr val="DCD5C1"/>
-            </a:solidFill>
-            <a:prstDash val="solid"/>
-          </a:ln>
-        </p:spPr>
-      </p:sp>
-      <p:sp>
-        <p:nvSpPr>
-          <p:cNvPr id="8" name="Text 6"/>
-          <p:cNvSpPr txBox="1"/>
-          <p:nvPr/>
-        </p:nvSpPr>
-        <p:spPr>
-          <a:xfrm>
-            <a:off x="4791456" y="1901952"/>
-            <a:ext cx="420624" cy="420624"/>
-          </a:xfrm>
-          <a:prstGeom prst="roundRect">
-            <a:avLst>
-              <a:gd name="adj" fmla="val 50000"/>
-            </a:avLst>
-          </a:prstGeom>
-          <a:solidFill>
-            <a:srgbClr val="9AA3AB"/>
-          </a:solidFill>
-          <a:ln/>
-        </p:spPr>
-        <p:txBody>
-          <a:bodyPr wrap="square" lIns="0" tIns="0" rIns="0" bIns="0" rtlCol="0" anchor="ctr"/>
-          <a:lstStyle/>
-          <a:p>
-            <a:pPr algn="ctr" indent="0" marL="0">
-              <a:lnSpc>
-                <a:spcPct val="100000"/>
-              </a:lnSpc>
-              <a:buNone/>
-            </a:pPr>
-            <a:r>
-              <a:rPr lang="en-US" sz="1600" b="1" dirty="0">
-                <a:solidFill>
-                  <a:srgbClr val="FFFFFF"/>
-                </a:solidFill>
-                <a:latin typeface="Calibri" pitchFamily="34" charset="0"/>
-                <a:ea typeface="Calibri" pitchFamily="34" charset="-122"/>
-                <a:cs typeface="Calibri" pitchFamily="34" charset="-120"/>
-              </a:rPr>
-              <a:t>b</a:t>
-            </a:r>
-            <a:endParaRPr lang="en-US" sz="1600" dirty="0"/>
-          </a:p>
-        </p:txBody>
-      </p:sp>
-      <p:sp>
-        <p:nvSpPr>
-          <p:cNvPr id="9" name="Text 7"/>
-          <p:cNvSpPr txBox="1"/>
-          <p:nvPr/>
-        </p:nvSpPr>
-        <p:spPr>
-          <a:xfrm>
-            <a:off x="5321808" y="1773936"/>
-            <a:ext cx="3044952" cy="676656"/>
-          </a:xfrm>
-          <a:prstGeom prst="rect">
-            <a:avLst/>
-          </a:prstGeom>
-          <a:noFill/>
-          <a:ln/>
-        </p:spPr>
-        <p:txBody>
-          <a:bodyPr wrap="square" lIns="25400" tIns="25400" rIns="25400" bIns="25400" rtlCol="0" anchor="ctr"/>
-          <a:lstStyle/>
-          <a:p>
-            <a:pPr algn="l" indent="0" marL="0">
-              <a:lnSpc>
-                <a:spcPct val="100000"/>
-              </a:lnSpc>
-              <a:buNone/>
-            </a:pPr>
-            <a:r>
-              <a:rPr lang="en-US" sz="1400" dirty="0">
-                <a:solidFill>
-                  <a:srgbClr val="5B6770"/>
-                </a:solidFill>
-                <a:latin typeface="Calibri" pitchFamily="34" charset="0"/>
-                <a:ea typeface="Calibri" pitchFamily="34" charset="-122"/>
-                <a:cs typeface="Calibri" pitchFamily="34" charset="-120"/>
-              </a:rPr>
-              <a:t>Adam Smith</a:t>
-            </a:r>
-            <a:endParaRPr lang="en-US" sz="1400" dirty="0"/>
-          </a:p>
-        </p:txBody>
-      </p:sp>
-      <p:sp>
-        <p:nvSpPr>
-          <p:cNvPr id="10" name="Shape 8"/>
-          <p:cNvSpPr/>
-          <p:nvPr/>
-        </p:nvSpPr>
-        <p:spPr>
-          <a:xfrm>
-            <a:off x="685800" y="2633472"/>
-            <a:ext cx="3794760" cy="749808"/>
-          </a:xfrm>
-          <a:prstGeom prst="roundRect">
-            <a:avLst>
-              <a:gd name="adj" fmla="val 9756"/>
-            </a:avLst>
-          </a:prstGeom>
-          <a:solidFill>
-            <a:srgbClr val="E3F2E8"/>
-          </a:solidFill>
-          <a:ln w="25400">
-            <a:solidFill>
-              <a:srgbClr val="2E7D4F"/>
-            </a:solidFill>
-            <a:prstDash val="solid"/>
-          </a:ln>
-        </p:spPr>
-      </p:sp>
-      <p:sp>
-        <p:nvSpPr>
-          <p:cNvPr id="11" name="Text 9"/>
-          <p:cNvSpPr txBox="1"/>
-          <p:nvPr/>
-        </p:nvSpPr>
-        <p:spPr>
-          <a:xfrm>
-            <a:off x="813816" y="2798064"/>
-            <a:ext cx="420624" cy="420624"/>
-          </a:xfrm>
-          <a:prstGeom prst="roundRect">
-            <a:avLst>
-              <a:gd name="adj" fmla="val 50000"/>
-            </a:avLst>
-          </a:prstGeom>
-          <a:solidFill>
-            <a:srgbClr val="2E7D4F"/>
-          </a:solidFill>
-          <a:ln/>
-        </p:spPr>
-        <p:txBody>
-          <a:bodyPr wrap="square" lIns="0" tIns="0" rIns="0" bIns="0" rtlCol="0" anchor="ctr"/>
-          <a:lstStyle/>
-          <a:p>
-            <a:pPr algn="ctr" indent="0" marL="0">
-              <a:lnSpc>
-                <a:spcPct val="100000"/>
-              </a:lnSpc>
-              <a:buNone/>
-            </a:pPr>
-            <a:r>
-              <a:rPr lang="en-US" sz="1600" b="1" dirty="0">
-                <a:solidFill>
-                  <a:srgbClr val="FFFFFF"/>
-                </a:solidFill>
-                <a:latin typeface="Calibri" pitchFamily="34" charset="0"/>
-                <a:ea typeface="Calibri" pitchFamily="34" charset="-122"/>
-                <a:cs typeface="Calibri" pitchFamily="34" charset="-120"/>
-              </a:rPr>
-              <a:t>c</a:t>
-            </a:r>
-            <a:endParaRPr lang="en-US" sz="1600" dirty="0"/>
-          </a:p>
-        </p:txBody>
-      </p:sp>
-      <p:sp>
-        <p:nvSpPr>
-          <p:cNvPr id="12" name="Text 10"/>
-          <p:cNvSpPr txBox="1"/>
-          <p:nvPr/>
-        </p:nvSpPr>
-        <p:spPr>
-          <a:xfrm>
-            <a:off x="1344168" y="2670048"/>
-            <a:ext cx="3044952" cy="676656"/>
-          </a:xfrm>
-          <a:prstGeom prst="rect">
-            <a:avLst/>
-          </a:prstGeom>
-          <a:noFill/>
-          <a:ln/>
-        </p:spPr>
-        <p:txBody>
-          <a:bodyPr wrap="square" lIns="25400" tIns="25400" rIns="25400" bIns="25400" rtlCol="0" anchor="ctr"/>
-          <a:lstStyle/>
-          <a:p>
-            <a:pPr algn="l" indent="0" marL="0">
-              <a:lnSpc>
-                <a:spcPct val="100000"/>
-              </a:lnSpc>
-              <a:buNone/>
-            </a:pPr>
-            <a:r>
-              <a:rPr lang="en-US" sz="1400" b="1" dirty="0">
-                <a:solidFill>
-                  <a:srgbClr val="1F2A37"/>
-                </a:solidFill>
-                <a:latin typeface="Calibri" pitchFamily="34" charset="0"/>
-                <a:ea typeface="Calibri" pitchFamily="34" charset="-122"/>
-                <a:cs typeface="Calibri" pitchFamily="34" charset="-120"/>
-              </a:rPr>
-              <a:t>Montesquieu</a:t>
-            </a:r>
-            <a:endParaRPr lang="en-US" sz="1400" dirty="0"/>
-          </a:p>
-        </p:txBody>
-      </p:sp>
-      <p:sp>
-        <p:nvSpPr>
-          <p:cNvPr id="13" name="Shape 11"/>
-          <p:cNvSpPr/>
-          <p:nvPr/>
-        </p:nvSpPr>
-        <p:spPr>
-          <a:xfrm>
-            <a:off x="4663440" y="2633472"/>
-            <a:ext cx="3794760" cy="749808"/>
-          </a:xfrm>
-          <a:prstGeom prst="roundRect">
-            <a:avLst>
-              <a:gd name="adj" fmla="val 9756"/>
-            </a:avLst>
-          </a:prstGeom>
-          <a:solidFill>
-            <a:srgbClr val="FFFFFF"/>
-          </a:solidFill>
-          <a:ln w="12700">
-            <a:solidFill>
-              <a:srgbClr val="DCD5C1"/>
-            </a:solidFill>
-            <a:prstDash val="solid"/>
-          </a:ln>
-        </p:spPr>
-      </p:sp>
-      <p:sp>
-        <p:nvSpPr>
-          <p:cNvPr id="14" name="Text 12"/>
-          <p:cNvSpPr txBox="1"/>
-          <p:nvPr/>
-        </p:nvSpPr>
-        <p:spPr>
-          <a:xfrm>
-            <a:off x="4791456" y="2798064"/>
-            <a:ext cx="420624" cy="420624"/>
-          </a:xfrm>
-          <a:prstGeom prst="roundRect">
-            <a:avLst>
-              <a:gd name="adj" fmla="val 50000"/>
-            </a:avLst>
-          </a:prstGeom>
-          <a:solidFill>
-            <a:srgbClr val="9AA3AB"/>
-          </a:solidFill>
-          <a:ln/>
-        </p:spPr>
-        <p:txBody>
-          <a:bodyPr wrap="square" lIns="0" tIns="0" rIns="0" bIns="0" rtlCol="0" anchor="ctr"/>
-          <a:lstStyle/>
-          <a:p>
-            <a:pPr algn="ctr" indent="0" marL="0">
-              <a:lnSpc>
-                <a:spcPct val="100000"/>
-              </a:lnSpc>
-              <a:buNone/>
-            </a:pPr>
-            <a:r>
-              <a:rPr lang="en-US" sz="1600" b="1" dirty="0">
-                <a:solidFill>
-                  <a:srgbClr val="FFFFFF"/>
-                </a:solidFill>
-                <a:latin typeface="Calibri" pitchFamily="34" charset="0"/>
-                <a:ea typeface="Calibri" pitchFamily="34" charset="-122"/>
-                <a:cs typeface="Calibri" pitchFamily="34" charset="-120"/>
-              </a:rPr>
-              <a:t>d</a:t>
-            </a:r>
-            <a:endParaRPr lang="en-US" sz="1600" dirty="0"/>
-          </a:p>
-        </p:txBody>
-      </p:sp>
-      <p:sp>
-        <p:nvSpPr>
-          <p:cNvPr id="15" name="Text 13"/>
-          <p:cNvSpPr txBox="1"/>
-          <p:nvPr/>
-        </p:nvSpPr>
-        <p:spPr>
-          <a:xfrm>
-            <a:off x="5321808" y="2670048"/>
-            <a:ext cx="3044952" cy="676656"/>
-          </a:xfrm>
-          <a:prstGeom prst="rect">
-            <a:avLst/>
-          </a:prstGeom>
-          <a:noFill/>
-          <a:ln/>
-        </p:spPr>
-        <p:txBody>
-          <a:bodyPr wrap="square" lIns="25400" tIns="25400" rIns="25400" bIns="25400" rtlCol="0" anchor="ctr"/>
-          <a:lstStyle/>
-          <a:p>
-            <a:pPr algn="l" indent="0" marL="0">
-              <a:lnSpc>
-                <a:spcPct val="100000"/>
-              </a:lnSpc>
-              <a:buNone/>
-            </a:pPr>
-            <a:r>
-              <a:rPr lang="en-US" sz="1400" dirty="0">
-                <a:solidFill>
-                  <a:srgbClr val="5B6770"/>
-                </a:solidFill>
-                <a:latin typeface="Calibri" pitchFamily="34" charset="0"/>
-                <a:ea typeface="Calibri" pitchFamily="34" charset="-122"/>
-                <a:cs typeface="Calibri" pitchFamily="34" charset="-120"/>
-              </a:rPr>
-              <a:t>Jean-Baptiste Say</a:t>
-            </a:r>
-            <a:endParaRPr lang="en-US" sz="1400" dirty="0"/>
-          </a:p>
-        </p:txBody>
-      </p:sp>
-      <p:sp>
-        <p:nvSpPr>
-          <p:cNvPr id="16" name="Text 14"/>
-          <p:cNvSpPr txBox="1"/>
-          <p:nvPr/>
-        </p:nvSpPr>
-        <p:spPr>
-          <a:xfrm>
-            <a:off x="685800" y="3566160"/>
-            <a:ext cx="7772400" cy="841248"/>
-          </a:xfrm>
-          <a:prstGeom prst="roundRect">
-            <a:avLst>
-              <a:gd name="adj" fmla="val 8696"/>
-            </a:avLst>
-          </a:prstGeom>
-          <a:solidFill>
-            <a:srgbClr val="E6F2F0"/>
-          </a:solidFill>
-          <a:ln/>
-        </p:spPr>
-        <p:txBody>
-          <a:bodyPr wrap="square" lIns="114300" tIns="114300" rIns="114300" bIns="114300" rtlCol="0" anchor="ctr"/>
-          <a:lstStyle/>
-          <a:p>
-            <a:pPr algn="l" indent="0" marL="0">
-              <a:lnSpc>
-                <a:spcPct val="100000"/>
-              </a:lnSpc>
-              <a:buNone/>
-            </a:pPr>
-            <a:r>
-              <a:rPr lang="en-US" sz="1350" b="1" dirty="0">
-                <a:solidFill>
-                  <a:srgbClr val="2E7D4F"/>
-                </a:solidFill>
-                <a:latin typeface="Calibri" pitchFamily="34" charset="0"/>
-                <a:ea typeface="Calibri" pitchFamily="34" charset="-122"/>
-                <a:cs typeface="Calibri" pitchFamily="34" charset="-120"/>
-              </a:rPr>
-              <a:t>Resposta: c) </a:t>
-            </a:r>
-            <a:pPr algn="l" indent="0" marL="0">
-              <a:lnSpc>
-                <a:spcPct val="100000"/>
-              </a:lnSpc>
-              <a:buNone/>
-            </a:pPr>
-            <a:r>
-              <a:rPr lang="en-US" sz="1350" dirty="0">
-                <a:solidFill>
-                  <a:srgbClr val="1F2A37"/>
-                </a:solidFill>
-                <a:latin typeface="Calibri" pitchFamily="34" charset="0"/>
-                <a:ea typeface="Calibri" pitchFamily="34" charset="-122"/>
-                <a:cs typeface="Calibri" pitchFamily="34" charset="-120"/>
-              </a:rPr>
-              <a:t>Montesquieu, em O Espírito das Leis (1748). A Constituição de 1988 adota a separação no art. 2º.</a:t>
-            </a:r>
-            <a:endParaRPr lang="en-US" sz="1350" dirty="0"/>
-          </a:p>
-        </p:txBody>
-      </p:sp>
-      <p:sp>
-        <p:nvSpPr>
-          <p:cNvPr id="17" name="Text 15"/>
-          <p:cNvSpPr txBox="1"/>
-          <p:nvPr/>
-        </p:nvSpPr>
-        <p:spPr>
-          <a:xfrm>
-            <a:off x="4206240" y="36576"/>
-            <a:ext cx="4800600" cy="219456"/>
-          </a:xfrm>
-          <a:prstGeom prst="rect">
-            <a:avLst/>
-          </a:prstGeom>
-          <a:noFill/>
-          <a:ln/>
-        </p:spPr>
-        <p:txBody>
-          <a:bodyPr wrap="square" lIns="0" tIns="0" rIns="0" bIns="0" rtlCol="0" anchor="ctr"/>
-          <a:lstStyle/>
-          <a:p>
-            <a:pPr algn="r" indent="0" marL="0">
-              <a:lnSpc>
-                <a:spcPct val="100000"/>
-              </a:lnSpc>
-              <a:buNone/>
-            </a:pPr>
-            <a:r>
-              <a:rPr lang="en-US" sz="950" dirty="0">
-                <a:solidFill>
-                  <a:srgbClr val="5B6770"/>
-                </a:solidFill>
-                <a:latin typeface="Calibri" pitchFamily="34" charset="0"/>
-                <a:ea typeface="Calibri" pitchFamily="34" charset="-122"/>
-                <a:cs typeface="Calibri" pitchFamily="34" charset="-120"/>
-              </a:rPr>
-              <a:t>Estado, Governo e Mercado · Unidade 2</a:t>
-            </a:r>
-            <a:endParaRPr lang="en-US" sz="950" dirty="0"/>
-          </a:p>
-        </p:txBody>
-      </p:sp>
-    </p:spTree>
-  </p:cSld>
-  <p:clrMapOvr>
-    <a:masterClrMapping/>
-  </p:clrMapOvr>
-</p:sld>
-</file>
-
-<file path=ppt/slides/slide27.xml><?xml version="1.0" encoding="utf-8"?>
-<p:sld xmlns:a="http://schemas.openxmlformats.org/drawingml/2006/main" xmlns:r="http://schemas.openxmlformats.org/officeDocument/2006/relationships" xmlns:p="http://schemas.openxmlformats.org/presentationml/2006/main">
-  <p:cSld name="Slide 27">
-    <p:bg>
-      <p:bgPr>
-        <a:blipFill dpi="0" rotWithShape="1">
-          <a:blip r:embed="rId1">
-            <a:lum/>
-          </a:blip>
-          <a:srcRect/>
-          <a:stretch>
-            <a:fillRect/>
-          </a:stretch>
-        </a:blipFill>
-        <a:effectLst/>
-      </p:bgPr>
-    </p:bg>
-    <p:spTree>
-      <p:nvGrpSpPr>
-        <p:cNvPr id="1" name=""/>
-        <p:cNvGrpSpPr/>
-        <p:nvPr/>
-      </p:nvGrpSpPr>
-      <p:grpSpPr>
-        <a:xfrm>
-          <a:off x="0" y="0"/>
-          <a:ext cx="0" cy="0"/>
-          <a:chOff x="0" y="0"/>
-          <a:chExt cx="0" cy="0"/>
-        </a:xfrm>
-      </p:grpSpPr>
-      <p:sp>
-        <p:nvSpPr>
-          <p:cNvPr id="2" name="Text 0"/>
-          <p:cNvSpPr txBox="1"/>
-          <p:nvPr/>
-        </p:nvSpPr>
-        <p:spPr>
-          <a:xfrm>
-            <a:off x="731520" y="274320"/>
-            <a:ext cx="7680960" cy="365760"/>
-          </a:xfrm>
-          <a:prstGeom prst="rect">
-            <a:avLst/>
-          </a:prstGeom>
-          <a:noFill/>
-          <a:ln/>
-        </p:spPr>
-        <p:txBody>
-          <a:bodyPr wrap="square" lIns="0" tIns="0" rIns="0" bIns="0" rtlCol="0" anchor="ctr"/>
-          <a:lstStyle/>
-          <a:p>
-            <a:pPr algn="ctr" indent="0" marL="0">
-              <a:lnSpc>
-                <a:spcPct val="100000"/>
-              </a:lnSpc>
-              <a:buNone/>
-            </a:pPr>
-            <a:r>
-              <a:rPr lang="en-US" sz="1250" b="1" dirty="0">
-                <a:solidFill>
-                  <a:srgbClr val="2A8C85"/>
-                </a:solidFill>
-                <a:latin typeface="Calibri" pitchFamily="34" charset="0"/>
-                <a:ea typeface="Calibri" pitchFamily="34" charset="-122"/>
-                <a:cs typeface="Calibri" pitchFamily="34" charset="-120"/>
-              </a:rPr>
-              <a:t>QUIZ DA UNIDADE 2 · PERGUNTA 4 DE 5</a:t>
-            </a:r>
-            <a:endParaRPr lang="en-US" sz="1250" dirty="0"/>
-          </a:p>
-        </p:txBody>
-      </p:sp>
-      <p:sp>
-        <p:nvSpPr>
-          <p:cNvPr id="3" name="Text 1"/>
-          <p:cNvSpPr txBox="1"/>
-          <p:nvPr/>
-        </p:nvSpPr>
-        <p:spPr>
-          <a:xfrm>
-            <a:off x="731520" y="658368"/>
-            <a:ext cx="7680960" cy="960120"/>
-          </a:xfrm>
-          <a:prstGeom prst="rect">
-            <a:avLst/>
-          </a:prstGeom>
-          <a:noFill/>
-          <a:ln/>
-        </p:spPr>
-        <p:txBody>
-          <a:bodyPr wrap="square" lIns="0" tIns="0" rIns="0" bIns="0" rtlCol="0" anchor="ctr"/>
-          <a:lstStyle/>
-          <a:p>
-            <a:pPr algn="ctr" indent="0" marL="0">
-              <a:lnSpc>
-                <a:spcPct val="100000"/>
-              </a:lnSpc>
-              <a:buNone/>
-            </a:pPr>
-            <a:r>
-              <a:rPr lang="en-US" sz="1900" b="1" dirty="0">
-                <a:solidFill>
-                  <a:srgbClr val="13294B"/>
-                </a:solidFill>
-                <a:latin typeface="Calibri" pitchFamily="34" charset="0"/>
-                <a:ea typeface="Calibri" pitchFamily="34" charset="-122"/>
-                <a:cs typeface="Calibri" pitchFamily="34" charset="-120"/>
-              </a:rPr>
-              <a:t>Pela teoria das vantagens comparativas de Ricardo, os países ganham ao:</a:t>
-            </a:r>
-            <a:endParaRPr lang="en-US" sz="1900" dirty="0"/>
-          </a:p>
-        </p:txBody>
-      </p:sp>
-      <p:sp>
-        <p:nvSpPr>
-          <p:cNvPr id="4" name="Shape 2"/>
-          <p:cNvSpPr/>
-          <p:nvPr/>
-        </p:nvSpPr>
-        <p:spPr>
-          <a:xfrm>
-            <a:off x="685800" y="1737360"/>
-            <a:ext cx="3794760" cy="914400"/>
-          </a:xfrm>
-          <a:prstGeom prst="roundRect">
-            <a:avLst>
-              <a:gd name="adj" fmla="val 8000"/>
-            </a:avLst>
-          </a:prstGeom>
-          <a:solidFill>
-            <a:srgbClr val="FFFFFF"/>
-          </a:solidFill>
-          <a:ln w="12700">
-            <a:solidFill>
-              <a:srgbClr val="DCD5C1"/>
-            </a:solidFill>
-            <a:prstDash val="solid"/>
-          </a:ln>
-        </p:spPr>
-      </p:sp>
-      <p:sp>
-        <p:nvSpPr>
-          <p:cNvPr id="5" name="Text 3"/>
-          <p:cNvSpPr txBox="1"/>
-          <p:nvPr/>
-        </p:nvSpPr>
-        <p:spPr>
-          <a:xfrm>
-            <a:off x="813816" y="1984248"/>
-            <a:ext cx="420624" cy="420624"/>
-          </a:xfrm>
-          <a:prstGeom prst="roundRect">
-            <a:avLst>
-              <a:gd name="adj" fmla="val 50000"/>
-            </a:avLst>
-          </a:prstGeom>
-          <a:solidFill>
-            <a:srgbClr val="13294B"/>
-          </a:solidFill>
-          <a:ln/>
-        </p:spPr>
-        <p:txBody>
-          <a:bodyPr wrap="square" lIns="0" tIns="0" rIns="0" bIns="0" rtlCol="0" anchor="ctr"/>
-          <a:lstStyle/>
-          <a:p>
-            <a:pPr algn="ctr" indent="0" marL="0">
-              <a:lnSpc>
-                <a:spcPct val="100000"/>
-              </a:lnSpc>
-              <a:buNone/>
-            </a:pPr>
-            <a:r>
-              <a:rPr lang="en-US" sz="1600" b="1" dirty="0">
-                <a:solidFill>
-                  <a:srgbClr val="FFFFFF"/>
-                </a:solidFill>
-                <a:latin typeface="Calibri" pitchFamily="34" charset="0"/>
-                <a:ea typeface="Calibri" pitchFamily="34" charset="-122"/>
-                <a:cs typeface="Calibri" pitchFamily="34" charset="-120"/>
-              </a:rPr>
-              <a:t>a</a:t>
-            </a:r>
-            <a:endParaRPr lang="en-US" sz="1600" dirty="0"/>
-          </a:p>
-        </p:txBody>
-      </p:sp>
-      <p:sp>
-        <p:nvSpPr>
-          <p:cNvPr id="6" name="Text 4"/>
-          <p:cNvSpPr txBox="1"/>
-          <p:nvPr/>
-        </p:nvSpPr>
-        <p:spPr>
-          <a:xfrm>
-            <a:off x="1344168" y="1773936"/>
-            <a:ext cx="3044952" cy="841248"/>
-          </a:xfrm>
-          <a:prstGeom prst="rect">
-            <a:avLst/>
-          </a:prstGeom>
-          <a:noFill/>
-          <a:ln/>
-        </p:spPr>
-        <p:txBody>
-          <a:bodyPr wrap="square" lIns="25400" tIns="25400" rIns="25400" bIns="25400" rtlCol="0" anchor="ctr"/>
-          <a:lstStyle/>
-          <a:p>
-            <a:pPr algn="l" indent="0" marL="0">
-              <a:lnSpc>
-                <a:spcPct val="100000"/>
-              </a:lnSpc>
-              <a:buNone/>
-            </a:pPr>
-            <a:r>
-              <a:rPr lang="en-US" sz="1400" dirty="0">
-                <a:solidFill>
-                  <a:srgbClr val="1F2A37"/>
-                </a:solidFill>
-                <a:latin typeface="Calibri" pitchFamily="34" charset="0"/>
-                <a:ea typeface="Calibri" pitchFamily="34" charset="-122"/>
-                <a:cs typeface="Calibri" pitchFamily="34" charset="-120"/>
-              </a:rPr>
-              <a:t>Produzir tudo internamente</a:t>
-            </a:r>
-            <a:endParaRPr lang="en-US" sz="1400" dirty="0"/>
-          </a:p>
-        </p:txBody>
-      </p:sp>
-      <p:sp>
-        <p:nvSpPr>
-          <p:cNvPr id="7" name="Shape 5"/>
-          <p:cNvSpPr/>
-          <p:nvPr/>
-        </p:nvSpPr>
-        <p:spPr>
-          <a:xfrm>
-            <a:off x="4663440" y="1737360"/>
-            <a:ext cx="3794760" cy="914400"/>
-          </a:xfrm>
-          <a:prstGeom prst="roundRect">
-            <a:avLst>
-              <a:gd name="adj" fmla="val 8000"/>
-            </a:avLst>
-          </a:prstGeom>
-          <a:solidFill>
-            <a:srgbClr val="FFFFFF"/>
-          </a:solidFill>
-          <a:ln w="12700">
-            <a:solidFill>
-              <a:srgbClr val="DCD5C1"/>
-            </a:solidFill>
-            <a:prstDash val="solid"/>
-          </a:ln>
-        </p:spPr>
-      </p:sp>
-      <p:sp>
-        <p:nvSpPr>
-          <p:cNvPr id="8" name="Text 6"/>
-          <p:cNvSpPr txBox="1"/>
-          <p:nvPr/>
-        </p:nvSpPr>
-        <p:spPr>
-          <a:xfrm>
-            <a:off x="4791456" y="1984248"/>
-            <a:ext cx="420624" cy="420624"/>
-          </a:xfrm>
-          <a:prstGeom prst="roundRect">
-            <a:avLst>
-              <a:gd name="adj" fmla="val 50000"/>
-            </a:avLst>
-          </a:prstGeom>
-          <a:solidFill>
-            <a:srgbClr val="13294B"/>
-          </a:solidFill>
-          <a:ln/>
-        </p:spPr>
-        <p:txBody>
-          <a:bodyPr wrap="square" lIns="0" tIns="0" rIns="0" bIns="0" rtlCol="0" anchor="ctr"/>
-          <a:lstStyle/>
-          <a:p>
-            <a:pPr algn="ctr" indent="0" marL="0">
-              <a:lnSpc>
-                <a:spcPct val="100000"/>
-              </a:lnSpc>
-              <a:buNone/>
-            </a:pPr>
-            <a:r>
-              <a:rPr lang="en-US" sz="1600" b="1" dirty="0">
-                <a:solidFill>
-                  <a:srgbClr val="FFFFFF"/>
-                </a:solidFill>
-                <a:latin typeface="Calibri" pitchFamily="34" charset="0"/>
-                <a:ea typeface="Calibri" pitchFamily="34" charset="-122"/>
-                <a:cs typeface="Calibri" pitchFamily="34" charset="-120"/>
-              </a:rPr>
-              <a:t>b</a:t>
-            </a:r>
-            <a:endParaRPr lang="en-US" sz="1600" dirty="0"/>
-          </a:p>
-        </p:txBody>
-      </p:sp>
-      <p:sp>
-        <p:nvSpPr>
-          <p:cNvPr id="9" name="Text 7"/>
-          <p:cNvSpPr txBox="1"/>
-          <p:nvPr/>
-        </p:nvSpPr>
-        <p:spPr>
-          <a:xfrm>
-            <a:off x="5321808" y="1773936"/>
-            <a:ext cx="3044952" cy="841248"/>
-          </a:xfrm>
-          <a:prstGeom prst="rect">
-            <a:avLst/>
-          </a:prstGeom>
-          <a:noFill/>
-          <a:ln/>
-        </p:spPr>
-        <p:txBody>
-          <a:bodyPr wrap="square" lIns="25400" tIns="25400" rIns="25400" bIns="25400" rtlCol="0" anchor="ctr"/>
-          <a:lstStyle/>
-          <a:p>
-            <a:pPr algn="l" indent="0" marL="0">
-              <a:lnSpc>
-                <a:spcPct val="100000"/>
-              </a:lnSpc>
-              <a:buNone/>
-            </a:pPr>
-            <a:r>
-              <a:rPr lang="en-US" sz="1400" dirty="0">
-                <a:solidFill>
-                  <a:srgbClr val="1F2A37"/>
-                </a:solidFill>
-                <a:latin typeface="Calibri" pitchFamily="34" charset="0"/>
-                <a:ea typeface="Calibri" pitchFamily="34" charset="-122"/>
-                <a:cs typeface="Calibri" pitchFamily="34" charset="-120"/>
-              </a:rPr>
-              <a:t>Especializar-se no que produzem com menor custo relativo e trocar</a:t>
-            </a:r>
-            <a:endParaRPr lang="en-US" sz="1400" dirty="0"/>
-          </a:p>
-        </p:txBody>
-      </p:sp>
-      <p:sp>
-        <p:nvSpPr>
-          <p:cNvPr id="10" name="Shape 8"/>
-          <p:cNvSpPr/>
-          <p:nvPr/>
-        </p:nvSpPr>
-        <p:spPr>
-          <a:xfrm>
-            <a:off x="685800" y="2798064"/>
-            <a:ext cx="3794760" cy="914400"/>
-          </a:xfrm>
-          <a:prstGeom prst="roundRect">
-            <a:avLst>
-              <a:gd name="adj" fmla="val 8000"/>
-            </a:avLst>
-          </a:prstGeom>
-          <a:solidFill>
-            <a:srgbClr val="FFFFFF"/>
-          </a:solidFill>
-          <a:ln w="12700">
-            <a:solidFill>
-              <a:srgbClr val="DCD5C1"/>
-            </a:solidFill>
-            <a:prstDash val="solid"/>
-          </a:ln>
-        </p:spPr>
-      </p:sp>
-      <p:sp>
-        <p:nvSpPr>
-          <p:cNvPr id="11" name="Text 9"/>
-          <p:cNvSpPr txBox="1"/>
-          <p:nvPr/>
-        </p:nvSpPr>
-        <p:spPr>
-          <a:xfrm>
-            <a:off x="813816" y="3044952"/>
-            <a:ext cx="420624" cy="420624"/>
-          </a:xfrm>
-          <a:prstGeom prst="roundRect">
-            <a:avLst>
-              <a:gd name="adj" fmla="val 50000"/>
-            </a:avLst>
-          </a:prstGeom>
-          <a:solidFill>
-            <a:srgbClr val="13294B"/>
-          </a:solidFill>
-          <a:ln/>
-        </p:spPr>
-        <p:txBody>
-          <a:bodyPr wrap="square" lIns="0" tIns="0" rIns="0" bIns="0" rtlCol="0" anchor="ctr"/>
-          <a:lstStyle/>
-          <a:p>
-            <a:pPr algn="ctr" indent="0" marL="0">
-              <a:lnSpc>
-                <a:spcPct val="100000"/>
-              </a:lnSpc>
-              <a:buNone/>
-            </a:pPr>
-            <a:r>
-              <a:rPr lang="en-US" sz="1600" b="1" dirty="0">
-                <a:solidFill>
-                  <a:srgbClr val="FFFFFF"/>
-                </a:solidFill>
-                <a:latin typeface="Calibri" pitchFamily="34" charset="0"/>
-                <a:ea typeface="Calibri" pitchFamily="34" charset="-122"/>
-                <a:cs typeface="Calibri" pitchFamily="34" charset="-120"/>
-              </a:rPr>
-              <a:t>c</a:t>
-            </a:r>
-            <a:endParaRPr lang="en-US" sz="1600" dirty="0"/>
-          </a:p>
-        </p:txBody>
-      </p:sp>
-      <p:sp>
-        <p:nvSpPr>
-          <p:cNvPr id="12" name="Text 10"/>
-          <p:cNvSpPr txBox="1"/>
-          <p:nvPr/>
-        </p:nvSpPr>
-        <p:spPr>
-          <a:xfrm>
-            <a:off x="1344168" y="2834640"/>
-            <a:ext cx="3044952" cy="841248"/>
-          </a:xfrm>
-          <a:prstGeom prst="rect">
-            <a:avLst/>
-          </a:prstGeom>
-          <a:noFill/>
-          <a:ln/>
-        </p:spPr>
-        <p:txBody>
-          <a:bodyPr wrap="square" lIns="25400" tIns="25400" rIns="25400" bIns="25400" rtlCol="0" anchor="ctr"/>
-          <a:lstStyle/>
-          <a:p>
-            <a:pPr algn="l" indent="0" marL="0">
-              <a:lnSpc>
-                <a:spcPct val="100000"/>
-              </a:lnSpc>
-              <a:buNone/>
-            </a:pPr>
-            <a:r>
-              <a:rPr lang="en-US" sz="1400" dirty="0">
-                <a:solidFill>
-                  <a:srgbClr val="1F2A37"/>
-                </a:solidFill>
-                <a:latin typeface="Calibri" pitchFamily="34" charset="0"/>
-                <a:ea typeface="Calibri" pitchFamily="34" charset="-122"/>
-                <a:cs typeface="Calibri" pitchFamily="34" charset="-120"/>
-              </a:rPr>
-              <a:t>Proibir importações</a:t>
-            </a:r>
-            <a:endParaRPr lang="en-US" sz="1400" dirty="0"/>
-          </a:p>
-        </p:txBody>
-      </p:sp>
-      <p:sp>
-        <p:nvSpPr>
-          <p:cNvPr id="13" name="Shape 11"/>
-          <p:cNvSpPr/>
-          <p:nvPr/>
-        </p:nvSpPr>
-        <p:spPr>
-          <a:xfrm>
-            <a:off x="4663440" y="2798064"/>
-            <a:ext cx="3794760" cy="914400"/>
-          </a:xfrm>
-          <a:prstGeom prst="roundRect">
-            <a:avLst>
-              <a:gd name="adj" fmla="val 8000"/>
-            </a:avLst>
-          </a:prstGeom>
-          <a:solidFill>
-            <a:srgbClr val="FFFFFF"/>
-          </a:solidFill>
-          <a:ln w="12700">
-            <a:solidFill>
-              <a:srgbClr val="DCD5C1"/>
-            </a:solidFill>
-            <a:prstDash val="solid"/>
-          </a:ln>
-        </p:spPr>
-      </p:sp>
-      <p:sp>
-        <p:nvSpPr>
-          <p:cNvPr id="14" name="Text 12"/>
-          <p:cNvSpPr txBox="1"/>
-          <p:nvPr/>
-        </p:nvSpPr>
-        <p:spPr>
-          <a:xfrm>
-            <a:off x="4791456" y="3044952"/>
-            <a:ext cx="420624" cy="420624"/>
-          </a:xfrm>
-          <a:prstGeom prst="roundRect">
-            <a:avLst>
-              <a:gd name="adj" fmla="val 50000"/>
-            </a:avLst>
-          </a:prstGeom>
-          <a:solidFill>
-            <a:srgbClr val="13294B"/>
-          </a:solidFill>
-          <a:ln/>
-        </p:spPr>
-        <p:txBody>
-          <a:bodyPr wrap="square" lIns="0" tIns="0" rIns="0" bIns="0" rtlCol="0" anchor="ctr"/>
-          <a:lstStyle/>
-          <a:p>
-            <a:pPr algn="ctr" indent="0" marL="0">
-              <a:lnSpc>
-                <a:spcPct val="100000"/>
-              </a:lnSpc>
-              <a:buNone/>
-            </a:pPr>
-            <a:r>
-              <a:rPr lang="en-US" sz="1600" b="1" dirty="0">
-                <a:solidFill>
-                  <a:srgbClr val="FFFFFF"/>
-                </a:solidFill>
-                <a:latin typeface="Calibri" pitchFamily="34" charset="0"/>
-                <a:ea typeface="Calibri" pitchFamily="34" charset="-122"/>
-                <a:cs typeface="Calibri" pitchFamily="34" charset="-120"/>
-              </a:rPr>
-              <a:t>d</a:t>
-            </a:r>
-            <a:endParaRPr lang="en-US" sz="1600" dirty="0"/>
-          </a:p>
-        </p:txBody>
-      </p:sp>
-      <p:sp>
-        <p:nvSpPr>
-          <p:cNvPr id="15" name="Text 13"/>
-          <p:cNvSpPr txBox="1"/>
-          <p:nvPr/>
-        </p:nvSpPr>
-        <p:spPr>
-          <a:xfrm>
-            <a:off x="5321808" y="2834640"/>
-            <a:ext cx="3044952" cy="841248"/>
-          </a:xfrm>
-          <a:prstGeom prst="rect">
-            <a:avLst/>
-          </a:prstGeom>
-          <a:noFill/>
-          <a:ln/>
-        </p:spPr>
-        <p:txBody>
-          <a:bodyPr wrap="square" lIns="25400" tIns="25400" rIns="25400" bIns="25400" rtlCol="0" anchor="ctr"/>
-          <a:lstStyle/>
-          <a:p>
-            <a:pPr algn="l" indent="0" marL="0">
-              <a:lnSpc>
-                <a:spcPct val="100000"/>
-              </a:lnSpc>
-              <a:buNone/>
-            </a:pPr>
-            <a:r>
-              <a:rPr lang="en-US" sz="1400" dirty="0">
-                <a:solidFill>
-                  <a:srgbClr val="1F2A37"/>
-                </a:solidFill>
-                <a:latin typeface="Calibri" pitchFamily="34" charset="0"/>
-                <a:ea typeface="Calibri" pitchFamily="34" charset="-122"/>
-                <a:cs typeface="Calibri" pitchFamily="34" charset="-120"/>
-              </a:rPr>
-              <a:t>Acumular ouro e prata</a:t>
-            </a:r>
-            <a:endParaRPr lang="en-US" sz="1400" dirty="0"/>
-          </a:p>
-        </p:txBody>
-      </p:sp>
-      <p:sp>
-        <p:nvSpPr>
-          <p:cNvPr id="16" name="Text 14"/>
-          <p:cNvSpPr txBox="1"/>
-          <p:nvPr/>
-        </p:nvSpPr>
-        <p:spPr>
-          <a:xfrm>
-            <a:off x="4206240" y="36576"/>
-            <a:ext cx="4800600" cy="219456"/>
-          </a:xfrm>
-          <a:prstGeom prst="rect">
-            <a:avLst/>
-          </a:prstGeom>
-          <a:noFill/>
-          <a:ln/>
-        </p:spPr>
-        <p:txBody>
-          <a:bodyPr wrap="square" lIns="0" tIns="0" rIns="0" bIns="0" rtlCol="0" anchor="ctr"/>
-          <a:lstStyle/>
-          <a:p>
-            <a:pPr algn="r" indent="0" marL="0">
-              <a:lnSpc>
-                <a:spcPct val="100000"/>
-              </a:lnSpc>
-              <a:buNone/>
-            </a:pPr>
-            <a:r>
-              <a:rPr lang="en-US" sz="950" dirty="0">
-                <a:solidFill>
-                  <a:srgbClr val="5B6770"/>
-                </a:solidFill>
-                <a:latin typeface="Calibri" pitchFamily="34" charset="0"/>
-                <a:ea typeface="Calibri" pitchFamily="34" charset="-122"/>
-                <a:cs typeface="Calibri" pitchFamily="34" charset="-120"/>
-              </a:rPr>
-              <a:t>Estado, Governo e Mercado · Unidade 2</a:t>
-            </a:r>
-            <a:endParaRPr lang="en-US" sz="950" dirty="0"/>
-          </a:p>
-        </p:txBody>
-      </p:sp>
-    </p:spTree>
-  </p:cSld>
-  <p:clrMapOvr>
-    <a:masterClrMapping/>
-  </p:clrMapOvr>
-</p:sld>
-</file>
-
-<file path=ppt/slides/slide28.xml><?xml version="1.0" encoding="utf-8"?>
-<p:sld xmlns:a="http://schemas.openxmlformats.org/drawingml/2006/main" xmlns:r="http://schemas.openxmlformats.org/officeDocument/2006/relationships" xmlns:p="http://schemas.openxmlformats.org/presentationml/2006/main">
-  <p:cSld name="Slide 28">
-    <p:bg>
-      <p:bgPr>
-        <a:blipFill dpi="0" rotWithShape="1">
-          <a:blip r:embed="rId1">
-            <a:lum/>
-          </a:blip>
-          <a:srcRect/>
-          <a:stretch>
-            <a:fillRect/>
-          </a:stretch>
-        </a:blipFill>
-        <a:effectLst/>
-      </p:bgPr>
-    </p:bg>
-    <p:spTree>
-      <p:nvGrpSpPr>
-        <p:cNvPr id="1" name=""/>
-        <p:cNvGrpSpPr/>
-        <p:nvPr/>
-      </p:nvGrpSpPr>
-      <p:grpSpPr>
-        <a:xfrm>
-          <a:off x="0" y="0"/>
-          <a:ext cx="0" cy="0"/>
-          <a:chOff x="0" y="0"/>
-          <a:chExt cx="0" cy="0"/>
-        </a:xfrm>
-      </p:grpSpPr>
-      <p:sp>
-        <p:nvSpPr>
-          <p:cNvPr id="2" name="Text 0"/>
-          <p:cNvSpPr txBox="1"/>
-          <p:nvPr/>
-        </p:nvSpPr>
-        <p:spPr>
-          <a:xfrm>
-            <a:off x="731520" y="274320"/>
-            <a:ext cx="7680960" cy="365760"/>
-          </a:xfrm>
-          <a:prstGeom prst="rect">
-            <a:avLst/>
-          </a:prstGeom>
-          <a:noFill/>
-          <a:ln/>
-        </p:spPr>
-        <p:txBody>
-          <a:bodyPr wrap="square" lIns="0" tIns="0" rIns="0" bIns="0" rtlCol="0" anchor="ctr"/>
-          <a:lstStyle/>
-          <a:p>
-            <a:pPr algn="ctr" indent="0" marL="0">
-              <a:lnSpc>
-                <a:spcPct val="100000"/>
-              </a:lnSpc>
-              <a:buNone/>
-            </a:pPr>
-            <a:r>
-              <a:rPr lang="en-US" sz="1250" b="1" dirty="0">
-                <a:solidFill>
-                  <a:srgbClr val="2A8C85"/>
-                </a:solidFill>
-                <a:latin typeface="Calibri" pitchFamily="34" charset="0"/>
-                <a:ea typeface="Calibri" pitchFamily="34" charset="-122"/>
-                <a:cs typeface="Calibri" pitchFamily="34" charset="-120"/>
-              </a:rPr>
-              <a:t>QUIZ DA UNIDADE 2 · PERGUNTA 4 DE 5 · RESPOSTA</a:t>
-            </a:r>
-            <a:endParaRPr lang="en-US" sz="1250" dirty="0"/>
-          </a:p>
-        </p:txBody>
-      </p:sp>
-      <p:sp>
-        <p:nvSpPr>
-          <p:cNvPr id="3" name="Text 1"/>
-          <p:cNvSpPr txBox="1"/>
-          <p:nvPr/>
-        </p:nvSpPr>
-        <p:spPr>
-          <a:xfrm>
-            <a:off x="731520" y="658368"/>
-            <a:ext cx="7680960" cy="960120"/>
-          </a:xfrm>
-          <a:prstGeom prst="rect">
-            <a:avLst/>
-          </a:prstGeom>
-          <a:noFill/>
-          <a:ln/>
-        </p:spPr>
-        <p:txBody>
-          <a:bodyPr wrap="square" lIns="0" tIns="0" rIns="0" bIns="0" rtlCol="0" anchor="ctr"/>
-          <a:lstStyle/>
-          <a:p>
-            <a:pPr algn="ctr" indent="0" marL="0">
-              <a:lnSpc>
-                <a:spcPct val="100000"/>
-              </a:lnSpc>
-              <a:buNone/>
-            </a:pPr>
-            <a:r>
-              <a:rPr lang="en-US" sz="1900" b="1" dirty="0">
-                <a:solidFill>
-                  <a:srgbClr val="13294B"/>
-                </a:solidFill>
-                <a:latin typeface="Calibri" pitchFamily="34" charset="0"/>
-                <a:ea typeface="Calibri" pitchFamily="34" charset="-122"/>
-                <a:cs typeface="Calibri" pitchFamily="34" charset="-120"/>
-              </a:rPr>
-              <a:t>Pela teoria das vantagens comparativas de Ricardo, os países ganham ao:</a:t>
-            </a:r>
-            <a:endParaRPr lang="en-US" sz="1900" dirty="0"/>
-          </a:p>
-        </p:txBody>
-      </p:sp>
-      <p:sp>
-        <p:nvSpPr>
-          <p:cNvPr id="4" name="Shape 2"/>
-          <p:cNvSpPr/>
-          <p:nvPr/>
-        </p:nvSpPr>
-        <p:spPr>
-          <a:xfrm>
-            <a:off x="685800" y="1737360"/>
-            <a:ext cx="3794760" cy="749808"/>
-          </a:xfrm>
-          <a:prstGeom prst="roundRect">
-            <a:avLst>
-              <a:gd name="adj" fmla="val 9756"/>
-            </a:avLst>
-          </a:prstGeom>
-          <a:solidFill>
-            <a:srgbClr val="FFFFFF"/>
-          </a:solidFill>
-          <a:ln w="12700">
-            <a:solidFill>
-              <a:srgbClr val="DCD5C1"/>
-            </a:solidFill>
-            <a:prstDash val="solid"/>
-          </a:ln>
-        </p:spPr>
-      </p:sp>
-      <p:sp>
-        <p:nvSpPr>
-          <p:cNvPr id="5" name="Text 3"/>
-          <p:cNvSpPr txBox="1"/>
-          <p:nvPr/>
-        </p:nvSpPr>
-        <p:spPr>
-          <a:xfrm>
-            <a:off x="813816" y="1901952"/>
-            <a:ext cx="420624" cy="420624"/>
-          </a:xfrm>
-          <a:prstGeom prst="roundRect">
-            <a:avLst>
-              <a:gd name="adj" fmla="val 50000"/>
-            </a:avLst>
-          </a:prstGeom>
-          <a:solidFill>
-            <a:srgbClr val="9AA3AB"/>
-          </a:solidFill>
-          <a:ln/>
-        </p:spPr>
-        <p:txBody>
-          <a:bodyPr wrap="square" lIns="0" tIns="0" rIns="0" bIns="0" rtlCol="0" anchor="ctr"/>
-          <a:lstStyle/>
-          <a:p>
-            <a:pPr algn="ctr" indent="0" marL="0">
-              <a:lnSpc>
-                <a:spcPct val="100000"/>
-              </a:lnSpc>
-              <a:buNone/>
-            </a:pPr>
-            <a:r>
-              <a:rPr lang="en-US" sz="1600" b="1" dirty="0">
-                <a:solidFill>
-                  <a:srgbClr val="FFFFFF"/>
-                </a:solidFill>
-                <a:latin typeface="Calibri" pitchFamily="34" charset="0"/>
-                <a:ea typeface="Calibri" pitchFamily="34" charset="-122"/>
-                <a:cs typeface="Calibri" pitchFamily="34" charset="-120"/>
-              </a:rPr>
-              <a:t>a</a:t>
-            </a:r>
-            <a:endParaRPr lang="en-US" sz="1600" dirty="0"/>
-          </a:p>
-        </p:txBody>
-      </p:sp>
-      <p:sp>
-        <p:nvSpPr>
-          <p:cNvPr id="6" name="Text 4"/>
-          <p:cNvSpPr txBox="1"/>
-          <p:nvPr/>
-        </p:nvSpPr>
-        <p:spPr>
-          <a:xfrm>
-            <a:off x="1344168" y="1773936"/>
-            <a:ext cx="3044952" cy="676656"/>
-          </a:xfrm>
-          <a:prstGeom prst="rect">
-            <a:avLst/>
-          </a:prstGeom>
-          <a:noFill/>
-          <a:ln/>
-        </p:spPr>
-        <p:txBody>
-          <a:bodyPr wrap="square" lIns="25400" tIns="25400" rIns="25400" bIns="25400" rtlCol="0" anchor="ctr"/>
-          <a:lstStyle/>
-          <a:p>
-            <a:pPr algn="l" indent="0" marL="0">
-              <a:lnSpc>
-                <a:spcPct val="100000"/>
-              </a:lnSpc>
-              <a:buNone/>
-            </a:pPr>
-            <a:r>
-              <a:rPr lang="en-US" sz="1400" dirty="0">
-                <a:solidFill>
-                  <a:srgbClr val="5B6770"/>
-                </a:solidFill>
-                <a:latin typeface="Calibri" pitchFamily="34" charset="0"/>
-                <a:ea typeface="Calibri" pitchFamily="34" charset="-122"/>
-                <a:cs typeface="Calibri" pitchFamily="34" charset="-120"/>
-              </a:rPr>
-              <a:t>Produzir tudo internamente</a:t>
-            </a:r>
-            <a:endParaRPr lang="en-US" sz="1400" dirty="0"/>
-          </a:p>
-        </p:txBody>
-      </p:sp>
-      <p:sp>
-        <p:nvSpPr>
-          <p:cNvPr id="7" name="Shape 5"/>
-          <p:cNvSpPr/>
-          <p:nvPr/>
-        </p:nvSpPr>
-        <p:spPr>
-          <a:xfrm>
-            <a:off x="4663440" y="1737360"/>
-            <a:ext cx="3794760" cy="749808"/>
-          </a:xfrm>
-          <a:prstGeom prst="roundRect">
-            <a:avLst>
-              <a:gd name="adj" fmla="val 9756"/>
-            </a:avLst>
-          </a:prstGeom>
-          <a:solidFill>
-            <a:srgbClr val="E3F2E8"/>
-          </a:solidFill>
-          <a:ln w="25400">
-            <a:solidFill>
-              <a:srgbClr val="2E7D4F"/>
-            </a:solidFill>
-            <a:prstDash val="solid"/>
-          </a:ln>
-        </p:spPr>
-      </p:sp>
-      <p:sp>
-        <p:nvSpPr>
-          <p:cNvPr id="8" name="Text 6"/>
-          <p:cNvSpPr txBox="1"/>
-          <p:nvPr/>
-        </p:nvSpPr>
-        <p:spPr>
-          <a:xfrm>
-            <a:off x="4791456" y="1901952"/>
-            <a:ext cx="420624" cy="420624"/>
-          </a:xfrm>
-          <a:prstGeom prst="roundRect">
-            <a:avLst>
-              <a:gd name="adj" fmla="val 50000"/>
-            </a:avLst>
-          </a:prstGeom>
-          <a:solidFill>
-            <a:srgbClr val="2E7D4F"/>
-          </a:solidFill>
-          <a:ln/>
-        </p:spPr>
-        <p:txBody>
-          <a:bodyPr wrap="square" lIns="0" tIns="0" rIns="0" bIns="0" rtlCol="0" anchor="ctr"/>
-          <a:lstStyle/>
-          <a:p>
-            <a:pPr algn="ctr" indent="0" marL="0">
-              <a:lnSpc>
-                <a:spcPct val="100000"/>
-              </a:lnSpc>
-              <a:buNone/>
-            </a:pPr>
-            <a:r>
-              <a:rPr lang="en-US" sz="1600" b="1" dirty="0">
-                <a:solidFill>
-                  <a:srgbClr val="FFFFFF"/>
-                </a:solidFill>
-                <a:latin typeface="Calibri" pitchFamily="34" charset="0"/>
-                <a:ea typeface="Calibri" pitchFamily="34" charset="-122"/>
-                <a:cs typeface="Calibri" pitchFamily="34" charset="-120"/>
-              </a:rPr>
-              <a:t>b</a:t>
-            </a:r>
-            <a:endParaRPr lang="en-US" sz="1600" dirty="0"/>
-          </a:p>
-        </p:txBody>
-      </p:sp>
-      <p:sp>
-        <p:nvSpPr>
-          <p:cNvPr id="9" name="Text 7"/>
-          <p:cNvSpPr txBox="1"/>
-          <p:nvPr/>
-        </p:nvSpPr>
-        <p:spPr>
-          <a:xfrm>
-            <a:off x="5321808" y="1773936"/>
-            <a:ext cx="3044952" cy="676656"/>
-          </a:xfrm>
-          <a:prstGeom prst="rect">
-            <a:avLst/>
-          </a:prstGeom>
-          <a:noFill/>
-          <a:ln/>
-        </p:spPr>
-        <p:txBody>
-          <a:bodyPr wrap="square" lIns="25400" tIns="25400" rIns="25400" bIns="25400" rtlCol="0" anchor="ctr"/>
-          <a:lstStyle/>
-          <a:p>
-            <a:pPr algn="l" indent="0" marL="0">
-              <a:lnSpc>
-                <a:spcPct val="100000"/>
-              </a:lnSpc>
-              <a:buNone/>
-            </a:pPr>
-            <a:r>
-              <a:rPr lang="en-US" sz="1400" b="1" dirty="0">
-                <a:solidFill>
-                  <a:srgbClr val="1F2A37"/>
-                </a:solidFill>
-                <a:latin typeface="Calibri" pitchFamily="34" charset="0"/>
-                <a:ea typeface="Calibri" pitchFamily="34" charset="-122"/>
-                <a:cs typeface="Calibri" pitchFamily="34" charset="-120"/>
-              </a:rPr>
-              <a:t>Especializar-se no que produzem com menor custo relativo e trocar</a:t>
-            </a:r>
-            <a:endParaRPr lang="en-US" sz="1400" dirty="0"/>
-          </a:p>
-        </p:txBody>
-      </p:sp>
-      <p:sp>
-        <p:nvSpPr>
-          <p:cNvPr id="10" name="Shape 8"/>
-          <p:cNvSpPr/>
-          <p:nvPr/>
-        </p:nvSpPr>
-        <p:spPr>
-          <a:xfrm>
-            <a:off x="685800" y="2633472"/>
-            <a:ext cx="3794760" cy="749808"/>
-          </a:xfrm>
-          <a:prstGeom prst="roundRect">
-            <a:avLst>
-              <a:gd name="adj" fmla="val 9756"/>
-            </a:avLst>
-          </a:prstGeom>
-          <a:solidFill>
-            <a:srgbClr val="FFFFFF"/>
-          </a:solidFill>
-          <a:ln w="12700">
-            <a:solidFill>
-              <a:srgbClr val="DCD5C1"/>
-            </a:solidFill>
-            <a:prstDash val="solid"/>
-          </a:ln>
-        </p:spPr>
-      </p:sp>
-      <p:sp>
-        <p:nvSpPr>
-          <p:cNvPr id="11" name="Text 9"/>
-          <p:cNvSpPr txBox="1"/>
-          <p:nvPr/>
-        </p:nvSpPr>
-        <p:spPr>
-          <a:xfrm>
-            <a:off x="813816" y="2798064"/>
-            <a:ext cx="420624" cy="420624"/>
-          </a:xfrm>
-          <a:prstGeom prst="roundRect">
-            <a:avLst>
-              <a:gd name="adj" fmla="val 50000"/>
-            </a:avLst>
-          </a:prstGeom>
-          <a:solidFill>
-            <a:srgbClr val="9AA3AB"/>
-          </a:solidFill>
-          <a:ln/>
-        </p:spPr>
-        <p:txBody>
-          <a:bodyPr wrap="square" lIns="0" tIns="0" rIns="0" bIns="0" rtlCol="0" anchor="ctr"/>
-          <a:lstStyle/>
-          <a:p>
-            <a:pPr algn="ctr" indent="0" marL="0">
-              <a:lnSpc>
-                <a:spcPct val="100000"/>
-              </a:lnSpc>
-              <a:buNone/>
-            </a:pPr>
-            <a:r>
-              <a:rPr lang="en-US" sz="1600" b="1" dirty="0">
-                <a:solidFill>
-                  <a:srgbClr val="FFFFFF"/>
-                </a:solidFill>
-                <a:latin typeface="Calibri" pitchFamily="34" charset="0"/>
-                <a:ea typeface="Calibri" pitchFamily="34" charset="-122"/>
-                <a:cs typeface="Calibri" pitchFamily="34" charset="-120"/>
-              </a:rPr>
-              <a:t>c</a:t>
-            </a:r>
-            <a:endParaRPr lang="en-US" sz="1600" dirty="0"/>
-          </a:p>
-        </p:txBody>
-      </p:sp>
-      <p:sp>
-        <p:nvSpPr>
-          <p:cNvPr id="12" name="Text 10"/>
-          <p:cNvSpPr txBox="1"/>
-          <p:nvPr/>
-        </p:nvSpPr>
-        <p:spPr>
-          <a:xfrm>
-            <a:off x="1344168" y="2670048"/>
-            <a:ext cx="3044952" cy="676656"/>
-          </a:xfrm>
-          <a:prstGeom prst="rect">
-            <a:avLst/>
-          </a:prstGeom>
-          <a:noFill/>
-          <a:ln/>
-        </p:spPr>
-        <p:txBody>
-          <a:bodyPr wrap="square" lIns="25400" tIns="25400" rIns="25400" bIns="25400" rtlCol="0" anchor="ctr"/>
-          <a:lstStyle/>
-          <a:p>
-            <a:pPr algn="l" indent="0" marL="0">
-              <a:lnSpc>
-                <a:spcPct val="100000"/>
-              </a:lnSpc>
-              <a:buNone/>
-            </a:pPr>
-            <a:r>
-              <a:rPr lang="en-US" sz="1400" dirty="0">
-                <a:solidFill>
-                  <a:srgbClr val="5B6770"/>
-                </a:solidFill>
-                <a:latin typeface="Calibri" pitchFamily="34" charset="0"/>
-                <a:ea typeface="Calibri" pitchFamily="34" charset="-122"/>
-                <a:cs typeface="Calibri" pitchFamily="34" charset="-120"/>
-              </a:rPr>
-              <a:t>Proibir importações</a:t>
-            </a:r>
-            <a:endParaRPr lang="en-US" sz="1400" dirty="0"/>
-          </a:p>
-        </p:txBody>
-      </p:sp>
-      <p:sp>
-        <p:nvSpPr>
-          <p:cNvPr id="13" name="Shape 11"/>
-          <p:cNvSpPr/>
-          <p:nvPr/>
-        </p:nvSpPr>
-        <p:spPr>
-          <a:xfrm>
-            <a:off x="4663440" y="2633472"/>
-            <a:ext cx="3794760" cy="749808"/>
-          </a:xfrm>
-          <a:prstGeom prst="roundRect">
-            <a:avLst>
-              <a:gd name="adj" fmla="val 9756"/>
-            </a:avLst>
-          </a:prstGeom>
-          <a:solidFill>
-            <a:srgbClr val="FFFFFF"/>
-          </a:solidFill>
-          <a:ln w="12700">
-            <a:solidFill>
-              <a:srgbClr val="DCD5C1"/>
-            </a:solidFill>
-            <a:prstDash val="solid"/>
-          </a:ln>
-        </p:spPr>
-      </p:sp>
-      <p:sp>
-        <p:nvSpPr>
-          <p:cNvPr id="14" name="Text 12"/>
-          <p:cNvSpPr txBox="1"/>
-          <p:nvPr/>
-        </p:nvSpPr>
-        <p:spPr>
-          <a:xfrm>
-            <a:off x="4791456" y="2798064"/>
-            <a:ext cx="420624" cy="420624"/>
-          </a:xfrm>
-          <a:prstGeom prst="roundRect">
-            <a:avLst>
-              <a:gd name="adj" fmla="val 50000"/>
-            </a:avLst>
-          </a:prstGeom>
-          <a:solidFill>
-            <a:srgbClr val="9AA3AB"/>
-          </a:solidFill>
-          <a:ln/>
-        </p:spPr>
-        <p:txBody>
-          <a:bodyPr wrap="square" lIns="0" tIns="0" rIns="0" bIns="0" rtlCol="0" anchor="ctr"/>
-          <a:lstStyle/>
-          <a:p>
-            <a:pPr algn="ctr" indent="0" marL="0">
-              <a:lnSpc>
-                <a:spcPct val="100000"/>
-              </a:lnSpc>
-              <a:buNone/>
-            </a:pPr>
-            <a:r>
-              <a:rPr lang="en-US" sz="1600" b="1" dirty="0">
-                <a:solidFill>
-                  <a:srgbClr val="FFFFFF"/>
-                </a:solidFill>
-                <a:latin typeface="Calibri" pitchFamily="34" charset="0"/>
-                <a:ea typeface="Calibri" pitchFamily="34" charset="-122"/>
-                <a:cs typeface="Calibri" pitchFamily="34" charset="-120"/>
-              </a:rPr>
-              <a:t>d</a:t>
-            </a:r>
-            <a:endParaRPr lang="en-US" sz="1600" dirty="0"/>
-          </a:p>
-        </p:txBody>
-      </p:sp>
-      <p:sp>
-        <p:nvSpPr>
-          <p:cNvPr id="15" name="Text 13"/>
-          <p:cNvSpPr txBox="1"/>
-          <p:nvPr/>
-        </p:nvSpPr>
-        <p:spPr>
-          <a:xfrm>
-            <a:off x="5321808" y="2670048"/>
-            <a:ext cx="3044952" cy="676656"/>
-          </a:xfrm>
-          <a:prstGeom prst="rect">
-            <a:avLst/>
-          </a:prstGeom>
-          <a:noFill/>
-          <a:ln/>
-        </p:spPr>
-        <p:txBody>
-          <a:bodyPr wrap="square" lIns="25400" tIns="25400" rIns="25400" bIns="25400" rtlCol="0" anchor="ctr"/>
-          <a:lstStyle/>
-          <a:p>
-            <a:pPr algn="l" indent="0" marL="0">
-              <a:lnSpc>
-                <a:spcPct val="100000"/>
-              </a:lnSpc>
-              <a:buNone/>
-            </a:pPr>
-            <a:r>
-              <a:rPr lang="en-US" sz="1400" dirty="0">
-                <a:solidFill>
-                  <a:srgbClr val="5B6770"/>
-                </a:solidFill>
-                <a:latin typeface="Calibri" pitchFamily="34" charset="0"/>
-                <a:ea typeface="Calibri" pitchFamily="34" charset="-122"/>
-                <a:cs typeface="Calibri" pitchFamily="34" charset="-120"/>
-              </a:rPr>
-              <a:t>Acumular ouro e prata</a:t>
-            </a:r>
-            <a:endParaRPr lang="en-US" sz="1400" dirty="0"/>
-          </a:p>
-        </p:txBody>
-      </p:sp>
-      <p:sp>
-        <p:nvSpPr>
-          <p:cNvPr id="16" name="Text 14"/>
-          <p:cNvSpPr txBox="1"/>
-          <p:nvPr/>
-        </p:nvSpPr>
-        <p:spPr>
-          <a:xfrm>
-            <a:off x="685800" y="3566160"/>
-            <a:ext cx="7772400" cy="841248"/>
-          </a:xfrm>
-          <a:prstGeom prst="roundRect">
-            <a:avLst>
-              <a:gd name="adj" fmla="val 8696"/>
-            </a:avLst>
-          </a:prstGeom>
-          <a:solidFill>
-            <a:srgbClr val="E6F2F0"/>
-          </a:solidFill>
-          <a:ln/>
-        </p:spPr>
-        <p:txBody>
-          <a:bodyPr wrap="square" lIns="114300" tIns="114300" rIns="114300" bIns="114300" rtlCol="0" anchor="ctr"/>
-          <a:lstStyle/>
-          <a:p>
-            <a:pPr algn="l" indent="0" marL="0">
-              <a:lnSpc>
-                <a:spcPct val="100000"/>
-              </a:lnSpc>
-              <a:buNone/>
-            </a:pPr>
-            <a:r>
-              <a:rPr lang="en-US" sz="1350" b="1" dirty="0">
-                <a:solidFill>
-                  <a:srgbClr val="2E7D4F"/>
-                </a:solidFill>
-                <a:latin typeface="Calibri" pitchFamily="34" charset="0"/>
-                <a:ea typeface="Calibri" pitchFamily="34" charset="-122"/>
-                <a:cs typeface="Calibri" pitchFamily="34" charset="-120"/>
-              </a:rPr>
-              <a:t>Resposta: b) </a:t>
-            </a:r>
-            <a:pPr algn="l" indent="0" marL="0">
-              <a:lnSpc>
-                <a:spcPct val="100000"/>
-              </a:lnSpc>
-              <a:buNone/>
-            </a:pPr>
-            <a:r>
-              <a:rPr lang="en-US" sz="1350" dirty="0">
-                <a:solidFill>
-                  <a:srgbClr val="1F2A37"/>
-                </a:solidFill>
-                <a:latin typeface="Calibri" pitchFamily="34" charset="0"/>
-                <a:ea typeface="Calibri" pitchFamily="34" charset="-122"/>
-                <a:cs typeface="Calibri" pitchFamily="34" charset="-120"/>
-              </a:rPr>
-              <a:t>A especialização e o livre comércio aumentam a produção total e beneficiam os países que trocam.</a:t>
-            </a:r>
-            <a:endParaRPr lang="en-US" sz="1350" dirty="0"/>
-          </a:p>
-        </p:txBody>
-      </p:sp>
-      <p:sp>
-        <p:nvSpPr>
-          <p:cNvPr id="17" name="Text 15"/>
-          <p:cNvSpPr txBox="1"/>
-          <p:nvPr/>
-        </p:nvSpPr>
-        <p:spPr>
-          <a:xfrm>
-            <a:off x="4206240" y="36576"/>
-            <a:ext cx="4800600" cy="219456"/>
-          </a:xfrm>
-          <a:prstGeom prst="rect">
-            <a:avLst/>
-          </a:prstGeom>
-          <a:noFill/>
-          <a:ln/>
-        </p:spPr>
-        <p:txBody>
-          <a:bodyPr wrap="square" lIns="0" tIns="0" rIns="0" bIns="0" rtlCol="0" anchor="ctr"/>
-          <a:lstStyle/>
-          <a:p>
-            <a:pPr algn="r" indent="0" marL="0">
-              <a:lnSpc>
-                <a:spcPct val="100000"/>
-              </a:lnSpc>
-              <a:buNone/>
-            </a:pPr>
-            <a:r>
-              <a:rPr lang="en-US" sz="950" dirty="0">
-                <a:solidFill>
-                  <a:srgbClr val="5B6770"/>
-                </a:solidFill>
-                <a:latin typeface="Calibri" pitchFamily="34" charset="0"/>
-                <a:ea typeface="Calibri" pitchFamily="34" charset="-122"/>
-                <a:cs typeface="Calibri" pitchFamily="34" charset="-120"/>
-              </a:rPr>
-              <a:t>Estado, Governo e Mercado · Unidade 2</a:t>
-            </a:r>
-            <a:endParaRPr lang="en-US" sz="950" dirty="0"/>
-          </a:p>
-        </p:txBody>
-      </p:sp>
-    </p:spTree>
-  </p:cSld>
-  <p:clrMapOvr>
-    <a:masterClrMapping/>
-  </p:clrMapOvr>
-</p:sld>
-</file>
-
-<file path=ppt/slides/slide29.xml><?xml version="1.0" encoding="utf-8"?>
-<p:sld xmlns:a="http://schemas.openxmlformats.org/drawingml/2006/main" xmlns:r="http://schemas.openxmlformats.org/officeDocument/2006/relationships" xmlns:p="http://schemas.openxmlformats.org/presentationml/2006/main">
-  <p:cSld name="Slide 29">
-    <p:bg>
-      <p:bgPr>
-        <a:blipFill dpi="0" rotWithShape="1">
-          <a:blip r:embed="rId1">
-            <a:lum/>
-          </a:blip>
-          <a:srcRect/>
-          <a:stretch>
-            <a:fillRect/>
-          </a:stretch>
-        </a:blipFill>
-        <a:effectLst/>
-      </p:bgPr>
-    </p:bg>
-    <p:spTree>
-      <p:nvGrpSpPr>
-        <p:cNvPr id="1" name=""/>
-        <p:cNvGrpSpPr/>
-        <p:nvPr/>
-      </p:nvGrpSpPr>
-      <p:grpSpPr>
-        <a:xfrm>
-          <a:off x="0" y="0"/>
-          <a:ext cx="0" cy="0"/>
-          <a:chOff x="0" y="0"/>
-          <a:chExt cx="0" cy="0"/>
-        </a:xfrm>
-      </p:grpSpPr>
-      <p:sp>
-        <p:nvSpPr>
-          <p:cNvPr id="2" name="Text 0"/>
-          <p:cNvSpPr txBox="1"/>
-          <p:nvPr/>
-        </p:nvSpPr>
-        <p:spPr>
-          <a:xfrm>
-            <a:off x="731520" y="274320"/>
-            <a:ext cx="7680960" cy="365760"/>
-          </a:xfrm>
-          <a:prstGeom prst="rect">
-            <a:avLst/>
-          </a:prstGeom>
-          <a:noFill/>
-          <a:ln/>
-        </p:spPr>
-        <p:txBody>
-          <a:bodyPr wrap="square" lIns="0" tIns="0" rIns="0" bIns="0" rtlCol="0" anchor="ctr"/>
-          <a:lstStyle/>
-          <a:p>
-            <a:pPr algn="ctr" indent="0" marL="0">
-              <a:lnSpc>
-                <a:spcPct val="100000"/>
-              </a:lnSpc>
-              <a:buNone/>
-            </a:pPr>
-            <a:r>
-              <a:rPr lang="en-US" sz="1250" b="1" dirty="0">
-                <a:solidFill>
-                  <a:srgbClr val="2A8C85"/>
-                </a:solidFill>
-                <a:latin typeface="Calibri" pitchFamily="34" charset="0"/>
-                <a:ea typeface="Calibri" pitchFamily="34" charset="-122"/>
-                <a:cs typeface="Calibri" pitchFamily="34" charset="-120"/>
-              </a:rPr>
-              <a:t>QUIZ DA UNIDADE 2 · PERGUNTA 5 DE 5</a:t>
-            </a:r>
-            <a:endParaRPr lang="en-US" sz="1250" dirty="0"/>
-          </a:p>
-        </p:txBody>
-      </p:sp>
-      <p:sp>
-        <p:nvSpPr>
-          <p:cNvPr id="3" name="Text 1"/>
-          <p:cNvSpPr txBox="1"/>
-          <p:nvPr/>
-        </p:nvSpPr>
-        <p:spPr>
-          <a:xfrm>
-            <a:off x="731520" y="658368"/>
-            <a:ext cx="7680960" cy="960120"/>
-          </a:xfrm>
-          <a:prstGeom prst="rect">
-            <a:avLst/>
-          </a:prstGeom>
-          <a:noFill/>
-          <a:ln/>
-        </p:spPr>
-        <p:txBody>
-          <a:bodyPr wrap="square" lIns="0" tIns="0" rIns="0" bIns="0" rtlCol="0" anchor="ctr"/>
-          <a:lstStyle/>
-          <a:p>
-            <a:pPr algn="ctr" indent="0" marL="0">
-              <a:lnSpc>
-                <a:spcPct val="100000"/>
-              </a:lnSpc>
-              <a:buNone/>
-            </a:pPr>
-            <a:r>
-              <a:rPr lang="en-US" sz="1900" b="1" dirty="0">
-                <a:solidFill>
-                  <a:srgbClr val="13294B"/>
-                </a:solidFill>
-                <a:latin typeface="Calibri" pitchFamily="34" charset="0"/>
-                <a:ea typeface="Calibri" pitchFamily="34" charset="-122"/>
-                <a:cs typeface="Calibri" pitchFamily="34" charset="-120"/>
-              </a:rPr>
-              <a:t>Por que o pêndulo entre Estado e mercado se move?</a:t>
-            </a:r>
-            <a:endParaRPr lang="en-US" sz="1900" dirty="0"/>
-          </a:p>
-        </p:txBody>
-      </p:sp>
-      <p:sp>
-        <p:nvSpPr>
-          <p:cNvPr id="4" name="Shape 2"/>
-          <p:cNvSpPr/>
-          <p:nvPr/>
-        </p:nvSpPr>
-        <p:spPr>
-          <a:xfrm>
-            <a:off x="685800" y="1737360"/>
-            <a:ext cx="3794760" cy="914400"/>
-          </a:xfrm>
-          <a:prstGeom prst="roundRect">
-            <a:avLst>
-              <a:gd name="adj" fmla="val 8000"/>
-            </a:avLst>
-          </a:prstGeom>
-          <a:solidFill>
-            <a:srgbClr val="FFFFFF"/>
-          </a:solidFill>
-          <a:ln w="12700">
-            <a:solidFill>
-              <a:srgbClr val="DCD5C1"/>
-            </a:solidFill>
-            <a:prstDash val="solid"/>
-          </a:ln>
-        </p:spPr>
-      </p:sp>
-      <p:sp>
-        <p:nvSpPr>
-          <p:cNvPr id="5" name="Text 3"/>
-          <p:cNvSpPr txBox="1"/>
-          <p:nvPr/>
-        </p:nvSpPr>
-        <p:spPr>
-          <a:xfrm>
-            <a:off x="813816" y="1984248"/>
-            <a:ext cx="420624" cy="420624"/>
-          </a:xfrm>
-          <a:prstGeom prst="roundRect">
-            <a:avLst>
-              <a:gd name="adj" fmla="val 50000"/>
-            </a:avLst>
-          </a:prstGeom>
-          <a:solidFill>
-            <a:srgbClr val="13294B"/>
-          </a:solidFill>
-          <a:ln/>
-        </p:spPr>
-        <p:txBody>
-          <a:bodyPr wrap="square" lIns="0" tIns="0" rIns="0" bIns="0" rtlCol="0" anchor="ctr"/>
-          <a:lstStyle/>
-          <a:p>
-            <a:pPr algn="ctr" indent="0" marL="0">
-              <a:lnSpc>
-                <a:spcPct val="100000"/>
-              </a:lnSpc>
-              <a:buNone/>
-            </a:pPr>
-            <a:r>
-              <a:rPr lang="en-US" sz="1600" b="1" dirty="0">
-                <a:solidFill>
-                  <a:srgbClr val="FFFFFF"/>
-                </a:solidFill>
-                <a:latin typeface="Calibri" pitchFamily="34" charset="0"/>
-                <a:ea typeface="Calibri" pitchFamily="34" charset="-122"/>
-                <a:cs typeface="Calibri" pitchFamily="34" charset="-120"/>
-              </a:rPr>
-              <a:t>a</a:t>
-            </a:r>
-            <a:endParaRPr lang="en-US" sz="1600" dirty="0"/>
-          </a:p>
-        </p:txBody>
-      </p:sp>
-      <p:sp>
-        <p:nvSpPr>
-          <p:cNvPr id="6" name="Text 4"/>
-          <p:cNvSpPr txBox="1"/>
-          <p:nvPr/>
-        </p:nvSpPr>
-        <p:spPr>
-          <a:xfrm>
-            <a:off x="1344168" y="1773936"/>
-            <a:ext cx="3044952" cy="841248"/>
-          </a:xfrm>
-          <a:prstGeom prst="rect">
-            <a:avLst/>
-          </a:prstGeom>
-          <a:noFill/>
-          <a:ln/>
-        </p:spPr>
-        <p:txBody>
-          <a:bodyPr wrap="square" lIns="25400" tIns="25400" rIns="25400" bIns="25400" rtlCol="0" anchor="ctr"/>
-          <a:lstStyle/>
-          <a:p>
-            <a:pPr algn="l" indent="0" marL="0">
-              <a:lnSpc>
-                <a:spcPct val="100000"/>
-              </a:lnSpc>
-              <a:buNone/>
-            </a:pPr>
-            <a:r>
-              <a:rPr lang="en-US" sz="1400" dirty="0">
-                <a:solidFill>
-                  <a:srgbClr val="1F2A37"/>
-                </a:solidFill>
-                <a:latin typeface="Calibri" pitchFamily="34" charset="0"/>
-                <a:ea typeface="Calibri" pitchFamily="34" charset="-122"/>
-                <a:cs typeface="Calibri" pitchFamily="34" charset="-120"/>
-              </a:rPr>
-              <a:t>Cada extremo gera problemas que levam a correções no sentido oposto</a:t>
-            </a:r>
-            <a:endParaRPr lang="en-US" sz="1400" dirty="0"/>
-          </a:p>
-        </p:txBody>
-      </p:sp>
-      <p:sp>
-        <p:nvSpPr>
-          <p:cNvPr id="7" name="Shape 5"/>
-          <p:cNvSpPr/>
-          <p:nvPr/>
-        </p:nvSpPr>
-        <p:spPr>
-          <a:xfrm>
-            <a:off x="4663440" y="1737360"/>
-            <a:ext cx="3794760" cy="914400"/>
-          </a:xfrm>
-          <a:prstGeom prst="roundRect">
-            <a:avLst>
-              <a:gd name="adj" fmla="val 8000"/>
-            </a:avLst>
-          </a:prstGeom>
-          <a:solidFill>
-            <a:srgbClr val="FFFFFF"/>
-          </a:solidFill>
-          <a:ln w="12700">
-            <a:solidFill>
-              <a:srgbClr val="DCD5C1"/>
-            </a:solidFill>
-            <a:prstDash val="solid"/>
-          </a:ln>
-        </p:spPr>
-      </p:sp>
-      <p:sp>
-        <p:nvSpPr>
-          <p:cNvPr id="8" name="Text 6"/>
-          <p:cNvSpPr txBox="1"/>
-          <p:nvPr/>
-        </p:nvSpPr>
-        <p:spPr>
-          <a:xfrm>
-            <a:off x="4791456" y="1984248"/>
-            <a:ext cx="420624" cy="420624"/>
-          </a:xfrm>
-          <a:prstGeom prst="roundRect">
-            <a:avLst>
-              <a:gd name="adj" fmla="val 50000"/>
-            </a:avLst>
-          </a:prstGeom>
-          <a:solidFill>
-            <a:srgbClr val="13294B"/>
-          </a:solidFill>
-          <a:ln/>
-        </p:spPr>
-        <p:txBody>
-          <a:bodyPr wrap="square" lIns="0" tIns="0" rIns="0" bIns="0" rtlCol="0" anchor="ctr"/>
-          <a:lstStyle/>
-          <a:p>
-            <a:pPr algn="ctr" indent="0" marL="0">
-              <a:lnSpc>
-                <a:spcPct val="100000"/>
-              </a:lnSpc>
-              <a:buNone/>
-            </a:pPr>
-            <a:r>
-              <a:rPr lang="en-US" sz="1600" b="1" dirty="0">
-                <a:solidFill>
-                  <a:srgbClr val="FFFFFF"/>
-                </a:solidFill>
-                <a:latin typeface="Calibri" pitchFamily="34" charset="0"/>
-                <a:ea typeface="Calibri" pitchFamily="34" charset="-122"/>
-                <a:cs typeface="Calibri" pitchFamily="34" charset="-120"/>
-              </a:rPr>
-              <a:t>b</a:t>
-            </a:r>
-            <a:endParaRPr lang="en-US" sz="1600" dirty="0"/>
-          </a:p>
-        </p:txBody>
-      </p:sp>
-      <p:sp>
-        <p:nvSpPr>
-          <p:cNvPr id="9" name="Text 7"/>
-          <p:cNvSpPr txBox="1"/>
-          <p:nvPr/>
-        </p:nvSpPr>
-        <p:spPr>
-          <a:xfrm>
-            <a:off x="5321808" y="1773936"/>
-            <a:ext cx="3044952" cy="841248"/>
-          </a:xfrm>
-          <a:prstGeom prst="rect">
-            <a:avLst/>
-          </a:prstGeom>
-          <a:noFill/>
-          <a:ln/>
-        </p:spPr>
-        <p:txBody>
-          <a:bodyPr wrap="square" lIns="25400" tIns="25400" rIns="25400" bIns="25400" rtlCol="0" anchor="ctr"/>
-          <a:lstStyle/>
-          <a:p>
-            <a:pPr algn="l" indent="0" marL="0">
-              <a:lnSpc>
-                <a:spcPct val="100000"/>
-              </a:lnSpc>
-              <a:buNone/>
-            </a:pPr>
-            <a:r>
-              <a:rPr lang="en-US" sz="1400" dirty="0">
-                <a:solidFill>
-                  <a:srgbClr val="1F2A37"/>
-                </a:solidFill>
-                <a:latin typeface="Calibri" pitchFamily="34" charset="0"/>
-                <a:ea typeface="Calibri" pitchFamily="34" charset="-122"/>
-                <a:cs typeface="Calibri" pitchFamily="34" charset="-120"/>
-              </a:rPr>
-              <a:t>O Estado sempre cresce</a:t>
-            </a:r>
-            <a:endParaRPr lang="en-US" sz="1400" dirty="0"/>
-          </a:p>
-        </p:txBody>
-      </p:sp>
-      <p:sp>
-        <p:nvSpPr>
-          <p:cNvPr id="10" name="Shape 8"/>
-          <p:cNvSpPr/>
-          <p:nvPr/>
-        </p:nvSpPr>
-        <p:spPr>
-          <a:xfrm>
-            <a:off x="685800" y="2798064"/>
-            <a:ext cx="3794760" cy="914400"/>
-          </a:xfrm>
-          <a:prstGeom prst="roundRect">
-            <a:avLst>
-              <a:gd name="adj" fmla="val 8000"/>
-            </a:avLst>
-          </a:prstGeom>
-          <a:solidFill>
-            <a:srgbClr val="FFFFFF"/>
-          </a:solidFill>
-          <a:ln w="12700">
-            <a:solidFill>
-              <a:srgbClr val="DCD5C1"/>
-            </a:solidFill>
-            <a:prstDash val="solid"/>
-          </a:ln>
-        </p:spPr>
-      </p:sp>
-      <p:sp>
-        <p:nvSpPr>
-          <p:cNvPr id="11" name="Text 9"/>
-          <p:cNvSpPr txBox="1"/>
-          <p:nvPr/>
-        </p:nvSpPr>
-        <p:spPr>
-          <a:xfrm>
-            <a:off x="813816" y="3044952"/>
-            <a:ext cx="420624" cy="420624"/>
-          </a:xfrm>
-          <a:prstGeom prst="roundRect">
-            <a:avLst>
-              <a:gd name="adj" fmla="val 50000"/>
-            </a:avLst>
-          </a:prstGeom>
-          <a:solidFill>
-            <a:srgbClr val="13294B"/>
-          </a:solidFill>
-          <a:ln/>
-        </p:spPr>
-        <p:txBody>
-          <a:bodyPr wrap="square" lIns="0" tIns="0" rIns="0" bIns="0" rtlCol="0" anchor="ctr"/>
-          <a:lstStyle/>
-          <a:p>
-            <a:pPr algn="ctr" indent="0" marL="0">
-              <a:lnSpc>
-                <a:spcPct val="100000"/>
-              </a:lnSpc>
-              <a:buNone/>
-            </a:pPr>
-            <a:r>
-              <a:rPr lang="en-US" sz="1600" b="1" dirty="0">
-                <a:solidFill>
-                  <a:srgbClr val="FFFFFF"/>
-                </a:solidFill>
-                <a:latin typeface="Calibri" pitchFamily="34" charset="0"/>
-                <a:ea typeface="Calibri" pitchFamily="34" charset="-122"/>
-                <a:cs typeface="Calibri" pitchFamily="34" charset="-120"/>
-              </a:rPr>
-              <a:t>c</a:t>
-            </a:r>
-            <a:endParaRPr lang="en-US" sz="1600" dirty="0"/>
-          </a:p>
-        </p:txBody>
-      </p:sp>
-      <p:sp>
-        <p:nvSpPr>
-          <p:cNvPr id="12" name="Text 10"/>
-          <p:cNvSpPr txBox="1"/>
-          <p:nvPr/>
-        </p:nvSpPr>
-        <p:spPr>
-          <a:xfrm>
-            <a:off x="1344168" y="2834640"/>
-            <a:ext cx="3044952" cy="841248"/>
-          </a:xfrm>
-          <a:prstGeom prst="rect">
-            <a:avLst/>
-          </a:prstGeom>
-          <a:noFill/>
-          <a:ln/>
-        </p:spPr>
-        <p:txBody>
-          <a:bodyPr wrap="square" lIns="25400" tIns="25400" rIns="25400" bIns="25400" rtlCol="0" anchor="ctr"/>
-          <a:lstStyle/>
-          <a:p>
-            <a:pPr algn="l" indent="0" marL="0">
-              <a:lnSpc>
-                <a:spcPct val="100000"/>
-              </a:lnSpc>
-              <a:buNone/>
-            </a:pPr>
-            <a:r>
-              <a:rPr lang="en-US" sz="1400" dirty="0">
-                <a:solidFill>
-                  <a:srgbClr val="1F2A37"/>
-                </a:solidFill>
-                <a:latin typeface="Calibri" pitchFamily="34" charset="0"/>
-                <a:ea typeface="Calibri" pitchFamily="34" charset="-122"/>
-                <a:cs typeface="Calibri" pitchFamily="34" charset="-120"/>
-              </a:rPr>
-              <a:t>O mercado sempre vence no longo prazo</a:t>
-            </a:r>
-            <a:endParaRPr lang="en-US" sz="1400" dirty="0"/>
-          </a:p>
-        </p:txBody>
-      </p:sp>
-      <p:sp>
-        <p:nvSpPr>
-          <p:cNvPr id="13" name="Shape 11"/>
-          <p:cNvSpPr/>
-          <p:nvPr/>
-        </p:nvSpPr>
-        <p:spPr>
-          <a:xfrm>
-            <a:off x="4663440" y="2798064"/>
-            <a:ext cx="3794760" cy="914400"/>
-          </a:xfrm>
-          <a:prstGeom prst="roundRect">
-            <a:avLst>
-              <a:gd name="adj" fmla="val 8000"/>
-            </a:avLst>
-          </a:prstGeom>
-          <a:solidFill>
-            <a:srgbClr val="FFFFFF"/>
-          </a:solidFill>
-          <a:ln w="12700">
-            <a:solidFill>
-              <a:srgbClr val="DCD5C1"/>
-            </a:solidFill>
-            <a:prstDash val="solid"/>
-          </a:ln>
-        </p:spPr>
-      </p:sp>
-      <p:sp>
-        <p:nvSpPr>
-          <p:cNvPr id="14" name="Text 12"/>
-          <p:cNvSpPr txBox="1"/>
-          <p:nvPr/>
-        </p:nvSpPr>
-        <p:spPr>
-          <a:xfrm>
-            <a:off x="4791456" y="3044952"/>
-            <a:ext cx="420624" cy="420624"/>
-          </a:xfrm>
-          <a:prstGeom prst="roundRect">
-            <a:avLst>
-              <a:gd name="adj" fmla="val 50000"/>
-            </a:avLst>
-          </a:prstGeom>
-          <a:solidFill>
-            <a:srgbClr val="13294B"/>
-          </a:solidFill>
-          <a:ln/>
-        </p:spPr>
-        <p:txBody>
-          <a:bodyPr wrap="square" lIns="0" tIns="0" rIns="0" bIns="0" rtlCol="0" anchor="ctr"/>
-          <a:lstStyle/>
-          <a:p>
-            <a:pPr algn="ctr" indent="0" marL="0">
-              <a:lnSpc>
-                <a:spcPct val="100000"/>
-              </a:lnSpc>
-              <a:buNone/>
-            </a:pPr>
-            <a:r>
-              <a:rPr lang="en-US" sz="1600" b="1" dirty="0">
-                <a:solidFill>
-                  <a:srgbClr val="FFFFFF"/>
-                </a:solidFill>
-                <a:latin typeface="Calibri" pitchFamily="34" charset="0"/>
-                <a:ea typeface="Calibri" pitchFamily="34" charset="-122"/>
-                <a:cs typeface="Calibri" pitchFamily="34" charset="-120"/>
-              </a:rPr>
-              <a:t>d</a:t>
-            </a:r>
-            <a:endParaRPr lang="en-US" sz="1600" dirty="0"/>
-          </a:p>
-        </p:txBody>
-      </p:sp>
-      <p:sp>
-        <p:nvSpPr>
-          <p:cNvPr id="15" name="Text 13"/>
-          <p:cNvSpPr txBox="1"/>
-          <p:nvPr/>
-        </p:nvSpPr>
-        <p:spPr>
-          <a:xfrm>
-            <a:off x="5321808" y="2834640"/>
-            <a:ext cx="3044952" cy="841248"/>
-          </a:xfrm>
-          <a:prstGeom prst="rect">
-            <a:avLst/>
-          </a:prstGeom>
-          <a:noFill/>
-          <a:ln/>
-        </p:spPr>
-        <p:txBody>
-          <a:bodyPr wrap="square" lIns="25400" tIns="25400" rIns="25400" bIns="25400" rtlCol="0" anchor="ctr"/>
-          <a:lstStyle/>
-          <a:p>
-            <a:pPr algn="l" indent="0" marL="0">
-              <a:lnSpc>
-                <a:spcPct val="100000"/>
-              </a:lnSpc>
-              <a:buNone/>
-            </a:pPr>
-            <a:r>
-              <a:rPr lang="en-US" sz="1400" dirty="0">
-                <a:solidFill>
-                  <a:srgbClr val="1F2A37"/>
-                </a:solidFill>
-                <a:latin typeface="Calibri" pitchFamily="34" charset="0"/>
-                <a:ea typeface="Calibri" pitchFamily="34" charset="-122"/>
-                <a:cs typeface="Calibri" pitchFamily="34" charset="-120"/>
-              </a:rPr>
-              <a:t>Depende apenas do resultado das eleições</a:t>
-            </a:r>
-            <a:endParaRPr lang="en-US" sz="1400" dirty="0"/>
-          </a:p>
-        </p:txBody>
-      </p:sp>
-      <p:sp>
-        <p:nvSpPr>
-          <p:cNvPr id="16" name="Text 14"/>
+              <a:t>Próxima unidade: a matriz marxista e as mudanças do final do século XIX.</a:t>
+            </a:r>
+            <a:endParaRPr lang="en-US" sz="1300" dirty="0"/>
+          </a:p>
+        </p:txBody>
+      </p:sp>
+      <p:sp>
+        <p:nvSpPr>
+          <p:cNvPr id="7" name="Text 5"/>
           <p:cNvSpPr txBox="1"/>
           <p:nvPr/>
         </p:nvSpPr>
@@ -17443,1269 +11089,6 @@
                 <a:cs typeface="Calibri" pitchFamily="34" charset="-120"/>
               </a:rPr>
               <a:t>Estado, Governo e Mercado · Unidade 2 · Tópico 3 do sumário</a:t>
-            </a:r>
-            <a:endParaRPr lang="en-US" sz="950" dirty="0"/>
-          </a:p>
-        </p:txBody>
-      </p:sp>
-    </p:spTree>
-  </p:cSld>
-  <p:clrMapOvr>
-    <a:masterClrMapping/>
-  </p:clrMapOvr>
-</p:sld>
-</file>
-
-<file path=ppt/slides/slide30.xml><?xml version="1.0" encoding="utf-8"?>
-<p:sld xmlns:a="http://schemas.openxmlformats.org/drawingml/2006/main" xmlns:r="http://schemas.openxmlformats.org/officeDocument/2006/relationships" xmlns:p="http://schemas.openxmlformats.org/presentationml/2006/main">
-  <p:cSld name="Slide 30">
-    <p:bg>
-      <p:bgPr>
-        <a:blipFill dpi="0" rotWithShape="1">
-          <a:blip r:embed="rId1">
-            <a:lum/>
-          </a:blip>
-          <a:srcRect/>
-          <a:stretch>
-            <a:fillRect/>
-          </a:stretch>
-        </a:blipFill>
-        <a:effectLst/>
-      </p:bgPr>
-    </p:bg>
-    <p:spTree>
-      <p:nvGrpSpPr>
-        <p:cNvPr id="1" name=""/>
-        <p:cNvGrpSpPr/>
-        <p:nvPr/>
-      </p:nvGrpSpPr>
-      <p:grpSpPr>
-        <a:xfrm>
-          <a:off x="0" y="0"/>
-          <a:ext cx="0" cy="0"/>
-          <a:chOff x="0" y="0"/>
-          <a:chExt cx="0" cy="0"/>
-        </a:xfrm>
-      </p:grpSpPr>
-      <p:sp>
-        <p:nvSpPr>
-          <p:cNvPr id="2" name="Text 0"/>
-          <p:cNvSpPr txBox="1"/>
-          <p:nvPr/>
-        </p:nvSpPr>
-        <p:spPr>
-          <a:xfrm>
-            <a:off x="731520" y="274320"/>
-            <a:ext cx="7680960" cy="365760"/>
-          </a:xfrm>
-          <a:prstGeom prst="rect">
-            <a:avLst/>
-          </a:prstGeom>
-          <a:noFill/>
-          <a:ln/>
-        </p:spPr>
-        <p:txBody>
-          <a:bodyPr wrap="square" lIns="0" tIns="0" rIns="0" bIns="0" rtlCol="0" anchor="ctr"/>
-          <a:lstStyle/>
-          <a:p>
-            <a:pPr algn="ctr" indent="0" marL="0">
-              <a:lnSpc>
-                <a:spcPct val="100000"/>
-              </a:lnSpc>
-              <a:buNone/>
-            </a:pPr>
-            <a:r>
-              <a:rPr lang="en-US" sz="1250" b="1" dirty="0">
-                <a:solidFill>
-                  <a:srgbClr val="2A8C85"/>
-                </a:solidFill>
-                <a:latin typeface="Calibri" pitchFamily="34" charset="0"/>
-                <a:ea typeface="Calibri" pitchFamily="34" charset="-122"/>
-                <a:cs typeface="Calibri" pitchFamily="34" charset="-120"/>
-              </a:rPr>
-              <a:t>QUIZ DA UNIDADE 2 · PERGUNTA 5 DE 5 · RESPOSTA</a:t>
-            </a:r>
-            <a:endParaRPr lang="en-US" sz="1250" dirty="0"/>
-          </a:p>
-        </p:txBody>
-      </p:sp>
-      <p:sp>
-        <p:nvSpPr>
-          <p:cNvPr id="3" name="Text 1"/>
-          <p:cNvSpPr txBox="1"/>
-          <p:nvPr/>
-        </p:nvSpPr>
-        <p:spPr>
-          <a:xfrm>
-            <a:off x="731520" y="658368"/>
-            <a:ext cx="7680960" cy="960120"/>
-          </a:xfrm>
-          <a:prstGeom prst="rect">
-            <a:avLst/>
-          </a:prstGeom>
-          <a:noFill/>
-          <a:ln/>
-        </p:spPr>
-        <p:txBody>
-          <a:bodyPr wrap="square" lIns="0" tIns="0" rIns="0" bIns="0" rtlCol="0" anchor="ctr"/>
-          <a:lstStyle/>
-          <a:p>
-            <a:pPr algn="ctr" indent="0" marL="0">
-              <a:lnSpc>
-                <a:spcPct val="100000"/>
-              </a:lnSpc>
-              <a:buNone/>
-            </a:pPr>
-            <a:r>
-              <a:rPr lang="en-US" sz="1900" b="1" dirty="0">
-                <a:solidFill>
-                  <a:srgbClr val="13294B"/>
-                </a:solidFill>
-                <a:latin typeface="Calibri" pitchFamily="34" charset="0"/>
-                <a:ea typeface="Calibri" pitchFamily="34" charset="-122"/>
-                <a:cs typeface="Calibri" pitchFamily="34" charset="-120"/>
-              </a:rPr>
-              <a:t>Por que o pêndulo entre Estado e mercado se move?</a:t>
-            </a:r>
-            <a:endParaRPr lang="en-US" sz="1900" dirty="0"/>
-          </a:p>
-        </p:txBody>
-      </p:sp>
-      <p:sp>
-        <p:nvSpPr>
-          <p:cNvPr id="4" name="Shape 2"/>
-          <p:cNvSpPr/>
-          <p:nvPr/>
-        </p:nvSpPr>
-        <p:spPr>
-          <a:xfrm>
-            <a:off x="685800" y="1737360"/>
-            <a:ext cx="3794760" cy="749808"/>
-          </a:xfrm>
-          <a:prstGeom prst="roundRect">
-            <a:avLst>
-              <a:gd name="adj" fmla="val 9756"/>
-            </a:avLst>
-          </a:prstGeom>
-          <a:solidFill>
-            <a:srgbClr val="E3F2E8"/>
-          </a:solidFill>
-          <a:ln w="25400">
-            <a:solidFill>
-              <a:srgbClr val="2E7D4F"/>
-            </a:solidFill>
-            <a:prstDash val="solid"/>
-          </a:ln>
-        </p:spPr>
-      </p:sp>
-      <p:sp>
-        <p:nvSpPr>
-          <p:cNvPr id="5" name="Text 3"/>
-          <p:cNvSpPr txBox="1"/>
-          <p:nvPr/>
-        </p:nvSpPr>
-        <p:spPr>
-          <a:xfrm>
-            <a:off x="813816" y="1901952"/>
-            <a:ext cx="420624" cy="420624"/>
-          </a:xfrm>
-          <a:prstGeom prst="roundRect">
-            <a:avLst>
-              <a:gd name="adj" fmla="val 50000"/>
-            </a:avLst>
-          </a:prstGeom>
-          <a:solidFill>
-            <a:srgbClr val="2E7D4F"/>
-          </a:solidFill>
-          <a:ln/>
-        </p:spPr>
-        <p:txBody>
-          <a:bodyPr wrap="square" lIns="0" tIns="0" rIns="0" bIns="0" rtlCol="0" anchor="ctr"/>
-          <a:lstStyle/>
-          <a:p>
-            <a:pPr algn="ctr" indent="0" marL="0">
-              <a:lnSpc>
-                <a:spcPct val="100000"/>
-              </a:lnSpc>
-              <a:buNone/>
-            </a:pPr>
-            <a:r>
-              <a:rPr lang="en-US" sz="1600" b="1" dirty="0">
-                <a:solidFill>
-                  <a:srgbClr val="FFFFFF"/>
-                </a:solidFill>
-                <a:latin typeface="Calibri" pitchFamily="34" charset="0"/>
-                <a:ea typeface="Calibri" pitchFamily="34" charset="-122"/>
-                <a:cs typeface="Calibri" pitchFamily="34" charset="-120"/>
-              </a:rPr>
-              <a:t>a</a:t>
-            </a:r>
-            <a:endParaRPr lang="en-US" sz="1600" dirty="0"/>
-          </a:p>
-        </p:txBody>
-      </p:sp>
-      <p:sp>
-        <p:nvSpPr>
-          <p:cNvPr id="6" name="Text 4"/>
-          <p:cNvSpPr txBox="1"/>
-          <p:nvPr/>
-        </p:nvSpPr>
-        <p:spPr>
-          <a:xfrm>
-            <a:off x="1344168" y="1773936"/>
-            <a:ext cx="3044952" cy="676656"/>
-          </a:xfrm>
-          <a:prstGeom prst="rect">
-            <a:avLst/>
-          </a:prstGeom>
-          <a:noFill/>
-          <a:ln/>
-        </p:spPr>
-        <p:txBody>
-          <a:bodyPr wrap="square" lIns="25400" tIns="25400" rIns="25400" bIns="25400" rtlCol="0" anchor="ctr"/>
-          <a:lstStyle/>
-          <a:p>
-            <a:pPr algn="l" indent="0" marL="0">
-              <a:lnSpc>
-                <a:spcPct val="100000"/>
-              </a:lnSpc>
-              <a:buNone/>
-            </a:pPr>
-            <a:r>
-              <a:rPr lang="en-US" sz="1400" b="1" dirty="0">
-                <a:solidFill>
-                  <a:srgbClr val="1F2A37"/>
-                </a:solidFill>
-                <a:latin typeface="Calibri" pitchFamily="34" charset="0"/>
-                <a:ea typeface="Calibri" pitchFamily="34" charset="-122"/>
-                <a:cs typeface="Calibri" pitchFamily="34" charset="-120"/>
-              </a:rPr>
-              <a:t>Cada extremo gera problemas que levam a correções no sentido oposto</a:t>
-            </a:r>
-            <a:endParaRPr lang="en-US" sz="1400" dirty="0"/>
-          </a:p>
-        </p:txBody>
-      </p:sp>
-      <p:sp>
-        <p:nvSpPr>
-          <p:cNvPr id="7" name="Shape 5"/>
-          <p:cNvSpPr/>
-          <p:nvPr/>
-        </p:nvSpPr>
-        <p:spPr>
-          <a:xfrm>
-            <a:off x="4663440" y="1737360"/>
-            <a:ext cx="3794760" cy="749808"/>
-          </a:xfrm>
-          <a:prstGeom prst="roundRect">
-            <a:avLst>
-              <a:gd name="adj" fmla="val 9756"/>
-            </a:avLst>
-          </a:prstGeom>
-          <a:solidFill>
-            <a:srgbClr val="FFFFFF"/>
-          </a:solidFill>
-          <a:ln w="12700">
-            <a:solidFill>
-              <a:srgbClr val="DCD5C1"/>
-            </a:solidFill>
-            <a:prstDash val="solid"/>
-          </a:ln>
-        </p:spPr>
-      </p:sp>
-      <p:sp>
-        <p:nvSpPr>
-          <p:cNvPr id="8" name="Text 6"/>
-          <p:cNvSpPr txBox="1"/>
-          <p:nvPr/>
-        </p:nvSpPr>
-        <p:spPr>
-          <a:xfrm>
-            <a:off x="4791456" y="1901952"/>
-            <a:ext cx="420624" cy="420624"/>
-          </a:xfrm>
-          <a:prstGeom prst="roundRect">
-            <a:avLst>
-              <a:gd name="adj" fmla="val 50000"/>
-            </a:avLst>
-          </a:prstGeom>
-          <a:solidFill>
-            <a:srgbClr val="9AA3AB"/>
-          </a:solidFill>
-          <a:ln/>
-        </p:spPr>
-        <p:txBody>
-          <a:bodyPr wrap="square" lIns="0" tIns="0" rIns="0" bIns="0" rtlCol="0" anchor="ctr"/>
-          <a:lstStyle/>
-          <a:p>
-            <a:pPr algn="ctr" indent="0" marL="0">
-              <a:lnSpc>
-                <a:spcPct val="100000"/>
-              </a:lnSpc>
-              <a:buNone/>
-            </a:pPr>
-            <a:r>
-              <a:rPr lang="en-US" sz="1600" b="1" dirty="0">
-                <a:solidFill>
-                  <a:srgbClr val="FFFFFF"/>
-                </a:solidFill>
-                <a:latin typeface="Calibri" pitchFamily="34" charset="0"/>
-                <a:ea typeface="Calibri" pitchFamily="34" charset="-122"/>
-                <a:cs typeface="Calibri" pitchFamily="34" charset="-120"/>
-              </a:rPr>
-              <a:t>b</a:t>
-            </a:r>
-            <a:endParaRPr lang="en-US" sz="1600" dirty="0"/>
-          </a:p>
-        </p:txBody>
-      </p:sp>
-      <p:sp>
-        <p:nvSpPr>
-          <p:cNvPr id="9" name="Text 7"/>
-          <p:cNvSpPr txBox="1"/>
-          <p:nvPr/>
-        </p:nvSpPr>
-        <p:spPr>
-          <a:xfrm>
-            <a:off x="5321808" y="1773936"/>
-            <a:ext cx="3044952" cy="676656"/>
-          </a:xfrm>
-          <a:prstGeom prst="rect">
-            <a:avLst/>
-          </a:prstGeom>
-          <a:noFill/>
-          <a:ln/>
-        </p:spPr>
-        <p:txBody>
-          <a:bodyPr wrap="square" lIns="25400" tIns="25400" rIns="25400" bIns="25400" rtlCol="0" anchor="ctr"/>
-          <a:lstStyle/>
-          <a:p>
-            <a:pPr algn="l" indent="0" marL="0">
-              <a:lnSpc>
-                <a:spcPct val="100000"/>
-              </a:lnSpc>
-              <a:buNone/>
-            </a:pPr>
-            <a:r>
-              <a:rPr lang="en-US" sz="1400" dirty="0">
-                <a:solidFill>
-                  <a:srgbClr val="5B6770"/>
-                </a:solidFill>
-                <a:latin typeface="Calibri" pitchFamily="34" charset="0"/>
-                <a:ea typeface="Calibri" pitchFamily="34" charset="-122"/>
-                <a:cs typeface="Calibri" pitchFamily="34" charset="-120"/>
-              </a:rPr>
-              <a:t>O Estado sempre cresce</a:t>
-            </a:r>
-            <a:endParaRPr lang="en-US" sz="1400" dirty="0"/>
-          </a:p>
-        </p:txBody>
-      </p:sp>
-      <p:sp>
-        <p:nvSpPr>
-          <p:cNvPr id="10" name="Shape 8"/>
-          <p:cNvSpPr/>
-          <p:nvPr/>
-        </p:nvSpPr>
-        <p:spPr>
-          <a:xfrm>
-            <a:off x="685800" y="2633472"/>
-            <a:ext cx="3794760" cy="749808"/>
-          </a:xfrm>
-          <a:prstGeom prst="roundRect">
-            <a:avLst>
-              <a:gd name="adj" fmla="val 9756"/>
-            </a:avLst>
-          </a:prstGeom>
-          <a:solidFill>
-            <a:srgbClr val="FFFFFF"/>
-          </a:solidFill>
-          <a:ln w="12700">
-            <a:solidFill>
-              <a:srgbClr val="DCD5C1"/>
-            </a:solidFill>
-            <a:prstDash val="solid"/>
-          </a:ln>
-        </p:spPr>
-      </p:sp>
-      <p:sp>
-        <p:nvSpPr>
-          <p:cNvPr id="11" name="Text 9"/>
-          <p:cNvSpPr txBox="1"/>
-          <p:nvPr/>
-        </p:nvSpPr>
-        <p:spPr>
-          <a:xfrm>
-            <a:off x="813816" y="2798064"/>
-            <a:ext cx="420624" cy="420624"/>
-          </a:xfrm>
-          <a:prstGeom prst="roundRect">
-            <a:avLst>
-              <a:gd name="adj" fmla="val 50000"/>
-            </a:avLst>
-          </a:prstGeom>
-          <a:solidFill>
-            <a:srgbClr val="9AA3AB"/>
-          </a:solidFill>
-          <a:ln/>
-        </p:spPr>
-        <p:txBody>
-          <a:bodyPr wrap="square" lIns="0" tIns="0" rIns="0" bIns="0" rtlCol="0" anchor="ctr"/>
-          <a:lstStyle/>
-          <a:p>
-            <a:pPr algn="ctr" indent="0" marL="0">
-              <a:lnSpc>
-                <a:spcPct val="100000"/>
-              </a:lnSpc>
-              <a:buNone/>
-            </a:pPr>
-            <a:r>
-              <a:rPr lang="en-US" sz="1600" b="1" dirty="0">
-                <a:solidFill>
-                  <a:srgbClr val="FFFFFF"/>
-                </a:solidFill>
-                <a:latin typeface="Calibri" pitchFamily="34" charset="0"/>
-                <a:ea typeface="Calibri" pitchFamily="34" charset="-122"/>
-                <a:cs typeface="Calibri" pitchFamily="34" charset="-120"/>
-              </a:rPr>
-              <a:t>c</a:t>
-            </a:r>
-            <a:endParaRPr lang="en-US" sz="1600" dirty="0"/>
-          </a:p>
-        </p:txBody>
-      </p:sp>
-      <p:sp>
-        <p:nvSpPr>
-          <p:cNvPr id="12" name="Text 10"/>
-          <p:cNvSpPr txBox="1"/>
-          <p:nvPr/>
-        </p:nvSpPr>
-        <p:spPr>
-          <a:xfrm>
-            <a:off x="1344168" y="2670048"/>
-            <a:ext cx="3044952" cy="676656"/>
-          </a:xfrm>
-          <a:prstGeom prst="rect">
-            <a:avLst/>
-          </a:prstGeom>
-          <a:noFill/>
-          <a:ln/>
-        </p:spPr>
-        <p:txBody>
-          <a:bodyPr wrap="square" lIns="25400" tIns="25400" rIns="25400" bIns="25400" rtlCol="0" anchor="ctr"/>
-          <a:lstStyle/>
-          <a:p>
-            <a:pPr algn="l" indent="0" marL="0">
-              <a:lnSpc>
-                <a:spcPct val="100000"/>
-              </a:lnSpc>
-              <a:buNone/>
-            </a:pPr>
-            <a:r>
-              <a:rPr lang="en-US" sz="1400" dirty="0">
-                <a:solidFill>
-                  <a:srgbClr val="5B6770"/>
-                </a:solidFill>
-                <a:latin typeface="Calibri" pitchFamily="34" charset="0"/>
-                <a:ea typeface="Calibri" pitchFamily="34" charset="-122"/>
-                <a:cs typeface="Calibri" pitchFamily="34" charset="-120"/>
-              </a:rPr>
-              <a:t>O mercado sempre vence no longo prazo</a:t>
-            </a:r>
-            <a:endParaRPr lang="en-US" sz="1400" dirty="0"/>
-          </a:p>
-        </p:txBody>
-      </p:sp>
-      <p:sp>
-        <p:nvSpPr>
-          <p:cNvPr id="13" name="Shape 11"/>
-          <p:cNvSpPr/>
-          <p:nvPr/>
-        </p:nvSpPr>
-        <p:spPr>
-          <a:xfrm>
-            <a:off x="4663440" y="2633472"/>
-            <a:ext cx="3794760" cy="749808"/>
-          </a:xfrm>
-          <a:prstGeom prst="roundRect">
-            <a:avLst>
-              <a:gd name="adj" fmla="val 9756"/>
-            </a:avLst>
-          </a:prstGeom>
-          <a:solidFill>
-            <a:srgbClr val="FFFFFF"/>
-          </a:solidFill>
-          <a:ln w="12700">
-            <a:solidFill>
-              <a:srgbClr val="DCD5C1"/>
-            </a:solidFill>
-            <a:prstDash val="solid"/>
-          </a:ln>
-        </p:spPr>
-      </p:sp>
-      <p:sp>
-        <p:nvSpPr>
-          <p:cNvPr id="14" name="Text 12"/>
-          <p:cNvSpPr txBox="1"/>
-          <p:nvPr/>
-        </p:nvSpPr>
-        <p:spPr>
-          <a:xfrm>
-            <a:off x="4791456" y="2798064"/>
-            <a:ext cx="420624" cy="420624"/>
-          </a:xfrm>
-          <a:prstGeom prst="roundRect">
-            <a:avLst>
-              <a:gd name="adj" fmla="val 50000"/>
-            </a:avLst>
-          </a:prstGeom>
-          <a:solidFill>
-            <a:srgbClr val="9AA3AB"/>
-          </a:solidFill>
-          <a:ln/>
-        </p:spPr>
-        <p:txBody>
-          <a:bodyPr wrap="square" lIns="0" tIns="0" rIns="0" bIns="0" rtlCol="0" anchor="ctr"/>
-          <a:lstStyle/>
-          <a:p>
-            <a:pPr algn="ctr" indent="0" marL="0">
-              <a:lnSpc>
-                <a:spcPct val="100000"/>
-              </a:lnSpc>
-              <a:buNone/>
-            </a:pPr>
-            <a:r>
-              <a:rPr lang="en-US" sz="1600" b="1" dirty="0">
-                <a:solidFill>
-                  <a:srgbClr val="FFFFFF"/>
-                </a:solidFill>
-                <a:latin typeface="Calibri" pitchFamily="34" charset="0"/>
-                <a:ea typeface="Calibri" pitchFamily="34" charset="-122"/>
-                <a:cs typeface="Calibri" pitchFamily="34" charset="-120"/>
-              </a:rPr>
-              <a:t>d</a:t>
-            </a:r>
-            <a:endParaRPr lang="en-US" sz="1600" dirty="0"/>
-          </a:p>
-        </p:txBody>
-      </p:sp>
-      <p:sp>
-        <p:nvSpPr>
-          <p:cNvPr id="15" name="Text 13"/>
-          <p:cNvSpPr txBox="1"/>
-          <p:nvPr/>
-        </p:nvSpPr>
-        <p:spPr>
-          <a:xfrm>
-            <a:off x="5321808" y="2670048"/>
-            <a:ext cx="3044952" cy="676656"/>
-          </a:xfrm>
-          <a:prstGeom prst="rect">
-            <a:avLst/>
-          </a:prstGeom>
-          <a:noFill/>
-          <a:ln/>
-        </p:spPr>
-        <p:txBody>
-          <a:bodyPr wrap="square" lIns="25400" tIns="25400" rIns="25400" bIns="25400" rtlCol="0" anchor="ctr"/>
-          <a:lstStyle/>
-          <a:p>
-            <a:pPr algn="l" indent="0" marL="0">
-              <a:lnSpc>
-                <a:spcPct val="100000"/>
-              </a:lnSpc>
-              <a:buNone/>
-            </a:pPr>
-            <a:r>
-              <a:rPr lang="en-US" sz="1400" dirty="0">
-                <a:solidFill>
-                  <a:srgbClr val="5B6770"/>
-                </a:solidFill>
-                <a:latin typeface="Calibri" pitchFamily="34" charset="0"/>
-                <a:ea typeface="Calibri" pitchFamily="34" charset="-122"/>
-                <a:cs typeface="Calibri" pitchFamily="34" charset="-120"/>
-              </a:rPr>
-              <a:t>Depende apenas do resultado das eleições</a:t>
-            </a:r>
-            <a:endParaRPr lang="en-US" sz="1400" dirty="0"/>
-          </a:p>
-        </p:txBody>
-      </p:sp>
-      <p:sp>
-        <p:nvSpPr>
-          <p:cNvPr id="16" name="Text 14"/>
-          <p:cNvSpPr txBox="1"/>
-          <p:nvPr/>
-        </p:nvSpPr>
-        <p:spPr>
-          <a:xfrm>
-            <a:off x="685800" y="3566160"/>
-            <a:ext cx="7772400" cy="841248"/>
-          </a:xfrm>
-          <a:prstGeom prst="roundRect">
-            <a:avLst>
-              <a:gd name="adj" fmla="val 8696"/>
-            </a:avLst>
-          </a:prstGeom>
-          <a:solidFill>
-            <a:srgbClr val="E6F2F0"/>
-          </a:solidFill>
-          <a:ln/>
-        </p:spPr>
-        <p:txBody>
-          <a:bodyPr wrap="square" lIns="114300" tIns="114300" rIns="114300" bIns="114300" rtlCol="0" anchor="ctr"/>
-          <a:lstStyle/>
-          <a:p>
-            <a:pPr algn="l" indent="0" marL="0">
-              <a:lnSpc>
-                <a:spcPct val="100000"/>
-              </a:lnSpc>
-              <a:buNone/>
-            </a:pPr>
-            <a:r>
-              <a:rPr lang="en-US" sz="1350" b="1" dirty="0">
-                <a:solidFill>
-                  <a:srgbClr val="2E7D4F"/>
-                </a:solidFill>
-                <a:latin typeface="Calibri" pitchFamily="34" charset="0"/>
-                <a:ea typeface="Calibri" pitchFamily="34" charset="-122"/>
-                <a:cs typeface="Calibri" pitchFamily="34" charset="-120"/>
-              </a:rPr>
-              <a:t>Resposta: a) </a:t>
-            </a:r>
-            <a:pPr algn="l" indent="0" marL="0">
-              <a:lnSpc>
-                <a:spcPct val="100000"/>
-              </a:lnSpc>
-              <a:buNone/>
-            </a:pPr>
-            <a:r>
-              <a:rPr lang="en-US" sz="1350" dirty="0">
-                <a:solidFill>
-                  <a:srgbClr val="1F2A37"/>
-                </a:solidFill>
-                <a:latin typeface="Calibri" pitchFamily="34" charset="0"/>
-                <a:ea typeface="Calibri" pitchFamily="34" charset="-122"/>
-                <a:cs typeface="Calibri" pitchFamily="34" charset="-120"/>
-              </a:rPr>
-              <a:t>Falhas de mercado (crises, desigualdade) pedem mais Estado; falhas de governo (crise fiscal, ineficiência) pedem mais mercado.</a:t>
-            </a:r>
-            <a:endParaRPr lang="en-US" sz="1350" dirty="0"/>
-          </a:p>
-        </p:txBody>
-      </p:sp>
-      <p:sp>
-        <p:nvSpPr>
-          <p:cNvPr id="17" name="Text 15"/>
-          <p:cNvSpPr txBox="1"/>
-          <p:nvPr/>
-        </p:nvSpPr>
-        <p:spPr>
-          <a:xfrm>
-            <a:off x="4206240" y="36576"/>
-            <a:ext cx="4800600" cy="219456"/>
-          </a:xfrm>
-          <a:prstGeom prst="rect">
-            <a:avLst/>
-          </a:prstGeom>
-          <a:noFill/>
-          <a:ln/>
-        </p:spPr>
-        <p:txBody>
-          <a:bodyPr wrap="square" lIns="0" tIns="0" rIns="0" bIns="0" rtlCol="0" anchor="ctr"/>
-          <a:lstStyle/>
-          <a:p>
-            <a:pPr algn="r" indent="0" marL="0">
-              <a:lnSpc>
-                <a:spcPct val="100000"/>
-              </a:lnSpc>
-              <a:buNone/>
-            </a:pPr>
-            <a:r>
-              <a:rPr lang="en-US" sz="950" dirty="0">
-                <a:solidFill>
-                  <a:srgbClr val="5B6770"/>
-                </a:solidFill>
-                <a:latin typeface="Calibri" pitchFamily="34" charset="0"/>
-                <a:ea typeface="Calibri" pitchFamily="34" charset="-122"/>
-                <a:cs typeface="Calibri" pitchFamily="34" charset="-120"/>
-              </a:rPr>
-              <a:t>Estado, Governo e Mercado · Unidade 2</a:t>
-            </a:r>
-            <a:endParaRPr lang="en-US" sz="950" dirty="0"/>
-          </a:p>
-        </p:txBody>
-      </p:sp>
-    </p:spTree>
-  </p:cSld>
-  <p:clrMapOvr>
-    <a:masterClrMapping/>
-  </p:clrMapOvr>
-</p:sld>
-</file>
-
-<file path=ppt/slides/slide31.xml><?xml version="1.0" encoding="utf-8"?>
-<p:sld xmlns:a="http://schemas.openxmlformats.org/drawingml/2006/main" xmlns:r="http://schemas.openxmlformats.org/officeDocument/2006/relationships" xmlns:p="http://schemas.openxmlformats.org/presentationml/2006/main">
-  <p:cSld name="Slide 31">
-    <p:bg>
-      <p:bgPr>
-        <a:blipFill dpi="0" rotWithShape="1">
-          <a:blip r:embed="rId1">
-            <a:lum/>
-          </a:blip>
-          <a:srcRect/>
-          <a:stretch>
-            <a:fillRect/>
-          </a:stretch>
-        </a:blipFill>
-        <a:effectLst/>
-      </p:bgPr>
-    </p:bg>
-    <p:spTree>
-      <p:nvGrpSpPr>
-        <p:cNvPr id="1" name=""/>
-        <p:cNvGrpSpPr/>
-        <p:nvPr/>
-      </p:nvGrpSpPr>
-      <p:grpSpPr>
-        <a:xfrm>
-          <a:off x="0" y="0"/>
-          <a:ext cx="0" cy="0"/>
-          <a:chOff x="0" y="0"/>
-          <a:chExt cx="0" cy="0"/>
-        </a:xfrm>
-      </p:grpSpPr>
-      <p:sp>
-        <p:nvSpPr>
-          <p:cNvPr id="2" name="Text 0"/>
-          <p:cNvSpPr txBox="1"/>
-          <p:nvPr/>
-        </p:nvSpPr>
-        <p:spPr>
-          <a:xfrm>
-            <a:off x="731520" y="256032"/>
-            <a:ext cx="7680960" cy="566928"/>
-          </a:xfrm>
-          <a:prstGeom prst="rect">
-            <a:avLst/>
-          </a:prstGeom>
-          <a:noFill/>
-          <a:ln/>
-        </p:spPr>
-        <p:txBody>
-          <a:bodyPr wrap="square" lIns="0" tIns="0" rIns="0" bIns="0" rtlCol="0" anchor="ctr"/>
-          <a:lstStyle/>
-          <a:p>
-            <a:pPr algn="ctr" indent="0" marL="0">
-              <a:lnSpc>
-                <a:spcPct val="100000"/>
-              </a:lnSpc>
-              <a:buNone/>
-            </a:pPr>
-            <a:r>
-              <a:rPr lang="en-US" sz="2800" b="1" dirty="0">
-                <a:solidFill>
-                  <a:srgbClr val="13294B"/>
-                </a:solidFill>
-                <a:latin typeface="Calibri" pitchFamily="34" charset="0"/>
-                <a:ea typeface="Calibri" pitchFamily="34" charset="-122"/>
-                <a:cs typeface="Calibri" pitchFamily="34" charset="-120"/>
-              </a:rPr>
-              <a:t>Resumo da Unidade 2</a:t>
-            </a:r>
-            <a:endParaRPr lang="en-US" sz="2800" dirty="0"/>
-          </a:p>
-        </p:txBody>
-      </p:sp>
-      <p:sp>
-        <p:nvSpPr>
-          <p:cNvPr id="3" name="Text 1"/>
-          <p:cNvSpPr txBox="1"/>
-          <p:nvPr/>
-        </p:nvSpPr>
-        <p:spPr>
-          <a:xfrm>
-            <a:off x="1005840" y="804672"/>
-            <a:ext cx="7132320" cy="329184"/>
-          </a:xfrm>
-          <a:prstGeom prst="rect">
-            <a:avLst/>
-          </a:prstGeom>
-          <a:noFill/>
-          <a:ln/>
-        </p:spPr>
-        <p:txBody>
-          <a:bodyPr wrap="square" lIns="0" tIns="0" rIns="0" bIns="0" rtlCol="0" anchor="ctr"/>
-          <a:lstStyle/>
-          <a:p>
-            <a:pPr algn="ctr" indent="0" marL="0">
-              <a:lnSpc>
-                <a:spcPct val="100000"/>
-              </a:lnSpc>
-              <a:buNone/>
-            </a:pPr>
-            <a:r>
-              <a:rPr lang="en-US" sz="1400" dirty="0">
-                <a:solidFill>
-                  <a:srgbClr val="5B6770"/>
-                </a:solidFill>
-                <a:latin typeface="Calibri" pitchFamily="34" charset="0"/>
-                <a:ea typeface="Calibri" pitchFamily="34" charset="-122"/>
-                <a:cs typeface="Calibri" pitchFamily="34" charset="-120"/>
-              </a:rPr>
-              <a:t>O que discutimos nesta unidade</a:t>
-            </a:r>
-            <a:endParaRPr lang="en-US" sz="1400" dirty="0"/>
-          </a:p>
-        </p:txBody>
-      </p:sp>
-      <p:sp>
-        <p:nvSpPr>
-          <p:cNvPr id="4" name="Text 2"/>
-          <p:cNvSpPr txBox="1"/>
-          <p:nvPr/>
-        </p:nvSpPr>
-        <p:spPr>
-          <a:xfrm>
-            <a:off x="685800" y="1170432"/>
-            <a:ext cx="3794760" cy="2743200"/>
-          </a:xfrm>
-          <a:prstGeom prst="roundRect">
-            <a:avLst>
-              <a:gd name="adj" fmla="val 2000"/>
-            </a:avLst>
-          </a:prstGeom>
-          <a:solidFill>
-            <a:srgbClr val="FFFFFF"/>
-          </a:solidFill>
-          <a:ln w="12700">
-            <a:solidFill>
-              <a:srgbClr val="DCD5C1"/>
-            </a:solidFill>
-          </a:ln>
-        </p:spPr>
-        <p:txBody>
-          <a:bodyPr wrap="square" lIns="114300" tIns="114300" rIns="114300" bIns="114300" rtlCol="0" anchor="t"/>
-          <a:lstStyle/>
-          <a:p>
-            <a:pPr algn="l" indent="0" marL="0">
-              <a:lnSpc>
-                <a:spcPct val="100000"/>
-              </a:lnSpc>
-              <a:spcAft>
-                <a:spcPts val="200"/>
-              </a:spcAft>
-              <a:buNone/>
-            </a:pPr>
-            <a:r>
-              <a:rPr lang="en-US" sz="1100" b="1" dirty="0">
-                <a:solidFill>
-                  <a:srgbClr val="2A8C85"/>
-                </a:solidFill>
-                <a:latin typeface="Calibri" pitchFamily="34" charset="0"/>
-                <a:ea typeface="Calibri" pitchFamily="34" charset="-122"/>
-                <a:cs typeface="Calibri" pitchFamily="34" charset="-120"/>
-              </a:rPr>
-              <a:t>PARTE 1 · TÓPICO 3</a:t>
-            </a:r>
-            <a:endParaRPr lang="en-US" sz="1100" dirty="0"/>
-          </a:p>
-          <a:p>
-            <a:pPr algn="l" indent="0" marL="0">
-              <a:lnSpc>
-                <a:spcPct val="100000"/>
-              </a:lnSpc>
-              <a:spcAft>
-                <a:spcPts val="400"/>
-              </a:spcAft>
-              <a:buNone/>
-            </a:pPr>
-            <a:r>
-              <a:rPr lang="en-US" sz="1450" b="1" dirty="0">
-                <a:solidFill>
-                  <a:srgbClr val="13294B"/>
-                </a:solidFill>
-                <a:latin typeface="Calibri" pitchFamily="34" charset="0"/>
-                <a:ea typeface="Calibri" pitchFamily="34" charset="-122"/>
-                <a:cs typeface="Calibri" pitchFamily="34" charset="-120"/>
-              </a:rPr>
-              <a:t>A dinâmica pendular</a:t>
-            </a:r>
-            <a:endParaRPr lang="en-US" sz="1100" dirty="0"/>
-          </a:p>
-          <a:p>
-            <a:pPr algn="l" marL="177800" indent="-177800">
-              <a:lnSpc>
-                <a:spcPct val="100000"/>
-              </a:lnSpc>
-              <a:spcAft>
-                <a:spcPts val="300"/>
-              </a:spcAft>
-              <a:buSzPct val="100000"/>
-              <a:buChar char="•"/>
-            </a:pPr>
-            <a:r>
-              <a:rPr lang="en-US" sz="1200" dirty="0">
-                <a:solidFill>
-                  <a:srgbClr val="1F2A37"/>
-                </a:solidFill>
-                <a:latin typeface="Calibri" pitchFamily="34" charset="0"/>
-                <a:ea typeface="Calibri" pitchFamily="34" charset="-122"/>
-                <a:cs typeface="Calibri" pitchFamily="34" charset="-120"/>
-              </a:rPr>
-              <a:t>Ora mais mercado, ora mais Estado: cada extremo gera problemas que impulsionam a volta.</a:t>
-            </a:r>
-            <a:endParaRPr lang="en-US" sz="1100" dirty="0"/>
-          </a:p>
-          <a:p>
-            <a:pPr algn="l" marL="177800" indent="-177800">
-              <a:lnSpc>
-                <a:spcPct val="100000"/>
-              </a:lnSpc>
-              <a:spcAft>
-                <a:spcPts val="300"/>
-              </a:spcAft>
-              <a:buSzPct val="100000"/>
-              <a:buChar char="•"/>
-            </a:pPr>
-            <a:r>
-              <a:rPr lang="en-US" sz="1200" dirty="0">
-                <a:solidFill>
-                  <a:srgbClr val="1F2A37"/>
-                </a:solidFill>
-                <a:latin typeface="Calibri" pitchFamily="34" charset="0"/>
-                <a:ea typeface="Calibri" pitchFamily="34" charset="-122"/>
-                <a:cs typeface="Calibri" pitchFamily="34" charset="-120"/>
-              </a:rPr>
-              <a:t>Marcos: liberalismo, 1929, anos dourados, estagflação, neoliberalismo, 2008 e 2020.</a:t>
-            </a:r>
-            <a:endParaRPr lang="en-US" sz="1100" dirty="0"/>
-          </a:p>
-          <a:p>
-            <a:pPr algn="l" marL="177800" indent="-177800">
-              <a:lnSpc>
-                <a:spcPct val="100000"/>
-              </a:lnSpc>
-              <a:spcAft>
-                <a:spcPts val="300"/>
-              </a:spcAft>
-              <a:buSzPct val="100000"/>
-              <a:buChar char="•"/>
-            </a:pPr>
-            <a:r>
-              <a:rPr lang="en-US" sz="1200" dirty="0">
-                <a:solidFill>
-                  <a:srgbClr val="1F2A37"/>
-                </a:solidFill>
-                <a:latin typeface="Calibri" pitchFamily="34" charset="0"/>
-                <a:ea typeface="Calibri" pitchFamily="34" charset="-122"/>
-                <a:cs typeface="Calibri" pitchFamily="34" charset="-120"/>
-              </a:rPr>
-              <a:t>No Brasil: desenvolvimentismo, reformas dos anos 1990 e combinação a partir de 2003.</a:t>
-            </a:r>
-            <a:endParaRPr lang="en-US" sz="1100" dirty="0"/>
-          </a:p>
-          <a:p>
-            <a:pPr algn="l" marL="177800" indent="-177800">
-              <a:lnSpc>
-                <a:spcPct val="100000"/>
-              </a:lnSpc>
-              <a:spcAft>
-                <a:spcPts val="300"/>
-              </a:spcAft>
-              <a:buSzPct val="100000"/>
-              <a:buChar char="•"/>
-            </a:pPr>
-            <a:r>
-              <a:rPr lang="en-US" sz="1200" dirty="0">
-                <a:solidFill>
-                  <a:srgbClr val="1F2A37"/>
-                </a:solidFill>
-                <a:latin typeface="Calibri" pitchFamily="34" charset="0"/>
-                <a:ea typeface="Calibri" pitchFamily="34" charset="-122"/>
-                <a:cs typeface="Calibri" pitchFamily="34" charset="-120"/>
-              </a:rPr>
-              <a:t>A pergunta atual: que Estado e que mercado?</a:t>
-            </a:r>
-            <a:endParaRPr lang="en-US" sz="1100" dirty="0"/>
-          </a:p>
-        </p:txBody>
-      </p:sp>
-      <p:sp>
-        <p:nvSpPr>
-          <p:cNvPr id="5" name="Text 3"/>
-          <p:cNvSpPr txBox="1"/>
-          <p:nvPr/>
-        </p:nvSpPr>
-        <p:spPr>
-          <a:xfrm>
-            <a:off x="4663440" y="1170432"/>
-            <a:ext cx="3794760" cy="2743200"/>
-          </a:xfrm>
-          <a:prstGeom prst="roundRect">
-            <a:avLst>
-              <a:gd name="adj" fmla="val 2000"/>
-            </a:avLst>
-          </a:prstGeom>
-          <a:solidFill>
-            <a:srgbClr val="E6F2F0"/>
-          </a:solidFill>
-          <a:ln/>
-        </p:spPr>
-        <p:txBody>
-          <a:bodyPr wrap="square" lIns="114300" tIns="114300" rIns="114300" bIns="114300" rtlCol="0" anchor="t"/>
-          <a:lstStyle/>
-          <a:p>
-            <a:pPr algn="l" indent="0" marL="0">
-              <a:lnSpc>
-                <a:spcPct val="100000"/>
-              </a:lnSpc>
-              <a:spcAft>
-                <a:spcPts val="200"/>
-              </a:spcAft>
-              <a:buNone/>
-            </a:pPr>
-            <a:r>
-              <a:rPr lang="en-US" sz="1100" b="1" dirty="0">
-                <a:solidFill>
-                  <a:srgbClr val="2A8C85"/>
-                </a:solidFill>
-                <a:latin typeface="Calibri" pitchFamily="34" charset="0"/>
-                <a:ea typeface="Calibri" pitchFamily="34" charset="-122"/>
-                <a:cs typeface="Calibri" pitchFamily="34" charset="-120"/>
-              </a:rPr>
-              <a:t>PARTE 2 · TÓPICO 4</a:t>
-            </a:r>
-            <a:endParaRPr lang="en-US" sz="1100" dirty="0"/>
-          </a:p>
-          <a:p>
-            <a:pPr algn="l" indent="0" marL="0">
-              <a:lnSpc>
-                <a:spcPct val="100000"/>
-              </a:lnSpc>
-              <a:spcAft>
-                <a:spcPts val="400"/>
-              </a:spcAft>
-              <a:buNone/>
-            </a:pPr>
-            <a:r>
-              <a:rPr lang="en-US" sz="1450" b="1" dirty="0">
-                <a:solidFill>
-                  <a:srgbClr val="13294B"/>
-                </a:solidFill>
-                <a:latin typeface="Calibri" pitchFamily="34" charset="0"/>
-                <a:ea typeface="Calibri" pitchFamily="34" charset="-122"/>
-                <a:cs typeface="Calibri" pitchFamily="34" charset="-120"/>
-              </a:rPr>
-              <a:t>A matriz liberal</a:t>
-            </a:r>
-            <a:endParaRPr lang="en-US" sz="1100" dirty="0"/>
-          </a:p>
-          <a:p>
-            <a:pPr algn="l" marL="177800" indent="-177800">
-              <a:lnSpc>
-                <a:spcPct val="100000"/>
-              </a:lnSpc>
-              <a:spcAft>
-                <a:spcPts val="300"/>
-              </a:spcAft>
-              <a:buSzPct val="100000"/>
-              <a:buChar char="•"/>
-            </a:pPr>
-            <a:r>
-              <a:rPr lang="en-US" sz="1200" dirty="0">
-                <a:solidFill>
-                  <a:srgbClr val="1F2A37"/>
-                </a:solidFill>
-                <a:latin typeface="Calibri" pitchFamily="34" charset="0"/>
-                <a:ea typeface="Calibri" pitchFamily="34" charset="-122"/>
-                <a:cs typeface="Calibri" pitchFamily="34" charset="-120"/>
-              </a:rPr>
-              <a:t>Reação ao absolutismo e ao mercantilismo.</a:t>
-            </a:r>
-            <a:endParaRPr lang="en-US" sz="1100" dirty="0"/>
-          </a:p>
-          <a:p>
-            <a:pPr algn="l" marL="177800" indent="-177800">
-              <a:lnSpc>
-                <a:spcPct val="100000"/>
-              </a:lnSpc>
-              <a:spcAft>
-                <a:spcPts val="300"/>
-              </a:spcAft>
-              <a:buSzPct val="100000"/>
-              <a:buChar char="•"/>
-            </a:pPr>
-            <a:r>
-              <a:rPr lang="en-US" sz="1200" dirty="0">
-                <a:solidFill>
-                  <a:srgbClr val="1F2A37"/>
-                </a:solidFill>
-                <a:latin typeface="Calibri" pitchFamily="34" charset="0"/>
-                <a:ea typeface="Calibri" pitchFamily="34" charset="-122"/>
-                <a:cs typeface="Calibri" pitchFamily="34" charset="-120"/>
-              </a:rPr>
-              <a:t>Locke: direitos naturais e governo limitado; Montesquieu: separação dos poderes.</a:t>
-            </a:r>
-            <a:endParaRPr lang="en-US" sz="1100" dirty="0"/>
-          </a:p>
-          <a:p>
-            <a:pPr algn="l" marL="177800" indent="-177800">
-              <a:lnSpc>
-                <a:spcPct val="100000"/>
-              </a:lnSpc>
-              <a:spcAft>
-                <a:spcPts val="300"/>
-              </a:spcAft>
-              <a:buSzPct val="100000"/>
-              <a:buChar char="•"/>
-            </a:pPr>
-            <a:r>
-              <a:rPr lang="en-US" sz="1200" dirty="0">
-                <a:solidFill>
-                  <a:srgbClr val="1F2A37"/>
-                </a:solidFill>
-                <a:latin typeface="Calibri" pitchFamily="34" charset="0"/>
-                <a:ea typeface="Calibri" pitchFamily="34" charset="-122"/>
-                <a:cs typeface="Calibri" pitchFamily="34" charset="-120"/>
-              </a:rPr>
-              <a:t>Smith: trabalho, divisão do trabalho, mão invisível e os três deveres do Estado mínimo.</a:t>
-            </a:r>
-            <a:endParaRPr lang="en-US" sz="1100" dirty="0"/>
-          </a:p>
-          <a:p>
-            <a:pPr algn="l" marL="177800" indent="-177800">
-              <a:lnSpc>
-                <a:spcPct val="100000"/>
-              </a:lnSpc>
-              <a:spcAft>
-                <a:spcPts val="300"/>
-              </a:spcAft>
-              <a:buSzPct val="100000"/>
-              <a:buChar char="•"/>
-            </a:pPr>
-            <a:r>
-              <a:rPr lang="en-US" sz="1200" dirty="0">
-                <a:solidFill>
-                  <a:srgbClr val="1F2A37"/>
-                </a:solidFill>
-                <a:latin typeface="Calibri" pitchFamily="34" charset="0"/>
-                <a:ea typeface="Calibri" pitchFamily="34" charset="-122"/>
-                <a:cs typeface="Calibri" pitchFamily="34" charset="-120"/>
-              </a:rPr>
-              <a:t>Ricardo (livre comércio) e Say (a oferta cria a procura).</a:t>
-            </a:r>
-            <a:endParaRPr lang="en-US" sz="1100" dirty="0"/>
-          </a:p>
-          <a:p>
-            <a:pPr algn="l" marL="177800" indent="-177800">
-              <a:lnSpc>
-                <a:spcPct val="100000"/>
-              </a:lnSpc>
-              <a:spcAft>
-                <a:spcPts val="300"/>
-              </a:spcAft>
-              <a:buSzPct val="100000"/>
-              <a:buChar char="•"/>
-            </a:pPr>
-            <a:r>
-              <a:rPr lang="en-US" sz="1200" dirty="0">
-                <a:solidFill>
-                  <a:srgbClr val="1F2A37"/>
-                </a:solidFill>
-                <a:latin typeface="Calibri" pitchFamily="34" charset="0"/>
-                <a:ea typeface="Calibri" pitchFamily="34" charset="-122"/>
-                <a:cs typeface="Calibri" pitchFamily="34" charset="-120"/>
-              </a:rPr>
-              <a:t>Limites do Estado mínimo no século XIX.</a:t>
-            </a:r>
-            <a:endParaRPr lang="en-US" sz="1100" dirty="0"/>
-          </a:p>
-        </p:txBody>
-      </p:sp>
-      <p:sp>
-        <p:nvSpPr>
-          <p:cNvPr id="6" name="Text 4"/>
-          <p:cNvSpPr txBox="1"/>
-          <p:nvPr/>
-        </p:nvSpPr>
-        <p:spPr>
-          <a:xfrm>
-            <a:off x="685800" y="3995928"/>
-            <a:ext cx="7772400" cy="484632"/>
-          </a:xfrm>
-          <a:prstGeom prst="roundRect">
-            <a:avLst>
-              <a:gd name="adj" fmla="val 15094"/>
-            </a:avLst>
-          </a:prstGeom>
-          <a:solidFill>
-            <a:srgbClr val="E6F2F0"/>
-          </a:solidFill>
-          <a:ln/>
-        </p:spPr>
-        <p:txBody>
-          <a:bodyPr wrap="square" lIns="127000" tIns="127000" rIns="127000" bIns="127000" rtlCol="0" anchor="ctr"/>
-          <a:lstStyle/>
-          <a:p>
-            <a:pPr algn="ctr" indent="0" marL="0">
-              <a:lnSpc>
-                <a:spcPct val="100000"/>
-              </a:lnSpc>
-              <a:buNone/>
-            </a:pPr>
-            <a:r>
-              <a:rPr lang="en-US" sz="1300" b="1" dirty="0">
-                <a:solidFill>
-                  <a:srgbClr val="13294B"/>
-                </a:solidFill>
-                <a:latin typeface="Calibri" pitchFamily="34" charset="0"/>
-                <a:ea typeface="Calibri" pitchFamily="34" charset="-122"/>
-                <a:cs typeface="Calibri" pitchFamily="34" charset="-120"/>
-              </a:rPr>
-              <a:t>Próxima unidade: a matriz marxista e as mudanças do final do século XIX.</a:t>
-            </a:r>
-            <a:endParaRPr lang="en-US" sz="1300" dirty="0"/>
-          </a:p>
-        </p:txBody>
-      </p:sp>
-      <p:sp>
-        <p:nvSpPr>
-          <p:cNvPr id="7" name="Text 5"/>
-          <p:cNvSpPr txBox="1"/>
-          <p:nvPr/>
-        </p:nvSpPr>
-        <p:spPr>
-          <a:xfrm>
-            <a:off x="4206240" y="36576"/>
-            <a:ext cx="4800600" cy="219456"/>
-          </a:xfrm>
-          <a:prstGeom prst="rect">
-            <a:avLst/>
-          </a:prstGeom>
-          <a:noFill/>
-          <a:ln/>
-        </p:spPr>
-        <p:txBody>
-          <a:bodyPr wrap="square" lIns="0" tIns="0" rIns="0" bIns="0" rtlCol="0" anchor="ctr"/>
-          <a:lstStyle/>
-          <a:p>
-            <a:pPr algn="r" indent="0" marL="0">
-              <a:lnSpc>
-                <a:spcPct val="100000"/>
-              </a:lnSpc>
-              <a:buNone/>
-            </a:pPr>
-            <a:r>
-              <a:rPr lang="en-US" sz="950" dirty="0">
-                <a:solidFill>
-                  <a:srgbClr val="5B6770"/>
-                </a:solidFill>
-                <a:latin typeface="Calibri" pitchFamily="34" charset="0"/>
-                <a:ea typeface="Calibri" pitchFamily="34" charset="-122"/>
-                <a:cs typeface="Calibri" pitchFamily="34" charset="-120"/>
-              </a:rPr>
-              <a:t>Estado, Governo e Mercado · Unidade 2</a:t>
             </a:r>
             <a:endParaRPr lang="en-US" sz="950" dirty="0"/>
           </a:p>
